--- a/input/AI Transformation framework for European CEO’s.pptx
+++ b/input/AI Transformation framework for European CEO’s.pptx
@@ -5,10 +5,12 @@
     <p:sldMasterId id="2147483648" r:id="rId1"/>
   </p:sldMasterIdLst>
   <p:notesMasterIdLst>
-    <p:notesMasterId r:id="rId3"/>
+    <p:notesMasterId r:id="rId5"/>
   </p:notesMasterIdLst>
   <p:sldIdLst>
     <p:sldId id="2147480366" r:id="rId2"/>
+    <p:sldId id="2147480367" r:id="rId3"/>
+    <p:sldId id="2147480368" r:id="rId4"/>
   </p:sldIdLst>
   <p:sldSz cx="12192000" cy="6858000"/>
   <p:notesSz cx="6858000" cy="9144000"/>
@@ -668,6 +670,222 @@
     <p:extLst>
       <p:ext uri="{BB962C8B-B14F-4D97-AF65-F5344CB8AC3E}">
         <p14:creationId xmlns:p14="http://schemas.microsoft.com/office/powerpoint/2010/main" val="985529434"/>
+      </p:ext>
+    </p:extLst>
+  </p:cSld>
+  <p:clrMapOvr>
+    <a:masterClrMapping/>
+  </p:clrMapOvr>
+</p:notes>
+</file>
+
+<file path=ppt/notesSlides/notesSlide2.xml><?xml version="1.0" encoding="utf-8"?>
+<p:notes xmlns:a="http://schemas.openxmlformats.org/drawingml/2006/main" xmlns:r="http://schemas.openxmlformats.org/officeDocument/2006/relationships" xmlns:p="http://schemas.openxmlformats.org/presentationml/2006/main">
+  <p:cSld>
+    <p:spTree>
+      <p:nvGrpSpPr>
+        <p:cNvPr id="1" name="">
+          <a:extLst>
+            <a:ext uri="{FF2B5EF4-FFF2-40B4-BE49-F238E27FC236}">
+              <a16:creationId xmlns:a16="http://schemas.microsoft.com/office/drawing/2014/main" id="{2243DBEA-249C-C242-148C-48F701862517}"/>
+            </a:ext>
+          </a:extLst>
+        </p:cNvPr>
+        <p:cNvGrpSpPr/>
+        <p:nvPr/>
+      </p:nvGrpSpPr>
+      <p:grpSpPr>
+        <a:xfrm>
+          <a:off x="0" y="0"/>
+          <a:ext cx="0" cy="0"/>
+          <a:chOff x="0" y="0"/>
+          <a:chExt cx="0" cy="0"/>
+        </a:xfrm>
+      </p:grpSpPr>
+      <p:sp>
+        <p:nvSpPr>
+          <p:cNvPr id="2" name="Slide Image Placeholder 1">
+            <a:extLst>
+              <a:ext uri="{FF2B5EF4-FFF2-40B4-BE49-F238E27FC236}">
+                <a16:creationId xmlns:a16="http://schemas.microsoft.com/office/drawing/2014/main" id="{15F22EEB-C303-C2A5-8D9D-1A69098FCD3C}"/>
+              </a:ext>
+            </a:extLst>
+          </p:cNvPr>
+          <p:cNvSpPr>
+            <a:spLocks noGrp="1" noRot="1" noChangeAspect="1"/>
+          </p:cNvSpPr>
+          <p:nvPr>
+            <p:ph type="sldImg"/>
+          </p:nvPr>
+        </p:nvSpPr>
+        <p:spPr/>
+      </p:sp>
+      <p:sp>
+        <p:nvSpPr>
+          <p:cNvPr id="3" name="Notes Placeholder 2">
+            <a:extLst>
+              <a:ext uri="{FF2B5EF4-FFF2-40B4-BE49-F238E27FC236}">
+                <a16:creationId xmlns:a16="http://schemas.microsoft.com/office/drawing/2014/main" id="{B3854394-2E02-F59C-3637-C4FD90296000}"/>
+              </a:ext>
+            </a:extLst>
+          </p:cNvPr>
+          <p:cNvSpPr>
+            <a:spLocks noGrp="1"/>
+          </p:cNvSpPr>
+          <p:nvPr>
+            <p:ph type="body" idx="1"/>
+          </p:nvPr>
+        </p:nvSpPr>
+        <p:spPr/>
+        <p:txBody>
+          <a:bodyPr/>
+          <a:lstStyle/>
+          <a:p>
+            <a:endParaRPr lang="en-GB"/>
+          </a:p>
+        </p:txBody>
+      </p:sp>
+      <p:sp>
+        <p:nvSpPr>
+          <p:cNvPr id="4" name="Slide Number Placeholder 3">
+            <a:extLst>
+              <a:ext uri="{FF2B5EF4-FFF2-40B4-BE49-F238E27FC236}">
+                <a16:creationId xmlns:a16="http://schemas.microsoft.com/office/drawing/2014/main" id="{98D901B4-4B31-A81F-86D7-37D4F9F19EA1}"/>
+              </a:ext>
+            </a:extLst>
+          </p:cNvPr>
+          <p:cNvSpPr>
+            <a:spLocks noGrp="1"/>
+          </p:cNvSpPr>
+          <p:nvPr>
+            <p:ph type="sldNum" sz="quarter" idx="5"/>
+          </p:nvPr>
+        </p:nvSpPr>
+        <p:spPr/>
+        <p:txBody>
+          <a:bodyPr/>
+          <a:lstStyle/>
+          <a:p>
+            <a:fld id="{BA1AFD66-2597-4960-86E3-D00E2B43A69D}" type="slidenum">
+              <a:rPr lang="en-GB" smtClean="0"/>
+              <a:t>2</a:t>
+            </a:fld>
+            <a:endParaRPr lang="en-GB"/>
+          </a:p>
+        </p:txBody>
+      </p:sp>
+    </p:spTree>
+    <p:extLst>
+      <p:ext uri="{BB962C8B-B14F-4D97-AF65-F5344CB8AC3E}">
+        <p14:creationId xmlns:p14="http://schemas.microsoft.com/office/powerpoint/2010/main" val="2171862513"/>
+      </p:ext>
+    </p:extLst>
+  </p:cSld>
+  <p:clrMapOvr>
+    <a:masterClrMapping/>
+  </p:clrMapOvr>
+</p:notes>
+</file>
+
+<file path=ppt/notesSlides/notesSlide3.xml><?xml version="1.0" encoding="utf-8"?>
+<p:notes xmlns:a="http://schemas.openxmlformats.org/drawingml/2006/main" xmlns:r="http://schemas.openxmlformats.org/officeDocument/2006/relationships" xmlns:p="http://schemas.openxmlformats.org/presentationml/2006/main">
+  <p:cSld>
+    <p:spTree>
+      <p:nvGrpSpPr>
+        <p:cNvPr id="1" name="">
+          <a:extLst>
+            <a:ext uri="{FF2B5EF4-FFF2-40B4-BE49-F238E27FC236}">
+              <a16:creationId xmlns:a16="http://schemas.microsoft.com/office/drawing/2014/main" id="{2215450A-C4D7-1430-C644-50F3F198E548}"/>
+            </a:ext>
+          </a:extLst>
+        </p:cNvPr>
+        <p:cNvGrpSpPr/>
+        <p:nvPr/>
+      </p:nvGrpSpPr>
+      <p:grpSpPr>
+        <a:xfrm>
+          <a:off x="0" y="0"/>
+          <a:ext cx="0" cy="0"/>
+          <a:chOff x="0" y="0"/>
+          <a:chExt cx="0" cy="0"/>
+        </a:xfrm>
+      </p:grpSpPr>
+      <p:sp>
+        <p:nvSpPr>
+          <p:cNvPr id="2" name="Slide Image Placeholder 1">
+            <a:extLst>
+              <a:ext uri="{FF2B5EF4-FFF2-40B4-BE49-F238E27FC236}">
+                <a16:creationId xmlns:a16="http://schemas.microsoft.com/office/drawing/2014/main" id="{ED792276-1454-3270-B3A5-C743FFF3DAB5}"/>
+              </a:ext>
+            </a:extLst>
+          </p:cNvPr>
+          <p:cNvSpPr>
+            <a:spLocks noGrp="1" noRot="1" noChangeAspect="1"/>
+          </p:cNvSpPr>
+          <p:nvPr>
+            <p:ph type="sldImg"/>
+          </p:nvPr>
+        </p:nvSpPr>
+        <p:spPr/>
+      </p:sp>
+      <p:sp>
+        <p:nvSpPr>
+          <p:cNvPr id="3" name="Notes Placeholder 2">
+            <a:extLst>
+              <a:ext uri="{FF2B5EF4-FFF2-40B4-BE49-F238E27FC236}">
+                <a16:creationId xmlns:a16="http://schemas.microsoft.com/office/drawing/2014/main" id="{6B3543F5-304A-1D65-0A71-730E5FE78022}"/>
+              </a:ext>
+            </a:extLst>
+          </p:cNvPr>
+          <p:cNvSpPr>
+            <a:spLocks noGrp="1"/>
+          </p:cNvSpPr>
+          <p:nvPr>
+            <p:ph type="body" idx="1"/>
+          </p:nvPr>
+        </p:nvSpPr>
+        <p:spPr/>
+        <p:txBody>
+          <a:bodyPr/>
+          <a:lstStyle/>
+          <a:p>
+            <a:endParaRPr lang="en-GB"/>
+          </a:p>
+        </p:txBody>
+      </p:sp>
+      <p:sp>
+        <p:nvSpPr>
+          <p:cNvPr id="4" name="Slide Number Placeholder 3">
+            <a:extLst>
+              <a:ext uri="{FF2B5EF4-FFF2-40B4-BE49-F238E27FC236}">
+                <a16:creationId xmlns:a16="http://schemas.microsoft.com/office/drawing/2014/main" id="{9BBB26A6-51FB-0ED0-1F61-4CA82ADDFC51}"/>
+              </a:ext>
+            </a:extLst>
+          </p:cNvPr>
+          <p:cNvSpPr>
+            <a:spLocks noGrp="1"/>
+          </p:cNvSpPr>
+          <p:nvPr>
+            <p:ph type="sldNum" sz="quarter" idx="5"/>
+          </p:nvPr>
+        </p:nvSpPr>
+        <p:spPr/>
+        <p:txBody>
+          <a:bodyPr/>
+          <a:lstStyle/>
+          <a:p>
+            <a:fld id="{BA1AFD66-2597-4960-86E3-D00E2B43A69D}" type="slidenum">
+              <a:rPr lang="en-GB" smtClean="0"/>
+              <a:t>3</a:t>
+            </a:fld>
+            <a:endParaRPr lang="en-GB"/>
+          </a:p>
+        </p:txBody>
+      </p:sp>
+    </p:spTree>
+    <p:extLst>
+      <p:ext uri="{BB962C8B-B14F-4D97-AF65-F5344CB8AC3E}">
+        <p14:creationId xmlns:p14="http://schemas.microsoft.com/office/powerpoint/2010/main" val="2057813625"/>
       </p:ext>
     </p:extLst>
   </p:cSld>
@@ -4402,10 +4620,10 @@
       </p:sp>
       <p:grpSp>
         <p:nvGrpSpPr>
-          <p:cNvPr id="2" name="Groep 1">
-            <a:extLst>
-              <a:ext uri="{FF2B5EF4-FFF2-40B4-BE49-F238E27FC236}">
-                <a16:creationId xmlns:a16="http://schemas.microsoft.com/office/drawing/2014/main" id="{1D45816F-C7A2-85B7-42BA-A22F5841366E}"/>
+          <p:cNvPr id="16" name="Groep 15">
+            <a:extLst>
+              <a:ext uri="{FF2B5EF4-FFF2-40B4-BE49-F238E27FC236}">
+                <a16:creationId xmlns:a16="http://schemas.microsoft.com/office/drawing/2014/main" id="{7C86CE1E-3BCE-3EB1-F051-207618DE23E4}"/>
               </a:ext>
             </a:extLst>
           </p:cNvPr>
@@ -4414,131 +4632,1316 @@
         </p:nvGrpSpPr>
         <p:grpSpPr>
           <a:xfrm>
-            <a:off x="1869888" y="1137706"/>
-            <a:ext cx="7037527" cy="569848"/>
+            <a:off x="1869888" y="1788635"/>
+            <a:ext cx="7039850" cy="3658850"/>
             <a:chOff x="1869888" y="1137706"/>
-            <a:chExt cx="7037527" cy="569848"/>
+            <a:chExt cx="7039850" cy="3658850"/>
           </a:xfrm>
         </p:grpSpPr>
-        <p:sp>
-          <p:nvSpPr>
-            <p:cNvPr id="17" name="Rectangle 16">
+        <p:grpSp>
+          <p:nvGrpSpPr>
+            <p:cNvPr id="2" name="Groep 1">
               <a:extLst>
                 <a:ext uri="{FF2B5EF4-FFF2-40B4-BE49-F238E27FC236}">
-                  <a16:creationId xmlns:a16="http://schemas.microsoft.com/office/drawing/2014/main" id="{4DC9BA65-02F5-9778-D996-0E43F5050B58}"/>
+                  <a16:creationId xmlns:a16="http://schemas.microsoft.com/office/drawing/2014/main" id="{1D45816F-C7A2-85B7-42BA-A22F5841366E}"/>
                 </a:ext>
               </a:extLst>
             </p:cNvPr>
-            <p:cNvSpPr/>
+            <p:cNvGrpSpPr/>
             <p:nvPr/>
-          </p:nvSpPr>
-          <p:spPr>
+          </p:nvGrpSpPr>
+          <p:grpSpPr>
             <a:xfrm>
               <a:off x="1869888" y="1137706"/>
               <a:ext cx="7037527" cy="569848"/>
+              <a:chOff x="1869888" y="1137706"/>
+              <a:chExt cx="7037527" cy="569848"/>
             </a:xfrm>
-            <a:prstGeom prst="rect">
-              <a:avLst/>
-            </a:prstGeom>
-            <a:solidFill>
-              <a:schemeClr val="accent1">
-                <a:lumMod val="20000"/>
-                <a:lumOff val="80000"/>
-              </a:schemeClr>
-            </a:solidFill>
-            <a:ln>
+          </p:grpSpPr>
+          <p:sp>
+            <p:nvSpPr>
+              <p:cNvPr id="17" name="Rectangle 16">
+                <a:extLst>
+                  <a:ext uri="{FF2B5EF4-FFF2-40B4-BE49-F238E27FC236}">
+                    <a16:creationId xmlns:a16="http://schemas.microsoft.com/office/drawing/2014/main" id="{4DC9BA65-02F5-9778-D996-0E43F5050B58}"/>
+                  </a:ext>
+                </a:extLst>
+              </p:cNvPr>
+              <p:cNvSpPr/>
+              <p:nvPr/>
+            </p:nvSpPr>
+            <p:spPr>
+              <a:xfrm>
+                <a:off x="1869888" y="1137706"/>
+                <a:ext cx="7037527" cy="569848"/>
+              </a:xfrm>
+              <a:prstGeom prst="rect">
+                <a:avLst/>
+              </a:prstGeom>
+              <a:solidFill>
+                <a:schemeClr val="accent1">
+                  <a:lumMod val="20000"/>
+                  <a:lumOff val="80000"/>
+                </a:schemeClr>
+              </a:solidFill>
+              <a:ln>
+                <a:noFill/>
+              </a:ln>
+            </p:spPr>
+            <p:style>
+              <a:lnRef idx="2">
+                <a:schemeClr val="accent1">
+                  <a:shade val="15000"/>
+                </a:schemeClr>
+              </a:lnRef>
+              <a:fillRef idx="1">
+                <a:schemeClr val="accent1"/>
+              </a:fillRef>
+              <a:effectRef idx="0">
+                <a:schemeClr val="accent1"/>
+              </a:effectRef>
+              <a:fontRef idx="minor">
+                <a:schemeClr val="lt1"/>
+              </a:fontRef>
+            </p:style>
+            <p:txBody>
+              <a:bodyPr rtlCol="0" anchor="ctr"/>
+              <a:lstStyle/>
+              <a:p>
+                <a:pPr algn="ctr"/>
+                <a:endParaRPr lang="LID4096"/>
+              </a:p>
+            </p:txBody>
+          </p:sp>
+          <p:sp>
+            <p:nvSpPr>
+              <p:cNvPr id="20" name="TextBox 19">
+                <a:extLst>
+                  <a:ext uri="{FF2B5EF4-FFF2-40B4-BE49-F238E27FC236}">
+                    <a16:creationId xmlns:a16="http://schemas.microsoft.com/office/drawing/2014/main" id="{1C285D34-3103-3FC5-CA90-096D3DDE0E6B}"/>
+                  </a:ext>
+                </a:extLst>
+              </p:cNvPr>
+              <p:cNvSpPr txBox="1"/>
+              <p:nvPr/>
+            </p:nvSpPr>
+            <p:spPr>
+              <a:xfrm>
+                <a:off x="2010738" y="1207612"/>
+                <a:ext cx="3560350" cy="369332"/>
+              </a:xfrm>
+              <a:prstGeom prst="rect">
+                <a:avLst/>
+              </a:prstGeom>
               <a:noFill/>
-            </a:ln>
-          </p:spPr>
-          <p:style>
-            <a:lnRef idx="2">
-              <a:schemeClr val="accent1">
-                <a:shade val="15000"/>
-              </a:schemeClr>
-            </a:lnRef>
-            <a:fillRef idx="1">
-              <a:schemeClr val="accent1"/>
-            </a:fillRef>
-            <a:effectRef idx="0">
-              <a:schemeClr val="accent1"/>
-            </a:effectRef>
-            <a:fontRef idx="minor">
-              <a:schemeClr val="lt1"/>
-            </a:fontRef>
-          </p:style>
-          <p:txBody>
-            <a:bodyPr rtlCol="0" anchor="ctr"/>
-            <a:lstStyle/>
-            <a:p>
-              <a:pPr algn="ctr"/>
-              <a:endParaRPr lang="LID4096"/>
-            </a:p>
-          </p:txBody>
-        </p:sp>
-        <p:sp>
-          <p:nvSpPr>
-            <p:cNvPr id="20" name="TextBox 19">
+            </p:spPr>
+            <p:txBody>
+              <a:bodyPr wrap="square" lIns="0" tIns="0" rIns="0" bIns="0" rtlCol="0">
+                <a:spAutoFit/>
+              </a:bodyPr>
+              <a:lstStyle/>
+              <a:p>
+                <a:pPr>
+                  <a:buSzPct val="100000"/>
+                </a:pPr>
+                <a:r>
+                  <a:rPr lang="en-US" sz="1200" b="1" dirty="0">
+                    <a:latin typeface="DM Sans" pitchFamily="2" charset="0"/>
+                  </a:rPr>
+                  <a:t>Vision</a:t>
+                </a:r>
+              </a:p>
+              <a:p>
+                <a:pPr>
+                  <a:buSzPct val="100000"/>
+                </a:pPr>
+                <a:r>
+                  <a:rPr lang="en-US" sz="1200" dirty="0">
+                    <a:solidFill>
+                      <a:schemeClr val="tx1">
+                        <a:lumMod val="75000"/>
+                        <a:lumOff val="25000"/>
+                      </a:schemeClr>
+                    </a:solidFill>
+                    <a:latin typeface="+mj-lt"/>
+                  </a:rPr>
+                  <a:t>Vision</a:t>
+                </a:r>
+                <a:r>
+                  <a:rPr lang="en-US" sz="1200" b="1" dirty="0">
+                    <a:solidFill>
+                      <a:schemeClr val="tx1">
+                        <a:lumMod val="75000"/>
+                        <a:lumOff val="25000"/>
+                      </a:schemeClr>
+                    </a:solidFill>
+                    <a:latin typeface="+mj-lt"/>
+                  </a:rPr>
+                  <a:t>, </a:t>
+                </a:r>
+                <a:r>
+                  <a:rPr lang="en-US" sz="1200" dirty="0">
+                    <a:solidFill>
+                      <a:schemeClr val="tx1">
+                        <a:lumMod val="75000"/>
+                        <a:lumOff val="25000"/>
+                      </a:schemeClr>
+                    </a:solidFill>
+                    <a:latin typeface="+mj-lt"/>
+                  </a:rPr>
+                  <a:t>strategy, values, objectives</a:t>
+                </a:r>
+              </a:p>
+            </p:txBody>
+          </p:sp>
+        </p:grpSp>
+        <p:grpSp>
+          <p:nvGrpSpPr>
+            <p:cNvPr id="9" name="Groep 8">
               <a:extLst>
                 <a:ext uri="{FF2B5EF4-FFF2-40B4-BE49-F238E27FC236}">
-                  <a16:creationId xmlns:a16="http://schemas.microsoft.com/office/drawing/2014/main" id="{1C285D34-3103-3FC5-CA90-096D3DDE0E6B}"/>
+                  <a16:creationId xmlns:a16="http://schemas.microsoft.com/office/drawing/2014/main" id="{ED531BDA-D9E1-B250-6381-7DFF6243F863}"/>
                 </a:ext>
               </a:extLst>
             </p:cNvPr>
-            <p:cNvSpPr txBox="1"/>
+            <p:cNvGrpSpPr/>
             <p:nvPr/>
-          </p:nvSpPr>
-          <p:spPr>
+          </p:nvGrpSpPr>
+          <p:grpSpPr>
             <a:xfrm>
-              <a:off x="2010738" y="1207612"/>
-              <a:ext cx="3560350" cy="369332"/>
+              <a:off x="1875658" y="3887682"/>
+              <a:ext cx="7034080" cy="908874"/>
+              <a:chOff x="1875658" y="2895090"/>
+              <a:chExt cx="7034080" cy="908874"/>
             </a:xfrm>
-            <a:prstGeom prst="rect">
-              <a:avLst/>
-            </a:prstGeom>
-            <a:noFill/>
-          </p:spPr>
-          <p:txBody>
-            <a:bodyPr wrap="square" lIns="0" tIns="0" rIns="0" bIns="0" rtlCol="0">
-              <a:spAutoFit/>
-            </a:bodyPr>
-            <a:lstStyle/>
-            <a:p>
-              <a:pPr>
-                <a:buSzPct val="100000"/>
-              </a:pPr>
-              <a:r>
-                <a:rPr lang="en-US" sz="1200" b="1" dirty="0">
+          </p:grpSpPr>
+          <p:grpSp>
+            <p:nvGrpSpPr>
+              <p:cNvPr id="6" name="Groep 5">
+                <a:extLst>
+                  <a:ext uri="{FF2B5EF4-FFF2-40B4-BE49-F238E27FC236}">
+                    <a16:creationId xmlns:a16="http://schemas.microsoft.com/office/drawing/2014/main" id="{2A1038EE-D6B3-1076-10A0-7EDB04F89669}"/>
+                  </a:ext>
+                </a:extLst>
+              </p:cNvPr>
+              <p:cNvGrpSpPr/>
+              <p:nvPr/>
+            </p:nvGrpSpPr>
+            <p:grpSpPr>
+              <a:xfrm>
+                <a:off x="1875658" y="2895090"/>
+                <a:ext cx="7034080" cy="908874"/>
+                <a:chOff x="1875658" y="2895090"/>
+                <a:chExt cx="7034080" cy="908874"/>
+              </a:xfrm>
+            </p:grpSpPr>
+            <p:sp>
+              <p:nvSpPr>
+                <p:cNvPr id="151" name="Rectangle 150">
+                  <a:extLst>
+                    <a:ext uri="{FF2B5EF4-FFF2-40B4-BE49-F238E27FC236}">
+                      <a16:creationId xmlns:a16="http://schemas.microsoft.com/office/drawing/2014/main" id="{DA84A920-84E4-D38E-DFB7-5C496D13FC0A}"/>
+                    </a:ext>
+                  </a:extLst>
+                </p:cNvPr>
+                <p:cNvSpPr/>
+                <p:nvPr/>
+              </p:nvSpPr>
+              <p:spPr>
+                <a:xfrm>
+                  <a:off x="1875658" y="2895090"/>
+                  <a:ext cx="2279565" cy="908874"/>
+                </a:xfrm>
+                <a:prstGeom prst="rect">
+                  <a:avLst/>
+                </a:prstGeom>
+                <a:solidFill>
+                  <a:schemeClr val="accent1">
+                    <a:lumMod val="20000"/>
+                    <a:lumOff val="80000"/>
+                  </a:schemeClr>
+                </a:solidFill>
+                <a:ln>
+                  <a:noFill/>
+                </a:ln>
+              </p:spPr>
+              <p:style>
+                <a:lnRef idx="2">
+                  <a:schemeClr val="accent1">
+                    <a:shade val="15000"/>
+                  </a:schemeClr>
+                </a:lnRef>
+                <a:fillRef idx="1">
+                  <a:schemeClr val="accent1"/>
+                </a:fillRef>
+                <a:effectRef idx="0">
+                  <a:schemeClr val="accent1"/>
+                </a:effectRef>
+                <a:fontRef idx="minor">
+                  <a:schemeClr val="lt1"/>
+                </a:fontRef>
+              </p:style>
+              <p:txBody>
+                <a:bodyPr rtlCol="0" anchor="ctr"/>
+                <a:lstStyle/>
+                <a:p>
+                  <a:pPr algn="ctr"/>
+                  <a:endParaRPr lang="LID4096"/>
+                </a:p>
+              </p:txBody>
+            </p:sp>
+            <p:sp>
+              <p:nvSpPr>
+                <p:cNvPr id="154" name="Rectangle 153">
+                  <a:extLst>
+                    <a:ext uri="{FF2B5EF4-FFF2-40B4-BE49-F238E27FC236}">
+                      <a16:creationId xmlns:a16="http://schemas.microsoft.com/office/drawing/2014/main" id="{55D2C2E2-60C1-A4D8-155A-29C4AE9102DC}"/>
+                    </a:ext>
+                  </a:extLst>
+                </p:cNvPr>
+                <p:cNvSpPr/>
+                <p:nvPr/>
+              </p:nvSpPr>
+              <p:spPr>
+                <a:xfrm>
+                  <a:off x="4252915" y="2895090"/>
+                  <a:ext cx="2279565" cy="908874"/>
+                </a:xfrm>
+                <a:prstGeom prst="rect">
+                  <a:avLst/>
+                </a:prstGeom>
+                <a:solidFill>
+                  <a:schemeClr val="accent1">
+                    <a:lumMod val="20000"/>
+                    <a:lumOff val="80000"/>
+                  </a:schemeClr>
+                </a:solidFill>
+                <a:ln>
+                  <a:noFill/>
+                </a:ln>
+              </p:spPr>
+              <p:style>
+                <a:lnRef idx="2">
+                  <a:schemeClr val="accent1">
+                    <a:shade val="15000"/>
+                  </a:schemeClr>
+                </a:lnRef>
+                <a:fillRef idx="1">
+                  <a:schemeClr val="accent1"/>
+                </a:fillRef>
+                <a:effectRef idx="0">
+                  <a:schemeClr val="accent1"/>
+                </a:effectRef>
+                <a:fontRef idx="minor">
+                  <a:schemeClr val="lt1"/>
+                </a:fontRef>
+              </p:style>
+              <p:txBody>
+                <a:bodyPr rtlCol="0" anchor="ctr"/>
+                <a:lstStyle/>
+                <a:p>
+                  <a:pPr algn="ctr"/>
+                  <a:endParaRPr lang="LID4096"/>
+                </a:p>
+              </p:txBody>
+            </p:sp>
+            <p:sp>
+              <p:nvSpPr>
+                <p:cNvPr id="156" name="Rectangle 155">
+                  <a:extLst>
+                    <a:ext uri="{FF2B5EF4-FFF2-40B4-BE49-F238E27FC236}">
+                      <a16:creationId xmlns:a16="http://schemas.microsoft.com/office/drawing/2014/main" id="{DD197C6D-A1CA-B22B-ECAC-F110C43F9350}"/>
+                    </a:ext>
+                  </a:extLst>
+                </p:cNvPr>
+                <p:cNvSpPr/>
+                <p:nvPr/>
+              </p:nvSpPr>
+              <p:spPr>
+                <a:xfrm>
+                  <a:off x="6630173" y="2895090"/>
+                  <a:ext cx="2279565" cy="908874"/>
+                </a:xfrm>
+                <a:prstGeom prst="rect">
+                  <a:avLst/>
+                </a:prstGeom>
+                <a:solidFill>
+                  <a:schemeClr val="accent1">
+                    <a:lumMod val="20000"/>
+                    <a:lumOff val="80000"/>
+                  </a:schemeClr>
+                </a:solidFill>
+                <a:ln>
+                  <a:noFill/>
+                </a:ln>
+              </p:spPr>
+              <p:style>
+                <a:lnRef idx="2">
+                  <a:schemeClr val="accent1">
+                    <a:shade val="15000"/>
+                  </a:schemeClr>
+                </a:lnRef>
+                <a:fillRef idx="1">
+                  <a:schemeClr val="accent1"/>
+                </a:fillRef>
+                <a:effectRef idx="0">
+                  <a:schemeClr val="accent1"/>
+                </a:effectRef>
+                <a:fontRef idx="minor">
+                  <a:schemeClr val="lt1"/>
+                </a:fontRef>
+              </p:style>
+              <p:txBody>
+                <a:bodyPr rtlCol="0" anchor="ctr"/>
+                <a:lstStyle/>
+                <a:p>
+                  <a:pPr algn="ctr"/>
+                  <a:endParaRPr lang="LID4096"/>
+                </a:p>
+              </p:txBody>
+            </p:sp>
+          </p:grpSp>
+          <p:sp>
+            <p:nvSpPr>
+              <p:cNvPr id="152" name="TextBox 151">
+                <a:extLst>
+                  <a:ext uri="{FF2B5EF4-FFF2-40B4-BE49-F238E27FC236}">
+                    <a16:creationId xmlns:a16="http://schemas.microsoft.com/office/drawing/2014/main" id="{30FBF885-B703-4E76-E0CE-D11230D74F72}"/>
+                  </a:ext>
+                </a:extLst>
+              </p:cNvPr>
+              <p:cNvSpPr txBox="1"/>
+              <p:nvPr/>
+            </p:nvSpPr>
+            <p:spPr>
+              <a:xfrm>
+                <a:off x="2010737" y="2961596"/>
+                <a:ext cx="2239199" cy="553998"/>
+              </a:xfrm>
+              <a:prstGeom prst="rect">
+                <a:avLst/>
+              </a:prstGeom>
+              <a:noFill/>
+            </p:spPr>
+            <p:txBody>
+              <a:bodyPr wrap="square" lIns="0" tIns="0" rIns="0" bIns="0" rtlCol="0">
+                <a:spAutoFit/>
+              </a:bodyPr>
+              <a:lstStyle/>
+              <a:p>
+                <a:pPr>
+                  <a:buSzPct val="100000"/>
+                </a:pPr>
+                <a:r>
+                  <a:rPr lang="en-US" sz="1200" b="1" dirty="0">
+                    <a:latin typeface="DM Sans" pitchFamily="2" charset="0"/>
+                  </a:rPr>
+                  <a:t>Data</a:t>
+                </a:r>
+              </a:p>
+              <a:p>
+                <a:pPr>
+                  <a:buSzPct val="100000"/>
+                </a:pPr>
+                <a:r>
+                  <a:rPr lang="en-US" sz="1200" dirty="0">
+                    <a:solidFill>
+                      <a:schemeClr val="tx1">
+                        <a:lumMod val="75000"/>
+                        <a:lumOff val="25000"/>
+                      </a:schemeClr>
+                    </a:solidFill>
+                    <a:latin typeface="+mj-lt"/>
+                  </a:rPr>
+                  <a:t>Reusable data products, analytics, architecture, monetization</a:t>
+                </a:r>
+              </a:p>
+            </p:txBody>
+          </p:sp>
+          <p:sp>
+            <p:nvSpPr>
+              <p:cNvPr id="155" name="TextBox 154">
+                <a:extLst>
+                  <a:ext uri="{FF2B5EF4-FFF2-40B4-BE49-F238E27FC236}">
+                    <a16:creationId xmlns:a16="http://schemas.microsoft.com/office/drawing/2014/main" id="{2F26F3B8-CA9A-3660-D416-56970DACBC05}"/>
+                  </a:ext>
+                </a:extLst>
+              </p:cNvPr>
+              <p:cNvSpPr txBox="1"/>
+              <p:nvPr/>
+            </p:nvSpPr>
+            <p:spPr>
+              <a:xfrm>
+                <a:off x="4391989" y="2961596"/>
+                <a:ext cx="1878739" cy="553998"/>
+              </a:xfrm>
+              <a:prstGeom prst="rect">
+                <a:avLst/>
+              </a:prstGeom>
+              <a:noFill/>
+            </p:spPr>
+            <p:txBody>
+              <a:bodyPr wrap="square" lIns="0" tIns="0" rIns="0" bIns="0" rtlCol="0">
+                <a:spAutoFit/>
+              </a:bodyPr>
+              <a:lstStyle/>
+              <a:p>
+                <a:pPr>
+                  <a:buSzPct val="100000"/>
+                </a:pPr>
+                <a:r>
+                  <a:rPr lang="en-US" sz="1200" b="1" dirty="0">
+                    <a:latin typeface="DM Sans" pitchFamily="2" charset="0"/>
+                  </a:rPr>
+                  <a:t>Technology</a:t>
+                </a:r>
+              </a:p>
+              <a:p>
+                <a:pPr>
+                  <a:buSzPct val="100000"/>
+                </a:pPr>
+                <a:r>
+                  <a:rPr lang="en-US" sz="1200" dirty="0">
+                    <a:solidFill>
+                      <a:schemeClr val="tx1">
+                        <a:lumMod val="75000"/>
+                        <a:lumOff val="25000"/>
+                      </a:schemeClr>
+                    </a:solidFill>
+                    <a:latin typeface="+mj-lt"/>
+                  </a:rPr>
+                  <a:t>Target architecture, platforms &amp; solutions, integration </a:t>
+                </a:r>
+              </a:p>
+            </p:txBody>
+          </p:sp>
+          <p:sp>
+            <p:nvSpPr>
+              <p:cNvPr id="157" name="TextBox 156">
+                <a:extLst>
+                  <a:ext uri="{FF2B5EF4-FFF2-40B4-BE49-F238E27FC236}">
+                    <a16:creationId xmlns:a16="http://schemas.microsoft.com/office/drawing/2014/main" id="{3AA9ACAD-2309-6695-05C5-A00E27FC3BF5}"/>
+                  </a:ext>
+                </a:extLst>
+              </p:cNvPr>
+              <p:cNvSpPr txBox="1"/>
+              <p:nvPr/>
+            </p:nvSpPr>
+            <p:spPr>
+              <a:xfrm>
+                <a:off x="6763057" y="2961596"/>
+                <a:ext cx="1884734" cy="738664"/>
+              </a:xfrm>
+              <a:prstGeom prst="rect">
+                <a:avLst/>
+              </a:prstGeom>
+              <a:noFill/>
+            </p:spPr>
+            <p:txBody>
+              <a:bodyPr wrap="square" lIns="0" tIns="0" rIns="0" bIns="0" rtlCol="0">
+                <a:spAutoFit/>
+              </a:bodyPr>
+              <a:lstStyle/>
+              <a:p>
+                <a:pPr>
+                  <a:buSzPct val="100000"/>
+                </a:pPr>
+                <a:r>
+                  <a:rPr lang="en-US" sz="1200" b="1" dirty="0">
+                    <a:latin typeface="DM Sans" pitchFamily="2" charset="0"/>
+                  </a:rPr>
+                  <a:t>Enablement</a:t>
+                </a:r>
+              </a:p>
+              <a:p>
+                <a:pPr>
+                  <a:buSzPct val="100000"/>
+                </a:pPr>
+                <a:r>
+                  <a:rPr lang="en-US" sz="1200" dirty="0">
+                    <a:solidFill>
+                      <a:schemeClr val="tx1">
+                        <a:lumMod val="75000"/>
+                        <a:lumOff val="25000"/>
+                      </a:schemeClr>
+                    </a:solidFill>
+                    <a:latin typeface="+mj-lt"/>
+                  </a:rPr>
+                  <a:t>Culture, AI &amp; engineering toolbox, automation, agents, skills</a:t>
+                </a:r>
+              </a:p>
+            </p:txBody>
+          </p:sp>
+        </p:grpSp>
+        <p:grpSp>
+          <p:nvGrpSpPr>
+            <p:cNvPr id="11" name="Groep 10">
+              <a:extLst>
+                <a:ext uri="{FF2B5EF4-FFF2-40B4-BE49-F238E27FC236}">
+                  <a16:creationId xmlns:a16="http://schemas.microsoft.com/office/drawing/2014/main" id="{B7CF1138-4C4E-266E-D6C0-860E7EEBF20D}"/>
+                </a:ext>
+              </a:extLst>
+            </p:cNvPr>
+            <p:cNvGrpSpPr/>
+            <p:nvPr/>
+          </p:nvGrpSpPr>
+          <p:grpSpPr>
+            <a:xfrm>
+              <a:off x="1875658" y="2896545"/>
+              <a:ext cx="7031757" cy="908874"/>
+              <a:chOff x="1875658" y="3934756"/>
+              <a:chExt cx="7031757" cy="908874"/>
+            </a:xfrm>
+          </p:grpSpPr>
+          <p:grpSp>
+            <p:nvGrpSpPr>
+              <p:cNvPr id="7" name="Groep 6">
+                <a:extLst>
+                  <a:ext uri="{FF2B5EF4-FFF2-40B4-BE49-F238E27FC236}">
+                    <a16:creationId xmlns:a16="http://schemas.microsoft.com/office/drawing/2014/main" id="{FA87857C-EE64-83B6-1558-C834EDD82F05}"/>
+                  </a:ext>
+                </a:extLst>
+              </p:cNvPr>
+              <p:cNvGrpSpPr/>
+              <p:nvPr/>
+            </p:nvGrpSpPr>
+            <p:grpSpPr>
+              <a:xfrm>
+                <a:off x="1875658" y="3934756"/>
+                <a:ext cx="7031757" cy="908874"/>
+                <a:chOff x="1875658" y="3934756"/>
+                <a:chExt cx="7031757" cy="908874"/>
+              </a:xfrm>
+            </p:grpSpPr>
+            <p:sp>
+              <p:nvSpPr>
+                <p:cNvPr id="162" name="Rectangle 161">
+                  <a:extLst>
+                    <a:ext uri="{FF2B5EF4-FFF2-40B4-BE49-F238E27FC236}">
+                      <a16:creationId xmlns:a16="http://schemas.microsoft.com/office/drawing/2014/main" id="{72576AB9-B02D-3B55-BF90-C23F1A867704}"/>
+                    </a:ext>
+                  </a:extLst>
+                </p:cNvPr>
+                <p:cNvSpPr/>
+                <p:nvPr/>
+              </p:nvSpPr>
+              <p:spPr>
+                <a:xfrm>
+                  <a:off x="1875658" y="3934756"/>
+                  <a:ext cx="3466168" cy="908874"/>
+                </a:xfrm>
+                <a:prstGeom prst="rect">
+                  <a:avLst/>
+                </a:prstGeom>
+                <a:solidFill>
+                  <a:schemeClr val="accent1">
+                    <a:lumMod val="20000"/>
+                    <a:lumOff val="80000"/>
+                  </a:schemeClr>
+                </a:solidFill>
+                <a:ln>
+                  <a:noFill/>
+                </a:ln>
+              </p:spPr>
+              <p:style>
+                <a:lnRef idx="2">
+                  <a:schemeClr val="accent1">
+                    <a:shade val="15000"/>
+                  </a:schemeClr>
+                </a:lnRef>
+                <a:fillRef idx="1">
+                  <a:schemeClr val="accent1"/>
+                </a:fillRef>
+                <a:effectRef idx="0">
+                  <a:schemeClr val="accent1"/>
+                </a:effectRef>
+                <a:fontRef idx="minor">
+                  <a:schemeClr val="lt1"/>
+                </a:fontRef>
+              </p:style>
+              <p:txBody>
+                <a:bodyPr rtlCol="0" anchor="ctr"/>
+                <a:lstStyle/>
+                <a:p>
+                  <a:pPr algn="ctr"/>
+                  <a:endParaRPr lang="LID4096"/>
+                </a:p>
+              </p:txBody>
+            </p:sp>
+            <p:sp>
+              <p:nvSpPr>
+                <p:cNvPr id="165" name="Rectangle 164">
+                  <a:extLst>
+                    <a:ext uri="{FF2B5EF4-FFF2-40B4-BE49-F238E27FC236}">
+                      <a16:creationId xmlns:a16="http://schemas.microsoft.com/office/drawing/2014/main" id="{C8B0295D-55E0-BE71-18DC-D49D90CE7050}"/>
+                    </a:ext>
+                  </a:extLst>
+                </p:cNvPr>
+                <p:cNvSpPr/>
+                <p:nvPr/>
+              </p:nvSpPr>
+              <p:spPr>
+                <a:xfrm>
+                  <a:off x="5441247" y="3934756"/>
+                  <a:ext cx="3466168" cy="908874"/>
+                </a:xfrm>
+                <a:prstGeom prst="rect">
+                  <a:avLst/>
+                </a:prstGeom>
+                <a:solidFill>
+                  <a:schemeClr val="accent1">
+                    <a:lumMod val="20000"/>
+                    <a:lumOff val="80000"/>
+                  </a:schemeClr>
+                </a:solidFill>
+                <a:ln>
+                  <a:noFill/>
+                </a:ln>
+              </p:spPr>
+              <p:style>
+                <a:lnRef idx="2">
+                  <a:schemeClr val="accent1">
+                    <a:shade val="15000"/>
+                  </a:schemeClr>
+                </a:lnRef>
+                <a:fillRef idx="1">
+                  <a:schemeClr val="accent1"/>
+                </a:fillRef>
+                <a:effectRef idx="0">
+                  <a:schemeClr val="accent1"/>
+                </a:effectRef>
+                <a:fontRef idx="minor">
+                  <a:schemeClr val="lt1"/>
+                </a:fontRef>
+              </p:style>
+              <p:txBody>
+                <a:bodyPr rtlCol="0" anchor="ctr"/>
+                <a:lstStyle/>
+                <a:p>
+                  <a:pPr algn="ctr"/>
+                  <a:endParaRPr lang="LID4096"/>
+                </a:p>
+              </p:txBody>
+            </p:sp>
+          </p:grpSp>
+          <p:sp>
+            <p:nvSpPr>
+              <p:cNvPr id="163" name="TextBox 162">
+                <a:extLst>
+                  <a:ext uri="{FF2B5EF4-FFF2-40B4-BE49-F238E27FC236}">
+                    <a16:creationId xmlns:a16="http://schemas.microsoft.com/office/drawing/2014/main" id="{5062C2DE-E635-12D3-2B1A-52C3839E99E0}"/>
+                  </a:ext>
+                </a:extLst>
+              </p:cNvPr>
+              <p:cNvSpPr txBox="1"/>
+              <p:nvPr/>
+            </p:nvSpPr>
+            <p:spPr>
+              <a:xfrm>
+                <a:off x="2010739" y="4001262"/>
+                <a:ext cx="2827304" cy="553998"/>
+              </a:xfrm>
+              <a:prstGeom prst="rect">
+                <a:avLst/>
+              </a:prstGeom>
+              <a:noFill/>
+            </p:spPr>
+            <p:txBody>
+              <a:bodyPr wrap="square" lIns="0" tIns="0" rIns="0" bIns="0" rtlCol="0">
+                <a:spAutoFit/>
+              </a:bodyPr>
+              <a:lstStyle/>
+              <a:p>
+                <a:pPr>
+                  <a:buSzPct val="100000"/>
+                </a:pPr>
+                <a:r>
+                  <a:rPr lang="en-US" sz="1200" b="1" dirty="0">
+                    <a:latin typeface="DM Sans" pitchFamily="2" charset="0"/>
+                  </a:rPr>
+                  <a:t>People</a:t>
+                </a:r>
+              </a:p>
+              <a:p>
+                <a:pPr>
+                  <a:buSzPct val="100000"/>
+                </a:pPr>
+                <a:r>
+                  <a:rPr lang="en-US" sz="1200" dirty="0">
+                    <a:solidFill>
+                      <a:schemeClr val="tx1">
+                        <a:lumMod val="75000"/>
+                        <a:lumOff val="25000"/>
+                      </a:schemeClr>
+                    </a:solidFill>
+                    <a:latin typeface="+mj-lt"/>
+                  </a:rPr>
+                  <a:t>Roles, target skills &amp; gaps, org sizing, talent journey, training, team incentives</a:t>
+                </a:r>
+              </a:p>
+            </p:txBody>
+          </p:sp>
+          <p:sp>
+            <p:nvSpPr>
+              <p:cNvPr id="166" name="TextBox 165">
+                <a:extLst>
+                  <a:ext uri="{FF2B5EF4-FFF2-40B4-BE49-F238E27FC236}">
+                    <a16:creationId xmlns:a16="http://schemas.microsoft.com/office/drawing/2014/main" id="{3C502B40-5DAD-8077-0D3C-B23D768C371B}"/>
+                  </a:ext>
+                </a:extLst>
+              </p:cNvPr>
+              <p:cNvSpPr txBox="1"/>
+              <p:nvPr/>
+            </p:nvSpPr>
+            <p:spPr>
+              <a:xfrm>
+                <a:off x="5571088" y="4001262"/>
+                <a:ext cx="2341828" cy="553998"/>
+              </a:xfrm>
+              <a:prstGeom prst="rect">
+                <a:avLst/>
+              </a:prstGeom>
+              <a:noFill/>
+            </p:spPr>
+            <p:txBody>
+              <a:bodyPr wrap="square" lIns="0" tIns="0" rIns="0" bIns="0" rtlCol="0">
+                <a:spAutoFit/>
+              </a:bodyPr>
+              <a:lstStyle/>
+              <a:p>
+                <a:pPr>
+                  <a:buSzPct val="100000"/>
+                </a:pPr>
+                <a:r>
+                  <a:rPr lang="en-US" sz="1200" b="1" dirty="0">
+                    <a:latin typeface="DM Sans" pitchFamily="2" charset="0"/>
+                  </a:rPr>
+                  <a:t>Process</a:t>
+                </a:r>
+              </a:p>
+              <a:p>
+                <a:pPr>
+                  <a:buSzPct val="100000"/>
+                </a:pPr>
+                <a:r>
+                  <a:rPr lang="en-US" sz="1200" dirty="0">
+                    <a:solidFill>
+                      <a:schemeClr val="tx1">
+                        <a:lumMod val="75000"/>
+                        <a:lumOff val="25000"/>
+                      </a:schemeClr>
+                    </a:solidFill>
+                    <a:latin typeface="+mj-lt"/>
+                  </a:rPr>
+                  <a:t>Org. design, cross-functional teams, product way-of-working</a:t>
+                </a:r>
+              </a:p>
+            </p:txBody>
+          </p:sp>
+        </p:grpSp>
+        <p:grpSp>
+          <p:nvGrpSpPr>
+            <p:cNvPr id="5" name="Groep 4">
+              <a:extLst>
+                <a:ext uri="{FF2B5EF4-FFF2-40B4-BE49-F238E27FC236}">
+                  <a16:creationId xmlns:a16="http://schemas.microsoft.com/office/drawing/2014/main" id="{494DD1AA-4D45-71F0-9314-8C1607F0A66C}"/>
+                </a:ext>
+              </a:extLst>
+            </p:cNvPr>
+            <p:cNvGrpSpPr/>
+            <p:nvPr/>
+          </p:nvGrpSpPr>
+          <p:grpSpPr>
+            <a:xfrm>
+              <a:off x="1875657" y="1845667"/>
+              <a:ext cx="7031758" cy="908874"/>
+              <a:chOff x="1875657" y="1856048"/>
+              <a:chExt cx="7031758" cy="908874"/>
+            </a:xfrm>
+          </p:grpSpPr>
+          <p:sp>
+            <p:nvSpPr>
+              <p:cNvPr id="140" name="Rectangle 139">
+                <a:extLst>
+                  <a:ext uri="{FF2B5EF4-FFF2-40B4-BE49-F238E27FC236}">
+                    <a16:creationId xmlns:a16="http://schemas.microsoft.com/office/drawing/2014/main" id="{803139DD-F140-2E13-C535-DBA32BD2249E}"/>
+                  </a:ext>
+                </a:extLst>
+              </p:cNvPr>
+              <p:cNvSpPr/>
+              <p:nvPr/>
+            </p:nvSpPr>
+            <p:spPr>
+              <a:xfrm>
+                <a:off x="1875657" y="1856048"/>
+                <a:ext cx="7031758" cy="908874"/>
+              </a:xfrm>
+              <a:prstGeom prst="rect">
+                <a:avLst/>
+              </a:prstGeom>
+              <a:solidFill>
+                <a:schemeClr val="accent1">
+                  <a:lumMod val="20000"/>
+                  <a:lumOff val="80000"/>
+                </a:schemeClr>
+              </a:solidFill>
+              <a:ln>
+                <a:noFill/>
+              </a:ln>
+            </p:spPr>
+            <p:style>
+              <a:lnRef idx="2">
+                <a:schemeClr val="accent1">
+                  <a:shade val="15000"/>
+                </a:schemeClr>
+              </a:lnRef>
+              <a:fillRef idx="1">
+                <a:schemeClr val="accent1"/>
+              </a:fillRef>
+              <a:effectRef idx="0">
+                <a:schemeClr val="accent1"/>
+              </a:effectRef>
+              <a:fontRef idx="minor">
+                <a:schemeClr val="lt1"/>
+              </a:fontRef>
+            </p:style>
+            <p:txBody>
+              <a:bodyPr rtlCol="0" anchor="ctr"/>
+              <a:lstStyle/>
+              <a:p>
+                <a:pPr algn="ctr"/>
+                <a:endParaRPr lang="LID4096"/>
+              </a:p>
+            </p:txBody>
+          </p:sp>
+          <p:sp>
+            <p:nvSpPr>
+              <p:cNvPr id="141" name="TextBox 140">
+                <a:extLst>
+                  <a:ext uri="{FF2B5EF4-FFF2-40B4-BE49-F238E27FC236}">
+                    <a16:creationId xmlns:a16="http://schemas.microsoft.com/office/drawing/2014/main" id="{AE8C815B-7E18-CE74-1D37-2454B20069A0}"/>
+                  </a:ext>
+                </a:extLst>
+              </p:cNvPr>
+              <p:cNvSpPr txBox="1"/>
+              <p:nvPr/>
+            </p:nvSpPr>
+            <p:spPr>
+              <a:xfrm>
+                <a:off x="2010738" y="1922554"/>
+                <a:ext cx="2959845" cy="553998"/>
+              </a:xfrm>
+              <a:prstGeom prst="rect">
+                <a:avLst/>
+              </a:prstGeom>
+              <a:noFill/>
+            </p:spPr>
+            <p:txBody>
+              <a:bodyPr wrap="square" lIns="0" tIns="0" rIns="0" bIns="0" rtlCol="0">
+                <a:spAutoFit/>
+              </a:bodyPr>
+              <a:lstStyle/>
+              <a:p>
+                <a:pPr>
+                  <a:buSzPct val="100000"/>
+                </a:pPr>
+                <a:r>
+                  <a:rPr lang="en-US" sz="1200" b="1" dirty="0">
+                    <a:latin typeface="DM Sans" pitchFamily="2" charset="0"/>
+                  </a:rPr>
+                  <a:t>Products</a:t>
+                </a:r>
+                <a:r>
+                  <a:rPr lang="en-US" sz="1200" dirty="0">
+                    <a:latin typeface="DM Sans" pitchFamily="2" charset="0"/>
+                  </a:rPr>
+                  <a:t> -  by platform or business unit</a:t>
+                </a:r>
+              </a:p>
+              <a:p>
+                <a:pPr>
+                  <a:buSzPct val="100000"/>
+                </a:pPr>
+                <a:r>
+                  <a:rPr lang="en-US" sz="1200" dirty="0">
+                    <a:solidFill>
+                      <a:schemeClr val="tx1">
+                        <a:lumMod val="75000"/>
+                        <a:lumOff val="25000"/>
+                      </a:schemeClr>
+                    </a:solidFill>
+                    <a:latin typeface="+mj-lt"/>
+                  </a:rPr>
+                  <a:t>Product vision &amp; objectives, products, persona’s, customer journeys, frictions</a:t>
+                </a:r>
+              </a:p>
+            </p:txBody>
+          </p:sp>
+          <p:sp>
+            <p:nvSpPr>
+              <p:cNvPr id="43" name="Rectangle 42">
+                <a:extLst>
+                  <a:ext uri="{FF2B5EF4-FFF2-40B4-BE49-F238E27FC236}">
+                    <a16:creationId xmlns:a16="http://schemas.microsoft.com/office/drawing/2014/main" id="{77F83771-69DC-DE58-F493-65CEDB545E5C}"/>
+                  </a:ext>
+                </a:extLst>
+              </p:cNvPr>
+              <p:cNvSpPr/>
+              <p:nvPr/>
+            </p:nvSpPr>
+            <p:spPr>
+              <a:xfrm>
+                <a:off x="6089213" y="1959390"/>
+                <a:ext cx="557171" cy="697758"/>
+              </a:xfrm>
+              <a:prstGeom prst="rect">
+                <a:avLst/>
+              </a:prstGeom>
+              <a:solidFill>
+                <a:schemeClr val="bg1"/>
+              </a:solidFill>
+              <a:ln>
+                <a:noFill/>
+              </a:ln>
+            </p:spPr>
+            <p:style>
+              <a:lnRef idx="2">
+                <a:schemeClr val="accent1">
+                  <a:shade val="15000"/>
+                </a:schemeClr>
+              </a:lnRef>
+              <a:fillRef idx="1">
+                <a:schemeClr val="accent1"/>
+              </a:fillRef>
+              <a:effectRef idx="0">
+                <a:schemeClr val="accent1"/>
+              </a:effectRef>
+              <a:fontRef idx="minor">
+                <a:schemeClr val="lt1"/>
+              </a:fontRef>
+            </p:style>
+            <p:txBody>
+              <a:bodyPr rtlCol="0" anchor="ctr"/>
+              <a:lstStyle/>
+              <a:p>
+                <a:pPr algn="ctr"/>
+                <a:r>
+                  <a:rPr lang="nl-NL" sz="1100" dirty="0">
+                    <a:solidFill>
+                      <a:schemeClr val="tx1"/>
+                    </a:solidFill>
+                    <a:latin typeface="DM Sans" pitchFamily="2" charset="0"/>
+                  </a:rPr>
+                  <a:t>BU 1</a:t>
+                </a:r>
+                <a:endParaRPr lang="LID4096" sz="1100" dirty="0">
+                  <a:solidFill>
+                    <a:schemeClr val="tx1"/>
+                  </a:solidFill>
                   <a:latin typeface="DM Sans" pitchFamily="2" charset="0"/>
-                </a:rPr>
-                <a:t>Vision</a:t>
-              </a:r>
-            </a:p>
-            <a:p>
-              <a:pPr>
-                <a:buSzPct val="100000"/>
-              </a:pPr>
-              <a:r>
-                <a:rPr lang="en-US" sz="1200" dirty="0">
-                  <a:latin typeface="+mj-lt"/>
-                </a:rPr>
-                <a:t>Vision</a:t>
-              </a:r>
-              <a:r>
-                <a:rPr lang="en-US" sz="1200" b="1" dirty="0">
-                  <a:latin typeface="+mj-lt"/>
-                </a:rPr>
-                <a:t>, </a:t>
-              </a:r>
-              <a:r>
-                <a:rPr lang="en-US" sz="1200" dirty="0">
-                  <a:latin typeface="+mj-lt"/>
-                </a:rPr>
-                <a:t>strategy, values, objectives</a:t>
-              </a:r>
-            </a:p>
-          </p:txBody>
-        </p:sp>
+                </a:endParaRPr>
+              </a:p>
+            </p:txBody>
+          </p:sp>
+          <p:sp>
+            <p:nvSpPr>
+              <p:cNvPr id="44" name="Rectangle 43">
+                <a:extLst>
+                  <a:ext uri="{FF2B5EF4-FFF2-40B4-BE49-F238E27FC236}">
+                    <a16:creationId xmlns:a16="http://schemas.microsoft.com/office/drawing/2014/main" id="{E95E7BBB-0795-3FA3-F052-AA3D1DD6498B}"/>
+                  </a:ext>
+                </a:extLst>
+              </p:cNvPr>
+              <p:cNvSpPr/>
+              <p:nvPr/>
+            </p:nvSpPr>
+            <p:spPr>
+              <a:xfrm>
+                <a:off x="6720157" y="1959390"/>
+                <a:ext cx="557171" cy="697758"/>
+              </a:xfrm>
+              <a:prstGeom prst="rect">
+                <a:avLst/>
+              </a:prstGeom>
+              <a:solidFill>
+                <a:schemeClr val="bg1"/>
+              </a:solidFill>
+              <a:ln>
+                <a:noFill/>
+              </a:ln>
+            </p:spPr>
+            <p:style>
+              <a:lnRef idx="2">
+                <a:schemeClr val="accent1">
+                  <a:shade val="15000"/>
+                </a:schemeClr>
+              </a:lnRef>
+              <a:fillRef idx="1">
+                <a:schemeClr val="accent1"/>
+              </a:fillRef>
+              <a:effectRef idx="0">
+                <a:schemeClr val="accent1"/>
+              </a:effectRef>
+              <a:fontRef idx="minor">
+                <a:schemeClr val="lt1"/>
+              </a:fontRef>
+            </p:style>
+            <p:txBody>
+              <a:bodyPr rtlCol="0" anchor="ctr"/>
+              <a:lstStyle/>
+              <a:p>
+                <a:pPr algn="ctr"/>
+                <a:r>
+                  <a:rPr lang="nl-NL" sz="1100" dirty="0">
+                    <a:solidFill>
+                      <a:schemeClr val="tx1"/>
+                    </a:solidFill>
+                    <a:latin typeface="DM Sans" pitchFamily="2" charset="0"/>
+                  </a:rPr>
+                  <a:t>BU 2</a:t>
+                </a:r>
+                <a:endParaRPr lang="LID4096" sz="1100" dirty="0">
+                  <a:solidFill>
+                    <a:schemeClr val="tx1"/>
+                  </a:solidFill>
+                  <a:latin typeface="DM Sans" pitchFamily="2" charset="0"/>
+                </a:endParaRPr>
+              </a:p>
+            </p:txBody>
+          </p:sp>
+          <p:sp>
+            <p:nvSpPr>
+              <p:cNvPr id="30" name="Rectangle 42">
+                <a:extLst>
+                  <a:ext uri="{FF2B5EF4-FFF2-40B4-BE49-F238E27FC236}">
+                    <a16:creationId xmlns:a16="http://schemas.microsoft.com/office/drawing/2014/main" id="{66F9516B-8552-CDAF-75C4-8A281C36B6F8}"/>
+                  </a:ext>
+                </a:extLst>
+              </p:cNvPr>
+              <p:cNvSpPr/>
+              <p:nvPr/>
+            </p:nvSpPr>
+            <p:spPr>
+              <a:xfrm>
+                <a:off x="7351101" y="1959390"/>
+                <a:ext cx="557171" cy="697758"/>
+              </a:xfrm>
+              <a:prstGeom prst="rect">
+                <a:avLst/>
+              </a:prstGeom>
+              <a:solidFill>
+                <a:schemeClr val="bg1"/>
+              </a:solidFill>
+              <a:ln>
+                <a:noFill/>
+              </a:ln>
+            </p:spPr>
+            <p:style>
+              <a:lnRef idx="2">
+                <a:schemeClr val="accent1">
+                  <a:shade val="15000"/>
+                </a:schemeClr>
+              </a:lnRef>
+              <a:fillRef idx="1">
+                <a:schemeClr val="accent1"/>
+              </a:fillRef>
+              <a:effectRef idx="0">
+                <a:schemeClr val="accent1"/>
+              </a:effectRef>
+              <a:fontRef idx="minor">
+                <a:schemeClr val="lt1"/>
+              </a:fontRef>
+            </p:style>
+            <p:txBody>
+              <a:bodyPr rtlCol="0" anchor="ctr"/>
+              <a:lstStyle/>
+              <a:p>
+                <a:pPr algn="ctr"/>
+                <a:r>
+                  <a:rPr lang="nl-NL" sz="1100" dirty="0">
+                    <a:solidFill>
+                      <a:schemeClr val="tx1"/>
+                    </a:solidFill>
+                    <a:latin typeface="DM Sans" pitchFamily="2" charset="0"/>
+                  </a:rPr>
+                  <a:t>BU 3</a:t>
+                </a:r>
+                <a:endParaRPr lang="LID4096" sz="1100" dirty="0">
+                  <a:solidFill>
+                    <a:schemeClr val="tx1"/>
+                  </a:solidFill>
+                  <a:latin typeface="DM Sans" pitchFamily="2" charset="0"/>
+                </a:endParaRPr>
+              </a:p>
+            </p:txBody>
+          </p:sp>
+          <p:sp>
+            <p:nvSpPr>
+              <p:cNvPr id="32" name="Rectangle 43">
+                <a:extLst>
+                  <a:ext uri="{FF2B5EF4-FFF2-40B4-BE49-F238E27FC236}">
+                    <a16:creationId xmlns:a16="http://schemas.microsoft.com/office/drawing/2014/main" id="{005EA54E-A05B-E9A5-FE26-09518F608969}"/>
+                  </a:ext>
+                </a:extLst>
+              </p:cNvPr>
+              <p:cNvSpPr/>
+              <p:nvPr/>
+            </p:nvSpPr>
+            <p:spPr>
+              <a:xfrm>
+                <a:off x="7982046" y="1959390"/>
+                <a:ext cx="557171" cy="697758"/>
+              </a:xfrm>
+              <a:prstGeom prst="rect">
+                <a:avLst/>
+              </a:prstGeom>
+              <a:solidFill>
+                <a:schemeClr val="bg1"/>
+              </a:solidFill>
+              <a:ln>
+                <a:noFill/>
+              </a:ln>
+            </p:spPr>
+            <p:style>
+              <a:lnRef idx="2">
+                <a:schemeClr val="accent1">
+                  <a:shade val="15000"/>
+                </a:schemeClr>
+              </a:lnRef>
+              <a:fillRef idx="1">
+                <a:schemeClr val="accent1"/>
+              </a:fillRef>
+              <a:effectRef idx="0">
+                <a:schemeClr val="accent1"/>
+              </a:effectRef>
+              <a:fontRef idx="minor">
+                <a:schemeClr val="lt1"/>
+              </a:fontRef>
+            </p:style>
+            <p:txBody>
+              <a:bodyPr rtlCol="0" anchor="ctr"/>
+              <a:lstStyle/>
+              <a:p>
+                <a:pPr algn="ctr"/>
+                <a:r>
+                  <a:rPr lang="nl-NL" sz="1100" dirty="0">
+                    <a:solidFill>
+                      <a:schemeClr val="tx1"/>
+                    </a:solidFill>
+                    <a:latin typeface="DM Sans" pitchFamily="2" charset="0"/>
+                  </a:rPr>
+                  <a:t>BU 4</a:t>
+                </a:r>
+                <a:endParaRPr lang="LID4096" sz="1100" dirty="0">
+                  <a:solidFill>
+                    <a:schemeClr val="tx1"/>
+                  </a:solidFill>
+                  <a:latin typeface="DM Sans" pitchFamily="2" charset="0"/>
+                </a:endParaRPr>
+              </a:p>
+            </p:txBody>
+          </p:sp>
+        </p:grpSp>
       </p:grpSp>
+    </p:spTree>
+    <p:extLst>
+      <p:ext uri="{BB962C8B-B14F-4D97-AF65-F5344CB8AC3E}">
+        <p14:creationId xmlns:p14="http://schemas.microsoft.com/office/powerpoint/2010/main" val="3155234622"/>
+      </p:ext>
+    </p:extLst>
+  </p:cSld>
+  <p:clrMapOvr>
+    <a:masterClrMapping/>
+  </p:clrMapOvr>
+</p:sld>
+</file>
+
+<file path=ppt/slides/slide2.xml><?xml version="1.0" encoding="utf-8"?>
+<p:sld xmlns:a="http://schemas.openxmlformats.org/drawingml/2006/main" xmlns:r="http://schemas.openxmlformats.org/officeDocument/2006/relationships" xmlns:p="http://schemas.openxmlformats.org/presentationml/2006/main">
+  <p:cSld>
+    <p:spTree>
+      <p:nvGrpSpPr>
+        <p:cNvPr id="1" name="">
+          <a:extLst>
+            <a:ext uri="{FF2B5EF4-FFF2-40B4-BE49-F238E27FC236}">
+              <a16:creationId xmlns:a16="http://schemas.microsoft.com/office/drawing/2014/main" id="{FE02BF3D-FE41-717C-33E1-78FB61410191}"/>
+            </a:ext>
+          </a:extLst>
+        </p:cNvPr>
+        <p:cNvGrpSpPr/>
+        <p:nvPr/>
+      </p:nvGrpSpPr>
+      <p:grpSpPr>
+        <a:xfrm>
+          <a:off x="0" y="0"/>
+          <a:ext cx="0" cy="0"/>
+          <a:chOff x="0" y="0"/>
+          <a:chExt cx="0" cy="0"/>
+        </a:xfrm>
+      </p:grpSpPr>
+      <p:sp>
+        <p:nvSpPr>
+          <p:cNvPr id="3" name="Title 2">
+            <a:extLst>
+              <a:ext uri="{FF2B5EF4-FFF2-40B4-BE49-F238E27FC236}">
+                <a16:creationId xmlns:a16="http://schemas.microsoft.com/office/drawing/2014/main" id="{D1C8DFE4-22E2-2B56-23FE-10A83A8E3238}"/>
+              </a:ext>
+            </a:extLst>
+          </p:cNvPr>
+          <p:cNvSpPr>
+            <a:spLocks noGrp="1"/>
+          </p:cNvSpPr>
+          <p:nvPr>
+            <p:ph type="title"/>
+          </p:nvPr>
+        </p:nvSpPr>
+        <p:spPr/>
+        <p:txBody>
+          <a:bodyPr>
+            <a:normAutofit/>
+          </a:bodyPr>
+          <a:lstStyle/>
+          <a:p>
+            <a:r>
+              <a:rPr lang="en-US" dirty="0"/>
+              <a:t>AI Transformation framework for European CEO’s – not used</a:t>
+            </a:r>
+          </a:p>
+        </p:txBody>
+      </p:sp>
+      <p:sp>
+        <p:nvSpPr>
+          <p:cNvPr id="4" name="Text Placeholder 3">
+            <a:extLst>
+              <a:ext uri="{FF2B5EF4-FFF2-40B4-BE49-F238E27FC236}">
+                <a16:creationId xmlns:a16="http://schemas.microsoft.com/office/drawing/2014/main" id="{934FD04A-9782-DFEE-47DD-6E1AAA12FCC2}"/>
+              </a:ext>
+            </a:extLst>
+          </p:cNvPr>
+          <p:cNvSpPr>
+            <a:spLocks noGrp="1"/>
+          </p:cNvSpPr>
+          <p:nvPr>
+            <p:ph type="body" sz="quarter" idx="10"/>
+          </p:nvPr>
+        </p:nvSpPr>
+        <p:spPr/>
+        <p:txBody>
+          <a:bodyPr/>
+          <a:lstStyle/>
+          <a:p>
+            <a:r>
+              <a:rPr lang="en-US" dirty="0"/>
+              <a:t>The Agentic </a:t>
+            </a:r>
+            <a:r>
+              <a:rPr lang="en-US" dirty="0" err="1"/>
+              <a:t>Organisation</a:t>
+            </a:r>
+            <a:endParaRPr lang="en-US" dirty="0"/>
+          </a:p>
+        </p:txBody>
+      </p:sp>
       <p:grpSp>
         <p:nvGrpSpPr>
           <p:cNvPr id="8" name="Groep 7">
@@ -4788,6 +6191,12 @@
                 </a:pPr>
                 <a:r>
                   <a:rPr lang="en-US" sz="1200" dirty="0">
+                    <a:solidFill>
+                      <a:schemeClr val="tx1">
+                        <a:lumMod val="75000"/>
+                        <a:lumOff val="25000"/>
+                      </a:schemeClr>
+                    </a:solidFill>
                     <a:latin typeface="+mj-lt"/>
                   </a:rPr>
                   <a:t>Roadmap, big decisions, change management</a:t>
@@ -4839,6 +6248,12 @@
                 </a:pPr>
                 <a:r>
                   <a:rPr lang="en-US" sz="1200" dirty="0">
+                    <a:solidFill>
+                      <a:schemeClr val="tx1">
+                        <a:lumMod val="75000"/>
+                        <a:lumOff val="25000"/>
+                      </a:schemeClr>
+                    </a:solidFill>
                     <a:latin typeface="+mj-lt"/>
                   </a:rPr>
                   <a:t>Definitions, targets, monitoring, steering</a:t>
@@ -4890,6 +6305,12 @@
                 </a:pPr>
                 <a:r>
                   <a:rPr lang="en-US" sz="1200" dirty="0">
+                    <a:solidFill>
+                      <a:schemeClr val="tx1">
+                        <a:lumMod val="75000"/>
+                        <a:lumOff val="25000"/>
+                      </a:schemeClr>
+                    </a:solidFill>
                     <a:latin typeface="+mj-lt"/>
                   </a:rPr>
                   <a:t>ROI, cost analysis &amp; optimization, tracking</a:t>
@@ -4898,1007 +6319,6 @@
             </p:txBody>
           </p:sp>
         </p:grpSp>
-      </p:grpSp>
-      <p:grpSp>
-        <p:nvGrpSpPr>
-          <p:cNvPr id="9" name="Groep 8">
-            <a:extLst>
-              <a:ext uri="{FF2B5EF4-FFF2-40B4-BE49-F238E27FC236}">
-                <a16:creationId xmlns:a16="http://schemas.microsoft.com/office/drawing/2014/main" id="{ED531BDA-D9E1-B250-6381-7DFF6243F863}"/>
-              </a:ext>
-            </a:extLst>
-          </p:cNvPr>
-          <p:cNvGrpSpPr/>
-          <p:nvPr/>
-        </p:nvGrpSpPr>
-        <p:grpSpPr>
-          <a:xfrm>
-            <a:off x="1875658" y="3887682"/>
-            <a:ext cx="7034080" cy="908874"/>
-            <a:chOff x="1875658" y="2895090"/>
-            <a:chExt cx="7034080" cy="908874"/>
-          </a:xfrm>
-        </p:grpSpPr>
-        <p:grpSp>
-          <p:nvGrpSpPr>
-            <p:cNvPr id="6" name="Groep 5">
-              <a:extLst>
-                <a:ext uri="{FF2B5EF4-FFF2-40B4-BE49-F238E27FC236}">
-                  <a16:creationId xmlns:a16="http://schemas.microsoft.com/office/drawing/2014/main" id="{2A1038EE-D6B3-1076-10A0-7EDB04F89669}"/>
-                </a:ext>
-              </a:extLst>
-            </p:cNvPr>
-            <p:cNvGrpSpPr/>
-            <p:nvPr/>
-          </p:nvGrpSpPr>
-          <p:grpSpPr>
-            <a:xfrm>
-              <a:off x="1875658" y="2895090"/>
-              <a:ext cx="7034080" cy="908874"/>
-              <a:chOff x="1875658" y="2895090"/>
-              <a:chExt cx="7034080" cy="908874"/>
-            </a:xfrm>
-          </p:grpSpPr>
-          <p:sp>
-            <p:nvSpPr>
-              <p:cNvPr id="151" name="Rectangle 150">
-                <a:extLst>
-                  <a:ext uri="{FF2B5EF4-FFF2-40B4-BE49-F238E27FC236}">
-                    <a16:creationId xmlns:a16="http://schemas.microsoft.com/office/drawing/2014/main" id="{DA84A920-84E4-D38E-DFB7-5C496D13FC0A}"/>
-                  </a:ext>
-                </a:extLst>
-              </p:cNvPr>
-              <p:cNvSpPr/>
-              <p:nvPr/>
-            </p:nvSpPr>
-            <p:spPr>
-              <a:xfrm>
-                <a:off x="1875658" y="2895090"/>
-                <a:ext cx="2279565" cy="908874"/>
-              </a:xfrm>
-              <a:prstGeom prst="rect">
-                <a:avLst/>
-              </a:prstGeom>
-              <a:solidFill>
-                <a:schemeClr val="accent1">
-                  <a:lumMod val="20000"/>
-                  <a:lumOff val="80000"/>
-                </a:schemeClr>
-              </a:solidFill>
-              <a:ln>
-                <a:noFill/>
-              </a:ln>
-            </p:spPr>
-            <p:style>
-              <a:lnRef idx="2">
-                <a:schemeClr val="accent1">
-                  <a:shade val="15000"/>
-                </a:schemeClr>
-              </a:lnRef>
-              <a:fillRef idx="1">
-                <a:schemeClr val="accent1"/>
-              </a:fillRef>
-              <a:effectRef idx="0">
-                <a:schemeClr val="accent1"/>
-              </a:effectRef>
-              <a:fontRef idx="minor">
-                <a:schemeClr val="lt1"/>
-              </a:fontRef>
-            </p:style>
-            <p:txBody>
-              <a:bodyPr rtlCol="0" anchor="ctr"/>
-              <a:lstStyle/>
-              <a:p>
-                <a:pPr algn="ctr"/>
-                <a:endParaRPr lang="LID4096"/>
-              </a:p>
-            </p:txBody>
-          </p:sp>
-          <p:sp>
-            <p:nvSpPr>
-              <p:cNvPr id="154" name="Rectangle 153">
-                <a:extLst>
-                  <a:ext uri="{FF2B5EF4-FFF2-40B4-BE49-F238E27FC236}">
-                    <a16:creationId xmlns:a16="http://schemas.microsoft.com/office/drawing/2014/main" id="{55D2C2E2-60C1-A4D8-155A-29C4AE9102DC}"/>
-                  </a:ext>
-                </a:extLst>
-              </p:cNvPr>
-              <p:cNvSpPr/>
-              <p:nvPr/>
-            </p:nvSpPr>
-            <p:spPr>
-              <a:xfrm>
-                <a:off x="4252915" y="2895090"/>
-                <a:ext cx="2279565" cy="908874"/>
-              </a:xfrm>
-              <a:prstGeom prst="rect">
-                <a:avLst/>
-              </a:prstGeom>
-              <a:solidFill>
-                <a:schemeClr val="accent1">
-                  <a:lumMod val="20000"/>
-                  <a:lumOff val="80000"/>
-                </a:schemeClr>
-              </a:solidFill>
-              <a:ln>
-                <a:noFill/>
-              </a:ln>
-            </p:spPr>
-            <p:style>
-              <a:lnRef idx="2">
-                <a:schemeClr val="accent1">
-                  <a:shade val="15000"/>
-                </a:schemeClr>
-              </a:lnRef>
-              <a:fillRef idx="1">
-                <a:schemeClr val="accent1"/>
-              </a:fillRef>
-              <a:effectRef idx="0">
-                <a:schemeClr val="accent1"/>
-              </a:effectRef>
-              <a:fontRef idx="minor">
-                <a:schemeClr val="lt1"/>
-              </a:fontRef>
-            </p:style>
-            <p:txBody>
-              <a:bodyPr rtlCol="0" anchor="ctr"/>
-              <a:lstStyle/>
-              <a:p>
-                <a:pPr algn="ctr"/>
-                <a:endParaRPr lang="LID4096"/>
-              </a:p>
-            </p:txBody>
-          </p:sp>
-          <p:sp>
-            <p:nvSpPr>
-              <p:cNvPr id="156" name="Rectangle 155">
-                <a:extLst>
-                  <a:ext uri="{FF2B5EF4-FFF2-40B4-BE49-F238E27FC236}">
-                    <a16:creationId xmlns:a16="http://schemas.microsoft.com/office/drawing/2014/main" id="{DD197C6D-A1CA-B22B-ECAC-F110C43F9350}"/>
-                  </a:ext>
-                </a:extLst>
-              </p:cNvPr>
-              <p:cNvSpPr/>
-              <p:nvPr/>
-            </p:nvSpPr>
-            <p:spPr>
-              <a:xfrm>
-                <a:off x="6630173" y="2895090"/>
-                <a:ext cx="2279565" cy="908874"/>
-              </a:xfrm>
-              <a:prstGeom prst="rect">
-                <a:avLst/>
-              </a:prstGeom>
-              <a:solidFill>
-                <a:schemeClr val="accent1">
-                  <a:lumMod val="20000"/>
-                  <a:lumOff val="80000"/>
-                </a:schemeClr>
-              </a:solidFill>
-              <a:ln>
-                <a:noFill/>
-              </a:ln>
-            </p:spPr>
-            <p:style>
-              <a:lnRef idx="2">
-                <a:schemeClr val="accent1">
-                  <a:shade val="15000"/>
-                </a:schemeClr>
-              </a:lnRef>
-              <a:fillRef idx="1">
-                <a:schemeClr val="accent1"/>
-              </a:fillRef>
-              <a:effectRef idx="0">
-                <a:schemeClr val="accent1"/>
-              </a:effectRef>
-              <a:fontRef idx="minor">
-                <a:schemeClr val="lt1"/>
-              </a:fontRef>
-            </p:style>
-            <p:txBody>
-              <a:bodyPr rtlCol="0" anchor="ctr"/>
-              <a:lstStyle/>
-              <a:p>
-                <a:pPr algn="ctr"/>
-                <a:endParaRPr lang="LID4096"/>
-              </a:p>
-            </p:txBody>
-          </p:sp>
-        </p:grpSp>
-        <p:sp>
-          <p:nvSpPr>
-            <p:cNvPr id="152" name="TextBox 151">
-              <a:extLst>
-                <a:ext uri="{FF2B5EF4-FFF2-40B4-BE49-F238E27FC236}">
-                  <a16:creationId xmlns:a16="http://schemas.microsoft.com/office/drawing/2014/main" id="{30FBF885-B703-4E76-E0CE-D11230D74F72}"/>
-                </a:ext>
-              </a:extLst>
-            </p:cNvPr>
-            <p:cNvSpPr txBox="1"/>
-            <p:nvPr/>
-          </p:nvSpPr>
-          <p:spPr>
-            <a:xfrm>
-              <a:off x="2010737" y="2961596"/>
-              <a:ext cx="2239199" cy="738664"/>
-            </a:xfrm>
-            <a:prstGeom prst="rect">
-              <a:avLst/>
-            </a:prstGeom>
-            <a:noFill/>
-          </p:spPr>
-          <p:txBody>
-            <a:bodyPr wrap="square" lIns="0" tIns="0" rIns="0" bIns="0" rtlCol="0">
-              <a:spAutoFit/>
-            </a:bodyPr>
-            <a:lstStyle/>
-            <a:p>
-              <a:pPr>
-                <a:buSzPct val="100000"/>
-              </a:pPr>
-              <a:r>
-                <a:rPr lang="en-US" sz="1200" b="1" dirty="0">
-                  <a:latin typeface="DM Sans" pitchFamily="2" charset="0"/>
-                </a:rPr>
-                <a:t>Data</a:t>
-              </a:r>
-            </a:p>
-            <a:p>
-              <a:pPr>
-                <a:buSzPct val="100000"/>
-              </a:pPr>
-              <a:r>
-                <a:rPr lang="en-US" sz="1200" dirty="0"/>
-                <a:t>Reusable data products, analytics, architecture, monetization</a:t>
-              </a:r>
-            </a:p>
-          </p:txBody>
-        </p:sp>
-        <p:sp>
-          <p:nvSpPr>
-            <p:cNvPr id="155" name="TextBox 154">
-              <a:extLst>
-                <a:ext uri="{FF2B5EF4-FFF2-40B4-BE49-F238E27FC236}">
-                  <a16:creationId xmlns:a16="http://schemas.microsoft.com/office/drawing/2014/main" id="{2F26F3B8-CA9A-3660-D416-56970DACBC05}"/>
-                </a:ext>
-              </a:extLst>
-            </p:cNvPr>
-            <p:cNvSpPr txBox="1"/>
-            <p:nvPr/>
-          </p:nvSpPr>
-          <p:spPr>
-            <a:xfrm>
-              <a:off x="4391989" y="2961596"/>
-              <a:ext cx="1878739" cy="738664"/>
-            </a:xfrm>
-            <a:prstGeom prst="rect">
-              <a:avLst/>
-            </a:prstGeom>
-            <a:noFill/>
-          </p:spPr>
-          <p:txBody>
-            <a:bodyPr wrap="square" lIns="0" tIns="0" rIns="0" bIns="0" rtlCol="0">
-              <a:spAutoFit/>
-            </a:bodyPr>
-            <a:lstStyle/>
-            <a:p>
-              <a:pPr>
-                <a:buSzPct val="100000"/>
-              </a:pPr>
-              <a:r>
-                <a:rPr lang="en-US" sz="1200" b="1" dirty="0">
-                  <a:latin typeface="DM Sans" pitchFamily="2" charset="0"/>
-                </a:rPr>
-                <a:t>Technology</a:t>
-              </a:r>
-            </a:p>
-            <a:p>
-              <a:pPr>
-                <a:buSzPct val="100000"/>
-              </a:pPr>
-              <a:r>
-                <a:rPr lang="en-US" sz="1200" dirty="0"/>
-                <a:t>Target architecture, platforms &amp; solutions, integration </a:t>
-              </a:r>
-            </a:p>
-          </p:txBody>
-        </p:sp>
-        <p:sp>
-          <p:nvSpPr>
-            <p:cNvPr id="157" name="TextBox 156">
-              <a:extLst>
-                <a:ext uri="{FF2B5EF4-FFF2-40B4-BE49-F238E27FC236}">
-                  <a16:creationId xmlns:a16="http://schemas.microsoft.com/office/drawing/2014/main" id="{3AA9ACAD-2309-6695-05C5-A00E27FC3BF5}"/>
-                </a:ext>
-              </a:extLst>
-            </p:cNvPr>
-            <p:cNvSpPr txBox="1"/>
-            <p:nvPr/>
-          </p:nvSpPr>
-          <p:spPr>
-            <a:xfrm>
-              <a:off x="6763057" y="2961596"/>
-              <a:ext cx="1884734" cy="738664"/>
-            </a:xfrm>
-            <a:prstGeom prst="rect">
-              <a:avLst/>
-            </a:prstGeom>
-            <a:noFill/>
-          </p:spPr>
-          <p:txBody>
-            <a:bodyPr wrap="square" lIns="0" tIns="0" rIns="0" bIns="0" rtlCol="0">
-              <a:spAutoFit/>
-            </a:bodyPr>
-            <a:lstStyle/>
-            <a:p>
-              <a:pPr>
-                <a:buSzPct val="100000"/>
-              </a:pPr>
-              <a:r>
-                <a:rPr lang="en-US" sz="1200" b="1" dirty="0">
-                  <a:latin typeface="DM Sans" pitchFamily="2" charset="0"/>
-                </a:rPr>
-                <a:t>Enablement</a:t>
-              </a:r>
-            </a:p>
-            <a:p>
-              <a:pPr>
-                <a:buSzPct val="100000"/>
-              </a:pPr>
-              <a:r>
-                <a:rPr lang="en-US" sz="1200" dirty="0"/>
-                <a:t>Culture, AI &amp; engineering toolbox, automation, agents, skills</a:t>
-              </a:r>
-            </a:p>
-          </p:txBody>
-        </p:sp>
-      </p:grpSp>
-      <p:grpSp>
-        <p:nvGrpSpPr>
-          <p:cNvPr id="11" name="Groep 10">
-            <a:extLst>
-              <a:ext uri="{FF2B5EF4-FFF2-40B4-BE49-F238E27FC236}">
-                <a16:creationId xmlns:a16="http://schemas.microsoft.com/office/drawing/2014/main" id="{B7CF1138-4C4E-266E-D6C0-860E7EEBF20D}"/>
-              </a:ext>
-            </a:extLst>
-          </p:cNvPr>
-          <p:cNvGrpSpPr/>
-          <p:nvPr/>
-        </p:nvGrpSpPr>
-        <p:grpSpPr>
-          <a:xfrm>
-            <a:off x="1875658" y="2896545"/>
-            <a:ext cx="7031757" cy="908874"/>
-            <a:chOff x="1875658" y="3934756"/>
-            <a:chExt cx="7031757" cy="908874"/>
-          </a:xfrm>
-        </p:grpSpPr>
-        <p:grpSp>
-          <p:nvGrpSpPr>
-            <p:cNvPr id="7" name="Groep 6">
-              <a:extLst>
-                <a:ext uri="{FF2B5EF4-FFF2-40B4-BE49-F238E27FC236}">
-                  <a16:creationId xmlns:a16="http://schemas.microsoft.com/office/drawing/2014/main" id="{FA87857C-EE64-83B6-1558-C834EDD82F05}"/>
-                </a:ext>
-              </a:extLst>
-            </p:cNvPr>
-            <p:cNvGrpSpPr/>
-            <p:nvPr/>
-          </p:nvGrpSpPr>
-          <p:grpSpPr>
-            <a:xfrm>
-              <a:off x="1875658" y="3934756"/>
-              <a:ext cx="7031757" cy="908874"/>
-              <a:chOff x="1875658" y="3934756"/>
-              <a:chExt cx="7031757" cy="908874"/>
-            </a:xfrm>
-          </p:grpSpPr>
-          <p:sp>
-            <p:nvSpPr>
-              <p:cNvPr id="162" name="Rectangle 161">
-                <a:extLst>
-                  <a:ext uri="{FF2B5EF4-FFF2-40B4-BE49-F238E27FC236}">
-                    <a16:creationId xmlns:a16="http://schemas.microsoft.com/office/drawing/2014/main" id="{72576AB9-B02D-3B55-BF90-C23F1A867704}"/>
-                  </a:ext>
-                </a:extLst>
-              </p:cNvPr>
-              <p:cNvSpPr/>
-              <p:nvPr/>
-            </p:nvSpPr>
-            <p:spPr>
-              <a:xfrm>
-                <a:off x="1875658" y="3934756"/>
-                <a:ext cx="3466168" cy="908874"/>
-              </a:xfrm>
-              <a:prstGeom prst="rect">
-                <a:avLst/>
-              </a:prstGeom>
-              <a:solidFill>
-                <a:schemeClr val="accent1">
-                  <a:lumMod val="20000"/>
-                  <a:lumOff val="80000"/>
-                </a:schemeClr>
-              </a:solidFill>
-              <a:ln>
-                <a:noFill/>
-              </a:ln>
-            </p:spPr>
-            <p:style>
-              <a:lnRef idx="2">
-                <a:schemeClr val="accent1">
-                  <a:shade val="15000"/>
-                </a:schemeClr>
-              </a:lnRef>
-              <a:fillRef idx="1">
-                <a:schemeClr val="accent1"/>
-              </a:fillRef>
-              <a:effectRef idx="0">
-                <a:schemeClr val="accent1"/>
-              </a:effectRef>
-              <a:fontRef idx="minor">
-                <a:schemeClr val="lt1"/>
-              </a:fontRef>
-            </p:style>
-            <p:txBody>
-              <a:bodyPr rtlCol="0" anchor="ctr"/>
-              <a:lstStyle/>
-              <a:p>
-                <a:pPr algn="ctr"/>
-                <a:endParaRPr lang="LID4096"/>
-              </a:p>
-            </p:txBody>
-          </p:sp>
-          <p:sp>
-            <p:nvSpPr>
-              <p:cNvPr id="165" name="Rectangle 164">
-                <a:extLst>
-                  <a:ext uri="{FF2B5EF4-FFF2-40B4-BE49-F238E27FC236}">
-                    <a16:creationId xmlns:a16="http://schemas.microsoft.com/office/drawing/2014/main" id="{C8B0295D-55E0-BE71-18DC-D49D90CE7050}"/>
-                  </a:ext>
-                </a:extLst>
-              </p:cNvPr>
-              <p:cNvSpPr/>
-              <p:nvPr/>
-            </p:nvSpPr>
-            <p:spPr>
-              <a:xfrm>
-                <a:off x="5441247" y="3934756"/>
-                <a:ext cx="3466168" cy="908874"/>
-              </a:xfrm>
-              <a:prstGeom prst="rect">
-                <a:avLst/>
-              </a:prstGeom>
-              <a:solidFill>
-                <a:schemeClr val="accent1">
-                  <a:lumMod val="20000"/>
-                  <a:lumOff val="80000"/>
-                </a:schemeClr>
-              </a:solidFill>
-              <a:ln>
-                <a:noFill/>
-              </a:ln>
-            </p:spPr>
-            <p:style>
-              <a:lnRef idx="2">
-                <a:schemeClr val="accent1">
-                  <a:shade val="15000"/>
-                </a:schemeClr>
-              </a:lnRef>
-              <a:fillRef idx="1">
-                <a:schemeClr val="accent1"/>
-              </a:fillRef>
-              <a:effectRef idx="0">
-                <a:schemeClr val="accent1"/>
-              </a:effectRef>
-              <a:fontRef idx="minor">
-                <a:schemeClr val="lt1"/>
-              </a:fontRef>
-            </p:style>
-            <p:txBody>
-              <a:bodyPr rtlCol="0" anchor="ctr"/>
-              <a:lstStyle/>
-              <a:p>
-                <a:pPr algn="ctr"/>
-                <a:endParaRPr lang="LID4096"/>
-              </a:p>
-            </p:txBody>
-          </p:sp>
-        </p:grpSp>
-        <p:sp>
-          <p:nvSpPr>
-            <p:cNvPr id="163" name="TextBox 162">
-              <a:extLst>
-                <a:ext uri="{FF2B5EF4-FFF2-40B4-BE49-F238E27FC236}">
-                  <a16:creationId xmlns:a16="http://schemas.microsoft.com/office/drawing/2014/main" id="{5062C2DE-E635-12D3-2B1A-52C3839E99E0}"/>
-                </a:ext>
-              </a:extLst>
-            </p:cNvPr>
-            <p:cNvSpPr txBox="1"/>
-            <p:nvPr/>
-          </p:nvSpPr>
-          <p:spPr>
-            <a:xfrm>
-              <a:off x="2010739" y="4001262"/>
-              <a:ext cx="2827304" cy="553998"/>
-            </a:xfrm>
-            <a:prstGeom prst="rect">
-              <a:avLst/>
-            </a:prstGeom>
-            <a:noFill/>
-          </p:spPr>
-          <p:txBody>
-            <a:bodyPr wrap="square" lIns="0" tIns="0" rIns="0" bIns="0" rtlCol="0">
-              <a:spAutoFit/>
-            </a:bodyPr>
-            <a:lstStyle/>
-            <a:p>
-              <a:pPr>
-                <a:buSzPct val="100000"/>
-              </a:pPr>
-              <a:r>
-                <a:rPr lang="en-US" sz="1200" b="1" dirty="0">
-                  <a:latin typeface="DM Sans" pitchFamily="2" charset="0"/>
-                </a:rPr>
-                <a:t>People</a:t>
-              </a:r>
-            </a:p>
-            <a:p>
-              <a:pPr>
-                <a:buSzPct val="100000"/>
-              </a:pPr>
-              <a:r>
-                <a:rPr lang="en-US" sz="1200" dirty="0"/>
-                <a:t>Roles, target skills &amp; gaps, org sizing, talent journey, training, team incentives</a:t>
-              </a:r>
-            </a:p>
-          </p:txBody>
-        </p:sp>
-        <p:sp>
-          <p:nvSpPr>
-            <p:cNvPr id="166" name="TextBox 165">
-              <a:extLst>
-                <a:ext uri="{FF2B5EF4-FFF2-40B4-BE49-F238E27FC236}">
-                  <a16:creationId xmlns:a16="http://schemas.microsoft.com/office/drawing/2014/main" id="{3C502B40-5DAD-8077-0D3C-B23D768C371B}"/>
-                </a:ext>
-              </a:extLst>
-            </p:cNvPr>
-            <p:cNvSpPr txBox="1"/>
-            <p:nvPr/>
-          </p:nvSpPr>
-          <p:spPr>
-            <a:xfrm>
-              <a:off x="5571088" y="4001262"/>
-              <a:ext cx="2341828" cy="553998"/>
-            </a:xfrm>
-            <a:prstGeom prst="rect">
-              <a:avLst/>
-            </a:prstGeom>
-            <a:noFill/>
-          </p:spPr>
-          <p:txBody>
-            <a:bodyPr wrap="square" lIns="0" tIns="0" rIns="0" bIns="0" rtlCol="0">
-              <a:spAutoFit/>
-            </a:bodyPr>
-            <a:lstStyle/>
-            <a:p>
-              <a:pPr>
-                <a:buSzPct val="100000"/>
-              </a:pPr>
-              <a:r>
-                <a:rPr lang="en-US" sz="1200" b="1" dirty="0">
-                  <a:latin typeface="DM Sans" pitchFamily="2" charset="0"/>
-                </a:rPr>
-                <a:t>Process</a:t>
-              </a:r>
-            </a:p>
-            <a:p>
-              <a:pPr>
-                <a:buSzPct val="100000"/>
-              </a:pPr>
-              <a:r>
-                <a:rPr lang="en-US" sz="1200" dirty="0"/>
-                <a:t>Org. design, cross-functional teams, product way-of-working</a:t>
-              </a:r>
-            </a:p>
-          </p:txBody>
-        </p:sp>
-      </p:grpSp>
-      <p:grpSp>
-        <p:nvGrpSpPr>
-          <p:cNvPr id="5" name="Groep 4">
-            <a:extLst>
-              <a:ext uri="{FF2B5EF4-FFF2-40B4-BE49-F238E27FC236}">
-                <a16:creationId xmlns:a16="http://schemas.microsoft.com/office/drawing/2014/main" id="{494DD1AA-4D45-71F0-9314-8C1607F0A66C}"/>
-              </a:ext>
-            </a:extLst>
-          </p:cNvPr>
-          <p:cNvGrpSpPr/>
-          <p:nvPr/>
-        </p:nvGrpSpPr>
-        <p:grpSpPr>
-          <a:xfrm>
-            <a:off x="1875657" y="1845667"/>
-            <a:ext cx="7031758" cy="908874"/>
-            <a:chOff x="1875657" y="1856048"/>
-            <a:chExt cx="7031758" cy="908874"/>
-          </a:xfrm>
-        </p:grpSpPr>
-        <p:sp>
-          <p:nvSpPr>
-            <p:cNvPr id="140" name="Rectangle 139">
-              <a:extLst>
-                <a:ext uri="{FF2B5EF4-FFF2-40B4-BE49-F238E27FC236}">
-                  <a16:creationId xmlns:a16="http://schemas.microsoft.com/office/drawing/2014/main" id="{803139DD-F140-2E13-C535-DBA32BD2249E}"/>
-                </a:ext>
-              </a:extLst>
-            </p:cNvPr>
-            <p:cNvSpPr/>
-            <p:nvPr/>
-          </p:nvSpPr>
-          <p:spPr>
-            <a:xfrm>
-              <a:off x="1875657" y="1856048"/>
-              <a:ext cx="7031758" cy="908874"/>
-            </a:xfrm>
-            <a:prstGeom prst="rect">
-              <a:avLst/>
-            </a:prstGeom>
-            <a:solidFill>
-              <a:schemeClr val="accent1">
-                <a:lumMod val="20000"/>
-                <a:lumOff val="80000"/>
-              </a:schemeClr>
-            </a:solidFill>
-            <a:ln>
-              <a:noFill/>
-            </a:ln>
-          </p:spPr>
-          <p:style>
-            <a:lnRef idx="2">
-              <a:schemeClr val="accent1">
-                <a:shade val="15000"/>
-              </a:schemeClr>
-            </a:lnRef>
-            <a:fillRef idx="1">
-              <a:schemeClr val="accent1"/>
-            </a:fillRef>
-            <a:effectRef idx="0">
-              <a:schemeClr val="accent1"/>
-            </a:effectRef>
-            <a:fontRef idx="minor">
-              <a:schemeClr val="lt1"/>
-            </a:fontRef>
-          </p:style>
-          <p:txBody>
-            <a:bodyPr rtlCol="0" anchor="ctr"/>
-            <a:lstStyle/>
-            <a:p>
-              <a:pPr algn="ctr"/>
-              <a:endParaRPr lang="LID4096"/>
-            </a:p>
-          </p:txBody>
-        </p:sp>
-        <p:sp>
-          <p:nvSpPr>
-            <p:cNvPr id="141" name="TextBox 140">
-              <a:extLst>
-                <a:ext uri="{FF2B5EF4-FFF2-40B4-BE49-F238E27FC236}">
-                  <a16:creationId xmlns:a16="http://schemas.microsoft.com/office/drawing/2014/main" id="{AE8C815B-7E18-CE74-1D37-2454B20069A0}"/>
-                </a:ext>
-              </a:extLst>
-            </p:cNvPr>
-            <p:cNvSpPr txBox="1"/>
-            <p:nvPr/>
-          </p:nvSpPr>
-          <p:spPr>
-            <a:xfrm>
-              <a:off x="2010738" y="1922554"/>
-              <a:ext cx="2959845" cy="553998"/>
-            </a:xfrm>
-            <a:prstGeom prst="rect">
-              <a:avLst/>
-            </a:prstGeom>
-            <a:noFill/>
-          </p:spPr>
-          <p:txBody>
-            <a:bodyPr wrap="square" lIns="0" tIns="0" rIns="0" bIns="0" rtlCol="0">
-              <a:spAutoFit/>
-            </a:bodyPr>
-            <a:lstStyle/>
-            <a:p>
-              <a:pPr>
-                <a:buSzPct val="100000"/>
-              </a:pPr>
-              <a:r>
-                <a:rPr lang="en-US" sz="1200" b="1" dirty="0">
-                  <a:latin typeface="DM Sans" pitchFamily="2" charset="0"/>
-                </a:rPr>
-                <a:t>Products</a:t>
-              </a:r>
-              <a:r>
-                <a:rPr lang="en-US" sz="1200" dirty="0">
-                  <a:latin typeface="DM Sans" pitchFamily="2" charset="0"/>
-                </a:rPr>
-                <a:t> -  by business units</a:t>
-              </a:r>
-            </a:p>
-            <a:p>
-              <a:pPr>
-                <a:buSzPct val="100000"/>
-              </a:pPr>
-              <a:r>
-                <a:rPr lang="en-US" sz="1200" dirty="0">
-                  <a:latin typeface="+mj-lt"/>
-                </a:rPr>
-                <a:t>Product vision &amp; objectives, products, persona’s, customer journeys, frictions</a:t>
-              </a:r>
-            </a:p>
-          </p:txBody>
-        </p:sp>
-        <p:sp>
-          <p:nvSpPr>
-            <p:cNvPr id="43" name="Rectangle 42">
-              <a:extLst>
-                <a:ext uri="{FF2B5EF4-FFF2-40B4-BE49-F238E27FC236}">
-                  <a16:creationId xmlns:a16="http://schemas.microsoft.com/office/drawing/2014/main" id="{77F83771-69DC-DE58-F493-65CEDB545E5C}"/>
-                </a:ext>
-              </a:extLst>
-            </p:cNvPr>
-            <p:cNvSpPr/>
-            <p:nvPr/>
-          </p:nvSpPr>
-          <p:spPr>
-            <a:xfrm>
-              <a:off x="6089213" y="1959390"/>
-              <a:ext cx="557171" cy="697758"/>
-            </a:xfrm>
-            <a:prstGeom prst="rect">
-              <a:avLst/>
-            </a:prstGeom>
-            <a:solidFill>
-              <a:schemeClr val="bg1"/>
-            </a:solidFill>
-            <a:ln>
-              <a:noFill/>
-            </a:ln>
-          </p:spPr>
-          <p:style>
-            <a:lnRef idx="2">
-              <a:schemeClr val="accent1">
-                <a:shade val="15000"/>
-              </a:schemeClr>
-            </a:lnRef>
-            <a:fillRef idx="1">
-              <a:schemeClr val="accent1"/>
-            </a:fillRef>
-            <a:effectRef idx="0">
-              <a:schemeClr val="accent1"/>
-            </a:effectRef>
-            <a:fontRef idx="minor">
-              <a:schemeClr val="lt1"/>
-            </a:fontRef>
-          </p:style>
-          <p:txBody>
-            <a:bodyPr rtlCol="0" anchor="ctr"/>
-            <a:lstStyle/>
-            <a:p>
-              <a:pPr algn="ctr"/>
-              <a:r>
-                <a:rPr lang="nl-NL" sz="1100" dirty="0">
-                  <a:solidFill>
-                    <a:schemeClr val="tx1"/>
-                  </a:solidFill>
-                  <a:latin typeface="+mj-lt"/>
-                </a:rPr>
-                <a:t>BU 1</a:t>
-              </a:r>
-              <a:endParaRPr lang="LID4096" sz="1100" dirty="0">
-                <a:solidFill>
-                  <a:schemeClr val="tx1"/>
-                </a:solidFill>
-                <a:latin typeface="+mj-lt"/>
-              </a:endParaRPr>
-            </a:p>
-          </p:txBody>
-        </p:sp>
-        <p:sp>
-          <p:nvSpPr>
-            <p:cNvPr id="44" name="Rectangle 43">
-              <a:extLst>
-                <a:ext uri="{FF2B5EF4-FFF2-40B4-BE49-F238E27FC236}">
-                  <a16:creationId xmlns:a16="http://schemas.microsoft.com/office/drawing/2014/main" id="{E95E7BBB-0795-3FA3-F052-AA3D1DD6498B}"/>
-                </a:ext>
-              </a:extLst>
-            </p:cNvPr>
-            <p:cNvSpPr/>
-            <p:nvPr/>
-          </p:nvSpPr>
-          <p:spPr>
-            <a:xfrm>
-              <a:off x="6720157" y="1959390"/>
-              <a:ext cx="557171" cy="697758"/>
-            </a:xfrm>
-            <a:prstGeom prst="rect">
-              <a:avLst/>
-            </a:prstGeom>
-            <a:solidFill>
-              <a:schemeClr val="bg1"/>
-            </a:solidFill>
-            <a:ln>
-              <a:noFill/>
-            </a:ln>
-          </p:spPr>
-          <p:style>
-            <a:lnRef idx="2">
-              <a:schemeClr val="accent1">
-                <a:shade val="15000"/>
-              </a:schemeClr>
-            </a:lnRef>
-            <a:fillRef idx="1">
-              <a:schemeClr val="accent1"/>
-            </a:fillRef>
-            <a:effectRef idx="0">
-              <a:schemeClr val="accent1"/>
-            </a:effectRef>
-            <a:fontRef idx="minor">
-              <a:schemeClr val="lt1"/>
-            </a:fontRef>
-          </p:style>
-          <p:txBody>
-            <a:bodyPr rtlCol="0" anchor="ctr"/>
-            <a:lstStyle/>
-            <a:p>
-              <a:pPr algn="ctr"/>
-              <a:r>
-                <a:rPr lang="nl-NL" sz="1100" dirty="0">
-                  <a:solidFill>
-                    <a:schemeClr val="tx1"/>
-                  </a:solidFill>
-                  <a:latin typeface="+mj-lt"/>
-                </a:rPr>
-                <a:t>BU 2</a:t>
-              </a:r>
-              <a:endParaRPr lang="LID4096" sz="1100" dirty="0">
-                <a:solidFill>
-                  <a:schemeClr val="tx1"/>
-                </a:solidFill>
-                <a:latin typeface="+mj-lt"/>
-              </a:endParaRPr>
-            </a:p>
-          </p:txBody>
-        </p:sp>
-        <p:sp>
-          <p:nvSpPr>
-            <p:cNvPr id="30" name="Rectangle 42">
-              <a:extLst>
-                <a:ext uri="{FF2B5EF4-FFF2-40B4-BE49-F238E27FC236}">
-                  <a16:creationId xmlns:a16="http://schemas.microsoft.com/office/drawing/2014/main" id="{66F9516B-8552-CDAF-75C4-8A281C36B6F8}"/>
-                </a:ext>
-              </a:extLst>
-            </p:cNvPr>
-            <p:cNvSpPr/>
-            <p:nvPr/>
-          </p:nvSpPr>
-          <p:spPr>
-            <a:xfrm>
-              <a:off x="7351101" y="1959390"/>
-              <a:ext cx="557171" cy="697758"/>
-            </a:xfrm>
-            <a:prstGeom prst="rect">
-              <a:avLst/>
-            </a:prstGeom>
-            <a:solidFill>
-              <a:schemeClr val="bg1"/>
-            </a:solidFill>
-            <a:ln>
-              <a:noFill/>
-            </a:ln>
-          </p:spPr>
-          <p:style>
-            <a:lnRef idx="2">
-              <a:schemeClr val="accent1">
-                <a:shade val="15000"/>
-              </a:schemeClr>
-            </a:lnRef>
-            <a:fillRef idx="1">
-              <a:schemeClr val="accent1"/>
-            </a:fillRef>
-            <a:effectRef idx="0">
-              <a:schemeClr val="accent1"/>
-            </a:effectRef>
-            <a:fontRef idx="minor">
-              <a:schemeClr val="lt1"/>
-            </a:fontRef>
-          </p:style>
-          <p:txBody>
-            <a:bodyPr rtlCol="0" anchor="ctr"/>
-            <a:lstStyle/>
-            <a:p>
-              <a:pPr algn="ctr"/>
-              <a:r>
-                <a:rPr lang="nl-NL" sz="1100" dirty="0">
-                  <a:solidFill>
-                    <a:schemeClr val="tx1"/>
-                  </a:solidFill>
-                  <a:latin typeface="+mj-lt"/>
-                </a:rPr>
-                <a:t>BU 3</a:t>
-              </a:r>
-              <a:endParaRPr lang="LID4096" sz="1100" dirty="0">
-                <a:solidFill>
-                  <a:schemeClr val="tx1"/>
-                </a:solidFill>
-                <a:latin typeface="+mj-lt"/>
-              </a:endParaRPr>
-            </a:p>
-          </p:txBody>
-        </p:sp>
-        <p:sp>
-          <p:nvSpPr>
-            <p:cNvPr id="32" name="Rectangle 43">
-              <a:extLst>
-                <a:ext uri="{FF2B5EF4-FFF2-40B4-BE49-F238E27FC236}">
-                  <a16:creationId xmlns:a16="http://schemas.microsoft.com/office/drawing/2014/main" id="{005EA54E-A05B-E9A5-FE26-09518F608969}"/>
-                </a:ext>
-              </a:extLst>
-            </p:cNvPr>
-            <p:cNvSpPr/>
-            <p:nvPr/>
-          </p:nvSpPr>
-          <p:spPr>
-            <a:xfrm>
-              <a:off x="7982046" y="1959390"/>
-              <a:ext cx="557171" cy="697758"/>
-            </a:xfrm>
-            <a:prstGeom prst="rect">
-              <a:avLst/>
-            </a:prstGeom>
-            <a:solidFill>
-              <a:schemeClr val="bg1"/>
-            </a:solidFill>
-            <a:ln>
-              <a:noFill/>
-            </a:ln>
-          </p:spPr>
-          <p:style>
-            <a:lnRef idx="2">
-              <a:schemeClr val="accent1">
-                <a:shade val="15000"/>
-              </a:schemeClr>
-            </a:lnRef>
-            <a:fillRef idx="1">
-              <a:schemeClr val="accent1"/>
-            </a:fillRef>
-            <a:effectRef idx="0">
-              <a:schemeClr val="accent1"/>
-            </a:effectRef>
-            <a:fontRef idx="minor">
-              <a:schemeClr val="lt1"/>
-            </a:fontRef>
-          </p:style>
-          <p:txBody>
-            <a:bodyPr rtlCol="0" anchor="ctr"/>
-            <a:lstStyle/>
-            <a:p>
-              <a:pPr algn="ctr"/>
-              <a:r>
-                <a:rPr lang="nl-NL" sz="1100" dirty="0">
-                  <a:solidFill>
-                    <a:schemeClr val="tx1"/>
-                  </a:solidFill>
-                  <a:latin typeface="+mj-lt"/>
-                </a:rPr>
-                <a:t>BU 4</a:t>
-              </a:r>
-              <a:endParaRPr lang="LID4096" sz="1100" dirty="0">
-                <a:solidFill>
-                  <a:schemeClr val="tx1"/>
-                </a:solidFill>
-                <a:latin typeface="+mj-lt"/>
-              </a:endParaRPr>
-            </a:p>
-          </p:txBody>
-        </p:sp>
       </p:grpSp>
       <p:grpSp>
         <p:nvGrpSpPr>
@@ -6028,7 +6448,7 @@
                 </a:pPr>
                 <a:r>
                   <a:rPr lang="en-US" sz="1200" b="1" dirty="0">
-                    <a:latin typeface="+mj-lt"/>
+                    <a:latin typeface="DM Sans" pitchFamily="2" charset="0"/>
                   </a:rPr>
                   <a:t>Value</a:t>
                 </a:r>
@@ -6147,7 +6567,7 @@
                 </a:pPr>
                 <a:r>
                   <a:rPr lang="en-US" sz="1200" b="1" dirty="0">
-                    <a:latin typeface="+mj-lt"/>
+                    <a:latin typeface="DM Sans" pitchFamily="2" charset="0"/>
                   </a:rPr>
                   <a:t>Capabilities</a:t>
                 </a:r>
@@ -6266,7 +6686,7 @@
                 </a:pPr>
                 <a:r>
                   <a:rPr lang="en-US" sz="1200" b="1" dirty="0">
-                    <a:latin typeface="+mj-lt"/>
+                    <a:latin typeface="DM Sans" pitchFamily="2" charset="0"/>
                   </a:rPr>
                   <a:t>Trust</a:t>
                 </a:r>
@@ -6281,7 +6701,417 @@
     </p:spTree>
     <p:extLst>
       <p:ext uri="{BB962C8B-B14F-4D97-AF65-F5344CB8AC3E}">
-        <p14:creationId xmlns:p14="http://schemas.microsoft.com/office/powerpoint/2010/main" val="3155234622"/>
+        <p14:creationId xmlns:p14="http://schemas.microsoft.com/office/powerpoint/2010/main" val="3418198643"/>
+      </p:ext>
+    </p:extLst>
+  </p:cSld>
+  <p:clrMapOvr>
+    <a:masterClrMapping/>
+  </p:clrMapOvr>
+</p:sld>
+</file>
+
+<file path=ppt/slides/slide3.xml><?xml version="1.0" encoding="utf-8"?>
+<p:sld xmlns:a="http://schemas.openxmlformats.org/drawingml/2006/main" xmlns:r="http://schemas.openxmlformats.org/officeDocument/2006/relationships" xmlns:p="http://schemas.openxmlformats.org/presentationml/2006/main">
+  <p:cSld>
+    <p:spTree>
+      <p:nvGrpSpPr>
+        <p:cNvPr id="1" name="">
+          <a:extLst>
+            <a:ext uri="{FF2B5EF4-FFF2-40B4-BE49-F238E27FC236}">
+              <a16:creationId xmlns:a16="http://schemas.microsoft.com/office/drawing/2014/main" id="{43EB92B7-EBBB-29B1-D2DF-A9F3C5FCA28C}"/>
+            </a:ext>
+          </a:extLst>
+        </p:cNvPr>
+        <p:cNvGrpSpPr/>
+        <p:nvPr/>
+      </p:nvGrpSpPr>
+      <p:grpSpPr>
+        <a:xfrm>
+          <a:off x="0" y="0"/>
+          <a:ext cx="0" cy="0"/>
+          <a:chOff x="0" y="0"/>
+          <a:chExt cx="0" cy="0"/>
+        </a:xfrm>
+      </p:grpSpPr>
+      <p:sp>
+        <p:nvSpPr>
+          <p:cNvPr id="9" name="Rechthoek 8">
+            <a:extLst>
+              <a:ext uri="{FF2B5EF4-FFF2-40B4-BE49-F238E27FC236}">
+                <a16:creationId xmlns:a16="http://schemas.microsoft.com/office/drawing/2014/main" id="{CC84EF3A-5EB3-5F47-BFEE-826AAB71E932}"/>
+              </a:ext>
+            </a:extLst>
+          </p:cNvPr>
+          <p:cNvSpPr/>
+          <p:nvPr/>
+        </p:nvSpPr>
+        <p:spPr>
+          <a:xfrm>
+            <a:off x="2293749" y="1363851"/>
+            <a:ext cx="3802251" cy="4339525"/>
+          </a:xfrm>
+          <a:prstGeom prst="rect">
+            <a:avLst/>
+          </a:prstGeom>
+          <a:solidFill>
+            <a:schemeClr val="bg1"/>
+          </a:solidFill>
+        </p:spPr>
+        <p:style>
+          <a:lnRef idx="2">
+            <a:schemeClr val="accent1">
+              <a:shade val="15000"/>
+            </a:schemeClr>
+          </a:lnRef>
+          <a:fillRef idx="1">
+            <a:schemeClr val="accent1"/>
+          </a:fillRef>
+          <a:effectRef idx="0">
+            <a:schemeClr val="accent1"/>
+          </a:effectRef>
+          <a:fontRef idx="minor">
+            <a:schemeClr val="lt1"/>
+          </a:fontRef>
+        </p:style>
+        <p:txBody>
+          <a:bodyPr rtlCol="0" anchor="ctr"/>
+          <a:lstStyle/>
+          <a:p>
+            <a:pPr algn="ctr"/>
+            <a:endParaRPr lang="en-GB"/>
+          </a:p>
+        </p:txBody>
+      </p:sp>
+      <p:sp>
+        <p:nvSpPr>
+          <p:cNvPr id="15" name="Rechthoek 14">
+            <a:extLst>
+              <a:ext uri="{FF2B5EF4-FFF2-40B4-BE49-F238E27FC236}">
+                <a16:creationId xmlns:a16="http://schemas.microsoft.com/office/drawing/2014/main" id="{DDABBDDD-55CB-C8EF-4B10-3E83B9F407D5}"/>
+              </a:ext>
+            </a:extLst>
+          </p:cNvPr>
+          <p:cNvSpPr/>
+          <p:nvPr/>
+        </p:nvSpPr>
+        <p:spPr>
+          <a:xfrm>
+            <a:off x="2293749" y="2060575"/>
+            <a:ext cx="3802251" cy="1486847"/>
+          </a:xfrm>
+          <a:prstGeom prst="rect">
+            <a:avLst/>
+          </a:prstGeom>
+        </p:spPr>
+        <p:style>
+          <a:lnRef idx="2">
+            <a:schemeClr val="accent1">
+              <a:shade val="15000"/>
+            </a:schemeClr>
+          </a:lnRef>
+          <a:fillRef idx="1">
+            <a:schemeClr val="accent1"/>
+          </a:fillRef>
+          <a:effectRef idx="0">
+            <a:schemeClr val="accent1"/>
+          </a:effectRef>
+          <a:fontRef idx="minor">
+            <a:schemeClr val="lt1"/>
+          </a:fontRef>
+        </p:style>
+        <p:txBody>
+          <a:bodyPr rtlCol="0" anchor="ctr"/>
+          <a:lstStyle/>
+          <a:p>
+            <a:pPr algn="ctr"/>
+            <a:endParaRPr lang="en-GB"/>
+          </a:p>
+        </p:txBody>
+      </p:sp>
+      <p:sp>
+        <p:nvSpPr>
+          <p:cNvPr id="16" name="Rechthoek 15">
+            <a:extLst>
+              <a:ext uri="{FF2B5EF4-FFF2-40B4-BE49-F238E27FC236}">
+                <a16:creationId xmlns:a16="http://schemas.microsoft.com/office/drawing/2014/main" id="{AA37D329-A903-3766-3C06-CB0CED2DA033}"/>
+              </a:ext>
+            </a:extLst>
+          </p:cNvPr>
+          <p:cNvSpPr/>
+          <p:nvPr/>
+        </p:nvSpPr>
+        <p:spPr>
+          <a:xfrm>
+            <a:off x="2293749" y="5145437"/>
+            <a:ext cx="3802251" cy="557939"/>
+          </a:xfrm>
+          <a:prstGeom prst="rect">
+            <a:avLst/>
+          </a:prstGeom>
+        </p:spPr>
+        <p:style>
+          <a:lnRef idx="2">
+            <a:schemeClr val="accent1">
+              <a:shade val="15000"/>
+            </a:schemeClr>
+          </a:lnRef>
+          <a:fillRef idx="1">
+            <a:schemeClr val="accent1"/>
+          </a:fillRef>
+          <a:effectRef idx="0">
+            <a:schemeClr val="accent1"/>
+          </a:effectRef>
+          <a:fontRef idx="minor">
+            <a:schemeClr val="lt1"/>
+          </a:fontRef>
+        </p:style>
+        <p:txBody>
+          <a:bodyPr rtlCol="0" anchor="ctr"/>
+          <a:lstStyle/>
+          <a:p>
+            <a:pPr algn="ctr"/>
+            <a:endParaRPr lang="en-GB"/>
+          </a:p>
+        </p:txBody>
+      </p:sp>
+      <p:sp>
+        <p:nvSpPr>
+          <p:cNvPr id="3" name="Title 2">
+            <a:extLst>
+              <a:ext uri="{FF2B5EF4-FFF2-40B4-BE49-F238E27FC236}">
+                <a16:creationId xmlns:a16="http://schemas.microsoft.com/office/drawing/2014/main" id="{3435802E-CA5A-8ED3-1E31-A1B56D91934B}"/>
+              </a:ext>
+            </a:extLst>
+          </p:cNvPr>
+          <p:cNvSpPr>
+            <a:spLocks noGrp="1"/>
+          </p:cNvSpPr>
+          <p:nvPr>
+            <p:ph type="title"/>
+          </p:nvPr>
+        </p:nvSpPr>
+        <p:spPr/>
+        <p:txBody>
+          <a:bodyPr>
+            <a:normAutofit/>
+          </a:bodyPr>
+          <a:lstStyle/>
+          <a:p>
+            <a:r>
+              <a:rPr lang="en-US" dirty="0"/>
+              <a:t>Book cover</a:t>
+            </a:r>
+          </a:p>
+        </p:txBody>
+      </p:sp>
+      <p:sp>
+        <p:nvSpPr>
+          <p:cNvPr id="4" name="Text Placeholder 3">
+            <a:extLst>
+              <a:ext uri="{FF2B5EF4-FFF2-40B4-BE49-F238E27FC236}">
+                <a16:creationId xmlns:a16="http://schemas.microsoft.com/office/drawing/2014/main" id="{FB27AA5F-D60F-AD07-0D15-90F766B21BF7}"/>
+              </a:ext>
+            </a:extLst>
+          </p:cNvPr>
+          <p:cNvSpPr>
+            <a:spLocks noGrp="1"/>
+          </p:cNvSpPr>
+          <p:nvPr>
+            <p:ph type="body" sz="quarter" idx="10"/>
+          </p:nvPr>
+        </p:nvSpPr>
+        <p:spPr/>
+        <p:txBody>
+          <a:bodyPr/>
+          <a:lstStyle/>
+          <a:p>
+            <a:r>
+              <a:rPr lang="en-US" dirty="0"/>
+              <a:t>The Agentic </a:t>
+            </a:r>
+            <a:r>
+              <a:rPr lang="en-US" dirty="0" err="1"/>
+              <a:t>Organisation</a:t>
+            </a:r>
+            <a:endParaRPr lang="en-US" dirty="0"/>
+          </a:p>
+        </p:txBody>
+      </p:sp>
+      <p:sp>
+        <p:nvSpPr>
+          <p:cNvPr id="11" name="Tekstvak 10">
+            <a:extLst>
+              <a:ext uri="{FF2B5EF4-FFF2-40B4-BE49-F238E27FC236}">
+                <a16:creationId xmlns:a16="http://schemas.microsoft.com/office/drawing/2014/main" id="{CC95AE2B-BF3B-3A3F-5485-0A7F2025FD71}"/>
+              </a:ext>
+            </a:extLst>
+          </p:cNvPr>
+          <p:cNvSpPr txBox="1"/>
+          <p:nvPr/>
+        </p:nvSpPr>
+        <p:spPr>
+          <a:xfrm>
+            <a:off x="3555917" y="5301295"/>
+            <a:ext cx="1277914" cy="246221"/>
+          </a:xfrm>
+          <a:prstGeom prst="rect">
+            <a:avLst/>
+          </a:prstGeom>
+          <a:noFill/>
+          <a:effectLst>
+            <a:outerShdw blurRad="12700" dist="12700" dir="2700000" algn="tl" rotWithShape="0">
+              <a:prstClr val="black">
+                <a:alpha val="16000"/>
+              </a:prstClr>
+            </a:outerShdw>
+          </a:effectLst>
+        </p:spPr>
+        <p:txBody>
+          <a:bodyPr wrap="none" rtlCol="0">
+            <a:spAutoFit/>
+          </a:bodyPr>
+          <a:lstStyle/>
+          <a:p>
+            <a:pPr algn="ctr"/>
+            <a:r>
+              <a:rPr lang="en-GB" sz="1000" dirty="0">
+                <a:latin typeface="Garamond" panose="02020404030301010803" pitchFamily="18" charset="0"/>
+              </a:rPr>
+              <a:t>Stephan Hartgers-Rus</a:t>
+            </a:r>
+          </a:p>
+        </p:txBody>
+      </p:sp>
+      <p:pic>
+        <p:nvPicPr>
+          <p:cNvPr id="20" name="Afbeelding 19" descr="Afbeelding met schoeisel, kleding, person, persoon&#10;&#10;Door AI gegenereerde inhoud is mogelijk onjuist.">
+            <a:extLst>
+              <a:ext uri="{FF2B5EF4-FFF2-40B4-BE49-F238E27FC236}">
+                <a16:creationId xmlns:a16="http://schemas.microsoft.com/office/drawing/2014/main" id="{131CC11A-5448-A817-E1C6-68413F845848}"/>
+              </a:ext>
+            </a:extLst>
+          </p:cNvPr>
+          <p:cNvPicPr>
+            <a:picLocks noChangeAspect="1"/>
+          </p:cNvPicPr>
+          <p:nvPr/>
+        </p:nvPicPr>
+        <p:blipFill>
+          <a:blip r:embed="rId3">
+            <a:extLst>
+              <a:ext uri="{28A0092B-C50C-407E-A947-70E740481C1C}">
+                <a14:useLocalDpi xmlns:a14="http://schemas.microsoft.com/office/drawing/2010/main" val="0"/>
+              </a:ext>
+            </a:extLst>
+          </a:blip>
+          <a:stretch>
+            <a:fillRect/>
+          </a:stretch>
+        </p:blipFill>
+        <p:spPr>
+          <a:xfrm>
+            <a:off x="6601654" y="1363851"/>
+            <a:ext cx="2903284" cy="4354926"/>
+          </a:xfrm>
+          <a:prstGeom prst="rect">
+            <a:avLst/>
+          </a:prstGeom>
+        </p:spPr>
+      </p:pic>
+      <p:sp>
+        <p:nvSpPr>
+          <p:cNvPr id="6" name="Tekstvak 5">
+            <a:extLst>
+              <a:ext uri="{FF2B5EF4-FFF2-40B4-BE49-F238E27FC236}">
+                <a16:creationId xmlns:a16="http://schemas.microsoft.com/office/drawing/2014/main" id="{011CADC5-0494-041A-23A1-8C77774988E9}"/>
+              </a:ext>
+            </a:extLst>
+          </p:cNvPr>
+          <p:cNvSpPr txBox="1"/>
+          <p:nvPr/>
+        </p:nvSpPr>
+        <p:spPr>
+          <a:xfrm>
+            <a:off x="6728976" y="1488311"/>
+            <a:ext cx="2648640" cy="819263"/>
+          </a:xfrm>
+          <a:prstGeom prst="rect">
+            <a:avLst/>
+          </a:prstGeom>
+          <a:noFill/>
+          <a:effectLst/>
+        </p:spPr>
+        <p:txBody>
+          <a:bodyPr wrap="square" rtlCol="0">
+            <a:spAutoFit/>
+          </a:bodyPr>
+          <a:lstStyle/>
+          <a:p>
+            <a:pPr algn="ctr">
+              <a:lnSpc>
+                <a:spcPts val="2900"/>
+              </a:lnSpc>
+            </a:pPr>
+            <a:r>
+              <a:rPr lang="en-GB" sz="2400" b="1" dirty="0">
+                <a:solidFill>
+                  <a:srgbClr val="4B5B6B"/>
+                </a:solidFill>
+                <a:latin typeface="Avenir Next LT Pro" panose="020B0504020202020204" pitchFamily="34" charset="0"/>
+              </a:rPr>
+              <a:t>THE AGENTIC ORGANISATION</a:t>
+            </a:r>
+          </a:p>
+        </p:txBody>
+      </p:sp>
+      <p:sp>
+        <p:nvSpPr>
+          <p:cNvPr id="7" name="Tekstvak 6">
+            <a:extLst>
+              <a:ext uri="{FF2B5EF4-FFF2-40B4-BE49-F238E27FC236}">
+                <a16:creationId xmlns:a16="http://schemas.microsoft.com/office/drawing/2014/main" id="{2DE3A319-CEAC-921D-D6E0-4F2919039E15}"/>
+              </a:ext>
+            </a:extLst>
+          </p:cNvPr>
+          <p:cNvSpPr txBox="1"/>
+          <p:nvPr/>
+        </p:nvSpPr>
+        <p:spPr>
+          <a:xfrm>
+            <a:off x="6615806" y="2226798"/>
+            <a:ext cx="2874980" cy="369332"/>
+          </a:xfrm>
+          <a:prstGeom prst="rect">
+            <a:avLst/>
+          </a:prstGeom>
+          <a:noFill/>
+          <a:effectLst/>
+        </p:spPr>
+        <p:txBody>
+          <a:bodyPr wrap="square" rtlCol="0">
+            <a:spAutoFit/>
+          </a:bodyPr>
+          <a:lstStyle/>
+          <a:p>
+            <a:pPr algn="ctr"/>
+            <a:r>
+              <a:rPr lang="en-GB" sz="900" dirty="0">
+                <a:solidFill>
+                  <a:srgbClr val="4B5B6B"/>
+                </a:solidFill>
+                <a:latin typeface="Avenir Next LT Pro Demi" panose="020B0704020202020204" pitchFamily="34" charset="0"/>
+                <a:cs typeface="Segoe UI" panose="020B0502040204020203" pitchFamily="34" charset="0"/>
+              </a:rPr>
+              <a:t>A TRANSFORMATION FRAMEWORK FOR EUROPEAN COMPANIES</a:t>
+            </a:r>
+          </a:p>
+        </p:txBody>
+      </p:sp>
+    </p:spTree>
+    <p:extLst>
+      <p:ext uri="{BB962C8B-B14F-4D97-AF65-F5344CB8AC3E}">
+        <p14:creationId xmlns:p14="http://schemas.microsoft.com/office/powerpoint/2010/main" val="2876593574"/>
       </p:ext>
     </p:extLst>
   </p:cSld>

--- a/input/AI Transformation framework for European CEO’s.pptx
+++ b/input/AI Transformation framework for European CEO’s.pptx
@@ -6736,214 +6736,155 @@
       </p:grpSpPr>
       <p:sp>
         <p:nvSpPr>
-          <p:cNvPr id="9" name="Rechthoek 8">
-            <a:extLst>
-              <a:ext uri="{FF2B5EF4-FFF2-40B4-BE49-F238E27FC236}">
-                <a16:creationId xmlns:a16="http://schemas.microsoft.com/office/drawing/2014/main" id="{CC84EF3A-5EB3-5F47-BFEE-826AAB71E932}"/>
-              </a:ext>
-            </a:extLst>
-          </p:cNvPr>
-          <p:cNvSpPr/>
+          <p:cNvPr id="3" name="Title 2">
+            <a:extLst>
+              <a:ext uri="{FF2B5EF4-FFF2-40B4-BE49-F238E27FC236}">
+                <a16:creationId xmlns:a16="http://schemas.microsoft.com/office/drawing/2014/main" id="{3435802E-CA5A-8ED3-1E31-A1B56D91934B}"/>
+              </a:ext>
+            </a:extLst>
+          </p:cNvPr>
+          <p:cNvSpPr>
+            <a:spLocks noGrp="1"/>
+          </p:cNvSpPr>
+          <p:nvPr>
+            <p:ph type="title"/>
+          </p:nvPr>
+        </p:nvSpPr>
+        <p:spPr/>
+        <p:txBody>
+          <a:bodyPr>
+            <a:normAutofit/>
+          </a:bodyPr>
+          <a:lstStyle/>
+          <a:p>
+            <a:r>
+              <a:rPr lang="en-US" dirty="0"/>
+              <a:t>Book cover</a:t>
+            </a:r>
+          </a:p>
+        </p:txBody>
+      </p:sp>
+      <p:sp>
+        <p:nvSpPr>
+          <p:cNvPr id="4" name="Text Placeholder 3">
+            <a:extLst>
+              <a:ext uri="{FF2B5EF4-FFF2-40B4-BE49-F238E27FC236}">
+                <a16:creationId xmlns:a16="http://schemas.microsoft.com/office/drawing/2014/main" id="{FB27AA5F-D60F-AD07-0D15-90F766B21BF7}"/>
+              </a:ext>
+            </a:extLst>
+          </p:cNvPr>
+          <p:cNvSpPr>
+            <a:spLocks noGrp="1"/>
+          </p:cNvSpPr>
+          <p:nvPr>
+            <p:ph type="body" sz="quarter" idx="10"/>
+          </p:nvPr>
+        </p:nvSpPr>
+        <p:spPr/>
+        <p:txBody>
+          <a:bodyPr/>
+          <a:lstStyle/>
+          <a:p>
+            <a:r>
+              <a:rPr lang="en-US" dirty="0"/>
+              <a:t>The Agentic </a:t>
+            </a:r>
+            <a:r>
+              <a:rPr lang="en-US" dirty="0" err="1"/>
+              <a:t>Organisation</a:t>
+            </a:r>
+            <a:endParaRPr lang="en-US" dirty="0"/>
+          </a:p>
+        </p:txBody>
+      </p:sp>
+      <p:pic>
+        <p:nvPicPr>
+          <p:cNvPr id="20" name="Afbeelding 19" descr="Afbeelding met schoeisel, kleding, person, persoon&#10;&#10;Door AI gegenereerde inhoud is mogelijk onjuist.">
+            <a:extLst>
+              <a:ext uri="{FF2B5EF4-FFF2-40B4-BE49-F238E27FC236}">
+                <a16:creationId xmlns:a16="http://schemas.microsoft.com/office/drawing/2014/main" id="{131CC11A-5448-A817-E1C6-68413F845848}"/>
+              </a:ext>
+            </a:extLst>
+          </p:cNvPr>
+          <p:cNvPicPr>
+            <a:picLocks noChangeAspect="1"/>
+          </p:cNvPicPr>
           <p:nvPr/>
-        </p:nvSpPr>
+        </p:nvPicPr>
+        <p:blipFill>
+          <a:blip r:embed="rId3">
+            <a:extLst>
+              <a:ext uri="{28A0092B-C50C-407E-A947-70E740481C1C}">
+                <a14:useLocalDpi xmlns:a14="http://schemas.microsoft.com/office/drawing/2010/main" val="0"/>
+              </a:ext>
+            </a:extLst>
+          </a:blip>
+          <a:stretch>
+            <a:fillRect/>
+          </a:stretch>
+        </p:blipFill>
         <p:spPr>
           <a:xfrm>
-            <a:off x="2293749" y="1363851"/>
-            <a:ext cx="3802251" cy="4339525"/>
-          </a:xfrm>
-          <a:prstGeom prst="rect">
-            <a:avLst/>
-          </a:prstGeom>
-          <a:solidFill>
-            <a:schemeClr val="bg1"/>
-          </a:solidFill>
-        </p:spPr>
-        <p:style>
-          <a:lnRef idx="2">
-            <a:schemeClr val="accent1">
-              <a:shade val="15000"/>
-            </a:schemeClr>
-          </a:lnRef>
-          <a:fillRef idx="1">
-            <a:schemeClr val="accent1"/>
-          </a:fillRef>
-          <a:effectRef idx="0">
-            <a:schemeClr val="accent1"/>
-          </a:effectRef>
-          <a:fontRef idx="minor">
-            <a:schemeClr val="lt1"/>
-          </a:fontRef>
-        </p:style>
-        <p:txBody>
-          <a:bodyPr rtlCol="0" anchor="ctr"/>
-          <a:lstStyle/>
-          <a:p>
-            <a:pPr algn="ctr"/>
-            <a:endParaRPr lang="en-GB"/>
-          </a:p>
-        </p:txBody>
-      </p:sp>
-      <p:sp>
-        <p:nvSpPr>
-          <p:cNvPr id="15" name="Rechthoek 14">
-            <a:extLst>
-              <a:ext uri="{FF2B5EF4-FFF2-40B4-BE49-F238E27FC236}">
-                <a16:creationId xmlns:a16="http://schemas.microsoft.com/office/drawing/2014/main" id="{DDABBDDD-55CB-C8EF-4B10-3E83B9F407D5}"/>
-              </a:ext>
-            </a:extLst>
-          </p:cNvPr>
-          <p:cNvSpPr/>
-          <p:nvPr/>
-        </p:nvSpPr>
-        <p:spPr>
-          <a:xfrm>
-            <a:off x="2293749" y="2060575"/>
-            <a:ext cx="3802251" cy="1486847"/>
+            <a:off x="490538" y="1363851"/>
+            <a:ext cx="2903284" cy="4354926"/>
           </a:xfrm>
           <a:prstGeom prst="rect">
             <a:avLst/>
           </a:prstGeom>
         </p:spPr>
-        <p:style>
-          <a:lnRef idx="2">
-            <a:schemeClr val="accent1">
-              <a:shade val="15000"/>
-            </a:schemeClr>
-          </a:lnRef>
-          <a:fillRef idx="1">
-            <a:schemeClr val="accent1"/>
-          </a:fillRef>
-          <a:effectRef idx="0">
-            <a:schemeClr val="accent1"/>
-          </a:effectRef>
-          <a:fontRef idx="minor">
-            <a:schemeClr val="lt1"/>
-          </a:fontRef>
-        </p:style>
-        <p:txBody>
-          <a:bodyPr rtlCol="0" anchor="ctr"/>
-          <a:lstStyle/>
-          <a:p>
-            <a:pPr algn="ctr"/>
-            <a:endParaRPr lang="en-GB"/>
-          </a:p>
-        </p:txBody>
-      </p:sp>
-      <p:sp>
-        <p:nvSpPr>
-          <p:cNvPr id="16" name="Rechthoek 15">
-            <a:extLst>
-              <a:ext uri="{FF2B5EF4-FFF2-40B4-BE49-F238E27FC236}">
-                <a16:creationId xmlns:a16="http://schemas.microsoft.com/office/drawing/2014/main" id="{AA37D329-A903-3766-3C06-CB0CED2DA033}"/>
-              </a:ext>
-            </a:extLst>
-          </p:cNvPr>
-          <p:cNvSpPr/>
+      </p:pic>
+      <p:sp>
+        <p:nvSpPr>
+          <p:cNvPr id="6" name="Tekstvak 5">
+            <a:extLst>
+              <a:ext uri="{FF2B5EF4-FFF2-40B4-BE49-F238E27FC236}">
+                <a16:creationId xmlns:a16="http://schemas.microsoft.com/office/drawing/2014/main" id="{011CADC5-0494-041A-23A1-8C77774988E9}"/>
+              </a:ext>
+            </a:extLst>
+          </p:cNvPr>
+          <p:cNvSpPr txBox="1"/>
           <p:nvPr/>
         </p:nvSpPr>
         <p:spPr>
           <a:xfrm>
-            <a:off x="2293749" y="5145437"/>
-            <a:ext cx="3802251" cy="557939"/>
+            <a:off x="504690" y="1450211"/>
+            <a:ext cx="2874980" cy="819199"/>
           </a:xfrm>
           <a:prstGeom prst="rect">
             <a:avLst/>
           </a:prstGeom>
+          <a:noFill/>
+          <a:effectLst/>
         </p:spPr>
-        <p:style>
-          <a:lnRef idx="2">
-            <a:schemeClr val="accent1">
-              <a:shade val="15000"/>
-            </a:schemeClr>
-          </a:lnRef>
-          <a:fillRef idx="1">
-            <a:schemeClr val="accent1"/>
-          </a:fillRef>
-          <a:effectRef idx="0">
-            <a:schemeClr val="accent1"/>
-          </a:effectRef>
-          <a:fontRef idx="minor">
-            <a:schemeClr val="lt1"/>
-          </a:fontRef>
-        </p:style>
-        <p:txBody>
-          <a:bodyPr rtlCol="0" anchor="ctr"/>
-          <a:lstStyle/>
-          <a:p>
-            <a:pPr algn="ctr"/>
-            <a:endParaRPr lang="en-GB"/>
-          </a:p>
-        </p:txBody>
-      </p:sp>
-      <p:sp>
-        <p:nvSpPr>
-          <p:cNvPr id="3" name="Title 2">
-            <a:extLst>
-              <a:ext uri="{FF2B5EF4-FFF2-40B4-BE49-F238E27FC236}">
-                <a16:creationId xmlns:a16="http://schemas.microsoft.com/office/drawing/2014/main" id="{3435802E-CA5A-8ED3-1E31-A1B56D91934B}"/>
-              </a:ext>
-            </a:extLst>
-          </p:cNvPr>
-          <p:cNvSpPr>
-            <a:spLocks noGrp="1"/>
-          </p:cNvSpPr>
-          <p:nvPr>
-            <p:ph type="title"/>
-          </p:nvPr>
-        </p:nvSpPr>
-        <p:spPr/>
-        <p:txBody>
-          <a:bodyPr>
-            <a:normAutofit/>
+        <p:txBody>
+          <a:bodyPr wrap="square" rtlCol="0">
+            <a:spAutoFit/>
           </a:bodyPr>
           <a:lstStyle/>
           <a:p>
-            <a:r>
-              <a:rPr lang="en-US" dirty="0"/>
-              <a:t>Book cover</a:t>
-            </a:r>
-          </a:p>
-        </p:txBody>
-      </p:sp>
-      <p:sp>
-        <p:nvSpPr>
-          <p:cNvPr id="4" name="Text Placeholder 3">
-            <a:extLst>
-              <a:ext uri="{FF2B5EF4-FFF2-40B4-BE49-F238E27FC236}">
-                <a16:creationId xmlns:a16="http://schemas.microsoft.com/office/drawing/2014/main" id="{FB27AA5F-D60F-AD07-0D15-90F766B21BF7}"/>
-              </a:ext>
-            </a:extLst>
-          </p:cNvPr>
-          <p:cNvSpPr>
-            <a:spLocks noGrp="1"/>
-          </p:cNvSpPr>
-          <p:nvPr>
-            <p:ph type="body" sz="quarter" idx="10"/>
-          </p:nvPr>
-        </p:nvSpPr>
-        <p:spPr/>
-        <p:txBody>
-          <a:bodyPr/>
-          <a:lstStyle/>
-          <a:p>
-            <a:r>
-              <a:rPr lang="en-US" dirty="0"/>
-              <a:t>The Agentic </a:t>
-            </a:r>
-            <a:r>
-              <a:rPr lang="en-US" dirty="0" err="1"/>
-              <a:t>Organisation</a:t>
-            </a:r>
-            <a:endParaRPr lang="en-US" dirty="0"/>
-          </a:p>
-        </p:txBody>
-      </p:sp>
-      <p:sp>
-        <p:nvSpPr>
-          <p:cNvPr id="11" name="Tekstvak 10">
-            <a:extLst>
-              <a:ext uri="{FF2B5EF4-FFF2-40B4-BE49-F238E27FC236}">
-                <a16:creationId xmlns:a16="http://schemas.microsoft.com/office/drawing/2014/main" id="{CC95AE2B-BF3B-3A3F-5485-0A7F2025FD71}"/>
+            <a:pPr algn="ctr">
+              <a:lnSpc>
+                <a:spcPts val="2900"/>
+              </a:lnSpc>
+            </a:pPr>
+            <a:r>
+              <a:rPr lang="en-GB" sz="2400" b="1" dirty="0">
+                <a:solidFill>
+                  <a:srgbClr val="4B5B6B"/>
+                </a:solidFill>
+                <a:latin typeface="Montserrat" pitchFamily="2" charset="0"/>
+              </a:rPr>
+              <a:t>THE AGENTIC ORGANISATION</a:t>
+            </a:r>
+          </a:p>
+        </p:txBody>
+      </p:sp>
+      <p:sp>
+        <p:nvSpPr>
+          <p:cNvPr id="7" name="Tekstvak 6">
+            <a:extLst>
+              <a:ext uri="{FF2B5EF4-FFF2-40B4-BE49-F238E27FC236}">
+                <a16:creationId xmlns:a16="http://schemas.microsoft.com/office/drawing/2014/main" id="{2DE3A319-CEAC-921D-D6E0-4F2919039E15}"/>
               </a:ext>
             </a:extLst>
           </p:cNvPr>
@@ -6952,7 +6893,69 @@
         </p:nvSpPr>
         <p:spPr>
           <a:xfrm>
-            <a:off x="3555917" y="5301295"/>
+            <a:off x="504690" y="2173458"/>
+            <a:ext cx="2874980" cy="338554"/>
+          </a:xfrm>
+          <a:prstGeom prst="rect">
+            <a:avLst/>
+          </a:prstGeom>
+          <a:noFill/>
+          <a:effectLst/>
+        </p:spPr>
+        <p:txBody>
+          <a:bodyPr wrap="square" rtlCol="0">
+            <a:spAutoFit/>
+          </a:bodyPr>
+          <a:lstStyle/>
+          <a:p>
+            <a:pPr algn="ctr"/>
+            <a:r>
+              <a:rPr lang="en-GB" sz="800" dirty="0">
+                <a:solidFill>
+                  <a:srgbClr val="4B5B6B"/>
+                </a:solidFill>
+                <a:latin typeface="Montserrat" pitchFamily="2" charset="0"/>
+                <a:cs typeface="Segoe UI" panose="020B0502040204020203" pitchFamily="34" charset="0"/>
+              </a:rPr>
+              <a:t>A complete AI transformation </a:t>
+            </a:r>
+            <a:br>
+              <a:rPr lang="en-GB" sz="800" dirty="0">
+                <a:solidFill>
+                  <a:srgbClr val="4B5B6B"/>
+                </a:solidFill>
+                <a:latin typeface="Montserrat" pitchFamily="2" charset="0"/>
+                <a:cs typeface="Segoe UI" panose="020B0502040204020203" pitchFamily="34" charset="0"/>
+              </a:rPr>
+            </a:br>
+            <a:r>
+              <a:rPr lang="en-GB" sz="800" dirty="0">
+                <a:solidFill>
+                  <a:srgbClr val="4B5B6B"/>
+                </a:solidFill>
+                <a:latin typeface="Montserrat" pitchFamily="2" charset="0"/>
+                <a:cs typeface="Segoe UI" panose="020B0502040204020203" pitchFamily="34" charset="0"/>
+              </a:rPr>
+              <a:t>framework for European CEO's</a:t>
+            </a:r>
+          </a:p>
+        </p:txBody>
+      </p:sp>
+      <p:sp>
+        <p:nvSpPr>
+          <p:cNvPr id="2" name="Tekstvak 1">
+            <a:extLst>
+              <a:ext uri="{FF2B5EF4-FFF2-40B4-BE49-F238E27FC236}">
+                <a16:creationId xmlns:a16="http://schemas.microsoft.com/office/drawing/2014/main" id="{7A35202E-6D93-F357-54FA-5F2F03585E0B}"/>
+              </a:ext>
+            </a:extLst>
+          </p:cNvPr>
+          <p:cNvSpPr txBox="1"/>
+          <p:nvPr/>
+        </p:nvSpPr>
+        <p:spPr>
+          <a:xfrm>
+            <a:off x="1303223" y="5301295"/>
             <a:ext cx="1277914" cy="246221"/>
           </a:xfrm>
           <a:prstGeom prst="rect">
@@ -6976,134 +6979,12 @@
             <a:pPr algn="ctr"/>
             <a:r>
               <a:rPr lang="en-GB" sz="1000" dirty="0">
+                <a:solidFill>
+                  <a:schemeClr val="bg1"/>
+                </a:solidFill>
                 <a:latin typeface="Garamond" panose="02020404030301010803" pitchFamily="18" charset="0"/>
               </a:rPr>
               <a:t>Stephan Hartgers-Rus</a:t>
-            </a:r>
-          </a:p>
-        </p:txBody>
-      </p:sp>
-      <p:pic>
-        <p:nvPicPr>
-          <p:cNvPr id="20" name="Afbeelding 19" descr="Afbeelding met schoeisel, kleding, person, persoon&#10;&#10;Door AI gegenereerde inhoud is mogelijk onjuist.">
-            <a:extLst>
-              <a:ext uri="{FF2B5EF4-FFF2-40B4-BE49-F238E27FC236}">
-                <a16:creationId xmlns:a16="http://schemas.microsoft.com/office/drawing/2014/main" id="{131CC11A-5448-A817-E1C6-68413F845848}"/>
-              </a:ext>
-            </a:extLst>
-          </p:cNvPr>
-          <p:cNvPicPr>
-            <a:picLocks noChangeAspect="1"/>
-          </p:cNvPicPr>
-          <p:nvPr/>
-        </p:nvPicPr>
-        <p:blipFill>
-          <a:blip r:embed="rId3">
-            <a:extLst>
-              <a:ext uri="{28A0092B-C50C-407E-A947-70E740481C1C}">
-                <a14:useLocalDpi xmlns:a14="http://schemas.microsoft.com/office/drawing/2010/main" val="0"/>
-              </a:ext>
-            </a:extLst>
-          </a:blip>
-          <a:stretch>
-            <a:fillRect/>
-          </a:stretch>
-        </p:blipFill>
-        <p:spPr>
-          <a:xfrm>
-            <a:off x="6601654" y="1363851"/>
-            <a:ext cx="2903284" cy="4354926"/>
-          </a:xfrm>
-          <a:prstGeom prst="rect">
-            <a:avLst/>
-          </a:prstGeom>
-        </p:spPr>
-      </p:pic>
-      <p:sp>
-        <p:nvSpPr>
-          <p:cNvPr id="6" name="Tekstvak 5">
-            <a:extLst>
-              <a:ext uri="{FF2B5EF4-FFF2-40B4-BE49-F238E27FC236}">
-                <a16:creationId xmlns:a16="http://schemas.microsoft.com/office/drawing/2014/main" id="{011CADC5-0494-041A-23A1-8C77774988E9}"/>
-              </a:ext>
-            </a:extLst>
-          </p:cNvPr>
-          <p:cNvSpPr txBox="1"/>
-          <p:nvPr/>
-        </p:nvSpPr>
-        <p:spPr>
-          <a:xfrm>
-            <a:off x="6728976" y="1488311"/>
-            <a:ext cx="2648640" cy="819263"/>
-          </a:xfrm>
-          <a:prstGeom prst="rect">
-            <a:avLst/>
-          </a:prstGeom>
-          <a:noFill/>
-          <a:effectLst/>
-        </p:spPr>
-        <p:txBody>
-          <a:bodyPr wrap="square" rtlCol="0">
-            <a:spAutoFit/>
-          </a:bodyPr>
-          <a:lstStyle/>
-          <a:p>
-            <a:pPr algn="ctr">
-              <a:lnSpc>
-                <a:spcPts val="2900"/>
-              </a:lnSpc>
-            </a:pPr>
-            <a:r>
-              <a:rPr lang="en-GB" sz="2400" b="1" dirty="0">
-                <a:solidFill>
-                  <a:srgbClr val="4B5B6B"/>
-                </a:solidFill>
-                <a:latin typeface="Avenir Next LT Pro" panose="020B0504020202020204" pitchFamily="34" charset="0"/>
-              </a:rPr>
-              <a:t>THE AGENTIC ORGANISATION</a:t>
-            </a:r>
-          </a:p>
-        </p:txBody>
-      </p:sp>
-      <p:sp>
-        <p:nvSpPr>
-          <p:cNvPr id="7" name="Tekstvak 6">
-            <a:extLst>
-              <a:ext uri="{FF2B5EF4-FFF2-40B4-BE49-F238E27FC236}">
-                <a16:creationId xmlns:a16="http://schemas.microsoft.com/office/drawing/2014/main" id="{2DE3A319-CEAC-921D-D6E0-4F2919039E15}"/>
-              </a:ext>
-            </a:extLst>
-          </p:cNvPr>
-          <p:cNvSpPr txBox="1"/>
-          <p:nvPr/>
-        </p:nvSpPr>
-        <p:spPr>
-          <a:xfrm>
-            <a:off x="6615806" y="2226798"/>
-            <a:ext cx="2874980" cy="369332"/>
-          </a:xfrm>
-          <a:prstGeom prst="rect">
-            <a:avLst/>
-          </a:prstGeom>
-          <a:noFill/>
-          <a:effectLst/>
-        </p:spPr>
-        <p:txBody>
-          <a:bodyPr wrap="square" rtlCol="0">
-            <a:spAutoFit/>
-          </a:bodyPr>
-          <a:lstStyle/>
-          <a:p>
-            <a:pPr algn="ctr"/>
-            <a:r>
-              <a:rPr lang="en-GB" sz="900" dirty="0">
-                <a:solidFill>
-                  <a:srgbClr val="4B5B6B"/>
-                </a:solidFill>
-                <a:latin typeface="Avenir Next LT Pro Demi" panose="020B0704020202020204" pitchFamily="34" charset="0"/>
-                <a:cs typeface="Segoe UI" panose="020B0502040204020203" pitchFamily="34" charset="0"/>
-              </a:rPr>
-              <a:t>A TRANSFORMATION FRAMEWORK FOR EUROPEAN COMPANIES</a:t>
             </a:r>
           </a:p>
         </p:txBody>

--- a/input/AI Transformation framework for European CEO’s.pptx
+++ b/input/AI Transformation framework for European CEO’s.pptx
@@ -5,12 +5,14 @@
     <p:sldMasterId id="2147483648" r:id="rId1"/>
   </p:sldMasterIdLst>
   <p:notesMasterIdLst>
-    <p:notesMasterId r:id="rId5"/>
+    <p:notesMasterId r:id="rId7"/>
   </p:notesMasterIdLst>
   <p:sldIdLst>
-    <p:sldId id="2147480366" r:id="rId2"/>
-    <p:sldId id="2147480367" r:id="rId3"/>
-    <p:sldId id="2147480368" r:id="rId4"/>
+    <p:sldId id="2147480368" r:id="rId2"/>
+    <p:sldId id="2147480366" r:id="rId3"/>
+    <p:sldId id="2147480372" r:id="rId4"/>
+    <p:sldId id="2147480380" r:id="rId5"/>
+    <p:sldId id="2147480367" r:id="rId6"/>
   </p:sldIdLst>
   <p:sldSz cx="12192000" cy="6858000"/>
   <p:notesSz cx="6858000" cy="9144000"/>
@@ -327,7 +329,7 @@
           <a:p>
             <a:fld id="{FAB7A3DB-122E-499C-AAFB-3D4665CBCADB}" type="datetimeFigureOut">
               <a:rPr lang="en-GB" smtClean="0"/>
-              <a:t>01/03/2026</a:t>
+              <a:t>02/03/2026</a:t>
             </a:fld>
             <a:endParaRPr lang="en-GB"/>
           </a:p>
@@ -600,6 +602,114 @@
   <p:cSld>
     <p:spTree>
       <p:nvGrpSpPr>
+        <p:cNvPr id="1" name="">
+          <a:extLst>
+            <a:ext uri="{FF2B5EF4-FFF2-40B4-BE49-F238E27FC236}">
+              <a16:creationId xmlns:a16="http://schemas.microsoft.com/office/drawing/2014/main" id="{2215450A-C4D7-1430-C644-50F3F198E548}"/>
+            </a:ext>
+          </a:extLst>
+        </p:cNvPr>
+        <p:cNvGrpSpPr/>
+        <p:nvPr/>
+      </p:nvGrpSpPr>
+      <p:grpSpPr>
+        <a:xfrm>
+          <a:off x="0" y="0"/>
+          <a:ext cx="0" cy="0"/>
+          <a:chOff x="0" y="0"/>
+          <a:chExt cx="0" cy="0"/>
+        </a:xfrm>
+      </p:grpSpPr>
+      <p:sp>
+        <p:nvSpPr>
+          <p:cNvPr id="2" name="Slide Image Placeholder 1">
+            <a:extLst>
+              <a:ext uri="{FF2B5EF4-FFF2-40B4-BE49-F238E27FC236}">
+                <a16:creationId xmlns:a16="http://schemas.microsoft.com/office/drawing/2014/main" id="{ED792276-1454-3270-B3A5-C743FFF3DAB5}"/>
+              </a:ext>
+            </a:extLst>
+          </p:cNvPr>
+          <p:cNvSpPr>
+            <a:spLocks noGrp="1" noRot="1" noChangeAspect="1"/>
+          </p:cNvSpPr>
+          <p:nvPr>
+            <p:ph type="sldImg"/>
+          </p:nvPr>
+        </p:nvSpPr>
+        <p:spPr/>
+      </p:sp>
+      <p:sp>
+        <p:nvSpPr>
+          <p:cNvPr id="3" name="Notes Placeholder 2">
+            <a:extLst>
+              <a:ext uri="{FF2B5EF4-FFF2-40B4-BE49-F238E27FC236}">
+                <a16:creationId xmlns:a16="http://schemas.microsoft.com/office/drawing/2014/main" id="{6B3543F5-304A-1D65-0A71-730E5FE78022}"/>
+              </a:ext>
+            </a:extLst>
+          </p:cNvPr>
+          <p:cNvSpPr>
+            <a:spLocks noGrp="1"/>
+          </p:cNvSpPr>
+          <p:nvPr>
+            <p:ph type="body" idx="1"/>
+          </p:nvPr>
+        </p:nvSpPr>
+        <p:spPr/>
+        <p:txBody>
+          <a:bodyPr/>
+          <a:lstStyle/>
+          <a:p>
+            <a:endParaRPr lang="en-GB"/>
+          </a:p>
+        </p:txBody>
+      </p:sp>
+      <p:sp>
+        <p:nvSpPr>
+          <p:cNvPr id="4" name="Slide Number Placeholder 3">
+            <a:extLst>
+              <a:ext uri="{FF2B5EF4-FFF2-40B4-BE49-F238E27FC236}">
+                <a16:creationId xmlns:a16="http://schemas.microsoft.com/office/drawing/2014/main" id="{9BBB26A6-51FB-0ED0-1F61-4CA82ADDFC51}"/>
+              </a:ext>
+            </a:extLst>
+          </p:cNvPr>
+          <p:cNvSpPr>
+            <a:spLocks noGrp="1"/>
+          </p:cNvSpPr>
+          <p:nvPr>
+            <p:ph type="sldNum" sz="quarter" idx="5"/>
+          </p:nvPr>
+        </p:nvSpPr>
+        <p:spPr/>
+        <p:txBody>
+          <a:bodyPr/>
+          <a:lstStyle/>
+          <a:p>
+            <a:fld id="{BA1AFD66-2597-4960-86E3-D00E2B43A69D}" type="slidenum">
+              <a:rPr lang="en-GB" smtClean="0"/>
+              <a:t>1</a:t>
+            </a:fld>
+            <a:endParaRPr lang="en-GB"/>
+          </a:p>
+        </p:txBody>
+      </p:sp>
+    </p:spTree>
+    <p:extLst>
+      <p:ext uri="{BB962C8B-B14F-4D97-AF65-F5344CB8AC3E}">
+        <p14:creationId xmlns:p14="http://schemas.microsoft.com/office/powerpoint/2010/main" val="2057813625"/>
+      </p:ext>
+    </p:extLst>
+  </p:cSld>
+  <p:clrMapOvr>
+    <a:masterClrMapping/>
+  </p:clrMapOvr>
+</p:notes>
+</file>
+
+<file path=ppt/notesSlides/notesSlide2.xml><?xml version="1.0" encoding="utf-8"?>
+<p:notes xmlns:a="http://schemas.openxmlformats.org/drawingml/2006/main" xmlns:r="http://schemas.openxmlformats.org/officeDocument/2006/relationships" xmlns:p="http://schemas.openxmlformats.org/presentationml/2006/main">
+  <p:cSld>
+    <p:spTree>
+      <p:nvGrpSpPr>
         <p:cNvPr id="1" name=""/>
         <p:cNvGrpSpPr/>
         <p:nvPr/>
@@ -660,7 +770,7 @@
           <a:p>
             <a:fld id="{BA1AFD66-2597-4960-86E3-D00E2B43A69D}" type="slidenum">
               <a:rPr lang="en-GB" smtClean="0"/>
-              <a:t>1</a:t>
+              <a:t>2</a:t>
             </a:fld>
             <a:endParaRPr lang="en-GB"/>
           </a:p>
@@ -679,7 +789,223 @@
 </p:notes>
 </file>
 
-<file path=ppt/notesSlides/notesSlide2.xml><?xml version="1.0" encoding="utf-8"?>
+<file path=ppt/notesSlides/notesSlide3.xml><?xml version="1.0" encoding="utf-8"?>
+<p:notes xmlns:a="http://schemas.openxmlformats.org/drawingml/2006/main" xmlns:r="http://schemas.openxmlformats.org/officeDocument/2006/relationships" xmlns:p="http://schemas.openxmlformats.org/presentationml/2006/main">
+  <p:cSld>
+    <p:spTree>
+      <p:nvGrpSpPr>
+        <p:cNvPr id="1" name="">
+          <a:extLst>
+            <a:ext uri="{FF2B5EF4-FFF2-40B4-BE49-F238E27FC236}">
+              <a16:creationId xmlns:a16="http://schemas.microsoft.com/office/drawing/2014/main" id="{9ACE62BF-62B2-82DC-C376-73CE77938791}"/>
+            </a:ext>
+          </a:extLst>
+        </p:cNvPr>
+        <p:cNvGrpSpPr/>
+        <p:nvPr/>
+      </p:nvGrpSpPr>
+      <p:grpSpPr>
+        <a:xfrm>
+          <a:off x="0" y="0"/>
+          <a:ext cx="0" cy="0"/>
+          <a:chOff x="0" y="0"/>
+          <a:chExt cx="0" cy="0"/>
+        </a:xfrm>
+      </p:grpSpPr>
+      <p:sp>
+        <p:nvSpPr>
+          <p:cNvPr id="2" name="Slide Image Placeholder 1">
+            <a:extLst>
+              <a:ext uri="{FF2B5EF4-FFF2-40B4-BE49-F238E27FC236}">
+                <a16:creationId xmlns:a16="http://schemas.microsoft.com/office/drawing/2014/main" id="{BA23FAB7-0002-0B74-BC80-BE2ABD30207D}"/>
+              </a:ext>
+            </a:extLst>
+          </p:cNvPr>
+          <p:cNvSpPr>
+            <a:spLocks noGrp="1" noRot="1" noChangeAspect="1"/>
+          </p:cNvSpPr>
+          <p:nvPr>
+            <p:ph type="sldImg"/>
+          </p:nvPr>
+        </p:nvSpPr>
+        <p:spPr/>
+      </p:sp>
+      <p:sp>
+        <p:nvSpPr>
+          <p:cNvPr id="3" name="Notes Placeholder 2">
+            <a:extLst>
+              <a:ext uri="{FF2B5EF4-FFF2-40B4-BE49-F238E27FC236}">
+                <a16:creationId xmlns:a16="http://schemas.microsoft.com/office/drawing/2014/main" id="{BB095350-E688-5761-4C18-C360C5E907EF}"/>
+              </a:ext>
+            </a:extLst>
+          </p:cNvPr>
+          <p:cNvSpPr>
+            <a:spLocks noGrp="1"/>
+          </p:cNvSpPr>
+          <p:nvPr>
+            <p:ph type="body" idx="1"/>
+          </p:nvPr>
+        </p:nvSpPr>
+        <p:spPr/>
+        <p:txBody>
+          <a:bodyPr/>
+          <a:lstStyle/>
+          <a:p>
+            <a:endParaRPr lang="en-GB"/>
+          </a:p>
+        </p:txBody>
+      </p:sp>
+      <p:sp>
+        <p:nvSpPr>
+          <p:cNvPr id="4" name="Slide Number Placeholder 3">
+            <a:extLst>
+              <a:ext uri="{FF2B5EF4-FFF2-40B4-BE49-F238E27FC236}">
+                <a16:creationId xmlns:a16="http://schemas.microsoft.com/office/drawing/2014/main" id="{83885E98-BCCF-D095-084B-9A2B890105DE}"/>
+              </a:ext>
+            </a:extLst>
+          </p:cNvPr>
+          <p:cNvSpPr>
+            <a:spLocks noGrp="1"/>
+          </p:cNvSpPr>
+          <p:nvPr>
+            <p:ph type="sldNum" sz="quarter" idx="5"/>
+          </p:nvPr>
+        </p:nvSpPr>
+        <p:spPr/>
+        <p:txBody>
+          <a:bodyPr/>
+          <a:lstStyle/>
+          <a:p>
+            <a:fld id="{BA1AFD66-2597-4960-86E3-D00E2B43A69D}" type="slidenum">
+              <a:rPr lang="en-GB" smtClean="0"/>
+              <a:t>3</a:t>
+            </a:fld>
+            <a:endParaRPr lang="en-GB"/>
+          </a:p>
+        </p:txBody>
+      </p:sp>
+    </p:spTree>
+    <p:extLst>
+      <p:ext uri="{BB962C8B-B14F-4D97-AF65-F5344CB8AC3E}">
+        <p14:creationId xmlns:p14="http://schemas.microsoft.com/office/powerpoint/2010/main" val="2961018636"/>
+      </p:ext>
+    </p:extLst>
+  </p:cSld>
+  <p:clrMapOvr>
+    <a:masterClrMapping/>
+  </p:clrMapOvr>
+</p:notes>
+</file>
+
+<file path=ppt/notesSlides/notesSlide4.xml><?xml version="1.0" encoding="utf-8"?>
+<p:notes xmlns:a="http://schemas.openxmlformats.org/drawingml/2006/main" xmlns:r="http://schemas.openxmlformats.org/officeDocument/2006/relationships" xmlns:p="http://schemas.openxmlformats.org/presentationml/2006/main">
+  <p:cSld>
+    <p:spTree>
+      <p:nvGrpSpPr>
+        <p:cNvPr id="1" name="">
+          <a:extLst>
+            <a:ext uri="{FF2B5EF4-FFF2-40B4-BE49-F238E27FC236}">
+              <a16:creationId xmlns:a16="http://schemas.microsoft.com/office/drawing/2014/main" id="{51520502-7047-1D54-BEEE-7810E0F8A7EB}"/>
+            </a:ext>
+          </a:extLst>
+        </p:cNvPr>
+        <p:cNvGrpSpPr/>
+        <p:nvPr/>
+      </p:nvGrpSpPr>
+      <p:grpSpPr>
+        <a:xfrm>
+          <a:off x="0" y="0"/>
+          <a:ext cx="0" cy="0"/>
+          <a:chOff x="0" y="0"/>
+          <a:chExt cx="0" cy="0"/>
+        </a:xfrm>
+      </p:grpSpPr>
+      <p:sp>
+        <p:nvSpPr>
+          <p:cNvPr id="2" name="Slide Image Placeholder 1">
+            <a:extLst>
+              <a:ext uri="{FF2B5EF4-FFF2-40B4-BE49-F238E27FC236}">
+                <a16:creationId xmlns:a16="http://schemas.microsoft.com/office/drawing/2014/main" id="{2F29B4AA-586D-DF9D-590A-BC966D9C65B4}"/>
+              </a:ext>
+            </a:extLst>
+          </p:cNvPr>
+          <p:cNvSpPr>
+            <a:spLocks noGrp="1" noRot="1" noChangeAspect="1"/>
+          </p:cNvSpPr>
+          <p:nvPr>
+            <p:ph type="sldImg"/>
+          </p:nvPr>
+        </p:nvSpPr>
+        <p:spPr/>
+      </p:sp>
+      <p:sp>
+        <p:nvSpPr>
+          <p:cNvPr id="3" name="Notes Placeholder 2">
+            <a:extLst>
+              <a:ext uri="{FF2B5EF4-FFF2-40B4-BE49-F238E27FC236}">
+                <a16:creationId xmlns:a16="http://schemas.microsoft.com/office/drawing/2014/main" id="{DE7601EE-D672-03C3-C50B-CEEAE42313E0}"/>
+              </a:ext>
+            </a:extLst>
+          </p:cNvPr>
+          <p:cNvSpPr>
+            <a:spLocks noGrp="1"/>
+          </p:cNvSpPr>
+          <p:nvPr>
+            <p:ph type="body" idx="1"/>
+          </p:nvPr>
+        </p:nvSpPr>
+        <p:spPr/>
+        <p:txBody>
+          <a:bodyPr/>
+          <a:lstStyle/>
+          <a:p>
+            <a:endParaRPr lang="en-GB"/>
+          </a:p>
+        </p:txBody>
+      </p:sp>
+      <p:sp>
+        <p:nvSpPr>
+          <p:cNvPr id="4" name="Slide Number Placeholder 3">
+            <a:extLst>
+              <a:ext uri="{FF2B5EF4-FFF2-40B4-BE49-F238E27FC236}">
+                <a16:creationId xmlns:a16="http://schemas.microsoft.com/office/drawing/2014/main" id="{2EC213F6-456D-85D1-D133-579BF8369F4E}"/>
+              </a:ext>
+            </a:extLst>
+          </p:cNvPr>
+          <p:cNvSpPr>
+            <a:spLocks noGrp="1"/>
+          </p:cNvSpPr>
+          <p:nvPr>
+            <p:ph type="sldNum" sz="quarter" idx="5"/>
+          </p:nvPr>
+        </p:nvSpPr>
+        <p:spPr/>
+        <p:txBody>
+          <a:bodyPr/>
+          <a:lstStyle/>
+          <a:p>
+            <a:fld id="{BA1AFD66-2597-4960-86E3-D00E2B43A69D}" type="slidenum">
+              <a:rPr lang="en-GB" smtClean="0"/>
+              <a:t>4</a:t>
+            </a:fld>
+            <a:endParaRPr lang="en-GB"/>
+          </a:p>
+        </p:txBody>
+      </p:sp>
+    </p:spTree>
+    <p:extLst>
+      <p:ext uri="{BB962C8B-B14F-4D97-AF65-F5344CB8AC3E}">
+        <p14:creationId xmlns:p14="http://schemas.microsoft.com/office/powerpoint/2010/main" val="1164762812"/>
+      </p:ext>
+    </p:extLst>
+  </p:cSld>
+  <p:clrMapOvr>
+    <a:masterClrMapping/>
+  </p:clrMapOvr>
+</p:notes>
+</file>
+
+<file path=ppt/notesSlides/notesSlide5.xml><?xml version="1.0" encoding="utf-8"?>
 <p:notes xmlns:a="http://schemas.openxmlformats.org/drawingml/2006/main" xmlns:r="http://schemas.openxmlformats.org/officeDocument/2006/relationships" xmlns:p="http://schemas.openxmlformats.org/presentationml/2006/main">
   <p:cSld>
     <p:spTree>
@@ -768,7 +1094,7 @@
           <a:p>
             <a:fld id="{BA1AFD66-2597-4960-86E3-D00E2B43A69D}" type="slidenum">
               <a:rPr lang="en-GB" smtClean="0"/>
-              <a:t>2</a:t>
+              <a:t>5</a:t>
             </a:fld>
             <a:endParaRPr lang="en-GB"/>
           </a:p>
@@ -778,114 +1104,6 @@
     <p:extLst>
       <p:ext uri="{BB962C8B-B14F-4D97-AF65-F5344CB8AC3E}">
         <p14:creationId xmlns:p14="http://schemas.microsoft.com/office/powerpoint/2010/main" val="2171862513"/>
-      </p:ext>
-    </p:extLst>
-  </p:cSld>
-  <p:clrMapOvr>
-    <a:masterClrMapping/>
-  </p:clrMapOvr>
-</p:notes>
-</file>
-
-<file path=ppt/notesSlides/notesSlide3.xml><?xml version="1.0" encoding="utf-8"?>
-<p:notes xmlns:a="http://schemas.openxmlformats.org/drawingml/2006/main" xmlns:r="http://schemas.openxmlformats.org/officeDocument/2006/relationships" xmlns:p="http://schemas.openxmlformats.org/presentationml/2006/main">
-  <p:cSld>
-    <p:spTree>
-      <p:nvGrpSpPr>
-        <p:cNvPr id="1" name="">
-          <a:extLst>
-            <a:ext uri="{FF2B5EF4-FFF2-40B4-BE49-F238E27FC236}">
-              <a16:creationId xmlns:a16="http://schemas.microsoft.com/office/drawing/2014/main" id="{2215450A-C4D7-1430-C644-50F3F198E548}"/>
-            </a:ext>
-          </a:extLst>
-        </p:cNvPr>
-        <p:cNvGrpSpPr/>
-        <p:nvPr/>
-      </p:nvGrpSpPr>
-      <p:grpSpPr>
-        <a:xfrm>
-          <a:off x="0" y="0"/>
-          <a:ext cx="0" cy="0"/>
-          <a:chOff x="0" y="0"/>
-          <a:chExt cx="0" cy="0"/>
-        </a:xfrm>
-      </p:grpSpPr>
-      <p:sp>
-        <p:nvSpPr>
-          <p:cNvPr id="2" name="Slide Image Placeholder 1">
-            <a:extLst>
-              <a:ext uri="{FF2B5EF4-FFF2-40B4-BE49-F238E27FC236}">
-                <a16:creationId xmlns:a16="http://schemas.microsoft.com/office/drawing/2014/main" id="{ED792276-1454-3270-B3A5-C743FFF3DAB5}"/>
-              </a:ext>
-            </a:extLst>
-          </p:cNvPr>
-          <p:cNvSpPr>
-            <a:spLocks noGrp="1" noRot="1" noChangeAspect="1"/>
-          </p:cNvSpPr>
-          <p:nvPr>
-            <p:ph type="sldImg"/>
-          </p:nvPr>
-        </p:nvSpPr>
-        <p:spPr/>
-      </p:sp>
-      <p:sp>
-        <p:nvSpPr>
-          <p:cNvPr id="3" name="Notes Placeholder 2">
-            <a:extLst>
-              <a:ext uri="{FF2B5EF4-FFF2-40B4-BE49-F238E27FC236}">
-                <a16:creationId xmlns:a16="http://schemas.microsoft.com/office/drawing/2014/main" id="{6B3543F5-304A-1D65-0A71-730E5FE78022}"/>
-              </a:ext>
-            </a:extLst>
-          </p:cNvPr>
-          <p:cNvSpPr>
-            <a:spLocks noGrp="1"/>
-          </p:cNvSpPr>
-          <p:nvPr>
-            <p:ph type="body" idx="1"/>
-          </p:nvPr>
-        </p:nvSpPr>
-        <p:spPr/>
-        <p:txBody>
-          <a:bodyPr/>
-          <a:lstStyle/>
-          <a:p>
-            <a:endParaRPr lang="en-GB"/>
-          </a:p>
-        </p:txBody>
-      </p:sp>
-      <p:sp>
-        <p:nvSpPr>
-          <p:cNvPr id="4" name="Slide Number Placeholder 3">
-            <a:extLst>
-              <a:ext uri="{FF2B5EF4-FFF2-40B4-BE49-F238E27FC236}">
-                <a16:creationId xmlns:a16="http://schemas.microsoft.com/office/drawing/2014/main" id="{9BBB26A6-51FB-0ED0-1F61-4CA82ADDFC51}"/>
-              </a:ext>
-            </a:extLst>
-          </p:cNvPr>
-          <p:cNvSpPr>
-            <a:spLocks noGrp="1"/>
-          </p:cNvSpPr>
-          <p:nvPr>
-            <p:ph type="sldNum" sz="quarter" idx="5"/>
-          </p:nvPr>
-        </p:nvSpPr>
-        <p:spPr/>
-        <p:txBody>
-          <a:bodyPr/>
-          <a:lstStyle/>
-          <a:p>
-            <a:fld id="{BA1AFD66-2597-4960-86E3-D00E2B43A69D}" type="slidenum">
-              <a:rPr lang="en-GB" smtClean="0"/>
-              <a:t>3</a:t>
-            </a:fld>
-            <a:endParaRPr lang="en-GB"/>
-          </a:p>
-        </p:txBody>
-      </p:sp>
-    </p:spTree>
-    <p:extLst>
-      <p:ext uri="{BB962C8B-B14F-4D97-AF65-F5344CB8AC3E}">
-        <p14:creationId xmlns:p14="http://schemas.microsoft.com/office/powerpoint/2010/main" val="2057813625"/>
       </p:ext>
     </p:extLst>
   </p:cSld>
@@ -1044,7 +1262,7 @@
           <a:p>
             <a:fld id="{7E530143-BC45-40DA-908E-84B30ACFDA34}" type="datetimeFigureOut">
               <a:rPr lang="en-GB" smtClean="0"/>
-              <a:t>01/03/2026</a:t>
+              <a:t>02/03/2026</a:t>
             </a:fld>
             <a:endParaRPr lang="en-GB"/>
           </a:p>
@@ -1244,7 +1462,7 @@
           <a:p>
             <a:fld id="{7E530143-BC45-40DA-908E-84B30ACFDA34}" type="datetimeFigureOut">
               <a:rPr lang="en-GB" smtClean="0"/>
-              <a:t>01/03/2026</a:t>
+              <a:t>02/03/2026</a:t>
             </a:fld>
             <a:endParaRPr lang="en-GB"/>
           </a:p>
@@ -1454,7 +1672,7 @@
           <a:p>
             <a:fld id="{7E530143-BC45-40DA-908E-84B30ACFDA34}" type="datetimeFigureOut">
               <a:rPr lang="en-GB" smtClean="0"/>
-              <a:t>01/03/2026</a:t>
+              <a:t>02/03/2026</a:t>
             </a:fld>
             <a:endParaRPr lang="en-GB"/>
           </a:p>
@@ -2078,7 +2296,7 @@
           <a:p>
             <a:fld id="{7E530143-BC45-40DA-908E-84B30ACFDA34}" type="datetimeFigureOut">
               <a:rPr lang="en-GB" smtClean="0"/>
-              <a:t>01/03/2026</a:t>
+              <a:t>02/03/2026</a:t>
             </a:fld>
             <a:endParaRPr lang="en-GB"/>
           </a:p>
@@ -2354,7 +2572,7 @@
           <a:p>
             <a:fld id="{7E530143-BC45-40DA-908E-84B30ACFDA34}" type="datetimeFigureOut">
               <a:rPr lang="en-GB" smtClean="0"/>
-              <a:t>01/03/2026</a:t>
+              <a:t>02/03/2026</a:t>
             </a:fld>
             <a:endParaRPr lang="en-GB"/>
           </a:p>
@@ -2622,7 +2840,7 @@
           <a:p>
             <a:fld id="{7E530143-BC45-40DA-908E-84B30ACFDA34}" type="datetimeFigureOut">
               <a:rPr lang="en-GB" smtClean="0"/>
-              <a:t>01/03/2026</a:t>
+              <a:t>02/03/2026</a:t>
             </a:fld>
             <a:endParaRPr lang="en-GB"/>
           </a:p>
@@ -3037,7 +3255,7 @@
           <a:p>
             <a:fld id="{7E530143-BC45-40DA-908E-84B30ACFDA34}" type="datetimeFigureOut">
               <a:rPr lang="en-GB" smtClean="0"/>
-              <a:t>01/03/2026</a:t>
+              <a:t>02/03/2026</a:t>
             </a:fld>
             <a:endParaRPr lang="en-GB"/>
           </a:p>
@@ -3179,7 +3397,7 @@
           <a:p>
             <a:fld id="{7E530143-BC45-40DA-908E-84B30ACFDA34}" type="datetimeFigureOut">
               <a:rPr lang="en-GB" smtClean="0"/>
-              <a:t>01/03/2026</a:t>
+              <a:t>02/03/2026</a:t>
             </a:fld>
             <a:endParaRPr lang="en-GB"/>
           </a:p>
@@ -3292,7 +3510,7 @@
           <a:p>
             <a:fld id="{7E530143-BC45-40DA-908E-84B30ACFDA34}" type="datetimeFigureOut">
               <a:rPr lang="en-GB" smtClean="0"/>
-              <a:t>01/03/2026</a:t>
+              <a:t>02/03/2026</a:t>
             </a:fld>
             <a:endParaRPr lang="en-GB"/>
           </a:p>
@@ -3605,7 +3823,7 @@
           <a:p>
             <a:fld id="{7E530143-BC45-40DA-908E-84B30ACFDA34}" type="datetimeFigureOut">
               <a:rPr lang="en-GB" smtClean="0"/>
-              <a:t>01/03/2026</a:t>
+              <a:t>02/03/2026</a:t>
             </a:fld>
             <a:endParaRPr lang="en-GB"/>
           </a:p>
@@ -3894,7 +4112,7 @@
           <a:p>
             <a:fld id="{7E530143-BC45-40DA-908E-84B30ACFDA34}" type="datetimeFigureOut">
               <a:rPr lang="en-GB" smtClean="0"/>
-              <a:t>01/03/2026</a:t>
+              <a:t>02/03/2026</a:t>
             </a:fld>
             <a:endParaRPr lang="en-GB"/>
           </a:p>
@@ -4137,7 +4355,7 @@
           <a:p>
             <a:fld id="{7E530143-BC45-40DA-908E-84B30ACFDA34}" type="datetimeFigureOut">
               <a:rPr lang="en-GB" smtClean="0"/>
-              <a:t>01/03/2026</a:t>
+              <a:t>02/03/2026</a:t>
             </a:fld>
             <a:endParaRPr lang="en-GB"/>
           </a:p>
@@ -4543,6 +4761,548 @@
   <p:cSld>
     <p:spTree>
       <p:nvGrpSpPr>
+        <p:cNvPr id="1" name="">
+          <a:extLst>
+            <a:ext uri="{FF2B5EF4-FFF2-40B4-BE49-F238E27FC236}">
+              <a16:creationId xmlns:a16="http://schemas.microsoft.com/office/drawing/2014/main" id="{43EB92B7-EBBB-29B1-D2DF-A9F3C5FCA28C}"/>
+            </a:ext>
+          </a:extLst>
+        </p:cNvPr>
+        <p:cNvGrpSpPr/>
+        <p:nvPr/>
+      </p:nvGrpSpPr>
+      <p:grpSpPr>
+        <a:xfrm>
+          <a:off x="0" y="0"/>
+          <a:ext cx="0" cy="0"/>
+          <a:chOff x="0" y="0"/>
+          <a:chExt cx="0" cy="0"/>
+        </a:xfrm>
+      </p:grpSpPr>
+      <p:sp>
+        <p:nvSpPr>
+          <p:cNvPr id="3" name="Title 2">
+            <a:extLst>
+              <a:ext uri="{FF2B5EF4-FFF2-40B4-BE49-F238E27FC236}">
+                <a16:creationId xmlns:a16="http://schemas.microsoft.com/office/drawing/2014/main" id="{3435802E-CA5A-8ED3-1E31-A1B56D91934B}"/>
+              </a:ext>
+            </a:extLst>
+          </p:cNvPr>
+          <p:cNvSpPr>
+            <a:spLocks noGrp="1"/>
+          </p:cNvSpPr>
+          <p:nvPr>
+            <p:ph type="title"/>
+          </p:nvPr>
+        </p:nvSpPr>
+        <p:spPr/>
+        <p:txBody>
+          <a:bodyPr>
+            <a:normAutofit/>
+          </a:bodyPr>
+          <a:lstStyle/>
+          <a:p>
+            <a:r>
+              <a:rPr lang="en-GB" noProof="0" dirty="0"/>
+              <a:t>Book cover</a:t>
+            </a:r>
+          </a:p>
+        </p:txBody>
+      </p:sp>
+      <p:sp>
+        <p:nvSpPr>
+          <p:cNvPr id="4" name="Text Placeholder 3">
+            <a:extLst>
+              <a:ext uri="{FF2B5EF4-FFF2-40B4-BE49-F238E27FC236}">
+                <a16:creationId xmlns:a16="http://schemas.microsoft.com/office/drawing/2014/main" id="{FB27AA5F-D60F-AD07-0D15-90F766B21BF7}"/>
+              </a:ext>
+            </a:extLst>
+          </p:cNvPr>
+          <p:cNvSpPr>
+            <a:spLocks noGrp="1"/>
+          </p:cNvSpPr>
+          <p:nvPr>
+            <p:ph type="body" sz="quarter" idx="10"/>
+          </p:nvPr>
+        </p:nvSpPr>
+        <p:spPr/>
+        <p:txBody>
+          <a:bodyPr/>
+          <a:lstStyle/>
+          <a:p>
+            <a:r>
+              <a:rPr lang="en-GB" noProof="0" dirty="0"/>
+              <a:t>The Agentic Organisation</a:t>
+            </a:r>
+          </a:p>
+        </p:txBody>
+      </p:sp>
+      <p:grpSp>
+        <p:nvGrpSpPr>
+          <p:cNvPr id="23" name="Groep 22">
+            <a:extLst>
+              <a:ext uri="{FF2B5EF4-FFF2-40B4-BE49-F238E27FC236}">
+                <a16:creationId xmlns:a16="http://schemas.microsoft.com/office/drawing/2014/main" id="{596BD645-1AB1-41FE-0051-E25978BF5943}"/>
+              </a:ext>
+            </a:extLst>
+          </p:cNvPr>
+          <p:cNvGrpSpPr/>
+          <p:nvPr/>
+        </p:nvGrpSpPr>
+        <p:grpSpPr>
+          <a:xfrm>
+            <a:off x="504690" y="1363851"/>
+            <a:ext cx="2903284" cy="4366456"/>
+            <a:chOff x="504690" y="1363851"/>
+            <a:chExt cx="2903284" cy="4366456"/>
+          </a:xfrm>
+        </p:grpSpPr>
+        <p:pic>
+          <p:nvPicPr>
+            <p:cNvPr id="13" name="Afbeelding 12" descr="Afbeelding met schoeisel, kleding, person, persoon&#10;&#10;Door AI gegenereerde inhoud is mogelijk onjuist.">
+              <a:extLst>
+                <a:ext uri="{FF2B5EF4-FFF2-40B4-BE49-F238E27FC236}">
+                  <a16:creationId xmlns:a16="http://schemas.microsoft.com/office/drawing/2014/main" id="{75635218-0CFB-8E81-E7CF-CABD807E564C}"/>
+                </a:ext>
+              </a:extLst>
+            </p:cNvPr>
+            <p:cNvPicPr>
+              <a:picLocks noChangeAspect="1"/>
+            </p:cNvPicPr>
+            <p:nvPr/>
+          </p:nvPicPr>
+          <p:blipFill>
+            <a:blip r:embed="rId3">
+              <a:extLst>
+                <a:ext uri="{28A0092B-C50C-407E-A947-70E740481C1C}">
+                  <a14:useLocalDpi xmlns:a14="http://schemas.microsoft.com/office/drawing/2010/main" val="0"/>
+                </a:ext>
+              </a:extLst>
+            </a:blip>
+            <a:srcRect b="6542"/>
+            <a:stretch>
+              <a:fillRect/>
+            </a:stretch>
+          </p:blipFill>
+          <p:spPr>
+            <a:xfrm>
+              <a:off x="504690" y="1660285"/>
+              <a:ext cx="2903284" cy="4070022"/>
+            </a:xfrm>
+            <a:prstGeom prst="rect">
+              <a:avLst/>
+            </a:prstGeom>
+          </p:spPr>
+        </p:pic>
+        <p:pic>
+          <p:nvPicPr>
+            <p:cNvPr id="15" name="Afbeelding 14" descr="Afbeelding met schoeisel, kleding, person, persoon&#10;&#10;Door AI gegenereerde inhoud is mogelijk onjuist.">
+              <a:extLst>
+                <a:ext uri="{FF2B5EF4-FFF2-40B4-BE49-F238E27FC236}">
+                  <a16:creationId xmlns:a16="http://schemas.microsoft.com/office/drawing/2014/main" id="{21EA633D-6C0C-D79D-E3F5-6AFBAD3059CC}"/>
+                </a:ext>
+              </a:extLst>
+            </p:cNvPr>
+            <p:cNvPicPr>
+              <a:picLocks noChangeAspect="1"/>
+            </p:cNvPicPr>
+            <p:nvPr/>
+          </p:nvPicPr>
+          <p:blipFill>
+            <a:blip r:embed="rId3">
+              <a:extLst>
+                <a:ext uri="{28A0092B-C50C-407E-A947-70E740481C1C}">
+                  <a14:useLocalDpi xmlns:a14="http://schemas.microsoft.com/office/drawing/2010/main" val="0"/>
+                </a:ext>
+              </a:extLst>
+            </a:blip>
+            <a:srcRect b="81202"/>
+            <a:stretch>
+              <a:fillRect/>
+            </a:stretch>
+          </p:blipFill>
+          <p:spPr>
+            <a:xfrm>
+              <a:off x="504690" y="1363851"/>
+              <a:ext cx="2903284" cy="1115077"/>
+            </a:xfrm>
+            <a:prstGeom prst="rect">
+              <a:avLst/>
+            </a:prstGeom>
+          </p:spPr>
+        </p:pic>
+        <p:sp>
+          <p:nvSpPr>
+            <p:cNvPr id="17" name="Tekstvak 16">
+              <a:extLst>
+                <a:ext uri="{FF2B5EF4-FFF2-40B4-BE49-F238E27FC236}">
+                  <a16:creationId xmlns:a16="http://schemas.microsoft.com/office/drawing/2014/main" id="{BD3136CB-B208-EEC4-C8EC-1A85C00ECD75}"/>
+                </a:ext>
+              </a:extLst>
+            </p:cNvPr>
+            <p:cNvSpPr txBox="1"/>
+            <p:nvPr/>
+          </p:nvSpPr>
+          <p:spPr>
+            <a:xfrm>
+              <a:off x="1180712" y="1425214"/>
+              <a:ext cx="1551240" cy="230832"/>
+            </a:xfrm>
+            <a:prstGeom prst="rect">
+              <a:avLst/>
+            </a:prstGeom>
+            <a:noFill/>
+            <a:effectLst/>
+          </p:spPr>
+          <p:txBody>
+            <a:bodyPr wrap="square" rtlCol="0">
+              <a:spAutoFit/>
+            </a:bodyPr>
+            <a:lstStyle/>
+            <a:p>
+              <a:pPr algn="ctr"/>
+              <a:r>
+                <a:rPr lang="en-GB" sz="900" noProof="0" dirty="0">
+                  <a:solidFill>
+                    <a:srgbClr val="4B5B6B"/>
+                  </a:solidFill>
+                  <a:latin typeface="Montserrat" pitchFamily="2" charset="0"/>
+                  <a:cs typeface="Segoe UI" panose="020B0502040204020203" pitchFamily="34" charset="0"/>
+                </a:rPr>
+                <a:t>EUROPEAN EDITION</a:t>
+              </a:r>
+            </a:p>
+          </p:txBody>
+        </p:sp>
+        <p:sp>
+          <p:nvSpPr>
+            <p:cNvPr id="6" name="Tekstvak 5">
+              <a:extLst>
+                <a:ext uri="{FF2B5EF4-FFF2-40B4-BE49-F238E27FC236}">
+                  <a16:creationId xmlns:a16="http://schemas.microsoft.com/office/drawing/2014/main" id="{011CADC5-0494-041A-23A1-8C77774988E9}"/>
+                </a:ext>
+              </a:extLst>
+            </p:cNvPr>
+            <p:cNvSpPr txBox="1"/>
+            <p:nvPr/>
+          </p:nvSpPr>
+          <p:spPr>
+            <a:xfrm>
+              <a:off x="504690" y="1659729"/>
+              <a:ext cx="2874980" cy="819199"/>
+            </a:xfrm>
+            <a:prstGeom prst="rect">
+              <a:avLst/>
+            </a:prstGeom>
+            <a:noFill/>
+            <a:effectLst/>
+          </p:spPr>
+          <p:txBody>
+            <a:bodyPr wrap="square" rtlCol="0">
+              <a:spAutoFit/>
+            </a:bodyPr>
+            <a:lstStyle/>
+            <a:p>
+              <a:pPr algn="ctr">
+                <a:lnSpc>
+                  <a:spcPts val="2900"/>
+                </a:lnSpc>
+              </a:pPr>
+              <a:r>
+                <a:rPr lang="en-GB" sz="2400" b="1" noProof="0" dirty="0">
+                  <a:solidFill>
+                    <a:srgbClr val="4B5B6B"/>
+                  </a:solidFill>
+                  <a:latin typeface="Montserrat" pitchFamily="2" charset="0"/>
+                </a:rPr>
+                <a:t>THE AGENTIC ORGANISATION</a:t>
+              </a:r>
+            </a:p>
+          </p:txBody>
+        </p:sp>
+        <p:sp>
+          <p:nvSpPr>
+            <p:cNvPr id="7" name="Tekstvak 6">
+              <a:extLst>
+                <a:ext uri="{FF2B5EF4-FFF2-40B4-BE49-F238E27FC236}">
+                  <a16:creationId xmlns:a16="http://schemas.microsoft.com/office/drawing/2014/main" id="{2DE3A319-CEAC-921D-D6E0-4F2919039E15}"/>
+                </a:ext>
+              </a:extLst>
+            </p:cNvPr>
+            <p:cNvSpPr txBox="1"/>
+            <p:nvPr/>
+          </p:nvSpPr>
+          <p:spPr>
+            <a:xfrm>
+              <a:off x="781496" y="2382976"/>
+              <a:ext cx="2321368" cy="215444"/>
+            </a:xfrm>
+            <a:prstGeom prst="rect">
+              <a:avLst/>
+            </a:prstGeom>
+            <a:noFill/>
+            <a:effectLst/>
+          </p:spPr>
+          <p:txBody>
+            <a:bodyPr wrap="square" rtlCol="0">
+              <a:spAutoFit/>
+            </a:bodyPr>
+            <a:lstStyle/>
+            <a:p>
+              <a:pPr algn="ctr"/>
+              <a:r>
+                <a:rPr lang="en-GB" sz="800" noProof="0" dirty="0">
+                  <a:solidFill>
+                    <a:srgbClr val="4B5B6B"/>
+                  </a:solidFill>
+                  <a:latin typeface="Montserrat" pitchFamily="2" charset="0"/>
+                  <a:cs typeface="Segoe UI" panose="020B0502040204020203" pitchFamily="34" charset="0"/>
+                </a:rPr>
+                <a:t>A complete guide for AI transformations</a:t>
+              </a:r>
+            </a:p>
+          </p:txBody>
+        </p:sp>
+        <p:sp>
+          <p:nvSpPr>
+            <p:cNvPr id="2" name="Tekstvak 1">
+              <a:extLst>
+                <a:ext uri="{FF2B5EF4-FFF2-40B4-BE49-F238E27FC236}">
+                  <a16:creationId xmlns:a16="http://schemas.microsoft.com/office/drawing/2014/main" id="{7A35202E-6D93-F357-54FA-5F2F03585E0B}"/>
+                </a:ext>
+              </a:extLst>
+            </p:cNvPr>
+            <p:cNvSpPr txBox="1"/>
+            <p:nvPr/>
+          </p:nvSpPr>
+          <p:spPr>
+            <a:xfrm>
+              <a:off x="1303223" y="5212922"/>
+              <a:ext cx="1277914" cy="246221"/>
+            </a:xfrm>
+            <a:prstGeom prst="rect">
+              <a:avLst/>
+            </a:prstGeom>
+            <a:noFill/>
+            <a:effectLst>
+              <a:outerShdw blurRad="12700" dist="12700" dir="2700000" algn="tl" rotWithShape="0">
+                <a:prstClr val="black">
+                  <a:alpha val="16000"/>
+                </a:prstClr>
+              </a:outerShdw>
+            </a:effectLst>
+          </p:spPr>
+          <p:txBody>
+            <a:bodyPr wrap="none" rtlCol="0">
+              <a:spAutoFit/>
+            </a:bodyPr>
+            <a:lstStyle/>
+            <a:p>
+              <a:pPr algn="ctr"/>
+              <a:r>
+                <a:rPr lang="en-GB" sz="1000" noProof="0" dirty="0">
+                  <a:solidFill>
+                    <a:schemeClr val="bg1"/>
+                  </a:solidFill>
+                  <a:latin typeface="Garamond" panose="02020404030301010803" pitchFamily="18" charset="0"/>
+                </a:rPr>
+                <a:t>Stephan Hartgers-Rus</a:t>
+              </a:r>
+            </a:p>
+          </p:txBody>
+        </p:sp>
+        <p:cxnSp>
+          <p:nvCxnSpPr>
+            <p:cNvPr id="19" name="Rechte verbindingslijn 18">
+              <a:extLst>
+                <a:ext uri="{FF2B5EF4-FFF2-40B4-BE49-F238E27FC236}">
+                  <a16:creationId xmlns:a16="http://schemas.microsoft.com/office/drawing/2014/main" id="{470AE056-79E6-D9CB-0292-0A0450D0EEF2}"/>
+                </a:ext>
+              </a:extLst>
+            </p:cNvPr>
+            <p:cNvCxnSpPr>
+              <a:cxnSpLocks/>
+            </p:cNvCxnSpPr>
+            <p:nvPr/>
+          </p:nvCxnSpPr>
+          <p:spPr>
+            <a:xfrm>
+              <a:off x="1367790" y="1612104"/>
+              <a:ext cx="1175385" cy="0"/>
+            </a:xfrm>
+            <a:prstGeom prst="line">
+              <a:avLst/>
+            </a:prstGeom>
+            <a:ln w="6350">
+              <a:solidFill>
+                <a:srgbClr val="4B5B6B"/>
+              </a:solidFill>
+            </a:ln>
+          </p:spPr>
+          <p:style>
+            <a:lnRef idx="2">
+              <a:schemeClr val="accent1"/>
+            </a:lnRef>
+            <a:fillRef idx="0">
+              <a:schemeClr val="accent1"/>
+            </a:fillRef>
+            <a:effectRef idx="1">
+              <a:schemeClr val="accent1"/>
+            </a:effectRef>
+            <a:fontRef idx="minor">
+              <a:schemeClr val="tx1"/>
+            </a:fontRef>
+          </p:style>
+        </p:cxnSp>
+      </p:grpSp>
+      <p:sp>
+        <p:nvSpPr>
+          <p:cNvPr id="5" name="Tekstvak 4">
+            <a:extLst>
+              <a:ext uri="{FF2B5EF4-FFF2-40B4-BE49-F238E27FC236}">
+                <a16:creationId xmlns:a16="http://schemas.microsoft.com/office/drawing/2014/main" id="{A198950B-7018-C32F-4ABF-0187AC70BE2A}"/>
+              </a:ext>
+            </a:extLst>
+          </p:cNvPr>
+          <p:cNvSpPr txBox="1"/>
+          <p:nvPr/>
+        </p:nvSpPr>
+        <p:spPr>
+          <a:xfrm>
+            <a:off x="4169500" y="1540630"/>
+            <a:ext cx="7206711" cy="954107"/>
+          </a:xfrm>
+          <a:prstGeom prst="rect">
+            <a:avLst/>
+          </a:prstGeom>
+          <a:noFill/>
+        </p:spPr>
+        <p:txBody>
+          <a:bodyPr wrap="square" rtlCol="0">
+            <a:spAutoFit/>
+          </a:bodyPr>
+          <a:lstStyle/>
+          <a:p>
+            <a:r>
+              <a:rPr lang="en-GB" sz="1400" dirty="0">
+                <a:latin typeface="Garamond" panose="02020404030301010803" pitchFamily="18" charset="0"/>
+              </a:rPr>
+              <a:t>European businesses are dangerously underprepared for the largest paradigm shift since the industrial revolution. This book is the definitive guide to AI transformation—a practical guidebook for CEOs and leadership teams to benefit from the opportunities AI provides, set in the European context.</a:t>
+            </a:r>
+          </a:p>
+          <a:p>
+            <a:endParaRPr lang="en-GB" sz="1400" dirty="0">
+              <a:latin typeface="Garamond" panose="02020404030301010803" pitchFamily="18" charset="0"/>
+            </a:endParaRPr>
+          </a:p>
+        </p:txBody>
+      </p:sp>
+      <p:sp>
+        <p:nvSpPr>
+          <p:cNvPr id="8" name="Tekstvak 7">
+            <a:extLst>
+              <a:ext uri="{FF2B5EF4-FFF2-40B4-BE49-F238E27FC236}">
+                <a16:creationId xmlns:a16="http://schemas.microsoft.com/office/drawing/2014/main" id="{15405137-EC3B-0610-E5F6-4921C198CA55}"/>
+              </a:ext>
+            </a:extLst>
+          </p:cNvPr>
+          <p:cNvSpPr txBox="1"/>
+          <p:nvPr/>
+        </p:nvSpPr>
+        <p:spPr>
+          <a:xfrm>
+            <a:off x="4169500" y="3167952"/>
+            <a:ext cx="7206711" cy="1169551"/>
+          </a:xfrm>
+          <a:prstGeom prst="rect">
+            <a:avLst/>
+          </a:prstGeom>
+          <a:noFill/>
+        </p:spPr>
+        <p:txBody>
+          <a:bodyPr wrap="square" rtlCol="0">
+            <a:spAutoFit/>
+          </a:bodyPr>
+          <a:lstStyle/>
+          <a:p>
+            <a:r>
+              <a:rPr lang="en-GB" sz="1400" dirty="0">
+                <a:latin typeface="Gill Sans Nova" panose="020B0602020104020203" pitchFamily="34" charset="0"/>
+              </a:rPr>
+              <a:t>European businesses are dangerously underprepared for the largest paradigm shift since the industrial revolution. This book is the definitive guide to AI transformation—a practical guidebook for CEOs and leadership teams to benefit from the opportunities AI provides, set in the European context.</a:t>
+            </a:r>
+          </a:p>
+          <a:p>
+            <a:endParaRPr lang="en-GB" sz="1400" dirty="0">
+              <a:latin typeface="Gill Sans Nova" panose="020B0602020104020203" pitchFamily="34" charset="0"/>
+            </a:endParaRPr>
+          </a:p>
+        </p:txBody>
+      </p:sp>
+      <p:sp>
+        <p:nvSpPr>
+          <p:cNvPr id="9" name="Tekstvak 8">
+            <a:extLst>
+              <a:ext uri="{FF2B5EF4-FFF2-40B4-BE49-F238E27FC236}">
+                <a16:creationId xmlns:a16="http://schemas.microsoft.com/office/drawing/2014/main" id="{25F612BF-6966-3F4E-DAD7-D044CA8537E1}"/>
+              </a:ext>
+            </a:extLst>
+          </p:cNvPr>
+          <p:cNvSpPr txBox="1"/>
+          <p:nvPr/>
+        </p:nvSpPr>
+        <p:spPr>
+          <a:xfrm>
+            <a:off x="4169500" y="4874367"/>
+            <a:ext cx="7206711" cy="1169551"/>
+          </a:xfrm>
+          <a:prstGeom prst="rect">
+            <a:avLst/>
+          </a:prstGeom>
+          <a:noFill/>
+        </p:spPr>
+        <p:txBody>
+          <a:bodyPr wrap="square" rtlCol="0">
+            <a:spAutoFit/>
+          </a:bodyPr>
+          <a:lstStyle/>
+          <a:p>
+            <a:r>
+              <a:rPr lang="en-GB" sz="1400" dirty="0">
+                <a:latin typeface="Sans Serif Collection" panose="020B0502040504020204" pitchFamily="34" charset="0"/>
+                <a:ea typeface="Sans Serif Collection" panose="020B0502040504020204" pitchFamily="34" charset="0"/>
+                <a:cs typeface="Sans Serif Collection" panose="020B0502040504020204" pitchFamily="34" charset="0"/>
+              </a:rPr>
+              <a:t>European businesses are dangerously underprepared for the largest paradigm shift since the industrial revolution. This book is the definitive guide to AI transformation—a practical guidebook for CEOs and leadership teams to benefit from the opportunities AI provides, set in the European context.</a:t>
+            </a:r>
+          </a:p>
+          <a:p>
+            <a:endParaRPr lang="en-GB" sz="1400" dirty="0">
+              <a:latin typeface="Sans Serif Collection" panose="020B0502040504020204" pitchFamily="34" charset="0"/>
+              <a:ea typeface="Sans Serif Collection" panose="020B0502040504020204" pitchFamily="34" charset="0"/>
+              <a:cs typeface="Sans Serif Collection" panose="020B0502040504020204" pitchFamily="34" charset="0"/>
+            </a:endParaRPr>
+          </a:p>
+        </p:txBody>
+      </p:sp>
+    </p:spTree>
+    <p:extLst>
+      <p:ext uri="{BB962C8B-B14F-4D97-AF65-F5344CB8AC3E}">
+        <p14:creationId xmlns:p14="http://schemas.microsoft.com/office/powerpoint/2010/main" val="2876593574"/>
+      </p:ext>
+    </p:extLst>
+  </p:cSld>
+  <p:clrMapOvr>
+    <a:masterClrMapping/>
+  </p:clrMapOvr>
+</p:sld>
+</file>
+
+<file path=ppt/slides/slide2.xml><?xml version="1.0" encoding="utf-8"?>
+<p:sld xmlns:a="http://schemas.openxmlformats.org/drawingml/2006/main" xmlns:r="http://schemas.openxmlformats.org/officeDocument/2006/relationships" xmlns:p="http://schemas.openxmlformats.org/presentationml/2006/main">
+  <p:cSld>
+    <p:spTree>
+      <p:nvGrpSpPr>
         <p:cNvPr id="1" name=""/>
         <p:cNvGrpSpPr/>
         <p:nvPr/>
@@ -4557,6 +5317,58 @@
       </p:grpSpPr>
       <p:sp>
         <p:nvSpPr>
+          <p:cNvPr id="2" name="Rechthoek 1">
+            <a:extLst>
+              <a:ext uri="{FF2B5EF4-FFF2-40B4-BE49-F238E27FC236}">
+                <a16:creationId xmlns:a16="http://schemas.microsoft.com/office/drawing/2014/main" id="{D59BBB47-7097-7DEF-94B0-637BDF103202}"/>
+              </a:ext>
+            </a:extLst>
+          </p:cNvPr>
+          <p:cNvSpPr/>
+          <p:nvPr/>
+        </p:nvSpPr>
+        <p:spPr>
+          <a:xfrm>
+            <a:off x="1947041" y="409251"/>
+            <a:ext cx="8442435" cy="4690889"/>
+          </a:xfrm>
+          <a:prstGeom prst="rect">
+            <a:avLst/>
+          </a:prstGeom>
+          <a:solidFill>
+            <a:schemeClr val="bg1"/>
+          </a:solidFill>
+          <a:ln>
+            <a:noFill/>
+          </a:ln>
+        </p:spPr>
+        <p:style>
+          <a:lnRef idx="2">
+            <a:schemeClr val="accent1">
+              <a:shade val="15000"/>
+            </a:schemeClr>
+          </a:lnRef>
+          <a:fillRef idx="1">
+            <a:schemeClr val="accent1"/>
+          </a:fillRef>
+          <a:effectRef idx="0">
+            <a:schemeClr val="accent1"/>
+          </a:effectRef>
+          <a:fontRef idx="minor">
+            <a:schemeClr val="lt1"/>
+          </a:fontRef>
+        </p:style>
+        <p:txBody>
+          <a:bodyPr rtlCol="0" anchor="ctr"/>
+          <a:lstStyle/>
+          <a:p>
+            <a:pPr algn="ctr"/>
+            <a:endParaRPr lang="en-GB"/>
+          </a:p>
+        </p:txBody>
+      </p:sp>
+      <p:sp>
+        <p:nvSpPr>
           <p:cNvPr id="3" name="Title 2">
             <a:extLst>
               <a:ext uri="{FF2B5EF4-FFF2-40B4-BE49-F238E27FC236}">
@@ -4571,1278 +5383,1268 @@
             <p:ph type="title"/>
           </p:nvPr>
         </p:nvSpPr>
-        <p:spPr/>
+        <p:spPr>
+          <a:xfrm>
+            <a:off x="3652782" y="629113"/>
+            <a:ext cx="4886436" cy="360099"/>
+          </a:xfrm>
+        </p:spPr>
         <p:txBody>
           <a:bodyPr>
             <a:normAutofit/>
           </a:bodyPr>
           <a:lstStyle/>
           <a:p>
-            <a:r>
-              <a:rPr lang="en-US" dirty="0"/>
-              <a:t>AI Transformation framework for European CEO’s</a:t>
-            </a:r>
-          </a:p>
-        </p:txBody>
-      </p:sp>
-      <p:sp>
-        <p:nvSpPr>
-          <p:cNvPr id="4" name="Text Placeholder 3">
-            <a:extLst>
-              <a:ext uri="{FF2B5EF4-FFF2-40B4-BE49-F238E27FC236}">
-                <a16:creationId xmlns:a16="http://schemas.microsoft.com/office/drawing/2014/main" id="{0B35E0FE-8031-5765-5A7D-1E7C3DB16CF6}"/>
-              </a:ext>
-            </a:extLst>
-          </p:cNvPr>
-          <p:cNvSpPr>
-            <a:spLocks noGrp="1"/>
-          </p:cNvSpPr>
-          <p:nvPr>
-            <p:ph type="body" sz="quarter" idx="10"/>
-          </p:nvPr>
-        </p:nvSpPr>
-        <p:spPr/>
-        <p:txBody>
-          <a:bodyPr/>
-          <a:lstStyle/>
-          <a:p>
-            <a:r>
-              <a:rPr lang="en-US" dirty="0"/>
-              <a:t>The Agentic </a:t>
-            </a:r>
-            <a:r>
-              <a:rPr lang="en-US" dirty="0" err="1"/>
-              <a:t>Organisation</a:t>
-            </a:r>
-            <a:endParaRPr lang="en-US" dirty="0"/>
-          </a:p>
-        </p:txBody>
-      </p:sp>
-      <p:grpSp>
-        <p:nvGrpSpPr>
-          <p:cNvPr id="16" name="Groep 15">
-            <a:extLst>
-              <a:ext uri="{FF2B5EF4-FFF2-40B4-BE49-F238E27FC236}">
-                <a16:creationId xmlns:a16="http://schemas.microsoft.com/office/drawing/2014/main" id="{7C86CE1E-3BCE-3EB1-F051-207618DE23E4}"/>
-              </a:ext>
-            </a:extLst>
-          </p:cNvPr>
-          <p:cNvGrpSpPr/>
+            <a:pPr algn="ctr"/>
+            <a:r>
+              <a:rPr lang="en-GB" noProof="0" dirty="0">
+                <a:solidFill>
+                  <a:schemeClr val="tx1">
+                    <a:lumMod val="85000"/>
+                    <a:lumOff val="15000"/>
+                  </a:schemeClr>
+                </a:solidFill>
+              </a:rPr>
+              <a:t>AI Transformation Framework</a:t>
+            </a:r>
+          </a:p>
+        </p:txBody>
+      </p:sp>
+      <p:sp>
+        <p:nvSpPr>
+          <p:cNvPr id="17" name="Rectangle 16">
+            <a:extLst>
+              <a:ext uri="{FF2B5EF4-FFF2-40B4-BE49-F238E27FC236}">
+                <a16:creationId xmlns:a16="http://schemas.microsoft.com/office/drawing/2014/main" id="{4DC9BA65-02F5-9778-D996-0E43F5050B58}"/>
+              </a:ext>
+            </a:extLst>
+          </p:cNvPr>
+          <p:cNvSpPr/>
           <p:nvPr/>
-        </p:nvGrpSpPr>
-        <p:grpSpPr>
+        </p:nvSpPr>
+        <p:spPr>
           <a:xfrm>
-            <a:off x="1869888" y="1788635"/>
-            <a:ext cx="7039850" cy="3658850"/>
-            <a:chOff x="1869888" y="1137706"/>
-            <a:chExt cx="7039850" cy="3658850"/>
+            <a:off x="2265680" y="1273145"/>
+            <a:ext cx="7658112" cy="569848"/>
           </a:xfrm>
-        </p:grpSpPr>
-        <p:grpSp>
-          <p:nvGrpSpPr>
-            <p:cNvPr id="2" name="Groep 1">
-              <a:extLst>
-                <a:ext uri="{FF2B5EF4-FFF2-40B4-BE49-F238E27FC236}">
-                  <a16:creationId xmlns:a16="http://schemas.microsoft.com/office/drawing/2014/main" id="{1D45816F-C7A2-85B7-42BA-A22F5841366E}"/>
-                </a:ext>
-              </a:extLst>
-            </p:cNvPr>
-            <p:cNvGrpSpPr/>
-            <p:nvPr/>
-          </p:nvGrpSpPr>
-          <p:grpSpPr>
-            <a:xfrm>
-              <a:off x="1869888" y="1137706"/>
-              <a:ext cx="7037527" cy="569848"/>
-              <a:chOff x="1869888" y="1137706"/>
-              <a:chExt cx="7037527" cy="569848"/>
-            </a:xfrm>
-          </p:grpSpPr>
-          <p:sp>
-            <p:nvSpPr>
-              <p:cNvPr id="17" name="Rectangle 16">
-                <a:extLst>
-                  <a:ext uri="{FF2B5EF4-FFF2-40B4-BE49-F238E27FC236}">
-                    <a16:creationId xmlns:a16="http://schemas.microsoft.com/office/drawing/2014/main" id="{4DC9BA65-02F5-9778-D996-0E43F5050B58}"/>
-                  </a:ext>
-                </a:extLst>
-              </p:cNvPr>
-              <p:cNvSpPr/>
-              <p:nvPr/>
-            </p:nvSpPr>
-            <p:spPr>
-              <a:xfrm>
-                <a:off x="1869888" y="1137706"/>
-                <a:ext cx="7037527" cy="569848"/>
-              </a:xfrm>
-              <a:prstGeom prst="rect">
-                <a:avLst/>
-              </a:prstGeom>
+          <a:prstGeom prst="roundRect">
+            <a:avLst/>
+          </a:prstGeom>
+          <a:noFill/>
+          <a:ln>
+            <a:solidFill>
+              <a:schemeClr val="tx1">
+                <a:lumMod val="85000"/>
+                <a:lumOff val="15000"/>
+              </a:schemeClr>
+            </a:solidFill>
+          </a:ln>
+        </p:spPr>
+        <p:style>
+          <a:lnRef idx="2">
+            <a:schemeClr val="accent1">
+              <a:shade val="15000"/>
+            </a:schemeClr>
+          </a:lnRef>
+          <a:fillRef idx="1">
+            <a:schemeClr val="accent1"/>
+          </a:fillRef>
+          <a:effectRef idx="0">
+            <a:schemeClr val="accent1"/>
+          </a:effectRef>
+          <a:fontRef idx="minor">
+            <a:schemeClr val="lt1"/>
+          </a:fontRef>
+        </p:style>
+        <p:txBody>
+          <a:bodyPr rtlCol="0" anchor="ctr"/>
+          <a:lstStyle/>
+          <a:p>
+            <a:pPr algn="ctr"/>
+            <a:endParaRPr lang="en-GB" noProof="0" dirty="0"/>
+          </a:p>
+        </p:txBody>
+      </p:sp>
+      <p:sp>
+        <p:nvSpPr>
+          <p:cNvPr id="20" name="TextBox 19">
+            <a:extLst>
+              <a:ext uri="{FF2B5EF4-FFF2-40B4-BE49-F238E27FC236}">
+                <a16:creationId xmlns:a16="http://schemas.microsoft.com/office/drawing/2014/main" id="{1C285D34-3103-3FC5-CA90-096D3DDE0E6B}"/>
+              </a:ext>
+            </a:extLst>
+          </p:cNvPr>
+          <p:cNvSpPr txBox="1"/>
+          <p:nvPr/>
+        </p:nvSpPr>
+        <p:spPr>
+          <a:xfrm>
+            <a:off x="2418950" y="1343051"/>
+            <a:ext cx="3874310" cy="383054"/>
+          </a:xfrm>
+          <a:prstGeom prst="rect">
+            <a:avLst/>
+          </a:prstGeom>
+          <a:noFill/>
+        </p:spPr>
+        <p:txBody>
+          <a:bodyPr wrap="square" lIns="0" tIns="0" rIns="0" bIns="0" rtlCol="0">
+            <a:spAutoFit/>
+          </a:bodyPr>
+          <a:lstStyle/>
+          <a:p>
+            <a:pPr>
+              <a:buSzPct val="100000"/>
+            </a:pPr>
+            <a:r>
+              <a:rPr lang="en-GB" sz="1400" b="1" noProof="0" dirty="0">
+                <a:solidFill>
+                  <a:schemeClr val="tx1">
+                    <a:lumMod val="85000"/>
+                    <a:lumOff val="15000"/>
+                  </a:schemeClr>
+                </a:solidFill>
+                <a:latin typeface="DM Sans" pitchFamily="2" charset="0"/>
+              </a:rPr>
+              <a:t>VISION</a:t>
+            </a:r>
+            <a:endParaRPr lang="en-GB" sz="1200" b="1" noProof="0" dirty="0">
               <a:solidFill>
-                <a:schemeClr val="accent1">
-                  <a:lumMod val="20000"/>
-                  <a:lumOff val="80000"/>
+                <a:schemeClr val="tx1">
+                  <a:lumMod val="85000"/>
+                  <a:lumOff val="15000"/>
                 </a:schemeClr>
               </a:solidFill>
-              <a:ln>
-                <a:noFill/>
-              </a:ln>
-            </p:spPr>
-            <p:style>
-              <a:lnRef idx="2">
-                <a:schemeClr val="accent1">
-                  <a:shade val="15000"/>
-                </a:schemeClr>
-              </a:lnRef>
-              <a:fillRef idx="1">
-                <a:schemeClr val="accent1"/>
-              </a:fillRef>
-              <a:effectRef idx="0">
-                <a:schemeClr val="accent1"/>
-              </a:effectRef>
-              <a:fontRef idx="minor">
-                <a:schemeClr val="lt1"/>
-              </a:fontRef>
-            </p:style>
-            <p:txBody>
-              <a:bodyPr rtlCol="0" anchor="ctr"/>
-              <a:lstStyle/>
-              <a:p>
-                <a:pPr algn="ctr"/>
-                <a:endParaRPr lang="LID4096"/>
-              </a:p>
-            </p:txBody>
-          </p:sp>
-          <p:sp>
-            <p:nvSpPr>
-              <p:cNvPr id="20" name="TextBox 19">
-                <a:extLst>
-                  <a:ext uri="{FF2B5EF4-FFF2-40B4-BE49-F238E27FC236}">
-                    <a16:creationId xmlns:a16="http://schemas.microsoft.com/office/drawing/2014/main" id="{1C285D34-3103-3FC5-CA90-096D3DDE0E6B}"/>
-                  </a:ext>
-                </a:extLst>
-              </p:cNvPr>
-              <p:cNvSpPr txBox="1"/>
-              <p:nvPr/>
-            </p:nvSpPr>
-            <p:spPr>
-              <a:xfrm>
-                <a:off x="2010738" y="1207612"/>
-                <a:ext cx="3560350" cy="369332"/>
-              </a:xfrm>
-              <a:prstGeom prst="rect">
-                <a:avLst/>
-              </a:prstGeom>
-              <a:noFill/>
-            </p:spPr>
-            <p:txBody>
-              <a:bodyPr wrap="square" lIns="0" tIns="0" rIns="0" bIns="0" rtlCol="0">
-                <a:spAutoFit/>
-              </a:bodyPr>
-              <a:lstStyle/>
-              <a:p>
-                <a:pPr>
-                  <a:buSzPct val="100000"/>
-                </a:pPr>
-                <a:r>
-                  <a:rPr lang="en-US" sz="1200" b="1" dirty="0">
-                    <a:latin typeface="DM Sans" pitchFamily="2" charset="0"/>
-                  </a:rPr>
-                  <a:t>Vision</a:t>
-                </a:r>
-              </a:p>
-              <a:p>
-                <a:pPr>
-                  <a:buSzPct val="100000"/>
-                </a:pPr>
-                <a:r>
-                  <a:rPr lang="en-US" sz="1200" dirty="0">
-                    <a:solidFill>
-                      <a:schemeClr val="tx1">
-                        <a:lumMod val="75000"/>
-                        <a:lumOff val="25000"/>
-                      </a:schemeClr>
-                    </a:solidFill>
-                    <a:latin typeface="+mj-lt"/>
-                  </a:rPr>
-                  <a:t>Vision</a:t>
-                </a:r>
-                <a:r>
-                  <a:rPr lang="en-US" sz="1200" b="1" dirty="0">
-                    <a:solidFill>
-                      <a:schemeClr val="tx1">
-                        <a:lumMod val="75000"/>
-                        <a:lumOff val="25000"/>
-                      </a:schemeClr>
-                    </a:solidFill>
-                    <a:latin typeface="+mj-lt"/>
-                  </a:rPr>
-                  <a:t>, </a:t>
-                </a:r>
-                <a:r>
-                  <a:rPr lang="en-US" sz="1200" dirty="0">
-                    <a:solidFill>
-                      <a:schemeClr val="tx1">
-                        <a:lumMod val="75000"/>
-                        <a:lumOff val="25000"/>
-                      </a:schemeClr>
-                    </a:solidFill>
-                    <a:latin typeface="+mj-lt"/>
-                  </a:rPr>
-                  <a:t>strategy, values, objectives</a:t>
-                </a:r>
-              </a:p>
-            </p:txBody>
-          </p:sp>
-        </p:grpSp>
-        <p:grpSp>
-          <p:nvGrpSpPr>
-            <p:cNvPr id="9" name="Groep 8">
-              <a:extLst>
-                <a:ext uri="{FF2B5EF4-FFF2-40B4-BE49-F238E27FC236}">
-                  <a16:creationId xmlns:a16="http://schemas.microsoft.com/office/drawing/2014/main" id="{ED531BDA-D9E1-B250-6381-7DFF6243F863}"/>
-                </a:ext>
-              </a:extLst>
-            </p:cNvPr>
-            <p:cNvGrpSpPr/>
-            <p:nvPr/>
-          </p:nvGrpSpPr>
-          <p:grpSpPr>
-            <a:xfrm>
-              <a:off x="1875658" y="3887682"/>
-              <a:ext cx="7034080" cy="908874"/>
-              <a:chOff x="1875658" y="2895090"/>
-              <a:chExt cx="7034080" cy="908874"/>
-            </a:xfrm>
-          </p:grpSpPr>
-          <p:grpSp>
-            <p:nvGrpSpPr>
-              <p:cNvPr id="6" name="Groep 5">
-                <a:extLst>
-                  <a:ext uri="{FF2B5EF4-FFF2-40B4-BE49-F238E27FC236}">
-                    <a16:creationId xmlns:a16="http://schemas.microsoft.com/office/drawing/2014/main" id="{2A1038EE-D6B3-1076-10A0-7EDB04F89669}"/>
-                  </a:ext>
-                </a:extLst>
-              </p:cNvPr>
-              <p:cNvGrpSpPr/>
-              <p:nvPr/>
-            </p:nvGrpSpPr>
-            <p:grpSpPr>
-              <a:xfrm>
-                <a:off x="1875658" y="2895090"/>
-                <a:ext cx="7034080" cy="908874"/>
-                <a:chOff x="1875658" y="2895090"/>
-                <a:chExt cx="7034080" cy="908874"/>
-              </a:xfrm>
-            </p:grpSpPr>
-            <p:sp>
-              <p:nvSpPr>
-                <p:cNvPr id="151" name="Rectangle 150">
-                  <a:extLst>
-                    <a:ext uri="{FF2B5EF4-FFF2-40B4-BE49-F238E27FC236}">
-                      <a16:creationId xmlns:a16="http://schemas.microsoft.com/office/drawing/2014/main" id="{DA84A920-84E4-D38E-DFB7-5C496D13FC0A}"/>
-                    </a:ext>
-                  </a:extLst>
-                </p:cNvPr>
-                <p:cNvSpPr/>
-                <p:nvPr/>
-              </p:nvSpPr>
-              <p:spPr>
-                <a:xfrm>
-                  <a:off x="1875658" y="2895090"/>
-                  <a:ext cx="2279565" cy="908874"/>
-                </a:xfrm>
-                <a:prstGeom prst="rect">
-                  <a:avLst/>
-                </a:prstGeom>
+              <a:latin typeface="DM Sans" pitchFamily="2" charset="0"/>
+            </a:endParaRPr>
+          </a:p>
+          <a:p>
+            <a:pPr>
+              <a:lnSpc>
+                <a:spcPts val="1300"/>
+              </a:lnSpc>
+              <a:buSzPct val="100000"/>
+            </a:pPr>
+            <a:r>
+              <a:rPr lang="en-GB" sz="1200" noProof="0" dirty="0">
                 <a:solidFill>
-                  <a:schemeClr val="accent1">
-                    <a:lumMod val="20000"/>
-                    <a:lumOff val="80000"/>
+                  <a:schemeClr val="tx1">
+                    <a:lumMod val="85000"/>
+                    <a:lumOff val="15000"/>
                   </a:schemeClr>
                 </a:solidFill>
-                <a:ln>
-                  <a:noFill/>
-                </a:ln>
-              </p:spPr>
-              <p:style>
-                <a:lnRef idx="2">
-                  <a:schemeClr val="accent1">
-                    <a:shade val="15000"/>
-                  </a:schemeClr>
-                </a:lnRef>
-                <a:fillRef idx="1">
-                  <a:schemeClr val="accent1"/>
-                </a:fillRef>
-                <a:effectRef idx="0">
-                  <a:schemeClr val="accent1"/>
-                </a:effectRef>
-                <a:fontRef idx="minor">
-                  <a:schemeClr val="lt1"/>
-                </a:fontRef>
-              </p:style>
-              <p:txBody>
-                <a:bodyPr rtlCol="0" anchor="ctr"/>
-                <a:lstStyle/>
-                <a:p>
-                  <a:pPr algn="ctr"/>
-                  <a:endParaRPr lang="LID4096"/>
-                </a:p>
-              </p:txBody>
-            </p:sp>
-            <p:sp>
-              <p:nvSpPr>
-                <p:cNvPr id="154" name="Rectangle 153">
-                  <a:extLst>
-                    <a:ext uri="{FF2B5EF4-FFF2-40B4-BE49-F238E27FC236}">
-                      <a16:creationId xmlns:a16="http://schemas.microsoft.com/office/drawing/2014/main" id="{55D2C2E2-60C1-A4D8-155A-29C4AE9102DC}"/>
-                    </a:ext>
-                  </a:extLst>
-                </p:cNvPr>
-                <p:cNvSpPr/>
-                <p:nvPr/>
-              </p:nvSpPr>
-              <p:spPr>
-                <a:xfrm>
-                  <a:off x="4252915" y="2895090"/>
-                  <a:ext cx="2279565" cy="908874"/>
-                </a:xfrm>
-                <a:prstGeom prst="rect">
-                  <a:avLst/>
-                </a:prstGeom>
+                <a:latin typeface="+mj-lt"/>
+              </a:rPr>
+              <a:t>Vision</a:t>
+            </a:r>
+            <a:r>
+              <a:rPr lang="en-GB" sz="1200" b="1" noProof="0" dirty="0">
                 <a:solidFill>
-                  <a:schemeClr val="accent1">
-                    <a:lumMod val="20000"/>
-                    <a:lumOff val="80000"/>
+                  <a:schemeClr val="tx1">
+                    <a:lumMod val="85000"/>
+                    <a:lumOff val="15000"/>
                   </a:schemeClr>
                 </a:solidFill>
-                <a:ln>
-                  <a:noFill/>
-                </a:ln>
-              </p:spPr>
-              <p:style>
-                <a:lnRef idx="2">
-                  <a:schemeClr val="accent1">
-                    <a:shade val="15000"/>
-                  </a:schemeClr>
-                </a:lnRef>
-                <a:fillRef idx="1">
-                  <a:schemeClr val="accent1"/>
-                </a:fillRef>
-                <a:effectRef idx="0">
-                  <a:schemeClr val="accent1"/>
-                </a:effectRef>
-                <a:fontRef idx="minor">
-                  <a:schemeClr val="lt1"/>
-                </a:fontRef>
-              </p:style>
-              <p:txBody>
-                <a:bodyPr rtlCol="0" anchor="ctr"/>
-                <a:lstStyle/>
-                <a:p>
-                  <a:pPr algn="ctr"/>
-                  <a:endParaRPr lang="LID4096"/>
-                </a:p>
-              </p:txBody>
-            </p:sp>
-            <p:sp>
-              <p:nvSpPr>
-                <p:cNvPr id="156" name="Rectangle 155">
-                  <a:extLst>
-                    <a:ext uri="{FF2B5EF4-FFF2-40B4-BE49-F238E27FC236}">
-                      <a16:creationId xmlns:a16="http://schemas.microsoft.com/office/drawing/2014/main" id="{DD197C6D-A1CA-B22B-ECAC-F110C43F9350}"/>
-                    </a:ext>
-                  </a:extLst>
-                </p:cNvPr>
-                <p:cNvSpPr/>
-                <p:nvPr/>
-              </p:nvSpPr>
-              <p:spPr>
-                <a:xfrm>
-                  <a:off x="6630173" y="2895090"/>
-                  <a:ext cx="2279565" cy="908874"/>
-                </a:xfrm>
-                <a:prstGeom prst="rect">
-                  <a:avLst/>
-                </a:prstGeom>
+                <a:latin typeface="+mj-lt"/>
+              </a:rPr>
+              <a:t>, </a:t>
+            </a:r>
+            <a:r>
+              <a:rPr lang="en-GB" sz="1200" noProof="0" dirty="0">
                 <a:solidFill>
-                  <a:schemeClr val="accent1">
-                    <a:lumMod val="20000"/>
-                    <a:lumOff val="80000"/>
+                  <a:schemeClr val="tx1">
+                    <a:lumMod val="85000"/>
+                    <a:lumOff val="15000"/>
                   </a:schemeClr>
                 </a:solidFill>
-                <a:ln>
-                  <a:noFill/>
-                </a:ln>
-              </p:spPr>
-              <p:style>
-                <a:lnRef idx="2">
-                  <a:schemeClr val="accent1">
-                    <a:shade val="15000"/>
-                  </a:schemeClr>
-                </a:lnRef>
-                <a:fillRef idx="1">
-                  <a:schemeClr val="accent1"/>
-                </a:fillRef>
-                <a:effectRef idx="0">
-                  <a:schemeClr val="accent1"/>
-                </a:effectRef>
-                <a:fontRef idx="minor">
-                  <a:schemeClr val="lt1"/>
-                </a:fontRef>
-              </p:style>
-              <p:txBody>
-                <a:bodyPr rtlCol="0" anchor="ctr"/>
-                <a:lstStyle/>
-                <a:p>
-                  <a:pPr algn="ctr"/>
-                  <a:endParaRPr lang="LID4096"/>
-                </a:p>
-              </p:txBody>
-            </p:sp>
-          </p:grpSp>
-          <p:sp>
-            <p:nvSpPr>
-              <p:cNvPr id="152" name="TextBox 151">
-                <a:extLst>
-                  <a:ext uri="{FF2B5EF4-FFF2-40B4-BE49-F238E27FC236}">
-                    <a16:creationId xmlns:a16="http://schemas.microsoft.com/office/drawing/2014/main" id="{30FBF885-B703-4E76-E0CE-D11230D74F72}"/>
-                  </a:ext>
-                </a:extLst>
-              </p:cNvPr>
-              <p:cNvSpPr txBox="1"/>
-              <p:nvPr/>
-            </p:nvSpPr>
-            <p:spPr>
-              <a:xfrm>
-                <a:off x="2010737" y="2961596"/>
-                <a:ext cx="2239199" cy="553998"/>
-              </a:xfrm>
-              <a:prstGeom prst="rect">
-                <a:avLst/>
-              </a:prstGeom>
-              <a:noFill/>
-            </p:spPr>
-            <p:txBody>
-              <a:bodyPr wrap="square" lIns="0" tIns="0" rIns="0" bIns="0" rtlCol="0">
-                <a:spAutoFit/>
-              </a:bodyPr>
-              <a:lstStyle/>
-              <a:p>
-                <a:pPr>
-                  <a:buSzPct val="100000"/>
-                </a:pPr>
-                <a:r>
-                  <a:rPr lang="en-US" sz="1200" b="1" dirty="0">
-                    <a:latin typeface="DM Sans" pitchFamily="2" charset="0"/>
-                  </a:rPr>
-                  <a:t>Data</a:t>
-                </a:r>
-              </a:p>
-              <a:p>
-                <a:pPr>
-                  <a:buSzPct val="100000"/>
-                </a:pPr>
-                <a:r>
-                  <a:rPr lang="en-US" sz="1200" dirty="0">
-                    <a:solidFill>
-                      <a:schemeClr val="tx1">
-                        <a:lumMod val="75000"/>
-                        <a:lumOff val="25000"/>
-                      </a:schemeClr>
-                    </a:solidFill>
-                    <a:latin typeface="+mj-lt"/>
-                  </a:rPr>
-                  <a:t>Reusable data products, analytics, architecture, monetization</a:t>
-                </a:r>
-              </a:p>
-            </p:txBody>
-          </p:sp>
-          <p:sp>
-            <p:nvSpPr>
-              <p:cNvPr id="155" name="TextBox 154">
-                <a:extLst>
-                  <a:ext uri="{FF2B5EF4-FFF2-40B4-BE49-F238E27FC236}">
-                    <a16:creationId xmlns:a16="http://schemas.microsoft.com/office/drawing/2014/main" id="{2F26F3B8-CA9A-3660-D416-56970DACBC05}"/>
-                  </a:ext>
-                </a:extLst>
-              </p:cNvPr>
-              <p:cNvSpPr txBox="1"/>
-              <p:nvPr/>
-            </p:nvSpPr>
-            <p:spPr>
-              <a:xfrm>
-                <a:off x="4391989" y="2961596"/>
-                <a:ext cx="1878739" cy="553998"/>
-              </a:xfrm>
-              <a:prstGeom prst="rect">
-                <a:avLst/>
-              </a:prstGeom>
-              <a:noFill/>
-            </p:spPr>
-            <p:txBody>
-              <a:bodyPr wrap="square" lIns="0" tIns="0" rIns="0" bIns="0" rtlCol="0">
-                <a:spAutoFit/>
-              </a:bodyPr>
-              <a:lstStyle/>
-              <a:p>
-                <a:pPr>
-                  <a:buSzPct val="100000"/>
-                </a:pPr>
-                <a:r>
-                  <a:rPr lang="en-US" sz="1200" b="1" dirty="0">
-                    <a:latin typeface="DM Sans" pitchFamily="2" charset="0"/>
-                  </a:rPr>
-                  <a:t>Technology</a:t>
-                </a:r>
-              </a:p>
-              <a:p>
-                <a:pPr>
-                  <a:buSzPct val="100000"/>
-                </a:pPr>
-                <a:r>
-                  <a:rPr lang="en-US" sz="1200" dirty="0">
-                    <a:solidFill>
-                      <a:schemeClr val="tx1">
-                        <a:lumMod val="75000"/>
-                        <a:lumOff val="25000"/>
-                      </a:schemeClr>
-                    </a:solidFill>
-                    <a:latin typeface="+mj-lt"/>
-                  </a:rPr>
-                  <a:t>Target architecture, platforms &amp; solutions, integration </a:t>
-                </a:r>
-              </a:p>
-            </p:txBody>
-          </p:sp>
-          <p:sp>
-            <p:nvSpPr>
-              <p:cNvPr id="157" name="TextBox 156">
-                <a:extLst>
-                  <a:ext uri="{FF2B5EF4-FFF2-40B4-BE49-F238E27FC236}">
-                    <a16:creationId xmlns:a16="http://schemas.microsoft.com/office/drawing/2014/main" id="{3AA9ACAD-2309-6695-05C5-A00E27FC3BF5}"/>
-                  </a:ext>
-                </a:extLst>
-              </p:cNvPr>
-              <p:cNvSpPr txBox="1"/>
-              <p:nvPr/>
-            </p:nvSpPr>
-            <p:spPr>
-              <a:xfrm>
-                <a:off x="6763057" y="2961596"/>
-                <a:ext cx="1884734" cy="738664"/>
-              </a:xfrm>
-              <a:prstGeom prst="rect">
-                <a:avLst/>
-              </a:prstGeom>
-              <a:noFill/>
-            </p:spPr>
-            <p:txBody>
-              <a:bodyPr wrap="square" lIns="0" tIns="0" rIns="0" bIns="0" rtlCol="0">
-                <a:spAutoFit/>
-              </a:bodyPr>
-              <a:lstStyle/>
-              <a:p>
-                <a:pPr>
-                  <a:buSzPct val="100000"/>
-                </a:pPr>
-                <a:r>
-                  <a:rPr lang="en-US" sz="1200" b="1" dirty="0">
-                    <a:latin typeface="DM Sans" pitchFamily="2" charset="0"/>
-                  </a:rPr>
-                  <a:t>Enablement</a:t>
-                </a:r>
-              </a:p>
-              <a:p>
-                <a:pPr>
-                  <a:buSzPct val="100000"/>
-                </a:pPr>
-                <a:r>
-                  <a:rPr lang="en-US" sz="1200" dirty="0">
-                    <a:solidFill>
-                      <a:schemeClr val="tx1">
-                        <a:lumMod val="75000"/>
-                        <a:lumOff val="25000"/>
-                      </a:schemeClr>
-                    </a:solidFill>
-                    <a:latin typeface="+mj-lt"/>
-                  </a:rPr>
-                  <a:t>Culture, AI &amp; engineering toolbox, automation, agents, skills</a:t>
-                </a:r>
-              </a:p>
-            </p:txBody>
-          </p:sp>
-        </p:grpSp>
-        <p:grpSp>
-          <p:nvGrpSpPr>
-            <p:cNvPr id="11" name="Groep 10">
-              <a:extLst>
-                <a:ext uri="{FF2B5EF4-FFF2-40B4-BE49-F238E27FC236}">
-                  <a16:creationId xmlns:a16="http://schemas.microsoft.com/office/drawing/2014/main" id="{B7CF1138-4C4E-266E-D6C0-860E7EEBF20D}"/>
-                </a:ext>
-              </a:extLst>
-            </p:cNvPr>
-            <p:cNvGrpSpPr/>
-            <p:nvPr/>
-          </p:nvGrpSpPr>
-          <p:grpSpPr>
-            <a:xfrm>
-              <a:off x="1875658" y="2896545"/>
-              <a:ext cx="7031757" cy="908874"/>
-              <a:chOff x="1875658" y="3934756"/>
-              <a:chExt cx="7031757" cy="908874"/>
-            </a:xfrm>
-          </p:grpSpPr>
-          <p:grpSp>
-            <p:nvGrpSpPr>
-              <p:cNvPr id="7" name="Groep 6">
-                <a:extLst>
-                  <a:ext uri="{FF2B5EF4-FFF2-40B4-BE49-F238E27FC236}">
-                    <a16:creationId xmlns:a16="http://schemas.microsoft.com/office/drawing/2014/main" id="{FA87857C-EE64-83B6-1558-C834EDD82F05}"/>
-                  </a:ext>
-                </a:extLst>
-              </p:cNvPr>
-              <p:cNvGrpSpPr/>
-              <p:nvPr/>
-            </p:nvGrpSpPr>
-            <p:grpSpPr>
-              <a:xfrm>
-                <a:off x="1875658" y="3934756"/>
-                <a:ext cx="7031757" cy="908874"/>
-                <a:chOff x="1875658" y="3934756"/>
-                <a:chExt cx="7031757" cy="908874"/>
-              </a:xfrm>
-            </p:grpSpPr>
-            <p:sp>
-              <p:nvSpPr>
-                <p:cNvPr id="162" name="Rectangle 161">
-                  <a:extLst>
-                    <a:ext uri="{FF2B5EF4-FFF2-40B4-BE49-F238E27FC236}">
-                      <a16:creationId xmlns:a16="http://schemas.microsoft.com/office/drawing/2014/main" id="{72576AB9-B02D-3B55-BF90-C23F1A867704}"/>
-                    </a:ext>
-                  </a:extLst>
-                </p:cNvPr>
-                <p:cNvSpPr/>
-                <p:nvPr/>
-              </p:nvSpPr>
-              <p:spPr>
-                <a:xfrm>
-                  <a:off x="1875658" y="3934756"/>
-                  <a:ext cx="3466168" cy="908874"/>
-                </a:xfrm>
-                <a:prstGeom prst="rect">
-                  <a:avLst/>
-                </a:prstGeom>
+                <a:latin typeface="+mj-lt"/>
+              </a:rPr>
+              <a:t>strategy, values, objectives</a:t>
+            </a:r>
+          </a:p>
+        </p:txBody>
+      </p:sp>
+      <p:sp>
+        <p:nvSpPr>
+          <p:cNvPr id="151" name="Rectangle 150">
+            <a:extLst>
+              <a:ext uri="{FF2B5EF4-FFF2-40B4-BE49-F238E27FC236}">
+                <a16:creationId xmlns:a16="http://schemas.microsoft.com/office/drawing/2014/main" id="{DA84A920-84E4-D38E-DFB7-5C496D13FC0A}"/>
+              </a:ext>
+            </a:extLst>
+          </p:cNvPr>
+          <p:cNvSpPr/>
+          <p:nvPr/>
+        </p:nvSpPr>
+        <p:spPr>
+          <a:xfrm>
+            <a:off x="2271959" y="4023121"/>
+            <a:ext cx="2480582" cy="908874"/>
+          </a:xfrm>
+          <a:prstGeom prst="roundRect">
+            <a:avLst/>
+          </a:prstGeom>
+          <a:noFill/>
+          <a:ln>
+            <a:solidFill>
+              <a:schemeClr val="tx1">
+                <a:lumMod val="85000"/>
+                <a:lumOff val="15000"/>
+              </a:schemeClr>
+            </a:solidFill>
+          </a:ln>
+        </p:spPr>
+        <p:style>
+          <a:lnRef idx="2">
+            <a:schemeClr val="accent1">
+              <a:shade val="15000"/>
+            </a:schemeClr>
+          </a:lnRef>
+          <a:fillRef idx="1">
+            <a:schemeClr val="accent1"/>
+          </a:fillRef>
+          <a:effectRef idx="0">
+            <a:schemeClr val="accent1"/>
+          </a:effectRef>
+          <a:fontRef idx="minor">
+            <a:schemeClr val="lt1"/>
+          </a:fontRef>
+        </p:style>
+        <p:txBody>
+          <a:bodyPr rtlCol="0" anchor="ctr"/>
+          <a:lstStyle/>
+          <a:p>
+            <a:pPr algn="ctr"/>
+            <a:endParaRPr lang="en-GB" noProof="0" dirty="0"/>
+          </a:p>
+        </p:txBody>
+      </p:sp>
+      <p:sp>
+        <p:nvSpPr>
+          <p:cNvPr id="154" name="Rectangle 153">
+            <a:extLst>
+              <a:ext uri="{FF2B5EF4-FFF2-40B4-BE49-F238E27FC236}">
+                <a16:creationId xmlns:a16="http://schemas.microsoft.com/office/drawing/2014/main" id="{55D2C2E2-60C1-A4D8-155A-29C4AE9102DC}"/>
+              </a:ext>
+            </a:extLst>
+          </p:cNvPr>
+          <p:cNvSpPr/>
+          <p:nvPr/>
+        </p:nvSpPr>
+        <p:spPr>
+          <a:xfrm>
+            <a:off x="4858848" y="4023121"/>
+            <a:ext cx="2480582" cy="908874"/>
+          </a:xfrm>
+          <a:prstGeom prst="roundRect">
+            <a:avLst/>
+          </a:prstGeom>
+          <a:noFill/>
+          <a:ln>
+            <a:solidFill>
+              <a:schemeClr val="tx1">
+                <a:lumMod val="85000"/>
+                <a:lumOff val="15000"/>
+              </a:schemeClr>
+            </a:solidFill>
+          </a:ln>
+        </p:spPr>
+        <p:style>
+          <a:lnRef idx="2">
+            <a:schemeClr val="accent1">
+              <a:shade val="15000"/>
+            </a:schemeClr>
+          </a:lnRef>
+          <a:fillRef idx="1">
+            <a:schemeClr val="accent1"/>
+          </a:fillRef>
+          <a:effectRef idx="0">
+            <a:schemeClr val="accent1"/>
+          </a:effectRef>
+          <a:fontRef idx="minor">
+            <a:schemeClr val="lt1"/>
+          </a:fontRef>
+        </p:style>
+        <p:txBody>
+          <a:bodyPr rtlCol="0" anchor="ctr"/>
+          <a:lstStyle/>
+          <a:p>
+            <a:pPr algn="ctr"/>
+            <a:endParaRPr lang="en-GB" noProof="0" dirty="0"/>
+          </a:p>
+        </p:txBody>
+      </p:sp>
+      <p:sp>
+        <p:nvSpPr>
+          <p:cNvPr id="156" name="Rectangle 155">
+            <a:extLst>
+              <a:ext uri="{FF2B5EF4-FFF2-40B4-BE49-F238E27FC236}">
+                <a16:creationId xmlns:a16="http://schemas.microsoft.com/office/drawing/2014/main" id="{DD197C6D-A1CA-B22B-ECAC-F110C43F9350}"/>
+              </a:ext>
+            </a:extLst>
+          </p:cNvPr>
+          <p:cNvSpPr/>
+          <p:nvPr/>
+        </p:nvSpPr>
+        <p:spPr>
+          <a:xfrm>
+            <a:off x="7445738" y="4023121"/>
+            <a:ext cx="2480582" cy="908874"/>
+          </a:xfrm>
+          <a:prstGeom prst="roundRect">
+            <a:avLst/>
+          </a:prstGeom>
+          <a:noFill/>
+          <a:ln>
+            <a:solidFill>
+              <a:schemeClr val="tx1">
+                <a:lumMod val="85000"/>
+                <a:lumOff val="15000"/>
+              </a:schemeClr>
+            </a:solidFill>
+          </a:ln>
+        </p:spPr>
+        <p:style>
+          <a:lnRef idx="2">
+            <a:schemeClr val="accent1">
+              <a:shade val="15000"/>
+            </a:schemeClr>
+          </a:lnRef>
+          <a:fillRef idx="1">
+            <a:schemeClr val="accent1"/>
+          </a:fillRef>
+          <a:effectRef idx="0">
+            <a:schemeClr val="accent1"/>
+          </a:effectRef>
+          <a:fontRef idx="minor">
+            <a:schemeClr val="lt1"/>
+          </a:fontRef>
+        </p:style>
+        <p:txBody>
+          <a:bodyPr rtlCol="0" anchor="ctr"/>
+          <a:lstStyle/>
+          <a:p>
+            <a:pPr algn="ctr"/>
+            <a:endParaRPr lang="en-GB" noProof="0" dirty="0"/>
+          </a:p>
+        </p:txBody>
+      </p:sp>
+      <p:sp>
+        <p:nvSpPr>
+          <p:cNvPr id="152" name="TextBox 151">
+            <a:extLst>
+              <a:ext uri="{FF2B5EF4-FFF2-40B4-BE49-F238E27FC236}">
+                <a16:creationId xmlns:a16="http://schemas.microsoft.com/office/drawing/2014/main" id="{30FBF885-B703-4E76-E0CE-D11230D74F72}"/>
+              </a:ext>
+            </a:extLst>
+          </p:cNvPr>
+          <p:cNvSpPr txBox="1"/>
+          <p:nvPr/>
+        </p:nvSpPr>
+        <p:spPr>
+          <a:xfrm>
+            <a:off x="2418949" y="4089627"/>
+            <a:ext cx="2436657" cy="549766"/>
+          </a:xfrm>
+          <a:prstGeom prst="rect">
+            <a:avLst/>
+          </a:prstGeom>
+          <a:noFill/>
+        </p:spPr>
+        <p:txBody>
+          <a:bodyPr wrap="square" lIns="0" tIns="0" rIns="0" bIns="0" rtlCol="0">
+            <a:spAutoFit/>
+          </a:bodyPr>
+          <a:lstStyle/>
+          <a:p>
+            <a:pPr>
+              <a:buSzPct val="100000"/>
+            </a:pPr>
+            <a:r>
+              <a:rPr lang="en-GB" sz="1400" b="1" noProof="0" dirty="0">
                 <a:solidFill>
-                  <a:schemeClr val="accent1">
-                    <a:lumMod val="20000"/>
-                    <a:lumOff val="80000"/>
+                  <a:schemeClr val="tx1">
+                    <a:lumMod val="85000"/>
+                    <a:lumOff val="15000"/>
                   </a:schemeClr>
                 </a:solidFill>
-                <a:ln>
-                  <a:noFill/>
-                </a:ln>
-              </p:spPr>
-              <p:style>
-                <a:lnRef idx="2">
-                  <a:schemeClr val="accent1">
-                    <a:shade val="15000"/>
-                  </a:schemeClr>
-                </a:lnRef>
-                <a:fillRef idx="1">
-                  <a:schemeClr val="accent1"/>
-                </a:fillRef>
-                <a:effectRef idx="0">
-                  <a:schemeClr val="accent1"/>
-                </a:effectRef>
-                <a:fontRef idx="minor">
-                  <a:schemeClr val="lt1"/>
-                </a:fontRef>
-              </p:style>
-              <p:txBody>
-                <a:bodyPr rtlCol="0" anchor="ctr"/>
-                <a:lstStyle/>
-                <a:p>
-                  <a:pPr algn="ctr"/>
-                  <a:endParaRPr lang="LID4096"/>
-                </a:p>
-              </p:txBody>
-            </p:sp>
-            <p:sp>
-              <p:nvSpPr>
-                <p:cNvPr id="165" name="Rectangle 164">
-                  <a:extLst>
-                    <a:ext uri="{FF2B5EF4-FFF2-40B4-BE49-F238E27FC236}">
-                      <a16:creationId xmlns:a16="http://schemas.microsoft.com/office/drawing/2014/main" id="{C8B0295D-55E0-BE71-18DC-D49D90CE7050}"/>
-                    </a:ext>
-                  </a:extLst>
-                </p:cNvPr>
-                <p:cNvSpPr/>
-                <p:nvPr/>
-              </p:nvSpPr>
-              <p:spPr>
-                <a:xfrm>
-                  <a:off x="5441247" y="3934756"/>
-                  <a:ext cx="3466168" cy="908874"/>
-                </a:xfrm>
-                <a:prstGeom prst="rect">
-                  <a:avLst/>
-                </a:prstGeom>
+                <a:latin typeface="DM Sans" pitchFamily="2" charset="0"/>
+              </a:rPr>
+              <a:t>DATA</a:t>
+            </a:r>
+            <a:endParaRPr lang="en-GB" sz="1200" b="1" noProof="0" dirty="0">
+              <a:solidFill>
+                <a:schemeClr val="tx1">
+                  <a:lumMod val="85000"/>
+                  <a:lumOff val="15000"/>
+                </a:schemeClr>
+              </a:solidFill>
+              <a:latin typeface="DM Sans" pitchFamily="2" charset="0"/>
+            </a:endParaRPr>
+          </a:p>
+          <a:p>
+            <a:pPr>
+              <a:lnSpc>
+                <a:spcPts val="1300"/>
+              </a:lnSpc>
+              <a:buSzPct val="100000"/>
+            </a:pPr>
+            <a:r>
+              <a:rPr lang="en-GB" sz="1200" noProof="0" dirty="0">
                 <a:solidFill>
-                  <a:schemeClr val="accent1">
-                    <a:lumMod val="20000"/>
-                    <a:lumOff val="80000"/>
+                  <a:schemeClr val="tx1">
+                    <a:lumMod val="85000"/>
+                    <a:lumOff val="15000"/>
                   </a:schemeClr>
                 </a:solidFill>
-                <a:ln>
-                  <a:noFill/>
-                </a:ln>
-              </p:spPr>
-              <p:style>
-                <a:lnRef idx="2">
-                  <a:schemeClr val="accent1">
-                    <a:shade val="15000"/>
+                <a:latin typeface="+mj-lt"/>
+              </a:rPr>
+              <a:t>Reusable data products, analytics, architecture, monetization</a:t>
+            </a:r>
+          </a:p>
+        </p:txBody>
+      </p:sp>
+      <p:sp>
+        <p:nvSpPr>
+          <p:cNvPr id="155" name="TextBox 154">
+            <a:extLst>
+              <a:ext uri="{FF2B5EF4-FFF2-40B4-BE49-F238E27FC236}">
+                <a16:creationId xmlns:a16="http://schemas.microsoft.com/office/drawing/2014/main" id="{2F26F3B8-CA9A-3660-D416-56970DACBC05}"/>
+              </a:ext>
+            </a:extLst>
+          </p:cNvPr>
+          <p:cNvSpPr txBox="1"/>
+          <p:nvPr/>
+        </p:nvSpPr>
+        <p:spPr>
+          <a:xfrm>
+            <a:off x="5010186" y="4089627"/>
+            <a:ext cx="2044410" cy="549766"/>
+          </a:xfrm>
+          <a:prstGeom prst="rect">
+            <a:avLst/>
+          </a:prstGeom>
+          <a:noFill/>
+        </p:spPr>
+        <p:txBody>
+          <a:bodyPr wrap="square" lIns="0" tIns="0" rIns="0" bIns="0" rtlCol="0">
+            <a:spAutoFit/>
+          </a:bodyPr>
+          <a:lstStyle/>
+          <a:p>
+            <a:pPr>
+              <a:buSzPct val="100000"/>
+            </a:pPr>
+            <a:r>
+              <a:rPr lang="en-GB" sz="1400" b="1" noProof="0" dirty="0">
+                <a:solidFill>
+                  <a:schemeClr val="tx1">
+                    <a:lumMod val="85000"/>
+                    <a:lumOff val="15000"/>
                   </a:schemeClr>
-                </a:lnRef>
-                <a:fillRef idx="1">
-                  <a:schemeClr val="accent1"/>
-                </a:fillRef>
-                <a:effectRef idx="0">
-                  <a:schemeClr val="accent1"/>
-                </a:effectRef>
-                <a:fontRef idx="minor">
-                  <a:schemeClr val="lt1"/>
-                </a:fontRef>
-              </p:style>
-              <p:txBody>
-                <a:bodyPr rtlCol="0" anchor="ctr"/>
-                <a:lstStyle/>
-                <a:p>
-                  <a:pPr algn="ctr"/>
-                  <a:endParaRPr lang="LID4096"/>
-                </a:p>
-              </p:txBody>
-            </p:sp>
-          </p:grpSp>
-          <p:sp>
-            <p:nvSpPr>
-              <p:cNvPr id="163" name="TextBox 162">
-                <a:extLst>
-                  <a:ext uri="{FF2B5EF4-FFF2-40B4-BE49-F238E27FC236}">
-                    <a16:creationId xmlns:a16="http://schemas.microsoft.com/office/drawing/2014/main" id="{5062C2DE-E635-12D3-2B1A-52C3839E99E0}"/>
-                  </a:ext>
-                </a:extLst>
-              </p:cNvPr>
-              <p:cNvSpPr txBox="1"/>
-              <p:nvPr/>
-            </p:nvSpPr>
-            <p:spPr>
-              <a:xfrm>
-                <a:off x="2010739" y="4001262"/>
-                <a:ext cx="2827304" cy="553998"/>
-              </a:xfrm>
-              <a:prstGeom prst="rect">
-                <a:avLst/>
-              </a:prstGeom>
-              <a:noFill/>
-            </p:spPr>
-            <p:txBody>
-              <a:bodyPr wrap="square" lIns="0" tIns="0" rIns="0" bIns="0" rtlCol="0">
-                <a:spAutoFit/>
-              </a:bodyPr>
-              <a:lstStyle/>
-              <a:p>
-                <a:pPr>
-                  <a:buSzPct val="100000"/>
-                </a:pPr>
-                <a:r>
-                  <a:rPr lang="en-US" sz="1200" b="1" dirty="0">
-                    <a:latin typeface="DM Sans" pitchFamily="2" charset="0"/>
-                  </a:rPr>
-                  <a:t>People</a:t>
-                </a:r>
-              </a:p>
-              <a:p>
-                <a:pPr>
-                  <a:buSzPct val="100000"/>
-                </a:pPr>
-                <a:r>
-                  <a:rPr lang="en-US" sz="1200" dirty="0">
-                    <a:solidFill>
-                      <a:schemeClr val="tx1">
-                        <a:lumMod val="75000"/>
-                        <a:lumOff val="25000"/>
-                      </a:schemeClr>
-                    </a:solidFill>
-                    <a:latin typeface="+mj-lt"/>
-                  </a:rPr>
-                  <a:t>Roles, target skills &amp; gaps, org sizing, talent journey, training, team incentives</a:t>
-                </a:r>
-              </a:p>
-            </p:txBody>
-          </p:sp>
-          <p:sp>
-            <p:nvSpPr>
-              <p:cNvPr id="166" name="TextBox 165">
-                <a:extLst>
-                  <a:ext uri="{FF2B5EF4-FFF2-40B4-BE49-F238E27FC236}">
-                    <a16:creationId xmlns:a16="http://schemas.microsoft.com/office/drawing/2014/main" id="{3C502B40-5DAD-8077-0D3C-B23D768C371B}"/>
-                  </a:ext>
-                </a:extLst>
-              </p:cNvPr>
-              <p:cNvSpPr txBox="1"/>
-              <p:nvPr/>
-            </p:nvSpPr>
-            <p:spPr>
-              <a:xfrm>
-                <a:off x="5571088" y="4001262"/>
-                <a:ext cx="2341828" cy="553998"/>
-              </a:xfrm>
-              <a:prstGeom prst="rect">
-                <a:avLst/>
-              </a:prstGeom>
-              <a:noFill/>
-            </p:spPr>
-            <p:txBody>
-              <a:bodyPr wrap="square" lIns="0" tIns="0" rIns="0" bIns="0" rtlCol="0">
-                <a:spAutoFit/>
-              </a:bodyPr>
-              <a:lstStyle/>
-              <a:p>
-                <a:pPr>
-                  <a:buSzPct val="100000"/>
-                </a:pPr>
-                <a:r>
-                  <a:rPr lang="en-US" sz="1200" b="1" dirty="0">
-                    <a:latin typeface="DM Sans" pitchFamily="2" charset="0"/>
-                  </a:rPr>
-                  <a:t>Process</a:t>
-                </a:r>
-              </a:p>
-              <a:p>
-                <a:pPr>
-                  <a:buSzPct val="100000"/>
-                </a:pPr>
-                <a:r>
-                  <a:rPr lang="en-US" sz="1200" dirty="0">
-                    <a:solidFill>
-                      <a:schemeClr val="tx1">
-                        <a:lumMod val="75000"/>
-                        <a:lumOff val="25000"/>
-                      </a:schemeClr>
-                    </a:solidFill>
-                    <a:latin typeface="+mj-lt"/>
-                  </a:rPr>
-                  <a:t>Org. design, cross-functional teams, product way-of-working</a:t>
-                </a:r>
-              </a:p>
-            </p:txBody>
-          </p:sp>
-        </p:grpSp>
-        <p:grpSp>
-          <p:nvGrpSpPr>
-            <p:cNvPr id="5" name="Groep 4">
-              <a:extLst>
-                <a:ext uri="{FF2B5EF4-FFF2-40B4-BE49-F238E27FC236}">
-                  <a16:creationId xmlns:a16="http://schemas.microsoft.com/office/drawing/2014/main" id="{494DD1AA-4D45-71F0-9314-8C1607F0A66C}"/>
-                </a:ext>
-              </a:extLst>
-            </p:cNvPr>
-            <p:cNvGrpSpPr/>
-            <p:nvPr/>
-          </p:nvGrpSpPr>
-          <p:grpSpPr>
-            <a:xfrm>
-              <a:off x="1875657" y="1845667"/>
-              <a:ext cx="7031758" cy="908874"/>
-              <a:chOff x="1875657" y="1856048"/>
-              <a:chExt cx="7031758" cy="908874"/>
-            </a:xfrm>
-          </p:grpSpPr>
-          <p:sp>
-            <p:nvSpPr>
-              <p:cNvPr id="140" name="Rectangle 139">
-                <a:extLst>
-                  <a:ext uri="{FF2B5EF4-FFF2-40B4-BE49-F238E27FC236}">
-                    <a16:creationId xmlns:a16="http://schemas.microsoft.com/office/drawing/2014/main" id="{803139DD-F140-2E13-C535-DBA32BD2249E}"/>
-                  </a:ext>
-                </a:extLst>
-              </p:cNvPr>
-              <p:cNvSpPr/>
-              <p:nvPr/>
-            </p:nvSpPr>
-            <p:spPr>
-              <a:xfrm>
-                <a:off x="1875657" y="1856048"/>
-                <a:ext cx="7031758" cy="908874"/>
-              </a:xfrm>
-              <a:prstGeom prst="rect">
-                <a:avLst/>
-              </a:prstGeom>
+                </a:solidFill>
+                <a:latin typeface="DM Sans" pitchFamily="2" charset="0"/>
+              </a:rPr>
+              <a:t>TECHNOLOGY</a:t>
+            </a:r>
+            <a:endParaRPr lang="en-GB" sz="1200" b="1" noProof="0" dirty="0">
               <a:solidFill>
-                <a:schemeClr val="accent1">
-                  <a:lumMod val="20000"/>
-                  <a:lumOff val="80000"/>
+                <a:schemeClr val="tx1">
+                  <a:lumMod val="85000"/>
+                  <a:lumOff val="15000"/>
                 </a:schemeClr>
               </a:solidFill>
-              <a:ln>
-                <a:noFill/>
-              </a:ln>
-            </p:spPr>
-            <p:style>
-              <a:lnRef idx="2">
-                <a:schemeClr val="accent1">
-                  <a:shade val="15000"/>
+              <a:latin typeface="DM Sans" pitchFamily="2" charset="0"/>
+            </a:endParaRPr>
+          </a:p>
+          <a:p>
+            <a:pPr>
+              <a:lnSpc>
+                <a:spcPts val="1300"/>
+              </a:lnSpc>
+              <a:buSzPct val="100000"/>
+            </a:pPr>
+            <a:r>
+              <a:rPr lang="en-GB" sz="1200" noProof="0" dirty="0">
+                <a:solidFill>
+                  <a:schemeClr val="tx1">
+                    <a:lumMod val="85000"/>
+                    <a:lumOff val="15000"/>
+                  </a:schemeClr>
+                </a:solidFill>
+                <a:latin typeface="+mj-lt"/>
+              </a:rPr>
+              <a:t>Target architecture, platforms &amp; solutions, integration </a:t>
+            </a:r>
+          </a:p>
+        </p:txBody>
+      </p:sp>
+      <p:sp>
+        <p:nvSpPr>
+          <p:cNvPr id="157" name="TextBox 156">
+            <a:extLst>
+              <a:ext uri="{FF2B5EF4-FFF2-40B4-BE49-F238E27FC236}">
+                <a16:creationId xmlns:a16="http://schemas.microsoft.com/office/drawing/2014/main" id="{3AA9ACAD-2309-6695-05C5-A00E27FC3BF5}"/>
+              </a:ext>
+            </a:extLst>
+          </p:cNvPr>
+          <p:cNvSpPr txBox="1"/>
+          <p:nvPr/>
+        </p:nvSpPr>
+        <p:spPr>
+          <a:xfrm>
+            <a:off x="7590340" y="4089627"/>
+            <a:ext cx="2050934" cy="549766"/>
+          </a:xfrm>
+          <a:prstGeom prst="rect">
+            <a:avLst/>
+          </a:prstGeom>
+          <a:noFill/>
+        </p:spPr>
+        <p:txBody>
+          <a:bodyPr wrap="square" lIns="0" tIns="0" rIns="0" bIns="0" rtlCol="0">
+            <a:spAutoFit/>
+          </a:bodyPr>
+          <a:lstStyle/>
+          <a:p>
+            <a:pPr>
+              <a:buSzPct val="100000"/>
+            </a:pPr>
+            <a:r>
+              <a:rPr lang="en-GB" sz="1400" b="1" noProof="0" dirty="0">
+                <a:solidFill>
+                  <a:schemeClr val="tx1">
+                    <a:lumMod val="85000"/>
+                    <a:lumOff val="15000"/>
+                  </a:schemeClr>
+                </a:solidFill>
+                <a:latin typeface="DM Sans" pitchFamily="2" charset="0"/>
+              </a:rPr>
+              <a:t>ENABLEMENT</a:t>
+            </a:r>
+            <a:endParaRPr lang="en-GB" sz="1200" b="1" noProof="0" dirty="0">
+              <a:solidFill>
+                <a:schemeClr val="tx1">
+                  <a:lumMod val="85000"/>
+                  <a:lumOff val="15000"/>
                 </a:schemeClr>
-              </a:lnRef>
-              <a:fillRef idx="1">
-                <a:schemeClr val="accent1"/>
-              </a:fillRef>
-              <a:effectRef idx="0">
-                <a:schemeClr val="accent1"/>
-              </a:effectRef>
-              <a:fontRef idx="minor">
-                <a:schemeClr val="lt1"/>
-              </a:fontRef>
-            </p:style>
-            <p:txBody>
-              <a:bodyPr rtlCol="0" anchor="ctr"/>
-              <a:lstStyle/>
-              <a:p>
-                <a:pPr algn="ctr"/>
-                <a:endParaRPr lang="LID4096"/>
-              </a:p>
-            </p:txBody>
-          </p:sp>
-          <p:sp>
-            <p:nvSpPr>
-              <p:cNvPr id="141" name="TextBox 140">
-                <a:extLst>
-                  <a:ext uri="{FF2B5EF4-FFF2-40B4-BE49-F238E27FC236}">
-                    <a16:creationId xmlns:a16="http://schemas.microsoft.com/office/drawing/2014/main" id="{AE8C815B-7E18-CE74-1D37-2454B20069A0}"/>
-                  </a:ext>
-                </a:extLst>
-              </p:cNvPr>
-              <p:cNvSpPr txBox="1"/>
-              <p:nvPr/>
-            </p:nvSpPr>
-            <p:spPr>
-              <a:xfrm>
-                <a:off x="2010738" y="1922554"/>
-                <a:ext cx="2959845" cy="553998"/>
-              </a:xfrm>
-              <a:prstGeom prst="rect">
-                <a:avLst/>
-              </a:prstGeom>
-              <a:noFill/>
-            </p:spPr>
-            <p:txBody>
-              <a:bodyPr wrap="square" lIns="0" tIns="0" rIns="0" bIns="0" rtlCol="0">
-                <a:spAutoFit/>
-              </a:bodyPr>
-              <a:lstStyle/>
-              <a:p>
-                <a:pPr>
-                  <a:buSzPct val="100000"/>
-                </a:pPr>
-                <a:r>
-                  <a:rPr lang="en-US" sz="1200" b="1" dirty="0">
-                    <a:latin typeface="DM Sans" pitchFamily="2" charset="0"/>
-                  </a:rPr>
-                  <a:t>Products</a:t>
-                </a:r>
-                <a:r>
-                  <a:rPr lang="en-US" sz="1200" dirty="0">
-                    <a:latin typeface="DM Sans" pitchFamily="2" charset="0"/>
-                  </a:rPr>
-                  <a:t> -  by platform or business unit</a:t>
-                </a:r>
-              </a:p>
-              <a:p>
-                <a:pPr>
-                  <a:buSzPct val="100000"/>
-                </a:pPr>
-                <a:r>
-                  <a:rPr lang="en-US" sz="1200" dirty="0">
-                    <a:solidFill>
-                      <a:schemeClr val="tx1">
-                        <a:lumMod val="75000"/>
-                        <a:lumOff val="25000"/>
-                      </a:schemeClr>
-                    </a:solidFill>
-                    <a:latin typeface="+mj-lt"/>
-                  </a:rPr>
-                  <a:t>Product vision &amp; objectives, products, persona’s, customer journeys, frictions</a:t>
-                </a:r>
-              </a:p>
-            </p:txBody>
-          </p:sp>
-          <p:sp>
-            <p:nvSpPr>
-              <p:cNvPr id="43" name="Rectangle 42">
-                <a:extLst>
-                  <a:ext uri="{FF2B5EF4-FFF2-40B4-BE49-F238E27FC236}">
-                    <a16:creationId xmlns:a16="http://schemas.microsoft.com/office/drawing/2014/main" id="{77F83771-69DC-DE58-F493-65CEDB545E5C}"/>
-                  </a:ext>
-                </a:extLst>
-              </p:cNvPr>
-              <p:cNvSpPr/>
-              <p:nvPr/>
-            </p:nvSpPr>
-            <p:spPr>
-              <a:xfrm>
-                <a:off x="6089213" y="1959390"/>
-                <a:ext cx="557171" cy="697758"/>
-              </a:xfrm>
-              <a:prstGeom prst="rect">
-                <a:avLst/>
-              </a:prstGeom>
+              </a:solidFill>
+              <a:latin typeface="DM Sans" pitchFamily="2" charset="0"/>
+            </a:endParaRPr>
+          </a:p>
+          <a:p>
+            <a:pPr>
+              <a:lnSpc>
+                <a:spcPts val="1300"/>
+              </a:lnSpc>
+              <a:buSzPct val="100000"/>
+            </a:pPr>
+            <a:r>
+              <a:rPr lang="en-GB" sz="1200" noProof="0" dirty="0">
+                <a:solidFill>
+                  <a:schemeClr val="tx1">
+                    <a:lumMod val="85000"/>
+                    <a:lumOff val="15000"/>
+                  </a:schemeClr>
+                </a:solidFill>
+                <a:latin typeface="+mj-lt"/>
+              </a:rPr>
+              <a:t>Culture, AI &amp; engineering toolbox, automation, agents, skills</a:t>
+            </a:r>
+          </a:p>
+        </p:txBody>
+      </p:sp>
+      <p:sp>
+        <p:nvSpPr>
+          <p:cNvPr id="162" name="Rectangle 161">
+            <a:extLst>
+              <a:ext uri="{FF2B5EF4-FFF2-40B4-BE49-F238E27FC236}">
+                <a16:creationId xmlns:a16="http://schemas.microsoft.com/office/drawing/2014/main" id="{72576AB9-B02D-3B55-BF90-C23F1A867704}"/>
+              </a:ext>
+            </a:extLst>
+          </p:cNvPr>
+          <p:cNvSpPr/>
+          <p:nvPr/>
+        </p:nvSpPr>
+        <p:spPr>
+          <a:xfrm>
+            <a:off x="2271959" y="3031984"/>
+            <a:ext cx="3771823" cy="908874"/>
+          </a:xfrm>
+          <a:prstGeom prst="roundRect">
+            <a:avLst/>
+          </a:prstGeom>
+          <a:noFill/>
+          <a:ln>
+            <a:solidFill>
+              <a:schemeClr val="tx1">
+                <a:lumMod val="85000"/>
+                <a:lumOff val="15000"/>
+              </a:schemeClr>
+            </a:solidFill>
+          </a:ln>
+        </p:spPr>
+        <p:style>
+          <a:lnRef idx="2">
+            <a:schemeClr val="accent1">
+              <a:shade val="15000"/>
+            </a:schemeClr>
+          </a:lnRef>
+          <a:fillRef idx="1">
+            <a:schemeClr val="accent1"/>
+          </a:fillRef>
+          <a:effectRef idx="0">
+            <a:schemeClr val="accent1"/>
+          </a:effectRef>
+          <a:fontRef idx="minor">
+            <a:schemeClr val="lt1"/>
+          </a:fontRef>
+        </p:style>
+        <p:txBody>
+          <a:bodyPr rtlCol="0" anchor="ctr"/>
+          <a:lstStyle/>
+          <a:p>
+            <a:pPr algn="ctr"/>
+            <a:endParaRPr lang="en-GB" noProof="0" dirty="0"/>
+          </a:p>
+        </p:txBody>
+      </p:sp>
+      <p:sp>
+        <p:nvSpPr>
+          <p:cNvPr id="165" name="Rectangle 164">
+            <a:extLst>
+              <a:ext uri="{FF2B5EF4-FFF2-40B4-BE49-F238E27FC236}">
+                <a16:creationId xmlns:a16="http://schemas.microsoft.com/office/drawing/2014/main" id="{C8B0295D-55E0-BE71-18DC-D49D90CE7050}"/>
+              </a:ext>
+            </a:extLst>
+          </p:cNvPr>
+          <p:cNvSpPr/>
+          <p:nvPr/>
+        </p:nvSpPr>
+        <p:spPr>
+          <a:xfrm>
+            <a:off x="6151970" y="3031984"/>
+            <a:ext cx="3771823" cy="908874"/>
+          </a:xfrm>
+          <a:prstGeom prst="roundRect">
+            <a:avLst/>
+          </a:prstGeom>
+          <a:noFill/>
+          <a:ln>
+            <a:solidFill>
+              <a:schemeClr val="tx1">
+                <a:lumMod val="85000"/>
+                <a:lumOff val="15000"/>
+              </a:schemeClr>
+            </a:solidFill>
+          </a:ln>
+        </p:spPr>
+        <p:style>
+          <a:lnRef idx="2">
+            <a:schemeClr val="accent1">
+              <a:shade val="15000"/>
+            </a:schemeClr>
+          </a:lnRef>
+          <a:fillRef idx="1">
+            <a:schemeClr val="accent1"/>
+          </a:fillRef>
+          <a:effectRef idx="0">
+            <a:schemeClr val="accent1"/>
+          </a:effectRef>
+          <a:fontRef idx="minor">
+            <a:schemeClr val="lt1"/>
+          </a:fontRef>
+        </p:style>
+        <p:txBody>
+          <a:bodyPr rtlCol="0" anchor="ctr"/>
+          <a:lstStyle/>
+          <a:p>
+            <a:pPr algn="ctr"/>
+            <a:endParaRPr lang="en-GB" noProof="0" dirty="0"/>
+          </a:p>
+        </p:txBody>
+      </p:sp>
+      <p:sp>
+        <p:nvSpPr>
+          <p:cNvPr id="163" name="TextBox 162">
+            <a:extLst>
+              <a:ext uri="{FF2B5EF4-FFF2-40B4-BE49-F238E27FC236}">
+                <a16:creationId xmlns:a16="http://schemas.microsoft.com/office/drawing/2014/main" id="{5062C2DE-E635-12D3-2B1A-52C3839E99E0}"/>
+              </a:ext>
+            </a:extLst>
+          </p:cNvPr>
+          <p:cNvSpPr txBox="1"/>
+          <p:nvPr/>
+        </p:nvSpPr>
+        <p:spPr>
+          <a:xfrm>
+            <a:off x="2418952" y="3098490"/>
+            <a:ext cx="3076622" cy="549766"/>
+          </a:xfrm>
+          <a:prstGeom prst="rect">
+            <a:avLst/>
+          </a:prstGeom>
+          <a:noFill/>
+        </p:spPr>
+        <p:txBody>
+          <a:bodyPr wrap="square" lIns="0" tIns="0" rIns="0" bIns="0" rtlCol="0">
+            <a:spAutoFit/>
+          </a:bodyPr>
+          <a:lstStyle/>
+          <a:p>
+            <a:pPr>
+              <a:buSzPct val="100000"/>
+            </a:pPr>
+            <a:r>
+              <a:rPr lang="en-GB" sz="1400" b="1" noProof="0" dirty="0">
+                <a:solidFill>
+                  <a:schemeClr val="tx1">
+                    <a:lumMod val="85000"/>
+                    <a:lumOff val="15000"/>
+                  </a:schemeClr>
+                </a:solidFill>
+                <a:latin typeface="DM Sans" pitchFamily="2" charset="0"/>
+              </a:rPr>
+              <a:t>PEOPLE</a:t>
+            </a:r>
+            <a:endParaRPr lang="en-GB" sz="1200" b="1" noProof="0" dirty="0">
               <a:solidFill>
-                <a:schemeClr val="bg1"/>
+                <a:schemeClr val="tx1">
+                  <a:lumMod val="85000"/>
+                  <a:lumOff val="15000"/>
+                </a:schemeClr>
               </a:solidFill>
-              <a:ln>
-                <a:noFill/>
-              </a:ln>
-            </p:spPr>
-            <p:style>
-              <a:lnRef idx="2">
-                <a:schemeClr val="accent1">
-                  <a:shade val="15000"/>
+              <a:latin typeface="DM Sans" pitchFamily="2" charset="0"/>
+            </a:endParaRPr>
+          </a:p>
+          <a:p>
+            <a:pPr>
+              <a:lnSpc>
+                <a:spcPts val="1300"/>
+              </a:lnSpc>
+              <a:buSzPct val="100000"/>
+            </a:pPr>
+            <a:r>
+              <a:rPr lang="en-GB" sz="1200" noProof="0" dirty="0">
+                <a:solidFill>
+                  <a:schemeClr val="tx1">
+                    <a:lumMod val="85000"/>
+                    <a:lumOff val="15000"/>
+                  </a:schemeClr>
+                </a:solidFill>
+                <a:latin typeface="+mj-lt"/>
+              </a:rPr>
+              <a:t>Roles, target skills &amp; gaps, org sizing, talent journey, training, team incentives</a:t>
+            </a:r>
+          </a:p>
+        </p:txBody>
+      </p:sp>
+      <p:sp>
+        <p:nvSpPr>
+          <p:cNvPr id="166" name="TextBox 165">
+            <a:extLst>
+              <a:ext uri="{FF2B5EF4-FFF2-40B4-BE49-F238E27FC236}">
+                <a16:creationId xmlns:a16="http://schemas.microsoft.com/office/drawing/2014/main" id="{3C502B40-5DAD-8077-0D3C-B23D768C371B}"/>
+              </a:ext>
+            </a:extLst>
+          </p:cNvPr>
+          <p:cNvSpPr txBox="1"/>
+          <p:nvPr/>
+        </p:nvSpPr>
+        <p:spPr>
+          <a:xfrm>
+            <a:off x="6293260" y="3098490"/>
+            <a:ext cx="2548336" cy="549766"/>
+          </a:xfrm>
+          <a:prstGeom prst="rect">
+            <a:avLst/>
+          </a:prstGeom>
+          <a:noFill/>
+        </p:spPr>
+        <p:txBody>
+          <a:bodyPr wrap="square" lIns="0" tIns="0" rIns="0" bIns="0" rtlCol="0">
+            <a:spAutoFit/>
+          </a:bodyPr>
+          <a:lstStyle/>
+          <a:p>
+            <a:pPr>
+              <a:buSzPct val="100000"/>
+            </a:pPr>
+            <a:r>
+              <a:rPr lang="en-GB" sz="1400" b="1" noProof="0" dirty="0">
+                <a:solidFill>
+                  <a:schemeClr val="tx1">
+                    <a:lumMod val="85000"/>
+                    <a:lumOff val="15000"/>
+                  </a:schemeClr>
+                </a:solidFill>
+                <a:latin typeface="DM Sans" pitchFamily="2" charset="0"/>
+              </a:rPr>
+              <a:t>PROCESS</a:t>
+            </a:r>
+            <a:endParaRPr lang="en-GB" sz="1200" b="1" noProof="0" dirty="0">
+              <a:solidFill>
+                <a:schemeClr val="tx1">
+                  <a:lumMod val="85000"/>
+                  <a:lumOff val="15000"/>
                 </a:schemeClr>
-              </a:lnRef>
-              <a:fillRef idx="1">
-                <a:schemeClr val="accent1"/>
-              </a:fillRef>
-              <a:effectRef idx="0">
-                <a:schemeClr val="accent1"/>
-              </a:effectRef>
-              <a:fontRef idx="minor">
-                <a:schemeClr val="lt1"/>
-              </a:fontRef>
-            </p:style>
-            <p:txBody>
-              <a:bodyPr rtlCol="0" anchor="ctr"/>
-              <a:lstStyle/>
-              <a:p>
-                <a:pPr algn="ctr"/>
-                <a:r>
-                  <a:rPr lang="nl-NL" sz="1100" dirty="0">
-                    <a:solidFill>
-                      <a:schemeClr val="tx1"/>
-                    </a:solidFill>
-                    <a:latin typeface="DM Sans" pitchFamily="2" charset="0"/>
-                  </a:rPr>
-                  <a:t>BU 1</a:t>
-                </a:r>
-                <a:endParaRPr lang="LID4096" sz="1100" dirty="0">
-                  <a:solidFill>
-                    <a:schemeClr val="tx1"/>
-                  </a:solidFill>
-                  <a:latin typeface="DM Sans" pitchFamily="2" charset="0"/>
-                </a:endParaRPr>
-              </a:p>
-            </p:txBody>
-          </p:sp>
-          <p:sp>
-            <p:nvSpPr>
-              <p:cNvPr id="44" name="Rectangle 43">
-                <a:extLst>
-                  <a:ext uri="{FF2B5EF4-FFF2-40B4-BE49-F238E27FC236}">
-                    <a16:creationId xmlns:a16="http://schemas.microsoft.com/office/drawing/2014/main" id="{E95E7BBB-0795-3FA3-F052-AA3D1DD6498B}"/>
-                  </a:ext>
-                </a:extLst>
-              </p:cNvPr>
-              <p:cNvSpPr/>
-              <p:nvPr/>
-            </p:nvSpPr>
-            <p:spPr>
-              <a:xfrm>
-                <a:off x="6720157" y="1959390"/>
-                <a:ext cx="557171" cy="697758"/>
-              </a:xfrm>
-              <a:prstGeom prst="rect">
-                <a:avLst/>
-              </a:prstGeom>
-              <a:solidFill>
-                <a:schemeClr val="bg1"/>
               </a:solidFill>
-              <a:ln>
-                <a:noFill/>
-              </a:ln>
-            </p:spPr>
-            <p:style>
-              <a:lnRef idx="2">
-                <a:schemeClr val="accent1">
-                  <a:shade val="15000"/>
-                </a:schemeClr>
-              </a:lnRef>
-              <a:fillRef idx="1">
-                <a:schemeClr val="accent1"/>
-              </a:fillRef>
-              <a:effectRef idx="0">
-                <a:schemeClr val="accent1"/>
-              </a:effectRef>
-              <a:fontRef idx="minor">
-                <a:schemeClr val="lt1"/>
-              </a:fontRef>
-            </p:style>
-            <p:txBody>
-              <a:bodyPr rtlCol="0" anchor="ctr"/>
-              <a:lstStyle/>
-              <a:p>
-                <a:pPr algn="ctr"/>
-                <a:r>
-                  <a:rPr lang="nl-NL" sz="1100" dirty="0">
-                    <a:solidFill>
-                      <a:schemeClr val="tx1"/>
-                    </a:solidFill>
-                    <a:latin typeface="DM Sans" pitchFamily="2" charset="0"/>
-                  </a:rPr>
-                  <a:t>BU 2</a:t>
-                </a:r>
-                <a:endParaRPr lang="LID4096" sz="1100" dirty="0">
-                  <a:solidFill>
-                    <a:schemeClr val="tx1"/>
-                  </a:solidFill>
-                  <a:latin typeface="DM Sans" pitchFamily="2" charset="0"/>
-                </a:endParaRPr>
-              </a:p>
-            </p:txBody>
-          </p:sp>
-          <p:sp>
-            <p:nvSpPr>
-              <p:cNvPr id="30" name="Rectangle 42">
-                <a:extLst>
-                  <a:ext uri="{FF2B5EF4-FFF2-40B4-BE49-F238E27FC236}">
-                    <a16:creationId xmlns:a16="http://schemas.microsoft.com/office/drawing/2014/main" id="{66F9516B-8552-CDAF-75C4-8A281C36B6F8}"/>
-                  </a:ext>
-                </a:extLst>
-              </p:cNvPr>
-              <p:cNvSpPr/>
-              <p:nvPr/>
-            </p:nvSpPr>
-            <p:spPr>
-              <a:xfrm>
-                <a:off x="7351101" y="1959390"/>
-                <a:ext cx="557171" cy="697758"/>
-              </a:xfrm>
-              <a:prstGeom prst="rect">
-                <a:avLst/>
-              </a:prstGeom>
-              <a:solidFill>
-                <a:schemeClr val="bg1"/>
-              </a:solidFill>
-              <a:ln>
-                <a:noFill/>
-              </a:ln>
-            </p:spPr>
-            <p:style>
-              <a:lnRef idx="2">
-                <a:schemeClr val="accent1">
-                  <a:shade val="15000"/>
-                </a:schemeClr>
-              </a:lnRef>
-              <a:fillRef idx="1">
-                <a:schemeClr val="accent1"/>
-              </a:fillRef>
-              <a:effectRef idx="0">
-                <a:schemeClr val="accent1"/>
-              </a:effectRef>
-              <a:fontRef idx="minor">
-                <a:schemeClr val="lt1"/>
-              </a:fontRef>
-            </p:style>
-            <p:txBody>
-              <a:bodyPr rtlCol="0" anchor="ctr"/>
-              <a:lstStyle/>
-              <a:p>
-                <a:pPr algn="ctr"/>
-                <a:r>
-                  <a:rPr lang="nl-NL" sz="1100" dirty="0">
-                    <a:solidFill>
-                      <a:schemeClr val="tx1"/>
-                    </a:solidFill>
-                    <a:latin typeface="DM Sans" pitchFamily="2" charset="0"/>
-                  </a:rPr>
-                  <a:t>BU 3</a:t>
-                </a:r>
-                <a:endParaRPr lang="LID4096" sz="1100" dirty="0">
-                  <a:solidFill>
-                    <a:schemeClr val="tx1"/>
-                  </a:solidFill>
-                  <a:latin typeface="DM Sans" pitchFamily="2" charset="0"/>
-                </a:endParaRPr>
-              </a:p>
-            </p:txBody>
-          </p:sp>
-          <p:sp>
-            <p:nvSpPr>
-              <p:cNvPr id="32" name="Rectangle 43">
-                <a:extLst>
-                  <a:ext uri="{FF2B5EF4-FFF2-40B4-BE49-F238E27FC236}">
-                    <a16:creationId xmlns:a16="http://schemas.microsoft.com/office/drawing/2014/main" id="{005EA54E-A05B-E9A5-FE26-09518F608969}"/>
-                  </a:ext>
-                </a:extLst>
-              </p:cNvPr>
-              <p:cNvSpPr/>
-              <p:nvPr/>
-            </p:nvSpPr>
-            <p:spPr>
-              <a:xfrm>
-                <a:off x="7982046" y="1959390"/>
-                <a:ext cx="557171" cy="697758"/>
-              </a:xfrm>
-              <a:prstGeom prst="rect">
-                <a:avLst/>
-              </a:prstGeom>
-              <a:solidFill>
-                <a:schemeClr val="bg1"/>
-              </a:solidFill>
-              <a:ln>
-                <a:noFill/>
-              </a:ln>
-            </p:spPr>
-            <p:style>
-              <a:lnRef idx="2">
-                <a:schemeClr val="accent1">
-                  <a:shade val="15000"/>
-                </a:schemeClr>
-              </a:lnRef>
-              <a:fillRef idx="1">
-                <a:schemeClr val="accent1"/>
-              </a:fillRef>
-              <a:effectRef idx="0">
-                <a:schemeClr val="accent1"/>
-              </a:effectRef>
-              <a:fontRef idx="minor">
-                <a:schemeClr val="lt1"/>
-              </a:fontRef>
-            </p:style>
-            <p:txBody>
-              <a:bodyPr rtlCol="0" anchor="ctr"/>
-              <a:lstStyle/>
-              <a:p>
-                <a:pPr algn="ctr"/>
-                <a:r>
-                  <a:rPr lang="nl-NL" sz="1100" dirty="0">
-                    <a:solidFill>
-                      <a:schemeClr val="tx1"/>
-                    </a:solidFill>
-                    <a:latin typeface="DM Sans" pitchFamily="2" charset="0"/>
-                  </a:rPr>
-                  <a:t>BU 4</a:t>
-                </a:r>
-                <a:endParaRPr lang="LID4096" sz="1100" dirty="0">
-                  <a:solidFill>
-                    <a:schemeClr val="tx1"/>
-                  </a:solidFill>
-                  <a:latin typeface="DM Sans" pitchFamily="2" charset="0"/>
-                </a:endParaRPr>
-              </a:p>
-            </p:txBody>
-          </p:sp>
-        </p:grpSp>
-      </p:grpSp>
+              <a:latin typeface="DM Sans" pitchFamily="2" charset="0"/>
+            </a:endParaRPr>
+          </a:p>
+          <a:p>
+            <a:pPr>
+              <a:lnSpc>
+                <a:spcPts val="1300"/>
+              </a:lnSpc>
+              <a:buSzPct val="100000"/>
+            </a:pPr>
+            <a:r>
+              <a:rPr lang="en-GB" sz="1200" noProof="0" dirty="0">
+                <a:solidFill>
+                  <a:schemeClr val="tx1">
+                    <a:lumMod val="85000"/>
+                    <a:lumOff val="15000"/>
+                  </a:schemeClr>
+                </a:solidFill>
+                <a:latin typeface="+mj-lt"/>
+              </a:rPr>
+              <a:t>Org. design, cross-functional teams, product way-of-working</a:t>
+            </a:r>
+          </a:p>
+        </p:txBody>
+      </p:sp>
+      <p:sp>
+        <p:nvSpPr>
+          <p:cNvPr id="140" name="Rectangle 139">
+            <a:extLst>
+              <a:ext uri="{FF2B5EF4-FFF2-40B4-BE49-F238E27FC236}">
+                <a16:creationId xmlns:a16="http://schemas.microsoft.com/office/drawing/2014/main" id="{803139DD-F140-2E13-C535-DBA32BD2249E}"/>
+              </a:ext>
+            </a:extLst>
+          </p:cNvPr>
+          <p:cNvSpPr/>
+          <p:nvPr/>
+        </p:nvSpPr>
+        <p:spPr>
+          <a:xfrm>
+            <a:off x="2271958" y="1981106"/>
+            <a:ext cx="7651834" cy="908874"/>
+          </a:xfrm>
+          <a:prstGeom prst="roundRect">
+            <a:avLst/>
+          </a:prstGeom>
+          <a:noFill/>
+          <a:ln>
+            <a:solidFill>
+              <a:schemeClr val="tx1">
+                <a:lumMod val="85000"/>
+                <a:lumOff val="15000"/>
+              </a:schemeClr>
+            </a:solidFill>
+          </a:ln>
+        </p:spPr>
+        <p:style>
+          <a:lnRef idx="2">
+            <a:schemeClr val="accent1">
+              <a:shade val="15000"/>
+            </a:schemeClr>
+          </a:lnRef>
+          <a:fillRef idx="1">
+            <a:schemeClr val="accent1"/>
+          </a:fillRef>
+          <a:effectRef idx="0">
+            <a:schemeClr val="accent1"/>
+          </a:effectRef>
+          <a:fontRef idx="minor">
+            <a:schemeClr val="lt1"/>
+          </a:fontRef>
+        </p:style>
+        <p:txBody>
+          <a:bodyPr rtlCol="0" anchor="ctr"/>
+          <a:lstStyle/>
+          <a:p>
+            <a:pPr algn="ctr"/>
+            <a:endParaRPr lang="en-GB" noProof="0" dirty="0"/>
+          </a:p>
+        </p:txBody>
+      </p:sp>
+      <p:sp>
+        <p:nvSpPr>
+          <p:cNvPr id="141" name="TextBox 140">
+            <a:extLst>
+              <a:ext uri="{FF2B5EF4-FFF2-40B4-BE49-F238E27FC236}">
+                <a16:creationId xmlns:a16="http://schemas.microsoft.com/office/drawing/2014/main" id="{AE8C815B-7E18-CE74-1D37-2454B20069A0}"/>
+              </a:ext>
+            </a:extLst>
+          </p:cNvPr>
+          <p:cNvSpPr txBox="1"/>
+          <p:nvPr/>
+        </p:nvSpPr>
+        <p:spPr>
+          <a:xfrm>
+            <a:off x="2418950" y="2047612"/>
+            <a:ext cx="3874310" cy="549766"/>
+          </a:xfrm>
+          <a:prstGeom prst="rect">
+            <a:avLst/>
+          </a:prstGeom>
+          <a:noFill/>
+        </p:spPr>
+        <p:txBody>
+          <a:bodyPr wrap="square" lIns="0" tIns="0" rIns="0" bIns="0" rtlCol="0">
+            <a:spAutoFit/>
+          </a:bodyPr>
+          <a:lstStyle/>
+          <a:p>
+            <a:pPr>
+              <a:buSzPct val="100000"/>
+            </a:pPr>
+            <a:r>
+              <a:rPr lang="en-GB" sz="1400" b="1" noProof="0" dirty="0">
+                <a:solidFill>
+                  <a:schemeClr val="tx1">
+                    <a:lumMod val="85000"/>
+                    <a:lumOff val="15000"/>
+                  </a:schemeClr>
+                </a:solidFill>
+                <a:latin typeface="DM Sans" pitchFamily="2" charset="0"/>
+              </a:rPr>
+              <a:t>PRODUCTS</a:t>
+            </a:r>
+            <a:r>
+              <a:rPr lang="en-GB" sz="1400" noProof="0" dirty="0">
+                <a:solidFill>
+                  <a:schemeClr val="tx1">
+                    <a:lumMod val="85000"/>
+                    <a:lumOff val="15000"/>
+                  </a:schemeClr>
+                </a:solidFill>
+                <a:latin typeface="DM Sans" pitchFamily="2" charset="0"/>
+              </a:rPr>
+              <a:t> -  by platform or business unit</a:t>
+            </a:r>
+          </a:p>
+          <a:p>
+            <a:pPr>
+              <a:lnSpc>
+                <a:spcPts val="1300"/>
+              </a:lnSpc>
+              <a:buSzPct val="100000"/>
+            </a:pPr>
+            <a:r>
+              <a:rPr lang="en-GB" sz="1200" noProof="0" dirty="0">
+                <a:solidFill>
+                  <a:schemeClr val="tx1">
+                    <a:lumMod val="85000"/>
+                    <a:lumOff val="15000"/>
+                  </a:schemeClr>
+                </a:solidFill>
+                <a:latin typeface="+mj-lt"/>
+              </a:rPr>
+              <a:t>Product vision &amp; objectives, products, persona’s, customer journeys, frictions</a:t>
+            </a:r>
+          </a:p>
+        </p:txBody>
+      </p:sp>
+      <p:sp>
+        <p:nvSpPr>
+          <p:cNvPr id="43" name="Rectangle 42">
+            <a:extLst>
+              <a:ext uri="{FF2B5EF4-FFF2-40B4-BE49-F238E27FC236}">
+                <a16:creationId xmlns:a16="http://schemas.microsoft.com/office/drawing/2014/main" id="{77F83771-69DC-DE58-F493-65CEDB545E5C}"/>
+              </a:ext>
+            </a:extLst>
+          </p:cNvPr>
+          <p:cNvSpPr/>
+          <p:nvPr/>
+        </p:nvSpPr>
+        <p:spPr>
+          <a:xfrm>
+            <a:off x="6857075" y="2084448"/>
+            <a:ext cx="606304" cy="697758"/>
+          </a:xfrm>
+          <a:prstGeom prst="rect">
+            <a:avLst/>
+          </a:prstGeom>
+          <a:solidFill>
+            <a:schemeClr val="tx1">
+              <a:lumMod val="65000"/>
+              <a:lumOff val="35000"/>
+              <a:alpha val="20000"/>
+            </a:schemeClr>
+          </a:solidFill>
+          <a:ln>
+            <a:noFill/>
+          </a:ln>
+        </p:spPr>
+        <p:style>
+          <a:lnRef idx="2">
+            <a:schemeClr val="accent1">
+              <a:shade val="15000"/>
+            </a:schemeClr>
+          </a:lnRef>
+          <a:fillRef idx="1">
+            <a:schemeClr val="accent1"/>
+          </a:fillRef>
+          <a:effectRef idx="0">
+            <a:schemeClr val="accent1"/>
+          </a:effectRef>
+          <a:fontRef idx="minor">
+            <a:schemeClr val="lt1"/>
+          </a:fontRef>
+        </p:style>
+        <p:txBody>
+          <a:bodyPr rtlCol="0" anchor="ctr"/>
+          <a:lstStyle/>
+          <a:p>
+            <a:pPr algn="ctr"/>
+            <a:r>
+              <a:rPr lang="en-GB" sz="1100" noProof="0" dirty="0">
+                <a:solidFill>
+                  <a:schemeClr val="tx1">
+                    <a:lumMod val="85000"/>
+                    <a:lumOff val="15000"/>
+                  </a:schemeClr>
+                </a:solidFill>
+                <a:latin typeface="DM Sans" pitchFamily="2" charset="0"/>
+              </a:rPr>
+              <a:t>BU 1</a:t>
+            </a:r>
+          </a:p>
+        </p:txBody>
+      </p:sp>
+      <p:sp>
+        <p:nvSpPr>
+          <p:cNvPr id="44" name="Rectangle 43">
+            <a:extLst>
+              <a:ext uri="{FF2B5EF4-FFF2-40B4-BE49-F238E27FC236}">
+                <a16:creationId xmlns:a16="http://schemas.microsoft.com/office/drawing/2014/main" id="{E95E7BBB-0795-3FA3-F052-AA3D1DD6498B}"/>
+              </a:ext>
+            </a:extLst>
+          </p:cNvPr>
+          <p:cNvSpPr/>
+          <p:nvPr/>
+        </p:nvSpPr>
+        <p:spPr>
+          <a:xfrm>
+            <a:off x="7543657" y="2084448"/>
+            <a:ext cx="606304" cy="697758"/>
+          </a:xfrm>
+          <a:prstGeom prst="rect">
+            <a:avLst/>
+          </a:prstGeom>
+          <a:solidFill>
+            <a:schemeClr val="tx1">
+              <a:lumMod val="65000"/>
+              <a:lumOff val="35000"/>
+              <a:alpha val="20000"/>
+            </a:schemeClr>
+          </a:solidFill>
+          <a:ln>
+            <a:noFill/>
+          </a:ln>
+        </p:spPr>
+        <p:style>
+          <a:lnRef idx="2">
+            <a:schemeClr val="accent1">
+              <a:shade val="15000"/>
+            </a:schemeClr>
+          </a:lnRef>
+          <a:fillRef idx="1">
+            <a:schemeClr val="accent1"/>
+          </a:fillRef>
+          <a:effectRef idx="0">
+            <a:schemeClr val="accent1"/>
+          </a:effectRef>
+          <a:fontRef idx="minor">
+            <a:schemeClr val="lt1"/>
+          </a:fontRef>
+        </p:style>
+        <p:txBody>
+          <a:bodyPr rtlCol="0" anchor="ctr"/>
+          <a:lstStyle/>
+          <a:p>
+            <a:pPr algn="ctr"/>
+            <a:r>
+              <a:rPr lang="en-GB" sz="1100" noProof="0" dirty="0">
+                <a:solidFill>
+                  <a:schemeClr val="tx1">
+                    <a:lumMod val="85000"/>
+                    <a:lumOff val="15000"/>
+                  </a:schemeClr>
+                </a:solidFill>
+                <a:latin typeface="DM Sans" pitchFamily="2" charset="0"/>
+              </a:rPr>
+              <a:t>BU 2</a:t>
+            </a:r>
+          </a:p>
+        </p:txBody>
+      </p:sp>
+      <p:sp>
+        <p:nvSpPr>
+          <p:cNvPr id="30" name="Rectangle 42">
+            <a:extLst>
+              <a:ext uri="{FF2B5EF4-FFF2-40B4-BE49-F238E27FC236}">
+                <a16:creationId xmlns:a16="http://schemas.microsoft.com/office/drawing/2014/main" id="{66F9516B-8552-CDAF-75C4-8A281C36B6F8}"/>
+              </a:ext>
+            </a:extLst>
+          </p:cNvPr>
+          <p:cNvSpPr/>
+          <p:nvPr/>
+        </p:nvSpPr>
+        <p:spPr>
+          <a:xfrm>
+            <a:off x="8230239" y="2084448"/>
+            <a:ext cx="606304" cy="697758"/>
+          </a:xfrm>
+          <a:prstGeom prst="rect">
+            <a:avLst/>
+          </a:prstGeom>
+          <a:solidFill>
+            <a:schemeClr val="tx1">
+              <a:lumMod val="65000"/>
+              <a:lumOff val="35000"/>
+              <a:alpha val="20000"/>
+            </a:schemeClr>
+          </a:solidFill>
+          <a:ln>
+            <a:noFill/>
+          </a:ln>
+        </p:spPr>
+        <p:style>
+          <a:lnRef idx="2">
+            <a:schemeClr val="accent1">
+              <a:shade val="15000"/>
+            </a:schemeClr>
+          </a:lnRef>
+          <a:fillRef idx="1">
+            <a:schemeClr val="accent1"/>
+          </a:fillRef>
+          <a:effectRef idx="0">
+            <a:schemeClr val="accent1"/>
+          </a:effectRef>
+          <a:fontRef idx="minor">
+            <a:schemeClr val="lt1"/>
+          </a:fontRef>
+        </p:style>
+        <p:txBody>
+          <a:bodyPr rtlCol="0" anchor="ctr"/>
+          <a:lstStyle/>
+          <a:p>
+            <a:pPr algn="ctr"/>
+            <a:r>
+              <a:rPr lang="en-GB" sz="1100" noProof="0" dirty="0">
+                <a:solidFill>
+                  <a:schemeClr val="tx1">
+                    <a:lumMod val="85000"/>
+                    <a:lumOff val="15000"/>
+                  </a:schemeClr>
+                </a:solidFill>
+                <a:latin typeface="DM Sans" pitchFamily="2" charset="0"/>
+              </a:rPr>
+              <a:t>BU 3</a:t>
+            </a:r>
+          </a:p>
+        </p:txBody>
+      </p:sp>
+      <p:sp>
+        <p:nvSpPr>
+          <p:cNvPr id="32" name="Rectangle 43">
+            <a:extLst>
+              <a:ext uri="{FF2B5EF4-FFF2-40B4-BE49-F238E27FC236}">
+                <a16:creationId xmlns:a16="http://schemas.microsoft.com/office/drawing/2014/main" id="{005EA54E-A05B-E9A5-FE26-09518F608969}"/>
+              </a:ext>
+            </a:extLst>
+          </p:cNvPr>
+          <p:cNvSpPr/>
+          <p:nvPr/>
+        </p:nvSpPr>
+        <p:spPr>
+          <a:xfrm>
+            <a:off x="8916822" y="2084448"/>
+            <a:ext cx="606304" cy="697758"/>
+          </a:xfrm>
+          <a:prstGeom prst="rect">
+            <a:avLst/>
+          </a:prstGeom>
+          <a:solidFill>
+            <a:schemeClr val="tx1">
+              <a:lumMod val="65000"/>
+              <a:lumOff val="35000"/>
+              <a:alpha val="20000"/>
+            </a:schemeClr>
+          </a:solidFill>
+          <a:ln>
+            <a:noFill/>
+          </a:ln>
+        </p:spPr>
+        <p:style>
+          <a:lnRef idx="2">
+            <a:schemeClr val="accent1">
+              <a:shade val="15000"/>
+            </a:schemeClr>
+          </a:lnRef>
+          <a:fillRef idx="1">
+            <a:schemeClr val="accent1"/>
+          </a:fillRef>
+          <a:effectRef idx="0">
+            <a:schemeClr val="accent1"/>
+          </a:effectRef>
+          <a:fontRef idx="minor">
+            <a:schemeClr val="lt1"/>
+          </a:fontRef>
+        </p:style>
+        <p:txBody>
+          <a:bodyPr rtlCol="0" anchor="ctr"/>
+          <a:lstStyle/>
+          <a:p>
+            <a:pPr algn="ctr"/>
+            <a:r>
+              <a:rPr lang="en-GB" sz="1100" noProof="0" dirty="0">
+                <a:solidFill>
+                  <a:schemeClr val="tx1">
+                    <a:lumMod val="85000"/>
+                    <a:lumOff val="15000"/>
+                  </a:schemeClr>
+                </a:solidFill>
+                <a:latin typeface="DM Sans" pitchFamily="2" charset="0"/>
+              </a:rPr>
+              <a:t>BU 4</a:t>
+            </a:r>
+          </a:p>
+        </p:txBody>
+      </p:sp>
+      <p:pic>
+        <p:nvPicPr>
+          <p:cNvPr id="33" name="Afbeelding 32" descr="Afbeelding met tekst, schermopname, Lettertype, lijn&#10;&#10;Door AI gegenereerde inhoud is mogelijk onjuist.">
+            <a:extLst>
+              <a:ext uri="{FF2B5EF4-FFF2-40B4-BE49-F238E27FC236}">
+                <a16:creationId xmlns:a16="http://schemas.microsoft.com/office/drawing/2014/main" id="{B7DA85B3-5265-8774-DDA8-A18DF6EB8E85}"/>
+              </a:ext>
+            </a:extLst>
+          </p:cNvPr>
+          <p:cNvPicPr>
+            <a:picLocks noChangeAspect="1"/>
+          </p:cNvPicPr>
+          <p:nvPr/>
+        </p:nvPicPr>
+        <p:blipFill>
+          <a:blip r:embed="rId3"/>
+          <a:stretch>
+            <a:fillRect/>
+          </a:stretch>
+        </p:blipFill>
+        <p:spPr>
+          <a:xfrm>
+            <a:off x="12192000" y="551145"/>
+            <a:ext cx="8051107" cy="4602677"/>
+          </a:xfrm>
+          <a:prstGeom prst="rect">
+            <a:avLst/>
+          </a:prstGeom>
+        </p:spPr>
+      </p:pic>
     </p:spTree>
     <p:extLst>
       <p:ext uri="{BB962C8B-B14F-4D97-AF65-F5344CB8AC3E}">
@@ -5856,7 +6658,1318 @@
 </p:sld>
 </file>
 
-<file path=ppt/slides/slide2.xml><?xml version="1.0" encoding="utf-8"?>
+<file path=ppt/slides/slide3.xml><?xml version="1.0" encoding="utf-8"?>
+<p:sld xmlns:a="http://schemas.openxmlformats.org/drawingml/2006/main" xmlns:r="http://schemas.openxmlformats.org/officeDocument/2006/relationships" xmlns:p="http://schemas.openxmlformats.org/presentationml/2006/main">
+  <p:cSld>
+    <p:spTree>
+      <p:nvGrpSpPr>
+        <p:cNvPr id="1" name="">
+          <a:extLst>
+            <a:ext uri="{FF2B5EF4-FFF2-40B4-BE49-F238E27FC236}">
+              <a16:creationId xmlns:a16="http://schemas.microsoft.com/office/drawing/2014/main" id="{80C594DE-F555-AE44-E672-38D3D916365B}"/>
+            </a:ext>
+          </a:extLst>
+        </p:cNvPr>
+        <p:cNvGrpSpPr/>
+        <p:nvPr/>
+      </p:nvGrpSpPr>
+      <p:grpSpPr>
+        <a:xfrm>
+          <a:off x="0" y="0"/>
+          <a:ext cx="0" cy="0"/>
+          <a:chOff x="0" y="0"/>
+          <a:chExt cx="0" cy="0"/>
+        </a:xfrm>
+      </p:grpSpPr>
+      <p:sp>
+        <p:nvSpPr>
+          <p:cNvPr id="4" name="Rechthoek 3">
+            <a:extLst>
+              <a:ext uri="{FF2B5EF4-FFF2-40B4-BE49-F238E27FC236}">
+                <a16:creationId xmlns:a16="http://schemas.microsoft.com/office/drawing/2014/main" id="{23AC4A82-0A20-9F5E-64D7-347D2ECEB82B}"/>
+              </a:ext>
+            </a:extLst>
+          </p:cNvPr>
+          <p:cNvSpPr/>
+          <p:nvPr/>
+        </p:nvSpPr>
+        <p:spPr>
+          <a:xfrm>
+            <a:off x="1874783" y="409251"/>
+            <a:ext cx="8442435" cy="3169521"/>
+          </a:xfrm>
+          <a:prstGeom prst="rect">
+            <a:avLst/>
+          </a:prstGeom>
+          <a:solidFill>
+            <a:schemeClr val="bg1"/>
+          </a:solidFill>
+          <a:ln>
+            <a:noFill/>
+          </a:ln>
+        </p:spPr>
+        <p:style>
+          <a:lnRef idx="2">
+            <a:schemeClr val="accent1">
+              <a:shade val="15000"/>
+            </a:schemeClr>
+          </a:lnRef>
+          <a:fillRef idx="1">
+            <a:schemeClr val="accent1"/>
+          </a:fillRef>
+          <a:effectRef idx="0">
+            <a:schemeClr val="accent1"/>
+          </a:effectRef>
+          <a:fontRef idx="minor">
+            <a:schemeClr val="lt1"/>
+          </a:fontRef>
+        </p:style>
+        <p:txBody>
+          <a:bodyPr rtlCol="0" anchor="ctr"/>
+          <a:lstStyle/>
+          <a:p>
+            <a:pPr algn="ctr"/>
+            <a:endParaRPr lang="en-GB"/>
+          </a:p>
+        </p:txBody>
+      </p:sp>
+      <p:sp>
+        <p:nvSpPr>
+          <p:cNvPr id="3" name="Title 2">
+            <a:extLst>
+              <a:ext uri="{FF2B5EF4-FFF2-40B4-BE49-F238E27FC236}">
+                <a16:creationId xmlns:a16="http://schemas.microsoft.com/office/drawing/2014/main" id="{44DCB25C-7592-7FA6-48D0-49592EE1954D}"/>
+              </a:ext>
+            </a:extLst>
+          </p:cNvPr>
+          <p:cNvSpPr>
+            <a:spLocks noGrp="1"/>
+          </p:cNvSpPr>
+          <p:nvPr>
+            <p:ph type="title"/>
+          </p:nvPr>
+        </p:nvSpPr>
+        <p:spPr>
+          <a:xfrm>
+            <a:off x="2709041" y="629113"/>
+            <a:ext cx="6773918" cy="360100"/>
+          </a:xfrm>
+        </p:spPr>
+        <p:txBody>
+          <a:bodyPr>
+            <a:normAutofit/>
+          </a:bodyPr>
+          <a:lstStyle/>
+          <a:p>
+            <a:pPr algn="ctr"/>
+            <a:r>
+              <a:rPr lang="en-GB" noProof="0" dirty="0">
+                <a:solidFill>
+                  <a:schemeClr val="tx1">
+                    <a:lumMod val="85000"/>
+                    <a:lumOff val="15000"/>
+                  </a:schemeClr>
+                </a:solidFill>
+              </a:rPr>
+              <a:t>Decision lens for AI investments</a:t>
+            </a:r>
+          </a:p>
+        </p:txBody>
+      </p:sp>
+      <p:sp>
+        <p:nvSpPr>
+          <p:cNvPr id="9" name="Rechthoek: afgeronde hoeken 8">
+            <a:extLst>
+              <a:ext uri="{FF2B5EF4-FFF2-40B4-BE49-F238E27FC236}">
+                <a16:creationId xmlns:a16="http://schemas.microsoft.com/office/drawing/2014/main" id="{B4DE75BE-CD72-7D3D-1ADD-83A938D0CF06}"/>
+              </a:ext>
+            </a:extLst>
+          </p:cNvPr>
+          <p:cNvSpPr/>
+          <p:nvPr/>
+        </p:nvSpPr>
+        <p:spPr>
+          <a:xfrm>
+            <a:off x="2115749" y="2111331"/>
+            <a:ext cx="2252361" cy="1068750"/>
+          </a:xfrm>
+          <a:prstGeom prst="roundRect">
+            <a:avLst/>
+          </a:prstGeom>
+          <a:solidFill>
+            <a:srgbClr val="FFFFFF"/>
+          </a:solidFill>
+          <a:ln w="12700">
+            <a:solidFill>
+              <a:schemeClr val="tx1">
+                <a:lumMod val="85000"/>
+                <a:lumOff val="15000"/>
+              </a:schemeClr>
+            </a:solidFill>
+          </a:ln>
+        </p:spPr>
+        <p:txBody>
+          <a:bodyPr wrap="square" tIns="90000" anchor="ctr" anchorCtr="1">
+            <a:noAutofit/>
+          </a:bodyPr>
+          <a:lstStyle/>
+          <a:p>
+            <a:pPr algn="ctr">
+              <a:lnSpc>
+                <a:spcPts val="1300"/>
+              </a:lnSpc>
+              <a:buNone/>
+            </a:pPr>
+            <a:r>
+              <a:rPr lang="en-GB" sz="1200" noProof="0" dirty="0">
+                <a:solidFill>
+                  <a:schemeClr val="tx1">
+                    <a:lumMod val="85000"/>
+                    <a:lumOff val="15000"/>
+                  </a:schemeClr>
+                </a:solidFill>
+                <a:latin typeface="+mj-lt"/>
+              </a:rPr>
+              <a:t>Where does this initiative create measurable business value? </a:t>
+            </a:r>
+            <a:r>
+              <a:rPr lang="en-GB" sz="1200" i="1" noProof="0" dirty="0">
+                <a:solidFill>
+                  <a:schemeClr val="tx1">
+                    <a:lumMod val="85000"/>
+                    <a:lumOff val="15000"/>
+                  </a:schemeClr>
+                </a:solidFill>
+                <a:latin typeface="+mj-lt"/>
+              </a:rPr>
+              <a:t>(Efficiency, revenue, risk reduction, strategic capability)</a:t>
+            </a:r>
+          </a:p>
+        </p:txBody>
+      </p:sp>
+      <p:sp>
+        <p:nvSpPr>
+          <p:cNvPr id="11" name="Rechthoek: afgeronde hoeken 10">
+            <a:extLst>
+              <a:ext uri="{FF2B5EF4-FFF2-40B4-BE49-F238E27FC236}">
+                <a16:creationId xmlns:a16="http://schemas.microsoft.com/office/drawing/2014/main" id="{4920BE2D-5A12-899D-BEE5-5785EE182E48}"/>
+              </a:ext>
+            </a:extLst>
+          </p:cNvPr>
+          <p:cNvSpPr/>
+          <p:nvPr/>
+        </p:nvSpPr>
+        <p:spPr>
+          <a:xfrm>
+            <a:off x="2346667" y="1596283"/>
+            <a:ext cx="1790526" cy="626416"/>
+          </a:xfrm>
+          <a:prstGeom prst="roundRect">
+            <a:avLst/>
+          </a:prstGeom>
+          <a:solidFill>
+            <a:schemeClr val="tx1">
+              <a:lumMod val="85000"/>
+              <a:lumOff val="15000"/>
+            </a:schemeClr>
+          </a:solidFill>
+          <a:ln>
+            <a:noFill/>
+          </a:ln>
+        </p:spPr>
+        <p:txBody>
+          <a:bodyPr anchor="ctr" anchorCtr="1">
+            <a:normAutofit/>
+          </a:bodyPr>
+          <a:lstStyle/>
+          <a:p>
+            <a:pPr algn="ctr">
+              <a:buNone/>
+            </a:pPr>
+            <a:r>
+              <a:rPr lang="en-GB" sz="1400" b="1" noProof="0" dirty="0">
+                <a:solidFill>
+                  <a:srgbClr val="FFFFFF"/>
+                </a:solidFill>
+                <a:latin typeface="DM Sans" pitchFamily="2" charset="0"/>
+              </a:rPr>
+              <a:t>VALUE</a:t>
+            </a:r>
+          </a:p>
+        </p:txBody>
+      </p:sp>
+      <p:sp>
+        <p:nvSpPr>
+          <p:cNvPr id="14" name="Rechthoek: afgeronde hoeken 13">
+            <a:extLst>
+              <a:ext uri="{FF2B5EF4-FFF2-40B4-BE49-F238E27FC236}">
+                <a16:creationId xmlns:a16="http://schemas.microsoft.com/office/drawing/2014/main" id="{A1A90501-E13B-0DB0-9669-99A86F87A9DE}"/>
+              </a:ext>
+            </a:extLst>
+          </p:cNvPr>
+          <p:cNvSpPr/>
+          <p:nvPr/>
+        </p:nvSpPr>
+        <p:spPr>
+          <a:xfrm>
+            <a:off x="7823889" y="2111331"/>
+            <a:ext cx="2252361" cy="1068750"/>
+          </a:xfrm>
+          <a:prstGeom prst="roundRect">
+            <a:avLst/>
+          </a:prstGeom>
+          <a:solidFill>
+            <a:srgbClr val="FFFFFF"/>
+          </a:solidFill>
+          <a:ln w="12700">
+            <a:solidFill>
+              <a:schemeClr val="tx1">
+                <a:lumMod val="85000"/>
+                <a:lumOff val="15000"/>
+              </a:schemeClr>
+            </a:solidFill>
+          </a:ln>
+        </p:spPr>
+        <p:txBody>
+          <a:bodyPr wrap="square" tIns="90000" anchor="ctr" anchorCtr="1">
+            <a:noAutofit/>
+          </a:bodyPr>
+          <a:lstStyle/>
+          <a:p>
+            <a:pPr algn="ctr">
+              <a:lnSpc>
+                <a:spcPts val="1300"/>
+              </a:lnSpc>
+              <a:buNone/>
+            </a:pPr>
+            <a:r>
+              <a:rPr lang="en-GB" sz="1200" noProof="0" dirty="0">
+                <a:solidFill>
+                  <a:schemeClr val="tx1">
+                    <a:lumMod val="85000"/>
+                    <a:lumOff val="15000"/>
+                  </a:schemeClr>
+                </a:solidFill>
+                <a:latin typeface="+mj-lt"/>
+              </a:rPr>
+              <a:t>How can the organisation govern it responsibly? </a:t>
+            </a:r>
+            <a:r>
+              <a:rPr lang="en-GB" sz="1200" i="1" noProof="0" dirty="0">
+                <a:solidFill>
+                  <a:schemeClr val="tx1">
+                    <a:lumMod val="85000"/>
+                    <a:lumOff val="15000"/>
+                  </a:schemeClr>
+                </a:solidFill>
+                <a:latin typeface="+mj-lt"/>
+              </a:rPr>
+              <a:t>(Compliance, user trust, employee trust)</a:t>
+            </a:r>
+          </a:p>
+        </p:txBody>
+      </p:sp>
+      <p:sp>
+        <p:nvSpPr>
+          <p:cNvPr id="16" name="Rechthoek: afgeronde hoeken 15">
+            <a:extLst>
+              <a:ext uri="{FF2B5EF4-FFF2-40B4-BE49-F238E27FC236}">
+                <a16:creationId xmlns:a16="http://schemas.microsoft.com/office/drawing/2014/main" id="{91168AC0-0B49-DB65-E01C-43316040FEF1}"/>
+              </a:ext>
+            </a:extLst>
+          </p:cNvPr>
+          <p:cNvSpPr/>
+          <p:nvPr/>
+        </p:nvSpPr>
+        <p:spPr>
+          <a:xfrm>
+            <a:off x="8054807" y="1596283"/>
+            <a:ext cx="1790526" cy="626416"/>
+          </a:xfrm>
+          <a:prstGeom prst="roundRect">
+            <a:avLst/>
+          </a:prstGeom>
+          <a:solidFill>
+            <a:schemeClr val="tx1">
+              <a:lumMod val="85000"/>
+              <a:lumOff val="15000"/>
+            </a:schemeClr>
+          </a:solidFill>
+          <a:ln>
+            <a:noFill/>
+          </a:ln>
+        </p:spPr>
+        <p:txBody>
+          <a:bodyPr anchor="ctr" anchorCtr="1">
+            <a:normAutofit/>
+          </a:bodyPr>
+          <a:lstStyle/>
+          <a:p>
+            <a:pPr algn="ctr">
+              <a:buNone/>
+            </a:pPr>
+            <a:r>
+              <a:rPr lang="en-GB" sz="1400" b="1" noProof="0" dirty="0">
+                <a:solidFill>
+                  <a:srgbClr val="FFFFFF"/>
+                </a:solidFill>
+                <a:latin typeface="DM Sans" pitchFamily="2" charset="0"/>
+              </a:rPr>
+              <a:t>TRUST</a:t>
+            </a:r>
+          </a:p>
+        </p:txBody>
+      </p:sp>
+      <p:sp>
+        <p:nvSpPr>
+          <p:cNvPr id="18" name="Rechthoek: afgeronde hoeken 17">
+            <a:extLst>
+              <a:ext uri="{FF2B5EF4-FFF2-40B4-BE49-F238E27FC236}">
+                <a16:creationId xmlns:a16="http://schemas.microsoft.com/office/drawing/2014/main" id="{EB153662-B3A8-884C-9C7A-69E6E91AEA4C}"/>
+              </a:ext>
+            </a:extLst>
+          </p:cNvPr>
+          <p:cNvSpPr/>
+          <p:nvPr/>
+        </p:nvSpPr>
+        <p:spPr>
+          <a:xfrm>
+            <a:off x="4969819" y="2111331"/>
+            <a:ext cx="2252361" cy="1068750"/>
+          </a:xfrm>
+          <a:prstGeom prst="roundRect">
+            <a:avLst/>
+          </a:prstGeom>
+          <a:solidFill>
+            <a:srgbClr val="FFFFFF"/>
+          </a:solidFill>
+          <a:ln w="12700">
+            <a:solidFill>
+              <a:schemeClr val="tx1">
+                <a:lumMod val="85000"/>
+                <a:lumOff val="15000"/>
+              </a:schemeClr>
+            </a:solidFill>
+          </a:ln>
+        </p:spPr>
+        <p:txBody>
+          <a:bodyPr wrap="square" tIns="90000" anchor="ctr" anchorCtr="1">
+            <a:noAutofit/>
+          </a:bodyPr>
+          <a:lstStyle/>
+          <a:p>
+            <a:pPr algn="ctr">
+              <a:lnSpc>
+                <a:spcPts val="1300"/>
+              </a:lnSpc>
+              <a:buNone/>
+            </a:pPr>
+            <a:r>
+              <a:rPr lang="en-GB" sz="1200" noProof="0" dirty="0">
+                <a:solidFill>
+                  <a:schemeClr val="tx1">
+                    <a:lumMod val="85000"/>
+                    <a:lumOff val="15000"/>
+                  </a:schemeClr>
+                </a:solidFill>
+                <a:latin typeface="+mj-lt"/>
+              </a:rPr>
+              <a:t>What is required in the organisation to deliver this? </a:t>
+            </a:r>
+            <a:r>
+              <a:rPr lang="en-GB" sz="1200" i="1" noProof="0" dirty="0">
+                <a:solidFill>
+                  <a:schemeClr val="tx1">
+                    <a:lumMod val="85000"/>
+                    <a:lumOff val="15000"/>
+                  </a:schemeClr>
+                </a:solidFill>
+                <a:latin typeface="+mj-lt"/>
+              </a:rPr>
+              <a:t>(People, process, data, enablement) </a:t>
+            </a:r>
+          </a:p>
+        </p:txBody>
+      </p:sp>
+      <p:sp>
+        <p:nvSpPr>
+          <p:cNvPr id="20" name="Rechthoek: afgeronde hoeken 19">
+            <a:extLst>
+              <a:ext uri="{FF2B5EF4-FFF2-40B4-BE49-F238E27FC236}">
+                <a16:creationId xmlns:a16="http://schemas.microsoft.com/office/drawing/2014/main" id="{9C8CD429-2147-65D1-3EBD-C9F632DCF267}"/>
+              </a:ext>
+            </a:extLst>
+          </p:cNvPr>
+          <p:cNvSpPr/>
+          <p:nvPr/>
+        </p:nvSpPr>
+        <p:spPr>
+          <a:xfrm>
+            <a:off x="5200736" y="1596283"/>
+            <a:ext cx="1790526" cy="626416"/>
+          </a:xfrm>
+          <a:prstGeom prst="roundRect">
+            <a:avLst/>
+          </a:prstGeom>
+          <a:solidFill>
+            <a:schemeClr val="tx1">
+              <a:lumMod val="85000"/>
+              <a:lumOff val="15000"/>
+            </a:schemeClr>
+          </a:solidFill>
+          <a:ln>
+            <a:noFill/>
+          </a:ln>
+        </p:spPr>
+        <p:txBody>
+          <a:bodyPr anchor="ctr" anchorCtr="1">
+            <a:normAutofit/>
+          </a:bodyPr>
+          <a:lstStyle/>
+          <a:p>
+            <a:pPr algn="ctr">
+              <a:buNone/>
+            </a:pPr>
+            <a:r>
+              <a:rPr lang="en-GB" sz="1400" b="1" noProof="0" dirty="0">
+                <a:solidFill>
+                  <a:srgbClr val="FFFFFF"/>
+                </a:solidFill>
+                <a:latin typeface="DM Sans" pitchFamily="2" charset="0"/>
+              </a:rPr>
+              <a:t>CAPABILITIES</a:t>
+            </a:r>
+          </a:p>
+        </p:txBody>
+      </p:sp>
+      <p:pic>
+        <p:nvPicPr>
+          <p:cNvPr id="35" name="Afbeelding 34" descr="Afbeelding met tekst, schermopname, Lettertype, ontwerp&#10;&#10;Door AI gegenereerde inhoud is mogelijk onjuist.">
+            <a:extLst>
+              <a:ext uri="{FF2B5EF4-FFF2-40B4-BE49-F238E27FC236}">
+                <a16:creationId xmlns:a16="http://schemas.microsoft.com/office/drawing/2014/main" id="{E75B4FE5-6CAE-5CA2-8911-43350DF8A092}"/>
+              </a:ext>
+            </a:extLst>
+          </p:cNvPr>
+          <p:cNvPicPr>
+            <a:picLocks noChangeAspect="1"/>
+          </p:cNvPicPr>
+          <p:nvPr/>
+        </p:nvPicPr>
+        <p:blipFill>
+          <a:blip r:embed="rId3"/>
+          <a:stretch>
+            <a:fillRect/>
+          </a:stretch>
+        </p:blipFill>
+        <p:spPr>
+          <a:xfrm>
+            <a:off x="12192000" y="588248"/>
+            <a:ext cx="8529964" cy="2824174"/>
+          </a:xfrm>
+          <a:prstGeom prst="rect">
+            <a:avLst/>
+          </a:prstGeom>
+        </p:spPr>
+      </p:pic>
+    </p:spTree>
+    <p:extLst>
+      <p:ext uri="{BB962C8B-B14F-4D97-AF65-F5344CB8AC3E}">
+        <p14:creationId xmlns:p14="http://schemas.microsoft.com/office/powerpoint/2010/main" val="1673608269"/>
+      </p:ext>
+    </p:extLst>
+  </p:cSld>
+  <p:clrMapOvr>
+    <a:masterClrMapping/>
+  </p:clrMapOvr>
+</p:sld>
+</file>
+
+<file path=ppt/slides/slide4.xml><?xml version="1.0" encoding="utf-8"?>
+<p:sld xmlns:a="http://schemas.openxmlformats.org/drawingml/2006/main" xmlns:r="http://schemas.openxmlformats.org/officeDocument/2006/relationships" xmlns:p="http://schemas.openxmlformats.org/presentationml/2006/main">
+  <p:cSld>
+    <p:spTree>
+      <p:nvGrpSpPr>
+        <p:cNvPr id="1" name="">
+          <a:extLst>
+            <a:ext uri="{FF2B5EF4-FFF2-40B4-BE49-F238E27FC236}">
+              <a16:creationId xmlns:a16="http://schemas.microsoft.com/office/drawing/2014/main" id="{5F351A03-A6E4-2F3C-8ADF-BF915F284B32}"/>
+            </a:ext>
+          </a:extLst>
+        </p:cNvPr>
+        <p:cNvGrpSpPr/>
+        <p:nvPr/>
+      </p:nvGrpSpPr>
+      <p:grpSpPr>
+        <a:xfrm>
+          <a:off x="0" y="0"/>
+          <a:ext cx="0" cy="0"/>
+          <a:chOff x="0" y="0"/>
+          <a:chExt cx="0" cy="0"/>
+        </a:xfrm>
+      </p:grpSpPr>
+      <p:sp>
+        <p:nvSpPr>
+          <p:cNvPr id="4" name="Rechthoek 3">
+            <a:extLst>
+              <a:ext uri="{FF2B5EF4-FFF2-40B4-BE49-F238E27FC236}">
+                <a16:creationId xmlns:a16="http://schemas.microsoft.com/office/drawing/2014/main" id="{9AD835D3-F13B-6DA4-DB6D-F3E451993735}"/>
+              </a:ext>
+            </a:extLst>
+          </p:cNvPr>
+          <p:cNvSpPr/>
+          <p:nvPr/>
+        </p:nvSpPr>
+        <p:spPr>
+          <a:xfrm>
+            <a:off x="1874783" y="409252"/>
+            <a:ext cx="8442435" cy="4509590"/>
+          </a:xfrm>
+          <a:prstGeom prst="rect">
+            <a:avLst/>
+          </a:prstGeom>
+          <a:solidFill>
+            <a:schemeClr val="bg1"/>
+          </a:solidFill>
+          <a:ln>
+            <a:noFill/>
+          </a:ln>
+        </p:spPr>
+        <p:style>
+          <a:lnRef idx="2">
+            <a:schemeClr val="accent1">
+              <a:shade val="15000"/>
+            </a:schemeClr>
+          </a:lnRef>
+          <a:fillRef idx="1">
+            <a:schemeClr val="accent1"/>
+          </a:fillRef>
+          <a:effectRef idx="0">
+            <a:schemeClr val="accent1"/>
+          </a:effectRef>
+          <a:fontRef idx="minor">
+            <a:schemeClr val="lt1"/>
+          </a:fontRef>
+        </p:style>
+        <p:txBody>
+          <a:bodyPr rtlCol="0" anchor="ctr"/>
+          <a:lstStyle/>
+          <a:p>
+            <a:pPr algn="ctr"/>
+            <a:endParaRPr lang="en-GB"/>
+          </a:p>
+        </p:txBody>
+      </p:sp>
+      <p:sp>
+        <p:nvSpPr>
+          <p:cNvPr id="3" name="Title 2">
+            <a:extLst>
+              <a:ext uri="{FF2B5EF4-FFF2-40B4-BE49-F238E27FC236}">
+                <a16:creationId xmlns:a16="http://schemas.microsoft.com/office/drawing/2014/main" id="{C8E4ABDA-07FB-BF30-1F69-98C741FD80BD}"/>
+              </a:ext>
+            </a:extLst>
+          </p:cNvPr>
+          <p:cNvSpPr>
+            <a:spLocks noGrp="1"/>
+          </p:cNvSpPr>
+          <p:nvPr>
+            <p:ph type="title"/>
+          </p:nvPr>
+        </p:nvSpPr>
+        <p:spPr>
+          <a:xfrm>
+            <a:off x="3729925" y="629113"/>
+            <a:ext cx="4732150" cy="348787"/>
+          </a:xfrm>
+        </p:spPr>
+        <p:txBody>
+          <a:bodyPr>
+            <a:normAutofit/>
+          </a:bodyPr>
+          <a:lstStyle/>
+          <a:p>
+            <a:pPr algn="ctr"/>
+            <a:r>
+              <a:rPr lang="en-GB" noProof="0" dirty="0">
+                <a:solidFill>
+                  <a:schemeClr val="tx1">
+                    <a:lumMod val="85000"/>
+                    <a:lumOff val="15000"/>
+                  </a:schemeClr>
+                </a:solidFill>
+              </a:rPr>
+              <a:t>The European Advantage Triad</a:t>
+            </a:r>
+          </a:p>
+        </p:txBody>
+      </p:sp>
+      <p:cxnSp>
+        <p:nvCxnSpPr>
+          <p:cNvPr id="41" name="Rechte verbindingslijn met pijl 40">
+            <a:extLst>
+              <a:ext uri="{FF2B5EF4-FFF2-40B4-BE49-F238E27FC236}">
+                <a16:creationId xmlns:a16="http://schemas.microsoft.com/office/drawing/2014/main" id="{CF4C91FA-7AD8-127D-AA1D-3C5535769D1A}"/>
+              </a:ext>
+            </a:extLst>
+          </p:cNvPr>
+          <p:cNvCxnSpPr>
+            <a:cxnSpLocks/>
+            <a:stCxn id="64" idx="0"/>
+            <a:endCxn id="44" idx="3"/>
+          </p:cNvCxnSpPr>
+          <p:nvPr/>
+        </p:nvCxnSpPr>
+        <p:spPr>
+          <a:xfrm flipH="1" flipV="1">
+            <a:off x="7062489" y="1678877"/>
+            <a:ext cx="653716" cy="1543006"/>
+          </a:xfrm>
+          <a:prstGeom prst="straightConnector1">
+            <a:avLst/>
+          </a:prstGeom>
+          <a:ln w="38100" cap="flat" cmpd="sng" algn="ctr">
+            <a:solidFill>
+              <a:schemeClr val="bg1">
+                <a:lumMod val="65000"/>
+              </a:schemeClr>
+            </a:solidFill>
+            <a:prstDash val="solid"/>
+            <a:miter lim="800000"/>
+            <a:headEnd w="med" len="med"/>
+            <a:tailEnd type="triangle" w="lg" len="med"/>
+          </a:ln>
+        </p:spPr>
+        <p:style>
+          <a:lnRef idx="2">
+            <a:schemeClr val="accent1"/>
+          </a:lnRef>
+          <a:fillRef idx="0">
+            <a:schemeClr val="accent1"/>
+          </a:fillRef>
+          <a:effectRef idx="1">
+            <a:schemeClr val="accent1"/>
+          </a:effectRef>
+          <a:fontRef idx="minor">
+            <a:schemeClr val="tx1"/>
+          </a:fontRef>
+        </p:style>
+      </p:cxnSp>
+      <p:cxnSp>
+        <p:nvCxnSpPr>
+          <p:cNvPr id="42" name="Rechte verbindingslijn met pijl 41">
+            <a:extLst>
+              <a:ext uri="{FF2B5EF4-FFF2-40B4-BE49-F238E27FC236}">
+                <a16:creationId xmlns:a16="http://schemas.microsoft.com/office/drawing/2014/main" id="{A02245F4-B55B-5D4E-AB49-9E1FD427B15F}"/>
+              </a:ext>
+            </a:extLst>
+          </p:cNvPr>
+          <p:cNvCxnSpPr>
+            <a:cxnSpLocks/>
+            <a:stCxn id="44" idx="1"/>
+            <a:endCxn id="67" idx="0"/>
+          </p:cNvCxnSpPr>
+          <p:nvPr/>
+        </p:nvCxnSpPr>
+        <p:spPr>
+          <a:xfrm flipH="1">
+            <a:off x="4479442" y="1678877"/>
+            <a:ext cx="650069" cy="1543006"/>
+          </a:xfrm>
+          <a:prstGeom prst="straightConnector1">
+            <a:avLst/>
+          </a:prstGeom>
+          <a:ln w="38100">
+            <a:solidFill>
+              <a:schemeClr val="bg1">
+                <a:lumMod val="65000"/>
+              </a:schemeClr>
+            </a:solidFill>
+            <a:headEnd w="med" len="med"/>
+            <a:tailEnd type="triangle" w="lg" len="med"/>
+          </a:ln>
+        </p:spPr>
+        <p:style>
+          <a:lnRef idx="2">
+            <a:schemeClr val="accent1"/>
+          </a:lnRef>
+          <a:fillRef idx="0">
+            <a:schemeClr val="accent1"/>
+          </a:fillRef>
+          <a:effectRef idx="1">
+            <a:schemeClr val="accent1"/>
+          </a:effectRef>
+          <a:fontRef idx="minor">
+            <a:schemeClr val="tx1"/>
+          </a:fontRef>
+        </p:style>
+      </p:cxnSp>
+      <p:cxnSp>
+        <p:nvCxnSpPr>
+          <p:cNvPr id="43" name="Rechte verbindingslijn met pijl 42">
+            <a:extLst>
+              <a:ext uri="{FF2B5EF4-FFF2-40B4-BE49-F238E27FC236}">
+                <a16:creationId xmlns:a16="http://schemas.microsoft.com/office/drawing/2014/main" id="{38E027BE-D0DE-264E-B502-402029368CCA}"/>
+              </a:ext>
+            </a:extLst>
+          </p:cNvPr>
+          <p:cNvCxnSpPr>
+            <a:cxnSpLocks/>
+            <a:stCxn id="67" idx="3"/>
+            <a:endCxn id="64" idx="1"/>
+          </p:cNvCxnSpPr>
+          <p:nvPr/>
+        </p:nvCxnSpPr>
+        <p:spPr>
+          <a:xfrm>
+            <a:off x="5445931" y="3535091"/>
+            <a:ext cx="1303785" cy="0"/>
+          </a:xfrm>
+          <a:prstGeom prst="straightConnector1">
+            <a:avLst/>
+          </a:prstGeom>
+          <a:ln w="38100">
+            <a:solidFill>
+              <a:schemeClr val="bg1">
+                <a:lumMod val="65000"/>
+              </a:schemeClr>
+            </a:solidFill>
+            <a:headEnd w="med" len="med"/>
+            <a:tailEnd type="triangle" w="lg" len="med"/>
+          </a:ln>
+        </p:spPr>
+        <p:style>
+          <a:lnRef idx="2">
+            <a:schemeClr val="accent1"/>
+          </a:lnRef>
+          <a:fillRef idx="0">
+            <a:schemeClr val="accent1"/>
+          </a:fillRef>
+          <a:effectRef idx="1">
+            <a:schemeClr val="accent1"/>
+          </a:effectRef>
+          <a:fontRef idx="minor">
+            <a:schemeClr val="tx1"/>
+          </a:fontRef>
+        </p:style>
+      </p:cxnSp>
+      <p:sp>
+        <p:nvSpPr>
+          <p:cNvPr id="45" name="Rechthoek: afgeronde hoeken 44">
+            <a:extLst>
+              <a:ext uri="{FF2B5EF4-FFF2-40B4-BE49-F238E27FC236}">
+                <a16:creationId xmlns:a16="http://schemas.microsoft.com/office/drawing/2014/main" id="{69F1C59C-5AC6-CB44-456F-D9B7330D4A4B}"/>
+              </a:ext>
+            </a:extLst>
+          </p:cNvPr>
+          <p:cNvSpPr/>
+          <p:nvPr/>
+        </p:nvSpPr>
+        <p:spPr>
+          <a:xfrm>
+            <a:off x="5211479" y="1961959"/>
+            <a:ext cx="1769042" cy="743156"/>
+          </a:xfrm>
+          <a:prstGeom prst="roundRect">
+            <a:avLst/>
+          </a:prstGeom>
+          <a:solidFill>
+            <a:srgbClr val="FFFFFF"/>
+          </a:solidFill>
+          <a:ln w="19050">
+            <a:solidFill>
+              <a:schemeClr val="tx1">
+                <a:lumMod val="85000"/>
+                <a:lumOff val="15000"/>
+              </a:schemeClr>
+            </a:solidFill>
+          </a:ln>
+        </p:spPr>
+        <p:txBody>
+          <a:bodyPr wrap="square" anchor="ctr" anchorCtr="1">
+            <a:normAutofit/>
+          </a:bodyPr>
+          <a:lstStyle/>
+          <a:p>
+            <a:pPr algn="ctr">
+              <a:lnSpc>
+                <a:spcPts val="1300"/>
+              </a:lnSpc>
+              <a:buNone/>
+            </a:pPr>
+            <a:r>
+              <a:rPr lang="en-GB" sz="1200" noProof="0" dirty="0">
+                <a:solidFill>
+                  <a:schemeClr val="tx1">
+                    <a:lumMod val="85000"/>
+                    <a:lumOff val="15000"/>
+                  </a:schemeClr>
+                </a:solidFill>
+                <a:latin typeface="+mj-lt"/>
+              </a:rPr>
+              <a:t>One harmonised AI framework across 27 countries</a:t>
+            </a:r>
+          </a:p>
+        </p:txBody>
+      </p:sp>
+      <p:sp>
+        <p:nvSpPr>
+          <p:cNvPr id="44" name="Rechthoek: afgeronde hoeken 43">
+            <a:extLst>
+              <a:ext uri="{FF2B5EF4-FFF2-40B4-BE49-F238E27FC236}">
+                <a16:creationId xmlns:a16="http://schemas.microsoft.com/office/drawing/2014/main" id="{621DC4F8-74FA-48D8-DBF9-66F966A509D1}"/>
+              </a:ext>
+            </a:extLst>
+          </p:cNvPr>
+          <p:cNvSpPr/>
+          <p:nvPr/>
+        </p:nvSpPr>
+        <p:spPr>
+          <a:xfrm>
+            <a:off x="5129511" y="1365669"/>
+            <a:ext cx="1932978" cy="626416"/>
+          </a:xfrm>
+          <a:prstGeom prst="roundRect">
+            <a:avLst/>
+          </a:prstGeom>
+          <a:solidFill>
+            <a:schemeClr val="tx1">
+              <a:lumMod val="85000"/>
+              <a:lumOff val="15000"/>
+            </a:schemeClr>
+          </a:solidFill>
+          <a:ln>
+            <a:noFill/>
+          </a:ln>
+        </p:spPr>
+        <p:txBody>
+          <a:bodyPr anchor="ctr" anchorCtr="1">
+            <a:normAutofit/>
+          </a:bodyPr>
+          <a:lstStyle/>
+          <a:p>
+            <a:pPr algn="ctr">
+              <a:buNone/>
+            </a:pPr>
+            <a:r>
+              <a:rPr lang="en-GB" sz="1400" b="1" noProof="0" dirty="0">
+                <a:solidFill>
+                  <a:srgbClr val="FFFFFF"/>
+                </a:solidFill>
+                <a:latin typeface="DM Sans" pitchFamily="2" charset="0"/>
+              </a:rPr>
+              <a:t>CLARITY</a:t>
+            </a:r>
+          </a:p>
+        </p:txBody>
+      </p:sp>
+      <p:sp>
+        <p:nvSpPr>
+          <p:cNvPr id="50" name="Rechthoek: afgeronde hoeken 49">
+            <a:extLst>
+              <a:ext uri="{FF2B5EF4-FFF2-40B4-BE49-F238E27FC236}">
+                <a16:creationId xmlns:a16="http://schemas.microsoft.com/office/drawing/2014/main" id="{1FC71C6A-87D4-7015-6CBF-06E64671763B}"/>
+              </a:ext>
+            </a:extLst>
+          </p:cNvPr>
+          <p:cNvSpPr/>
+          <p:nvPr/>
+        </p:nvSpPr>
+        <p:spPr>
+          <a:xfrm>
+            <a:off x="6831684" y="3818173"/>
+            <a:ext cx="1769042" cy="743156"/>
+          </a:xfrm>
+          <a:prstGeom prst="roundRect">
+            <a:avLst/>
+          </a:prstGeom>
+          <a:solidFill>
+            <a:srgbClr val="FFFFFF"/>
+          </a:solidFill>
+          <a:ln w="19050">
+            <a:solidFill>
+              <a:schemeClr val="tx1">
+                <a:lumMod val="85000"/>
+                <a:lumOff val="15000"/>
+              </a:schemeClr>
+            </a:solidFill>
+          </a:ln>
+        </p:spPr>
+        <p:txBody>
+          <a:bodyPr wrap="square" anchor="ctr" anchorCtr="1">
+            <a:normAutofit/>
+          </a:bodyPr>
+          <a:lstStyle/>
+          <a:p>
+            <a:pPr algn="ctr">
+              <a:lnSpc>
+                <a:spcPts val="1300"/>
+              </a:lnSpc>
+              <a:buNone/>
+            </a:pPr>
+            <a:r>
+              <a:rPr lang="en-GB" sz="1200" noProof="0" dirty="0">
+                <a:solidFill>
+                  <a:schemeClr val="tx1">
+                    <a:lumMod val="85000"/>
+                    <a:lumOff val="15000"/>
+                  </a:schemeClr>
+                </a:solidFill>
+                <a:latin typeface="+mj-lt"/>
+              </a:rPr>
+              <a:t>Sovereign AI talent and infrastructure investment</a:t>
+            </a:r>
+          </a:p>
+        </p:txBody>
+      </p:sp>
+      <p:sp>
+        <p:nvSpPr>
+          <p:cNvPr id="64" name="Rechthoek: afgeronde hoeken 63">
+            <a:extLst>
+              <a:ext uri="{FF2B5EF4-FFF2-40B4-BE49-F238E27FC236}">
+                <a16:creationId xmlns:a16="http://schemas.microsoft.com/office/drawing/2014/main" id="{F9B4409C-0E20-1533-CCB6-E0C111D87C26}"/>
+              </a:ext>
+            </a:extLst>
+          </p:cNvPr>
+          <p:cNvSpPr/>
+          <p:nvPr/>
+        </p:nvSpPr>
+        <p:spPr>
+          <a:xfrm>
+            <a:off x="6749716" y="3221883"/>
+            <a:ext cx="1932978" cy="626416"/>
+          </a:xfrm>
+          <a:prstGeom prst="roundRect">
+            <a:avLst/>
+          </a:prstGeom>
+          <a:solidFill>
+            <a:schemeClr val="tx1">
+              <a:lumMod val="85000"/>
+              <a:lumOff val="15000"/>
+            </a:schemeClr>
+          </a:solidFill>
+          <a:ln>
+            <a:noFill/>
+          </a:ln>
+        </p:spPr>
+        <p:txBody>
+          <a:bodyPr anchor="ctr" anchorCtr="1">
+            <a:normAutofit/>
+          </a:bodyPr>
+          <a:lstStyle/>
+          <a:p>
+            <a:pPr algn="ctr">
+              <a:buNone/>
+            </a:pPr>
+            <a:r>
+              <a:rPr lang="en-GB" sz="1400" b="1" noProof="0" dirty="0">
+                <a:solidFill>
+                  <a:srgbClr val="FFFFFF"/>
+                </a:solidFill>
+                <a:latin typeface="DM Sans" pitchFamily="2" charset="0"/>
+              </a:rPr>
+              <a:t>CAPABILITY</a:t>
+            </a:r>
+          </a:p>
+        </p:txBody>
+      </p:sp>
+      <p:sp>
+        <p:nvSpPr>
+          <p:cNvPr id="66" name="Rechthoek: afgeronde hoeken 65">
+            <a:extLst>
+              <a:ext uri="{FF2B5EF4-FFF2-40B4-BE49-F238E27FC236}">
+                <a16:creationId xmlns:a16="http://schemas.microsoft.com/office/drawing/2014/main" id="{8377B188-E0FB-4C5F-7D34-952E1C242109}"/>
+              </a:ext>
+            </a:extLst>
+          </p:cNvPr>
+          <p:cNvSpPr/>
+          <p:nvPr/>
+        </p:nvSpPr>
+        <p:spPr>
+          <a:xfrm>
+            <a:off x="3594921" y="3818173"/>
+            <a:ext cx="1769042" cy="743156"/>
+          </a:xfrm>
+          <a:prstGeom prst="roundRect">
+            <a:avLst/>
+          </a:prstGeom>
+          <a:solidFill>
+            <a:srgbClr val="FFFFFF"/>
+          </a:solidFill>
+          <a:ln w="19050">
+            <a:solidFill>
+              <a:schemeClr val="tx1">
+                <a:lumMod val="85000"/>
+                <a:lumOff val="15000"/>
+              </a:schemeClr>
+            </a:solidFill>
+          </a:ln>
+        </p:spPr>
+        <p:txBody>
+          <a:bodyPr wrap="square" anchor="ctr" anchorCtr="1">
+            <a:normAutofit/>
+          </a:bodyPr>
+          <a:lstStyle/>
+          <a:p>
+            <a:pPr algn="ctr">
+              <a:lnSpc>
+                <a:spcPts val="1300"/>
+              </a:lnSpc>
+              <a:buNone/>
+            </a:pPr>
+            <a:r>
+              <a:rPr lang="en-GB" sz="1200" noProof="0" dirty="0">
+                <a:solidFill>
+                  <a:schemeClr val="tx1">
+                    <a:lumMod val="85000"/>
+                    <a:lumOff val="15000"/>
+                  </a:schemeClr>
+                </a:solidFill>
+                <a:latin typeface="+mj-lt"/>
+              </a:rPr>
+              <a:t>Consumer, employee and B2B confidence premium</a:t>
+            </a:r>
+          </a:p>
+        </p:txBody>
+      </p:sp>
+      <p:sp>
+        <p:nvSpPr>
+          <p:cNvPr id="67" name="Rechthoek: afgeronde hoeken 66">
+            <a:extLst>
+              <a:ext uri="{FF2B5EF4-FFF2-40B4-BE49-F238E27FC236}">
+                <a16:creationId xmlns:a16="http://schemas.microsoft.com/office/drawing/2014/main" id="{4F8D23CC-3ED1-4FCD-5888-C033DF3FA6E1}"/>
+              </a:ext>
+            </a:extLst>
+          </p:cNvPr>
+          <p:cNvSpPr/>
+          <p:nvPr/>
+        </p:nvSpPr>
+        <p:spPr>
+          <a:xfrm>
+            <a:off x="3512953" y="3221883"/>
+            <a:ext cx="1932978" cy="626416"/>
+          </a:xfrm>
+          <a:prstGeom prst="roundRect">
+            <a:avLst/>
+          </a:prstGeom>
+          <a:solidFill>
+            <a:schemeClr val="tx1">
+              <a:lumMod val="85000"/>
+              <a:lumOff val="15000"/>
+            </a:schemeClr>
+          </a:solidFill>
+          <a:ln>
+            <a:noFill/>
+          </a:ln>
+        </p:spPr>
+        <p:txBody>
+          <a:bodyPr anchor="ctr" anchorCtr="1">
+            <a:normAutofit/>
+          </a:bodyPr>
+          <a:lstStyle/>
+          <a:p>
+            <a:pPr algn="ctr">
+              <a:buNone/>
+            </a:pPr>
+            <a:r>
+              <a:rPr lang="en-GB" sz="1400" b="1" noProof="0" dirty="0">
+                <a:solidFill>
+                  <a:srgbClr val="FFFFFF"/>
+                </a:solidFill>
+                <a:latin typeface="DM Sans" pitchFamily="2" charset="0"/>
+              </a:rPr>
+              <a:t>TRUST</a:t>
+            </a:r>
+          </a:p>
+        </p:txBody>
+      </p:sp>
+      <p:sp>
+        <p:nvSpPr>
+          <p:cNvPr id="71" name="Tekstvak 70">
+            <a:extLst>
+              <a:ext uri="{FF2B5EF4-FFF2-40B4-BE49-F238E27FC236}">
+                <a16:creationId xmlns:a16="http://schemas.microsoft.com/office/drawing/2014/main" id="{44F0CEE2-75A9-23F6-CD28-FA93730694E5}"/>
+              </a:ext>
+            </a:extLst>
+          </p:cNvPr>
+          <p:cNvSpPr txBox="1"/>
+          <p:nvPr/>
+        </p:nvSpPr>
+        <p:spPr>
+          <a:xfrm>
+            <a:off x="3161948" y="2326714"/>
+            <a:ext cx="1616557" cy="259943"/>
+          </a:xfrm>
+          <a:prstGeom prst="rect">
+            <a:avLst/>
+          </a:prstGeom>
+          <a:noFill/>
+        </p:spPr>
+        <p:txBody>
+          <a:bodyPr wrap="square" rtlCol="0">
+            <a:spAutoFit/>
+          </a:bodyPr>
+          <a:lstStyle/>
+          <a:p>
+            <a:pPr algn="r">
+              <a:lnSpc>
+                <a:spcPts val="1300"/>
+              </a:lnSpc>
+              <a:buNone/>
+            </a:pPr>
+            <a:r>
+              <a:rPr lang="en-GB" sz="1200" i="1" noProof="0" dirty="0">
+                <a:solidFill>
+                  <a:schemeClr val="tx1">
+                    <a:lumMod val="85000"/>
+                    <a:lumOff val="15000"/>
+                  </a:schemeClr>
+                </a:solidFill>
+              </a:rPr>
+              <a:t>Clarity enables trust</a:t>
+            </a:r>
+          </a:p>
+        </p:txBody>
+      </p:sp>
+      <p:sp>
+        <p:nvSpPr>
+          <p:cNvPr id="70" name="Tekstvak 69">
+            <a:extLst>
+              <a:ext uri="{FF2B5EF4-FFF2-40B4-BE49-F238E27FC236}">
+                <a16:creationId xmlns:a16="http://schemas.microsoft.com/office/drawing/2014/main" id="{49859451-1415-D95D-EF8B-4234B39AAC77}"/>
+              </a:ext>
+            </a:extLst>
+          </p:cNvPr>
+          <p:cNvSpPr txBox="1"/>
+          <p:nvPr/>
+        </p:nvSpPr>
+        <p:spPr>
+          <a:xfrm>
+            <a:off x="7476437" y="2253258"/>
+            <a:ext cx="1446025" cy="426655"/>
+          </a:xfrm>
+          <a:prstGeom prst="rect">
+            <a:avLst/>
+          </a:prstGeom>
+          <a:noFill/>
+        </p:spPr>
+        <p:txBody>
+          <a:bodyPr wrap="square" rtlCol="0">
+            <a:spAutoFit/>
+          </a:bodyPr>
+          <a:lstStyle/>
+          <a:p>
+            <a:pPr>
+              <a:lnSpc>
+                <a:spcPts val="1300"/>
+              </a:lnSpc>
+              <a:buNone/>
+            </a:pPr>
+            <a:r>
+              <a:rPr lang="en-GB" sz="1200" i="1" noProof="0" dirty="0">
+                <a:solidFill>
+                  <a:schemeClr val="tx1">
+                    <a:lumMod val="85000"/>
+                    <a:lumOff val="15000"/>
+                  </a:schemeClr>
+                </a:solidFill>
+              </a:rPr>
+              <a:t>Capability strengthens clarity</a:t>
+            </a:r>
+          </a:p>
+        </p:txBody>
+      </p:sp>
+      <p:sp>
+        <p:nvSpPr>
+          <p:cNvPr id="73" name="Tekstvak 72">
+            <a:extLst>
+              <a:ext uri="{FF2B5EF4-FFF2-40B4-BE49-F238E27FC236}">
+                <a16:creationId xmlns:a16="http://schemas.microsoft.com/office/drawing/2014/main" id="{6803C6EE-D23C-C46B-608F-B26302FA2269}"/>
+              </a:ext>
+            </a:extLst>
+          </p:cNvPr>
+          <p:cNvSpPr txBox="1"/>
+          <p:nvPr/>
+        </p:nvSpPr>
+        <p:spPr>
+          <a:xfrm>
+            <a:off x="5445931" y="3634534"/>
+            <a:ext cx="1303785" cy="426655"/>
+          </a:xfrm>
+          <a:prstGeom prst="rect">
+            <a:avLst/>
+          </a:prstGeom>
+          <a:noFill/>
+        </p:spPr>
+        <p:txBody>
+          <a:bodyPr wrap="square" rtlCol="0">
+            <a:spAutoFit/>
+          </a:bodyPr>
+          <a:lstStyle/>
+          <a:p>
+            <a:pPr algn="ctr">
+              <a:lnSpc>
+                <a:spcPts val="1300"/>
+              </a:lnSpc>
+              <a:buNone/>
+            </a:pPr>
+            <a:r>
+              <a:rPr lang="en-GB" sz="1200" i="1" noProof="0" dirty="0">
+                <a:solidFill>
+                  <a:schemeClr val="tx1">
+                    <a:lumMod val="85000"/>
+                    <a:lumOff val="15000"/>
+                  </a:schemeClr>
+                </a:solidFill>
+              </a:rPr>
+              <a:t>Trust enables capability</a:t>
+            </a:r>
+          </a:p>
+        </p:txBody>
+      </p:sp>
+      <p:pic>
+        <p:nvPicPr>
+          <p:cNvPr id="87" name="Afbeelding 86" descr="Afbeelding met tekst, schermopname, Lettertype, lijn&#10;&#10;Door AI gegenereerde inhoud is mogelijk onjuist.">
+            <a:extLst>
+              <a:ext uri="{FF2B5EF4-FFF2-40B4-BE49-F238E27FC236}">
+                <a16:creationId xmlns:a16="http://schemas.microsoft.com/office/drawing/2014/main" id="{A2A4D0E7-95AC-E8C6-57A6-42E0222D9D65}"/>
+              </a:ext>
+            </a:extLst>
+          </p:cNvPr>
+          <p:cNvPicPr>
+            <a:picLocks noChangeAspect="1"/>
+          </p:cNvPicPr>
+          <p:nvPr/>
+        </p:nvPicPr>
+        <p:blipFill>
+          <a:blip r:embed="rId3"/>
+          <a:stretch>
+            <a:fillRect/>
+          </a:stretch>
+        </p:blipFill>
+        <p:spPr>
+          <a:xfrm>
+            <a:off x="12192000" y="574489"/>
+            <a:ext cx="5887816" cy="4144682"/>
+          </a:xfrm>
+          <a:prstGeom prst="rect">
+            <a:avLst/>
+          </a:prstGeom>
+        </p:spPr>
+      </p:pic>
+    </p:spTree>
+    <p:extLst>
+      <p:ext uri="{BB962C8B-B14F-4D97-AF65-F5344CB8AC3E}">
+        <p14:creationId xmlns:p14="http://schemas.microsoft.com/office/powerpoint/2010/main" val="1452548139"/>
+      </p:ext>
+    </p:extLst>
+  </p:cSld>
+  <p:clrMapOvr>
+    <a:masterClrMapping/>
+  </p:clrMapOvr>
+</p:sld>
+</file>
+
+<file path=ppt/slides/slide5.xml><?xml version="1.0" encoding="utf-8"?>
 <p:sld xmlns:a="http://schemas.openxmlformats.org/drawingml/2006/main" xmlns:r="http://schemas.openxmlformats.org/officeDocument/2006/relationships" xmlns:p="http://schemas.openxmlformats.org/presentationml/2006/main">
   <p:cSld>
     <p:spTree>
@@ -5903,7 +8016,7 @@
           <a:lstStyle/>
           <a:p>
             <a:r>
-              <a:rPr lang="en-US" dirty="0"/>
+              <a:rPr lang="en-GB" noProof="0" dirty="0"/>
               <a:t>AI Transformation framework for European CEO’s – not used</a:t>
             </a:r>
           </a:p>
@@ -5931,14 +8044,9 @@
           <a:lstStyle/>
           <a:p>
             <a:r>
-              <a:rPr lang="en-US" dirty="0"/>
-              <a:t>The Agentic </a:t>
-            </a:r>
-            <a:r>
-              <a:rPr lang="en-US" dirty="0" err="1"/>
-              <a:t>Organisation</a:t>
-            </a:r>
-            <a:endParaRPr lang="en-US" dirty="0"/>
+              <a:rPr lang="en-GB" noProof="0" dirty="0"/>
+              <a:t>The Agentic Organisation</a:t>
+            </a:r>
           </a:p>
         </p:txBody>
       </p:sp>
@@ -6013,7 +8121,7 @@
             <a:lstStyle/>
             <a:p>
               <a:pPr algn="ctr"/>
-              <a:endParaRPr lang="LID4096"/>
+              <a:endParaRPr lang="en-GB" noProof="0" dirty="0"/>
             </a:p>
           </p:txBody>
         </p:sp>
@@ -6068,7 +8176,7 @@
             <a:lstStyle/>
             <a:p>
               <a:pPr algn="ctr"/>
-              <a:endParaRPr lang="LID4096"/>
+              <a:endParaRPr lang="en-GB" noProof="0" dirty="0"/>
             </a:p>
           </p:txBody>
         </p:sp>
@@ -6123,7 +8231,7 @@
             <a:lstStyle/>
             <a:p>
               <a:pPr algn="ctr"/>
-              <a:endParaRPr lang="LID4096"/>
+              <a:endParaRPr lang="en-GB" noProof="0" dirty="0"/>
             </a:p>
           </p:txBody>
         </p:sp>
@@ -6179,7 +8287,7 @@
                   <a:buSzPct val="100000"/>
                 </a:pPr>
                 <a:r>
-                  <a:rPr lang="en-US" sz="1200" b="1" dirty="0">
+                  <a:rPr lang="en-GB" sz="1200" b="1" noProof="0" dirty="0">
                     <a:latin typeface="DM Sans" pitchFamily="2" charset="0"/>
                   </a:rPr>
                   <a:t>Implementation</a:t>
@@ -6190,7 +8298,7 @@
                   <a:buSzPct val="100000"/>
                 </a:pPr>
                 <a:r>
-                  <a:rPr lang="en-US" sz="1200" dirty="0">
+                  <a:rPr lang="en-GB" sz="1200" noProof="0" dirty="0">
                     <a:solidFill>
                       <a:schemeClr val="tx1">
                         <a:lumMod val="75000"/>
@@ -6236,7 +8344,7 @@
                   <a:buSzPct val="100000"/>
                 </a:pPr>
                 <a:r>
-                  <a:rPr lang="en-US" sz="1200" b="1" dirty="0">
+                  <a:rPr lang="en-GB" sz="1200" b="1" noProof="0" dirty="0">
                     <a:latin typeface="DM Sans" pitchFamily="2" charset="0"/>
                   </a:rPr>
                   <a:t>Governance &amp; Metrics</a:t>
@@ -6247,7 +8355,7 @@
                   <a:buSzPct val="100000"/>
                 </a:pPr>
                 <a:r>
-                  <a:rPr lang="en-US" sz="1200" dirty="0">
+                  <a:rPr lang="en-GB" sz="1200" noProof="0" dirty="0">
                     <a:solidFill>
                       <a:schemeClr val="tx1">
                         <a:lumMod val="75000"/>
@@ -6293,7 +8401,7 @@
                   <a:buSzPct val="100000"/>
                 </a:pPr>
                 <a:r>
-                  <a:rPr lang="en-US" sz="1200" b="1" dirty="0">
+                  <a:rPr lang="en-GB" sz="1200" b="1" noProof="0" dirty="0">
                     <a:latin typeface="DM Sans" pitchFamily="2" charset="0"/>
                   </a:rPr>
                   <a:t>Financials</a:t>
@@ -6304,7 +8412,7 @@
                   <a:buSzPct val="100000"/>
                 </a:pPr>
                 <a:r>
-                  <a:rPr lang="en-US" sz="1200" dirty="0">
+                  <a:rPr lang="en-GB" sz="1200" noProof="0" dirty="0">
                     <a:solidFill>
                       <a:schemeClr val="tx1">
                         <a:lumMod val="75000"/>
@@ -6411,7 +8519,7 @@
               <a:lstStyle/>
               <a:p>
                 <a:pPr algn="ctr"/>
-                <a:endParaRPr lang="en-GB" dirty="0"/>
+                <a:endParaRPr lang="en-GB" noProof="0" dirty="0"/>
               </a:p>
             </p:txBody>
           </p:sp>
@@ -6447,12 +8555,12 @@
                   <a:buSzPct val="100000"/>
                 </a:pPr>
                 <a:r>
-                  <a:rPr lang="en-US" sz="1200" b="1" dirty="0">
+                  <a:rPr lang="en-GB" sz="1200" b="1" noProof="0" dirty="0">
                     <a:latin typeface="DM Sans" pitchFamily="2" charset="0"/>
                   </a:rPr>
                   <a:t>Value</a:t>
                 </a:r>
-                <a:endParaRPr lang="en-US" sz="1200" dirty="0">
+                <a:endParaRPr lang="en-GB" sz="1200" noProof="0" dirty="0">
                   <a:latin typeface="DM Sans" pitchFamily="2" charset="0"/>
                 </a:endParaRPr>
               </a:p>
@@ -6530,7 +8638,7 @@
               <a:lstStyle/>
               <a:p>
                 <a:pPr algn="ctr"/>
-                <a:endParaRPr lang="en-GB" dirty="0"/>
+                <a:endParaRPr lang="en-GB" noProof="0" dirty="0"/>
               </a:p>
             </p:txBody>
           </p:sp>
@@ -6566,12 +8674,12 @@
                   <a:buSzPct val="100000"/>
                 </a:pPr>
                 <a:r>
-                  <a:rPr lang="en-US" sz="1200" b="1" dirty="0">
+                  <a:rPr lang="en-GB" sz="1200" b="1" noProof="0" dirty="0">
                     <a:latin typeface="DM Sans" pitchFamily="2" charset="0"/>
                   </a:rPr>
                   <a:t>Capabilities</a:t>
                 </a:r>
-                <a:endParaRPr lang="en-US" sz="1200" dirty="0">
+                <a:endParaRPr lang="en-GB" sz="1200" noProof="0" dirty="0">
                   <a:latin typeface="DM Sans" pitchFamily="2" charset="0"/>
                 </a:endParaRPr>
               </a:p>
@@ -6649,7 +8757,7 @@
               <a:lstStyle/>
               <a:p>
                 <a:pPr algn="ctr"/>
-                <a:endParaRPr lang="en-GB" dirty="0"/>
+                <a:endParaRPr lang="en-GB" noProof="0" dirty="0"/>
               </a:p>
             </p:txBody>
           </p:sp>
@@ -6685,12 +8793,12 @@
                   <a:buSzPct val="100000"/>
                 </a:pPr>
                 <a:r>
-                  <a:rPr lang="en-US" sz="1200" b="1" dirty="0">
+                  <a:rPr lang="en-GB" sz="1200" b="1" noProof="0" dirty="0">
                     <a:latin typeface="DM Sans" pitchFamily="2" charset="0"/>
                   </a:rPr>
                   <a:t>Trust</a:t>
                 </a:r>
-                <a:endParaRPr lang="en-US" sz="1200" dirty="0">
+                <a:endParaRPr lang="en-GB" sz="1200" noProof="0" dirty="0">
                   <a:latin typeface="DM Sans" pitchFamily="2" charset="0"/>
                 </a:endParaRPr>
               </a:p>
@@ -6702,297 +8810,6 @@
     <p:extLst>
       <p:ext uri="{BB962C8B-B14F-4D97-AF65-F5344CB8AC3E}">
         <p14:creationId xmlns:p14="http://schemas.microsoft.com/office/powerpoint/2010/main" val="3418198643"/>
-      </p:ext>
-    </p:extLst>
-  </p:cSld>
-  <p:clrMapOvr>
-    <a:masterClrMapping/>
-  </p:clrMapOvr>
-</p:sld>
-</file>
-
-<file path=ppt/slides/slide3.xml><?xml version="1.0" encoding="utf-8"?>
-<p:sld xmlns:a="http://schemas.openxmlformats.org/drawingml/2006/main" xmlns:r="http://schemas.openxmlformats.org/officeDocument/2006/relationships" xmlns:p="http://schemas.openxmlformats.org/presentationml/2006/main">
-  <p:cSld>
-    <p:spTree>
-      <p:nvGrpSpPr>
-        <p:cNvPr id="1" name="">
-          <a:extLst>
-            <a:ext uri="{FF2B5EF4-FFF2-40B4-BE49-F238E27FC236}">
-              <a16:creationId xmlns:a16="http://schemas.microsoft.com/office/drawing/2014/main" id="{43EB92B7-EBBB-29B1-D2DF-A9F3C5FCA28C}"/>
-            </a:ext>
-          </a:extLst>
-        </p:cNvPr>
-        <p:cNvGrpSpPr/>
-        <p:nvPr/>
-      </p:nvGrpSpPr>
-      <p:grpSpPr>
-        <a:xfrm>
-          <a:off x="0" y="0"/>
-          <a:ext cx="0" cy="0"/>
-          <a:chOff x="0" y="0"/>
-          <a:chExt cx="0" cy="0"/>
-        </a:xfrm>
-      </p:grpSpPr>
-      <p:sp>
-        <p:nvSpPr>
-          <p:cNvPr id="3" name="Title 2">
-            <a:extLst>
-              <a:ext uri="{FF2B5EF4-FFF2-40B4-BE49-F238E27FC236}">
-                <a16:creationId xmlns:a16="http://schemas.microsoft.com/office/drawing/2014/main" id="{3435802E-CA5A-8ED3-1E31-A1B56D91934B}"/>
-              </a:ext>
-            </a:extLst>
-          </p:cNvPr>
-          <p:cNvSpPr>
-            <a:spLocks noGrp="1"/>
-          </p:cNvSpPr>
-          <p:nvPr>
-            <p:ph type="title"/>
-          </p:nvPr>
-        </p:nvSpPr>
-        <p:spPr/>
-        <p:txBody>
-          <a:bodyPr>
-            <a:normAutofit/>
-          </a:bodyPr>
-          <a:lstStyle/>
-          <a:p>
-            <a:r>
-              <a:rPr lang="en-US" dirty="0"/>
-              <a:t>Book cover</a:t>
-            </a:r>
-          </a:p>
-        </p:txBody>
-      </p:sp>
-      <p:sp>
-        <p:nvSpPr>
-          <p:cNvPr id="4" name="Text Placeholder 3">
-            <a:extLst>
-              <a:ext uri="{FF2B5EF4-FFF2-40B4-BE49-F238E27FC236}">
-                <a16:creationId xmlns:a16="http://schemas.microsoft.com/office/drawing/2014/main" id="{FB27AA5F-D60F-AD07-0D15-90F766B21BF7}"/>
-              </a:ext>
-            </a:extLst>
-          </p:cNvPr>
-          <p:cNvSpPr>
-            <a:spLocks noGrp="1"/>
-          </p:cNvSpPr>
-          <p:nvPr>
-            <p:ph type="body" sz="quarter" idx="10"/>
-          </p:nvPr>
-        </p:nvSpPr>
-        <p:spPr/>
-        <p:txBody>
-          <a:bodyPr/>
-          <a:lstStyle/>
-          <a:p>
-            <a:r>
-              <a:rPr lang="en-US" dirty="0"/>
-              <a:t>The Agentic </a:t>
-            </a:r>
-            <a:r>
-              <a:rPr lang="en-US" dirty="0" err="1"/>
-              <a:t>Organisation</a:t>
-            </a:r>
-            <a:endParaRPr lang="en-US" dirty="0"/>
-          </a:p>
-        </p:txBody>
-      </p:sp>
-      <p:pic>
-        <p:nvPicPr>
-          <p:cNvPr id="20" name="Afbeelding 19" descr="Afbeelding met schoeisel, kleding, person, persoon&#10;&#10;Door AI gegenereerde inhoud is mogelijk onjuist.">
-            <a:extLst>
-              <a:ext uri="{FF2B5EF4-FFF2-40B4-BE49-F238E27FC236}">
-                <a16:creationId xmlns:a16="http://schemas.microsoft.com/office/drawing/2014/main" id="{131CC11A-5448-A817-E1C6-68413F845848}"/>
-              </a:ext>
-            </a:extLst>
-          </p:cNvPr>
-          <p:cNvPicPr>
-            <a:picLocks noChangeAspect="1"/>
-          </p:cNvPicPr>
-          <p:nvPr/>
-        </p:nvPicPr>
-        <p:blipFill>
-          <a:blip r:embed="rId3">
-            <a:extLst>
-              <a:ext uri="{28A0092B-C50C-407E-A947-70E740481C1C}">
-                <a14:useLocalDpi xmlns:a14="http://schemas.microsoft.com/office/drawing/2010/main" val="0"/>
-              </a:ext>
-            </a:extLst>
-          </a:blip>
-          <a:stretch>
-            <a:fillRect/>
-          </a:stretch>
-        </p:blipFill>
-        <p:spPr>
-          <a:xfrm>
-            <a:off x="490538" y="1363851"/>
-            <a:ext cx="2903284" cy="4354926"/>
-          </a:xfrm>
-          <a:prstGeom prst="rect">
-            <a:avLst/>
-          </a:prstGeom>
-        </p:spPr>
-      </p:pic>
-      <p:sp>
-        <p:nvSpPr>
-          <p:cNvPr id="6" name="Tekstvak 5">
-            <a:extLst>
-              <a:ext uri="{FF2B5EF4-FFF2-40B4-BE49-F238E27FC236}">
-                <a16:creationId xmlns:a16="http://schemas.microsoft.com/office/drawing/2014/main" id="{011CADC5-0494-041A-23A1-8C77774988E9}"/>
-              </a:ext>
-            </a:extLst>
-          </p:cNvPr>
-          <p:cNvSpPr txBox="1"/>
-          <p:nvPr/>
-        </p:nvSpPr>
-        <p:spPr>
-          <a:xfrm>
-            <a:off x="504690" y="1450211"/>
-            <a:ext cx="2874980" cy="819199"/>
-          </a:xfrm>
-          <a:prstGeom prst="rect">
-            <a:avLst/>
-          </a:prstGeom>
-          <a:noFill/>
-          <a:effectLst/>
-        </p:spPr>
-        <p:txBody>
-          <a:bodyPr wrap="square" rtlCol="0">
-            <a:spAutoFit/>
-          </a:bodyPr>
-          <a:lstStyle/>
-          <a:p>
-            <a:pPr algn="ctr">
-              <a:lnSpc>
-                <a:spcPts val="2900"/>
-              </a:lnSpc>
-            </a:pPr>
-            <a:r>
-              <a:rPr lang="en-GB" sz="2400" b="1" dirty="0">
-                <a:solidFill>
-                  <a:srgbClr val="4B5B6B"/>
-                </a:solidFill>
-                <a:latin typeface="Montserrat" pitchFamily="2" charset="0"/>
-              </a:rPr>
-              <a:t>THE AGENTIC ORGANISATION</a:t>
-            </a:r>
-          </a:p>
-        </p:txBody>
-      </p:sp>
-      <p:sp>
-        <p:nvSpPr>
-          <p:cNvPr id="7" name="Tekstvak 6">
-            <a:extLst>
-              <a:ext uri="{FF2B5EF4-FFF2-40B4-BE49-F238E27FC236}">
-                <a16:creationId xmlns:a16="http://schemas.microsoft.com/office/drawing/2014/main" id="{2DE3A319-CEAC-921D-D6E0-4F2919039E15}"/>
-              </a:ext>
-            </a:extLst>
-          </p:cNvPr>
-          <p:cNvSpPr txBox="1"/>
-          <p:nvPr/>
-        </p:nvSpPr>
-        <p:spPr>
-          <a:xfrm>
-            <a:off x="504690" y="2173458"/>
-            <a:ext cx="2874980" cy="338554"/>
-          </a:xfrm>
-          <a:prstGeom prst="rect">
-            <a:avLst/>
-          </a:prstGeom>
-          <a:noFill/>
-          <a:effectLst/>
-        </p:spPr>
-        <p:txBody>
-          <a:bodyPr wrap="square" rtlCol="0">
-            <a:spAutoFit/>
-          </a:bodyPr>
-          <a:lstStyle/>
-          <a:p>
-            <a:pPr algn="ctr"/>
-            <a:r>
-              <a:rPr lang="en-GB" sz="800" dirty="0">
-                <a:solidFill>
-                  <a:srgbClr val="4B5B6B"/>
-                </a:solidFill>
-                <a:latin typeface="Montserrat" pitchFamily="2" charset="0"/>
-                <a:cs typeface="Segoe UI" panose="020B0502040204020203" pitchFamily="34" charset="0"/>
-              </a:rPr>
-              <a:t>A complete AI transformation </a:t>
-            </a:r>
-            <a:br>
-              <a:rPr lang="en-GB" sz="800" dirty="0">
-                <a:solidFill>
-                  <a:srgbClr val="4B5B6B"/>
-                </a:solidFill>
-                <a:latin typeface="Montserrat" pitchFamily="2" charset="0"/>
-                <a:cs typeface="Segoe UI" panose="020B0502040204020203" pitchFamily="34" charset="0"/>
-              </a:rPr>
-            </a:br>
-            <a:r>
-              <a:rPr lang="en-GB" sz="800" dirty="0">
-                <a:solidFill>
-                  <a:srgbClr val="4B5B6B"/>
-                </a:solidFill>
-                <a:latin typeface="Montserrat" pitchFamily="2" charset="0"/>
-                <a:cs typeface="Segoe UI" panose="020B0502040204020203" pitchFamily="34" charset="0"/>
-              </a:rPr>
-              <a:t>framework for European CEO's</a:t>
-            </a:r>
-          </a:p>
-        </p:txBody>
-      </p:sp>
-      <p:sp>
-        <p:nvSpPr>
-          <p:cNvPr id="2" name="Tekstvak 1">
-            <a:extLst>
-              <a:ext uri="{FF2B5EF4-FFF2-40B4-BE49-F238E27FC236}">
-                <a16:creationId xmlns:a16="http://schemas.microsoft.com/office/drawing/2014/main" id="{7A35202E-6D93-F357-54FA-5F2F03585E0B}"/>
-              </a:ext>
-            </a:extLst>
-          </p:cNvPr>
-          <p:cNvSpPr txBox="1"/>
-          <p:nvPr/>
-        </p:nvSpPr>
-        <p:spPr>
-          <a:xfrm>
-            <a:off x="1303223" y="5301295"/>
-            <a:ext cx="1277914" cy="246221"/>
-          </a:xfrm>
-          <a:prstGeom prst="rect">
-            <a:avLst/>
-          </a:prstGeom>
-          <a:noFill/>
-          <a:effectLst>
-            <a:outerShdw blurRad="12700" dist="12700" dir="2700000" algn="tl" rotWithShape="0">
-              <a:prstClr val="black">
-                <a:alpha val="16000"/>
-              </a:prstClr>
-            </a:outerShdw>
-          </a:effectLst>
-        </p:spPr>
-        <p:txBody>
-          <a:bodyPr wrap="none" rtlCol="0">
-            <a:spAutoFit/>
-          </a:bodyPr>
-          <a:lstStyle/>
-          <a:p>
-            <a:pPr algn="ctr"/>
-            <a:r>
-              <a:rPr lang="en-GB" sz="1000" dirty="0">
-                <a:solidFill>
-                  <a:schemeClr val="bg1"/>
-                </a:solidFill>
-                <a:latin typeface="Garamond" panose="02020404030301010803" pitchFamily="18" charset="0"/>
-              </a:rPr>
-              <a:t>Stephan Hartgers-Rus</a:t>
-            </a:r>
-          </a:p>
-        </p:txBody>
-      </p:sp>
-    </p:spTree>
-    <p:extLst>
-      <p:ext uri="{BB962C8B-B14F-4D97-AF65-F5344CB8AC3E}">
-        <p14:creationId xmlns:p14="http://schemas.microsoft.com/office/powerpoint/2010/main" val="2876593574"/>
       </p:ext>
     </p:extLst>
   </p:cSld>
@@ -7630,4 +9447,26 @@
     </a:ext>
   </a:extLst>
 </a:theme>
+</file>
+
+<file path=ppt/webextensions/taskpanes.xml><?xml version="1.0" encoding="utf-8"?>
+<wetp:taskpanes xmlns:wetp="http://schemas.microsoft.com/office/webextensions/taskpanes/2010/11">
+  <wetp:taskpane dockstate="right" visibility="0" width="438" row="0">
+    <wetp:webextensionref xmlns:r="http://schemas.openxmlformats.org/officeDocument/2006/relationships" r:id="rId1"/>
+  </wetp:taskpane>
+</wetp:taskpanes>
+</file>
+
+<file path=ppt/webextensions/webextension1.xml><?xml version="1.0" encoding="utf-8"?>
+<we:webextension xmlns:we="http://schemas.microsoft.com/office/webextensions/webextension/2010/11" id="{F536AF62-6CEC-4109-8F30-E79D17945B4A}">
+  <we:reference id="wa200010001" version="1.0.0.0" store="en-US" storeType="OMEX"/>
+  <we:alternateReferences>
+    <we:reference id="WA200010001" version="1.0.0.0" store="" storeType="OMEX"/>
+  </we:alternateReferences>
+  <we:properties>
+    <we:property name="Office.AutoShowTaskpaneWithDocument" value="true"/>
+  </we:properties>
+  <we:bindings/>
+  <we:snapshot xmlns:r="http://schemas.openxmlformats.org/officeDocument/2006/relationships"/>
+</we:webextension>
 </file>
--- a/input/AI Transformation framework for European CEO’s.pptx
+++ b/input/AI Transformation framework for European CEO’s.pptx
@@ -329,7 +329,7 @@
           <a:p>
             <a:fld id="{FAB7A3DB-122E-499C-AAFB-3D4665CBCADB}" type="datetimeFigureOut">
               <a:rPr lang="en-GB" smtClean="0"/>
-              <a:t>02/03/2026</a:t>
+              <a:t>03/03/2026</a:t>
             </a:fld>
             <a:endParaRPr lang="en-GB"/>
           </a:p>
@@ -1262,7 +1262,7 @@
           <a:p>
             <a:fld id="{7E530143-BC45-40DA-908E-84B30ACFDA34}" type="datetimeFigureOut">
               <a:rPr lang="en-GB" smtClean="0"/>
-              <a:t>02/03/2026</a:t>
+              <a:t>03/03/2026</a:t>
             </a:fld>
             <a:endParaRPr lang="en-GB"/>
           </a:p>
@@ -1462,7 +1462,7 @@
           <a:p>
             <a:fld id="{7E530143-BC45-40DA-908E-84B30ACFDA34}" type="datetimeFigureOut">
               <a:rPr lang="en-GB" smtClean="0"/>
-              <a:t>02/03/2026</a:t>
+              <a:t>03/03/2026</a:t>
             </a:fld>
             <a:endParaRPr lang="en-GB"/>
           </a:p>
@@ -1672,7 +1672,7 @@
           <a:p>
             <a:fld id="{7E530143-BC45-40DA-908E-84B30ACFDA34}" type="datetimeFigureOut">
               <a:rPr lang="en-GB" smtClean="0"/>
-              <a:t>02/03/2026</a:t>
+              <a:t>03/03/2026</a:t>
             </a:fld>
             <a:endParaRPr lang="en-GB"/>
           </a:p>
@@ -2296,7 +2296,7 @@
           <a:p>
             <a:fld id="{7E530143-BC45-40DA-908E-84B30ACFDA34}" type="datetimeFigureOut">
               <a:rPr lang="en-GB" smtClean="0"/>
-              <a:t>02/03/2026</a:t>
+              <a:t>03/03/2026</a:t>
             </a:fld>
             <a:endParaRPr lang="en-GB"/>
           </a:p>
@@ -2572,7 +2572,7 @@
           <a:p>
             <a:fld id="{7E530143-BC45-40DA-908E-84B30ACFDA34}" type="datetimeFigureOut">
               <a:rPr lang="en-GB" smtClean="0"/>
-              <a:t>02/03/2026</a:t>
+              <a:t>03/03/2026</a:t>
             </a:fld>
             <a:endParaRPr lang="en-GB"/>
           </a:p>
@@ -2840,7 +2840,7 @@
           <a:p>
             <a:fld id="{7E530143-BC45-40DA-908E-84B30ACFDA34}" type="datetimeFigureOut">
               <a:rPr lang="en-GB" smtClean="0"/>
-              <a:t>02/03/2026</a:t>
+              <a:t>03/03/2026</a:t>
             </a:fld>
             <a:endParaRPr lang="en-GB"/>
           </a:p>
@@ -3255,7 +3255,7 @@
           <a:p>
             <a:fld id="{7E530143-BC45-40DA-908E-84B30ACFDA34}" type="datetimeFigureOut">
               <a:rPr lang="en-GB" smtClean="0"/>
-              <a:t>02/03/2026</a:t>
+              <a:t>03/03/2026</a:t>
             </a:fld>
             <a:endParaRPr lang="en-GB"/>
           </a:p>
@@ -3397,7 +3397,7 @@
           <a:p>
             <a:fld id="{7E530143-BC45-40DA-908E-84B30ACFDA34}" type="datetimeFigureOut">
               <a:rPr lang="en-GB" smtClean="0"/>
-              <a:t>02/03/2026</a:t>
+              <a:t>03/03/2026</a:t>
             </a:fld>
             <a:endParaRPr lang="en-GB"/>
           </a:p>
@@ -3510,7 +3510,7 @@
           <a:p>
             <a:fld id="{7E530143-BC45-40DA-908E-84B30ACFDA34}" type="datetimeFigureOut">
               <a:rPr lang="en-GB" smtClean="0"/>
-              <a:t>02/03/2026</a:t>
+              <a:t>03/03/2026</a:t>
             </a:fld>
             <a:endParaRPr lang="en-GB"/>
           </a:p>
@@ -3823,7 +3823,7 @@
           <a:p>
             <a:fld id="{7E530143-BC45-40DA-908E-84B30ACFDA34}" type="datetimeFigureOut">
               <a:rPr lang="en-GB" smtClean="0"/>
-              <a:t>02/03/2026</a:t>
+              <a:t>03/03/2026</a:t>
             </a:fld>
             <a:endParaRPr lang="en-GB"/>
           </a:p>
@@ -4112,7 +4112,7 @@
           <a:p>
             <a:fld id="{7E530143-BC45-40DA-908E-84B30ACFDA34}" type="datetimeFigureOut">
               <a:rPr lang="en-GB" smtClean="0"/>
-              <a:t>02/03/2026</a:t>
+              <a:t>03/03/2026</a:t>
             </a:fld>
             <a:endParaRPr lang="en-GB"/>
           </a:p>
@@ -4355,7 +4355,7 @@
           <a:p>
             <a:fld id="{7E530143-BC45-40DA-908E-84B30ACFDA34}" type="datetimeFigureOut">
               <a:rPr lang="en-GB" smtClean="0"/>
-              <a:t>02/03/2026</a:t>
+              <a:t>03/03/2026</a:t>
             </a:fld>
             <a:endParaRPr lang="en-GB"/>
           </a:p>
@@ -5212,7 +5212,7 @@
         <p:spPr>
           <a:xfrm>
             <a:off x="4169500" y="3167952"/>
-            <a:ext cx="7206711" cy="1169551"/>
+            <a:ext cx="7206711" cy="954107"/>
           </a:xfrm>
           <a:prstGeom prst="rect">
             <a:avLst/>
@@ -5227,14 +5227,14 @@
           <a:p>
             <a:r>
               <a:rPr lang="en-GB" sz="1400" dirty="0">
-                <a:latin typeface="Gill Sans Nova" panose="020B0602020104020203" pitchFamily="34" charset="0"/>
+                <a:latin typeface="Garamond" panose="02020404030301010803" pitchFamily="18" charset="0"/>
               </a:rPr>
               <a:t>European businesses are dangerously underprepared for the largest paradigm shift since the industrial revolution. This book is the definitive guide to AI transformation—a practical guidebook for CEOs and leadership teams to benefit from the opportunities AI provides, set in the European context.</a:t>
             </a:r>
           </a:p>
           <a:p>
             <a:endParaRPr lang="en-GB" sz="1400" dirty="0">
-              <a:latin typeface="Gill Sans Nova" panose="020B0602020104020203" pitchFamily="34" charset="0"/>
+              <a:latin typeface="Garamond" panose="02020404030301010803" pitchFamily="18" charset="0"/>
             </a:endParaRPr>
           </a:p>
         </p:txBody>
@@ -9451,7 +9451,7 @@
 
 <file path=ppt/webextensions/taskpanes.xml><?xml version="1.0" encoding="utf-8"?>
 <wetp:taskpanes xmlns:wetp="http://schemas.microsoft.com/office/webextensions/taskpanes/2010/11">
-  <wetp:taskpane dockstate="right" visibility="0" width="438" row="0">
+  <wetp:taskpane dockstate="right" visibility="0" width="438" row="1">
     <wetp:webextensionref xmlns:r="http://schemas.openxmlformats.org/officeDocument/2006/relationships" r:id="rId1"/>
   </wetp:taskpane>
 </wetp:taskpanes>

--- a/input/AI Transformation framework for European CEO’s.pptx
+++ b/input/AI Transformation framework for European CEO’s.pptx
@@ -5,14 +5,15 @@
     <p:sldMasterId id="2147483648" r:id="rId1"/>
   </p:sldMasterIdLst>
   <p:notesMasterIdLst>
-    <p:notesMasterId r:id="rId7"/>
+    <p:notesMasterId r:id="rId8"/>
   </p:notesMasterIdLst>
   <p:sldIdLst>
     <p:sldId id="2147480368" r:id="rId2"/>
     <p:sldId id="2147480366" r:id="rId3"/>
-    <p:sldId id="2147480372" r:id="rId4"/>
-    <p:sldId id="2147480380" r:id="rId5"/>
-    <p:sldId id="2147480367" r:id="rId6"/>
+    <p:sldId id="2147480381" r:id="rId4"/>
+    <p:sldId id="2147480372" r:id="rId5"/>
+    <p:sldId id="2147480380" r:id="rId6"/>
+    <p:sldId id="2147480367" r:id="rId7"/>
   </p:sldIdLst>
   <p:sldSz cx="12192000" cy="6858000"/>
   <p:notesSz cx="6858000" cy="9144000"/>
@@ -329,7 +330,7 @@
           <a:p>
             <a:fld id="{FAB7A3DB-122E-499C-AAFB-3D4665CBCADB}" type="datetimeFigureOut">
               <a:rPr lang="en-GB" smtClean="0"/>
-              <a:t>03/03/2026</a:t>
+              <a:t>04/03/2026</a:t>
             </a:fld>
             <a:endParaRPr lang="en-GB"/>
           </a:p>
@@ -797,6 +798,114 @@
         <p:cNvPr id="1" name="">
           <a:extLst>
             <a:ext uri="{FF2B5EF4-FFF2-40B4-BE49-F238E27FC236}">
+              <a16:creationId xmlns:a16="http://schemas.microsoft.com/office/drawing/2014/main" id="{A31AC376-0B55-5161-24EA-87A450FE7725}"/>
+            </a:ext>
+          </a:extLst>
+        </p:cNvPr>
+        <p:cNvGrpSpPr/>
+        <p:nvPr/>
+      </p:nvGrpSpPr>
+      <p:grpSpPr>
+        <a:xfrm>
+          <a:off x="0" y="0"/>
+          <a:ext cx="0" cy="0"/>
+          <a:chOff x="0" y="0"/>
+          <a:chExt cx="0" cy="0"/>
+        </a:xfrm>
+      </p:grpSpPr>
+      <p:sp>
+        <p:nvSpPr>
+          <p:cNvPr id="2" name="Slide Image Placeholder 1">
+            <a:extLst>
+              <a:ext uri="{FF2B5EF4-FFF2-40B4-BE49-F238E27FC236}">
+                <a16:creationId xmlns:a16="http://schemas.microsoft.com/office/drawing/2014/main" id="{56E9BA99-8135-2F6E-375A-A84D7D90D551}"/>
+              </a:ext>
+            </a:extLst>
+          </p:cNvPr>
+          <p:cNvSpPr>
+            <a:spLocks noGrp="1" noRot="1" noChangeAspect="1"/>
+          </p:cNvSpPr>
+          <p:nvPr>
+            <p:ph type="sldImg"/>
+          </p:nvPr>
+        </p:nvSpPr>
+        <p:spPr/>
+      </p:sp>
+      <p:sp>
+        <p:nvSpPr>
+          <p:cNvPr id="3" name="Notes Placeholder 2">
+            <a:extLst>
+              <a:ext uri="{FF2B5EF4-FFF2-40B4-BE49-F238E27FC236}">
+                <a16:creationId xmlns:a16="http://schemas.microsoft.com/office/drawing/2014/main" id="{A2267A88-4BCC-2B98-B9CC-259BB3226B82}"/>
+              </a:ext>
+            </a:extLst>
+          </p:cNvPr>
+          <p:cNvSpPr>
+            <a:spLocks noGrp="1"/>
+          </p:cNvSpPr>
+          <p:nvPr>
+            <p:ph type="body" idx="1"/>
+          </p:nvPr>
+        </p:nvSpPr>
+        <p:spPr/>
+        <p:txBody>
+          <a:bodyPr/>
+          <a:lstStyle/>
+          <a:p>
+            <a:endParaRPr lang="en-GB"/>
+          </a:p>
+        </p:txBody>
+      </p:sp>
+      <p:sp>
+        <p:nvSpPr>
+          <p:cNvPr id="4" name="Slide Number Placeholder 3">
+            <a:extLst>
+              <a:ext uri="{FF2B5EF4-FFF2-40B4-BE49-F238E27FC236}">
+                <a16:creationId xmlns:a16="http://schemas.microsoft.com/office/drawing/2014/main" id="{5644C475-3E9F-6FD3-3AF7-C3192FEF35AD}"/>
+              </a:ext>
+            </a:extLst>
+          </p:cNvPr>
+          <p:cNvSpPr>
+            <a:spLocks noGrp="1"/>
+          </p:cNvSpPr>
+          <p:nvPr>
+            <p:ph type="sldNum" sz="quarter" idx="5"/>
+          </p:nvPr>
+        </p:nvSpPr>
+        <p:spPr/>
+        <p:txBody>
+          <a:bodyPr/>
+          <a:lstStyle/>
+          <a:p>
+            <a:fld id="{BA1AFD66-2597-4960-86E3-D00E2B43A69D}" type="slidenum">
+              <a:rPr lang="en-GB" smtClean="0"/>
+              <a:t>3</a:t>
+            </a:fld>
+            <a:endParaRPr lang="en-GB"/>
+          </a:p>
+        </p:txBody>
+      </p:sp>
+    </p:spTree>
+    <p:extLst>
+      <p:ext uri="{BB962C8B-B14F-4D97-AF65-F5344CB8AC3E}">
+        <p14:creationId xmlns:p14="http://schemas.microsoft.com/office/powerpoint/2010/main" val="1070962077"/>
+      </p:ext>
+    </p:extLst>
+  </p:cSld>
+  <p:clrMapOvr>
+    <a:masterClrMapping/>
+  </p:clrMapOvr>
+</p:notes>
+</file>
+
+<file path=ppt/notesSlides/notesSlide4.xml><?xml version="1.0" encoding="utf-8"?>
+<p:notes xmlns:a="http://schemas.openxmlformats.org/drawingml/2006/main" xmlns:r="http://schemas.openxmlformats.org/officeDocument/2006/relationships" xmlns:p="http://schemas.openxmlformats.org/presentationml/2006/main">
+  <p:cSld>
+    <p:spTree>
+      <p:nvGrpSpPr>
+        <p:cNvPr id="1" name="">
+          <a:extLst>
+            <a:ext uri="{FF2B5EF4-FFF2-40B4-BE49-F238E27FC236}">
               <a16:creationId xmlns:a16="http://schemas.microsoft.com/office/drawing/2014/main" id="{9ACE62BF-62B2-82DC-C376-73CE77938791}"/>
             </a:ext>
           </a:extLst>
@@ -878,7 +987,7 @@
           <a:p>
             <a:fld id="{BA1AFD66-2597-4960-86E3-D00E2B43A69D}" type="slidenum">
               <a:rPr lang="en-GB" smtClean="0"/>
-              <a:t>3</a:t>
+              <a:t>4</a:t>
             </a:fld>
             <a:endParaRPr lang="en-GB"/>
           </a:p>
@@ -897,7 +1006,7 @@
 </p:notes>
 </file>
 
-<file path=ppt/notesSlides/notesSlide4.xml><?xml version="1.0" encoding="utf-8"?>
+<file path=ppt/notesSlides/notesSlide5.xml><?xml version="1.0" encoding="utf-8"?>
 <p:notes xmlns:a="http://schemas.openxmlformats.org/drawingml/2006/main" xmlns:r="http://schemas.openxmlformats.org/officeDocument/2006/relationships" xmlns:p="http://schemas.openxmlformats.org/presentationml/2006/main">
   <p:cSld>
     <p:spTree>
@@ -986,7 +1095,7 @@
           <a:p>
             <a:fld id="{BA1AFD66-2597-4960-86E3-D00E2B43A69D}" type="slidenum">
               <a:rPr lang="en-GB" smtClean="0"/>
-              <a:t>4</a:t>
+              <a:t>5</a:t>
             </a:fld>
             <a:endParaRPr lang="en-GB"/>
           </a:p>
@@ -1005,7 +1114,7 @@
 </p:notes>
 </file>
 
-<file path=ppt/notesSlides/notesSlide5.xml><?xml version="1.0" encoding="utf-8"?>
+<file path=ppt/notesSlides/notesSlide6.xml><?xml version="1.0" encoding="utf-8"?>
 <p:notes xmlns:a="http://schemas.openxmlformats.org/drawingml/2006/main" xmlns:r="http://schemas.openxmlformats.org/officeDocument/2006/relationships" xmlns:p="http://schemas.openxmlformats.org/presentationml/2006/main">
   <p:cSld>
     <p:spTree>
@@ -1094,7 +1203,7 @@
           <a:p>
             <a:fld id="{BA1AFD66-2597-4960-86E3-D00E2B43A69D}" type="slidenum">
               <a:rPr lang="en-GB" smtClean="0"/>
-              <a:t>5</a:t>
+              <a:t>6</a:t>
             </a:fld>
             <a:endParaRPr lang="en-GB"/>
           </a:p>
@@ -1262,7 +1371,7 @@
           <a:p>
             <a:fld id="{7E530143-BC45-40DA-908E-84B30ACFDA34}" type="datetimeFigureOut">
               <a:rPr lang="en-GB" smtClean="0"/>
-              <a:t>03/03/2026</a:t>
+              <a:t>04/03/2026</a:t>
             </a:fld>
             <a:endParaRPr lang="en-GB"/>
           </a:p>
@@ -1462,7 +1571,7 @@
           <a:p>
             <a:fld id="{7E530143-BC45-40DA-908E-84B30ACFDA34}" type="datetimeFigureOut">
               <a:rPr lang="en-GB" smtClean="0"/>
-              <a:t>03/03/2026</a:t>
+              <a:t>04/03/2026</a:t>
             </a:fld>
             <a:endParaRPr lang="en-GB"/>
           </a:p>
@@ -1672,7 +1781,7 @@
           <a:p>
             <a:fld id="{7E530143-BC45-40DA-908E-84B30ACFDA34}" type="datetimeFigureOut">
               <a:rPr lang="en-GB" smtClean="0"/>
-              <a:t>03/03/2026</a:t>
+              <a:t>04/03/2026</a:t>
             </a:fld>
             <a:endParaRPr lang="en-GB"/>
           </a:p>
@@ -2296,7 +2405,7 @@
           <a:p>
             <a:fld id="{7E530143-BC45-40DA-908E-84B30ACFDA34}" type="datetimeFigureOut">
               <a:rPr lang="en-GB" smtClean="0"/>
-              <a:t>03/03/2026</a:t>
+              <a:t>04/03/2026</a:t>
             </a:fld>
             <a:endParaRPr lang="en-GB"/>
           </a:p>
@@ -2572,7 +2681,7 @@
           <a:p>
             <a:fld id="{7E530143-BC45-40DA-908E-84B30ACFDA34}" type="datetimeFigureOut">
               <a:rPr lang="en-GB" smtClean="0"/>
-              <a:t>03/03/2026</a:t>
+              <a:t>04/03/2026</a:t>
             </a:fld>
             <a:endParaRPr lang="en-GB"/>
           </a:p>
@@ -2840,7 +2949,7 @@
           <a:p>
             <a:fld id="{7E530143-BC45-40DA-908E-84B30ACFDA34}" type="datetimeFigureOut">
               <a:rPr lang="en-GB" smtClean="0"/>
-              <a:t>03/03/2026</a:t>
+              <a:t>04/03/2026</a:t>
             </a:fld>
             <a:endParaRPr lang="en-GB"/>
           </a:p>
@@ -3255,7 +3364,7 @@
           <a:p>
             <a:fld id="{7E530143-BC45-40DA-908E-84B30ACFDA34}" type="datetimeFigureOut">
               <a:rPr lang="en-GB" smtClean="0"/>
-              <a:t>03/03/2026</a:t>
+              <a:t>04/03/2026</a:t>
             </a:fld>
             <a:endParaRPr lang="en-GB"/>
           </a:p>
@@ -3397,7 +3506,7 @@
           <a:p>
             <a:fld id="{7E530143-BC45-40DA-908E-84B30ACFDA34}" type="datetimeFigureOut">
               <a:rPr lang="en-GB" smtClean="0"/>
-              <a:t>03/03/2026</a:t>
+              <a:t>04/03/2026</a:t>
             </a:fld>
             <a:endParaRPr lang="en-GB"/>
           </a:p>
@@ -3510,7 +3619,7 @@
           <a:p>
             <a:fld id="{7E530143-BC45-40DA-908E-84B30ACFDA34}" type="datetimeFigureOut">
               <a:rPr lang="en-GB" smtClean="0"/>
-              <a:t>03/03/2026</a:t>
+              <a:t>04/03/2026</a:t>
             </a:fld>
             <a:endParaRPr lang="en-GB"/>
           </a:p>
@@ -3823,7 +3932,7 @@
           <a:p>
             <a:fld id="{7E530143-BC45-40DA-908E-84B30ACFDA34}" type="datetimeFigureOut">
               <a:rPr lang="en-GB" smtClean="0"/>
-              <a:t>03/03/2026</a:t>
+              <a:t>04/03/2026</a:t>
             </a:fld>
             <a:endParaRPr lang="en-GB"/>
           </a:p>
@@ -4112,7 +4221,7 @@
           <a:p>
             <a:fld id="{7E530143-BC45-40DA-908E-84B30ACFDA34}" type="datetimeFigureOut">
               <a:rPr lang="en-GB" smtClean="0"/>
-              <a:t>03/03/2026</a:t>
+              <a:t>04/03/2026</a:t>
             </a:fld>
             <a:endParaRPr lang="en-GB"/>
           </a:p>
@@ -4355,7 +4464,7 @@
           <a:p>
             <a:fld id="{7E530143-BC45-40DA-908E-84B30ACFDA34}" type="datetimeFigureOut">
               <a:rPr lang="en-GB" smtClean="0"/>
-              <a:t>03/03/2026</a:t>
+              <a:t>04/03/2026</a:t>
             </a:fld>
             <a:endParaRPr lang="en-GB"/>
           </a:p>
@@ -5329,6 +5438,1426 @@
         </p:nvSpPr>
         <p:spPr>
           <a:xfrm>
+            <a:off x="1947040" y="424491"/>
+            <a:ext cx="8442435" cy="4690889"/>
+          </a:xfrm>
+          <a:prstGeom prst="rect">
+            <a:avLst/>
+          </a:prstGeom>
+          <a:solidFill>
+            <a:schemeClr val="bg1"/>
+          </a:solidFill>
+          <a:ln>
+            <a:noFill/>
+          </a:ln>
+        </p:spPr>
+        <p:style>
+          <a:lnRef idx="2">
+            <a:schemeClr val="accent1">
+              <a:shade val="15000"/>
+            </a:schemeClr>
+          </a:lnRef>
+          <a:fillRef idx="1">
+            <a:schemeClr val="accent1"/>
+          </a:fillRef>
+          <a:effectRef idx="0">
+            <a:schemeClr val="accent1"/>
+          </a:effectRef>
+          <a:fontRef idx="minor">
+            <a:schemeClr val="lt1"/>
+          </a:fontRef>
+        </p:style>
+        <p:txBody>
+          <a:bodyPr rtlCol="0" anchor="ctr"/>
+          <a:lstStyle/>
+          <a:p>
+            <a:pPr algn="ctr"/>
+            <a:endParaRPr lang="en-GB" dirty="0"/>
+          </a:p>
+        </p:txBody>
+      </p:sp>
+      <p:sp>
+        <p:nvSpPr>
+          <p:cNvPr id="3" name="Title 2">
+            <a:extLst>
+              <a:ext uri="{FF2B5EF4-FFF2-40B4-BE49-F238E27FC236}">
+                <a16:creationId xmlns:a16="http://schemas.microsoft.com/office/drawing/2014/main" id="{B3A34B42-FB4F-0FAB-9E0C-B9D4240D7263}"/>
+              </a:ext>
+            </a:extLst>
+          </p:cNvPr>
+          <p:cNvSpPr>
+            <a:spLocks noGrp="1"/>
+          </p:cNvSpPr>
+          <p:nvPr>
+            <p:ph type="title"/>
+          </p:nvPr>
+        </p:nvSpPr>
+        <p:spPr>
+          <a:xfrm>
+            <a:off x="3284220" y="629113"/>
+            <a:ext cx="5623560" cy="360099"/>
+          </a:xfrm>
+        </p:spPr>
+        <p:txBody>
+          <a:bodyPr>
+            <a:normAutofit fontScale="90000"/>
+          </a:bodyPr>
+          <a:lstStyle/>
+          <a:p>
+            <a:pPr algn="ctr"/>
+            <a:r>
+              <a:rPr lang="en-GB" noProof="0" dirty="0">
+                <a:solidFill>
+                  <a:schemeClr val="tx1">
+                    <a:lumMod val="85000"/>
+                    <a:lumOff val="15000"/>
+                  </a:schemeClr>
+                </a:solidFill>
+              </a:rPr>
+              <a:t>Agentic systems scale with task complexity</a:t>
+            </a:r>
+          </a:p>
+        </p:txBody>
+      </p:sp>
+      <p:grpSp>
+        <p:nvGrpSpPr>
+          <p:cNvPr id="51" name="Groep 50">
+            <a:extLst>
+              <a:ext uri="{FF2B5EF4-FFF2-40B4-BE49-F238E27FC236}">
+                <a16:creationId xmlns:a16="http://schemas.microsoft.com/office/drawing/2014/main" id="{1FC40DF5-F758-045D-0665-BE46FB1FB96B}"/>
+              </a:ext>
+            </a:extLst>
+          </p:cNvPr>
+          <p:cNvGrpSpPr/>
+          <p:nvPr/>
+        </p:nvGrpSpPr>
+        <p:grpSpPr>
+          <a:xfrm>
+            <a:off x="2238181" y="1664694"/>
+            <a:ext cx="7860151" cy="2917691"/>
+            <a:chOff x="2238181" y="1664694"/>
+            <a:chExt cx="7860151" cy="2917691"/>
+          </a:xfrm>
+        </p:grpSpPr>
+        <p:pic>
+          <p:nvPicPr>
+            <p:cNvPr id="1026" name="Picture 2" descr="Geen ALT-tekst opgegeven voor deze afbeelding">
+              <a:extLst>
+                <a:ext uri="{FF2B5EF4-FFF2-40B4-BE49-F238E27FC236}">
+                  <a16:creationId xmlns:a16="http://schemas.microsoft.com/office/drawing/2014/main" id="{BE962BD8-FFF4-D3DC-1C7C-18B0CFA0E27E}"/>
+                </a:ext>
+              </a:extLst>
+            </p:cNvPr>
+            <p:cNvPicPr>
+              <a:picLocks noChangeAspect="1" noChangeArrowheads="1"/>
+            </p:cNvPicPr>
+            <p:nvPr/>
+          </p:nvPicPr>
+          <p:blipFill rotWithShape="1">
+            <a:blip r:embed="rId3">
+              <a:clrChange>
+                <a:clrFrom>
+                  <a:srgbClr val="F0F4FD"/>
+                </a:clrFrom>
+                <a:clrTo>
+                  <a:srgbClr val="F0F4FD">
+                    <a:alpha val="0"/>
+                  </a:srgbClr>
+                </a:clrTo>
+              </a:clrChange>
+              <a:grayscl/>
+              <a:extLst>
+                <a:ext uri="{28A0092B-C50C-407E-A947-70E740481C1C}">
+                  <a14:useLocalDpi xmlns:a14="http://schemas.microsoft.com/office/drawing/2010/main" val="0"/>
+                </a:ext>
+              </a:extLst>
+            </a:blip>
+            <a:srcRect l="72429" t="45111" r="17782" b="46173"/>
+            <a:stretch>
+              <a:fillRect/>
+            </a:stretch>
+          </p:blipFill>
+          <p:spPr bwMode="auto">
+            <a:xfrm>
+              <a:off x="8617054" y="2555681"/>
+              <a:ext cx="1006998" cy="597726"/>
+            </a:xfrm>
+            <a:prstGeom prst="rect">
+              <a:avLst/>
+            </a:prstGeom>
+            <a:noFill/>
+            <a:extLst>
+              <a:ext uri="{909E8E84-426E-40DD-AFC4-6F175D3DCCD1}">
+                <a14:hiddenFill xmlns:a14="http://schemas.microsoft.com/office/drawing/2010/main">
+                  <a:solidFill>
+                    <a:srgbClr val="FFFFFF"/>
+                  </a:solidFill>
+                </a14:hiddenFill>
+              </a:ext>
+            </a:extLst>
+          </p:spPr>
+        </p:pic>
+        <p:grpSp>
+          <p:nvGrpSpPr>
+            <p:cNvPr id="50" name="Groep 49">
+              <a:extLst>
+                <a:ext uri="{FF2B5EF4-FFF2-40B4-BE49-F238E27FC236}">
+                  <a16:creationId xmlns:a16="http://schemas.microsoft.com/office/drawing/2014/main" id="{11553B2F-71BA-6680-A5C5-C65FDE5798C4}"/>
+                </a:ext>
+              </a:extLst>
+            </p:cNvPr>
+            <p:cNvGrpSpPr/>
+            <p:nvPr/>
+          </p:nvGrpSpPr>
+          <p:grpSpPr>
+            <a:xfrm>
+              <a:off x="2238181" y="2608884"/>
+              <a:ext cx="1872927" cy="1973501"/>
+              <a:chOff x="2238181" y="2608884"/>
+              <a:chExt cx="1872927" cy="1973501"/>
+            </a:xfrm>
+          </p:grpSpPr>
+          <p:sp>
+            <p:nvSpPr>
+              <p:cNvPr id="6" name="Tekstvak 5">
+                <a:extLst>
+                  <a:ext uri="{FF2B5EF4-FFF2-40B4-BE49-F238E27FC236}">
+                    <a16:creationId xmlns:a16="http://schemas.microsoft.com/office/drawing/2014/main" id="{B7BC8CD5-8290-7BF8-0563-0B5D354C08B9}"/>
+                  </a:ext>
+                </a:extLst>
+              </p:cNvPr>
+              <p:cNvSpPr txBox="1"/>
+              <p:nvPr/>
+            </p:nvSpPr>
+            <p:spPr>
+              <a:xfrm>
+                <a:off x="2238181" y="3924904"/>
+                <a:ext cx="1872925" cy="507831"/>
+              </a:xfrm>
+              <a:prstGeom prst="rect">
+                <a:avLst/>
+              </a:prstGeom>
+              <a:noFill/>
+            </p:spPr>
+            <p:txBody>
+              <a:bodyPr wrap="square" lIns="90000" rIns="36000" rtlCol="0">
+                <a:spAutoFit/>
+              </a:bodyPr>
+              <a:lstStyle/>
+              <a:p>
+                <a:pPr marL="92075" indent="-92075">
+                  <a:spcAft>
+                    <a:spcPts val="600"/>
+                  </a:spcAft>
+                  <a:buFont typeface="Arial" panose="020B0604020202020204" pitchFamily="34" charset="0"/>
+                  <a:buChar char="•"/>
+                </a:pPr>
+                <a:r>
+                  <a:rPr lang="en-GB" sz="1100" dirty="0">
+                    <a:solidFill>
+                      <a:schemeClr val="tx1">
+                        <a:lumMod val="85000"/>
+                        <a:lumOff val="15000"/>
+                      </a:schemeClr>
+                    </a:solidFill>
+                    <a:latin typeface="+mj-lt"/>
+                  </a:rPr>
+                  <a:t>Agents assist individuals</a:t>
+                </a:r>
+              </a:p>
+              <a:p>
+                <a:pPr marL="92075" indent="-92075">
+                  <a:spcAft>
+                    <a:spcPts val="600"/>
+                  </a:spcAft>
+                  <a:buFont typeface="Arial" panose="020B0604020202020204" pitchFamily="34" charset="0"/>
+                  <a:buChar char="•"/>
+                </a:pPr>
+                <a:r>
+                  <a:rPr lang="en-GB" sz="1100" dirty="0">
+                    <a:solidFill>
+                      <a:schemeClr val="tx1">
+                        <a:lumMod val="85000"/>
+                        <a:lumOff val="15000"/>
+                      </a:schemeClr>
+                    </a:solidFill>
+                    <a:latin typeface="+mj-lt"/>
+                  </a:rPr>
+                  <a:t>Improve personal tasks</a:t>
+                </a:r>
+              </a:p>
+            </p:txBody>
+          </p:sp>
+          <p:sp>
+            <p:nvSpPr>
+              <p:cNvPr id="9" name="Rechthoek: afgeronde bovenhoeken 8">
+                <a:extLst>
+                  <a:ext uri="{FF2B5EF4-FFF2-40B4-BE49-F238E27FC236}">
+                    <a16:creationId xmlns:a16="http://schemas.microsoft.com/office/drawing/2014/main" id="{47A8ACC6-4D65-0098-F12F-198B6EC32731}"/>
+                  </a:ext>
+                </a:extLst>
+              </p:cNvPr>
+              <p:cNvSpPr/>
+              <p:nvPr/>
+            </p:nvSpPr>
+            <p:spPr>
+              <a:xfrm>
+                <a:off x="2238182" y="2608884"/>
+                <a:ext cx="1872926" cy="626416"/>
+              </a:xfrm>
+              <a:prstGeom prst="round2SameRect">
+                <a:avLst>
+                  <a:gd name="adj1" fmla="val 24049"/>
+                  <a:gd name="adj2" fmla="val 0"/>
+                </a:avLst>
+              </a:prstGeom>
+              <a:solidFill>
+                <a:schemeClr val="tx1">
+                  <a:lumMod val="85000"/>
+                  <a:lumOff val="15000"/>
+                </a:schemeClr>
+              </a:solidFill>
+              <a:ln>
+                <a:noFill/>
+              </a:ln>
+            </p:spPr>
+            <p:style>
+              <a:lnRef idx="2">
+                <a:schemeClr val="accent1">
+                  <a:shade val="15000"/>
+                </a:schemeClr>
+              </a:lnRef>
+              <a:fillRef idx="1">
+                <a:schemeClr val="accent1"/>
+              </a:fillRef>
+              <a:effectRef idx="0">
+                <a:schemeClr val="accent1"/>
+              </a:effectRef>
+              <a:fontRef idx="minor">
+                <a:schemeClr val="lt1"/>
+              </a:fontRef>
+            </p:style>
+            <p:txBody>
+              <a:bodyPr rtlCol="0" anchor="ctr"/>
+              <a:lstStyle/>
+              <a:p>
+                <a:pPr algn="ctr"/>
+                <a:endParaRPr lang="en-GB">
+                  <a:solidFill>
+                    <a:schemeClr val="tx1">
+                      <a:lumMod val="85000"/>
+                      <a:lumOff val="15000"/>
+                    </a:schemeClr>
+                  </a:solidFill>
+                </a:endParaRPr>
+              </a:p>
+            </p:txBody>
+          </p:sp>
+          <p:sp>
+            <p:nvSpPr>
+              <p:cNvPr id="4" name="Rechthoek: afgeronde hoeken 3">
+                <a:extLst>
+                  <a:ext uri="{FF2B5EF4-FFF2-40B4-BE49-F238E27FC236}">
+                    <a16:creationId xmlns:a16="http://schemas.microsoft.com/office/drawing/2014/main" id="{7173F817-78BD-F5A5-D5A1-F38742BCBC56}"/>
+                  </a:ext>
+                </a:extLst>
+              </p:cNvPr>
+              <p:cNvSpPr/>
+              <p:nvPr/>
+            </p:nvSpPr>
+            <p:spPr>
+              <a:xfrm>
+                <a:off x="2238182" y="2608884"/>
+                <a:ext cx="1872926" cy="1973501"/>
+              </a:xfrm>
+              <a:prstGeom prst="roundRect">
+                <a:avLst>
+                  <a:gd name="adj" fmla="val 6903"/>
+                </a:avLst>
+              </a:prstGeom>
+              <a:noFill/>
+              <a:ln w="12700">
+                <a:solidFill>
+                  <a:schemeClr val="tx1">
+                    <a:lumMod val="75000"/>
+                    <a:lumOff val="25000"/>
+                  </a:schemeClr>
+                </a:solidFill>
+              </a:ln>
+            </p:spPr>
+            <p:txBody>
+              <a:bodyPr wrap="square" tIns="90000" anchor="ctr" anchorCtr="1">
+                <a:noAutofit/>
+              </a:bodyPr>
+              <a:lstStyle/>
+              <a:p>
+                <a:pPr algn="ctr">
+                  <a:lnSpc>
+                    <a:spcPts val="1300"/>
+                  </a:lnSpc>
+                  <a:buNone/>
+                </a:pPr>
+                <a:endParaRPr lang="en-GB" sz="1200" i="1" noProof="0" dirty="0">
+                  <a:solidFill>
+                    <a:schemeClr val="tx1">
+                      <a:lumMod val="85000"/>
+                      <a:lumOff val="15000"/>
+                    </a:schemeClr>
+                  </a:solidFill>
+                  <a:latin typeface="+mj-lt"/>
+                </a:endParaRPr>
+              </a:p>
+            </p:txBody>
+          </p:sp>
+          <p:sp>
+            <p:nvSpPr>
+              <p:cNvPr id="10" name="Tekstvak 9">
+                <a:extLst>
+                  <a:ext uri="{FF2B5EF4-FFF2-40B4-BE49-F238E27FC236}">
+                    <a16:creationId xmlns:a16="http://schemas.microsoft.com/office/drawing/2014/main" id="{D9A05767-F9F0-938D-7AA8-2AC141DDCD4C}"/>
+                  </a:ext>
+                </a:extLst>
+              </p:cNvPr>
+              <p:cNvSpPr txBox="1"/>
+              <p:nvPr/>
+            </p:nvSpPr>
+            <p:spPr>
+              <a:xfrm>
+                <a:off x="2278822" y="2654320"/>
+                <a:ext cx="1597379" cy="523220"/>
+              </a:xfrm>
+              <a:prstGeom prst="rect">
+                <a:avLst/>
+              </a:prstGeom>
+              <a:noFill/>
+            </p:spPr>
+            <p:txBody>
+              <a:bodyPr wrap="square" rtlCol="0">
+                <a:spAutoFit/>
+              </a:bodyPr>
+              <a:lstStyle/>
+              <a:p>
+                <a:r>
+                  <a:rPr lang="en-GB" sz="1400" b="1" dirty="0">
+                    <a:solidFill>
+                      <a:schemeClr val="bg1"/>
+                    </a:solidFill>
+                    <a:latin typeface="DM Sans" pitchFamily="2" charset="0"/>
+                  </a:rPr>
+                  <a:t>Individual augmentation</a:t>
+                </a:r>
+                <a:endParaRPr lang="en-GB" sz="1400" b="1" i="1" dirty="0">
+                  <a:solidFill>
+                    <a:schemeClr val="bg1"/>
+                  </a:solidFill>
+                  <a:latin typeface="DM Sans" pitchFamily="2" charset="0"/>
+                </a:endParaRPr>
+              </a:p>
+            </p:txBody>
+          </p:sp>
+        </p:grpSp>
+        <p:grpSp>
+          <p:nvGrpSpPr>
+            <p:cNvPr id="49" name="Groep 48">
+              <a:extLst>
+                <a:ext uri="{FF2B5EF4-FFF2-40B4-BE49-F238E27FC236}">
+                  <a16:creationId xmlns:a16="http://schemas.microsoft.com/office/drawing/2014/main" id="{3265D777-72EB-BC6A-438D-3BD73F721A27}"/>
+                </a:ext>
+              </a:extLst>
+            </p:cNvPr>
+            <p:cNvGrpSpPr/>
+            <p:nvPr/>
+          </p:nvGrpSpPr>
+          <p:grpSpPr>
+            <a:xfrm>
+              <a:off x="4233922" y="2294154"/>
+              <a:ext cx="1872927" cy="2288231"/>
+              <a:chOff x="4233922" y="2294154"/>
+              <a:chExt cx="1872927" cy="2288231"/>
+            </a:xfrm>
+          </p:grpSpPr>
+          <p:sp>
+            <p:nvSpPr>
+              <p:cNvPr id="22" name="Tekstvak 21">
+                <a:extLst>
+                  <a:ext uri="{FF2B5EF4-FFF2-40B4-BE49-F238E27FC236}">
+                    <a16:creationId xmlns:a16="http://schemas.microsoft.com/office/drawing/2014/main" id="{3B5F272C-15AA-8037-125C-BA55F0A2BC1F}"/>
+                  </a:ext>
+                </a:extLst>
+              </p:cNvPr>
+              <p:cNvSpPr txBox="1"/>
+              <p:nvPr/>
+            </p:nvSpPr>
+            <p:spPr>
+              <a:xfrm>
+                <a:off x="4233922" y="3924904"/>
+                <a:ext cx="1862077" cy="507831"/>
+              </a:xfrm>
+              <a:prstGeom prst="rect">
+                <a:avLst/>
+              </a:prstGeom>
+              <a:noFill/>
+            </p:spPr>
+            <p:txBody>
+              <a:bodyPr wrap="square" lIns="90000" rIns="36000" rtlCol="0">
+                <a:spAutoFit/>
+              </a:bodyPr>
+              <a:lstStyle/>
+              <a:p>
+                <a:pPr marL="92075" indent="-92075">
+                  <a:spcAft>
+                    <a:spcPts val="600"/>
+                  </a:spcAft>
+                  <a:buFont typeface="Arial" panose="020B0604020202020204" pitchFamily="34" charset="0"/>
+                  <a:buChar char="•"/>
+                </a:pPr>
+                <a:r>
+                  <a:rPr lang="en-GB" sz="1100" dirty="0">
+                    <a:solidFill>
+                      <a:schemeClr val="tx1">
+                        <a:lumMod val="85000"/>
+                        <a:lumOff val="15000"/>
+                      </a:schemeClr>
+                    </a:solidFill>
+                    <a:latin typeface="+mj-lt"/>
+                  </a:rPr>
+                  <a:t>Automate routine workflows</a:t>
+                </a:r>
+              </a:p>
+              <a:p>
+                <a:pPr marL="92075" indent="-92075">
+                  <a:spcAft>
+                    <a:spcPts val="600"/>
+                  </a:spcAft>
+                  <a:buFont typeface="Arial" panose="020B0604020202020204" pitchFamily="34" charset="0"/>
+                  <a:buChar char="•"/>
+                </a:pPr>
+                <a:r>
+                  <a:rPr lang="en-GB" sz="1100" dirty="0">
+                    <a:solidFill>
+                      <a:schemeClr val="tx1">
+                        <a:lumMod val="85000"/>
+                        <a:lumOff val="15000"/>
+                      </a:schemeClr>
+                    </a:solidFill>
+                    <a:latin typeface="+mj-lt"/>
+                  </a:rPr>
+                  <a:t>Scale execution quality</a:t>
+                </a:r>
+              </a:p>
+            </p:txBody>
+          </p:sp>
+          <p:sp>
+            <p:nvSpPr>
+              <p:cNvPr id="23" name="Rechthoek: afgeronde bovenhoeken 22">
+                <a:extLst>
+                  <a:ext uri="{FF2B5EF4-FFF2-40B4-BE49-F238E27FC236}">
+                    <a16:creationId xmlns:a16="http://schemas.microsoft.com/office/drawing/2014/main" id="{BEAD4EBB-6063-9EA7-CADB-ABC1B6AD7140}"/>
+                  </a:ext>
+                </a:extLst>
+              </p:cNvPr>
+              <p:cNvSpPr/>
+              <p:nvPr/>
+            </p:nvSpPr>
+            <p:spPr>
+              <a:xfrm>
+                <a:off x="4233923" y="2294154"/>
+                <a:ext cx="1872926" cy="626416"/>
+              </a:xfrm>
+              <a:prstGeom prst="round2SameRect">
+                <a:avLst>
+                  <a:gd name="adj1" fmla="val 24049"/>
+                  <a:gd name="adj2" fmla="val 0"/>
+                </a:avLst>
+              </a:prstGeom>
+              <a:solidFill>
+                <a:schemeClr val="tx1">
+                  <a:lumMod val="85000"/>
+                  <a:lumOff val="15000"/>
+                </a:schemeClr>
+              </a:solidFill>
+              <a:ln>
+                <a:noFill/>
+              </a:ln>
+            </p:spPr>
+            <p:style>
+              <a:lnRef idx="2">
+                <a:schemeClr val="accent1">
+                  <a:shade val="15000"/>
+                </a:schemeClr>
+              </a:lnRef>
+              <a:fillRef idx="1">
+                <a:schemeClr val="accent1"/>
+              </a:fillRef>
+              <a:effectRef idx="0">
+                <a:schemeClr val="accent1"/>
+              </a:effectRef>
+              <a:fontRef idx="minor">
+                <a:schemeClr val="lt1"/>
+              </a:fontRef>
+            </p:style>
+            <p:txBody>
+              <a:bodyPr rtlCol="0" anchor="ctr"/>
+              <a:lstStyle/>
+              <a:p>
+                <a:pPr algn="ctr"/>
+                <a:endParaRPr lang="en-GB">
+                  <a:solidFill>
+                    <a:schemeClr val="tx1">
+                      <a:lumMod val="85000"/>
+                      <a:lumOff val="15000"/>
+                    </a:schemeClr>
+                  </a:solidFill>
+                </a:endParaRPr>
+              </a:p>
+            </p:txBody>
+          </p:sp>
+          <p:sp>
+            <p:nvSpPr>
+              <p:cNvPr id="24" name="Rechthoek: afgeronde hoeken 23">
+                <a:extLst>
+                  <a:ext uri="{FF2B5EF4-FFF2-40B4-BE49-F238E27FC236}">
+                    <a16:creationId xmlns:a16="http://schemas.microsoft.com/office/drawing/2014/main" id="{C3CB4C2B-D918-6F91-F6D1-C736B7FC0BB9}"/>
+                  </a:ext>
+                </a:extLst>
+              </p:cNvPr>
+              <p:cNvSpPr/>
+              <p:nvPr/>
+            </p:nvSpPr>
+            <p:spPr>
+              <a:xfrm>
+                <a:off x="4233923" y="2294154"/>
+                <a:ext cx="1872926" cy="2288231"/>
+              </a:xfrm>
+              <a:prstGeom prst="roundRect">
+                <a:avLst>
+                  <a:gd name="adj" fmla="val 6903"/>
+                </a:avLst>
+              </a:prstGeom>
+              <a:noFill/>
+              <a:ln w="12700">
+                <a:solidFill>
+                  <a:schemeClr val="tx1">
+                    <a:lumMod val="75000"/>
+                    <a:lumOff val="25000"/>
+                  </a:schemeClr>
+                </a:solidFill>
+              </a:ln>
+            </p:spPr>
+            <p:txBody>
+              <a:bodyPr wrap="square" tIns="90000" anchor="ctr" anchorCtr="1">
+                <a:noAutofit/>
+              </a:bodyPr>
+              <a:lstStyle/>
+              <a:p>
+                <a:pPr algn="ctr">
+                  <a:lnSpc>
+                    <a:spcPts val="1300"/>
+                  </a:lnSpc>
+                  <a:buNone/>
+                </a:pPr>
+                <a:endParaRPr lang="en-GB" sz="1200" i="1" noProof="0" dirty="0">
+                  <a:solidFill>
+                    <a:schemeClr val="tx1">
+                      <a:lumMod val="85000"/>
+                      <a:lumOff val="15000"/>
+                    </a:schemeClr>
+                  </a:solidFill>
+                  <a:latin typeface="+mj-lt"/>
+                </a:endParaRPr>
+              </a:p>
+            </p:txBody>
+          </p:sp>
+          <p:sp>
+            <p:nvSpPr>
+              <p:cNvPr id="25" name="Tekstvak 24">
+                <a:extLst>
+                  <a:ext uri="{FF2B5EF4-FFF2-40B4-BE49-F238E27FC236}">
+                    <a16:creationId xmlns:a16="http://schemas.microsoft.com/office/drawing/2014/main" id="{1AF15559-C56E-C8DA-7EFD-7A3096894052}"/>
+                  </a:ext>
+                </a:extLst>
+              </p:cNvPr>
+              <p:cNvSpPr txBox="1"/>
+              <p:nvPr/>
+            </p:nvSpPr>
+            <p:spPr>
+              <a:xfrm>
+                <a:off x="4274563" y="2339590"/>
+                <a:ext cx="1597379" cy="523220"/>
+              </a:xfrm>
+              <a:prstGeom prst="rect">
+                <a:avLst/>
+              </a:prstGeom>
+              <a:noFill/>
+            </p:spPr>
+            <p:txBody>
+              <a:bodyPr wrap="square" rtlCol="0">
+                <a:spAutoFit/>
+              </a:bodyPr>
+              <a:lstStyle/>
+              <a:p>
+                <a:r>
+                  <a:rPr lang="en-GB" sz="1400" b="1" dirty="0">
+                    <a:solidFill>
+                      <a:schemeClr val="bg1"/>
+                    </a:solidFill>
+                    <a:latin typeface="DM Sans" pitchFamily="2" charset="0"/>
+                  </a:rPr>
+                  <a:t>Task &amp; workflow automation</a:t>
+                </a:r>
+                <a:endParaRPr lang="en-GB" sz="1400" b="1" i="1" dirty="0">
+                  <a:solidFill>
+                    <a:schemeClr val="bg1"/>
+                  </a:solidFill>
+                  <a:latin typeface="DM Sans" pitchFamily="2" charset="0"/>
+                </a:endParaRPr>
+              </a:p>
+            </p:txBody>
+          </p:sp>
+        </p:grpSp>
+        <p:grpSp>
+          <p:nvGrpSpPr>
+            <p:cNvPr id="48" name="Groep 47">
+              <a:extLst>
+                <a:ext uri="{FF2B5EF4-FFF2-40B4-BE49-F238E27FC236}">
+                  <a16:creationId xmlns:a16="http://schemas.microsoft.com/office/drawing/2014/main" id="{0F19FA35-6463-BF14-4C00-7CCD7501EA5B}"/>
+                </a:ext>
+              </a:extLst>
+            </p:cNvPr>
+            <p:cNvGrpSpPr/>
+            <p:nvPr/>
+          </p:nvGrpSpPr>
+          <p:grpSpPr>
+            <a:xfrm>
+              <a:off x="6229664" y="1979424"/>
+              <a:ext cx="1872926" cy="2602961"/>
+              <a:chOff x="6229664" y="1979424"/>
+              <a:chExt cx="1872926" cy="2602961"/>
+            </a:xfrm>
+          </p:grpSpPr>
+          <p:sp>
+            <p:nvSpPr>
+              <p:cNvPr id="27" name="Tekstvak 26">
+                <a:extLst>
+                  <a:ext uri="{FF2B5EF4-FFF2-40B4-BE49-F238E27FC236}">
+                    <a16:creationId xmlns:a16="http://schemas.microsoft.com/office/drawing/2014/main" id="{ED530079-0921-B049-DF19-DCF16BF9EC9D}"/>
+                  </a:ext>
+                </a:extLst>
+              </p:cNvPr>
+              <p:cNvSpPr txBox="1"/>
+              <p:nvPr/>
+            </p:nvSpPr>
+            <p:spPr>
+              <a:xfrm>
+                <a:off x="6229664" y="3586349"/>
+                <a:ext cx="1872926" cy="846386"/>
+              </a:xfrm>
+              <a:prstGeom prst="rect">
+                <a:avLst/>
+              </a:prstGeom>
+              <a:noFill/>
+            </p:spPr>
+            <p:txBody>
+              <a:bodyPr wrap="square" lIns="90000" rIns="36000" rtlCol="0">
+                <a:spAutoFit/>
+              </a:bodyPr>
+              <a:lstStyle/>
+              <a:p>
+                <a:pPr marL="92075" indent="-92075">
+                  <a:spcAft>
+                    <a:spcPts val="600"/>
+                  </a:spcAft>
+                  <a:buFont typeface="Arial" panose="020B0604020202020204" pitchFamily="34" charset="0"/>
+                  <a:buChar char="•"/>
+                </a:pPr>
+                <a:r>
+                  <a:rPr lang="en-GB" sz="1100" dirty="0">
+                    <a:solidFill>
+                      <a:schemeClr val="tx1">
+                        <a:lumMod val="85000"/>
+                        <a:lumOff val="15000"/>
+                      </a:schemeClr>
+                    </a:solidFill>
+                    <a:latin typeface="+mj-lt"/>
+                  </a:rPr>
+                  <a:t>Agent teams across a function</a:t>
+                </a:r>
+              </a:p>
+              <a:p>
+                <a:pPr marL="92075" indent="-92075">
+                  <a:spcAft>
+                    <a:spcPts val="600"/>
+                  </a:spcAft>
+                  <a:buFont typeface="Arial" panose="020B0604020202020204" pitchFamily="34" charset="0"/>
+                  <a:buChar char="•"/>
+                </a:pPr>
+                <a:r>
+                  <a:rPr lang="en-GB" sz="1100" dirty="0">
+                    <a:solidFill>
+                      <a:schemeClr val="tx1">
+                        <a:lumMod val="85000"/>
+                        <a:lumOff val="15000"/>
+                      </a:schemeClr>
+                    </a:solidFill>
+                    <a:latin typeface="+mj-lt"/>
+                  </a:rPr>
+                  <a:t>Redesign, intelligent processes</a:t>
+                </a:r>
+              </a:p>
+            </p:txBody>
+          </p:sp>
+          <p:sp>
+            <p:nvSpPr>
+              <p:cNvPr id="28" name="Rechthoek: afgeronde bovenhoeken 27">
+                <a:extLst>
+                  <a:ext uri="{FF2B5EF4-FFF2-40B4-BE49-F238E27FC236}">
+                    <a16:creationId xmlns:a16="http://schemas.microsoft.com/office/drawing/2014/main" id="{7655D4D4-A725-FFA1-1459-E7081F56F796}"/>
+                  </a:ext>
+                </a:extLst>
+              </p:cNvPr>
+              <p:cNvSpPr/>
+              <p:nvPr/>
+            </p:nvSpPr>
+            <p:spPr>
+              <a:xfrm>
+                <a:off x="6229664" y="1979424"/>
+                <a:ext cx="1872926" cy="626416"/>
+              </a:xfrm>
+              <a:prstGeom prst="round2SameRect">
+                <a:avLst>
+                  <a:gd name="adj1" fmla="val 24049"/>
+                  <a:gd name="adj2" fmla="val 0"/>
+                </a:avLst>
+              </a:prstGeom>
+              <a:solidFill>
+                <a:schemeClr val="tx1">
+                  <a:lumMod val="85000"/>
+                  <a:lumOff val="15000"/>
+                </a:schemeClr>
+              </a:solidFill>
+              <a:ln>
+                <a:noFill/>
+              </a:ln>
+            </p:spPr>
+            <p:style>
+              <a:lnRef idx="2">
+                <a:schemeClr val="accent1">
+                  <a:shade val="15000"/>
+                </a:schemeClr>
+              </a:lnRef>
+              <a:fillRef idx="1">
+                <a:schemeClr val="accent1"/>
+              </a:fillRef>
+              <a:effectRef idx="0">
+                <a:schemeClr val="accent1"/>
+              </a:effectRef>
+              <a:fontRef idx="minor">
+                <a:schemeClr val="lt1"/>
+              </a:fontRef>
+            </p:style>
+            <p:txBody>
+              <a:bodyPr rtlCol="0" anchor="ctr"/>
+              <a:lstStyle/>
+              <a:p>
+                <a:pPr algn="ctr"/>
+                <a:endParaRPr lang="en-GB">
+                  <a:solidFill>
+                    <a:schemeClr val="tx1">
+                      <a:lumMod val="85000"/>
+                      <a:lumOff val="15000"/>
+                    </a:schemeClr>
+                  </a:solidFill>
+                </a:endParaRPr>
+              </a:p>
+            </p:txBody>
+          </p:sp>
+          <p:sp>
+            <p:nvSpPr>
+              <p:cNvPr id="29" name="Rechthoek: afgeronde hoeken 28">
+                <a:extLst>
+                  <a:ext uri="{FF2B5EF4-FFF2-40B4-BE49-F238E27FC236}">
+                    <a16:creationId xmlns:a16="http://schemas.microsoft.com/office/drawing/2014/main" id="{8FDA55AD-CF64-AEB8-D0FB-6208EAB3ED01}"/>
+                  </a:ext>
+                </a:extLst>
+              </p:cNvPr>
+              <p:cNvSpPr/>
+              <p:nvPr/>
+            </p:nvSpPr>
+            <p:spPr>
+              <a:xfrm>
+                <a:off x="6229664" y="1979424"/>
+                <a:ext cx="1872926" cy="2602961"/>
+              </a:xfrm>
+              <a:prstGeom prst="roundRect">
+                <a:avLst>
+                  <a:gd name="adj" fmla="val 6903"/>
+                </a:avLst>
+              </a:prstGeom>
+              <a:noFill/>
+              <a:ln w="12700">
+                <a:solidFill>
+                  <a:schemeClr val="tx1">
+                    <a:lumMod val="75000"/>
+                    <a:lumOff val="25000"/>
+                  </a:schemeClr>
+                </a:solidFill>
+              </a:ln>
+            </p:spPr>
+            <p:txBody>
+              <a:bodyPr wrap="square" tIns="90000" anchor="ctr" anchorCtr="1">
+                <a:noAutofit/>
+              </a:bodyPr>
+              <a:lstStyle/>
+              <a:p>
+                <a:pPr algn="ctr">
+                  <a:lnSpc>
+                    <a:spcPts val="1300"/>
+                  </a:lnSpc>
+                  <a:buNone/>
+                </a:pPr>
+                <a:endParaRPr lang="en-GB" sz="1200" i="1" noProof="0" dirty="0">
+                  <a:solidFill>
+                    <a:schemeClr val="tx1">
+                      <a:lumMod val="85000"/>
+                      <a:lumOff val="15000"/>
+                    </a:schemeClr>
+                  </a:solidFill>
+                  <a:latin typeface="+mj-lt"/>
+                </a:endParaRPr>
+              </a:p>
+            </p:txBody>
+          </p:sp>
+          <p:sp>
+            <p:nvSpPr>
+              <p:cNvPr id="31" name="Tekstvak 30">
+                <a:extLst>
+                  <a:ext uri="{FF2B5EF4-FFF2-40B4-BE49-F238E27FC236}">
+                    <a16:creationId xmlns:a16="http://schemas.microsoft.com/office/drawing/2014/main" id="{71F75D97-B282-7651-68BE-C8B290B84D2B}"/>
+                  </a:ext>
+                </a:extLst>
+              </p:cNvPr>
+              <p:cNvSpPr txBox="1"/>
+              <p:nvPr/>
+            </p:nvSpPr>
+            <p:spPr>
+              <a:xfrm>
+                <a:off x="6270304" y="2024860"/>
+                <a:ext cx="1760835" cy="523220"/>
+              </a:xfrm>
+              <a:prstGeom prst="rect">
+                <a:avLst/>
+              </a:prstGeom>
+              <a:noFill/>
+            </p:spPr>
+            <p:txBody>
+              <a:bodyPr wrap="square" rtlCol="0">
+                <a:spAutoFit/>
+              </a:bodyPr>
+              <a:lstStyle/>
+              <a:p>
+                <a:r>
+                  <a:rPr lang="en-GB" sz="1400" b="1" dirty="0">
+                    <a:solidFill>
+                      <a:schemeClr val="bg1"/>
+                    </a:solidFill>
+                    <a:latin typeface="DM Sans" pitchFamily="2" charset="0"/>
+                  </a:rPr>
+                  <a:t>Functional agentic workflows</a:t>
+                </a:r>
+                <a:endParaRPr lang="en-GB" sz="1400" b="1" i="1" dirty="0">
+                  <a:solidFill>
+                    <a:schemeClr val="bg1"/>
+                  </a:solidFill>
+                  <a:latin typeface="DM Sans" pitchFamily="2" charset="0"/>
+                </a:endParaRPr>
+              </a:p>
+            </p:txBody>
+          </p:sp>
+        </p:grpSp>
+        <p:grpSp>
+          <p:nvGrpSpPr>
+            <p:cNvPr id="47" name="Groep 46">
+              <a:extLst>
+                <a:ext uri="{FF2B5EF4-FFF2-40B4-BE49-F238E27FC236}">
+                  <a16:creationId xmlns:a16="http://schemas.microsoft.com/office/drawing/2014/main" id="{F0E26D06-0E9C-1E9D-5EF2-CA93159AF913}"/>
+                </a:ext>
+              </a:extLst>
+            </p:cNvPr>
+            <p:cNvGrpSpPr/>
+            <p:nvPr/>
+          </p:nvGrpSpPr>
+          <p:grpSpPr>
+            <a:xfrm>
+              <a:off x="8225406" y="1664694"/>
+              <a:ext cx="1872926" cy="2917691"/>
+              <a:chOff x="8225406" y="1664694"/>
+              <a:chExt cx="1872926" cy="2917691"/>
+            </a:xfrm>
+          </p:grpSpPr>
+          <p:sp>
+            <p:nvSpPr>
+              <p:cNvPr id="35" name="Tekstvak 34">
+                <a:extLst>
+                  <a:ext uri="{FF2B5EF4-FFF2-40B4-BE49-F238E27FC236}">
+                    <a16:creationId xmlns:a16="http://schemas.microsoft.com/office/drawing/2014/main" id="{8F8A1EF2-1E56-E80F-80C6-C181E6DEC682}"/>
+                  </a:ext>
+                </a:extLst>
+              </p:cNvPr>
+              <p:cNvSpPr txBox="1"/>
+              <p:nvPr/>
+            </p:nvSpPr>
+            <p:spPr>
+              <a:xfrm>
+                <a:off x="8225406" y="3755627"/>
+                <a:ext cx="1872926" cy="677108"/>
+              </a:xfrm>
+              <a:prstGeom prst="rect">
+                <a:avLst/>
+              </a:prstGeom>
+              <a:noFill/>
+            </p:spPr>
+            <p:txBody>
+              <a:bodyPr wrap="square" lIns="90000" rIns="36000" rtlCol="0">
+                <a:spAutoFit/>
+              </a:bodyPr>
+              <a:lstStyle/>
+              <a:p>
+                <a:pPr marL="92075" indent="-92075">
+                  <a:spcAft>
+                    <a:spcPts val="600"/>
+                  </a:spcAft>
+                  <a:buFont typeface="Arial" panose="020B0604020202020204" pitchFamily="34" charset="0"/>
+                  <a:buChar char="•"/>
+                </a:pPr>
+                <a:r>
+                  <a:rPr lang="en-GB" sz="1100" dirty="0">
+                    <a:solidFill>
+                      <a:schemeClr val="tx1">
+                        <a:lumMod val="85000"/>
+                        <a:lumOff val="15000"/>
+                      </a:schemeClr>
+                    </a:solidFill>
+                    <a:latin typeface="+mj-lt"/>
+                  </a:rPr>
+                  <a:t>End-to-end complex workflows</a:t>
+                </a:r>
+              </a:p>
+              <a:p>
+                <a:pPr marL="92075" indent="-92075">
+                  <a:spcAft>
+                    <a:spcPts val="600"/>
+                  </a:spcAft>
+                  <a:buFont typeface="Arial" panose="020B0604020202020204" pitchFamily="34" charset="0"/>
+                  <a:buChar char="•"/>
+                </a:pPr>
+                <a:r>
+                  <a:rPr lang="en-GB" sz="1100" dirty="0">
+                    <a:solidFill>
+                      <a:schemeClr val="tx1">
+                        <a:lumMod val="85000"/>
+                        <a:lumOff val="15000"/>
+                      </a:schemeClr>
+                    </a:solidFill>
+                    <a:latin typeface="+mj-lt"/>
+                  </a:rPr>
+                  <a:t>High-level decision support</a:t>
+                </a:r>
+              </a:p>
+            </p:txBody>
+          </p:sp>
+          <p:sp>
+            <p:nvSpPr>
+              <p:cNvPr id="36" name="Rechthoek: afgeronde bovenhoeken 35">
+                <a:extLst>
+                  <a:ext uri="{FF2B5EF4-FFF2-40B4-BE49-F238E27FC236}">
+                    <a16:creationId xmlns:a16="http://schemas.microsoft.com/office/drawing/2014/main" id="{08BD41DC-B421-FEEC-AC98-71007A600253}"/>
+                  </a:ext>
+                </a:extLst>
+              </p:cNvPr>
+              <p:cNvSpPr/>
+              <p:nvPr/>
+            </p:nvSpPr>
+            <p:spPr>
+              <a:xfrm>
+                <a:off x="8225406" y="1664694"/>
+                <a:ext cx="1872926" cy="626416"/>
+              </a:xfrm>
+              <a:prstGeom prst="round2SameRect">
+                <a:avLst>
+                  <a:gd name="adj1" fmla="val 24049"/>
+                  <a:gd name="adj2" fmla="val 0"/>
+                </a:avLst>
+              </a:prstGeom>
+              <a:solidFill>
+                <a:schemeClr val="tx1">
+                  <a:lumMod val="85000"/>
+                  <a:lumOff val="15000"/>
+                </a:schemeClr>
+              </a:solidFill>
+              <a:ln>
+                <a:noFill/>
+              </a:ln>
+            </p:spPr>
+            <p:style>
+              <a:lnRef idx="2">
+                <a:schemeClr val="accent1">
+                  <a:shade val="15000"/>
+                </a:schemeClr>
+              </a:lnRef>
+              <a:fillRef idx="1">
+                <a:schemeClr val="accent1"/>
+              </a:fillRef>
+              <a:effectRef idx="0">
+                <a:schemeClr val="accent1"/>
+              </a:effectRef>
+              <a:fontRef idx="minor">
+                <a:schemeClr val="lt1"/>
+              </a:fontRef>
+            </p:style>
+            <p:txBody>
+              <a:bodyPr rtlCol="0" anchor="ctr"/>
+              <a:lstStyle/>
+              <a:p>
+                <a:pPr algn="ctr"/>
+                <a:endParaRPr lang="en-GB">
+                  <a:solidFill>
+                    <a:schemeClr val="tx1">
+                      <a:lumMod val="85000"/>
+                      <a:lumOff val="15000"/>
+                    </a:schemeClr>
+                  </a:solidFill>
+                </a:endParaRPr>
+              </a:p>
+            </p:txBody>
+          </p:sp>
+          <p:sp>
+            <p:nvSpPr>
+              <p:cNvPr id="37" name="Rechthoek: afgeronde hoeken 36">
+                <a:extLst>
+                  <a:ext uri="{FF2B5EF4-FFF2-40B4-BE49-F238E27FC236}">
+                    <a16:creationId xmlns:a16="http://schemas.microsoft.com/office/drawing/2014/main" id="{1C5A4A89-956A-35DE-D7AF-A3DCF530A485}"/>
+                  </a:ext>
+                </a:extLst>
+              </p:cNvPr>
+              <p:cNvSpPr/>
+              <p:nvPr/>
+            </p:nvSpPr>
+            <p:spPr>
+              <a:xfrm>
+                <a:off x="8225406" y="1664694"/>
+                <a:ext cx="1872926" cy="2917691"/>
+              </a:xfrm>
+              <a:prstGeom prst="roundRect">
+                <a:avLst>
+                  <a:gd name="adj" fmla="val 6903"/>
+                </a:avLst>
+              </a:prstGeom>
+              <a:noFill/>
+              <a:ln w="12700">
+                <a:solidFill>
+                  <a:schemeClr val="tx1">
+                    <a:lumMod val="75000"/>
+                    <a:lumOff val="25000"/>
+                  </a:schemeClr>
+                </a:solidFill>
+              </a:ln>
+            </p:spPr>
+            <p:txBody>
+              <a:bodyPr wrap="square" tIns="90000" anchor="ctr" anchorCtr="1">
+                <a:noAutofit/>
+              </a:bodyPr>
+              <a:lstStyle/>
+              <a:p>
+                <a:pPr algn="ctr">
+                  <a:lnSpc>
+                    <a:spcPts val="1300"/>
+                  </a:lnSpc>
+                  <a:buNone/>
+                </a:pPr>
+                <a:endParaRPr lang="en-GB" sz="1200" i="1" noProof="0" dirty="0">
+                  <a:solidFill>
+                    <a:schemeClr val="tx1">
+                      <a:lumMod val="85000"/>
+                      <a:lumOff val="15000"/>
+                    </a:schemeClr>
+                  </a:solidFill>
+                  <a:latin typeface="+mj-lt"/>
+                </a:endParaRPr>
+              </a:p>
+            </p:txBody>
+          </p:sp>
+          <p:sp>
+            <p:nvSpPr>
+              <p:cNvPr id="38" name="Tekstvak 37">
+                <a:extLst>
+                  <a:ext uri="{FF2B5EF4-FFF2-40B4-BE49-F238E27FC236}">
+                    <a16:creationId xmlns:a16="http://schemas.microsoft.com/office/drawing/2014/main" id="{1A3BBB2D-4619-F4E5-1977-DD93615DCD13}"/>
+                  </a:ext>
+                </a:extLst>
+              </p:cNvPr>
+              <p:cNvSpPr txBox="1"/>
+              <p:nvPr/>
+            </p:nvSpPr>
+            <p:spPr>
+              <a:xfrm>
+                <a:off x="8266046" y="1710130"/>
+                <a:ext cx="1832286" cy="523220"/>
+              </a:xfrm>
+              <a:prstGeom prst="rect">
+                <a:avLst/>
+              </a:prstGeom>
+              <a:noFill/>
+            </p:spPr>
+            <p:txBody>
+              <a:bodyPr wrap="square" rtlCol="0">
+                <a:spAutoFit/>
+              </a:bodyPr>
+              <a:lstStyle/>
+              <a:p>
+                <a:r>
+                  <a:rPr lang="en-GB" sz="1400" b="1" dirty="0">
+                    <a:solidFill>
+                      <a:schemeClr val="bg1"/>
+                    </a:solidFill>
+                    <a:latin typeface="DM Sans" pitchFamily="2" charset="0"/>
+                  </a:rPr>
+                  <a:t>Cross-functional agentic workflows</a:t>
+                </a:r>
+                <a:endParaRPr lang="en-GB" sz="1400" b="1" i="1" dirty="0">
+                  <a:solidFill>
+                    <a:schemeClr val="bg1"/>
+                  </a:solidFill>
+                  <a:latin typeface="DM Sans" pitchFamily="2" charset="0"/>
+                </a:endParaRPr>
+              </a:p>
+            </p:txBody>
+          </p:sp>
+        </p:grpSp>
+        <p:pic>
+          <p:nvPicPr>
+            <p:cNvPr id="40" name="Picture 2" descr="Geen ALT-tekst opgegeven voor deze afbeelding">
+              <a:extLst>
+                <a:ext uri="{FF2B5EF4-FFF2-40B4-BE49-F238E27FC236}">
+                  <a16:creationId xmlns:a16="http://schemas.microsoft.com/office/drawing/2014/main" id="{3339BC4B-BAF4-E359-4B48-D70AF4FFA2F8}"/>
+                </a:ext>
+              </a:extLst>
+            </p:cNvPr>
+            <p:cNvPicPr>
+              <a:picLocks noChangeAspect="1" noChangeArrowheads="1"/>
+            </p:cNvPicPr>
+            <p:nvPr/>
+          </p:nvPicPr>
+          <p:blipFill rotWithShape="1">
+            <a:blip r:embed="rId3">
+              <a:clrChange>
+                <a:clrFrom>
+                  <a:srgbClr val="F0F4FD"/>
+                </a:clrFrom>
+                <a:clrTo>
+                  <a:srgbClr val="F0F4FD">
+                    <a:alpha val="0"/>
+                  </a:srgbClr>
+                </a:clrTo>
+              </a:clrChange>
+              <a:grayscl/>
+              <a:extLst>
+                <a:ext uri="{28A0092B-C50C-407E-A947-70E740481C1C}">
+                  <a14:useLocalDpi xmlns:a14="http://schemas.microsoft.com/office/drawing/2010/main" val="0"/>
+                </a:ext>
+              </a:extLst>
+            </a:blip>
+            <a:srcRect l="52056" t="49101" r="39179" b="41041"/>
+            <a:stretch>
+              <a:fillRect/>
+            </a:stretch>
+          </p:blipFill>
+          <p:spPr bwMode="auto">
+            <a:xfrm>
+              <a:off x="6646352" y="2776758"/>
+              <a:ext cx="901668" cy="676090"/>
+            </a:xfrm>
+            <a:prstGeom prst="rect">
+              <a:avLst/>
+            </a:prstGeom>
+            <a:noFill/>
+            <a:extLst>
+              <a:ext uri="{909E8E84-426E-40DD-AFC4-6F175D3DCCD1}">
+                <a14:hiddenFill xmlns:a14="http://schemas.microsoft.com/office/drawing/2010/main">
+                  <a:solidFill>
+                    <a:srgbClr val="FFFFFF"/>
+                  </a:solidFill>
+                </a14:hiddenFill>
+              </a:ext>
+            </a:extLst>
+          </p:spPr>
+        </p:pic>
+        <p:pic>
+          <p:nvPicPr>
+            <p:cNvPr id="41" name="Picture 2" descr="Geen ALT-tekst opgegeven voor deze afbeelding">
+              <a:extLst>
+                <a:ext uri="{FF2B5EF4-FFF2-40B4-BE49-F238E27FC236}">
+                  <a16:creationId xmlns:a16="http://schemas.microsoft.com/office/drawing/2014/main" id="{B8B79CD2-F8C8-26DC-FB9D-9001C1A05499}"/>
+                </a:ext>
+              </a:extLst>
+            </p:cNvPr>
+            <p:cNvPicPr>
+              <a:picLocks noChangeAspect="1" noChangeArrowheads="1"/>
+            </p:cNvPicPr>
+            <p:nvPr/>
+          </p:nvPicPr>
+          <p:blipFill rotWithShape="1">
+            <a:blip r:embed="rId3">
+              <a:clrChange>
+                <a:clrFrom>
+                  <a:srgbClr val="F0F4FD"/>
+                </a:clrFrom>
+                <a:clrTo>
+                  <a:srgbClr val="F0F4FD">
+                    <a:alpha val="0"/>
+                  </a:srgbClr>
+                </a:clrTo>
+              </a:clrChange>
+              <a:grayscl/>
+              <a:extLst>
+                <a:ext uri="{28A0092B-C50C-407E-A947-70E740481C1C}">
+                  <a14:useLocalDpi xmlns:a14="http://schemas.microsoft.com/office/drawing/2010/main" val="0"/>
+                </a:ext>
+              </a:extLst>
+            </a:blip>
+            <a:srcRect l="31906" t="52293" r="61753" b="39148"/>
+            <a:stretch>
+              <a:fillRect/>
+            </a:stretch>
+          </p:blipFill>
+          <p:spPr bwMode="auto">
+            <a:xfrm>
+              <a:off x="4783001" y="3088401"/>
+              <a:ext cx="652314" cy="586966"/>
+            </a:xfrm>
+            <a:prstGeom prst="rect">
+              <a:avLst/>
+            </a:prstGeom>
+            <a:noFill/>
+            <a:extLst>
+              <a:ext uri="{909E8E84-426E-40DD-AFC4-6F175D3DCCD1}">
+                <a14:hiddenFill xmlns:a14="http://schemas.microsoft.com/office/drawing/2010/main">
+                  <a:solidFill>
+                    <a:srgbClr val="FFFFFF"/>
+                  </a:solidFill>
+                </a14:hiddenFill>
+              </a:ext>
+            </a:extLst>
+          </p:spPr>
+        </p:pic>
+        <p:pic>
+          <p:nvPicPr>
+            <p:cNvPr id="42" name="Picture 2" descr="Geen ALT-tekst opgegeven voor deze afbeelding">
+              <a:extLst>
+                <a:ext uri="{FF2B5EF4-FFF2-40B4-BE49-F238E27FC236}">
+                  <a16:creationId xmlns:a16="http://schemas.microsoft.com/office/drawing/2014/main" id="{80D9276C-453F-4A13-311F-C04E2224AB6C}"/>
+                </a:ext>
+              </a:extLst>
+            </p:cNvPr>
+            <p:cNvPicPr>
+              <a:picLocks noChangeAspect="1" noChangeArrowheads="1"/>
+            </p:cNvPicPr>
+            <p:nvPr/>
+          </p:nvPicPr>
+          <p:blipFill rotWithShape="1">
+            <a:blip r:embed="rId3">
+              <a:clrChange>
+                <a:clrFrom>
+                  <a:srgbClr val="F0F4FD"/>
+                </a:clrFrom>
+                <a:clrTo>
+                  <a:srgbClr val="F0F4FD">
+                    <a:alpha val="0"/>
+                  </a:srgbClr>
+                </a:clrTo>
+              </a:clrChange>
+              <a:grayscl/>
+              <a:extLst>
+                <a:ext uri="{28A0092B-C50C-407E-A947-70E740481C1C}">
+                  <a14:useLocalDpi xmlns:a14="http://schemas.microsoft.com/office/drawing/2010/main" val="0"/>
+                </a:ext>
+              </a:extLst>
+            </a:blip>
+            <a:srcRect l="11468" t="55454" r="81516" b="36151"/>
+            <a:stretch>
+              <a:fillRect/>
+            </a:stretch>
+          </p:blipFill>
+          <p:spPr bwMode="auto">
+            <a:xfrm>
+              <a:off x="2770431" y="3381884"/>
+              <a:ext cx="721795" cy="575735"/>
+            </a:xfrm>
+            <a:prstGeom prst="rect">
+              <a:avLst/>
+            </a:prstGeom>
+            <a:noFill/>
+            <a:extLst>
+              <a:ext uri="{909E8E84-426E-40DD-AFC4-6F175D3DCCD1}">
+                <a14:hiddenFill xmlns:a14="http://schemas.microsoft.com/office/drawing/2010/main">
+                  <a:solidFill>
+                    <a:srgbClr val="FFFFFF"/>
+                  </a:solidFill>
+                </a14:hiddenFill>
+              </a:ext>
+            </a:extLst>
+          </p:spPr>
+        </p:pic>
+      </p:grpSp>
+    </p:spTree>
+    <p:extLst>
+      <p:ext uri="{BB962C8B-B14F-4D97-AF65-F5344CB8AC3E}">
+        <p14:creationId xmlns:p14="http://schemas.microsoft.com/office/powerpoint/2010/main" val="3155234622"/>
+      </p:ext>
+    </p:extLst>
+  </p:cSld>
+  <p:clrMapOvr>
+    <a:masterClrMapping/>
+  </p:clrMapOvr>
+</p:sld>
+</file>
+
+<file path=ppt/slides/slide3.xml><?xml version="1.0" encoding="utf-8"?>
+<p:sld xmlns:a="http://schemas.openxmlformats.org/drawingml/2006/main" xmlns:r="http://schemas.openxmlformats.org/officeDocument/2006/relationships" xmlns:p="http://schemas.openxmlformats.org/presentationml/2006/main">
+  <p:cSld>
+    <p:spTree>
+      <p:nvGrpSpPr>
+        <p:cNvPr id="1" name="">
+          <a:extLst>
+            <a:ext uri="{FF2B5EF4-FFF2-40B4-BE49-F238E27FC236}">
+              <a16:creationId xmlns:a16="http://schemas.microsoft.com/office/drawing/2014/main" id="{9D2C701A-283F-C1B0-2834-F9D1A7F131B3}"/>
+            </a:ext>
+          </a:extLst>
+        </p:cNvPr>
+        <p:cNvGrpSpPr/>
+        <p:nvPr/>
+      </p:nvGrpSpPr>
+      <p:grpSpPr>
+        <a:xfrm>
+          <a:off x="0" y="0"/>
+          <a:ext cx="0" cy="0"/>
+          <a:chOff x="0" y="0"/>
+          <a:chExt cx="0" cy="0"/>
+        </a:xfrm>
+      </p:grpSpPr>
+      <p:sp>
+        <p:nvSpPr>
+          <p:cNvPr id="2" name="Rechthoek 1">
+            <a:extLst>
+              <a:ext uri="{FF2B5EF4-FFF2-40B4-BE49-F238E27FC236}">
+                <a16:creationId xmlns:a16="http://schemas.microsoft.com/office/drawing/2014/main" id="{44EF578A-6231-9FBF-1308-E0EF79AE5D3B}"/>
+              </a:ext>
+            </a:extLst>
+          </p:cNvPr>
+          <p:cNvSpPr/>
+          <p:nvPr/>
+        </p:nvSpPr>
+        <p:spPr>
+          <a:xfrm>
             <a:off x="1947041" y="409251"/>
             <a:ext cx="8442435" cy="4690889"/>
           </a:xfrm>
@@ -5372,7 +6901,7 @@
           <p:cNvPr id="3" name="Title 2">
             <a:extLst>
               <a:ext uri="{FF2B5EF4-FFF2-40B4-BE49-F238E27FC236}">
-                <a16:creationId xmlns:a16="http://schemas.microsoft.com/office/drawing/2014/main" id="{B3A34B42-FB4F-0FAB-9E0C-B9D4240D7263}"/>
+                <a16:creationId xmlns:a16="http://schemas.microsoft.com/office/drawing/2014/main" id="{8804E6F4-C3CC-C3BC-3F2A-1A9BCA0131F6}"/>
               </a:ext>
             </a:extLst>
           </p:cNvPr>
@@ -5415,7 +6944,7 @@
           <p:cNvPr id="17" name="Rectangle 16">
             <a:extLst>
               <a:ext uri="{FF2B5EF4-FFF2-40B4-BE49-F238E27FC236}">
-                <a16:creationId xmlns:a16="http://schemas.microsoft.com/office/drawing/2014/main" id="{4DC9BA65-02F5-9778-D996-0E43F5050B58}"/>
+                <a16:creationId xmlns:a16="http://schemas.microsoft.com/office/drawing/2014/main" id="{D72B93A7-9585-0551-84EE-EF7054A423A7}"/>
               </a:ext>
             </a:extLst>
           </p:cNvPr>
@@ -5470,7 +6999,7 @@
           <p:cNvPr id="20" name="TextBox 19">
             <a:extLst>
               <a:ext uri="{FF2B5EF4-FFF2-40B4-BE49-F238E27FC236}">
-                <a16:creationId xmlns:a16="http://schemas.microsoft.com/office/drawing/2014/main" id="{1C285D34-3103-3FC5-CA90-096D3DDE0E6B}"/>
+                <a16:creationId xmlns:a16="http://schemas.microsoft.com/office/drawing/2014/main" id="{5B250883-346E-3EC8-3212-E9A0D2A763DF}"/>
               </a:ext>
             </a:extLst>
           </p:cNvPr>
@@ -5569,7 +7098,7 @@
           <p:cNvPr id="151" name="Rectangle 150">
             <a:extLst>
               <a:ext uri="{FF2B5EF4-FFF2-40B4-BE49-F238E27FC236}">
-                <a16:creationId xmlns:a16="http://schemas.microsoft.com/office/drawing/2014/main" id="{DA84A920-84E4-D38E-DFB7-5C496D13FC0A}"/>
+                <a16:creationId xmlns:a16="http://schemas.microsoft.com/office/drawing/2014/main" id="{6FE07215-7F00-369F-6136-C21285723163}"/>
               </a:ext>
             </a:extLst>
           </p:cNvPr>
@@ -5624,7 +7153,7 @@
           <p:cNvPr id="154" name="Rectangle 153">
             <a:extLst>
               <a:ext uri="{FF2B5EF4-FFF2-40B4-BE49-F238E27FC236}">
-                <a16:creationId xmlns:a16="http://schemas.microsoft.com/office/drawing/2014/main" id="{55D2C2E2-60C1-A4D8-155A-29C4AE9102DC}"/>
+                <a16:creationId xmlns:a16="http://schemas.microsoft.com/office/drawing/2014/main" id="{653576DA-7188-AF3A-BBE1-8B282BA67543}"/>
               </a:ext>
             </a:extLst>
           </p:cNvPr>
@@ -5679,7 +7208,7 @@
           <p:cNvPr id="156" name="Rectangle 155">
             <a:extLst>
               <a:ext uri="{FF2B5EF4-FFF2-40B4-BE49-F238E27FC236}">
-                <a16:creationId xmlns:a16="http://schemas.microsoft.com/office/drawing/2014/main" id="{DD197C6D-A1CA-B22B-ECAC-F110C43F9350}"/>
+                <a16:creationId xmlns:a16="http://schemas.microsoft.com/office/drawing/2014/main" id="{8B339D20-5A49-6F7A-15C4-5ED02A3C89CF}"/>
               </a:ext>
             </a:extLst>
           </p:cNvPr>
@@ -5734,7 +7263,7 @@
           <p:cNvPr id="152" name="TextBox 151">
             <a:extLst>
               <a:ext uri="{FF2B5EF4-FFF2-40B4-BE49-F238E27FC236}">
-                <a16:creationId xmlns:a16="http://schemas.microsoft.com/office/drawing/2014/main" id="{30FBF885-B703-4E76-E0CE-D11230D74F72}"/>
+                <a16:creationId xmlns:a16="http://schemas.microsoft.com/office/drawing/2014/main" id="{D45E396F-4999-B4F9-7072-65323E72C693}"/>
               </a:ext>
             </a:extLst>
           </p:cNvPr>
@@ -5809,7 +7338,7 @@
           <p:cNvPr id="155" name="TextBox 154">
             <a:extLst>
               <a:ext uri="{FF2B5EF4-FFF2-40B4-BE49-F238E27FC236}">
-                <a16:creationId xmlns:a16="http://schemas.microsoft.com/office/drawing/2014/main" id="{2F26F3B8-CA9A-3660-D416-56970DACBC05}"/>
+                <a16:creationId xmlns:a16="http://schemas.microsoft.com/office/drawing/2014/main" id="{2DE3B8D4-C994-CC95-4F69-2555F1BAEC65}"/>
               </a:ext>
             </a:extLst>
           </p:cNvPr>
@@ -5884,7 +7413,7 @@
           <p:cNvPr id="157" name="TextBox 156">
             <a:extLst>
               <a:ext uri="{FF2B5EF4-FFF2-40B4-BE49-F238E27FC236}">
-                <a16:creationId xmlns:a16="http://schemas.microsoft.com/office/drawing/2014/main" id="{3AA9ACAD-2309-6695-05C5-A00E27FC3BF5}"/>
+                <a16:creationId xmlns:a16="http://schemas.microsoft.com/office/drawing/2014/main" id="{B1A48E0B-B12C-B2CB-1BB2-D2295474555A}"/>
               </a:ext>
             </a:extLst>
           </p:cNvPr>
@@ -5959,7 +7488,7 @@
           <p:cNvPr id="162" name="Rectangle 161">
             <a:extLst>
               <a:ext uri="{FF2B5EF4-FFF2-40B4-BE49-F238E27FC236}">
-                <a16:creationId xmlns:a16="http://schemas.microsoft.com/office/drawing/2014/main" id="{72576AB9-B02D-3B55-BF90-C23F1A867704}"/>
+                <a16:creationId xmlns:a16="http://schemas.microsoft.com/office/drawing/2014/main" id="{040EE41B-84FC-D9F7-BC87-3BD84F3AFE4B}"/>
               </a:ext>
             </a:extLst>
           </p:cNvPr>
@@ -6014,7 +7543,7 @@
           <p:cNvPr id="165" name="Rectangle 164">
             <a:extLst>
               <a:ext uri="{FF2B5EF4-FFF2-40B4-BE49-F238E27FC236}">
-                <a16:creationId xmlns:a16="http://schemas.microsoft.com/office/drawing/2014/main" id="{C8B0295D-55E0-BE71-18DC-D49D90CE7050}"/>
+                <a16:creationId xmlns:a16="http://schemas.microsoft.com/office/drawing/2014/main" id="{C5224C84-04C8-1C2B-02B5-31E1DA424107}"/>
               </a:ext>
             </a:extLst>
           </p:cNvPr>
@@ -6069,7 +7598,7 @@
           <p:cNvPr id="163" name="TextBox 162">
             <a:extLst>
               <a:ext uri="{FF2B5EF4-FFF2-40B4-BE49-F238E27FC236}">
-                <a16:creationId xmlns:a16="http://schemas.microsoft.com/office/drawing/2014/main" id="{5062C2DE-E635-12D3-2B1A-52C3839E99E0}"/>
+                <a16:creationId xmlns:a16="http://schemas.microsoft.com/office/drawing/2014/main" id="{CDC35536-4632-3A16-6AAD-1321A4D58107}"/>
               </a:ext>
             </a:extLst>
           </p:cNvPr>
@@ -6144,7 +7673,7 @@
           <p:cNvPr id="166" name="TextBox 165">
             <a:extLst>
               <a:ext uri="{FF2B5EF4-FFF2-40B4-BE49-F238E27FC236}">
-                <a16:creationId xmlns:a16="http://schemas.microsoft.com/office/drawing/2014/main" id="{3C502B40-5DAD-8077-0D3C-B23D768C371B}"/>
+                <a16:creationId xmlns:a16="http://schemas.microsoft.com/office/drawing/2014/main" id="{0ED94337-D9EF-B968-0944-7B0492BE49FB}"/>
               </a:ext>
             </a:extLst>
           </p:cNvPr>
@@ -6219,7 +7748,7 @@
           <p:cNvPr id="140" name="Rectangle 139">
             <a:extLst>
               <a:ext uri="{FF2B5EF4-FFF2-40B4-BE49-F238E27FC236}">
-                <a16:creationId xmlns:a16="http://schemas.microsoft.com/office/drawing/2014/main" id="{803139DD-F140-2E13-C535-DBA32BD2249E}"/>
+                <a16:creationId xmlns:a16="http://schemas.microsoft.com/office/drawing/2014/main" id="{6EEE62E6-5E4B-C96C-9F89-375F08FD4DF3}"/>
               </a:ext>
             </a:extLst>
           </p:cNvPr>
@@ -6274,7 +7803,7 @@
           <p:cNvPr id="141" name="TextBox 140">
             <a:extLst>
               <a:ext uri="{FF2B5EF4-FFF2-40B4-BE49-F238E27FC236}">
-                <a16:creationId xmlns:a16="http://schemas.microsoft.com/office/drawing/2014/main" id="{AE8C815B-7E18-CE74-1D37-2454B20069A0}"/>
+                <a16:creationId xmlns:a16="http://schemas.microsoft.com/office/drawing/2014/main" id="{133142FD-381A-0343-6F80-7C3DD96E3AE4}"/>
               </a:ext>
             </a:extLst>
           </p:cNvPr>
@@ -6352,7 +7881,7 @@
           <p:cNvPr id="43" name="Rectangle 42">
             <a:extLst>
               <a:ext uri="{FF2B5EF4-FFF2-40B4-BE49-F238E27FC236}">
-                <a16:creationId xmlns:a16="http://schemas.microsoft.com/office/drawing/2014/main" id="{77F83771-69DC-DE58-F493-65CEDB545E5C}"/>
+                <a16:creationId xmlns:a16="http://schemas.microsoft.com/office/drawing/2014/main" id="{8166F8A8-1F04-36DE-08FC-83823D231C25}"/>
               </a:ext>
             </a:extLst>
           </p:cNvPr>
@@ -6419,7 +7948,7 @@
           <p:cNvPr id="44" name="Rectangle 43">
             <a:extLst>
               <a:ext uri="{FF2B5EF4-FFF2-40B4-BE49-F238E27FC236}">
-                <a16:creationId xmlns:a16="http://schemas.microsoft.com/office/drawing/2014/main" id="{E95E7BBB-0795-3FA3-F052-AA3D1DD6498B}"/>
+                <a16:creationId xmlns:a16="http://schemas.microsoft.com/office/drawing/2014/main" id="{90014271-BB22-F835-FD78-811BE8003051}"/>
               </a:ext>
             </a:extLst>
           </p:cNvPr>
@@ -6486,7 +8015,7 @@
           <p:cNvPr id="30" name="Rectangle 42">
             <a:extLst>
               <a:ext uri="{FF2B5EF4-FFF2-40B4-BE49-F238E27FC236}">
-                <a16:creationId xmlns:a16="http://schemas.microsoft.com/office/drawing/2014/main" id="{66F9516B-8552-CDAF-75C4-8A281C36B6F8}"/>
+                <a16:creationId xmlns:a16="http://schemas.microsoft.com/office/drawing/2014/main" id="{80F60780-247F-1D15-AA6B-E31A2199640B}"/>
               </a:ext>
             </a:extLst>
           </p:cNvPr>
@@ -6553,7 +8082,7 @@
           <p:cNvPr id="32" name="Rectangle 43">
             <a:extLst>
               <a:ext uri="{FF2B5EF4-FFF2-40B4-BE49-F238E27FC236}">
-                <a16:creationId xmlns:a16="http://schemas.microsoft.com/office/drawing/2014/main" id="{005EA54E-A05B-E9A5-FE26-09518F608969}"/>
+                <a16:creationId xmlns:a16="http://schemas.microsoft.com/office/drawing/2014/main" id="{934CC753-7B29-0A5D-26FD-6CA4D03F2EB2}"/>
               </a:ext>
             </a:extLst>
           </p:cNvPr>
@@ -6620,7 +8149,7 @@
           <p:cNvPr id="33" name="Afbeelding 32" descr="Afbeelding met tekst, schermopname, Lettertype, lijn&#10;&#10;Door AI gegenereerde inhoud is mogelijk onjuist.">
             <a:extLst>
               <a:ext uri="{FF2B5EF4-FFF2-40B4-BE49-F238E27FC236}">
-                <a16:creationId xmlns:a16="http://schemas.microsoft.com/office/drawing/2014/main" id="{B7DA85B3-5265-8774-DDA8-A18DF6EB8E85}"/>
+                <a16:creationId xmlns:a16="http://schemas.microsoft.com/office/drawing/2014/main" id="{2E0CCC23-13A3-B128-CB32-4D128C47FCDC}"/>
               </a:ext>
             </a:extLst>
           </p:cNvPr>
@@ -6648,7 +8177,7 @@
     </p:spTree>
     <p:extLst>
       <p:ext uri="{BB962C8B-B14F-4D97-AF65-F5344CB8AC3E}">
-        <p14:creationId xmlns:p14="http://schemas.microsoft.com/office/powerpoint/2010/main" val="3155234622"/>
+        <p14:creationId xmlns:p14="http://schemas.microsoft.com/office/powerpoint/2010/main" val="2913644097"/>
       </p:ext>
     </p:extLst>
   </p:cSld>
@@ -6658,7 +8187,7 @@
 </p:sld>
 </file>
 
-<file path=ppt/slides/slide3.xml><?xml version="1.0" encoding="utf-8"?>
+<file path=ppt/slides/slide4.xml><?xml version="1.0" encoding="utf-8"?>
 <p:sld xmlns:a="http://schemas.openxmlformats.org/drawingml/2006/main" xmlns:r="http://schemas.openxmlformats.org/officeDocument/2006/relationships" xmlns:p="http://schemas.openxmlformats.org/presentationml/2006/main">
   <p:cSld>
     <p:spTree>
@@ -7185,7 +8714,7 @@
 </p:sld>
 </file>
 
-<file path=ppt/slides/slide4.xml><?xml version="1.0" encoding="utf-8"?>
+<file path=ppt/slides/slide5.xml><?xml version="1.0" encoding="utf-8"?>
 <p:sld xmlns:a="http://schemas.openxmlformats.org/drawingml/2006/main" xmlns:r="http://schemas.openxmlformats.org/officeDocument/2006/relationships" xmlns:p="http://schemas.openxmlformats.org/presentationml/2006/main">
   <p:cSld>
     <p:spTree>
@@ -7969,7 +9498,7 @@
 </p:sld>
 </file>
 
-<file path=ppt/slides/slide5.xml><?xml version="1.0" encoding="utf-8"?>
+<file path=ppt/slides/slide6.xml><?xml version="1.0" encoding="utf-8"?>
 <p:sld xmlns:a="http://schemas.openxmlformats.org/drawingml/2006/main" xmlns:r="http://schemas.openxmlformats.org/officeDocument/2006/relationships" xmlns:p="http://schemas.openxmlformats.org/presentationml/2006/main">
   <p:cSld>
     <p:spTree>
@@ -9451,7 +10980,7 @@
 
 <file path=ppt/webextensions/taskpanes.xml><?xml version="1.0" encoding="utf-8"?>
 <wetp:taskpanes xmlns:wetp="http://schemas.microsoft.com/office/webextensions/taskpanes/2010/11">
-  <wetp:taskpane dockstate="right" visibility="0" width="438" row="1">
+  <wetp:taskpane dockstate="right" visibility="0" width="438" row="0">
     <wetp:webextensionref xmlns:r="http://schemas.openxmlformats.org/officeDocument/2006/relationships" r:id="rId1"/>
   </wetp:taskpane>
 </wetp:taskpanes>

--- a/input/AI Transformation framework for European CEO’s.pptx
+++ b/input/AI Transformation framework for European CEO’s.pptx
@@ -5,15 +5,16 @@
     <p:sldMasterId id="2147483648" r:id="rId1"/>
   </p:sldMasterIdLst>
   <p:notesMasterIdLst>
-    <p:notesMasterId r:id="rId8"/>
+    <p:notesMasterId r:id="rId9"/>
   </p:notesMasterIdLst>
   <p:sldIdLst>
     <p:sldId id="2147480368" r:id="rId2"/>
     <p:sldId id="2147480366" r:id="rId3"/>
     <p:sldId id="2147480381" r:id="rId4"/>
-    <p:sldId id="2147480372" r:id="rId5"/>
-    <p:sldId id="2147480380" r:id="rId6"/>
-    <p:sldId id="2147480367" r:id="rId7"/>
+    <p:sldId id="2147480382" r:id="rId5"/>
+    <p:sldId id="2147480372" r:id="rId6"/>
+    <p:sldId id="2147480380" r:id="rId7"/>
+    <p:sldId id="2147480367" r:id="rId8"/>
   </p:sldIdLst>
   <p:sldSz cx="12192000" cy="6858000"/>
   <p:notesSz cx="6858000" cy="9144000"/>
@@ -330,7 +331,7 @@
           <a:p>
             <a:fld id="{FAB7A3DB-122E-499C-AAFB-3D4665CBCADB}" type="datetimeFigureOut">
               <a:rPr lang="en-GB" smtClean="0"/>
-              <a:t>04/03/2026</a:t>
+              <a:t>16/03/2026</a:t>
             </a:fld>
             <a:endParaRPr lang="en-GB"/>
           </a:p>
@@ -906,6 +907,114 @@
         <p:cNvPr id="1" name="">
           <a:extLst>
             <a:ext uri="{FF2B5EF4-FFF2-40B4-BE49-F238E27FC236}">
+              <a16:creationId xmlns:a16="http://schemas.microsoft.com/office/drawing/2014/main" id="{41CF22E4-FA30-2B59-D474-BBAB9E25685E}"/>
+            </a:ext>
+          </a:extLst>
+        </p:cNvPr>
+        <p:cNvGrpSpPr/>
+        <p:nvPr/>
+      </p:nvGrpSpPr>
+      <p:grpSpPr>
+        <a:xfrm>
+          <a:off x="0" y="0"/>
+          <a:ext cx="0" cy="0"/>
+          <a:chOff x="0" y="0"/>
+          <a:chExt cx="0" cy="0"/>
+        </a:xfrm>
+      </p:grpSpPr>
+      <p:sp>
+        <p:nvSpPr>
+          <p:cNvPr id="2" name="Slide Image Placeholder 1">
+            <a:extLst>
+              <a:ext uri="{FF2B5EF4-FFF2-40B4-BE49-F238E27FC236}">
+                <a16:creationId xmlns:a16="http://schemas.microsoft.com/office/drawing/2014/main" id="{0BA54A3B-3B69-3A33-FAF6-C774D37CDE54}"/>
+              </a:ext>
+            </a:extLst>
+          </p:cNvPr>
+          <p:cNvSpPr>
+            <a:spLocks noGrp="1" noRot="1" noChangeAspect="1"/>
+          </p:cNvSpPr>
+          <p:nvPr>
+            <p:ph type="sldImg"/>
+          </p:nvPr>
+        </p:nvSpPr>
+        <p:spPr/>
+      </p:sp>
+      <p:sp>
+        <p:nvSpPr>
+          <p:cNvPr id="3" name="Notes Placeholder 2">
+            <a:extLst>
+              <a:ext uri="{FF2B5EF4-FFF2-40B4-BE49-F238E27FC236}">
+                <a16:creationId xmlns:a16="http://schemas.microsoft.com/office/drawing/2014/main" id="{19E6AD24-7AC9-7116-B3D0-5A10C9A8AB72}"/>
+              </a:ext>
+            </a:extLst>
+          </p:cNvPr>
+          <p:cNvSpPr>
+            <a:spLocks noGrp="1"/>
+          </p:cNvSpPr>
+          <p:nvPr>
+            <p:ph type="body" idx="1"/>
+          </p:nvPr>
+        </p:nvSpPr>
+        <p:spPr/>
+        <p:txBody>
+          <a:bodyPr/>
+          <a:lstStyle/>
+          <a:p>
+            <a:endParaRPr lang="en-GB"/>
+          </a:p>
+        </p:txBody>
+      </p:sp>
+      <p:sp>
+        <p:nvSpPr>
+          <p:cNvPr id="4" name="Slide Number Placeholder 3">
+            <a:extLst>
+              <a:ext uri="{FF2B5EF4-FFF2-40B4-BE49-F238E27FC236}">
+                <a16:creationId xmlns:a16="http://schemas.microsoft.com/office/drawing/2014/main" id="{55E05A93-6EA3-EE2C-1B02-62CCB8FBB3A3}"/>
+              </a:ext>
+            </a:extLst>
+          </p:cNvPr>
+          <p:cNvSpPr>
+            <a:spLocks noGrp="1"/>
+          </p:cNvSpPr>
+          <p:nvPr>
+            <p:ph type="sldNum" sz="quarter" idx="5"/>
+          </p:nvPr>
+        </p:nvSpPr>
+        <p:spPr/>
+        <p:txBody>
+          <a:bodyPr/>
+          <a:lstStyle/>
+          <a:p>
+            <a:fld id="{BA1AFD66-2597-4960-86E3-D00E2B43A69D}" type="slidenum">
+              <a:rPr lang="en-GB" smtClean="0"/>
+              <a:t>4</a:t>
+            </a:fld>
+            <a:endParaRPr lang="en-GB"/>
+          </a:p>
+        </p:txBody>
+      </p:sp>
+    </p:spTree>
+    <p:extLst>
+      <p:ext uri="{BB962C8B-B14F-4D97-AF65-F5344CB8AC3E}">
+        <p14:creationId xmlns:p14="http://schemas.microsoft.com/office/powerpoint/2010/main" val="984859052"/>
+      </p:ext>
+    </p:extLst>
+  </p:cSld>
+  <p:clrMapOvr>
+    <a:masterClrMapping/>
+  </p:clrMapOvr>
+</p:notes>
+</file>
+
+<file path=ppt/notesSlides/notesSlide5.xml><?xml version="1.0" encoding="utf-8"?>
+<p:notes xmlns:a="http://schemas.openxmlformats.org/drawingml/2006/main" xmlns:r="http://schemas.openxmlformats.org/officeDocument/2006/relationships" xmlns:p="http://schemas.openxmlformats.org/presentationml/2006/main">
+  <p:cSld>
+    <p:spTree>
+      <p:nvGrpSpPr>
+        <p:cNvPr id="1" name="">
+          <a:extLst>
+            <a:ext uri="{FF2B5EF4-FFF2-40B4-BE49-F238E27FC236}">
               <a16:creationId xmlns:a16="http://schemas.microsoft.com/office/drawing/2014/main" id="{9ACE62BF-62B2-82DC-C376-73CE77938791}"/>
             </a:ext>
           </a:extLst>
@@ -987,7 +1096,7 @@
           <a:p>
             <a:fld id="{BA1AFD66-2597-4960-86E3-D00E2B43A69D}" type="slidenum">
               <a:rPr lang="en-GB" smtClean="0"/>
-              <a:t>4</a:t>
+              <a:t>5</a:t>
             </a:fld>
             <a:endParaRPr lang="en-GB"/>
           </a:p>
@@ -1006,7 +1115,7 @@
 </p:notes>
 </file>
 
-<file path=ppt/notesSlides/notesSlide5.xml><?xml version="1.0" encoding="utf-8"?>
+<file path=ppt/notesSlides/notesSlide6.xml><?xml version="1.0" encoding="utf-8"?>
 <p:notes xmlns:a="http://schemas.openxmlformats.org/drawingml/2006/main" xmlns:r="http://schemas.openxmlformats.org/officeDocument/2006/relationships" xmlns:p="http://schemas.openxmlformats.org/presentationml/2006/main">
   <p:cSld>
     <p:spTree>
@@ -1095,7 +1204,7 @@
           <a:p>
             <a:fld id="{BA1AFD66-2597-4960-86E3-D00E2B43A69D}" type="slidenum">
               <a:rPr lang="en-GB" smtClean="0"/>
-              <a:t>5</a:t>
+              <a:t>6</a:t>
             </a:fld>
             <a:endParaRPr lang="en-GB"/>
           </a:p>
@@ -1114,7 +1223,7 @@
 </p:notes>
 </file>
 
-<file path=ppt/notesSlides/notesSlide6.xml><?xml version="1.0" encoding="utf-8"?>
+<file path=ppt/notesSlides/notesSlide7.xml><?xml version="1.0" encoding="utf-8"?>
 <p:notes xmlns:a="http://schemas.openxmlformats.org/drawingml/2006/main" xmlns:r="http://schemas.openxmlformats.org/officeDocument/2006/relationships" xmlns:p="http://schemas.openxmlformats.org/presentationml/2006/main">
   <p:cSld>
     <p:spTree>
@@ -1203,7 +1312,7 @@
           <a:p>
             <a:fld id="{BA1AFD66-2597-4960-86E3-D00E2B43A69D}" type="slidenum">
               <a:rPr lang="en-GB" smtClean="0"/>
-              <a:t>6</a:t>
+              <a:t>7</a:t>
             </a:fld>
             <a:endParaRPr lang="en-GB"/>
           </a:p>
@@ -1371,7 +1480,7 @@
           <a:p>
             <a:fld id="{7E530143-BC45-40DA-908E-84B30ACFDA34}" type="datetimeFigureOut">
               <a:rPr lang="en-GB" smtClean="0"/>
-              <a:t>04/03/2026</a:t>
+              <a:t>16/03/2026</a:t>
             </a:fld>
             <a:endParaRPr lang="en-GB"/>
           </a:p>
@@ -1571,7 +1680,7 @@
           <a:p>
             <a:fld id="{7E530143-BC45-40DA-908E-84B30ACFDA34}" type="datetimeFigureOut">
               <a:rPr lang="en-GB" smtClean="0"/>
-              <a:t>04/03/2026</a:t>
+              <a:t>16/03/2026</a:t>
             </a:fld>
             <a:endParaRPr lang="en-GB"/>
           </a:p>
@@ -1781,7 +1890,7 @@
           <a:p>
             <a:fld id="{7E530143-BC45-40DA-908E-84B30ACFDA34}" type="datetimeFigureOut">
               <a:rPr lang="en-GB" smtClean="0"/>
-              <a:t>04/03/2026</a:t>
+              <a:t>16/03/2026</a:t>
             </a:fld>
             <a:endParaRPr lang="en-GB"/>
           </a:p>
@@ -2405,7 +2514,7 @@
           <a:p>
             <a:fld id="{7E530143-BC45-40DA-908E-84B30ACFDA34}" type="datetimeFigureOut">
               <a:rPr lang="en-GB" smtClean="0"/>
-              <a:t>04/03/2026</a:t>
+              <a:t>16/03/2026</a:t>
             </a:fld>
             <a:endParaRPr lang="en-GB"/>
           </a:p>
@@ -2681,7 +2790,7 @@
           <a:p>
             <a:fld id="{7E530143-BC45-40DA-908E-84B30ACFDA34}" type="datetimeFigureOut">
               <a:rPr lang="en-GB" smtClean="0"/>
-              <a:t>04/03/2026</a:t>
+              <a:t>16/03/2026</a:t>
             </a:fld>
             <a:endParaRPr lang="en-GB"/>
           </a:p>
@@ -2949,7 +3058,7 @@
           <a:p>
             <a:fld id="{7E530143-BC45-40DA-908E-84B30ACFDA34}" type="datetimeFigureOut">
               <a:rPr lang="en-GB" smtClean="0"/>
-              <a:t>04/03/2026</a:t>
+              <a:t>16/03/2026</a:t>
             </a:fld>
             <a:endParaRPr lang="en-GB"/>
           </a:p>
@@ -3364,7 +3473,7 @@
           <a:p>
             <a:fld id="{7E530143-BC45-40DA-908E-84B30ACFDA34}" type="datetimeFigureOut">
               <a:rPr lang="en-GB" smtClean="0"/>
-              <a:t>04/03/2026</a:t>
+              <a:t>16/03/2026</a:t>
             </a:fld>
             <a:endParaRPr lang="en-GB"/>
           </a:p>
@@ -3506,7 +3615,7 @@
           <a:p>
             <a:fld id="{7E530143-BC45-40DA-908E-84B30ACFDA34}" type="datetimeFigureOut">
               <a:rPr lang="en-GB" smtClean="0"/>
-              <a:t>04/03/2026</a:t>
+              <a:t>16/03/2026</a:t>
             </a:fld>
             <a:endParaRPr lang="en-GB"/>
           </a:p>
@@ -3619,7 +3728,7 @@
           <a:p>
             <a:fld id="{7E530143-BC45-40DA-908E-84B30ACFDA34}" type="datetimeFigureOut">
               <a:rPr lang="en-GB" smtClean="0"/>
-              <a:t>04/03/2026</a:t>
+              <a:t>16/03/2026</a:t>
             </a:fld>
             <a:endParaRPr lang="en-GB"/>
           </a:p>
@@ -3932,7 +4041,7 @@
           <a:p>
             <a:fld id="{7E530143-BC45-40DA-908E-84B30ACFDA34}" type="datetimeFigureOut">
               <a:rPr lang="en-GB" smtClean="0"/>
-              <a:t>04/03/2026</a:t>
+              <a:t>16/03/2026</a:t>
             </a:fld>
             <a:endParaRPr lang="en-GB"/>
           </a:p>
@@ -4221,7 +4330,7 @@
           <a:p>
             <a:fld id="{7E530143-BC45-40DA-908E-84B30ACFDA34}" type="datetimeFigureOut">
               <a:rPr lang="en-GB" smtClean="0"/>
-              <a:t>04/03/2026</a:t>
+              <a:t>16/03/2026</a:t>
             </a:fld>
             <a:endParaRPr lang="en-GB"/>
           </a:p>
@@ -4464,7 +4573,7 @@
           <a:p>
             <a:fld id="{7E530143-BC45-40DA-908E-84B30ACFDA34}" type="datetimeFigureOut">
               <a:rPr lang="en-GB" smtClean="0"/>
-              <a:t>04/03/2026</a:t>
+              <a:t>16/03/2026</a:t>
             </a:fld>
             <a:endParaRPr lang="en-GB"/>
           </a:p>
@@ -8195,6 +8304,1324 @@
         <p:cNvPr id="1" name="">
           <a:extLst>
             <a:ext uri="{FF2B5EF4-FFF2-40B4-BE49-F238E27FC236}">
+              <a16:creationId xmlns:a16="http://schemas.microsoft.com/office/drawing/2014/main" id="{7D8BA248-EF49-F51A-CBDA-CDB536E050A4}"/>
+            </a:ext>
+          </a:extLst>
+        </p:cNvPr>
+        <p:cNvGrpSpPr/>
+        <p:nvPr/>
+      </p:nvGrpSpPr>
+      <p:grpSpPr>
+        <a:xfrm>
+          <a:off x="0" y="0"/>
+          <a:ext cx="0" cy="0"/>
+          <a:chOff x="0" y="0"/>
+          <a:chExt cx="0" cy="0"/>
+        </a:xfrm>
+      </p:grpSpPr>
+      <p:sp>
+        <p:nvSpPr>
+          <p:cNvPr id="2" name="Rechthoek 1">
+            <a:extLst>
+              <a:ext uri="{FF2B5EF4-FFF2-40B4-BE49-F238E27FC236}">
+                <a16:creationId xmlns:a16="http://schemas.microsoft.com/office/drawing/2014/main" id="{6CED7A95-861C-C15B-BDC7-8EFDB6F02F4F}"/>
+              </a:ext>
+            </a:extLst>
+          </p:cNvPr>
+          <p:cNvSpPr/>
+          <p:nvPr/>
+        </p:nvSpPr>
+        <p:spPr>
+          <a:xfrm>
+            <a:off x="1947041" y="409251"/>
+            <a:ext cx="8442435" cy="4690889"/>
+          </a:xfrm>
+          <a:prstGeom prst="rect">
+            <a:avLst/>
+          </a:prstGeom>
+          <a:solidFill>
+            <a:schemeClr val="bg1"/>
+          </a:solidFill>
+          <a:ln>
+            <a:noFill/>
+          </a:ln>
+        </p:spPr>
+        <p:style>
+          <a:lnRef idx="2">
+            <a:schemeClr val="accent1">
+              <a:shade val="15000"/>
+            </a:schemeClr>
+          </a:lnRef>
+          <a:fillRef idx="1">
+            <a:schemeClr val="accent1"/>
+          </a:fillRef>
+          <a:effectRef idx="0">
+            <a:schemeClr val="accent1"/>
+          </a:effectRef>
+          <a:fontRef idx="minor">
+            <a:schemeClr val="lt1"/>
+          </a:fontRef>
+        </p:style>
+        <p:txBody>
+          <a:bodyPr rtlCol="0" anchor="ctr"/>
+          <a:lstStyle/>
+          <a:p>
+            <a:pPr algn="ctr"/>
+            <a:endParaRPr lang="en-GB"/>
+          </a:p>
+        </p:txBody>
+      </p:sp>
+      <p:sp>
+        <p:nvSpPr>
+          <p:cNvPr id="3" name="Title 2">
+            <a:extLst>
+              <a:ext uri="{FF2B5EF4-FFF2-40B4-BE49-F238E27FC236}">
+                <a16:creationId xmlns:a16="http://schemas.microsoft.com/office/drawing/2014/main" id="{BF651015-06D4-F8F3-4AC0-6C159D0D7FDC}"/>
+              </a:ext>
+            </a:extLst>
+          </p:cNvPr>
+          <p:cNvSpPr>
+            <a:spLocks noGrp="1"/>
+          </p:cNvSpPr>
+          <p:nvPr>
+            <p:ph type="title"/>
+          </p:nvPr>
+        </p:nvSpPr>
+        <p:spPr>
+          <a:xfrm>
+            <a:off x="3652782" y="629113"/>
+            <a:ext cx="4886436" cy="360099"/>
+          </a:xfrm>
+        </p:spPr>
+        <p:txBody>
+          <a:bodyPr>
+            <a:normAutofit/>
+          </a:bodyPr>
+          <a:lstStyle/>
+          <a:p>
+            <a:pPr algn="ctr"/>
+            <a:r>
+              <a:rPr lang="en-GB" noProof="0" dirty="0">
+                <a:solidFill>
+                  <a:schemeClr val="tx1">
+                    <a:lumMod val="85000"/>
+                    <a:lumOff val="15000"/>
+                  </a:schemeClr>
+                </a:solidFill>
+              </a:rPr>
+              <a:t>AI Transformation Framework</a:t>
+            </a:r>
+          </a:p>
+        </p:txBody>
+      </p:sp>
+      <p:sp>
+        <p:nvSpPr>
+          <p:cNvPr id="17" name="Rectangle 16">
+            <a:extLst>
+              <a:ext uri="{FF2B5EF4-FFF2-40B4-BE49-F238E27FC236}">
+                <a16:creationId xmlns:a16="http://schemas.microsoft.com/office/drawing/2014/main" id="{854FBC05-8076-835B-A51A-382B2C7273FA}"/>
+              </a:ext>
+            </a:extLst>
+          </p:cNvPr>
+          <p:cNvSpPr/>
+          <p:nvPr/>
+        </p:nvSpPr>
+        <p:spPr>
+          <a:xfrm>
+            <a:off x="2265680" y="1273145"/>
+            <a:ext cx="7658112" cy="569848"/>
+          </a:xfrm>
+          <a:prstGeom prst="roundRect">
+            <a:avLst/>
+          </a:prstGeom>
+          <a:noFill/>
+          <a:ln>
+            <a:solidFill>
+              <a:schemeClr val="tx1">
+                <a:lumMod val="85000"/>
+                <a:lumOff val="15000"/>
+              </a:schemeClr>
+            </a:solidFill>
+          </a:ln>
+        </p:spPr>
+        <p:style>
+          <a:lnRef idx="2">
+            <a:schemeClr val="accent1">
+              <a:shade val="15000"/>
+            </a:schemeClr>
+          </a:lnRef>
+          <a:fillRef idx="1">
+            <a:schemeClr val="accent1"/>
+          </a:fillRef>
+          <a:effectRef idx="0">
+            <a:schemeClr val="accent1"/>
+          </a:effectRef>
+          <a:fontRef idx="minor">
+            <a:schemeClr val="lt1"/>
+          </a:fontRef>
+        </p:style>
+        <p:txBody>
+          <a:bodyPr rtlCol="0" anchor="ctr"/>
+          <a:lstStyle/>
+          <a:p>
+            <a:pPr algn="ctr"/>
+            <a:endParaRPr lang="en-GB" noProof="0" dirty="0"/>
+          </a:p>
+        </p:txBody>
+      </p:sp>
+      <p:sp>
+        <p:nvSpPr>
+          <p:cNvPr id="20" name="TextBox 19">
+            <a:extLst>
+              <a:ext uri="{FF2B5EF4-FFF2-40B4-BE49-F238E27FC236}">
+                <a16:creationId xmlns:a16="http://schemas.microsoft.com/office/drawing/2014/main" id="{79702F44-A03C-80FC-8FB0-0826BA42DE86}"/>
+              </a:ext>
+            </a:extLst>
+          </p:cNvPr>
+          <p:cNvSpPr txBox="1"/>
+          <p:nvPr/>
+        </p:nvSpPr>
+        <p:spPr>
+          <a:xfrm>
+            <a:off x="2418950" y="1343051"/>
+            <a:ext cx="3874310" cy="383054"/>
+          </a:xfrm>
+          <a:prstGeom prst="rect">
+            <a:avLst/>
+          </a:prstGeom>
+          <a:noFill/>
+        </p:spPr>
+        <p:txBody>
+          <a:bodyPr wrap="square" lIns="0" tIns="0" rIns="0" bIns="0" rtlCol="0">
+            <a:spAutoFit/>
+          </a:bodyPr>
+          <a:lstStyle/>
+          <a:p>
+            <a:pPr>
+              <a:buSzPct val="100000"/>
+            </a:pPr>
+            <a:r>
+              <a:rPr lang="en-GB" sz="1400" b="1" noProof="0" dirty="0">
+                <a:solidFill>
+                  <a:schemeClr val="tx1">
+                    <a:lumMod val="85000"/>
+                    <a:lumOff val="15000"/>
+                  </a:schemeClr>
+                </a:solidFill>
+                <a:latin typeface="DM Sans" pitchFamily="2" charset="0"/>
+              </a:rPr>
+              <a:t>VISION</a:t>
+            </a:r>
+            <a:endParaRPr lang="en-GB" sz="1200" b="1" noProof="0" dirty="0">
+              <a:solidFill>
+                <a:schemeClr val="tx1">
+                  <a:lumMod val="85000"/>
+                  <a:lumOff val="15000"/>
+                </a:schemeClr>
+              </a:solidFill>
+              <a:latin typeface="DM Sans" pitchFamily="2" charset="0"/>
+            </a:endParaRPr>
+          </a:p>
+          <a:p>
+            <a:pPr>
+              <a:lnSpc>
+                <a:spcPts val="1300"/>
+              </a:lnSpc>
+              <a:buSzPct val="100000"/>
+            </a:pPr>
+            <a:r>
+              <a:rPr lang="en-GB" sz="1200" noProof="0" dirty="0">
+                <a:solidFill>
+                  <a:schemeClr val="tx1">
+                    <a:lumMod val="85000"/>
+                    <a:lumOff val="15000"/>
+                  </a:schemeClr>
+                </a:solidFill>
+                <a:latin typeface="+mj-lt"/>
+              </a:rPr>
+              <a:t>Vision</a:t>
+            </a:r>
+            <a:r>
+              <a:rPr lang="en-GB" sz="1200" b="1" noProof="0" dirty="0">
+                <a:solidFill>
+                  <a:schemeClr val="tx1">
+                    <a:lumMod val="85000"/>
+                    <a:lumOff val="15000"/>
+                  </a:schemeClr>
+                </a:solidFill>
+                <a:latin typeface="+mj-lt"/>
+              </a:rPr>
+              <a:t>, </a:t>
+            </a:r>
+            <a:r>
+              <a:rPr lang="en-GB" sz="1200" noProof="0" dirty="0">
+                <a:solidFill>
+                  <a:schemeClr val="tx1">
+                    <a:lumMod val="85000"/>
+                    <a:lumOff val="15000"/>
+                  </a:schemeClr>
+                </a:solidFill>
+                <a:latin typeface="+mj-lt"/>
+              </a:rPr>
+              <a:t>strategy, values, objectives</a:t>
+            </a:r>
+          </a:p>
+        </p:txBody>
+      </p:sp>
+      <p:sp>
+        <p:nvSpPr>
+          <p:cNvPr id="151" name="Rectangle 150">
+            <a:extLst>
+              <a:ext uri="{FF2B5EF4-FFF2-40B4-BE49-F238E27FC236}">
+                <a16:creationId xmlns:a16="http://schemas.microsoft.com/office/drawing/2014/main" id="{41F7B64D-5435-407E-622F-30D44BB5CD32}"/>
+              </a:ext>
+            </a:extLst>
+          </p:cNvPr>
+          <p:cNvSpPr/>
+          <p:nvPr/>
+        </p:nvSpPr>
+        <p:spPr>
+          <a:xfrm>
+            <a:off x="2271959" y="3028093"/>
+            <a:ext cx="2480582" cy="908874"/>
+          </a:xfrm>
+          <a:prstGeom prst="roundRect">
+            <a:avLst/>
+          </a:prstGeom>
+          <a:noFill/>
+          <a:ln>
+            <a:solidFill>
+              <a:schemeClr val="tx1">
+                <a:lumMod val="85000"/>
+                <a:lumOff val="15000"/>
+              </a:schemeClr>
+            </a:solidFill>
+          </a:ln>
+        </p:spPr>
+        <p:style>
+          <a:lnRef idx="2">
+            <a:schemeClr val="accent1">
+              <a:shade val="15000"/>
+            </a:schemeClr>
+          </a:lnRef>
+          <a:fillRef idx="1">
+            <a:schemeClr val="accent1"/>
+          </a:fillRef>
+          <a:effectRef idx="0">
+            <a:schemeClr val="accent1"/>
+          </a:effectRef>
+          <a:fontRef idx="minor">
+            <a:schemeClr val="lt1"/>
+          </a:fontRef>
+        </p:style>
+        <p:txBody>
+          <a:bodyPr rtlCol="0" anchor="ctr"/>
+          <a:lstStyle/>
+          <a:p>
+            <a:pPr algn="ctr"/>
+            <a:endParaRPr lang="en-GB" noProof="0" dirty="0"/>
+          </a:p>
+        </p:txBody>
+      </p:sp>
+      <p:sp>
+        <p:nvSpPr>
+          <p:cNvPr id="154" name="Rectangle 153">
+            <a:extLst>
+              <a:ext uri="{FF2B5EF4-FFF2-40B4-BE49-F238E27FC236}">
+                <a16:creationId xmlns:a16="http://schemas.microsoft.com/office/drawing/2014/main" id="{D5BBACB4-7591-438A-25EA-79E642E138D4}"/>
+              </a:ext>
+            </a:extLst>
+          </p:cNvPr>
+          <p:cNvSpPr/>
+          <p:nvPr/>
+        </p:nvSpPr>
+        <p:spPr>
+          <a:xfrm>
+            <a:off x="4858848" y="3028093"/>
+            <a:ext cx="2480582" cy="908874"/>
+          </a:xfrm>
+          <a:prstGeom prst="roundRect">
+            <a:avLst/>
+          </a:prstGeom>
+          <a:noFill/>
+          <a:ln>
+            <a:solidFill>
+              <a:schemeClr val="tx1">
+                <a:lumMod val="85000"/>
+                <a:lumOff val="15000"/>
+              </a:schemeClr>
+            </a:solidFill>
+          </a:ln>
+        </p:spPr>
+        <p:style>
+          <a:lnRef idx="2">
+            <a:schemeClr val="accent1">
+              <a:shade val="15000"/>
+            </a:schemeClr>
+          </a:lnRef>
+          <a:fillRef idx="1">
+            <a:schemeClr val="accent1"/>
+          </a:fillRef>
+          <a:effectRef idx="0">
+            <a:schemeClr val="accent1"/>
+          </a:effectRef>
+          <a:fontRef idx="minor">
+            <a:schemeClr val="lt1"/>
+          </a:fontRef>
+        </p:style>
+        <p:txBody>
+          <a:bodyPr rtlCol="0" anchor="ctr"/>
+          <a:lstStyle/>
+          <a:p>
+            <a:pPr algn="ctr"/>
+            <a:endParaRPr lang="en-GB" noProof="0" dirty="0"/>
+          </a:p>
+        </p:txBody>
+      </p:sp>
+      <p:sp>
+        <p:nvSpPr>
+          <p:cNvPr id="156" name="Rectangle 155">
+            <a:extLst>
+              <a:ext uri="{FF2B5EF4-FFF2-40B4-BE49-F238E27FC236}">
+                <a16:creationId xmlns:a16="http://schemas.microsoft.com/office/drawing/2014/main" id="{41A130F9-0930-C628-981A-7758A9ACE534}"/>
+              </a:ext>
+            </a:extLst>
+          </p:cNvPr>
+          <p:cNvSpPr/>
+          <p:nvPr/>
+        </p:nvSpPr>
+        <p:spPr>
+          <a:xfrm>
+            <a:off x="7445738" y="3028093"/>
+            <a:ext cx="2480582" cy="908874"/>
+          </a:xfrm>
+          <a:prstGeom prst="roundRect">
+            <a:avLst/>
+          </a:prstGeom>
+          <a:noFill/>
+          <a:ln>
+            <a:solidFill>
+              <a:schemeClr val="tx1">
+                <a:lumMod val="85000"/>
+                <a:lumOff val="15000"/>
+              </a:schemeClr>
+            </a:solidFill>
+          </a:ln>
+        </p:spPr>
+        <p:style>
+          <a:lnRef idx="2">
+            <a:schemeClr val="accent1">
+              <a:shade val="15000"/>
+            </a:schemeClr>
+          </a:lnRef>
+          <a:fillRef idx="1">
+            <a:schemeClr val="accent1"/>
+          </a:fillRef>
+          <a:effectRef idx="0">
+            <a:schemeClr val="accent1"/>
+          </a:effectRef>
+          <a:fontRef idx="minor">
+            <a:schemeClr val="lt1"/>
+          </a:fontRef>
+        </p:style>
+        <p:txBody>
+          <a:bodyPr rtlCol="0" anchor="ctr"/>
+          <a:lstStyle/>
+          <a:p>
+            <a:pPr algn="ctr"/>
+            <a:endParaRPr lang="en-GB" noProof="0" dirty="0"/>
+          </a:p>
+        </p:txBody>
+      </p:sp>
+      <p:sp>
+        <p:nvSpPr>
+          <p:cNvPr id="152" name="TextBox 151">
+            <a:extLst>
+              <a:ext uri="{FF2B5EF4-FFF2-40B4-BE49-F238E27FC236}">
+                <a16:creationId xmlns:a16="http://schemas.microsoft.com/office/drawing/2014/main" id="{61BC1662-D73D-BAB8-E82C-9675A5C2652B}"/>
+              </a:ext>
+            </a:extLst>
+          </p:cNvPr>
+          <p:cNvSpPr txBox="1"/>
+          <p:nvPr/>
+        </p:nvSpPr>
+        <p:spPr>
+          <a:xfrm>
+            <a:off x="2418949" y="3094599"/>
+            <a:ext cx="2306191" cy="769441"/>
+          </a:xfrm>
+          <a:prstGeom prst="rect">
+            <a:avLst/>
+          </a:prstGeom>
+          <a:noFill/>
+        </p:spPr>
+        <p:txBody>
+          <a:bodyPr wrap="square" lIns="0" tIns="0" rIns="0" bIns="0" rtlCol="0">
+            <a:spAutoFit/>
+          </a:bodyPr>
+          <a:lstStyle/>
+          <a:p>
+            <a:pPr>
+              <a:buSzPct val="100000"/>
+            </a:pPr>
+            <a:r>
+              <a:rPr lang="en-GB" sz="1400" b="1" noProof="0" dirty="0">
+                <a:solidFill>
+                  <a:schemeClr val="tx1">
+                    <a:lumMod val="85000"/>
+                    <a:lumOff val="15000"/>
+                  </a:schemeClr>
+                </a:solidFill>
+                <a:latin typeface="DM Sans" pitchFamily="2" charset="0"/>
+              </a:rPr>
+              <a:t>PEOPLE</a:t>
+            </a:r>
+          </a:p>
+          <a:p>
+            <a:pPr>
+              <a:buSzPct val="100000"/>
+            </a:pPr>
+            <a:r>
+              <a:rPr lang="en-GB" sz="1200" noProof="0" dirty="0">
+                <a:solidFill>
+                  <a:schemeClr val="tx1">
+                    <a:lumMod val="85000"/>
+                    <a:lumOff val="15000"/>
+                  </a:schemeClr>
+                </a:solidFill>
+                <a:latin typeface="+mj-lt"/>
+              </a:rPr>
+              <a:t>Roles, target skills &amp; gaps, org sizing, talent journey, training, team incentives</a:t>
+            </a:r>
+          </a:p>
+        </p:txBody>
+      </p:sp>
+      <p:sp>
+        <p:nvSpPr>
+          <p:cNvPr id="155" name="TextBox 154">
+            <a:extLst>
+              <a:ext uri="{FF2B5EF4-FFF2-40B4-BE49-F238E27FC236}">
+                <a16:creationId xmlns:a16="http://schemas.microsoft.com/office/drawing/2014/main" id="{D6773BBC-2B68-F3FD-662D-3FDFA5E700A0}"/>
+              </a:ext>
+            </a:extLst>
+          </p:cNvPr>
+          <p:cNvSpPr txBox="1"/>
+          <p:nvPr/>
+        </p:nvSpPr>
+        <p:spPr>
+          <a:xfrm>
+            <a:off x="5010186" y="3094599"/>
+            <a:ext cx="2044410" cy="549766"/>
+          </a:xfrm>
+          <a:prstGeom prst="rect">
+            <a:avLst/>
+          </a:prstGeom>
+          <a:noFill/>
+        </p:spPr>
+        <p:txBody>
+          <a:bodyPr wrap="square" lIns="0" tIns="0" rIns="0" bIns="0" rtlCol="0">
+            <a:spAutoFit/>
+          </a:bodyPr>
+          <a:lstStyle/>
+          <a:p>
+            <a:pPr>
+              <a:buSzPct val="100000"/>
+            </a:pPr>
+            <a:r>
+              <a:rPr lang="en-GB" sz="1400" b="1" dirty="0">
+                <a:solidFill>
+                  <a:schemeClr val="tx1">
+                    <a:lumMod val="85000"/>
+                    <a:lumOff val="15000"/>
+                  </a:schemeClr>
+                </a:solidFill>
+                <a:latin typeface="DM Sans" pitchFamily="2" charset="0"/>
+              </a:rPr>
+              <a:t>PROCESS</a:t>
+            </a:r>
+          </a:p>
+          <a:p>
+            <a:pPr>
+              <a:lnSpc>
+                <a:spcPts val="1300"/>
+              </a:lnSpc>
+              <a:buSzPct val="100000"/>
+            </a:pPr>
+            <a:r>
+              <a:rPr lang="en-GB" sz="1200" dirty="0">
+                <a:solidFill>
+                  <a:schemeClr val="tx1">
+                    <a:lumMod val="85000"/>
+                    <a:lumOff val="15000"/>
+                  </a:schemeClr>
+                </a:solidFill>
+                <a:latin typeface="+mj-lt"/>
+              </a:rPr>
+              <a:t>Org. design, cross-functional teams, product way-of-working</a:t>
+            </a:r>
+          </a:p>
+        </p:txBody>
+      </p:sp>
+      <p:sp>
+        <p:nvSpPr>
+          <p:cNvPr id="157" name="TextBox 156">
+            <a:extLst>
+              <a:ext uri="{FF2B5EF4-FFF2-40B4-BE49-F238E27FC236}">
+                <a16:creationId xmlns:a16="http://schemas.microsoft.com/office/drawing/2014/main" id="{8666AC02-3F8E-E754-C3F1-B208CBEF0099}"/>
+              </a:ext>
+            </a:extLst>
+          </p:cNvPr>
+          <p:cNvSpPr txBox="1"/>
+          <p:nvPr/>
+        </p:nvSpPr>
+        <p:spPr>
+          <a:xfrm>
+            <a:off x="7590340" y="3094599"/>
+            <a:ext cx="2050934" cy="518988"/>
+          </a:xfrm>
+          <a:prstGeom prst="rect">
+            <a:avLst/>
+          </a:prstGeom>
+          <a:noFill/>
+        </p:spPr>
+        <p:txBody>
+          <a:bodyPr wrap="square" lIns="0" tIns="0" rIns="0" bIns="0" rtlCol="0">
+            <a:spAutoFit/>
+          </a:bodyPr>
+          <a:lstStyle/>
+          <a:p>
+            <a:pPr>
+              <a:buSzPct val="100000"/>
+            </a:pPr>
+            <a:r>
+              <a:rPr lang="en-GB" sz="1200" b="1" noProof="0" dirty="0">
+                <a:solidFill>
+                  <a:schemeClr val="tx1">
+                    <a:lumMod val="85000"/>
+                    <a:lumOff val="15000"/>
+                  </a:schemeClr>
+                </a:solidFill>
+                <a:latin typeface="DM Sans" pitchFamily="2" charset="0"/>
+              </a:rPr>
+              <a:t>ENABLEMENT</a:t>
+            </a:r>
+          </a:p>
+          <a:p>
+            <a:pPr>
+              <a:lnSpc>
+                <a:spcPts val="1300"/>
+              </a:lnSpc>
+              <a:buSzPct val="100000"/>
+            </a:pPr>
+            <a:r>
+              <a:rPr lang="en-GB" sz="1200" noProof="0" dirty="0">
+                <a:solidFill>
+                  <a:schemeClr val="tx1">
+                    <a:lumMod val="85000"/>
+                    <a:lumOff val="15000"/>
+                  </a:schemeClr>
+                </a:solidFill>
+                <a:latin typeface="+mj-lt"/>
+              </a:rPr>
+              <a:t>Culture, AI &amp; engineering toolbox, automation, agents, skills</a:t>
+            </a:r>
+          </a:p>
+        </p:txBody>
+      </p:sp>
+      <p:sp>
+        <p:nvSpPr>
+          <p:cNvPr id="162" name="Rectangle 161">
+            <a:extLst>
+              <a:ext uri="{FF2B5EF4-FFF2-40B4-BE49-F238E27FC236}">
+                <a16:creationId xmlns:a16="http://schemas.microsoft.com/office/drawing/2014/main" id="{DFE2ED97-2E3F-FA70-0C4E-672C48D375F5}"/>
+              </a:ext>
+            </a:extLst>
+          </p:cNvPr>
+          <p:cNvSpPr/>
+          <p:nvPr/>
+        </p:nvSpPr>
+        <p:spPr>
+          <a:xfrm>
+            <a:off x="2271959" y="4075080"/>
+            <a:ext cx="3771823" cy="908874"/>
+          </a:xfrm>
+          <a:prstGeom prst="roundRect">
+            <a:avLst/>
+          </a:prstGeom>
+          <a:noFill/>
+          <a:ln>
+            <a:solidFill>
+              <a:schemeClr val="tx1">
+                <a:lumMod val="85000"/>
+                <a:lumOff val="15000"/>
+              </a:schemeClr>
+            </a:solidFill>
+          </a:ln>
+        </p:spPr>
+        <p:style>
+          <a:lnRef idx="2">
+            <a:schemeClr val="accent1">
+              <a:shade val="15000"/>
+            </a:schemeClr>
+          </a:lnRef>
+          <a:fillRef idx="1">
+            <a:schemeClr val="accent1"/>
+          </a:fillRef>
+          <a:effectRef idx="0">
+            <a:schemeClr val="accent1"/>
+          </a:effectRef>
+          <a:fontRef idx="minor">
+            <a:schemeClr val="lt1"/>
+          </a:fontRef>
+        </p:style>
+        <p:txBody>
+          <a:bodyPr rtlCol="0" anchor="ctr"/>
+          <a:lstStyle/>
+          <a:p>
+            <a:pPr algn="ctr"/>
+            <a:endParaRPr lang="en-GB" noProof="0" dirty="0"/>
+          </a:p>
+        </p:txBody>
+      </p:sp>
+      <p:sp>
+        <p:nvSpPr>
+          <p:cNvPr id="165" name="Rectangle 164">
+            <a:extLst>
+              <a:ext uri="{FF2B5EF4-FFF2-40B4-BE49-F238E27FC236}">
+                <a16:creationId xmlns:a16="http://schemas.microsoft.com/office/drawing/2014/main" id="{385E0A92-67D8-D588-5217-B92EF10469E0}"/>
+              </a:ext>
+            </a:extLst>
+          </p:cNvPr>
+          <p:cNvSpPr/>
+          <p:nvPr/>
+        </p:nvSpPr>
+        <p:spPr>
+          <a:xfrm>
+            <a:off x="6151970" y="4075080"/>
+            <a:ext cx="3771823" cy="908874"/>
+          </a:xfrm>
+          <a:prstGeom prst="roundRect">
+            <a:avLst/>
+          </a:prstGeom>
+          <a:noFill/>
+          <a:ln>
+            <a:solidFill>
+              <a:schemeClr val="tx1">
+                <a:lumMod val="85000"/>
+                <a:lumOff val="15000"/>
+              </a:schemeClr>
+            </a:solidFill>
+          </a:ln>
+        </p:spPr>
+        <p:style>
+          <a:lnRef idx="2">
+            <a:schemeClr val="accent1">
+              <a:shade val="15000"/>
+            </a:schemeClr>
+          </a:lnRef>
+          <a:fillRef idx="1">
+            <a:schemeClr val="accent1"/>
+          </a:fillRef>
+          <a:effectRef idx="0">
+            <a:schemeClr val="accent1"/>
+          </a:effectRef>
+          <a:fontRef idx="minor">
+            <a:schemeClr val="lt1"/>
+          </a:fontRef>
+        </p:style>
+        <p:txBody>
+          <a:bodyPr rtlCol="0" anchor="ctr"/>
+          <a:lstStyle/>
+          <a:p>
+            <a:pPr algn="ctr"/>
+            <a:endParaRPr lang="en-GB" noProof="0" dirty="0"/>
+          </a:p>
+        </p:txBody>
+      </p:sp>
+      <p:sp>
+        <p:nvSpPr>
+          <p:cNvPr id="163" name="TextBox 162">
+            <a:extLst>
+              <a:ext uri="{FF2B5EF4-FFF2-40B4-BE49-F238E27FC236}">
+                <a16:creationId xmlns:a16="http://schemas.microsoft.com/office/drawing/2014/main" id="{80DC8BB1-3935-E17A-25BB-74A2F1D33D3A}"/>
+              </a:ext>
+            </a:extLst>
+          </p:cNvPr>
+          <p:cNvSpPr txBox="1"/>
+          <p:nvPr/>
+        </p:nvSpPr>
+        <p:spPr>
+          <a:xfrm>
+            <a:off x="2418952" y="4141586"/>
+            <a:ext cx="2792111" cy="556947"/>
+          </a:xfrm>
+          <a:prstGeom prst="rect">
+            <a:avLst/>
+          </a:prstGeom>
+          <a:noFill/>
+        </p:spPr>
+        <p:txBody>
+          <a:bodyPr wrap="square" lIns="0" tIns="0" rIns="0" bIns="0" rtlCol="0">
+            <a:spAutoFit/>
+          </a:bodyPr>
+          <a:lstStyle/>
+          <a:p>
+            <a:pPr>
+              <a:buSzPct val="100000"/>
+            </a:pPr>
+            <a:r>
+              <a:rPr lang="en-GB" sz="1400" b="1" dirty="0">
+                <a:solidFill>
+                  <a:schemeClr val="tx1">
+                    <a:lumMod val="85000"/>
+                    <a:lumOff val="15000"/>
+                  </a:schemeClr>
+                </a:solidFill>
+                <a:latin typeface="DM Sans" pitchFamily="2" charset="0"/>
+              </a:rPr>
+              <a:t>DATA</a:t>
+            </a:r>
+          </a:p>
+          <a:p>
+            <a:pPr>
+              <a:lnSpc>
+                <a:spcPts val="1300"/>
+              </a:lnSpc>
+              <a:buSzPct val="100000"/>
+            </a:pPr>
+            <a:r>
+              <a:rPr lang="en-GB" sz="1200" dirty="0">
+                <a:solidFill>
+                  <a:schemeClr val="tx1">
+                    <a:lumMod val="85000"/>
+                    <a:lumOff val="15000"/>
+                  </a:schemeClr>
+                </a:solidFill>
+                <a:latin typeface="+mj-lt"/>
+              </a:rPr>
+              <a:t>Reusable data products, analytics, architecture, monetization</a:t>
+            </a:r>
+          </a:p>
+        </p:txBody>
+      </p:sp>
+      <p:sp>
+        <p:nvSpPr>
+          <p:cNvPr id="166" name="TextBox 165">
+            <a:extLst>
+              <a:ext uri="{FF2B5EF4-FFF2-40B4-BE49-F238E27FC236}">
+                <a16:creationId xmlns:a16="http://schemas.microsoft.com/office/drawing/2014/main" id="{10166978-2E96-E3A3-95B8-30EF5CAF9525}"/>
+              </a:ext>
+            </a:extLst>
+          </p:cNvPr>
+          <p:cNvSpPr txBox="1"/>
+          <p:nvPr/>
+        </p:nvSpPr>
+        <p:spPr>
+          <a:xfrm>
+            <a:off x="6293260" y="4141586"/>
+            <a:ext cx="2548336" cy="556947"/>
+          </a:xfrm>
+          <a:prstGeom prst="rect">
+            <a:avLst/>
+          </a:prstGeom>
+          <a:noFill/>
+        </p:spPr>
+        <p:txBody>
+          <a:bodyPr wrap="square" lIns="0" tIns="0" rIns="0" bIns="0" rtlCol="0">
+            <a:spAutoFit/>
+          </a:bodyPr>
+          <a:lstStyle/>
+          <a:p>
+            <a:pPr>
+              <a:buSzPct val="100000"/>
+            </a:pPr>
+            <a:r>
+              <a:rPr lang="en-GB" sz="1400" b="1" dirty="0">
+                <a:solidFill>
+                  <a:schemeClr val="tx1">
+                    <a:lumMod val="85000"/>
+                    <a:lumOff val="15000"/>
+                  </a:schemeClr>
+                </a:solidFill>
+                <a:latin typeface="DM Sans" pitchFamily="2" charset="0"/>
+              </a:rPr>
+              <a:t>TECHNOLOGY</a:t>
+            </a:r>
+          </a:p>
+          <a:p>
+            <a:pPr>
+              <a:lnSpc>
+                <a:spcPts val="1300"/>
+              </a:lnSpc>
+              <a:buSzPct val="100000"/>
+            </a:pPr>
+            <a:r>
+              <a:rPr lang="en-GB" sz="1200" dirty="0">
+                <a:solidFill>
+                  <a:schemeClr val="tx1">
+                    <a:lumMod val="85000"/>
+                    <a:lumOff val="15000"/>
+                  </a:schemeClr>
+                </a:solidFill>
+                <a:latin typeface="+mj-lt"/>
+              </a:rPr>
+              <a:t>Target architecture, platforms &amp; solutions, integration </a:t>
+            </a:r>
+          </a:p>
+        </p:txBody>
+      </p:sp>
+      <p:sp>
+        <p:nvSpPr>
+          <p:cNvPr id="140" name="Rectangle 139">
+            <a:extLst>
+              <a:ext uri="{FF2B5EF4-FFF2-40B4-BE49-F238E27FC236}">
+                <a16:creationId xmlns:a16="http://schemas.microsoft.com/office/drawing/2014/main" id="{408780A7-24D1-5FA9-1D03-00F17CEDD27F}"/>
+              </a:ext>
+            </a:extLst>
+          </p:cNvPr>
+          <p:cNvSpPr/>
+          <p:nvPr/>
+        </p:nvSpPr>
+        <p:spPr>
+          <a:xfrm>
+            <a:off x="2271958" y="1981106"/>
+            <a:ext cx="7651834" cy="908874"/>
+          </a:xfrm>
+          <a:prstGeom prst="roundRect">
+            <a:avLst/>
+          </a:prstGeom>
+          <a:noFill/>
+          <a:ln>
+            <a:solidFill>
+              <a:schemeClr val="tx1">
+                <a:lumMod val="85000"/>
+                <a:lumOff val="15000"/>
+              </a:schemeClr>
+            </a:solidFill>
+          </a:ln>
+        </p:spPr>
+        <p:style>
+          <a:lnRef idx="2">
+            <a:schemeClr val="accent1">
+              <a:shade val="15000"/>
+            </a:schemeClr>
+          </a:lnRef>
+          <a:fillRef idx="1">
+            <a:schemeClr val="accent1"/>
+          </a:fillRef>
+          <a:effectRef idx="0">
+            <a:schemeClr val="accent1"/>
+          </a:effectRef>
+          <a:fontRef idx="minor">
+            <a:schemeClr val="lt1"/>
+          </a:fontRef>
+        </p:style>
+        <p:txBody>
+          <a:bodyPr rtlCol="0" anchor="ctr"/>
+          <a:lstStyle/>
+          <a:p>
+            <a:pPr algn="ctr"/>
+            <a:endParaRPr lang="en-GB" noProof="0" dirty="0"/>
+          </a:p>
+        </p:txBody>
+      </p:sp>
+      <p:sp>
+        <p:nvSpPr>
+          <p:cNvPr id="141" name="TextBox 140">
+            <a:extLst>
+              <a:ext uri="{FF2B5EF4-FFF2-40B4-BE49-F238E27FC236}">
+                <a16:creationId xmlns:a16="http://schemas.microsoft.com/office/drawing/2014/main" id="{0F7C620F-BBEE-7637-3EFD-6F8FCA9B7A17}"/>
+              </a:ext>
+            </a:extLst>
+          </p:cNvPr>
+          <p:cNvSpPr txBox="1"/>
+          <p:nvPr/>
+        </p:nvSpPr>
+        <p:spPr>
+          <a:xfrm>
+            <a:off x="2418950" y="2047612"/>
+            <a:ext cx="3874310" cy="549766"/>
+          </a:xfrm>
+          <a:prstGeom prst="rect">
+            <a:avLst/>
+          </a:prstGeom>
+          <a:noFill/>
+        </p:spPr>
+        <p:txBody>
+          <a:bodyPr wrap="square" lIns="0" tIns="0" rIns="0" bIns="0" rtlCol="0">
+            <a:spAutoFit/>
+          </a:bodyPr>
+          <a:lstStyle/>
+          <a:p>
+            <a:pPr>
+              <a:buSzPct val="100000"/>
+            </a:pPr>
+            <a:r>
+              <a:rPr lang="en-GB" sz="1400" b="1" noProof="0" dirty="0">
+                <a:solidFill>
+                  <a:schemeClr val="tx1">
+                    <a:lumMod val="85000"/>
+                    <a:lumOff val="15000"/>
+                  </a:schemeClr>
+                </a:solidFill>
+                <a:latin typeface="DM Sans" pitchFamily="2" charset="0"/>
+              </a:rPr>
+              <a:t>PRODUCTS</a:t>
+            </a:r>
+            <a:r>
+              <a:rPr lang="en-GB" sz="1400" noProof="0" dirty="0">
+                <a:solidFill>
+                  <a:schemeClr val="tx1">
+                    <a:lumMod val="85000"/>
+                    <a:lumOff val="15000"/>
+                  </a:schemeClr>
+                </a:solidFill>
+                <a:latin typeface="DM Sans" pitchFamily="2" charset="0"/>
+              </a:rPr>
+              <a:t> -  by business unit</a:t>
+            </a:r>
+          </a:p>
+          <a:p>
+            <a:pPr>
+              <a:lnSpc>
+                <a:spcPts val="1300"/>
+              </a:lnSpc>
+              <a:buSzPct val="100000"/>
+            </a:pPr>
+            <a:r>
+              <a:rPr lang="en-GB" sz="1200" noProof="0" dirty="0">
+                <a:solidFill>
+                  <a:schemeClr val="tx1">
+                    <a:lumMod val="85000"/>
+                    <a:lumOff val="15000"/>
+                  </a:schemeClr>
+                </a:solidFill>
+                <a:latin typeface="+mj-lt"/>
+              </a:rPr>
+              <a:t>Product vision &amp; objectives, products, persona’s, customer journeys, frictions</a:t>
+            </a:r>
+          </a:p>
+        </p:txBody>
+      </p:sp>
+      <p:sp>
+        <p:nvSpPr>
+          <p:cNvPr id="43" name="Rectangle 42">
+            <a:extLst>
+              <a:ext uri="{FF2B5EF4-FFF2-40B4-BE49-F238E27FC236}">
+                <a16:creationId xmlns:a16="http://schemas.microsoft.com/office/drawing/2014/main" id="{E0F4E9CB-0A0E-4690-0FA6-9ED54FEC3B60}"/>
+              </a:ext>
+            </a:extLst>
+          </p:cNvPr>
+          <p:cNvSpPr/>
+          <p:nvPr/>
+        </p:nvSpPr>
+        <p:spPr>
+          <a:xfrm>
+            <a:off x="6857075" y="2084448"/>
+            <a:ext cx="606304" cy="697758"/>
+          </a:xfrm>
+          <a:prstGeom prst="rect">
+            <a:avLst/>
+          </a:prstGeom>
+          <a:solidFill>
+            <a:schemeClr val="tx1">
+              <a:lumMod val="65000"/>
+              <a:lumOff val="35000"/>
+              <a:alpha val="20000"/>
+            </a:schemeClr>
+          </a:solidFill>
+          <a:ln>
+            <a:noFill/>
+          </a:ln>
+        </p:spPr>
+        <p:style>
+          <a:lnRef idx="2">
+            <a:schemeClr val="accent1">
+              <a:shade val="15000"/>
+            </a:schemeClr>
+          </a:lnRef>
+          <a:fillRef idx="1">
+            <a:schemeClr val="accent1"/>
+          </a:fillRef>
+          <a:effectRef idx="0">
+            <a:schemeClr val="accent1"/>
+          </a:effectRef>
+          <a:fontRef idx="minor">
+            <a:schemeClr val="lt1"/>
+          </a:fontRef>
+        </p:style>
+        <p:txBody>
+          <a:bodyPr rtlCol="0" anchor="ctr"/>
+          <a:lstStyle/>
+          <a:p>
+            <a:pPr algn="ctr"/>
+            <a:r>
+              <a:rPr lang="en-GB" sz="1100" noProof="0" dirty="0">
+                <a:solidFill>
+                  <a:schemeClr val="tx1">
+                    <a:lumMod val="85000"/>
+                    <a:lumOff val="15000"/>
+                  </a:schemeClr>
+                </a:solidFill>
+                <a:latin typeface="DM Sans" pitchFamily="2" charset="0"/>
+              </a:rPr>
+              <a:t>BU 1</a:t>
+            </a:r>
+          </a:p>
+        </p:txBody>
+      </p:sp>
+      <p:sp>
+        <p:nvSpPr>
+          <p:cNvPr id="44" name="Rectangle 43">
+            <a:extLst>
+              <a:ext uri="{FF2B5EF4-FFF2-40B4-BE49-F238E27FC236}">
+                <a16:creationId xmlns:a16="http://schemas.microsoft.com/office/drawing/2014/main" id="{BF71C01D-C3EC-7385-38F5-111CD7EAAE7D}"/>
+              </a:ext>
+            </a:extLst>
+          </p:cNvPr>
+          <p:cNvSpPr/>
+          <p:nvPr/>
+        </p:nvSpPr>
+        <p:spPr>
+          <a:xfrm>
+            <a:off x="7543657" y="2084448"/>
+            <a:ext cx="606304" cy="697758"/>
+          </a:xfrm>
+          <a:prstGeom prst="rect">
+            <a:avLst/>
+          </a:prstGeom>
+          <a:solidFill>
+            <a:schemeClr val="tx1">
+              <a:lumMod val="65000"/>
+              <a:lumOff val="35000"/>
+              <a:alpha val="20000"/>
+            </a:schemeClr>
+          </a:solidFill>
+          <a:ln>
+            <a:noFill/>
+          </a:ln>
+        </p:spPr>
+        <p:style>
+          <a:lnRef idx="2">
+            <a:schemeClr val="accent1">
+              <a:shade val="15000"/>
+            </a:schemeClr>
+          </a:lnRef>
+          <a:fillRef idx="1">
+            <a:schemeClr val="accent1"/>
+          </a:fillRef>
+          <a:effectRef idx="0">
+            <a:schemeClr val="accent1"/>
+          </a:effectRef>
+          <a:fontRef idx="minor">
+            <a:schemeClr val="lt1"/>
+          </a:fontRef>
+        </p:style>
+        <p:txBody>
+          <a:bodyPr rtlCol="0" anchor="ctr"/>
+          <a:lstStyle/>
+          <a:p>
+            <a:pPr algn="ctr"/>
+            <a:r>
+              <a:rPr lang="en-GB" sz="1100" noProof="0" dirty="0">
+                <a:solidFill>
+                  <a:schemeClr val="tx1">
+                    <a:lumMod val="85000"/>
+                    <a:lumOff val="15000"/>
+                  </a:schemeClr>
+                </a:solidFill>
+                <a:latin typeface="DM Sans" pitchFamily="2" charset="0"/>
+              </a:rPr>
+              <a:t>BU 2</a:t>
+            </a:r>
+          </a:p>
+        </p:txBody>
+      </p:sp>
+      <p:sp>
+        <p:nvSpPr>
+          <p:cNvPr id="30" name="Rectangle 42">
+            <a:extLst>
+              <a:ext uri="{FF2B5EF4-FFF2-40B4-BE49-F238E27FC236}">
+                <a16:creationId xmlns:a16="http://schemas.microsoft.com/office/drawing/2014/main" id="{7505B10F-04F0-C6AA-EB31-F410AA01EEBA}"/>
+              </a:ext>
+            </a:extLst>
+          </p:cNvPr>
+          <p:cNvSpPr/>
+          <p:nvPr/>
+        </p:nvSpPr>
+        <p:spPr>
+          <a:xfrm>
+            <a:off x="8230239" y="2084448"/>
+            <a:ext cx="606304" cy="697758"/>
+          </a:xfrm>
+          <a:prstGeom prst="rect">
+            <a:avLst/>
+          </a:prstGeom>
+          <a:solidFill>
+            <a:schemeClr val="tx1">
+              <a:lumMod val="65000"/>
+              <a:lumOff val="35000"/>
+              <a:alpha val="20000"/>
+            </a:schemeClr>
+          </a:solidFill>
+          <a:ln>
+            <a:noFill/>
+          </a:ln>
+        </p:spPr>
+        <p:style>
+          <a:lnRef idx="2">
+            <a:schemeClr val="accent1">
+              <a:shade val="15000"/>
+            </a:schemeClr>
+          </a:lnRef>
+          <a:fillRef idx="1">
+            <a:schemeClr val="accent1"/>
+          </a:fillRef>
+          <a:effectRef idx="0">
+            <a:schemeClr val="accent1"/>
+          </a:effectRef>
+          <a:fontRef idx="minor">
+            <a:schemeClr val="lt1"/>
+          </a:fontRef>
+        </p:style>
+        <p:txBody>
+          <a:bodyPr rtlCol="0" anchor="ctr"/>
+          <a:lstStyle/>
+          <a:p>
+            <a:pPr algn="ctr"/>
+            <a:r>
+              <a:rPr lang="en-GB" sz="1100" noProof="0" dirty="0">
+                <a:solidFill>
+                  <a:schemeClr val="tx1">
+                    <a:lumMod val="85000"/>
+                    <a:lumOff val="15000"/>
+                  </a:schemeClr>
+                </a:solidFill>
+                <a:latin typeface="DM Sans" pitchFamily="2" charset="0"/>
+              </a:rPr>
+              <a:t>BU 3</a:t>
+            </a:r>
+          </a:p>
+        </p:txBody>
+      </p:sp>
+      <p:sp>
+        <p:nvSpPr>
+          <p:cNvPr id="32" name="Rectangle 43">
+            <a:extLst>
+              <a:ext uri="{FF2B5EF4-FFF2-40B4-BE49-F238E27FC236}">
+                <a16:creationId xmlns:a16="http://schemas.microsoft.com/office/drawing/2014/main" id="{4109848C-6F06-818E-FE0D-EF820C4C18F5}"/>
+              </a:ext>
+            </a:extLst>
+          </p:cNvPr>
+          <p:cNvSpPr/>
+          <p:nvPr/>
+        </p:nvSpPr>
+        <p:spPr>
+          <a:xfrm>
+            <a:off x="8916822" y="2084448"/>
+            <a:ext cx="606304" cy="697758"/>
+          </a:xfrm>
+          <a:prstGeom prst="rect">
+            <a:avLst/>
+          </a:prstGeom>
+          <a:solidFill>
+            <a:schemeClr val="tx1">
+              <a:lumMod val="65000"/>
+              <a:lumOff val="35000"/>
+              <a:alpha val="20000"/>
+            </a:schemeClr>
+          </a:solidFill>
+          <a:ln>
+            <a:noFill/>
+          </a:ln>
+        </p:spPr>
+        <p:style>
+          <a:lnRef idx="2">
+            <a:schemeClr val="accent1">
+              <a:shade val="15000"/>
+            </a:schemeClr>
+          </a:lnRef>
+          <a:fillRef idx="1">
+            <a:schemeClr val="accent1"/>
+          </a:fillRef>
+          <a:effectRef idx="0">
+            <a:schemeClr val="accent1"/>
+          </a:effectRef>
+          <a:fontRef idx="minor">
+            <a:schemeClr val="lt1"/>
+          </a:fontRef>
+        </p:style>
+        <p:txBody>
+          <a:bodyPr rtlCol="0" anchor="ctr"/>
+          <a:lstStyle/>
+          <a:p>
+            <a:pPr algn="ctr"/>
+            <a:r>
+              <a:rPr lang="en-GB" sz="1100" noProof="0" dirty="0">
+                <a:solidFill>
+                  <a:schemeClr val="tx1">
+                    <a:lumMod val="85000"/>
+                    <a:lumOff val="15000"/>
+                  </a:schemeClr>
+                </a:solidFill>
+                <a:latin typeface="DM Sans" pitchFamily="2" charset="0"/>
+              </a:rPr>
+              <a:t>BU 4</a:t>
+            </a:r>
+          </a:p>
+        </p:txBody>
+      </p:sp>
+      <p:pic>
+        <p:nvPicPr>
+          <p:cNvPr id="33" name="Afbeelding 32" descr="Afbeelding met tekst, schermopname, Lettertype, lijn&#10;&#10;Door AI gegenereerde inhoud is mogelijk onjuist.">
+            <a:extLst>
+              <a:ext uri="{FF2B5EF4-FFF2-40B4-BE49-F238E27FC236}">
+                <a16:creationId xmlns:a16="http://schemas.microsoft.com/office/drawing/2014/main" id="{14DF526F-073F-3342-E25A-644CF951ED34}"/>
+              </a:ext>
+            </a:extLst>
+          </p:cNvPr>
+          <p:cNvPicPr>
+            <a:picLocks noChangeAspect="1"/>
+          </p:cNvPicPr>
+          <p:nvPr/>
+        </p:nvPicPr>
+        <p:blipFill>
+          <a:blip r:embed="rId3"/>
+          <a:stretch>
+            <a:fillRect/>
+          </a:stretch>
+        </p:blipFill>
+        <p:spPr>
+          <a:xfrm>
+            <a:off x="12333890" y="551145"/>
+            <a:ext cx="8051107" cy="4602677"/>
+          </a:xfrm>
+          <a:prstGeom prst="rect">
+            <a:avLst/>
+          </a:prstGeom>
+        </p:spPr>
+      </p:pic>
+    </p:spTree>
+    <p:extLst>
+      <p:ext uri="{BB962C8B-B14F-4D97-AF65-F5344CB8AC3E}">
+        <p14:creationId xmlns:p14="http://schemas.microsoft.com/office/powerpoint/2010/main" val="3928762808"/>
+      </p:ext>
+    </p:extLst>
+  </p:cSld>
+  <p:clrMapOvr>
+    <a:masterClrMapping/>
+  </p:clrMapOvr>
+</p:sld>
+</file>
+
+<file path=ppt/slides/slide5.xml><?xml version="1.0" encoding="utf-8"?>
+<p:sld xmlns:a="http://schemas.openxmlformats.org/drawingml/2006/main" xmlns:r="http://schemas.openxmlformats.org/officeDocument/2006/relationships" xmlns:p="http://schemas.openxmlformats.org/presentationml/2006/main">
+  <p:cSld>
+    <p:spTree>
+      <p:nvGrpSpPr>
+        <p:cNvPr id="1" name="">
+          <a:extLst>
+            <a:ext uri="{FF2B5EF4-FFF2-40B4-BE49-F238E27FC236}">
               <a16:creationId xmlns:a16="http://schemas.microsoft.com/office/drawing/2014/main" id="{80C594DE-F555-AE44-E672-38D3D916365B}"/>
             </a:ext>
           </a:extLst>
@@ -8714,7 +10141,7 @@
 </p:sld>
 </file>
 
-<file path=ppt/slides/slide5.xml><?xml version="1.0" encoding="utf-8"?>
+<file path=ppt/slides/slide6.xml><?xml version="1.0" encoding="utf-8"?>
 <p:sld xmlns:a="http://schemas.openxmlformats.org/drawingml/2006/main" xmlns:r="http://schemas.openxmlformats.org/officeDocument/2006/relationships" xmlns:p="http://schemas.openxmlformats.org/presentationml/2006/main">
   <p:cSld>
     <p:spTree>
@@ -9498,7 +10925,7 @@
 </p:sld>
 </file>
 
-<file path=ppt/slides/slide6.xml><?xml version="1.0" encoding="utf-8"?>
+<file path=ppt/slides/slide7.xml><?xml version="1.0" encoding="utf-8"?>
 <p:sld xmlns:a="http://schemas.openxmlformats.org/drawingml/2006/main" xmlns:r="http://schemas.openxmlformats.org/officeDocument/2006/relationships" xmlns:p="http://schemas.openxmlformats.org/presentationml/2006/main">
   <p:cSld>
     <p:spTree>

--- a/input/AI Transformation framework for European CEO’s.pptx
+++ b/input/AI Transformation framework for European CEO’s.pptx
@@ -5,16 +5,17 @@
     <p:sldMasterId id="2147483648" r:id="rId1"/>
   </p:sldMasterIdLst>
   <p:notesMasterIdLst>
-    <p:notesMasterId r:id="rId9"/>
+    <p:notesMasterId r:id="rId10"/>
   </p:notesMasterIdLst>
   <p:sldIdLst>
     <p:sldId id="2147480368" r:id="rId2"/>
     <p:sldId id="2147480366" r:id="rId3"/>
     <p:sldId id="2147480381" r:id="rId4"/>
     <p:sldId id="2147480382" r:id="rId5"/>
-    <p:sldId id="2147480372" r:id="rId6"/>
-    <p:sldId id="2147480380" r:id="rId7"/>
-    <p:sldId id="2147480367" r:id="rId8"/>
+    <p:sldId id="2147480383" r:id="rId6"/>
+    <p:sldId id="2147480372" r:id="rId7"/>
+    <p:sldId id="2147480380" r:id="rId8"/>
+    <p:sldId id="2147480367" r:id="rId9"/>
   </p:sldIdLst>
   <p:sldSz cx="12192000" cy="6858000"/>
   <p:notesSz cx="6858000" cy="9144000"/>
@@ -331,7 +332,7 @@
           <a:p>
             <a:fld id="{FAB7A3DB-122E-499C-AAFB-3D4665CBCADB}" type="datetimeFigureOut">
               <a:rPr lang="en-GB" smtClean="0"/>
-              <a:t>16/03/2026</a:t>
+              <a:t>18/03/2026</a:t>
             </a:fld>
             <a:endParaRPr lang="en-GB"/>
           </a:p>
@@ -1015,6 +1016,114 @@
         <p:cNvPr id="1" name="">
           <a:extLst>
             <a:ext uri="{FF2B5EF4-FFF2-40B4-BE49-F238E27FC236}">
+              <a16:creationId xmlns:a16="http://schemas.microsoft.com/office/drawing/2014/main" id="{E5F598BA-505B-8658-A0F0-312B994AD1C6}"/>
+            </a:ext>
+          </a:extLst>
+        </p:cNvPr>
+        <p:cNvGrpSpPr/>
+        <p:nvPr/>
+      </p:nvGrpSpPr>
+      <p:grpSpPr>
+        <a:xfrm>
+          <a:off x="0" y="0"/>
+          <a:ext cx="0" cy="0"/>
+          <a:chOff x="0" y="0"/>
+          <a:chExt cx="0" cy="0"/>
+        </a:xfrm>
+      </p:grpSpPr>
+      <p:sp>
+        <p:nvSpPr>
+          <p:cNvPr id="2" name="Slide Image Placeholder 1">
+            <a:extLst>
+              <a:ext uri="{FF2B5EF4-FFF2-40B4-BE49-F238E27FC236}">
+                <a16:creationId xmlns:a16="http://schemas.microsoft.com/office/drawing/2014/main" id="{35D98115-B372-6657-0B5B-B699AA6AE13E}"/>
+              </a:ext>
+            </a:extLst>
+          </p:cNvPr>
+          <p:cNvSpPr>
+            <a:spLocks noGrp="1" noRot="1" noChangeAspect="1"/>
+          </p:cNvSpPr>
+          <p:nvPr>
+            <p:ph type="sldImg"/>
+          </p:nvPr>
+        </p:nvSpPr>
+        <p:spPr/>
+      </p:sp>
+      <p:sp>
+        <p:nvSpPr>
+          <p:cNvPr id="3" name="Notes Placeholder 2">
+            <a:extLst>
+              <a:ext uri="{FF2B5EF4-FFF2-40B4-BE49-F238E27FC236}">
+                <a16:creationId xmlns:a16="http://schemas.microsoft.com/office/drawing/2014/main" id="{E624BD0D-162A-024C-9EA9-CD5BC1B54C9D}"/>
+              </a:ext>
+            </a:extLst>
+          </p:cNvPr>
+          <p:cNvSpPr>
+            <a:spLocks noGrp="1"/>
+          </p:cNvSpPr>
+          <p:nvPr>
+            <p:ph type="body" idx="1"/>
+          </p:nvPr>
+        </p:nvSpPr>
+        <p:spPr/>
+        <p:txBody>
+          <a:bodyPr/>
+          <a:lstStyle/>
+          <a:p>
+            <a:endParaRPr lang="en-GB"/>
+          </a:p>
+        </p:txBody>
+      </p:sp>
+      <p:sp>
+        <p:nvSpPr>
+          <p:cNvPr id="4" name="Slide Number Placeholder 3">
+            <a:extLst>
+              <a:ext uri="{FF2B5EF4-FFF2-40B4-BE49-F238E27FC236}">
+                <a16:creationId xmlns:a16="http://schemas.microsoft.com/office/drawing/2014/main" id="{1B25D305-97D7-90DB-2F6A-67129919156C}"/>
+              </a:ext>
+            </a:extLst>
+          </p:cNvPr>
+          <p:cNvSpPr>
+            <a:spLocks noGrp="1"/>
+          </p:cNvSpPr>
+          <p:nvPr>
+            <p:ph type="sldNum" sz="quarter" idx="5"/>
+          </p:nvPr>
+        </p:nvSpPr>
+        <p:spPr/>
+        <p:txBody>
+          <a:bodyPr/>
+          <a:lstStyle/>
+          <a:p>
+            <a:fld id="{BA1AFD66-2597-4960-86E3-D00E2B43A69D}" type="slidenum">
+              <a:rPr lang="en-GB" smtClean="0"/>
+              <a:t>5</a:t>
+            </a:fld>
+            <a:endParaRPr lang="en-GB"/>
+          </a:p>
+        </p:txBody>
+      </p:sp>
+    </p:spTree>
+    <p:extLst>
+      <p:ext uri="{BB962C8B-B14F-4D97-AF65-F5344CB8AC3E}">
+        <p14:creationId xmlns:p14="http://schemas.microsoft.com/office/powerpoint/2010/main" val="2904158708"/>
+      </p:ext>
+    </p:extLst>
+  </p:cSld>
+  <p:clrMapOvr>
+    <a:masterClrMapping/>
+  </p:clrMapOvr>
+</p:notes>
+</file>
+
+<file path=ppt/notesSlides/notesSlide6.xml><?xml version="1.0" encoding="utf-8"?>
+<p:notes xmlns:a="http://schemas.openxmlformats.org/drawingml/2006/main" xmlns:r="http://schemas.openxmlformats.org/officeDocument/2006/relationships" xmlns:p="http://schemas.openxmlformats.org/presentationml/2006/main">
+  <p:cSld>
+    <p:spTree>
+      <p:nvGrpSpPr>
+        <p:cNvPr id="1" name="">
+          <a:extLst>
+            <a:ext uri="{FF2B5EF4-FFF2-40B4-BE49-F238E27FC236}">
               <a16:creationId xmlns:a16="http://schemas.microsoft.com/office/drawing/2014/main" id="{9ACE62BF-62B2-82DC-C376-73CE77938791}"/>
             </a:ext>
           </a:extLst>
@@ -1096,7 +1205,7 @@
           <a:p>
             <a:fld id="{BA1AFD66-2597-4960-86E3-D00E2B43A69D}" type="slidenum">
               <a:rPr lang="en-GB" smtClean="0"/>
-              <a:t>5</a:t>
+              <a:t>6</a:t>
             </a:fld>
             <a:endParaRPr lang="en-GB"/>
           </a:p>
@@ -1115,7 +1224,7 @@
 </p:notes>
 </file>
 
-<file path=ppt/notesSlides/notesSlide6.xml><?xml version="1.0" encoding="utf-8"?>
+<file path=ppt/notesSlides/notesSlide7.xml><?xml version="1.0" encoding="utf-8"?>
 <p:notes xmlns:a="http://schemas.openxmlformats.org/drawingml/2006/main" xmlns:r="http://schemas.openxmlformats.org/officeDocument/2006/relationships" xmlns:p="http://schemas.openxmlformats.org/presentationml/2006/main">
   <p:cSld>
     <p:spTree>
@@ -1204,7 +1313,7 @@
           <a:p>
             <a:fld id="{BA1AFD66-2597-4960-86E3-D00E2B43A69D}" type="slidenum">
               <a:rPr lang="en-GB" smtClean="0"/>
-              <a:t>6</a:t>
+              <a:t>7</a:t>
             </a:fld>
             <a:endParaRPr lang="en-GB"/>
           </a:p>
@@ -1223,7 +1332,7 @@
 </p:notes>
 </file>
 
-<file path=ppt/notesSlides/notesSlide7.xml><?xml version="1.0" encoding="utf-8"?>
+<file path=ppt/notesSlides/notesSlide8.xml><?xml version="1.0" encoding="utf-8"?>
 <p:notes xmlns:a="http://schemas.openxmlformats.org/drawingml/2006/main" xmlns:r="http://schemas.openxmlformats.org/officeDocument/2006/relationships" xmlns:p="http://schemas.openxmlformats.org/presentationml/2006/main">
   <p:cSld>
     <p:spTree>
@@ -1312,7 +1421,7 @@
           <a:p>
             <a:fld id="{BA1AFD66-2597-4960-86E3-D00E2B43A69D}" type="slidenum">
               <a:rPr lang="en-GB" smtClean="0"/>
-              <a:t>7</a:t>
+              <a:t>8</a:t>
             </a:fld>
             <a:endParaRPr lang="en-GB"/>
           </a:p>
@@ -1480,7 +1589,7 @@
           <a:p>
             <a:fld id="{7E530143-BC45-40DA-908E-84B30ACFDA34}" type="datetimeFigureOut">
               <a:rPr lang="en-GB" smtClean="0"/>
-              <a:t>16/03/2026</a:t>
+              <a:t>18/03/2026</a:t>
             </a:fld>
             <a:endParaRPr lang="en-GB"/>
           </a:p>
@@ -1680,7 +1789,7 @@
           <a:p>
             <a:fld id="{7E530143-BC45-40DA-908E-84B30ACFDA34}" type="datetimeFigureOut">
               <a:rPr lang="en-GB" smtClean="0"/>
-              <a:t>16/03/2026</a:t>
+              <a:t>18/03/2026</a:t>
             </a:fld>
             <a:endParaRPr lang="en-GB"/>
           </a:p>
@@ -1890,7 +1999,7 @@
           <a:p>
             <a:fld id="{7E530143-BC45-40DA-908E-84B30ACFDA34}" type="datetimeFigureOut">
               <a:rPr lang="en-GB" smtClean="0"/>
-              <a:t>16/03/2026</a:t>
+              <a:t>18/03/2026</a:t>
             </a:fld>
             <a:endParaRPr lang="en-GB"/>
           </a:p>
@@ -2514,7 +2623,7 @@
           <a:p>
             <a:fld id="{7E530143-BC45-40DA-908E-84B30ACFDA34}" type="datetimeFigureOut">
               <a:rPr lang="en-GB" smtClean="0"/>
-              <a:t>16/03/2026</a:t>
+              <a:t>18/03/2026</a:t>
             </a:fld>
             <a:endParaRPr lang="en-GB"/>
           </a:p>
@@ -2790,7 +2899,7 @@
           <a:p>
             <a:fld id="{7E530143-BC45-40DA-908E-84B30ACFDA34}" type="datetimeFigureOut">
               <a:rPr lang="en-GB" smtClean="0"/>
-              <a:t>16/03/2026</a:t>
+              <a:t>18/03/2026</a:t>
             </a:fld>
             <a:endParaRPr lang="en-GB"/>
           </a:p>
@@ -3058,7 +3167,7 @@
           <a:p>
             <a:fld id="{7E530143-BC45-40DA-908E-84B30ACFDA34}" type="datetimeFigureOut">
               <a:rPr lang="en-GB" smtClean="0"/>
-              <a:t>16/03/2026</a:t>
+              <a:t>18/03/2026</a:t>
             </a:fld>
             <a:endParaRPr lang="en-GB"/>
           </a:p>
@@ -3473,7 +3582,7 @@
           <a:p>
             <a:fld id="{7E530143-BC45-40DA-908E-84B30ACFDA34}" type="datetimeFigureOut">
               <a:rPr lang="en-GB" smtClean="0"/>
-              <a:t>16/03/2026</a:t>
+              <a:t>18/03/2026</a:t>
             </a:fld>
             <a:endParaRPr lang="en-GB"/>
           </a:p>
@@ -3615,7 +3724,7 @@
           <a:p>
             <a:fld id="{7E530143-BC45-40DA-908E-84B30ACFDA34}" type="datetimeFigureOut">
               <a:rPr lang="en-GB" smtClean="0"/>
-              <a:t>16/03/2026</a:t>
+              <a:t>18/03/2026</a:t>
             </a:fld>
             <a:endParaRPr lang="en-GB"/>
           </a:p>
@@ -3728,7 +3837,7 @@
           <a:p>
             <a:fld id="{7E530143-BC45-40DA-908E-84B30ACFDA34}" type="datetimeFigureOut">
               <a:rPr lang="en-GB" smtClean="0"/>
-              <a:t>16/03/2026</a:t>
+              <a:t>18/03/2026</a:t>
             </a:fld>
             <a:endParaRPr lang="en-GB"/>
           </a:p>
@@ -4041,7 +4150,7 @@
           <a:p>
             <a:fld id="{7E530143-BC45-40DA-908E-84B30ACFDA34}" type="datetimeFigureOut">
               <a:rPr lang="en-GB" smtClean="0"/>
-              <a:t>16/03/2026</a:t>
+              <a:t>18/03/2026</a:t>
             </a:fld>
             <a:endParaRPr lang="en-GB"/>
           </a:p>
@@ -4330,7 +4439,7 @@
           <a:p>
             <a:fld id="{7E530143-BC45-40DA-908E-84B30ACFDA34}" type="datetimeFigureOut">
               <a:rPr lang="en-GB" smtClean="0"/>
-              <a:t>16/03/2026</a:t>
+              <a:t>18/03/2026</a:t>
             </a:fld>
             <a:endParaRPr lang="en-GB"/>
           </a:p>
@@ -4573,7 +4682,7 @@
           <a:p>
             <a:fld id="{7E530143-BC45-40DA-908E-84B30ACFDA34}" type="datetimeFigureOut">
               <a:rPr lang="en-GB" smtClean="0"/>
-              <a:t>16/03/2026</a:t>
+              <a:t>18/03/2026</a:t>
             </a:fld>
             <a:endParaRPr lang="en-GB"/>
           </a:p>
@@ -9622,6 +9731,210 @@
         <p:cNvPr id="1" name="">
           <a:extLst>
             <a:ext uri="{FF2B5EF4-FFF2-40B4-BE49-F238E27FC236}">
+              <a16:creationId xmlns:a16="http://schemas.microsoft.com/office/drawing/2014/main" id="{0F6C3AFC-45EF-AF93-6DE5-4A040E4E8024}"/>
+            </a:ext>
+          </a:extLst>
+        </p:cNvPr>
+        <p:cNvGrpSpPr/>
+        <p:nvPr/>
+      </p:nvGrpSpPr>
+      <p:grpSpPr>
+        <a:xfrm>
+          <a:off x="0" y="0"/>
+          <a:ext cx="0" cy="0"/>
+          <a:chOff x="0" y="0"/>
+          <a:chExt cx="0" cy="0"/>
+        </a:xfrm>
+      </p:grpSpPr>
+      <p:sp>
+        <p:nvSpPr>
+          <p:cNvPr id="2" name="Rechthoek 1">
+            <a:extLst>
+              <a:ext uri="{FF2B5EF4-FFF2-40B4-BE49-F238E27FC236}">
+                <a16:creationId xmlns:a16="http://schemas.microsoft.com/office/drawing/2014/main" id="{2C041F90-7266-FE29-E4F5-4CAFEC1EF67C}"/>
+              </a:ext>
+            </a:extLst>
+          </p:cNvPr>
+          <p:cNvSpPr/>
+          <p:nvPr/>
+        </p:nvSpPr>
+        <p:spPr>
+          <a:xfrm>
+            <a:off x="1947041" y="409251"/>
+            <a:ext cx="8442435" cy="4690889"/>
+          </a:xfrm>
+          <a:prstGeom prst="rect">
+            <a:avLst/>
+          </a:prstGeom>
+          <a:solidFill>
+            <a:schemeClr val="bg1"/>
+          </a:solidFill>
+          <a:ln>
+            <a:noFill/>
+          </a:ln>
+        </p:spPr>
+        <p:style>
+          <a:lnRef idx="2">
+            <a:schemeClr val="accent1">
+              <a:shade val="15000"/>
+            </a:schemeClr>
+          </a:lnRef>
+          <a:fillRef idx="1">
+            <a:schemeClr val="accent1"/>
+          </a:fillRef>
+          <a:effectRef idx="0">
+            <a:schemeClr val="accent1"/>
+          </a:effectRef>
+          <a:fontRef idx="minor">
+            <a:schemeClr val="lt1"/>
+          </a:fontRef>
+        </p:style>
+        <p:txBody>
+          <a:bodyPr rtlCol="0" anchor="ctr"/>
+          <a:lstStyle/>
+          <a:p>
+            <a:pPr algn="ctr"/>
+            <a:endParaRPr lang="en-GB" dirty="0"/>
+          </a:p>
+        </p:txBody>
+      </p:sp>
+      <p:pic>
+        <p:nvPicPr>
+          <p:cNvPr id="25" name="Afbeelding 24">
+            <a:extLst>
+              <a:ext uri="{FF2B5EF4-FFF2-40B4-BE49-F238E27FC236}">
+                <a16:creationId xmlns:a16="http://schemas.microsoft.com/office/drawing/2014/main" id="{969CE313-B039-6AA9-8D92-F234DC7101E6}"/>
+              </a:ext>
+            </a:extLst>
+          </p:cNvPr>
+          <p:cNvPicPr>
+            <a:picLocks noChangeAspect="1"/>
+          </p:cNvPicPr>
+          <p:nvPr/>
+        </p:nvPicPr>
+        <p:blipFill>
+          <a:blip r:embed="rId3">
+            <a:extLst>
+              <a:ext uri="{28A0092B-C50C-407E-A947-70E740481C1C}">
+                <a14:useLocalDpi xmlns:a14="http://schemas.microsoft.com/office/drawing/2010/main" val="0"/>
+              </a:ext>
+            </a:extLst>
+          </a:blip>
+          <a:srcRect l="3864" t="16890" r="3741" b="5198"/>
+          <a:stretch>
+            <a:fillRect/>
+          </a:stretch>
+        </p:blipFill>
+        <p:spPr>
+          <a:xfrm>
+            <a:off x="2240966" y="1235528"/>
+            <a:ext cx="7719128" cy="3633034"/>
+          </a:xfrm>
+          <a:prstGeom prst="rect">
+            <a:avLst/>
+          </a:prstGeom>
+        </p:spPr>
+      </p:pic>
+      <p:pic>
+        <p:nvPicPr>
+          <p:cNvPr id="5" name="Afbeelding 4">
+            <a:extLst>
+              <a:ext uri="{FF2B5EF4-FFF2-40B4-BE49-F238E27FC236}">
+                <a16:creationId xmlns:a16="http://schemas.microsoft.com/office/drawing/2014/main" id="{2909A23B-6954-0376-D46E-3DD2D314643A}"/>
+              </a:ext>
+            </a:extLst>
+          </p:cNvPr>
+          <p:cNvPicPr>
+            <a:picLocks noChangeAspect="1"/>
+          </p:cNvPicPr>
+          <p:nvPr/>
+        </p:nvPicPr>
+        <p:blipFill>
+          <a:blip r:embed="rId3">
+            <a:extLst>
+              <a:ext uri="{28A0092B-C50C-407E-A947-70E740481C1C}">
+                <a14:useLocalDpi xmlns:a14="http://schemas.microsoft.com/office/drawing/2010/main" val="0"/>
+              </a:ext>
+            </a:extLst>
+          </a:blip>
+          <a:stretch>
+            <a:fillRect/>
+          </a:stretch>
+        </p:blipFill>
+        <p:spPr>
+          <a:xfrm>
+            <a:off x="12408029" y="0"/>
+            <a:ext cx="8051107" cy="4493641"/>
+          </a:xfrm>
+          <a:prstGeom prst="rect">
+            <a:avLst/>
+          </a:prstGeom>
+        </p:spPr>
+      </p:pic>
+      <p:sp>
+        <p:nvSpPr>
+          <p:cNvPr id="3" name="Title 2">
+            <a:extLst>
+              <a:ext uri="{FF2B5EF4-FFF2-40B4-BE49-F238E27FC236}">
+                <a16:creationId xmlns:a16="http://schemas.microsoft.com/office/drawing/2014/main" id="{3946A784-2DA4-4C3F-32DA-E6744BE96D35}"/>
+              </a:ext>
+            </a:extLst>
+          </p:cNvPr>
+          <p:cNvSpPr>
+            <a:spLocks noGrp="1"/>
+          </p:cNvSpPr>
+          <p:nvPr>
+            <p:ph type="title"/>
+          </p:nvPr>
+        </p:nvSpPr>
+        <p:spPr>
+          <a:xfrm>
+            <a:off x="3652782" y="629113"/>
+            <a:ext cx="4886436" cy="360099"/>
+          </a:xfrm>
+        </p:spPr>
+        <p:txBody>
+          <a:bodyPr>
+            <a:normAutofit/>
+          </a:bodyPr>
+          <a:lstStyle/>
+          <a:p>
+            <a:pPr algn="ctr"/>
+            <a:r>
+              <a:rPr lang="en-GB" noProof="0" dirty="0">
+                <a:solidFill>
+                  <a:schemeClr val="tx1">
+                    <a:lumMod val="85000"/>
+                    <a:lumOff val="15000"/>
+                  </a:schemeClr>
+                </a:solidFill>
+              </a:rPr>
+              <a:t>AI Product Canvas</a:t>
+            </a:r>
+          </a:p>
+        </p:txBody>
+      </p:sp>
+    </p:spTree>
+    <p:extLst>
+      <p:ext uri="{BB962C8B-B14F-4D97-AF65-F5344CB8AC3E}">
+        <p14:creationId xmlns:p14="http://schemas.microsoft.com/office/powerpoint/2010/main" val="313527216"/>
+      </p:ext>
+    </p:extLst>
+  </p:cSld>
+  <p:clrMapOvr>
+    <a:masterClrMapping/>
+  </p:clrMapOvr>
+</p:sld>
+</file>
+
+<file path=ppt/slides/slide6.xml><?xml version="1.0" encoding="utf-8"?>
+<p:sld xmlns:a="http://schemas.openxmlformats.org/drawingml/2006/main" xmlns:r="http://schemas.openxmlformats.org/officeDocument/2006/relationships" xmlns:p="http://schemas.openxmlformats.org/presentationml/2006/main">
+  <p:cSld>
+    <p:spTree>
+      <p:nvGrpSpPr>
+        <p:cNvPr id="1" name="">
+          <a:extLst>
+            <a:ext uri="{FF2B5EF4-FFF2-40B4-BE49-F238E27FC236}">
               <a16:creationId xmlns:a16="http://schemas.microsoft.com/office/drawing/2014/main" id="{80C594DE-F555-AE44-E672-38D3D916365B}"/>
             </a:ext>
           </a:extLst>
@@ -10141,7 +10454,7 @@
 </p:sld>
 </file>
 
-<file path=ppt/slides/slide6.xml><?xml version="1.0" encoding="utf-8"?>
+<file path=ppt/slides/slide7.xml><?xml version="1.0" encoding="utf-8"?>
 <p:sld xmlns:a="http://schemas.openxmlformats.org/drawingml/2006/main" xmlns:r="http://schemas.openxmlformats.org/officeDocument/2006/relationships" xmlns:p="http://schemas.openxmlformats.org/presentationml/2006/main">
   <p:cSld>
     <p:spTree>
@@ -10277,8 +10590,8 @@
         </p:nvCxnSpPr>
         <p:spPr>
           <a:xfrm flipH="1" flipV="1">
-            <a:off x="7062489" y="1678877"/>
-            <a:ext cx="653716" cy="1543006"/>
+            <a:off x="7157545" y="1678877"/>
+            <a:ext cx="558660" cy="1543006"/>
           </a:xfrm>
           <a:prstGeom prst="straightConnector1">
             <a:avLst/>
@@ -10329,7 +10642,7 @@
         <p:spPr>
           <a:xfrm flipH="1">
             <a:off x="4479442" y="1678877"/>
-            <a:ext cx="650069" cy="1543006"/>
+            <a:ext cx="555013" cy="1543006"/>
           </a:xfrm>
           <a:prstGeom prst="straightConnector1">
             <a:avLst/>
@@ -10377,8 +10690,8 @@
         </p:nvCxnSpPr>
         <p:spPr>
           <a:xfrm>
-            <a:off x="5445931" y="3535091"/>
-            <a:ext cx="1303785" cy="0"/>
+            <a:off x="5540987" y="3535091"/>
+            <a:ext cx="1113673" cy="0"/>
           </a:xfrm>
           <a:prstGeom prst="straightConnector1">
             <a:avLst/>
@@ -10422,8 +10735,8 @@
         </p:nvSpPr>
         <p:spPr>
           <a:xfrm>
-            <a:off x="5211479" y="1961959"/>
-            <a:ext cx="1769042" cy="743156"/>
+            <a:off x="5124485" y="1961959"/>
+            <a:ext cx="1943030" cy="743156"/>
           </a:xfrm>
           <a:prstGeom prst="roundRect">
             <a:avLst/>
@@ -10481,8 +10794,8 @@
         </p:nvSpPr>
         <p:spPr>
           <a:xfrm>
-            <a:off x="5129511" y="1365669"/>
-            <a:ext cx="1932978" cy="626416"/>
+            <a:off x="5034455" y="1365669"/>
+            <a:ext cx="2123090" cy="626416"/>
           </a:xfrm>
           <a:prstGeom prst="roundRect">
             <a:avLst/>
@@ -10513,7 +10826,7 @@
                 </a:solidFill>
                 <a:latin typeface="DM Sans" pitchFamily="2" charset="0"/>
               </a:rPr>
-              <a:t>CLARITY</a:t>
+              <a:t>Single Rulebook</a:t>
             </a:r>
           </a:p>
         </p:txBody>
@@ -10532,8 +10845,8 @@
         </p:nvSpPr>
         <p:spPr>
           <a:xfrm>
-            <a:off x="6831684" y="3818173"/>
-            <a:ext cx="1769042" cy="743156"/>
+            <a:off x="6744690" y="3818173"/>
+            <a:ext cx="1943030" cy="743156"/>
           </a:xfrm>
           <a:prstGeom prst="roundRect">
             <a:avLst/>
@@ -10591,8 +10904,8 @@
         </p:nvSpPr>
         <p:spPr>
           <a:xfrm>
-            <a:off x="6749716" y="3221883"/>
-            <a:ext cx="1932978" cy="626416"/>
+            <a:off x="6654660" y="3221883"/>
+            <a:ext cx="2123090" cy="626416"/>
           </a:xfrm>
           <a:prstGeom prst="roundRect">
             <a:avLst/>
@@ -10623,7 +10936,7 @@
                 </a:solidFill>
                 <a:latin typeface="DM Sans" pitchFamily="2" charset="0"/>
               </a:rPr>
-              <a:t>CAPABILITY</a:t>
+              <a:t>Governance Dividend</a:t>
             </a:r>
           </a:p>
         </p:txBody>
@@ -10642,8 +10955,8 @@
         </p:nvSpPr>
         <p:spPr>
           <a:xfrm>
-            <a:off x="3594921" y="3818173"/>
-            <a:ext cx="1769042" cy="743156"/>
+            <a:off x="3507927" y="3818173"/>
+            <a:ext cx="1943030" cy="743156"/>
           </a:xfrm>
           <a:prstGeom prst="roundRect">
             <a:avLst/>
@@ -10701,8 +11014,8 @@
         </p:nvSpPr>
         <p:spPr>
           <a:xfrm>
-            <a:off x="3512953" y="3221883"/>
-            <a:ext cx="1932978" cy="626416"/>
+            <a:off x="3417897" y="3221883"/>
+            <a:ext cx="2123090" cy="626416"/>
           </a:xfrm>
           <a:prstGeom prst="roundRect">
             <a:avLst/>
@@ -10733,7 +11046,7 @@
                 </a:solidFill>
                 <a:latin typeface="DM Sans" pitchFamily="2" charset="0"/>
               </a:rPr>
-              <a:t>TRUST</a:t>
+              <a:t>Trust Premium</a:t>
             </a:r>
           </a:p>
         </p:txBody>
@@ -10925,7 +11238,7 @@
 </p:sld>
 </file>
 
-<file path=ppt/slides/slide7.xml><?xml version="1.0" encoding="utf-8"?>
+<file path=ppt/slides/slide8.xml><?xml version="1.0" encoding="utf-8"?>
 <p:sld xmlns:a="http://schemas.openxmlformats.org/drawingml/2006/main" xmlns:r="http://schemas.openxmlformats.org/officeDocument/2006/relationships" xmlns:p="http://schemas.openxmlformats.org/presentationml/2006/main">
   <p:cSld>
     <p:spTree>

--- a/input/AI Transformation framework for European CEO’s.pptx
+++ b/input/AI Transformation framework for European CEO’s.pptx
@@ -5612,6 +5612,101 @@
           </a:p>
         </p:txBody>
       </p:sp>
+      <p:grpSp>
+        <p:nvGrpSpPr>
+          <p:cNvPr id="10" name="Groep 9">
+            <a:extLst>
+              <a:ext uri="{FF2B5EF4-FFF2-40B4-BE49-F238E27FC236}">
+                <a16:creationId xmlns:a16="http://schemas.microsoft.com/office/drawing/2014/main" id="{EA00C963-6AD4-06E7-E34B-4FDC370A528D}"/>
+              </a:ext>
+            </a:extLst>
+          </p:cNvPr>
+          <p:cNvGrpSpPr/>
+          <p:nvPr/>
+        </p:nvGrpSpPr>
+        <p:grpSpPr>
+          <a:xfrm>
+            <a:off x="-3160120" y="1363851"/>
+            <a:ext cx="2903284" cy="4366456"/>
+            <a:chOff x="504690" y="1363851"/>
+            <a:chExt cx="2903284" cy="4366456"/>
+          </a:xfrm>
+        </p:grpSpPr>
+        <p:pic>
+          <p:nvPicPr>
+            <p:cNvPr id="11" name="Afbeelding 10" descr="Afbeelding met schoeisel, kleding, person, persoon&#10;&#10;Door AI gegenereerde inhoud is mogelijk onjuist.">
+              <a:extLst>
+                <a:ext uri="{FF2B5EF4-FFF2-40B4-BE49-F238E27FC236}">
+                  <a16:creationId xmlns:a16="http://schemas.microsoft.com/office/drawing/2014/main" id="{1A673832-247C-378D-6C34-E76494F5D842}"/>
+                </a:ext>
+              </a:extLst>
+            </p:cNvPr>
+            <p:cNvPicPr>
+              <a:picLocks noChangeAspect="1"/>
+            </p:cNvPicPr>
+            <p:nvPr/>
+          </p:nvPicPr>
+          <p:blipFill>
+            <a:blip r:embed="rId3">
+              <a:extLst>
+                <a:ext uri="{28A0092B-C50C-407E-A947-70E740481C1C}">
+                  <a14:useLocalDpi xmlns:a14="http://schemas.microsoft.com/office/drawing/2010/main" val="0"/>
+                </a:ext>
+              </a:extLst>
+            </a:blip>
+            <a:srcRect b="6542"/>
+            <a:stretch>
+              <a:fillRect/>
+            </a:stretch>
+          </p:blipFill>
+          <p:spPr>
+            <a:xfrm>
+              <a:off x="504690" y="1660285"/>
+              <a:ext cx="2903284" cy="4070022"/>
+            </a:xfrm>
+            <a:prstGeom prst="rect">
+              <a:avLst/>
+            </a:prstGeom>
+          </p:spPr>
+        </p:pic>
+        <p:pic>
+          <p:nvPicPr>
+            <p:cNvPr id="12" name="Afbeelding 11" descr="Afbeelding met schoeisel, kleding, person, persoon&#10;&#10;Door AI gegenereerde inhoud is mogelijk onjuist.">
+              <a:extLst>
+                <a:ext uri="{FF2B5EF4-FFF2-40B4-BE49-F238E27FC236}">
+                  <a16:creationId xmlns:a16="http://schemas.microsoft.com/office/drawing/2014/main" id="{32CB1D28-F9D7-A2CC-0890-50292BA2FDC8}"/>
+                </a:ext>
+              </a:extLst>
+            </p:cNvPr>
+            <p:cNvPicPr>
+              <a:picLocks noChangeAspect="1"/>
+            </p:cNvPicPr>
+            <p:nvPr/>
+          </p:nvPicPr>
+          <p:blipFill>
+            <a:blip r:embed="rId3">
+              <a:extLst>
+                <a:ext uri="{28A0092B-C50C-407E-A947-70E740481C1C}">
+                  <a14:useLocalDpi xmlns:a14="http://schemas.microsoft.com/office/drawing/2010/main" val="0"/>
+                </a:ext>
+              </a:extLst>
+            </a:blip>
+            <a:srcRect b="81202"/>
+            <a:stretch>
+              <a:fillRect/>
+            </a:stretch>
+          </p:blipFill>
+          <p:spPr>
+            <a:xfrm>
+              <a:off x="504690" y="1363851"/>
+              <a:ext cx="2903284" cy="1115077"/>
+            </a:xfrm>
+            <a:prstGeom prst="rect">
+              <a:avLst/>
+            </a:prstGeom>
+          </p:spPr>
+        </p:pic>
+      </p:grpSp>
     </p:spTree>
     <p:extLst>
       <p:ext uri="{BB962C8B-B14F-4D97-AF65-F5344CB8AC3E}">

--- a/input/AI Transformation framework for European CEO’s.pptx
+++ b/input/AI Transformation framework for European CEO’s.pptx
@@ -5,17 +5,16 @@
     <p:sldMasterId id="2147483648" r:id="rId1"/>
   </p:sldMasterIdLst>
   <p:notesMasterIdLst>
-    <p:notesMasterId r:id="rId10"/>
+    <p:notesMasterId r:id="rId9"/>
   </p:notesMasterIdLst>
   <p:sldIdLst>
     <p:sldId id="2147480368" r:id="rId2"/>
     <p:sldId id="2147480366" r:id="rId3"/>
-    <p:sldId id="2147480381" r:id="rId4"/>
-    <p:sldId id="2147480382" r:id="rId5"/>
-    <p:sldId id="2147480383" r:id="rId6"/>
-    <p:sldId id="2147480372" r:id="rId7"/>
-    <p:sldId id="2147480380" r:id="rId8"/>
-    <p:sldId id="2147480367" r:id="rId9"/>
+    <p:sldId id="2147480382" r:id="rId4"/>
+    <p:sldId id="2147480383" r:id="rId5"/>
+    <p:sldId id="2147480372" r:id="rId6"/>
+    <p:sldId id="2147480380" r:id="rId7"/>
+    <p:sldId id="2147480367" r:id="rId8"/>
   </p:sldIdLst>
   <p:sldSz cx="12192000" cy="6858000"/>
   <p:notesSz cx="6858000" cy="9144000"/>
@@ -332,7 +331,7 @@
           <a:p>
             <a:fld id="{FAB7A3DB-122E-499C-AAFB-3D4665CBCADB}" type="datetimeFigureOut">
               <a:rPr lang="en-GB" smtClean="0"/>
-              <a:t>18/03/2026</a:t>
+              <a:t>05/04/2026</a:t>
             </a:fld>
             <a:endParaRPr lang="en-GB"/>
           </a:p>
@@ -800,114 +799,6 @@
         <p:cNvPr id="1" name="">
           <a:extLst>
             <a:ext uri="{FF2B5EF4-FFF2-40B4-BE49-F238E27FC236}">
-              <a16:creationId xmlns:a16="http://schemas.microsoft.com/office/drawing/2014/main" id="{A31AC376-0B55-5161-24EA-87A450FE7725}"/>
-            </a:ext>
-          </a:extLst>
-        </p:cNvPr>
-        <p:cNvGrpSpPr/>
-        <p:nvPr/>
-      </p:nvGrpSpPr>
-      <p:grpSpPr>
-        <a:xfrm>
-          <a:off x="0" y="0"/>
-          <a:ext cx="0" cy="0"/>
-          <a:chOff x="0" y="0"/>
-          <a:chExt cx="0" cy="0"/>
-        </a:xfrm>
-      </p:grpSpPr>
-      <p:sp>
-        <p:nvSpPr>
-          <p:cNvPr id="2" name="Slide Image Placeholder 1">
-            <a:extLst>
-              <a:ext uri="{FF2B5EF4-FFF2-40B4-BE49-F238E27FC236}">
-                <a16:creationId xmlns:a16="http://schemas.microsoft.com/office/drawing/2014/main" id="{56E9BA99-8135-2F6E-375A-A84D7D90D551}"/>
-              </a:ext>
-            </a:extLst>
-          </p:cNvPr>
-          <p:cNvSpPr>
-            <a:spLocks noGrp="1" noRot="1" noChangeAspect="1"/>
-          </p:cNvSpPr>
-          <p:nvPr>
-            <p:ph type="sldImg"/>
-          </p:nvPr>
-        </p:nvSpPr>
-        <p:spPr/>
-      </p:sp>
-      <p:sp>
-        <p:nvSpPr>
-          <p:cNvPr id="3" name="Notes Placeholder 2">
-            <a:extLst>
-              <a:ext uri="{FF2B5EF4-FFF2-40B4-BE49-F238E27FC236}">
-                <a16:creationId xmlns:a16="http://schemas.microsoft.com/office/drawing/2014/main" id="{A2267A88-4BCC-2B98-B9CC-259BB3226B82}"/>
-              </a:ext>
-            </a:extLst>
-          </p:cNvPr>
-          <p:cNvSpPr>
-            <a:spLocks noGrp="1"/>
-          </p:cNvSpPr>
-          <p:nvPr>
-            <p:ph type="body" idx="1"/>
-          </p:nvPr>
-        </p:nvSpPr>
-        <p:spPr/>
-        <p:txBody>
-          <a:bodyPr/>
-          <a:lstStyle/>
-          <a:p>
-            <a:endParaRPr lang="en-GB"/>
-          </a:p>
-        </p:txBody>
-      </p:sp>
-      <p:sp>
-        <p:nvSpPr>
-          <p:cNvPr id="4" name="Slide Number Placeholder 3">
-            <a:extLst>
-              <a:ext uri="{FF2B5EF4-FFF2-40B4-BE49-F238E27FC236}">
-                <a16:creationId xmlns:a16="http://schemas.microsoft.com/office/drawing/2014/main" id="{5644C475-3E9F-6FD3-3AF7-C3192FEF35AD}"/>
-              </a:ext>
-            </a:extLst>
-          </p:cNvPr>
-          <p:cNvSpPr>
-            <a:spLocks noGrp="1"/>
-          </p:cNvSpPr>
-          <p:nvPr>
-            <p:ph type="sldNum" sz="quarter" idx="5"/>
-          </p:nvPr>
-        </p:nvSpPr>
-        <p:spPr/>
-        <p:txBody>
-          <a:bodyPr/>
-          <a:lstStyle/>
-          <a:p>
-            <a:fld id="{BA1AFD66-2597-4960-86E3-D00E2B43A69D}" type="slidenum">
-              <a:rPr lang="en-GB" smtClean="0"/>
-              <a:t>3</a:t>
-            </a:fld>
-            <a:endParaRPr lang="en-GB"/>
-          </a:p>
-        </p:txBody>
-      </p:sp>
-    </p:spTree>
-    <p:extLst>
-      <p:ext uri="{BB962C8B-B14F-4D97-AF65-F5344CB8AC3E}">
-        <p14:creationId xmlns:p14="http://schemas.microsoft.com/office/powerpoint/2010/main" val="1070962077"/>
-      </p:ext>
-    </p:extLst>
-  </p:cSld>
-  <p:clrMapOvr>
-    <a:masterClrMapping/>
-  </p:clrMapOvr>
-</p:notes>
-</file>
-
-<file path=ppt/notesSlides/notesSlide4.xml><?xml version="1.0" encoding="utf-8"?>
-<p:notes xmlns:a="http://schemas.openxmlformats.org/drawingml/2006/main" xmlns:r="http://schemas.openxmlformats.org/officeDocument/2006/relationships" xmlns:p="http://schemas.openxmlformats.org/presentationml/2006/main">
-  <p:cSld>
-    <p:spTree>
-      <p:nvGrpSpPr>
-        <p:cNvPr id="1" name="">
-          <a:extLst>
-            <a:ext uri="{FF2B5EF4-FFF2-40B4-BE49-F238E27FC236}">
               <a16:creationId xmlns:a16="http://schemas.microsoft.com/office/drawing/2014/main" id="{41CF22E4-FA30-2B59-D474-BBAB9E25685E}"/>
             </a:ext>
           </a:extLst>
@@ -989,7 +880,7 @@
           <a:p>
             <a:fld id="{BA1AFD66-2597-4960-86E3-D00E2B43A69D}" type="slidenum">
               <a:rPr lang="en-GB" smtClean="0"/>
-              <a:t>4</a:t>
+              <a:t>3</a:t>
             </a:fld>
             <a:endParaRPr lang="en-GB"/>
           </a:p>
@@ -1008,7 +899,7 @@
 </p:notes>
 </file>
 
-<file path=ppt/notesSlides/notesSlide5.xml><?xml version="1.0" encoding="utf-8"?>
+<file path=ppt/notesSlides/notesSlide4.xml><?xml version="1.0" encoding="utf-8"?>
 <p:notes xmlns:a="http://schemas.openxmlformats.org/drawingml/2006/main" xmlns:r="http://schemas.openxmlformats.org/officeDocument/2006/relationships" xmlns:p="http://schemas.openxmlformats.org/presentationml/2006/main">
   <p:cSld>
     <p:spTree>
@@ -1097,7 +988,7 @@
           <a:p>
             <a:fld id="{BA1AFD66-2597-4960-86E3-D00E2B43A69D}" type="slidenum">
               <a:rPr lang="en-GB" smtClean="0"/>
-              <a:t>5</a:t>
+              <a:t>4</a:t>
             </a:fld>
             <a:endParaRPr lang="en-GB"/>
           </a:p>
@@ -1116,7 +1007,7 @@
 </p:notes>
 </file>
 
-<file path=ppt/notesSlides/notesSlide6.xml><?xml version="1.0" encoding="utf-8"?>
+<file path=ppt/notesSlides/notesSlide5.xml><?xml version="1.0" encoding="utf-8"?>
 <p:notes xmlns:a="http://schemas.openxmlformats.org/drawingml/2006/main" xmlns:r="http://schemas.openxmlformats.org/officeDocument/2006/relationships" xmlns:p="http://schemas.openxmlformats.org/presentationml/2006/main">
   <p:cSld>
     <p:spTree>
@@ -1205,7 +1096,7 @@
           <a:p>
             <a:fld id="{BA1AFD66-2597-4960-86E3-D00E2B43A69D}" type="slidenum">
               <a:rPr lang="en-GB" smtClean="0"/>
-              <a:t>6</a:t>
+              <a:t>5</a:t>
             </a:fld>
             <a:endParaRPr lang="en-GB"/>
           </a:p>
@@ -1224,7 +1115,7 @@
 </p:notes>
 </file>
 
-<file path=ppt/notesSlides/notesSlide7.xml><?xml version="1.0" encoding="utf-8"?>
+<file path=ppt/notesSlides/notesSlide6.xml><?xml version="1.0" encoding="utf-8"?>
 <p:notes xmlns:a="http://schemas.openxmlformats.org/drawingml/2006/main" xmlns:r="http://schemas.openxmlformats.org/officeDocument/2006/relationships" xmlns:p="http://schemas.openxmlformats.org/presentationml/2006/main">
   <p:cSld>
     <p:spTree>
@@ -1313,7 +1204,7 @@
           <a:p>
             <a:fld id="{BA1AFD66-2597-4960-86E3-D00E2B43A69D}" type="slidenum">
               <a:rPr lang="en-GB" smtClean="0"/>
-              <a:t>7</a:t>
+              <a:t>6</a:t>
             </a:fld>
             <a:endParaRPr lang="en-GB"/>
           </a:p>
@@ -1332,7 +1223,7 @@
 </p:notes>
 </file>
 
-<file path=ppt/notesSlides/notesSlide8.xml><?xml version="1.0" encoding="utf-8"?>
+<file path=ppt/notesSlides/notesSlide7.xml><?xml version="1.0" encoding="utf-8"?>
 <p:notes xmlns:a="http://schemas.openxmlformats.org/drawingml/2006/main" xmlns:r="http://schemas.openxmlformats.org/officeDocument/2006/relationships" xmlns:p="http://schemas.openxmlformats.org/presentationml/2006/main">
   <p:cSld>
     <p:spTree>
@@ -1421,7 +1312,7 @@
           <a:p>
             <a:fld id="{BA1AFD66-2597-4960-86E3-D00E2B43A69D}" type="slidenum">
               <a:rPr lang="en-GB" smtClean="0"/>
-              <a:t>8</a:t>
+              <a:t>7</a:t>
             </a:fld>
             <a:endParaRPr lang="en-GB"/>
           </a:p>
@@ -1589,7 +1480,7 @@
           <a:p>
             <a:fld id="{7E530143-BC45-40DA-908E-84B30ACFDA34}" type="datetimeFigureOut">
               <a:rPr lang="en-GB" smtClean="0"/>
-              <a:t>18/03/2026</a:t>
+              <a:t>05/04/2026</a:t>
             </a:fld>
             <a:endParaRPr lang="en-GB"/>
           </a:p>
@@ -1789,7 +1680,7 @@
           <a:p>
             <a:fld id="{7E530143-BC45-40DA-908E-84B30ACFDA34}" type="datetimeFigureOut">
               <a:rPr lang="en-GB" smtClean="0"/>
-              <a:t>18/03/2026</a:t>
+              <a:t>05/04/2026</a:t>
             </a:fld>
             <a:endParaRPr lang="en-GB"/>
           </a:p>
@@ -1999,7 +1890,7 @@
           <a:p>
             <a:fld id="{7E530143-BC45-40DA-908E-84B30ACFDA34}" type="datetimeFigureOut">
               <a:rPr lang="en-GB" smtClean="0"/>
-              <a:t>18/03/2026</a:t>
+              <a:t>05/04/2026</a:t>
             </a:fld>
             <a:endParaRPr lang="en-GB"/>
           </a:p>
@@ -2623,7 +2514,7 @@
           <a:p>
             <a:fld id="{7E530143-BC45-40DA-908E-84B30ACFDA34}" type="datetimeFigureOut">
               <a:rPr lang="en-GB" smtClean="0"/>
-              <a:t>18/03/2026</a:t>
+              <a:t>05/04/2026</a:t>
             </a:fld>
             <a:endParaRPr lang="en-GB"/>
           </a:p>
@@ -2899,7 +2790,7 @@
           <a:p>
             <a:fld id="{7E530143-BC45-40DA-908E-84B30ACFDA34}" type="datetimeFigureOut">
               <a:rPr lang="en-GB" smtClean="0"/>
-              <a:t>18/03/2026</a:t>
+              <a:t>05/04/2026</a:t>
             </a:fld>
             <a:endParaRPr lang="en-GB"/>
           </a:p>
@@ -3167,7 +3058,7 @@
           <a:p>
             <a:fld id="{7E530143-BC45-40DA-908E-84B30ACFDA34}" type="datetimeFigureOut">
               <a:rPr lang="en-GB" smtClean="0"/>
-              <a:t>18/03/2026</a:t>
+              <a:t>05/04/2026</a:t>
             </a:fld>
             <a:endParaRPr lang="en-GB"/>
           </a:p>
@@ -3582,7 +3473,7 @@
           <a:p>
             <a:fld id="{7E530143-BC45-40DA-908E-84B30ACFDA34}" type="datetimeFigureOut">
               <a:rPr lang="en-GB" smtClean="0"/>
-              <a:t>18/03/2026</a:t>
+              <a:t>05/04/2026</a:t>
             </a:fld>
             <a:endParaRPr lang="en-GB"/>
           </a:p>
@@ -3724,7 +3615,7 @@
           <a:p>
             <a:fld id="{7E530143-BC45-40DA-908E-84B30ACFDA34}" type="datetimeFigureOut">
               <a:rPr lang="en-GB" smtClean="0"/>
-              <a:t>18/03/2026</a:t>
+              <a:t>05/04/2026</a:t>
             </a:fld>
             <a:endParaRPr lang="en-GB"/>
           </a:p>
@@ -3837,7 +3728,7 @@
           <a:p>
             <a:fld id="{7E530143-BC45-40DA-908E-84B30ACFDA34}" type="datetimeFigureOut">
               <a:rPr lang="en-GB" smtClean="0"/>
-              <a:t>18/03/2026</a:t>
+              <a:t>05/04/2026</a:t>
             </a:fld>
             <a:endParaRPr lang="en-GB"/>
           </a:p>
@@ -4150,7 +4041,7 @@
           <a:p>
             <a:fld id="{7E530143-BC45-40DA-908E-84B30ACFDA34}" type="datetimeFigureOut">
               <a:rPr lang="en-GB" smtClean="0"/>
-              <a:t>18/03/2026</a:t>
+              <a:t>05/04/2026</a:t>
             </a:fld>
             <a:endParaRPr lang="en-GB"/>
           </a:p>
@@ -4439,7 +4330,7 @@
           <a:p>
             <a:fld id="{7E530143-BC45-40DA-908E-84B30ACFDA34}" type="datetimeFigureOut">
               <a:rPr lang="en-GB" smtClean="0"/>
-              <a:t>18/03/2026</a:t>
+              <a:t>05/04/2026</a:t>
             </a:fld>
             <a:endParaRPr lang="en-GB"/>
           </a:p>
@@ -4682,7 +4573,7 @@
           <a:p>
             <a:fld id="{7E530143-BC45-40DA-908E-84B30ACFDA34}" type="datetimeFigureOut">
               <a:rPr lang="en-GB" smtClean="0"/>
-              <a:t>18/03/2026</a:t>
+              <a:t>05/04/2026</a:t>
             </a:fld>
             <a:endParaRPr lang="en-GB"/>
           </a:p>
@@ -5751,8 +5642,8 @@
         </p:nvSpPr>
         <p:spPr>
           <a:xfrm>
-            <a:off x="1947040" y="424491"/>
-            <a:ext cx="8442435" cy="4690889"/>
+            <a:off x="2200758" y="424491"/>
+            <a:ext cx="8028123" cy="4690889"/>
           </a:xfrm>
           <a:prstGeom prst="rect">
             <a:avLst/>
@@ -5832,12 +5723,70 @@
           </a:p>
         </p:txBody>
       </p:sp>
+      <p:pic>
+        <p:nvPicPr>
+          <p:cNvPr id="1026" name="Picture 2" descr="Geen ALT-tekst opgegeven voor deze afbeelding">
+            <a:extLst>
+              <a:ext uri="{FF2B5EF4-FFF2-40B4-BE49-F238E27FC236}">
+                <a16:creationId xmlns:a16="http://schemas.microsoft.com/office/drawing/2014/main" id="{BE962BD8-FFF4-D3DC-1C7C-18B0CFA0E27E}"/>
+              </a:ext>
+            </a:extLst>
+          </p:cNvPr>
+          <p:cNvPicPr>
+            <a:picLocks noChangeAspect="1" noChangeArrowheads="1"/>
+          </p:cNvPicPr>
+          <p:nvPr/>
+        </p:nvPicPr>
+        <p:blipFill rotWithShape="1">
+          <a:blip r:embed="rId3">
+            <a:clrChange>
+              <a:clrFrom>
+                <a:srgbClr val="F0F4FD"/>
+              </a:clrFrom>
+              <a:clrTo>
+                <a:srgbClr val="F0F4FD">
+                  <a:alpha val="0"/>
+                </a:srgbClr>
+              </a:clrTo>
+            </a:clrChange>
+            <a:grayscl/>
+            <a:extLst>
+              <a:ext uri="{28A0092B-C50C-407E-A947-70E740481C1C}">
+                <a14:useLocalDpi xmlns:a14="http://schemas.microsoft.com/office/drawing/2010/main" val="0"/>
+              </a:ext>
+            </a:extLst>
+          </a:blip>
+          <a:srcRect l="72429" t="45111" r="17782" b="46173"/>
+          <a:stretch>
+            <a:fillRect/>
+          </a:stretch>
+        </p:blipFill>
+        <p:spPr bwMode="auto">
+          <a:xfrm>
+            <a:off x="8617054" y="2179664"/>
+            <a:ext cx="1006998" cy="597726"/>
+          </a:xfrm>
+          <a:prstGeom prst="rect">
+            <a:avLst/>
+          </a:prstGeom>
+          <a:noFill/>
+          <a:extLst>
+            <a:ext uri="{909E8E84-426E-40DD-AFC4-6F175D3DCCD1}">
+              <a14:hiddenFill xmlns:a14="http://schemas.microsoft.com/office/drawing/2010/main">
+                <a:solidFill>
+                  <a:srgbClr val="FFFFFF"/>
+                </a:solidFill>
+              </a14:hiddenFill>
+            </a:ext>
+          </a:extLst>
+        </p:spPr>
+      </p:pic>
       <p:grpSp>
         <p:nvGrpSpPr>
-          <p:cNvPr id="51" name="Groep 50">
-            <a:extLst>
-              <a:ext uri="{FF2B5EF4-FFF2-40B4-BE49-F238E27FC236}">
-                <a16:creationId xmlns:a16="http://schemas.microsoft.com/office/drawing/2014/main" id="{1FC40DF5-F758-045D-0665-BE46FB1FB96B}"/>
+          <p:cNvPr id="50" name="Groep 49">
+            <a:extLst>
+              <a:ext uri="{FF2B5EF4-FFF2-40B4-BE49-F238E27FC236}">
+                <a16:creationId xmlns:a16="http://schemas.microsoft.com/office/drawing/2014/main" id="{11553B2F-71BA-6680-A5C5-C65FDE5798C4}"/>
               </a:ext>
             </a:extLst>
           </p:cNvPr>
@@ -5846,271 +5795,49 @@
         </p:nvGrpSpPr>
         <p:grpSpPr>
           <a:xfrm>
-            <a:off x="2238181" y="1664694"/>
-            <a:ext cx="7860151" cy="2917691"/>
-            <a:chOff x="2238181" y="1664694"/>
-            <a:chExt cx="7860151" cy="2917691"/>
+            <a:off x="2238181" y="2232867"/>
+            <a:ext cx="1872927" cy="2583048"/>
+            <a:chOff x="2238181" y="2608884"/>
+            <a:chExt cx="1872927" cy="2583048"/>
           </a:xfrm>
         </p:grpSpPr>
-        <p:pic>
-          <p:nvPicPr>
-            <p:cNvPr id="1026" name="Picture 2" descr="Geen ALT-tekst opgegeven voor deze afbeelding">
+        <p:sp>
+          <p:nvSpPr>
+            <p:cNvPr id="6" name="Tekstvak 5">
               <a:extLst>
                 <a:ext uri="{FF2B5EF4-FFF2-40B4-BE49-F238E27FC236}">
-                  <a16:creationId xmlns:a16="http://schemas.microsoft.com/office/drawing/2014/main" id="{BE962BD8-FFF4-D3DC-1C7C-18B0CFA0E27E}"/>
+                  <a16:creationId xmlns:a16="http://schemas.microsoft.com/office/drawing/2014/main" id="{B7BC8CD5-8290-7BF8-0563-0B5D354C08B9}"/>
                 </a:ext>
               </a:extLst>
             </p:cNvPr>
-            <p:cNvPicPr>
-              <a:picLocks noChangeAspect="1" noChangeArrowheads="1"/>
-            </p:cNvPicPr>
+            <p:cNvSpPr txBox="1"/>
             <p:nvPr/>
-          </p:nvPicPr>
-          <p:blipFill rotWithShape="1">
-            <a:blip r:embed="rId3">
-              <a:clrChange>
-                <a:clrFrom>
-                  <a:srgbClr val="F0F4FD"/>
-                </a:clrFrom>
-                <a:clrTo>
-                  <a:srgbClr val="F0F4FD">
-                    <a:alpha val="0"/>
-                  </a:srgbClr>
-                </a:clrTo>
-              </a:clrChange>
-              <a:grayscl/>
-              <a:extLst>
-                <a:ext uri="{28A0092B-C50C-407E-A947-70E740481C1C}">
-                  <a14:useLocalDpi xmlns:a14="http://schemas.microsoft.com/office/drawing/2010/main" val="0"/>
-                </a:ext>
-              </a:extLst>
-            </a:blip>
-            <a:srcRect l="72429" t="45111" r="17782" b="46173"/>
-            <a:stretch>
-              <a:fillRect/>
-            </a:stretch>
-          </p:blipFill>
-          <p:spPr bwMode="auto">
+          </p:nvSpPr>
+          <p:spPr>
             <a:xfrm>
-              <a:off x="8617054" y="2555681"/>
-              <a:ext cx="1006998" cy="597726"/>
+              <a:off x="2238181" y="4059994"/>
+              <a:ext cx="1872925" cy="1031051"/>
             </a:xfrm>
             <a:prstGeom prst="rect">
               <a:avLst/>
             </a:prstGeom>
             <a:noFill/>
-            <a:extLst>
-              <a:ext uri="{909E8E84-426E-40DD-AFC4-6F175D3DCCD1}">
-                <a14:hiddenFill xmlns:a14="http://schemas.microsoft.com/office/drawing/2010/main">
-                  <a:solidFill>
-                    <a:srgbClr val="FFFFFF"/>
-                  </a:solidFill>
-                </a14:hiddenFill>
-              </a:ext>
-            </a:extLst>
           </p:spPr>
-        </p:pic>
-        <p:grpSp>
-          <p:nvGrpSpPr>
-            <p:cNvPr id="50" name="Groep 49">
-              <a:extLst>
-                <a:ext uri="{FF2B5EF4-FFF2-40B4-BE49-F238E27FC236}">
-                  <a16:creationId xmlns:a16="http://schemas.microsoft.com/office/drawing/2014/main" id="{11553B2F-71BA-6680-A5C5-C65FDE5798C4}"/>
-                </a:ext>
-              </a:extLst>
-            </p:cNvPr>
-            <p:cNvGrpSpPr/>
-            <p:nvPr/>
-          </p:nvGrpSpPr>
-          <p:grpSpPr>
-            <a:xfrm>
-              <a:off x="2238181" y="2608884"/>
-              <a:ext cx="1872927" cy="1973501"/>
-              <a:chOff x="2238181" y="2608884"/>
-              <a:chExt cx="1872927" cy="1973501"/>
-            </a:xfrm>
-          </p:grpSpPr>
-          <p:sp>
-            <p:nvSpPr>
-              <p:cNvPr id="6" name="Tekstvak 5">
-                <a:extLst>
-                  <a:ext uri="{FF2B5EF4-FFF2-40B4-BE49-F238E27FC236}">
-                    <a16:creationId xmlns:a16="http://schemas.microsoft.com/office/drawing/2014/main" id="{B7BC8CD5-8290-7BF8-0563-0B5D354C08B9}"/>
-                  </a:ext>
-                </a:extLst>
-              </p:cNvPr>
-              <p:cNvSpPr txBox="1"/>
-              <p:nvPr/>
-            </p:nvSpPr>
-            <p:spPr>
-              <a:xfrm>
-                <a:off x="2238181" y="3924904"/>
-                <a:ext cx="1872925" cy="507831"/>
-              </a:xfrm>
-              <a:prstGeom prst="rect">
-                <a:avLst/>
-              </a:prstGeom>
-              <a:noFill/>
-            </p:spPr>
-            <p:txBody>
-              <a:bodyPr wrap="square" lIns="90000" rIns="36000" rtlCol="0">
-                <a:spAutoFit/>
-              </a:bodyPr>
-              <a:lstStyle/>
-              <a:p>
-                <a:pPr marL="92075" indent="-92075">
-                  <a:spcAft>
-                    <a:spcPts val="600"/>
-                  </a:spcAft>
-                  <a:buFont typeface="Arial" panose="020B0604020202020204" pitchFamily="34" charset="0"/>
-                  <a:buChar char="•"/>
-                </a:pPr>
-                <a:r>
-                  <a:rPr lang="en-GB" sz="1100" dirty="0">
-                    <a:solidFill>
-                      <a:schemeClr val="tx1">
-                        <a:lumMod val="85000"/>
-                        <a:lumOff val="15000"/>
-                      </a:schemeClr>
-                    </a:solidFill>
-                    <a:latin typeface="+mj-lt"/>
-                  </a:rPr>
-                  <a:t>Agents assist individuals</a:t>
-                </a:r>
-              </a:p>
-              <a:p>
-                <a:pPr marL="92075" indent="-92075">
-                  <a:spcAft>
-                    <a:spcPts val="600"/>
-                  </a:spcAft>
-                  <a:buFont typeface="Arial" panose="020B0604020202020204" pitchFamily="34" charset="0"/>
-                  <a:buChar char="•"/>
-                </a:pPr>
-                <a:r>
-                  <a:rPr lang="en-GB" sz="1100" dirty="0">
-                    <a:solidFill>
-                      <a:schemeClr val="tx1">
-                        <a:lumMod val="85000"/>
-                        <a:lumOff val="15000"/>
-                      </a:schemeClr>
-                    </a:solidFill>
-                    <a:latin typeface="+mj-lt"/>
-                  </a:rPr>
-                  <a:t>Improve personal tasks</a:t>
-                </a:r>
-              </a:p>
-            </p:txBody>
-          </p:sp>
-          <p:sp>
-            <p:nvSpPr>
-              <p:cNvPr id="9" name="Rechthoek: afgeronde bovenhoeken 8">
-                <a:extLst>
-                  <a:ext uri="{FF2B5EF4-FFF2-40B4-BE49-F238E27FC236}">
-                    <a16:creationId xmlns:a16="http://schemas.microsoft.com/office/drawing/2014/main" id="{47A8ACC6-4D65-0098-F12F-198B6EC32731}"/>
-                  </a:ext>
-                </a:extLst>
-              </p:cNvPr>
-              <p:cNvSpPr/>
-              <p:nvPr/>
-            </p:nvSpPr>
-            <p:spPr>
-              <a:xfrm>
-                <a:off x="2238182" y="2608884"/>
-                <a:ext cx="1872926" cy="626416"/>
-              </a:xfrm>
-              <a:prstGeom prst="round2SameRect">
-                <a:avLst>
-                  <a:gd name="adj1" fmla="val 24049"/>
-                  <a:gd name="adj2" fmla="val 0"/>
-                </a:avLst>
-              </a:prstGeom>
-              <a:solidFill>
-                <a:schemeClr val="tx1">
-                  <a:lumMod val="85000"/>
-                  <a:lumOff val="15000"/>
-                </a:schemeClr>
-              </a:solidFill>
-              <a:ln>
-                <a:noFill/>
-              </a:ln>
-            </p:spPr>
-            <p:style>
-              <a:lnRef idx="2">
-                <a:schemeClr val="accent1">
-                  <a:shade val="15000"/>
-                </a:schemeClr>
-              </a:lnRef>
-              <a:fillRef idx="1">
-                <a:schemeClr val="accent1"/>
-              </a:fillRef>
-              <a:effectRef idx="0">
-                <a:schemeClr val="accent1"/>
-              </a:effectRef>
-              <a:fontRef idx="minor">
-                <a:schemeClr val="lt1"/>
-              </a:fontRef>
-            </p:style>
-            <p:txBody>
-              <a:bodyPr rtlCol="0" anchor="ctr"/>
-              <a:lstStyle/>
-              <a:p>
-                <a:pPr algn="ctr"/>
-                <a:endParaRPr lang="en-GB">
-                  <a:solidFill>
-                    <a:schemeClr val="tx1">
-                      <a:lumMod val="85000"/>
-                      <a:lumOff val="15000"/>
-                    </a:schemeClr>
-                  </a:solidFill>
-                </a:endParaRPr>
-              </a:p>
-            </p:txBody>
-          </p:sp>
-          <p:sp>
-            <p:nvSpPr>
-              <p:cNvPr id="4" name="Rechthoek: afgeronde hoeken 3">
-                <a:extLst>
-                  <a:ext uri="{FF2B5EF4-FFF2-40B4-BE49-F238E27FC236}">
-                    <a16:creationId xmlns:a16="http://schemas.microsoft.com/office/drawing/2014/main" id="{7173F817-78BD-F5A5-D5A1-F38742BCBC56}"/>
-                  </a:ext>
-                </a:extLst>
-              </p:cNvPr>
-              <p:cNvSpPr/>
-              <p:nvPr/>
-            </p:nvSpPr>
-            <p:spPr>
-              <a:xfrm>
-                <a:off x="2238182" y="2608884"/>
-                <a:ext cx="1872926" cy="1973501"/>
-              </a:xfrm>
-              <a:prstGeom prst="roundRect">
-                <a:avLst>
-                  <a:gd name="adj" fmla="val 6903"/>
-                </a:avLst>
-              </a:prstGeom>
-              <a:noFill/>
-              <a:ln w="12700">
-                <a:solidFill>
-                  <a:schemeClr val="tx1">
-                    <a:lumMod val="75000"/>
-                    <a:lumOff val="25000"/>
-                  </a:schemeClr>
-                </a:solidFill>
-              </a:ln>
-            </p:spPr>
-            <p:txBody>
-              <a:bodyPr wrap="square" tIns="90000" anchor="ctr" anchorCtr="1">
-                <a:noAutofit/>
-              </a:bodyPr>
-              <a:lstStyle/>
-              <a:p>
-                <a:pPr algn="ctr">
-                  <a:lnSpc>
-                    <a:spcPts val="1300"/>
-                  </a:lnSpc>
-                  <a:buNone/>
-                </a:pPr>
-                <a:endParaRPr lang="en-GB" sz="1200" i="1" noProof="0" dirty="0">
+          <p:txBody>
+            <a:bodyPr wrap="square" lIns="90000" rIns="36000" rtlCol="0">
+              <a:spAutoFit/>
+            </a:bodyPr>
+            <a:lstStyle/>
+            <a:p>
+              <a:pPr marL="92075" indent="-92075">
+                <a:spcAft>
+                  <a:spcPts val="600"/>
+                </a:spcAft>
+                <a:buFont typeface="Arial" panose="020B0604020202020204" pitchFamily="34" charset="0"/>
+                <a:buChar char="•"/>
+              </a:pPr>
+              <a:r>
+                <a:rPr lang="en-GB" sz="1400" dirty="0">
                   <a:solidFill>
                     <a:schemeClr val="tx1">
                       <a:lumMod val="85000"/>
@@ -6118,258 +5845,20 @@
                     </a:schemeClr>
                   </a:solidFill>
                   <a:latin typeface="+mj-lt"/>
-                </a:endParaRPr>
-              </a:p>
-            </p:txBody>
-          </p:sp>
-          <p:sp>
-            <p:nvSpPr>
-              <p:cNvPr id="10" name="Tekstvak 9">
-                <a:extLst>
-                  <a:ext uri="{FF2B5EF4-FFF2-40B4-BE49-F238E27FC236}">
-                    <a16:creationId xmlns:a16="http://schemas.microsoft.com/office/drawing/2014/main" id="{D9A05767-F9F0-938D-7AA8-2AC141DDCD4C}"/>
-                  </a:ext>
-                </a:extLst>
-              </p:cNvPr>
-              <p:cNvSpPr txBox="1"/>
-              <p:nvPr/>
-            </p:nvSpPr>
-            <p:spPr>
-              <a:xfrm>
-                <a:off x="2278822" y="2654320"/>
-                <a:ext cx="1597379" cy="523220"/>
-              </a:xfrm>
-              <a:prstGeom prst="rect">
-                <a:avLst/>
-              </a:prstGeom>
-              <a:noFill/>
-            </p:spPr>
-            <p:txBody>
-              <a:bodyPr wrap="square" rtlCol="0">
-                <a:spAutoFit/>
-              </a:bodyPr>
-              <a:lstStyle/>
-              <a:p>
-                <a:r>
-                  <a:rPr lang="en-GB" sz="1400" b="1" dirty="0">
-                    <a:solidFill>
-                      <a:schemeClr val="bg1"/>
-                    </a:solidFill>
-                    <a:latin typeface="DM Sans" pitchFamily="2" charset="0"/>
-                  </a:rPr>
-                  <a:t>Individual augmentation</a:t>
-                </a:r>
-                <a:endParaRPr lang="en-GB" sz="1400" b="1" i="1" dirty="0">
-                  <a:solidFill>
-                    <a:schemeClr val="bg1"/>
-                  </a:solidFill>
-                  <a:latin typeface="DM Sans" pitchFamily="2" charset="0"/>
-                </a:endParaRPr>
-              </a:p>
-            </p:txBody>
-          </p:sp>
-        </p:grpSp>
-        <p:grpSp>
-          <p:nvGrpSpPr>
-            <p:cNvPr id="49" name="Groep 48">
-              <a:extLst>
-                <a:ext uri="{FF2B5EF4-FFF2-40B4-BE49-F238E27FC236}">
-                  <a16:creationId xmlns:a16="http://schemas.microsoft.com/office/drawing/2014/main" id="{3265D777-72EB-BC6A-438D-3BD73F721A27}"/>
-                </a:ext>
-              </a:extLst>
-            </p:cNvPr>
-            <p:cNvGrpSpPr/>
-            <p:nvPr/>
-          </p:nvGrpSpPr>
-          <p:grpSpPr>
-            <a:xfrm>
-              <a:off x="4233922" y="2294154"/>
-              <a:ext cx="1872927" cy="2288231"/>
-              <a:chOff x="4233922" y="2294154"/>
-              <a:chExt cx="1872927" cy="2288231"/>
-            </a:xfrm>
-          </p:grpSpPr>
-          <p:sp>
-            <p:nvSpPr>
-              <p:cNvPr id="22" name="Tekstvak 21">
-                <a:extLst>
-                  <a:ext uri="{FF2B5EF4-FFF2-40B4-BE49-F238E27FC236}">
-                    <a16:creationId xmlns:a16="http://schemas.microsoft.com/office/drawing/2014/main" id="{3B5F272C-15AA-8037-125C-BA55F0A2BC1F}"/>
-                  </a:ext>
-                </a:extLst>
-              </p:cNvPr>
-              <p:cNvSpPr txBox="1"/>
-              <p:nvPr/>
-            </p:nvSpPr>
-            <p:spPr>
-              <a:xfrm>
-                <a:off x="4233922" y="3924904"/>
-                <a:ext cx="1862077" cy="507831"/>
-              </a:xfrm>
-              <a:prstGeom prst="rect">
-                <a:avLst/>
-              </a:prstGeom>
-              <a:noFill/>
-            </p:spPr>
-            <p:txBody>
-              <a:bodyPr wrap="square" lIns="90000" rIns="36000" rtlCol="0">
-                <a:spAutoFit/>
-              </a:bodyPr>
-              <a:lstStyle/>
-              <a:p>
-                <a:pPr marL="92075" indent="-92075">
-                  <a:spcAft>
-                    <a:spcPts val="600"/>
-                  </a:spcAft>
-                  <a:buFont typeface="Arial" panose="020B0604020202020204" pitchFamily="34" charset="0"/>
-                  <a:buChar char="•"/>
-                </a:pPr>
-                <a:r>
-                  <a:rPr lang="en-GB" sz="1100" dirty="0">
-                    <a:solidFill>
-                      <a:schemeClr val="tx1">
-                        <a:lumMod val="85000"/>
-                        <a:lumOff val="15000"/>
-                      </a:schemeClr>
-                    </a:solidFill>
-                    <a:latin typeface="+mj-lt"/>
-                  </a:rPr>
-                  <a:t>Automate routine workflows</a:t>
-                </a:r>
-              </a:p>
-              <a:p>
-                <a:pPr marL="92075" indent="-92075">
-                  <a:spcAft>
-                    <a:spcPts val="600"/>
-                  </a:spcAft>
-                  <a:buFont typeface="Arial" panose="020B0604020202020204" pitchFamily="34" charset="0"/>
-                  <a:buChar char="•"/>
-                </a:pPr>
-                <a:r>
-                  <a:rPr lang="en-GB" sz="1100" dirty="0">
-                    <a:solidFill>
-                      <a:schemeClr val="tx1">
-                        <a:lumMod val="85000"/>
-                        <a:lumOff val="15000"/>
-                      </a:schemeClr>
-                    </a:solidFill>
-                    <a:latin typeface="+mj-lt"/>
-                  </a:rPr>
-                  <a:t>Scale execution quality</a:t>
-                </a:r>
-              </a:p>
-            </p:txBody>
-          </p:sp>
-          <p:sp>
-            <p:nvSpPr>
-              <p:cNvPr id="23" name="Rechthoek: afgeronde bovenhoeken 22">
-                <a:extLst>
-                  <a:ext uri="{FF2B5EF4-FFF2-40B4-BE49-F238E27FC236}">
-                    <a16:creationId xmlns:a16="http://schemas.microsoft.com/office/drawing/2014/main" id="{BEAD4EBB-6063-9EA7-CADB-ABC1B6AD7140}"/>
-                  </a:ext>
-                </a:extLst>
-              </p:cNvPr>
-              <p:cNvSpPr/>
-              <p:nvPr/>
-            </p:nvSpPr>
-            <p:spPr>
-              <a:xfrm>
-                <a:off x="4233923" y="2294154"/>
-                <a:ext cx="1872926" cy="626416"/>
-              </a:xfrm>
-              <a:prstGeom prst="round2SameRect">
-                <a:avLst>
-                  <a:gd name="adj1" fmla="val 24049"/>
-                  <a:gd name="adj2" fmla="val 0"/>
-                </a:avLst>
-              </a:prstGeom>
-              <a:solidFill>
-                <a:schemeClr val="tx1">
-                  <a:lumMod val="85000"/>
-                  <a:lumOff val="15000"/>
-                </a:schemeClr>
-              </a:solidFill>
-              <a:ln>
-                <a:noFill/>
-              </a:ln>
-            </p:spPr>
-            <p:style>
-              <a:lnRef idx="2">
-                <a:schemeClr val="accent1">
-                  <a:shade val="15000"/>
-                </a:schemeClr>
-              </a:lnRef>
-              <a:fillRef idx="1">
-                <a:schemeClr val="accent1"/>
-              </a:fillRef>
-              <a:effectRef idx="0">
-                <a:schemeClr val="accent1"/>
-              </a:effectRef>
-              <a:fontRef idx="minor">
-                <a:schemeClr val="lt1"/>
-              </a:fontRef>
-            </p:style>
-            <p:txBody>
-              <a:bodyPr rtlCol="0" anchor="ctr"/>
-              <a:lstStyle/>
-              <a:p>
-                <a:pPr algn="ctr"/>
-                <a:endParaRPr lang="en-GB">
-                  <a:solidFill>
-                    <a:schemeClr val="tx1">
-                      <a:lumMod val="85000"/>
-                      <a:lumOff val="15000"/>
-                    </a:schemeClr>
-                  </a:solidFill>
-                </a:endParaRPr>
-              </a:p>
-            </p:txBody>
-          </p:sp>
-          <p:sp>
-            <p:nvSpPr>
-              <p:cNvPr id="24" name="Rechthoek: afgeronde hoeken 23">
-                <a:extLst>
-                  <a:ext uri="{FF2B5EF4-FFF2-40B4-BE49-F238E27FC236}">
-                    <a16:creationId xmlns:a16="http://schemas.microsoft.com/office/drawing/2014/main" id="{C3CB4C2B-D918-6F91-F6D1-C736B7FC0BB9}"/>
-                  </a:ext>
-                </a:extLst>
-              </p:cNvPr>
-              <p:cNvSpPr/>
-              <p:nvPr/>
-            </p:nvSpPr>
-            <p:spPr>
-              <a:xfrm>
-                <a:off x="4233923" y="2294154"/>
-                <a:ext cx="1872926" cy="2288231"/>
-              </a:xfrm>
-              <a:prstGeom prst="roundRect">
-                <a:avLst>
-                  <a:gd name="adj" fmla="val 6903"/>
-                </a:avLst>
-              </a:prstGeom>
-              <a:noFill/>
-              <a:ln w="12700">
-                <a:solidFill>
-                  <a:schemeClr val="tx1">
-                    <a:lumMod val="75000"/>
-                    <a:lumOff val="25000"/>
-                  </a:schemeClr>
-                </a:solidFill>
-              </a:ln>
-            </p:spPr>
-            <p:txBody>
-              <a:bodyPr wrap="square" tIns="90000" anchor="ctr" anchorCtr="1">
-                <a:noAutofit/>
-              </a:bodyPr>
-              <a:lstStyle/>
-              <a:p>
-                <a:pPr algn="ctr">
-                  <a:lnSpc>
-                    <a:spcPts val="1300"/>
-                  </a:lnSpc>
-                  <a:buNone/>
-                </a:pPr>
-                <a:endParaRPr lang="en-GB" sz="1200" i="1" noProof="0" dirty="0">
+                </a:rPr>
+                <a:t>Agents assist individuals</a:t>
+              </a:r>
+            </a:p>
+            <a:p>
+              <a:pPr marL="92075" indent="-92075">
+                <a:spcAft>
+                  <a:spcPts val="600"/>
+                </a:spcAft>
+                <a:buFont typeface="Arial" panose="020B0604020202020204" pitchFamily="34" charset="0"/>
+                <a:buChar char="•"/>
+              </a:pPr>
+              <a:r>
+                <a:rPr lang="en-GB" sz="1400" dirty="0">
                   <a:solidFill>
                     <a:schemeClr val="tx1">
                       <a:lumMod val="85000"/>
@@ -6377,258 +5866,237 @@
                     </a:schemeClr>
                   </a:solidFill>
                   <a:latin typeface="+mj-lt"/>
-                </a:endParaRPr>
-              </a:p>
-            </p:txBody>
-          </p:sp>
-          <p:sp>
-            <p:nvSpPr>
-              <p:cNvPr id="25" name="Tekstvak 24">
-                <a:extLst>
-                  <a:ext uri="{FF2B5EF4-FFF2-40B4-BE49-F238E27FC236}">
-                    <a16:creationId xmlns:a16="http://schemas.microsoft.com/office/drawing/2014/main" id="{1AF15559-C56E-C8DA-7EFD-7A3096894052}"/>
-                  </a:ext>
-                </a:extLst>
-              </p:cNvPr>
-              <p:cNvSpPr txBox="1"/>
-              <p:nvPr/>
-            </p:nvSpPr>
-            <p:spPr>
-              <a:xfrm>
-                <a:off x="4274563" y="2339590"/>
-                <a:ext cx="1597379" cy="523220"/>
-              </a:xfrm>
-              <a:prstGeom prst="rect">
-                <a:avLst/>
-              </a:prstGeom>
+                </a:rPr>
+                <a:t>Improve personal tasks</a:t>
+              </a:r>
+            </a:p>
+          </p:txBody>
+        </p:sp>
+        <p:sp>
+          <p:nvSpPr>
+            <p:cNvPr id="9" name="Rechthoek: afgeronde bovenhoeken 8">
+              <a:extLst>
+                <a:ext uri="{FF2B5EF4-FFF2-40B4-BE49-F238E27FC236}">
+                  <a16:creationId xmlns:a16="http://schemas.microsoft.com/office/drawing/2014/main" id="{47A8ACC6-4D65-0098-F12F-198B6EC32731}"/>
+                </a:ext>
+              </a:extLst>
+            </p:cNvPr>
+            <p:cNvSpPr/>
+            <p:nvPr/>
+          </p:nvSpPr>
+          <p:spPr>
+            <a:xfrm>
+              <a:off x="2238182" y="2608884"/>
+              <a:ext cx="1872926" cy="626416"/>
+            </a:xfrm>
+            <a:prstGeom prst="round2SameRect">
+              <a:avLst>
+                <a:gd name="adj1" fmla="val 24049"/>
+                <a:gd name="adj2" fmla="val 0"/>
+              </a:avLst>
+            </a:prstGeom>
+            <a:solidFill>
+              <a:schemeClr val="tx1">
+                <a:lumMod val="85000"/>
+                <a:lumOff val="15000"/>
+              </a:schemeClr>
+            </a:solidFill>
+            <a:ln>
               <a:noFill/>
-            </p:spPr>
-            <p:txBody>
-              <a:bodyPr wrap="square" rtlCol="0">
-                <a:spAutoFit/>
-              </a:bodyPr>
-              <a:lstStyle/>
-              <a:p>
-                <a:r>
-                  <a:rPr lang="en-GB" sz="1400" b="1" dirty="0">
-                    <a:solidFill>
-                      <a:schemeClr val="bg1"/>
-                    </a:solidFill>
-                    <a:latin typeface="DM Sans" pitchFamily="2" charset="0"/>
-                  </a:rPr>
-                  <a:t>Task &amp; workflow automation</a:t>
-                </a:r>
-                <a:endParaRPr lang="en-GB" sz="1400" b="1" i="1" dirty="0">
+            </a:ln>
+          </p:spPr>
+          <p:style>
+            <a:lnRef idx="2">
+              <a:schemeClr val="accent1">
+                <a:shade val="15000"/>
+              </a:schemeClr>
+            </a:lnRef>
+            <a:fillRef idx="1">
+              <a:schemeClr val="accent1"/>
+            </a:fillRef>
+            <a:effectRef idx="0">
+              <a:schemeClr val="accent1"/>
+            </a:effectRef>
+            <a:fontRef idx="minor">
+              <a:schemeClr val="lt1"/>
+            </a:fontRef>
+          </p:style>
+          <p:txBody>
+            <a:bodyPr rtlCol="0" anchor="ctr"/>
+            <a:lstStyle/>
+            <a:p>
+              <a:pPr algn="ctr"/>
+              <a:endParaRPr lang="en-GB">
+                <a:solidFill>
+                  <a:schemeClr val="tx1">
+                    <a:lumMod val="85000"/>
+                    <a:lumOff val="15000"/>
+                  </a:schemeClr>
+                </a:solidFill>
+              </a:endParaRPr>
+            </a:p>
+          </p:txBody>
+        </p:sp>
+        <p:sp>
+          <p:nvSpPr>
+            <p:cNvPr id="4" name="Rechthoek: afgeronde hoeken 3">
+              <a:extLst>
+                <a:ext uri="{FF2B5EF4-FFF2-40B4-BE49-F238E27FC236}">
+                  <a16:creationId xmlns:a16="http://schemas.microsoft.com/office/drawing/2014/main" id="{7173F817-78BD-F5A5-D5A1-F38742BCBC56}"/>
+                </a:ext>
+              </a:extLst>
+            </p:cNvPr>
+            <p:cNvSpPr/>
+            <p:nvPr/>
+          </p:nvSpPr>
+          <p:spPr>
+            <a:xfrm>
+              <a:off x="2238182" y="2608884"/>
+              <a:ext cx="1872926" cy="2583048"/>
+            </a:xfrm>
+            <a:prstGeom prst="roundRect">
+              <a:avLst>
+                <a:gd name="adj" fmla="val 6903"/>
+              </a:avLst>
+            </a:prstGeom>
+            <a:noFill/>
+            <a:ln w="12700">
+              <a:solidFill>
+                <a:schemeClr val="tx1">
+                  <a:lumMod val="75000"/>
+                  <a:lumOff val="25000"/>
+                </a:schemeClr>
+              </a:solidFill>
+            </a:ln>
+          </p:spPr>
+          <p:txBody>
+            <a:bodyPr wrap="square" tIns="90000" anchor="ctr" anchorCtr="1">
+              <a:noAutofit/>
+            </a:bodyPr>
+            <a:lstStyle/>
+            <a:p>
+              <a:pPr algn="ctr">
+                <a:lnSpc>
+                  <a:spcPts val="1300"/>
+                </a:lnSpc>
+                <a:buNone/>
+              </a:pPr>
+              <a:endParaRPr lang="en-GB" sz="1200" i="1" noProof="0" dirty="0">
+                <a:solidFill>
+                  <a:schemeClr val="tx1">
+                    <a:lumMod val="85000"/>
+                    <a:lumOff val="15000"/>
+                  </a:schemeClr>
+                </a:solidFill>
+                <a:latin typeface="+mj-lt"/>
+              </a:endParaRPr>
+            </a:p>
+          </p:txBody>
+        </p:sp>
+        <p:sp>
+          <p:nvSpPr>
+            <p:cNvPr id="10" name="Tekstvak 9">
+              <a:extLst>
+                <a:ext uri="{FF2B5EF4-FFF2-40B4-BE49-F238E27FC236}">
+                  <a16:creationId xmlns:a16="http://schemas.microsoft.com/office/drawing/2014/main" id="{D9A05767-F9F0-938D-7AA8-2AC141DDCD4C}"/>
+                </a:ext>
+              </a:extLst>
+            </p:cNvPr>
+            <p:cNvSpPr txBox="1"/>
+            <p:nvPr/>
+          </p:nvSpPr>
+          <p:spPr>
+            <a:xfrm>
+              <a:off x="2278822" y="2654320"/>
+              <a:ext cx="1597379" cy="553998"/>
+            </a:xfrm>
+            <a:prstGeom prst="rect">
+              <a:avLst/>
+            </a:prstGeom>
+            <a:noFill/>
+          </p:spPr>
+          <p:txBody>
+            <a:bodyPr wrap="square" rtlCol="0">
+              <a:spAutoFit/>
+            </a:bodyPr>
+            <a:lstStyle/>
+            <a:p>
+              <a:r>
+                <a:rPr lang="en-GB" sz="1500" b="1" dirty="0">
                   <a:solidFill>
                     <a:schemeClr val="bg1"/>
                   </a:solidFill>
                   <a:latin typeface="DM Sans" pitchFamily="2" charset="0"/>
-                </a:endParaRPr>
-              </a:p>
-            </p:txBody>
-          </p:sp>
-        </p:grpSp>
-        <p:grpSp>
-          <p:nvGrpSpPr>
-            <p:cNvPr id="48" name="Groep 47">
+                </a:rPr>
+                <a:t>Individual augmentation</a:t>
+              </a:r>
+              <a:endParaRPr lang="en-GB" sz="1500" b="1" i="1" dirty="0">
+                <a:solidFill>
+                  <a:schemeClr val="bg1"/>
+                </a:solidFill>
+                <a:latin typeface="DM Sans" pitchFamily="2" charset="0"/>
+              </a:endParaRPr>
+            </a:p>
+          </p:txBody>
+        </p:sp>
+      </p:grpSp>
+      <p:grpSp>
+        <p:nvGrpSpPr>
+          <p:cNvPr id="49" name="Groep 48">
+            <a:extLst>
+              <a:ext uri="{FF2B5EF4-FFF2-40B4-BE49-F238E27FC236}">
+                <a16:creationId xmlns:a16="http://schemas.microsoft.com/office/drawing/2014/main" id="{3265D777-72EB-BC6A-438D-3BD73F721A27}"/>
+              </a:ext>
+            </a:extLst>
+          </p:cNvPr>
+          <p:cNvGrpSpPr/>
+          <p:nvPr/>
+        </p:nvGrpSpPr>
+        <p:grpSpPr>
+          <a:xfrm>
+            <a:off x="4233922" y="1918137"/>
+            <a:ext cx="1872927" cy="2897778"/>
+            <a:chOff x="4233922" y="2294154"/>
+            <a:chExt cx="1872927" cy="2897778"/>
+          </a:xfrm>
+        </p:grpSpPr>
+        <p:sp>
+          <p:nvSpPr>
+            <p:cNvPr id="22" name="Tekstvak 21">
               <a:extLst>
                 <a:ext uri="{FF2B5EF4-FFF2-40B4-BE49-F238E27FC236}">
-                  <a16:creationId xmlns:a16="http://schemas.microsoft.com/office/drawing/2014/main" id="{0F19FA35-6463-BF14-4C00-7CCD7501EA5B}"/>
+                  <a16:creationId xmlns:a16="http://schemas.microsoft.com/office/drawing/2014/main" id="{3B5F272C-15AA-8037-125C-BA55F0A2BC1F}"/>
                 </a:ext>
               </a:extLst>
             </p:cNvPr>
-            <p:cNvGrpSpPr/>
+            <p:cNvSpPr txBox="1"/>
             <p:nvPr/>
-          </p:nvGrpSpPr>
-          <p:grpSpPr>
+          </p:nvSpPr>
+          <p:spPr>
             <a:xfrm>
-              <a:off x="6229664" y="1979424"/>
-              <a:ext cx="1872926" cy="2602961"/>
-              <a:chOff x="6229664" y="1979424"/>
-              <a:chExt cx="1872926" cy="2602961"/>
+              <a:off x="4233922" y="4059994"/>
+              <a:ext cx="1862077" cy="1031051"/>
             </a:xfrm>
-          </p:grpSpPr>
-          <p:sp>
-            <p:nvSpPr>
-              <p:cNvPr id="27" name="Tekstvak 26">
-                <a:extLst>
-                  <a:ext uri="{FF2B5EF4-FFF2-40B4-BE49-F238E27FC236}">
-                    <a16:creationId xmlns:a16="http://schemas.microsoft.com/office/drawing/2014/main" id="{ED530079-0921-B049-DF19-DCF16BF9EC9D}"/>
-                  </a:ext>
-                </a:extLst>
-              </p:cNvPr>
-              <p:cNvSpPr txBox="1"/>
-              <p:nvPr/>
-            </p:nvSpPr>
-            <p:spPr>
-              <a:xfrm>
-                <a:off x="6229664" y="3586349"/>
-                <a:ext cx="1872926" cy="846386"/>
-              </a:xfrm>
-              <a:prstGeom prst="rect">
-                <a:avLst/>
-              </a:prstGeom>
-              <a:noFill/>
-            </p:spPr>
-            <p:txBody>
-              <a:bodyPr wrap="square" lIns="90000" rIns="36000" rtlCol="0">
-                <a:spAutoFit/>
-              </a:bodyPr>
-              <a:lstStyle/>
-              <a:p>
-                <a:pPr marL="92075" indent="-92075">
-                  <a:spcAft>
-                    <a:spcPts val="600"/>
-                  </a:spcAft>
-                  <a:buFont typeface="Arial" panose="020B0604020202020204" pitchFamily="34" charset="0"/>
-                  <a:buChar char="•"/>
-                </a:pPr>
-                <a:r>
-                  <a:rPr lang="en-GB" sz="1100" dirty="0">
-                    <a:solidFill>
-                      <a:schemeClr val="tx1">
-                        <a:lumMod val="85000"/>
-                        <a:lumOff val="15000"/>
-                      </a:schemeClr>
-                    </a:solidFill>
-                    <a:latin typeface="+mj-lt"/>
-                  </a:rPr>
-                  <a:t>Agent teams across a function</a:t>
-                </a:r>
-              </a:p>
-              <a:p>
-                <a:pPr marL="92075" indent="-92075">
-                  <a:spcAft>
-                    <a:spcPts val="600"/>
-                  </a:spcAft>
-                  <a:buFont typeface="Arial" panose="020B0604020202020204" pitchFamily="34" charset="0"/>
-                  <a:buChar char="•"/>
-                </a:pPr>
-                <a:r>
-                  <a:rPr lang="en-GB" sz="1100" dirty="0">
-                    <a:solidFill>
-                      <a:schemeClr val="tx1">
-                        <a:lumMod val="85000"/>
-                        <a:lumOff val="15000"/>
-                      </a:schemeClr>
-                    </a:solidFill>
-                    <a:latin typeface="+mj-lt"/>
-                  </a:rPr>
-                  <a:t>Redesign, intelligent processes</a:t>
-                </a:r>
-              </a:p>
-            </p:txBody>
-          </p:sp>
-          <p:sp>
-            <p:nvSpPr>
-              <p:cNvPr id="28" name="Rechthoek: afgeronde bovenhoeken 27">
-                <a:extLst>
-                  <a:ext uri="{FF2B5EF4-FFF2-40B4-BE49-F238E27FC236}">
-                    <a16:creationId xmlns:a16="http://schemas.microsoft.com/office/drawing/2014/main" id="{7655D4D4-A725-FFA1-1459-E7081F56F796}"/>
-                  </a:ext>
-                </a:extLst>
-              </p:cNvPr>
-              <p:cNvSpPr/>
-              <p:nvPr/>
-            </p:nvSpPr>
-            <p:spPr>
-              <a:xfrm>
-                <a:off x="6229664" y="1979424"/>
-                <a:ext cx="1872926" cy="626416"/>
-              </a:xfrm>
-              <a:prstGeom prst="round2SameRect">
-                <a:avLst>
-                  <a:gd name="adj1" fmla="val 24049"/>
-                  <a:gd name="adj2" fmla="val 0"/>
-                </a:avLst>
-              </a:prstGeom>
-              <a:solidFill>
-                <a:schemeClr val="tx1">
-                  <a:lumMod val="85000"/>
-                  <a:lumOff val="15000"/>
-                </a:schemeClr>
-              </a:solidFill>
-              <a:ln>
-                <a:noFill/>
-              </a:ln>
-            </p:spPr>
-            <p:style>
-              <a:lnRef idx="2">
-                <a:schemeClr val="accent1">
-                  <a:shade val="15000"/>
-                </a:schemeClr>
-              </a:lnRef>
-              <a:fillRef idx="1">
-                <a:schemeClr val="accent1"/>
-              </a:fillRef>
-              <a:effectRef idx="0">
-                <a:schemeClr val="accent1"/>
-              </a:effectRef>
-              <a:fontRef idx="minor">
-                <a:schemeClr val="lt1"/>
-              </a:fontRef>
-            </p:style>
-            <p:txBody>
-              <a:bodyPr rtlCol="0" anchor="ctr"/>
-              <a:lstStyle/>
-              <a:p>
-                <a:pPr algn="ctr"/>
-                <a:endParaRPr lang="en-GB">
-                  <a:solidFill>
-                    <a:schemeClr val="tx1">
-                      <a:lumMod val="85000"/>
-                      <a:lumOff val="15000"/>
-                    </a:schemeClr>
-                  </a:solidFill>
-                </a:endParaRPr>
-              </a:p>
-            </p:txBody>
-          </p:sp>
-          <p:sp>
-            <p:nvSpPr>
-              <p:cNvPr id="29" name="Rechthoek: afgeronde hoeken 28">
-                <a:extLst>
-                  <a:ext uri="{FF2B5EF4-FFF2-40B4-BE49-F238E27FC236}">
-                    <a16:creationId xmlns:a16="http://schemas.microsoft.com/office/drawing/2014/main" id="{8FDA55AD-CF64-AEB8-D0FB-6208EAB3ED01}"/>
-                  </a:ext>
-                </a:extLst>
-              </p:cNvPr>
-              <p:cNvSpPr/>
-              <p:nvPr/>
-            </p:nvSpPr>
-            <p:spPr>
-              <a:xfrm>
-                <a:off x="6229664" y="1979424"/>
-                <a:ext cx="1872926" cy="2602961"/>
-              </a:xfrm>
-              <a:prstGeom prst="roundRect">
-                <a:avLst>
-                  <a:gd name="adj" fmla="val 6903"/>
-                </a:avLst>
-              </a:prstGeom>
-              <a:noFill/>
-              <a:ln w="12700">
-                <a:solidFill>
-                  <a:schemeClr val="tx1">
-                    <a:lumMod val="75000"/>
-                    <a:lumOff val="25000"/>
-                  </a:schemeClr>
-                </a:solidFill>
-              </a:ln>
-            </p:spPr>
-            <p:txBody>
-              <a:bodyPr wrap="square" tIns="90000" anchor="ctr" anchorCtr="1">
-                <a:noAutofit/>
-              </a:bodyPr>
-              <a:lstStyle/>
-              <a:p>
-                <a:pPr algn="ctr">
-                  <a:lnSpc>
-                    <a:spcPts val="1300"/>
-                  </a:lnSpc>
-                  <a:buNone/>
-                </a:pPr>
-                <a:endParaRPr lang="en-GB" sz="1200" i="1" noProof="0" dirty="0">
+            <a:prstGeom prst="rect">
+              <a:avLst/>
+            </a:prstGeom>
+            <a:noFill/>
+          </p:spPr>
+          <p:txBody>
+            <a:bodyPr wrap="square" lIns="90000" rIns="36000" rtlCol="0">
+              <a:spAutoFit/>
+            </a:bodyPr>
+            <a:lstStyle/>
+            <a:p>
+              <a:pPr marL="92075" indent="-92075">
+                <a:spcAft>
+                  <a:spcPts val="600"/>
+                </a:spcAft>
+                <a:buFont typeface="Arial" panose="020B0604020202020204" pitchFamily="34" charset="0"/>
+                <a:buChar char="•"/>
+              </a:pPr>
+              <a:r>
+                <a:rPr lang="en-GB" sz="1400" dirty="0">
                   <a:solidFill>
                     <a:schemeClr val="tx1">
                       <a:lumMod val="85000"/>
@@ -6636,258 +6104,20 @@
                     </a:schemeClr>
                   </a:solidFill>
                   <a:latin typeface="+mj-lt"/>
-                </a:endParaRPr>
-              </a:p>
-            </p:txBody>
-          </p:sp>
-          <p:sp>
-            <p:nvSpPr>
-              <p:cNvPr id="31" name="Tekstvak 30">
-                <a:extLst>
-                  <a:ext uri="{FF2B5EF4-FFF2-40B4-BE49-F238E27FC236}">
-                    <a16:creationId xmlns:a16="http://schemas.microsoft.com/office/drawing/2014/main" id="{71F75D97-B282-7651-68BE-C8B290B84D2B}"/>
-                  </a:ext>
-                </a:extLst>
-              </p:cNvPr>
-              <p:cNvSpPr txBox="1"/>
-              <p:nvPr/>
-            </p:nvSpPr>
-            <p:spPr>
-              <a:xfrm>
-                <a:off x="6270304" y="2024860"/>
-                <a:ext cx="1760835" cy="523220"/>
-              </a:xfrm>
-              <a:prstGeom prst="rect">
-                <a:avLst/>
-              </a:prstGeom>
-              <a:noFill/>
-            </p:spPr>
-            <p:txBody>
-              <a:bodyPr wrap="square" rtlCol="0">
-                <a:spAutoFit/>
-              </a:bodyPr>
-              <a:lstStyle/>
-              <a:p>
-                <a:r>
-                  <a:rPr lang="en-GB" sz="1400" b="1" dirty="0">
-                    <a:solidFill>
-                      <a:schemeClr val="bg1"/>
-                    </a:solidFill>
-                    <a:latin typeface="DM Sans" pitchFamily="2" charset="0"/>
-                  </a:rPr>
-                  <a:t>Functional agentic workflows</a:t>
-                </a:r>
-                <a:endParaRPr lang="en-GB" sz="1400" b="1" i="1" dirty="0">
-                  <a:solidFill>
-                    <a:schemeClr val="bg1"/>
-                  </a:solidFill>
-                  <a:latin typeface="DM Sans" pitchFamily="2" charset="0"/>
-                </a:endParaRPr>
-              </a:p>
-            </p:txBody>
-          </p:sp>
-        </p:grpSp>
-        <p:grpSp>
-          <p:nvGrpSpPr>
-            <p:cNvPr id="47" name="Groep 46">
-              <a:extLst>
-                <a:ext uri="{FF2B5EF4-FFF2-40B4-BE49-F238E27FC236}">
-                  <a16:creationId xmlns:a16="http://schemas.microsoft.com/office/drawing/2014/main" id="{F0E26D06-0E9C-1E9D-5EF2-CA93159AF913}"/>
-                </a:ext>
-              </a:extLst>
-            </p:cNvPr>
-            <p:cNvGrpSpPr/>
-            <p:nvPr/>
-          </p:nvGrpSpPr>
-          <p:grpSpPr>
-            <a:xfrm>
-              <a:off x="8225406" y="1664694"/>
-              <a:ext cx="1872926" cy="2917691"/>
-              <a:chOff x="8225406" y="1664694"/>
-              <a:chExt cx="1872926" cy="2917691"/>
-            </a:xfrm>
-          </p:grpSpPr>
-          <p:sp>
-            <p:nvSpPr>
-              <p:cNvPr id="35" name="Tekstvak 34">
-                <a:extLst>
-                  <a:ext uri="{FF2B5EF4-FFF2-40B4-BE49-F238E27FC236}">
-                    <a16:creationId xmlns:a16="http://schemas.microsoft.com/office/drawing/2014/main" id="{8F8A1EF2-1E56-E80F-80C6-C181E6DEC682}"/>
-                  </a:ext>
-                </a:extLst>
-              </p:cNvPr>
-              <p:cNvSpPr txBox="1"/>
-              <p:nvPr/>
-            </p:nvSpPr>
-            <p:spPr>
-              <a:xfrm>
-                <a:off x="8225406" y="3755627"/>
-                <a:ext cx="1872926" cy="677108"/>
-              </a:xfrm>
-              <a:prstGeom prst="rect">
-                <a:avLst/>
-              </a:prstGeom>
-              <a:noFill/>
-            </p:spPr>
-            <p:txBody>
-              <a:bodyPr wrap="square" lIns="90000" rIns="36000" rtlCol="0">
-                <a:spAutoFit/>
-              </a:bodyPr>
-              <a:lstStyle/>
-              <a:p>
-                <a:pPr marL="92075" indent="-92075">
-                  <a:spcAft>
-                    <a:spcPts val="600"/>
-                  </a:spcAft>
-                  <a:buFont typeface="Arial" panose="020B0604020202020204" pitchFamily="34" charset="0"/>
-                  <a:buChar char="•"/>
-                </a:pPr>
-                <a:r>
-                  <a:rPr lang="en-GB" sz="1100" dirty="0">
-                    <a:solidFill>
-                      <a:schemeClr val="tx1">
-                        <a:lumMod val="85000"/>
-                        <a:lumOff val="15000"/>
-                      </a:schemeClr>
-                    </a:solidFill>
-                    <a:latin typeface="+mj-lt"/>
-                  </a:rPr>
-                  <a:t>End-to-end complex workflows</a:t>
-                </a:r>
-              </a:p>
-              <a:p>
-                <a:pPr marL="92075" indent="-92075">
-                  <a:spcAft>
-                    <a:spcPts val="600"/>
-                  </a:spcAft>
-                  <a:buFont typeface="Arial" panose="020B0604020202020204" pitchFamily="34" charset="0"/>
-                  <a:buChar char="•"/>
-                </a:pPr>
-                <a:r>
-                  <a:rPr lang="en-GB" sz="1100" dirty="0">
-                    <a:solidFill>
-                      <a:schemeClr val="tx1">
-                        <a:lumMod val="85000"/>
-                        <a:lumOff val="15000"/>
-                      </a:schemeClr>
-                    </a:solidFill>
-                    <a:latin typeface="+mj-lt"/>
-                  </a:rPr>
-                  <a:t>High-level decision support</a:t>
-                </a:r>
-              </a:p>
-            </p:txBody>
-          </p:sp>
-          <p:sp>
-            <p:nvSpPr>
-              <p:cNvPr id="36" name="Rechthoek: afgeronde bovenhoeken 35">
-                <a:extLst>
-                  <a:ext uri="{FF2B5EF4-FFF2-40B4-BE49-F238E27FC236}">
-                    <a16:creationId xmlns:a16="http://schemas.microsoft.com/office/drawing/2014/main" id="{08BD41DC-B421-FEEC-AC98-71007A600253}"/>
-                  </a:ext>
-                </a:extLst>
-              </p:cNvPr>
-              <p:cNvSpPr/>
-              <p:nvPr/>
-            </p:nvSpPr>
-            <p:spPr>
-              <a:xfrm>
-                <a:off x="8225406" y="1664694"/>
-                <a:ext cx="1872926" cy="626416"/>
-              </a:xfrm>
-              <a:prstGeom prst="round2SameRect">
-                <a:avLst>
-                  <a:gd name="adj1" fmla="val 24049"/>
-                  <a:gd name="adj2" fmla="val 0"/>
-                </a:avLst>
-              </a:prstGeom>
-              <a:solidFill>
-                <a:schemeClr val="tx1">
-                  <a:lumMod val="85000"/>
-                  <a:lumOff val="15000"/>
-                </a:schemeClr>
-              </a:solidFill>
-              <a:ln>
-                <a:noFill/>
-              </a:ln>
-            </p:spPr>
-            <p:style>
-              <a:lnRef idx="2">
-                <a:schemeClr val="accent1">
-                  <a:shade val="15000"/>
-                </a:schemeClr>
-              </a:lnRef>
-              <a:fillRef idx="1">
-                <a:schemeClr val="accent1"/>
-              </a:fillRef>
-              <a:effectRef idx="0">
-                <a:schemeClr val="accent1"/>
-              </a:effectRef>
-              <a:fontRef idx="minor">
-                <a:schemeClr val="lt1"/>
-              </a:fontRef>
-            </p:style>
-            <p:txBody>
-              <a:bodyPr rtlCol="0" anchor="ctr"/>
-              <a:lstStyle/>
-              <a:p>
-                <a:pPr algn="ctr"/>
-                <a:endParaRPr lang="en-GB">
-                  <a:solidFill>
-                    <a:schemeClr val="tx1">
-                      <a:lumMod val="85000"/>
-                      <a:lumOff val="15000"/>
-                    </a:schemeClr>
-                  </a:solidFill>
-                </a:endParaRPr>
-              </a:p>
-            </p:txBody>
-          </p:sp>
-          <p:sp>
-            <p:nvSpPr>
-              <p:cNvPr id="37" name="Rechthoek: afgeronde hoeken 36">
-                <a:extLst>
-                  <a:ext uri="{FF2B5EF4-FFF2-40B4-BE49-F238E27FC236}">
-                    <a16:creationId xmlns:a16="http://schemas.microsoft.com/office/drawing/2014/main" id="{1C5A4A89-956A-35DE-D7AF-A3DCF530A485}"/>
-                  </a:ext>
-                </a:extLst>
-              </p:cNvPr>
-              <p:cNvSpPr/>
-              <p:nvPr/>
-            </p:nvSpPr>
-            <p:spPr>
-              <a:xfrm>
-                <a:off x="8225406" y="1664694"/>
-                <a:ext cx="1872926" cy="2917691"/>
-              </a:xfrm>
-              <a:prstGeom prst="roundRect">
-                <a:avLst>
-                  <a:gd name="adj" fmla="val 6903"/>
-                </a:avLst>
-              </a:prstGeom>
-              <a:noFill/>
-              <a:ln w="12700">
-                <a:solidFill>
-                  <a:schemeClr val="tx1">
-                    <a:lumMod val="75000"/>
-                    <a:lumOff val="25000"/>
-                  </a:schemeClr>
-                </a:solidFill>
-              </a:ln>
-            </p:spPr>
-            <p:txBody>
-              <a:bodyPr wrap="square" tIns="90000" anchor="ctr" anchorCtr="1">
-                <a:noAutofit/>
-              </a:bodyPr>
-              <a:lstStyle/>
-              <a:p>
-                <a:pPr algn="ctr">
-                  <a:lnSpc>
-                    <a:spcPts val="1300"/>
-                  </a:lnSpc>
-                  <a:buNone/>
-                </a:pPr>
-                <a:endParaRPr lang="en-GB" sz="1200" i="1" noProof="0" dirty="0">
+                </a:rPr>
+                <a:t>Automate routine workflows</a:t>
+              </a:r>
+            </a:p>
+            <a:p>
+              <a:pPr marL="92075" indent="-92075">
+                <a:spcAft>
+                  <a:spcPts val="600"/>
+                </a:spcAft>
+                <a:buFont typeface="Arial" panose="020B0604020202020204" pitchFamily="34" charset="0"/>
+                <a:buChar char="•"/>
+              </a:pPr>
+              <a:r>
+                <a:rPr lang="en-GB" sz="1400" dirty="0">
                   <a:solidFill>
                     <a:schemeClr val="tx1">
                       <a:lumMod val="85000"/>
@@ -6895,232 +6125,889 @@
                     </a:schemeClr>
                   </a:solidFill>
                   <a:latin typeface="+mj-lt"/>
-                </a:endParaRPr>
-              </a:p>
-            </p:txBody>
-          </p:sp>
-          <p:sp>
-            <p:nvSpPr>
-              <p:cNvPr id="38" name="Tekstvak 37">
-                <a:extLst>
-                  <a:ext uri="{FF2B5EF4-FFF2-40B4-BE49-F238E27FC236}">
-                    <a16:creationId xmlns:a16="http://schemas.microsoft.com/office/drawing/2014/main" id="{1A3BBB2D-4619-F4E5-1977-DD93615DCD13}"/>
-                  </a:ext>
-                </a:extLst>
-              </p:cNvPr>
-              <p:cNvSpPr txBox="1"/>
-              <p:nvPr/>
-            </p:nvSpPr>
-            <p:spPr>
-              <a:xfrm>
-                <a:off x="8266046" y="1710130"/>
-                <a:ext cx="1832286" cy="523220"/>
-              </a:xfrm>
-              <a:prstGeom prst="rect">
-                <a:avLst/>
-              </a:prstGeom>
-              <a:noFill/>
-            </p:spPr>
-            <p:txBody>
-              <a:bodyPr wrap="square" rtlCol="0">
-                <a:spAutoFit/>
-              </a:bodyPr>
-              <a:lstStyle/>
-              <a:p>
-                <a:r>
-                  <a:rPr lang="en-GB" sz="1400" b="1" dirty="0">
-                    <a:solidFill>
-                      <a:schemeClr val="bg1"/>
-                    </a:solidFill>
-                    <a:latin typeface="DM Sans" pitchFamily="2" charset="0"/>
-                  </a:rPr>
-                  <a:t>Cross-functional agentic workflows</a:t>
-                </a:r>
-                <a:endParaRPr lang="en-GB" sz="1400" b="1" i="1" dirty="0">
-                  <a:solidFill>
-                    <a:schemeClr val="bg1"/>
-                  </a:solidFill>
-                  <a:latin typeface="DM Sans" pitchFamily="2" charset="0"/>
-                </a:endParaRPr>
-              </a:p>
-            </p:txBody>
-          </p:sp>
-        </p:grpSp>
-        <p:pic>
-          <p:nvPicPr>
-            <p:cNvPr id="40" name="Picture 2" descr="Geen ALT-tekst opgegeven voor deze afbeelding">
+                </a:rPr>
+                <a:t>Scale execution quality</a:t>
+              </a:r>
+            </a:p>
+          </p:txBody>
+        </p:sp>
+        <p:sp>
+          <p:nvSpPr>
+            <p:cNvPr id="23" name="Rechthoek: afgeronde bovenhoeken 22">
               <a:extLst>
                 <a:ext uri="{FF2B5EF4-FFF2-40B4-BE49-F238E27FC236}">
-                  <a16:creationId xmlns:a16="http://schemas.microsoft.com/office/drawing/2014/main" id="{3339BC4B-BAF4-E359-4B48-D70AF4FFA2F8}"/>
+                  <a16:creationId xmlns:a16="http://schemas.microsoft.com/office/drawing/2014/main" id="{BEAD4EBB-6063-9EA7-CADB-ABC1B6AD7140}"/>
                 </a:ext>
               </a:extLst>
             </p:cNvPr>
-            <p:cNvPicPr>
-              <a:picLocks noChangeAspect="1" noChangeArrowheads="1"/>
-            </p:cNvPicPr>
+            <p:cNvSpPr/>
             <p:nvPr/>
-          </p:nvPicPr>
-          <p:blipFill rotWithShape="1">
-            <a:blip r:embed="rId3">
-              <a:clrChange>
-                <a:clrFrom>
-                  <a:srgbClr val="F0F4FD"/>
-                </a:clrFrom>
-                <a:clrTo>
-                  <a:srgbClr val="F0F4FD">
-                    <a:alpha val="0"/>
-                  </a:srgbClr>
-                </a:clrTo>
-              </a:clrChange>
-              <a:grayscl/>
+          </p:nvSpPr>
+          <p:spPr>
+            <a:xfrm>
+              <a:off x="4233923" y="2294154"/>
+              <a:ext cx="1872926" cy="626416"/>
+            </a:xfrm>
+            <a:prstGeom prst="round2SameRect">
+              <a:avLst>
+                <a:gd name="adj1" fmla="val 24049"/>
+                <a:gd name="adj2" fmla="val 0"/>
+              </a:avLst>
+            </a:prstGeom>
+            <a:solidFill>
+              <a:schemeClr val="tx1">
+                <a:lumMod val="85000"/>
+                <a:lumOff val="15000"/>
+              </a:schemeClr>
+            </a:solidFill>
+            <a:ln>
+              <a:noFill/>
+            </a:ln>
+          </p:spPr>
+          <p:style>
+            <a:lnRef idx="2">
+              <a:schemeClr val="accent1">
+                <a:shade val="15000"/>
+              </a:schemeClr>
+            </a:lnRef>
+            <a:fillRef idx="1">
+              <a:schemeClr val="accent1"/>
+            </a:fillRef>
+            <a:effectRef idx="0">
+              <a:schemeClr val="accent1"/>
+            </a:effectRef>
+            <a:fontRef idx="minor">
+              <a:schemeClr val="lt1"/>
+            </a:fontRef>
+          </p:style>
+          <p:txBody>
+            <a:bodyPr rtlCol="0" anchor="ctr"/>
+            <a:lstStyle/>
+            <a:p>
+              <a:pPr algn="ctr"/>
+              <a:endParaRPr lang="en-GB">
+                <a:solidFill>
+                  <a:schemeClr val="tx1">
+                    <a:lumMod val="85000"/>
+                    <a:lumOff val="15000"/>
+                  </a:schemeClr>
+                </a:solidFill>
+              </a:endParaRPr>
+            </a:p>
+          </p:txBody>
+        </p:sp>
+        <p:sp>
+          <p:nvSpPr>
+            <p:cNvPr id="24" name="Rechthoek: afgeronde hoeken 23">
               <a:extLst>
-                <a:ext uri="{28A0092B-C50C-407E-A947-70E740481C1C}">
-                  <a14:useLocalDpi xmlns:a14="http://schemas.microsoft.com/office/drawing/2010/main" val="0"/>
+                <a:ext uri="{FF2B5EF4-FFF2-40B4-BE49-F238E27FC236}">
+                  <a16:creationId xmlns:a16="http://schemas.microsoft.com/office/drawing/2014/main" id="{C3CB4C2B-D918-6F91-F6D1-C736B7FC0BB9}"/>
                 </a:ext>
               </a:extLst>
-            </a:blip>
-            <a:srcRect l="52056" t="49101" r="39179" b="41041"/>
-            <a:stretch>
-              <a:fillRect/>
-            </a:stretch>
-          </p:blipFill>
-          <p:spPr bwMode="auto">
+            </p:cNvPr>
+            <p:cNvSpPr/>
+            <p:nvPr/>
+          </p:nvSpPr>
+          <p:spPr>
             <a:xfrm>
-              <a:off x="6646352" y="2776758"/>
-              <a:ext cx="901668" cy="676090"/>
+              <a:off x="4233923" y="2294154"/>
+              <a:ext cx="1872926" cy="2897778"/>
+            </a:xfrm>
+            <a:prstGeom prst="roundRect">
+              <a:avLst>
+                <a:gd name="adj" fmla="val 6903"/>
+              </a:avLst>
+            </a:prstGeom>
+            <a:noFill/>
+            <a:ln w="12700">
+              <a:solidFill>
+                <a:schemeClr val="tx1">
+                  <a:lumMod val="75000"/>
+                  <a:lumOff val="25000"/>
+                </a:schemeClr>
+              </a:solidFill>
+            </a:ln>
+          </p:spPr>
+          <p:txBody>
+            <a:bodyPr wrap="square" tIns="90000" anchor="ctr" anchorCtr="1">
+              <a:noAutofit/>
+            </a:bodyPr>
+            <a:lstStyle/>
+            <a:p>
+              <a:pPr algn="ctr">
+                <a:lnSpc>
+                  <a:spcPts val="1300"/>
+                </a:lnSpc>
+                <a:buNone/>
+              </a:pPr>
+              <a:endParaRPr lang="en-GB" sz="1200" i="1" noProof="0" dirty="0">
+                <a:solidFill>
+                  <a:schemeClr val="tx1">
+                    <a:lumMod val="85000"/>
+                    <a:lumOff val="15000"/>
+                  </a:schemeClr>
+                </a:solidFill>
+                <a:latin typeface="+mj-lt"/>
+              </a:endParaRPr>
+            </a:p>
+          </p:txBody>
+        </p:sp>
+        <p:sp>
+          <p:nvSpPr>
+            <p:cNvPr id="25" name="Tekstvak 24">
+              <a:extLst>
+                <a:ext uri="{FF2B5EF4-FFF2-40B4-BE49-F238E27FC236}">
+                  <a16:creationId xmlns:a16="http://schemas.microsoft.com/office/drawing/2014/main" id="{1AF15559-C56E-C8DA-7EFD-7A3096894052}"/>
+                </a:ext>
+              </a:extLst>
+            </p:cNvPr>
+            <p:cNvSpPr txBox="1"/>
+            <p:nvPr/>
+          </p:nvSpPr>
+          <p:spPr>
+            <a:xfrm>
+              <a:off x="4274563" y="2339590"/>
+              <a:ext cx="1817219" cy="553998"/>
             </a:xfrm>
             <a:prstGeom prst="rect">
               <a:avLst/>
             </a:prstGeom>
             <a:noFill/>
-            <a:extLst>
-              <a:ext uri="{909E8E84-426E-40DD-AFC4-6F175D3DCCD1}">
-                <a14:hiddenFill xmlns:a14="http://schemas.microsoft.com/office/drawing/2010/main">
+          </p:spPr>
+          <p:txBody>
+            <a:bodyPr wrap="square" rtlCol="0">
+              <a:spAutoFit/>
+            </a:bodyPr>
+            <a:lstStyle/>
+            <a:p>
+              <a:r>
+                <a:rPr lang="en-GB" sz="1500" b="1" dirty="0">
                   <a:solidFill>
-                    <a:srgbClr val="FFFFFF"/>
+                    <a:schemeClr val="bg1"/>
                   </a:solidFill>
-                </a14:hiddenFill>
-              </a:ext>
-            </a:extLst>
-          </p:spPr>
-        </p:pic>
-        <p:pic>
-          <p:nvPicPr>
-            <p:cNvPr id="41" name="Picture 2" descr="Geen ALT-tekst opgegeven voor deze afbeelding">
+                  <a:latin typeface="DM Sans" pitchFamily="2" charset="0"/>
+                </a:rPr>
+                <a:t>Task &amp; workflow automation</a:t>
+              </a:r>
+              <a:endParaRPr lang="en-GB" sz="1500" b="1" i="1" dirty="0">
+                <a:solidFill>
+                  <a:schemeClr val="bg1"/>
+                </a:solidFill>
+                <a:latin typeface="DM Sans" pitchFamily="2" charset="0"/>
+              </a:endParaRPr>
+            </a:p>
+          </p:txBody>
+        </p:sp>
+      </p:grpSp>
+      <p:grpSp>
+        <p:nvGrpSpPr>
+          <p:cNvPr id="48" name="Groep 47">
+            <a:extLst>
+              <a:ext uri="{FF2B5EF4-FFF2-40B4-BE49-F238E27FC236}">
+                <a16:creationId xmlns:a16="http://schemas.microsoft.com/office/drawing/2014/main" id="{0F19FA35-6463-BF14-4C00-7CCD7501EA5B}"/>
+              </a:ext>
+            </a:extLst>
+          </p:cNvPr>
+          <p:cNvGrpSpPr/>
+          <p:nvPr/>
+        </p:nvGrpSpPr>
+        <p:grpSpPr>
+          <a:xfrm>
+            <a:off x="6229664" y="1603407"/>
+            <a:ext cx="1913110" cy="3212508"/>
+            <a:chOff x="6229664" y="1979424"/>
+            <a:chExt cx="1913110" cy="3212508"/>
+          </a:xfrm>
+        </p:grpSpPr>
+        <p:sp>
+          <p:nvSpPr>
+            <p:cNvPr id="27" name="Tekstvak 26">
               <a:extLst>
                 <a:ext uri="{FF2B5EF4-FFF2-40B4-BE49-F238E27FC236}">
-                  <a16:creationId xmlns:a16="http://schemas.microsoft.com/office/drawing/2014/main" id="{B8B79CD2-F8C8-26DC-FB9D-9001C1A05499}"/>
+                  <a16:creationId xmlns:a16="http://schemas.microsoft.com/office/drawing/2014/main" id="{ED530079-0921-B049-DF19-DCF16BF9EC9D}"/>
                 </a:ext>
               </a:extLst>
             </p:cNvPr>
-            <p:cNvPicPr>
-              <a:picLocks noChangeAspect="1" noChangeArrowheads="1"/>
-            </p:cNvPicPr>
+            <p:cNvSpPr txBox="1"/>
             <p:nvPr/>
-          </p:nvPicPr>
-          <p:blipFill rotWithShape="1">
-            <a:blip r:embed="rId3">
-              <a:clrChange>
-                <a:clrFrom>
-                  <a:srgbClr val="F0F4FD"/>
-                </a:clrFrom>
-                <a:clrTo>
-                  <a:srgbClr val="F0F4FD">
-                    <a:alpha val="0"/>
-                  </a:srgbClr>
-                </a:clrTo>
-              </a:clrChange>
-              <a:grayscl/>
-              <a:extLst>
-                <a:ext uri="{28A0092B-C50C-407E-A947-70E740481C1C}">
-                  <a14:useLocalDpi xmlns:a14="http://schemas.microsoft.com/office/drawing/2010/main" val="0"/>
-                </a:ext>
-              </a:extLst>
-            </a:blip>
-            <a:srcRect l="31906" t="52293" r="61753" b="39148"/>
-            <a:stretch>
-              <a:fillRect/>
-            </a:stretch>
-          </p:blipFill>
-          <p:spPr bwMode="auto">
+          </p:nvSpPr>
+          <p:spPr>
             <a:xfrm>
-              <a:off x="4783001" y="3088401"/>
-              <a:ext cx="652314" cy="586966"/>
+              <a:off x="6229664" y="4059994"/>
+              <a:ext cx="1872926" cy="1031051"/>
             </a:xfrm>
             <a:prstGeom prst="rect">
               <a:avLst/>
             </a:prstGeom>
             <a:noFill/>
-            <a:extLst>
-              <a:ext uri="{909E8E84-426E-40DD-AFC4-6F175D3DCCD1}">
-                <a14:hiddenFill xmlns:a14="http://schemas.microsoft.com/office/drawing/2010/main">
+          </p:spPr>
+          <p:txBody>
+            <a:bodyPr wrap="square" lIns="90000" rIns="36000" rtlCol="0">
+              <a:spAutoFit/>
+            </a:bodyPr>
+            <a:lstStyle/>
+            <a:p>
+              <a:pPr marL="92075" indent="-92075">
+                <a:spcAft>
+                  <a:spcPts val="600"/>
+                </a:spcAft>
+                <a:buFont typeface="Arial" panose="020B0604020202020204" pitchFamily="34" charset="0"/>
+                <a:buChar char="•"/>
+              </a:pPr>
+              <a:r>
+                <a:rPr lang="en-GB" sz="1400" dirty="0">
                   <a:solidFill>
-                    <a:srgbClr val="FFFFFF"/>
+                    <a:schemeClr val="tx1">
+                      <a:lumMod val="85000"/>
+                      <a:lumOff val="15000"/>
+                    </a:schemeClr>
                   </a:solidFill>
-                </a14:hiddenFill>
-              </a:ext>
-            </a:extLst>
-          </p:spPr>
-        </p:pic>
-        <p:pic>
-          <p:nvPicPr>
-            <p:cNvPr id="42" name="Picture 2" descr="Geen ALT-tekst opgegeven voor deze afbeelding">
+                  <a:latin typeface="+mj-lt"/>
+                </a:rPr>
+                <a:t>Agent teams across a function</a:t>
+              </a:r>
+            </a:p>
+            <a:p>
+              <a:pPr marL="92075" indent="-92075">
+                <a:spcAft>
+                  <a:spcPts val="600"/>
+                </a:spcAft>
+                <a:buFont typeface="Arial" panose="020B0604020202020204" pitchFamily="34" charset="0"/>
+                <a:buChar char="•"/>
+              </a:pPr>
+              <a:r>
+                <a:rPr lang="en-GB" sz="1400" dirty="0">
+                  <a:solidFill>
+                    <a:schemeClr val="tx1">
+                      <a:lumMod val="85000"/>
+                      <a:lumOff val="15000"/>
+                    </a:schemeClr>
+                  </a:solidFill>
+                  <a:latin typeface="+mj-lt"/>
+                </a:rPr>
+                <a:t>Redesign, intelligent processes</a:t>
+              </a:r>
+            </a:p>
+          </p:txBody>
+        </p:sp>
+        <p:sp>
+          <p:nvSpPr>
+            <p:cNvPr id="28" name="Rechthoek: afgeronde bovenhoeken 27">
               <a:extLst>
                 <a:ext uri="{FF2B5EF4-FFF2-40B4-BE49-F238E27FC236}">
-                  <a16:creationId xmlns:a16="http://schemas.microsoft.com/office/drawing/2014/main" id="{80D9276C-453F-4A13-311F-C04E2224AB6C}"/>
+                  <a16:creationId xmlns:a16="http://schemas.microsoft.com/office/drawing/2014/main" id="{7655D4D4-A725-FFA1-1459-E7081F56F796}"/>
                 </a:ext>
               </a:extLst>
             </p:cNvPr>
-            <p:cNvPicPr>
-              <a:picLocks noChangeAspect="1" noChangeArrowheads="1"/>
-            </p:cNvPicPr>
+            <p:cNvSpPr/>
             <p:nvPr/>
-          </p:nvPicPr>
-          <p:blipFill rotWithShape="1">
-            <a:blip r:embed="rId3">
-              <a:clrChange>
-                <a:clrFrom>
-                  <a:srgbClr val="F0F4FD"/>
-                </a:clrFrom>
-                <a:clrTo>
-                  <a:srgbClr val="F0F4FD">
-                    <a:alpha val="0"/>
-                  </a:srgbClr>
-                </a:clrTo>
-              </a:clrChange>
-              <a:grayscl/>
+          </p:nvSpPr>
+          <p:spPr>
+            <a:xfrm>
+              <a:off x="6229664" y="1979424"/>
+              <a:ext cx="1872926" cy="626416"/>
+            </a:xfrm>
+            <a:prstGeom prst="round2SameRect">
+              <a:avLst>
+                <a:gd name="adj1" fmla="val 24049"/>
+                <a:gd name="adj2" fmla="val 0"/>
+              </a:avLst>
+            </a:prstGeom>
+            <a:solidFill>
+              <a:schemeClr val="tx1">
+                <a:lumMod val="85000"/>
+                <a:lumOff val="15000"/>
+              </a:schemeClr>
+            </a:solidFill>
+            <a:ln>
+              <a:noFill/>
+            </a:ln>
+          </p:spPr>
+          <p:style>
+            <a:lnRef idx="2">
+              <a:schemeClr val="accent1">
+                <a:shade val="15000"/>
+              </a:schemeClr>
+            </a:lnRef>
+            <a:fillRef idx="1">
+              <a:schemeClr val="accent1"/>
+            </a:fillRef>
+            <a:effectRef idx="0">
+              <a:schemeClr val="accent1"/>
+            </a:effectRef>
+            <a:fontRef idx="minor">
+              <a:schemeClr val="lt1"/>
+            </a:fontRef>
+          </p:style>
+          <p:txBody>
+            <a:bodyPr rtlCol="0" anchor="ctr"/>
+            <a:lstStyle/>
+            <a:p>
+              <a:pPr algn="ctr"/>
+              <a:endParaRPr lang="en-GB">
+                <a:solidFill>
+                  <a:schemeClr val="tx1">
+                    <a:lumMod val="85000"/>
+                    <a:lumOff val="15000"/>
+                  </a:schemeClr>
+                </a:solidFill>
+              </a:endParaRPr>
+            </a:p>
+          </p:txBody>
+        </p:sp>
+        <p:sp>
+          <p:nvSpPr>
+            <p:cNvPr id="29" name="Rechthoek: afgeronde hoeken 28">
               <a:extLst>
-                <a:ext uri="{28A0092B-C50C-407E-A947-70E740481C1C}">
-                  <a14:useLocalDpi xmlns:a14="http://schemas.microsoft.com/office/drawing/2010/main" val="0"/>
+                <a:ext uri="{FF2B5EF4-FFF2-40B4-BE49-F238E27FC236}">
+                  <a16:creationId xmlns:a16="http://schemas.microsoft.com/office/drawing/2014/main" id="{8FDA55AD-CF64-AEB8-D0FB-6208EAB3ED01}"/>
                 </a:ext>
               </a:extLst>
-            </a:blip>
-            <a:srcRect l="11468" t="55454" r="81516" b="36151"/>
-            <a:stretch>
-              <a:fillRect/>
-            </a:stretch>
-          </p:blipFill>
-          <p:spPr bwMode="auto">
+            </p:cNvPr>
+            <p:cNvSpPr/>
+            <p:nvPr/>
+          </p:nvSpPr>
+          <p:spPr>
             <a:xfrm>
-              <a:off x="2770431" y="3381884"/>
-              <a:ext cx="721795" cy="575735"/>
+              <a:off x="6229664" y="1979424"/>
+              <a:ext cx="1872926" cy="3212508"/>
+            </a:xfrm>
+            <a:prstGeom prst="roundRect">
+              <a:avLst>
+                <a:gd name="adj" fmla="val 6903"/>
+              </a:avLst>
+            </a:prstGeom>
+            <a:noFill/>
+            <a:ln w="12700">
+              <a:solidFill>
+                <a:schemeClr val="tx1">
+                  <a:lumMod val="75000"/>
+                  <a:lumOff val="25000"/>
+                </a:schemeClr>
+              </a:solidFill>
+            </a:ln>
+          </p:spPr>
+          <p:txBody>
+            <a:bodyPr wrap="square" tIns="90000" anchor="ctr" anchorCtr="1">
+              <a:noAutofit/>
+            </a:bodyPr>
+            <a:lstStyle/>
+            <a:p>
+              <a:pPr algn="ctr">
+                <a:lnSpc>
+                  <a:spcPts val="1300"/>
+                </a:lnSpc>
+                <a:buNone/>
+              </a:pPr>
+              <a:endParaRPr lang="en-GB" sz="1200" i="1" noProof="0" dirty="0">
+                <a:solidFill>
+                  <a:schemeClr val="tx1">
+                    <a:lumMod val="85000"/>
+                    <a:lumOff val="15000"/>
+                  </a:schemeClr>
+                </a:solidFill>
+                <a:latin typeface="+mj-lt"/>
+              </a:endParaRPr>
+            </a:p>
+          </p:txBody>
+        </p:sp>
+        <p:sp>
+          <p:nvSpPr>
+            <p:cNvPr id="31" name="Tekstvak 30">
+              <a:extLst>
+                <a:ext uri="{FF2B5EF4-FFF2-40B4-BE49-F238E27FC236}">
+                  <a16:creationId xmlns:a16="http://schemas.microsoft.com/office/drawing/2014/main" id="{71F75D97-B282-7651-68BE-C8B290B84D2B}"/>
+                </a:ext>
+              </a:extLst>
+            </p:cNvPr>
+            <p:cNvSpPr txBox="1"/>
+            <p:nvPr/>
+          </p:nvSpPr>
+          <p:spPr>
+            <a:xfrm>
+              <a:off x="6270304" y="2024860"/>
+              <a:ext cx="1872470" cy="553998"/>
             </a:xfrm>
             <a:prstGeom prst="rect">
               <a:avLst/>
             </a:prstGeom>
             <a:noFill/>
-            <a:extLst>
-              <a:ext uri="{909E8E84-426E-40DD-AFC4-6F175D3DCCD1}">
-                <a14:hiddenFill xmlns:a14="http://schemas.microsoft.com/office/drawing/2010/main">
+          </p:spPr>
+          <p:txBody>
+            <a:bodyPr wrap="square" rtlCol="0">
+              <a:spAutoFit/>
+            </a:bodyPr>
+            <a:lstStyle/>
+            <a:p>
+              <a:r>
+                <a:rPr lang="en-GB" sz="1500" b="1" dirty="0">
                   <a:solidFill>
-                    <a:srgbClr val="FFFFFF"/>
+                    <a:schemeClr val="bg1"/>
                   </a:solidFill>
-                </a14:hiddenFill>
-              </a:ext>
-            </a:extLst>
+                  <a:latin typeface="DM Sans" pitchFamily="2" charset="0"/>
+                </a:rPr>
+                <a:t>Functional agentic workflows</a:t>
+              </a:r>
+              <a:endParaRPr lang="en-GB" sz="1500" b="1" i="1" dirty="0">
+                <a:solidFill>
+                  <a:schemeClr val="bg1"/>
+                </a:solidFill>
+                <a:latin typeface="DM Sans" pitchFamily="2" charset="0"/>
+              </a:endParaRPr>
+            </a:p>
+          </p:txBody>
+        </p:sp>
+      </p:grpSp>
+      <p:grpSp>
+        <p:nvGrpSpPr>
+          <p:cNvPr id="47" name="Groep 46">
+            <a:extLst>
+              <a:ext uri="{FF2B5EF4-FFF2-40B4-BE49-F238E27FC236}">
+                <a16:creationId xmlns:a16="http://schemas.microsoft.com/office/drawing/2014/main" id="{F0E26D06-0E9C-1E9D-5EF2-CA93159AF913}"/>
+              </a:ext>
+            </a:extLst>
+          </p:cNvPr>
+          <p:cNvGrpSpPr/>
+          <p:nvPr/>
+        </p:nvGrpSpPr>
+        <p:grpSpPr>
+          <a:xfrm>
+            <a:off x="8225406" y="1288677"/>
+            <a:ext cx="1919681" cy="3527238"/>
+            <a:chOff x="8225406" y="1664694"/>
+            <a:chExt cx="1919681" cy="3527238"/>
+          </a:xfrm>
+        </p:grpSpPr>
+        <p:sp>
+          <p:nvSpPr>
+            <p:cNvPr id="35" name="Tekstvak 34">
+              <a:extLst>
+                <a:ext uri="{FF2B5EF4-FFF2-40B4-BE49-F238E27FC236}">
+                  <a16:creationId xmlns:a16="http://schemas.microsoft.com/office/drawing/2014/main" id="{8F8A1EF2-1E56-E80F-80C6-C181E6DEC682}"/>
+                </a:ext>
+              </a:extLst>
+            </p:cNvPr>
+            <p:cNvSpPr txBox="1"/>
+            <p:nvPr/>
+          </p:nvSpPr>
+          <p:spPr>
+            <a:xfrm>
+              <a:off x="8225406" y="4059994"/>
+              <a:ext cx="1786499" cy="1031051"/>
+            </a:xfrm>
+            <a:prstGeom prst="rect">
+              <a:avLst/>
+            </a:prstGeom>
+            <a:noFill/>
           </p:spPr>
-        </p:pic>
+          <p:txBody>
+            <a:bodyPr wrap="square" lIns="90000" rIns="36000" rtlCol="0">
+              <a:spAutoFit/>
+            </a:bodyPr>
+            <a:lstStyle/>
+            <a:p>
+              <a:pPr marL="92075" indent="-92075">
+                <a:spcAft>
+                  <a:spcPts val="600"/>
+                </a:spcAft>
+                <a:buFont typeface="Arial" panose="020B0604020202020204" pitchFamily="34" charset="0"/>
+                <a:buChar char="•"/>
+              </a:pPr>
+              <a:r>
+                <a:rPr lang="en-GB" sz="1400" dirty="0">
+                  <a:solidFill>
+                    <a:schemeClr val="tx1">
+                      <a:lumMod val="85000"/>
+                      <a:lumOff val="15000"/>
+                    </a:schemeClr>
+                  </a:solidFill>
+                  <a:latin typeface="+mj-lt"/>
+                </a:rPr>
+                <a:t>End-to-end complex workflows</a:t>
+              </a:r>
+            </a:p>
+            <a:p>
+              <a:pPr marL="92075" indent="-92075">
+                <a:spcAft>
+                  <a:spcPts val="600"/>
+                </a:spcAft>
+                <a:buFont typeface="Arial" panose="020B0604020202020204" pitchFamily="34" charset="0"/>
+                <a:buChar char="•"/>
+              </a:pPr>
+              <a:r>
+                <a:rPr lang="en-GB" sz="1400" dirty="0">
+                  <a:solidFill>
+                    <a:schemeClr val="tx1">
+                      <a:lumMod val="85000"/>
+                      <a:lumOff val="15000"/>
+                    </a:schemeClr>
+                  </a:solidFill>
+                  <a:latin typeface="+mj-lt"/>
+                </a:rPr>
+                <a:t>High-level decision support</a:t>
+              </a:r>
+            </a:p>
+          </p:txBody>
+        </p:sp>
+        <p:sp>
+          <p:nvSpPr>
+            <p:cNvPr id="36" name="Rechthoek: afgeronde bovenhoeken 35">
+              <a:extLst>
+                <a:ext uri="{FF2B5EF4-FFF2-40B4-BE49-F238E27FC236}">
+                  <a16:creationId xmlns:a16="http://schemas.microsoft.com/office/drawing/2014/main" id="{08BD41DC-B421-FEEC-AC98-71007A600253}"/>
+                </a:ext>
+              </a:extLst>
+            </p:cNvPr>
+            <p:cNvSpPr/>
+            <p:nvPr/>
+          </p:nvSpPr>
+          <p:spPr>
+            <a:xfrm>
+              <a:off x="8225406" y="1664694"/>
+              <a:ext cx="1872926" cy="626416"/>
+            </a:xfrm>
+            <a:prstGeom prst="round2SameRect">
+              <a:avLst>
+                <a:gd name="adj1" fmla="val 24049"/>
+                <a:gd name="adj2" fmla="val 0"/>
+              </a:avLst>
+            </a:prstGeom>
+            <a:solidFill>
+              <a:schemeClr val="tx1">
+                <a:lumMod val="85000"/>
+                <a:lumOff val="15000"/>
+              </a:schemeClr>
+            </a:solidFill>
+            <a:ln>
+              <a:noFill/>
+            </a:ln>
+          </p:spPr>
+          <p:style>
+            <a:lnRef idx="2">
+              <a:schemeClr val="accent1">
+                <a:shade val="15000"/>
+              </a:schemeClr>
+            </a:lnRef>
+            <a:fillRef idx="1">
+              <a:schemeClr val="accent1"/>
+            </a:fillRef>
+            <a:effectRef idx="0">
+              <a:schemeClr val="accent1"/>
+            </a:effectRef>
+            <a:fontRef idx="minor">
+              <a:schemeClr val="lt1"/>
+            </a:fontRef>
+          </p:style>
+          <p:txBody>
+            <a:bodyPr rtlCol="0" anchor="ctr"/>
+            <a:lstStyle/>
+            <a:p>
+              <a:pPr algn="ctr"/>
+              <a:endParaRPr lang="en-GB">
+                <a:solidFill>
+                  <a:schemeClr val="tx1">
+                    <a:lumMod val="85000"/>
+                    <a:lumOff val="15000"/>
+                  </a:schemeClr>
+                </a:solidFill>
+              </a:endParaRPr>
+            </a:p>
+          </p:txBody>
+        </p:sp>
+        <p:sp>
+          <p:nvSpPr>
+            <p:cNvPr id="37" name="Rechthoek: afgeronde hoeken 36">
+              <a:extLst>
+                <a:ext uri="{FF2B5EF4-FFF2-40B4-BE49-F238E27FC236}">
+                  <a16:creationId xmlns:a16="http://schemas.microsoft.com/office/drawing/2014/main" id="{1C5A4A89-956A-35DE-D7AF-A3DCF530A485}"/>
+                </a:ext>
+              </a:extLst>
+            </p:cNvPr>
+            <p:cNvSpPr/>
+            <p:nvPr/>
+          </p:nvSpPr>
+          <p:spPr>
+            <a:xfrm>
+              <a:off x="8225406" y="1664694"/>
+              <a:ext cx="1872926" cy="3527238"/>
+            </a:xfrm>
+            <a:prstGeom prst="roundRect">
+              <a:avLst>
+                <a:gd name="adj" fmla="val 6903"/>
+              </a:avLst>
+            </a:prstGeom>
+            <a:noFill/>
+            <a:ln w="12700">
+              <a:solidFill>
+                <a:schemeClr val="tx1">
+                  <a:lumMod val="75000"/>
+                  <a:lumOff val="25000"/>
+                </a:schemeClr>
+              </a:solidFill>
+            </a:ln>
+          </p:spPr>
+          <p:txBody>
+            <a:bodyPr wrap="square" tIns="90000" anchor="ctr" anchorCtr="1">
+              <a:noAutofit/>
+            </a:bodyPr>
+            <a:lstStyle/>
+            <a:p>
+              <a:pPr algn="ctr">
+                <a:lnSpc>
+                  <a:spcPts val="1300"/>
+                </a:lnSpc>
+                <a:buNone/>
+              </a:pPr>
+              <a:endParaRPr lang="en-GB" sz="1200" i="1" noProof="0" dirty="0">
+                <a:solidFill>
+                  <a:schemeClr val="tx1">
+                    <a:lumMod val="85000"/>
+                    <a:lumOff val="15000"/>
+                  </a:schemeClr>
+                </a:solidFill>
+                <a:latin typeface="+mj-lt"/>
+              </a:endParaRPr>
+            </a:p>
+          </p:txBody>
+        </p:sp>
+        <p:sp>
+          <p:nvSpPr>
+            <p:cNvPr id="38" name="Tekstvak 37">
+              <a:extLst>
+                <a:ext uri="{FF2B5EF4-FFF2-40B4-BE49-F238E27FC236}">
+                  <a16:creationId xmlns:a16="http://schemas.microsoft.com/office/drawing/2014/main" id="{1A3BBB2D-4619-F4E5-1977-DD93615DCD13}"/>
+                </a:ext>
+              </a:extLst>
+            </p:cNvPr>
+            <p:cNvSpPr txBox="1"/>
+            <p:nvPr/>
+          </p:nvSpPr>
+          <p:spPr>
+            <a:xfrm>
+              <a:off x="8266046" y="1710130"/>
+              <a:ext cx="1879041" cy="553998"/>
+            </a:xfrm>
+            <a:prstGeom prst="rect">
+              <a:avLst/>
+            </a:prstGeom>
+            <a:noFill/>
+          </p:spPr>
+          <p:txBody>
+            <a:bodyPr wrap="none" rtlCol="0">
+              <a:spAutoFit/>
+            </a:bodyPr>
+            <a:lstStyle/>
+            <a:p>
+              <a:r>
+                <a:rPr lang="en-GB" sz="1500" b="1" dirty="0">
+                  <a:solidFill>
+                    <a:schemeClr val="bg1"/>
+                  </a:solidFill>
+                  <a:latin typeface="DM Sans" pitchFamily="2" charset="0"/>
+                </a:rPr>
+                <a:t>Cross-functional </a:t>
+              </a:r>
+              <a:br>
+                <a:rPr lang="en-GB" sz="1500" b="1" dirty="0">
+                  <a:solidFill>
+                    <a:schemeClr val="bg1"/>
+                  </a:solidFill>
+                  <a:latin typeface="DM Sans" pitchFamily="2" charset="0"/>
+                </a:rPr>
+              </a:br>
+              <a:r>
+                <a:rPr lang="en-GB" sz="1500" b="1" dirty="0">
+                  <a:solidFill>
+                    <a:schemeClr val="bg1"/>
+                  </a:solidFill>
+                  <a:latin typeface="DM Sans" pitchFamily="2" charset="0"/>
+                </a:rPr>
+                <a:t>agentic workflows</a:t>
+              </a:r>
+              <a:endParaRPr lang="en-GB" sz="1500" b="1" i="1" dirty="0">
+                <a:solidFill>
+                  <a:schemeClr val="bg1"/>
+                </a:solidFill>
+                <a:latin typeface="DM Sans" pitchFamily="2" charset="0"/>
+              </a:endParaRPr>
+            </a:p>
+          </p:txBody>
+        </p:sp>
       </p:grpSp>
+      <p:pic>
+        <p:nvPicPr>
+          <p:cNvPr id="40" name="Picture 2" descr="Geen ALT-tekst opgegeven voor deze afbeelding">
+            <a:extLst>
+              <a:ext uri="{FF2B5EF4-FFF2-40B4-BE49-F238E27FC236}">
+                <a16:creationId xmlns:a16="http://schemas.microsoft.com/office/drawing/2014/main" id="{3339BC4B-BAF4-E359-4B48-D70AF4FFA2F8}"/>
+              </a:ext>
+            </a:extLst>
+          </p:cNvPr>
+          <p:cNvPicPr>
+            <a:picLocks noChangeAspect="1" noChangeArrowheads="1"/>
+          </p:cNvPicPr>
+          <p:nvPr/>
+        </p:nvPicPr>
+        <p:blipFill rotWithShape="1">
+          <a:blip r:embed="rId3">
+            <a:clrChange>
+              <a:clrFrom>
+                <a:srgbClr val="F0F4FD"/>
+              </a:clrFrom>
+              <a:clrTo>
+                <a:srgbClr val="F0F4FD">
+                  <a:alpha val="0"/>
+                </a:srgbClr>
+              </a:clrTo>
+            </a:clrChange>
+            <a:grayscl/>
+            <a:extLst>
+              <a:ext uri="{28A0092B-C50C-407E-A947-70E740481C1C}">
+                <a14:useLocalDpi xmlns:a14="http://schemas.microsoft.com/office/drawing/2010/main" val="0"/>
+              </a:ext>
+            </a:extLst>
+          </a:blip>
+          <a:srcRect l="52056" t="49101" r="39179" b="41041"/>
+          <a:stretch>
+            <a:fillRect/>
+          </a:stretch>
+        </p:blipFill>
+        <p:spPr bwMode="auto">
+          <a:xfrm>
+            <a:off x="6646352" y="2400741"/>
+            <a:ext cx="901668" cy="676090"/>
+          </a:xfrm>
+          <a:prstGeom prst="rect">
+            <a:avLst/>
+          </a:prstGeom>
+          <a:noFill/>
+          <a:extLst>
+            <a:ext uri="{909E8E84-426E-40DD-AFC4-6F175D3DCCD1}">
+              <a14:hiddenFill xmlns:a14="http://schemas.microsoft.com/office/drawing/2010/main">
+                <a:solidFill>
+                  <a:srgbClr val="FFFFFF"/>
+                </a:solidFill>
+              </a14:hiddenFill>
+            </a:ext>
+          </a:extLst>
+        </p:spPr>
+      </p:pic>
+      <p:pic>
+        <p:nvPicPr>
+          <p:cNvPr id="41" name="Picture 2" descr="Geen ALT-tekst opgegeven voor deze afbeelding">
+            <a:extLst>
+              <a:ext uri="{FF2B5EF4-FFF2-40B4-BE49-F238E27FC236}">
+                <a16:creationId xmlns:a16="http://schemas.microsoft.com/office/drawing/2014/main" id="{B8B79CD2-F8C8-26DC-FB9D-9001C1A05499}"/>
+              </a:ext>
+            </a:extLst>
+          </p:cNvPr>
+          <p:cNvPicPr>
+            <a:picLocks noChangeAspect="1" noChangeArrowheads="1"/>
+          </p:cNvPicPr>
+          <p:nvPr/>
+        </p:nvPicPr>
+        <p:blipFill rotWithShape="1">
+          <a:blip r:embed="rId3">
+            <a:clrChange>
+              <a:clrFrom>
+                <a:srgbClr val="F0F4FD"/>
+              </a:clrFrom>
+              <a:clrTo>
+                <a:srgbClr val="F0F4FD">
+                  <a:alpha val="0"/>
+                </a:srgbClr>
+              </a:clrTo>
+            </a:clrChange>
+            <a:grayscl/>
+            <a:extLst>
+              <a:ext uri="{28A0092B-C50C-407E-A947-70E740481C1C}">
+                <a14:useLocalDpi xmlns:a14="http://schemas.microsoft.com/office/drawing/2010/main" val="0"/>
+              </a:ext>
+            </a:extLst>
+          </a:blip>
+          <a:srcRect l="31906" t="52293" r="61753" b="39148"/>
+          <a:stretch>
+            <a:fillRect/>
+          </a:stretch>
+        </p:blipFill>
+        <p:spPr bwMode="auto">
+          <a:xfrm>
+            <a:off x="4783001" y="2783348"/>
+            <a:ext cx="652314" cy="586966"/>
+          </a:xfrm>
+          <a:prstGeom prst="rect">
+            <a:avLst/>
+          </a:prstGeom>
+          <a:noFill/>
+          <a:extLst>
+            <a:ext uri="{909E8E84-426E-40DD-AFC4-6F175D3DCCD1}">
+              <a14:hiddenFill xmlns:a14="http://schemas.microsoft.com/office/drawing/2010/main">
+                <a:solidFill>
+                  <a:srgbClr val="FFFFFF"/>
+                </a:solidFill>
+              </a14:hiddenFill>
+            </a:ext>
+          </a:extLst>
+        </p:spPr>
+      </p:pic>
+      <p:pic>
+        <p:nvPicPr>
+          <p:cNvPr id="42" name="Picture 2" descr="Geen ALT-tekst opgegeven voor deze afbeelding">
+            <a:extLst>
+              <a:ext uri="{FF2B5EF4-FFF2-40B4-BE49-F238E27FC236}">
+                <a16:creationId xmlns:a16="http://schemas.microsoft.com/office/drawing/2014/main" id="{80D9276C-453F-4A13-311F-C04E2224AB6C}"/>
+              </a:ext>
+            </a:extLst>
+          </p:cNvPr>
+          <p:cNvPicPr>
+            <a:picLocks noChangeAspect="1" noChangeArrowheads="1"/>
+          </p:cNvPicPr>
+          <p:nvPr/>
+        </p:nvPicPr>
+        <p:blipFill rotWithShape="1">
+          <a:blip r:embed="rId3">
+            <a:clrChange>
+              <a:clrFrom>
+                <a:srgbClr val="F0F4FD"/>
+              </a:clrFrom>
+              <a:clrTo>
+                <a:srgbClr val="F0F4FD">
+                  <a:alpha val="0"/>
+                </a:srgbClr>
+              </a:clrTo>
+            </a:clrChange>
+            <a:grayscl/>
+            <a:extLst>
+              <a:ext uri="{28A0092B-C50C-407E-A947-70E740481C1C}">
+                <a14:useLocalDpi xmlns:a14="http://schemas.microsoft.com/office/drawing/2010/main" val="0"/>
+              </a:ext>
+            </a:extLst>
+          </a:blip>
+          <a:srcRect l="11468" t="55454" r="81516" b="36151"/>
+          <a:stretch>
+            <a:fillRect/>
+          </a:stretch>
+        </p:blipFill>
+        <p:spPr bwMode="auto">
+          <a:xfrm>
+            <a:off x="2770431" y="3005867"/>
+            <a:ext cx="721795" cy="575735"/>
+          </a:xfrm>
+          <a:prstGeom prst="rect">
+            <a:avLst/>
+          </a:prstGeom>
+          <a:noFill/>
+          <a:extLst>
+            <a:ext uri="{909E8E84-426E-40DD-AFC4-6F175D3DCCD1}">
+              <a14:hiddenFill xmlns:a14="http://schemas.microsoft.com/office/drawing/2010/main">
+                <a:solidFill>
+                  <a:srgbClr val="FFFFFF"/>
+                </a:solidFill>
+              </a14:hiddenFill>
+            </a:ext>
+          </a:extLst>
+        </p:spPr>
+      </p:pic>
     </p:spTree>
     <p:extLst>
       <p:ext uri="{BB962C8B-B14F-4D97-AF65-F5344CB8AC3E}">
@@ -7142,7 +7029,7 @@
         <p:cNvPr id="1" name="">
           <a:extLst>
             <a:ext uri="{FF2B5EF4-FFF2-40B4-BE49-F238E27FC236}">
-              <a16:creationId xmlns:a16="http://schemas.microsoft.com/office/drawing/2014/main" id="{9D2C701A-283F-C1B0-2834-F9D1A7F131B3}"/>
+              <a16:creationId xmlns:a16="http://schemas.microsoft.com/office/drawing/2014/main" id="{7D8BA248-EF49-F51A-CBDA-CDB536E050A4}"/>
             </a:ext>
           </a:extLst>
         </p:cNvPr>
@@ -7162,7 +7049,7 @@
           <p:cNvPr id="2" name="Rechthoek 1">
             <a:extLst>
               <a:ext uri="{FF2B5EF4-FFF2-40B4-BE49-F238E27FC236}">
-                <a16:creationId xmlns:a16="http://schemas.microsoft.com/office/drawing/2014/main" id="{44EF578A-6231-9FBF-1308-E0EF79AE5D3B}"/>
+                <a16:creationId xmlns:a16="http://schemas.microsoft.com/office/drawing/2014/main" id="{6CED7A95-861C-C15B-BDC7-8EFDB6F02F4F}"/>
               </a:ext>
             </a:extLst>
           </p:cNvPr>
@@ -7171,8 +7058,8 @@
         </p:nvSpPr>
         <p:spPr>
           <a:xfrm>
-            <a:off x="1947041" y="409251"/>
-            <a:ext cx="8442435" cy="4690889"/>
+            <a:off x="2214880" y="512643"/>
+            <a:ext cx="7762240" cy="4837705"/>
           </a:xfrm>
           <a:prstGeom prst="rect">
             <a:avLst/>
@@ -7214,7 +7101,7 @@
           <p:cNvPr id="3" name="Title 2">
             <a:extLst>
               <a:ext uri="{FF2B5EF4-FFF2-40B4-BE49-F238E27FC236}">
-                <a16:creationId xmlns:a16="http://schemas.microsoft.com/office/drawing/2014/main" id="{8804E6F4-C3CC-C3BC-3F2A-1A9BCA0131F6}"/>
+                <a16:creationId xmlns:a16="http://schemas.microsoft.com/office/drawing/2014/main" id="{BF651015-06D4-F8F3-4AC0-6C159D0D7FDC}"/>
               </a:ext>
             </a:extLst>
           </p:cNvPr>
@@ -7257,7 +7144,7 @@
           <p:cNvPr id="17" name="Rectangle 16">
             <a:extLst>
               <a:ext uri="{FF2B5EF4-FFF2-40B4-BE49-F238E27FC236}">
-                <a16:creationId xmlns:a16="http://schemas.microsoft.com/office/drawing/2014/main" id="{D72B93A7-9585-0551-84EE-EF7054A423A7}"/>
+                <a16:creationId xmlns:a16="http://schemas.microsoft.com/office/drawing/2014/main" id="{854FBC05-8076-835B-A51A-382B2C7273FA}"/>
               </a:ext>
             </a:extLst>
           </p:cNvPr>
@@ -7266,8 +7153,8 @@
         </p:nvSpPr>
         <p:spPr>
           <a:xfrm>
-            <a:off x="2265680" y="1273145"/>
-            <a:ext cx="7658112" cy="569848"/>
+            <a:off x="2265680" y="1273144"/>
+            <a:ext cx="7658112" cy="723275"/>
           </a:xfrm>
           <a:prstGeom prst="roundRect">
             <a:avLst/>
@@ -7303,7 +7190,7 @@
           <a:lstStyle/>
           <a:p>
             <a:pPr algn="ctr"/>
-            <a:endParaRPr lang="en-GB" noProof="0" dirty="0"/>
+            <a:endParaRPr lang="en-GB" sz="1400" noProof="0" dirty="0"/>
           </a:p>
         </p:txBody>
       </p:sp>
@@ -7312,7 +7199,7 @@
           <p:cNvPr id="20" name="TextBox 19">
             <a:extLst>
               <a:ext uri="{FF2B5EF4-FFF2-40B4-BE49-F238E27FC236}">
-                <a16:creationId xmlns:a16="http://schemas.microsoft.com/office/drawing/2014/main" id="{5B250883-346E-3EC8-3212-E9A0D2A763DF}"/>
+                <a16:creationId xmlns:a16="http://schemas.microsoft.com/office/drawing/2014/main" id="{79702F44-A03C-80FC-8FB0-0826BA42DE86}"/>
               </a:ext>
             </a:extLst>
           </p:cNvPr>
@@ -7321,8 +7208,8 @@
         </p:nvSpPr>
         <p:spPr>
           <a:xfrm>
-            <a:off x="2418950" y="1343051"/>
-            <a:ext cx="3874310" cy="383054"/>
+            <a:off x="2418950" y="1363371"/>
+            <a:ext cx="3874310" cy="507831"/>
           </a:xfrm>
           <a:prstGeom prst="rect">
             <a:avLst/>
@@ -7336,6 +7223,9 @@
           <a:lstStyle/>
           <a:p>
             <a:pPr>
+              <a:spcAft>
+                <a:spcPts val="600"/>
+              </a:spcAft>
               <a:buSzPct val="100000"/>
             </a:pPr>
             <a:r>
@@ -7350,25 +7240,13 @@
               </a:rPr>
               <a:t>VISION</a:t>
             </a:r>
-            <a:endParaRPr lang="en-GB" sz="1200" b="1" noProof="0" dirty="0">
-              <a:solidFill>
-                <a:schemeClr val="tx1">
-                  <a:lumMod val="85000"/>
-                  <a:lumOff val="15000"/>
-                </a:schemeClr>
-              </a:solidFill>
-              <a:latin typeface="DM Sans" pitchFamily="2" charset="0"/>
-            </a:endParaRPr>
           </a:p>
           <a:p>
             <a:pPr>
-              <a:lnSpc>
-                <a:spcPts val="1300"/>
-              </a:lnSpc>
               <a:buSzPct val="100000"/>
             </a:pPr>
             <a:r>
-              <a:rPr lang="en-GB" sz="1200" noProof="0" dirty="0">
+              <a:rPr lang="en-GB" sz="1400" noProof="0" dirty="0">
                 <a:solidFill>
                   <a:schemeClr val="tx1">
                     <a:lumMod val="85000"/>
@@ -7380,7 +7258,7 @@
               <a:t>Vision</a:t>
             </a:r>
             <a:r>
-              <a:rPr lang="en-GB" sz="1200" b="1" noProof="0" dirty="0">
+              <a:rPr lang="en-GB" sz="1400" b="1" noProof="0" dirty="0">
                 <a:solidFill>
                   <a:schemeClr val="tx1">
                     <a:lumMod val="85000"/>
@@ -7392,7 +7270,7 @@
               <a:t>, </a:t>
             </a:r>
             <a:r>
-              <a:rPr lang="en-GB" sz="1200" noProof="0" dirty="0">
+              <a:rPr lang="en-GB" sz="1400" noProof="0" dirty="0">
                 <a:solidFill>
                   <a:schemeClr val="tx1">
                     <a:lumMod val="85000"/>
@@ -7411,7 +7289,7 @@
           <p:cNvPr id="151" name="Rectangle 150">
             <a:extLst>
               <a:ext uri="{FF2B5EF4-FFF2-40B4-BE49-F238E27FC236}">
-                <a16:creationId xmlns:a16="http://schemas.microsoft.com/office/drawing/2014/main" id="{6FE07215-7F00-369F-6136-C21285723163}"/>
+                <a16:creationId xmlns:a16="http://schemas.microsoft.com/office/drawing/2014/main" id="{41F7B64D-5435-407E-622F-30D44BB5CD32}"/>
               </a:ext>
             </a:extLst>
           </p:cNvPr>
@@ -7420,8 +7298,8 @@
         </p:nvSpPr>
         <p:spPr>
           <a:xfrm>
-            <a:off x="2271959" y="4023121"/>
-            <a:ext cx="2480582" cy="908874"/>
+            <a:off x="2271959" y="3119400"/>
+            <a:ext cx="2480582" cy="1168533"/>
           </a:xfrm>
           <a:prstGeom prst="roundRect">
             <a:avLst/>
@@ -7457,7 +7335,7 @@
           <a:lstStyle/>
           <a:p>
             <a:pPr algn="ctr"/>
-            <a:endParaRPr lang="en-GB" noProof="0" dirty="0"/>
+            <a:endParaRPr lang="en-GB" sz="1400" noProof="0" dirty="0"/>
           </a:p>
         </p:txBody>
       </p:sp>
@@ -7466,7 +7344,7 @@
           <p:cNvPr id="154" name="Rectangle 153">
             <a:extLst>
               <a:ext uri="{FF2B5EF4-FFF2-40B4-BE49-F238E27FC236}">
-                <a16:creationId xmlns:a16="http://schemas.microsoft.com/office/drawing/2014/main" id="{653576DA-7188-AF3A-BBE1-8B282BA67543}"/>
+                <a16:creationId xmlns:a16="http://schemas.microsoft.com/office/drawing/2014/main" id="{D5BBACB4-7591-438A-25EA-79E642E138D4}"/>
               </a:ext>
             </a:extLst>
           </p:cNvPr>
@@ -7475,8 +7353,8 @@
         </p:nvSpPr>
         <p:spPr>
           <a:xfrm>
-            <a:off x="4858848" y="4023121"/>
-            <a:ext cx="2480582" cy="908874"/>
+            <a:off x="4858848" y="3119400"/>
+            <a:ext cx="2480582" cy="1168533"/>
           </a:xfrm>
           <a:prstGeom prst="roundRect">
             <a:avLst/>
@@ -7512,7 +7390,7 @@
           <a:lstStyle/>
           <a:p>
             <a:pPr algn="ctr"/>
-            <a:endParaRPr lang="en-GB" noProof="0" dirty="0"/>
+            <a:endParaRPr lang="en-GB" sz="1400" noProof="0" dirty="0"/>
           </a:p>
         </p:txBody>
       </p:sp>
@@ -7521,7 +7399,7 @@
           <p:cNvPr id="156" name="Rectangle 155">
             <a:extLst>
               <a:ext uri="{FF2B5EF4-FFF2-40B4-BE49-F238E27FC236}">
-                <a16:creationId xmlns:a16="http://schemas.microsoft.com/office/drawing/2014/main" id="{8B339D20-5A49-6F7A-15C4-5ED02A3C89CF}"/>
+                <a16:creationId xmlns:a16="http://schemas.microsoft.com/office/drawing/2014/main" id="{41A130F9-0930-C628-981A-7758A9ACE534}"/>
               </a:ext>
             </a:extLst>
           </p:cNvPr>
@@ -7530,8 +7408,8 @@
         </p:nvSpPr>
         <p:spPr>
           <a:xfrm>
-            <a:off x="7445738" y="4023121"/>
-            <a:ext cx="2480582" cy="908874"/>
+            <a:off x="7445738" y="3119400"/>
+            <a:ext cx="2480582" cy="1168533"/>
           </a:xfrm>
           <a:prstGeom prst="roundRect">
             <a:avLst/>
@@ -7567,7 +7445,7 @@
           <a:lstStyle/>
           <a:p>
             <a:pPr algn="ctr"/>
-            <a:endParaRPr lang="en-GB" noProof="0" dirty="0"/>
+            <a:endParaRPr lang="en-GB" sz="1400" noProof="0" dirty="0"/>
           </a:p>
         </p:txBody>
       </p:sp>
@@ -7576,7 +7454,7 @@
           <p:cNvPr id="152" name="TextBox 151">
             <a:extLst>
               <a:ext uri="{FF2B5EF4-FFF2-40B4-BE49-F238E27FC236}">
-                <a16:creationId xmlns:a16="http://schemas.microsoft.com/office/drawing/2014/main" id="{D45E396F-4999-B4F9-7072-65323E72C693}"/>
+                <a16:creationId xmlns:a16="http://schemas.microsoft.com/office/drawing/2014/main" id="{61BC1662-D73D-BAB8-E82C-9675A5C2652B}"/>
               </a:ext>
             </a:extLst>
           </p:cNvPr>
@@ -7585,8 +7463,8 @@
         </p:nvSpPr>
         <p:spPr>
           <a:xfrm>
-            <a:off x="2418949" y="4089627"/>
-            <a:ext cx="2436657" cy="549766"/>
+            <a:off x="2418949" y="3206227"/>
+            <a:ext cx="2306191" cy="938719"/>
           </a:xfrm>
           <a:prstGeom prst="rect">
             <a:avLst/>
@@ -7600,6 +7478,9 @@
           <a:lstStyle/>
           <a:p>
             <a:pPr>
+              <a:spcAft>
+                <a:spcPts val="600"/>
+              </a:spcAft>
               <a:buSzPct val="100000"/>
             </a:pPr>
             <a:r>
@@ -7612,27 +7493,15 @@
                 </a:solidFill>
                 <a:latin typeface="DM Sans" pitchFamily="2" charset="0"/>
               </a:rPr>
-              <a:t>DATA</a:t>
-            </a:r>
-            <a:endParaRPr lang="en-GB" sz="1200" b="1" noProof="0" dirty="0">
-              <a:solidFill>
-                <a:schemeClr val="tx1">
-                  <a:lumMod val="85000"/>
-                  <a:lumOff val="15000"/>
-                </a:schemeClr>
-              </a:solidFill>
-              <a:latin typeface="DM Sans" pitchFamily="2" charset="0"/>
-            </a:endParaRPr>
+              <a:t>PEOPLE</a:t>
+            </a:r>
           </a:p>
           <a:p>
             <a:pPr>
-              <a:lnSpc>
-                <a:spcPts val="1300"/>
-              </a:lnSpc>
               <a:buSzPct val="100000"/>
             </a:pPr>
             <a:r>
-              <a:rPr lang="en-GB" sz="1200" noProof="0" dirty="0">
+              <a:rPr lang="en-GB" sz="1400" noProof="0" dirty="0">
                 <a:solidFill>
                   <a:schemeClr val="tx1">
                     <a:lumMod val="85000"/>
@@ -7641,7 +7510,7 @@
                 </a:solidFill>
                 <a:latin typeface="+mj-lt"/>
               </a:rPr>
-              <a:t>Reusable data products, analytics, architecture, monetization</a:t>
+              <a:t>Roles, target skills &amp; gaps, org sizing, talent journey, training, team incentives</a:t>
             </a:r>
           </a:p>
         </p:txBody>
@@ -7651,7 +7520,7 @@
           <p:cNvPr id="155" name="TextBox 154">
             <a:extLst>
               <a:ext uri="{FF2B5EF4-FFF2-40B4-BE49-F238E27FC236}">
-                <a16:creationId xmlns:a16="http://schemas.microsoft.com/office/drawing/2014/main" id="{2DE3B8D4-C994-CC95-4F69-2555F1BAEC65}"/>
+                <a16:creationId xmlns:a16="http://schemas.microsoft.com/office/drawing/2014/main" id="{D6773BBC-2B68-F3FD-662D-3FDFA5E700A0}"/>
               </a:ext>
             </a:extLst>
           </p:cNvPr>
@@ -7660,8 +7529,8 @@
         </p:nvSpPr>
         <p:spPr>
           <a:xfrm>
-            <a:off x="5010186" y="4089627"/>
-            <a:ext cx="2044410" cy="549766"/>
+            <a:off x="5010186" y="3206227"/>
+            <a:ext cx="2044410" cy="938719"/>
           </a:xfrm>
           <a:prstGeom prst="rect">
             <a:avLst/>
@@ -7675,10 +7544,13 @@
           <a:lstStyle/>
           <a:p>
             <a:pPr>
+              <a:spcAft>
+                <a:spcPts val="600"/>
+              </a:spcAft>
               <a:buSzPct val="100000"/>
             </a:pPr>
             <a:r>
-              <a:rPr lang="en-GB" sz="1400" b="1" noProof="0" dirty="0">
+              <a:rPr lang="en-GB" sz="1400" b="1" dirty="0">
                 <a:solidFill>
                   <a:schemeClr val="tx1">
                     <a:lumMod val="85000"/>
@@ -7687,27 +7559,15 @@
                 </a:solidFill>
                 <a:latin typeface="DM Sans" pitchFamily="2" charset="0"/>
               </a:rPr>
-              <a:t>TECHNOLOGY</a:t>
-            </a:r>
-            <a:endParaRPr lang="en-GB" sz="1200" b="1" noProof="0" dirty="0">
-              <a:solidFill>
-                <a:schemeClr val="tx1">
-                  <a:lumMod val="85000"/>
-                  <a:lumOff val="15000"/>
-                </a:schemeClr>
-              </a:solidFill>
-              <a:latin typeface="DM Sans" pitchFamily="2" charset="0"/>
-            </a:endParaRPr>
+              <a:t>PROCESS</a:t>
+            </a:r>
           </a:p>
           <a:p>
             <a:pPr>
-              <a:lnSpc>
-                <a:spcPts val="1300"/>
-              </a:lnSpc>
               <a:buSzPct val="100000"/>
             </a:pPr>
             <a:r>
-              <a:rPr lang="en-GB" sz="1200" noProof="0" dirty="0">
+              <a:rPr lang="en-GB" sz="1400" dirty="0">
                 <a:solidFill>
                   <a:schemeClr val="tx1">
                     <a:lumMod val="85000"/>
@@ -7716,7 +7576,7 @@
                 </a:solidFill>
                 <a:latin typeface="+mj-lt"/>
               </a:rPr>
-              <a:t>Target architecture, platforms &amp; solutions, integration </a:t>
+              <a:t>Org. design, cross-functional teams, product way-of-working</a:t>
             </a:r>
           </a:p>
         </p:txBody>
@@ -7726,7 +7586,7 @@
           <p:cNvPr id="157" name="TextBox 156">
             <a:extLst>
               <a:ext uri="{FF2B5EF4-FFF2-40B4-BE49-F238E27FC236}">
-                <a16:creationId xmlns:a16="http://schemas.microsoft.com/office/drawing/2014/main" id="{B1A48E0B-B12C-B2CB-1BB2-D2295474555A}"/>
+                <a16:creationId xmlns:a16="http://schemas.microsoft.com/office/drawing/2014/main" id="{8666AC02-3F8E-E754-C3F1-B208CBEF0099}"/>
               </a:ext>
             </a:extLst>
           </p:cNvPr>
@@ -7735,8 +7595,8 @@
         </p:nvSpPr>
         <p:spPr>
           <a:xfrm>
-            <a:off x="7590340" y="4089627"/>
-            <a:ext cx="2050934" cy="549766"/>
+            <a:off x="7590340" y="3206227"/>
+            <a:ext cx="2050934" cy="938719"/>
           </a:xfrm>
           <a:prstGeom prst="rect">
             <a:avLst/>
@@ -7750,6 +7610,9 @@
           <a:lstStyle/>
           <a:p>
             <a:pPr>
+              <a:spcAft>
+                <a:spcPts val="600"/>
+              </a:spcAft>
               <a:buSzPct val="100000"/>
             </a:pPr>
             <a:r>
@@ -7764,25 +7627,13 @@
               </a:rPr>
               <a:t>ENABLEMENT</a:t>
             </a:r>
-            <a:endParaRPr lang="en-GB" sz="1200" b="1" noProof="0" dirty="0">
-              <a:solidFill>
-                <a:schemeClr val="tx1">
-                  <a:lumMod val="85000"/>
-                  <a:lumOff val="15000"/>
-                </a:schemeClr>
-              </a:solidFill>
-              <a:latin typeface="DM Sans" pitchFamily="2" charset="0"/>
-            </a:endParaRPr>
           </a:p>
           <a:p>
             <a:pPr>
-              <a:lnSpc>
-                <a:spcPts val="1300"/>
-              </a:lnSpc>
               <a:buSzPct val="100000"/>
             </a:pPr>
             <a:r>
-              <a:rPr lang="en-GB" sz="1200" noProof="0" dirty="0">
+              <a:rPr lang="en-GB" sz="1400" noProof="0" dirty="0">
                 <a:solidFill>
                   <a:schemeClr val="tx1">
                     <a:lumMod val="85000"/>
@@ -7801,7 +7652,7 @@
           <p:cNvPr id="162" name="Rectangle 161">
             <a:extLst>
               <a:ext uri="{FF2B5EF4-FFF2-40B4-BE49-F238E27FC236}">
-                <a16:creationId xmlns:a16="http://schemas.microsoft.com/office/drawing/2014/main" id="{040EE41B-84FC-D9F7-BC87-3BD84F3AFE4B}"/>
+                <a16:creationId xmlns:a16="http://schemas.microsoft.com/office/drawing/2014/main" id="{DFE2ED97-2E3F-FA70-0C4E-672C48D375F5}"/>
               </a:ext>
             </a:extLst>
           </p:cNvPr>
@@ -7810,7 +7661,7 @@
         </p:nvSpPr>
         <p:spPr>
           <a:xfrm>
-            <a:off x="2271959" y="3031984"/>
+            <a:off x="2271959" y="4363790"/>
             <a:ext cx="3771823" cy="908874"/>
           </a:xfrm>
           <a:prstGeom prst="roundRect">
@@ -7847,7 +7698,7 @@
           <a:lstStyle/>
           <a:p>
             <a:pPr algn="ctr"/>
-            <a:endParaRPr lang="en-GB" noProof="0" dirty="0"/>
+            <a:endParaRPr lang="en-GB" sz="1400" noProof="0" dirty="0"/>
           </a:p>
         </p:txBody>
       </p:sp>
@@ -7856,7 +7707,7 @@
           <p:cNvPr id="165" name="Rectangle 164">
             <a:extLst>
               <a:ext uri="{FF2B5EF4-FFF2-40B4-BE49-F238E27FC236}">
-                <a16:creationId xmlns:a16="http://schemas.microsoft.com/office/drawing/2014/main" id="{C5224C84-04C8-1C2B-02B5-31E1DA424107}"/>
+                <a16:creationId xmlns:a16="http://schemas.microsoft.com/office/drawing/2014/main" id="{385E0A92-67D8-D588-5217-B92EF10469E0}"/>
               </a:ext>
             </a:extLst>
           </p:cNvPr>
@@ -7865,7 +7716,7 @@
         </p:nvSpPr>
         <p:spPr>
           <a:xfrm>
-            <a:off x="6151970" y="3031984"/>
+            <a:off x="6151970" y="4363790"/>
             <a:ext cx="3771823" cy="908874"/>
           </a:xfrm>
           <a:prstGeom prst="roundRect">
@@ -7902,7 +7753,7 @@
           <a:lstStyle/>
           <a:p>
             <a:pPr algn="ctr"/>
-            <a:endParaRPr lang="en-GB" noProof="0" dirty="0"/>
+            <a:endParaRPr lang="en-GB" sz="1400" noProof="0" dirty="0"/>
           </a:p>
         </p:txBody>
       </p:sp>
@@ -7911,7 +7762,7 @@
           <p:cNvPr id="163" name="TextBox 162">
             <a:extLst>
               <a:ext uri="{FF2B5EF4-FFF2-40B4-BE49-F238E27FC236}">
-                <a16:creationId xmlns:a16="http://schemas.microsoft.com/office/drawing/2014/main" id="{CDC35536-4632-3A16-6AAD-1321A4D58107}"/>
+                <a16:creationId xmlns:a16="http://schemas.microsoft.com/office/drawing/2014/main" id="{80DC8BB1-3935-E17A-25BB-74A2F1D33D3A}"/>
               </a:ext>
             </a:extLst>
           </p:cNvPr>
@@ -7920,8 +7771,8 @@
         </p:nvSpPr>
         <p:spPr>
           <a:xfrm>
-            <a:off x="2418952" y="3098490"/>
-            <a:ext cx="3076622" cy="549766"/>
+            <a:off x="2418952" y="4450616"/>
+            <a:ext cx="2792111" cy="723275"/>
           </a:xfrm>
           <a:prstGeom prst="rect">
             <a:avLst/>
@@ -7935,10 +7786,13 @@
           <a:lstStyle/>
           <a:p>
             <a:pPr>
+              <a:spcAft>
+                <a:spcPts val="600"/>
+              </a:spcAft>
               <a:buSzPct val="100000"/>
             </a:pPr>
             <a:r>
-              <a:rPr lang="en-GB" sz="1400" b="1" noProof="0" dirty="0">
+              <a:rPr lang="en-GB" sz="1400" b="1" dirty="0">
                 <a:solidFill>
                   <a:schemeClr val="tx1">
                     <a:lumMod val="85000"/>
@@ -7947,27 +7801,15 @@
                 </a:solidFill>
                 <a:latin typeface="DM Sans" pitchFamily="2" charset="0"/>
               </a:rPr>
-              <a:t>PEOPLE</a:t>
-            </a:r>
-            <a:endParaRPr lang="en-GB" sz="1200" b="1" noProof="0" dirty="0">
-              <a:solidFill>
-                <a:schemeClr val="tx1">
-                  <a:lumMod val="85000"/>
-                  <a:lumOff val="15000"/>
-                </a:schemeClr>
-              </a:solidFill>
-              <a:latin typeface="DM Sans" pitchFamily="2" charset="0"/>
-            </a:endParaRPr>
+              <a:t>DATA</a:t>
+            </a:r>
           </a:p>
           <a:p>
             <a:pPr>
-              <a:lnSpc>
-                <a:spcPts val="1300"/>
-              </a:lnSpc>
               <a:buSzPct val="100000"/>
             </a:pPr>
             <a:r>
-              <a:rPr lang="en-GB" sz="1200" noProof="0" dirty="0">
+              <a:rPr lang="en-GB" sz="1400" dirty="0">
                 <a:solidFill>
                   <a:schemeClr val="tx1">
                     <a:lumMod val="85000"/>
@@ -7976,7 +7818,7 @@
                 </a:solidFill>
                 <a:latin typeface="+mj-lt"/>
               </a:rPr>
-              <a:t>Roles, target skills &amp; gaps, org sizing, talent journey, training, team incentives</a:t>
+              <a:t>Reusable data products, analytics, architecture, monetization</a:t>
             </a:r>
           </a:p>
         </p:txBody>
@@ -7986,7 +7828,7 @@
           <p:cNvPr id="166" name="TextBox 165">
             <a:extLst>
               <a:ext uri="{FF2B5EF4-FFF2-40B4-BE49-F238E27FC236}">
-                <a16:creationId xmlns:a16="http://schemas.microsoft.com/office/drawing/2014/main" id="{0ED94337-D9EF-B968-0944-7B0492BE49FB}"/>
+                <a16:creationId xmlns:a16="http://schemas.microsoft.com/office/drawing/2014/main" id="{10166978-2E96-E3A3-95B8-30EF5CAF9525}"/>
               </a:ext>
             </a:extLst>
           </p:cNvPr>
@@ -7995,8 +7837,8 @@
         </p:nvSpPr>
         <p:spPr>
           <a:xfrm>
-            <a:off x="6293260" y="3098490"/>
-            <a:ext cx="2548336" cy="549766"/>
+            <a:off x="6293260" y="4450616"/>
+            <a:ext cx="2548336" cy="723275"/>
           </a:xfrm>
           <a:prstGeom prst="rect">
             <a:avLst/>
@@ -8010,10 +7852,13 @@
           <a:lstStyle/>
           <a:p>
             <a:pPr>
+              <a:spcAft>
+                <a:spcPts val="600"/>
+              </a:spcAft>
               <a:buSzPct val="100000"/>
             </a:pPr>
             <a:r>
-              <a:rPr lang="en-GB" sz="1400" b="1" noProof="0" dirty="0">
+              <a:rPr lang="en-GB" sz="1400" b="1" dirty="0">
                 <a:solidFill>
                   <a:schemeClr val="tx1">
                     <a:lumMod val="85000"/>
@@ -8022,27 +7867,15 @@
                 </a:solidFill>
                 <a:latin typeface="DM Sans" pitchFamily="2" charset="0"/>
               </a:rPr>
-              <a:t>PROCESS</a:t>
-            </a:r>
-            <a:endParaRPr lang="en-GB" sz="1200" b="1" noProof="0" dirty="0">
-              <a:solidFill>
-                <a:schemeClr val="tx1">
-                  <a:lumMod val="85000"/>
-                  <a:lumOff val="15000"/>
-                </a:schemeClr>
-              </a:solidFill>
-              <a:latin typeface="DM Sans" pitchFamily="2" charset="0"/>
-            </a:endParaRPr>
+              <a:t>TECHNOLOGY</a:t>
+            </a:r>
           </a:p>
           <a:p>
             <a:pPr>
-              <a:lnSpc>
-                <a:spcPts val="1300"/>
-              </a:lnSpc>
               <a:buSzPct val="100000"/>
             </a:pPr>
             <a:r>
-              <a:rPr lang="en-GB" sz="1200" noProof="0" dirty="0">
+              <a:rPr lang="en-GB" sz="1400" dirty="0">
                 <a:solidFill>
                   <a:schemeClr val="tx1">
                     <a:lumMod val="85000"/>
@@ -8051,7 +7884,7 @@
                 </a:solidFill>
                 <a:latin typeface="+mj-lt"/>
               </a:rPr>
-              <a:t>Org. design, cross-functional teams, product way-of-working</a:t>
+              <a:t>Target architecture, platforms &amp; solutions, integration </a:t>
             </a:r>
           </a:p>
         </p:txBody>
@@ -8061,7 +7894,7 @@
           <p:cNvPr id="140" name="Rectangle 139">
             <a:extLst>
               <a:ext uri="{FF2B5EF4-FFF2-40B4-BE49-F238E27FC236}">
-                <a16:creationId xmlns:a16="http://schemas.microsoft.com/office/drawing/2014/main" id="{6EEE62E6-5E4B-C96C-9F89-375F08FD4DF3}"/>
+                <a16:creationId xmlns:a16="http://schemas.microsoft.com/office/drawing/2014/main" id="{408780A7-24D1-5FA9-1D03-00F17CEDD27F}"/>
               </a:ext>
             </a:extLst>
           </p:cNvPr>
@@ -8070,8 +7903,8 @@
         </p:nvSpPr>
         <p:spPr>
           <a:xfrm>
-            <a:off x="2271958" y="1981106"/>
-            <a:ext cx="7651834" cy="908874"/>
+            <a:off x="2271958" y="2069637"/>
+            <a:ext cx="7651834" cy="973769"/>
           </a:xfrm>
           <a:prstGeom prst="roundRect">
             <a:avLst/>
@@ -8107,7 +7940,7 @@
           <a:lstStyle/>
           <a:p>
             <a:pPr algn="ctr"/>
-            <a:endParaRPr lang="en-GB" noProof="0" dirty="0"/>
+            <a:endParaRPr lang="en-GB" sz="1400" noProof="0" dirty="0"/>
           </a:p>
         </p:txBody>
       </p:sp>
@@ -8116,7 +7949,7 @@
           <p:cNvPr id="141" name="TextBox 140">
             <a:extLst>
               <a:ext uri="{FF2B5EF4-FFF2-40B4-BE49-F238E27FC236}">
-                <a16:creationId xmlns:a16="http://schemas.microsoft.com/office/drawing/2014/main" id="{133142FD-381A-0343-6F80-7C3DD96E3AE4}"/>
+                <a16:creationId xmlns:a16="http://schemas.microsoft.com/office/drawing/2014/main" id="{0F7C620F-BBEE-7637-3EFD-6F8FCA9B7A17}"/>
               </a:ext>
             </a:extLst>
           </p:cNvPr>
@@ -8125,8 +7958,8 @@
         </p:nvSpPr>
         <p:spPr>
           <a:xfrm>
-            <a:off x="2418950" y="2047612"/>
-            <a:ext cx="3874310" cy="549766"/>
+            <a:off x="2418950" y="2156464"/>
+            <a:ext cx="3874310" cy="723275"/>
           </a:xfrm>
           <a:prstGeom prst="rect">
             <a:avLst/>
@@ -8140,6 +7973,9 @@
           <a:lstStyle/>
           <a:p>
             <a:pPr>
+              <a:spcAft>
+                <a:spcPts val="600"/>
+              </a:spcAft>
               <a:buSzPct val="100000"/>
             </a:pPr>
             <a:r>
@@ -8164,18 +8000,15 @@
                 </a:solidFill>
                 <a:latin typeface="DM Sans" pitchFamily="2" charset="0"/>
               </a:rPr>
-              <a:t> -  by platform or business unit</a:t>
+              <a:t> -  by business unit</a:t>
             </a:r>
           </a:p>
           <a:p>
             <a:pPr>
-              <a:lnSpc>
-                <a:spcPts val="1300"/>
-              </a:lnSpc>
               <a:buSzPct val="100000"/>
             </a:pPr>
             <a:r>
-              <a:rPr lang="en-GB" sz="1200" noProof="0" dirty="0">
+              <a:rPr lang="en-GB" sz="1400" noProof="0" dirty="0">
                 <a:solidFill>
                   <a:schemeClr val="tx1">
                     <a:lumMod val="85000"/>
@@ -8194,7 +8027,7 @@
           <p:cNvPr id="43" name="Rectangle 42">
             <a:extLst>
               <a:ext uri="{FF2B5EF4-FFF2-40B4-BE49-F238E27FC236}">
-                <a16:creationId xmlns:a16="http://schemas.microsoft.com/office/drawing/2014/main" id="{8166F8A8-1F04-36DE-08FC-83823D231C25}"/>
+                <a16:creationId xmlns:a16="http://schemas.microsoft.com/office/drawing/2014/main" id="{E0F4E9CB-0A0E-4690-0FA6-9ED54FEC3B60}"/>
               </a:ext>
             </a:extLst>
           </p:cNvPr>
@@ -8203,7 +8036,7 @@
         </p:nvSpPr>
         <p:spPr>
           <a:xfrm>
-            <a:off x="6857075" y="2084448"/>
+            <a:off x="6857075" y="2233738"/>
             <a:ext cx="606304" cy="697758"/>
           </a:xfrm>
           <a:prstGeom prst="rect">
@@ -8242,7 +8075,7 @@
           <a:p>
             <a:pPr algn="ctr"/>
             <a:r>
-              <a:rPr lang="en-GB" sz="1100" noProof="0" dirty="0">
+              <a:rPr lang="en-GB" sz="1400" noProof="0" dirty="0">
                 <a:solidFill>
                   <a:schemeClr val="tx1">
                     <a:lumMod val="85000"/>
@@ -8261,7 +8094,7 @@
           <p:cNvPr id="44" name="Rectangle 43">
             <a:extLst>
               <a:ext uri="{FF2B5EF4-FFF2-40B4-BE49-F238E27FC236}">
-                <a16:creationId xmlns:a16="http://schemas.microsoft.com/office/drawing/2014/main" id="{90014271-BB22-F835-FD78-811BE8003051}"/>
+                <a16:creationId xmlns:a16="http://schemas.microsoft.com/office/drawing/2014/main" id="{BF71C01D-C3EC-7385-38F5-111CD7EAAE7D}"/>
               </a:ext>
             </a:extLst>
           </p:cNvPr>
@@ -8270,7 +8103,7 @@
         </p:nvSpPr>
         <p:spPr>
           <a:xfrm>
-            <a:off x="7543657" y="2084448"/>
+            <a:off x="7543657" y="2233738"/>
             <a:ext cx="606304" cy="697758"/>
           </a:xfrm>
           <a:prstGeom prst="rect">
@@ -8309,7 +8142,7 @@
           <a:p>
             <a:pPr algn="ctr"/>
             <a:r>
-              <a:rPr lang="en-GB" sz="1100" noProof="0" dirty="0">
+              <a:rPr lang="en-GB" sz="1400" noProof="0" dirty="0">
                 <a:solidFill>
                   <a:schemeClr val="tx1">
                     <a:lumMod val="85000"/>
@@ -8328,7 +8161,7 @@
           <p:cNvPr id="30" name="Rectangle 42">
             <a:extLst>
               <a:ext uri="{FF2B5EF4-FFF2-40B4-BE49-F238E27FC236}">
-                <a16:creationId xmlns:a16="http://schemas.microsoft.com/office/drawing/2014/main" id="{80F60780-247F-1D15-AA6B-E31A2199640B}"/>
+                <a16:creationId xmlns:a16="http://schemas.microsoft.com/office/drawing/2014/main" id="{7505B10F-04F0-C6AA-EB31-F410AA01EEBA}"/>
               </a:ext>
             </a:extLst>
           </p:cNvPr>
@@ -8337,7 +8170,7 @@
         </p:nvSpPr>
         <p:spPr>
           <a:xfrm>
-            <a:off x="8230239" y="2084448"/>
+            <a:off x="8230239" y="2233738"/>
             <a:ext cx="606304" cy="697758"/>
           </a:xfrm>
           <a:prstGeom prst="rect">
@@ -8376,7 +8209,7 @@
           <a:p>
             <a:pPr algn="ctr"/>
             <a:r>
-              <a:rPr lang="en-GB" sz="1100" noProof="0" dirty="0">
+              <a:rPr lang="en-GB" sz="1400" noProof="0" dirty="0">
                 <a:solidFill>
                   <a:schemeClr val="tx1">
                     <a:lumMod val="85000"/>
@@ -8395,7 +8228,7 @@
           <p:cNvPr id="32" name="Rectangle 43">
             <a:extLst>
               <a:ext uri="{FF2B5EF4-FFF2-40B4-BE49-F238E27FC236}">
-                <a16:creationId xmlns:a16="http://schemas.microsoft.com/office/drawing/2014/main" id="{934CC753-7B29-0A5D-26FD-6CA4D03F2EB2}"/>
+                <a16:creationId xmlns:a16="http://schemas.microsoft.com/office/drawing/2014/main" id="{4109848C-6F06-818E-FE0D-EF820C4C18F5}"/>
               </a:ext>
             </a:extLst>
           </p:cNvPr>
@@ -8404,7 +8237,7 @@
         </p:nvSpPr>
         <p:spPr>
           <a:xfrm>
-            <a:off x="8916822" y="2084448"/>
+            <a:off x="8916822" y="2233738"/>
             <a:ext cx="606304" cy="697758"/>
           </a:xfrm>
           <a:prstGeom prst="rect">
@@ -8443,1325 +8276,7 @@
           <a:p>
             <a:pPr algn="ctr"/>
             <a:r>
-              <a:rPr lang="en-GB" sz="1100" noProof="0" dirty="0">
-                <a:solidFill>
-                  <a:schemeClr val="tx1">
-                    <a:lumMod val="85000"/>
-                    <a:lumOff val="15000"/>
-                  </a:schemeClr>
-                </a:solidFill>
-                <a:latin typeface="DM Sans" pitchFamily="2" charset="0"/>
-              </a:rPr>
-              <a:t>BU 4</a:t>
-            </a:r>
-          </a:p>
-        </p:txBody>
-      </p:sp>
-      <p:pic>
-        <p:nvPicPr>
-          <p:cNvPr id="33" name="Afbeelding 32" descr="Afbeelding met tekst, schermopname, Lettertype, lijn&#10;&#10;Door AI gegenereerde inhoud is mogelijk onjuist.">
-            <a:extLst>
-              <a:ext uri="{FF2B5EF4-FFF2-40B4-BE49-F238E27FC236}">
-                <a16:creationId xmlns:a16="http://schemas.microsoft.com/office/drawing/2014/main" id="{2E0CCC23-13A3-B128-CB32-4D128C47FCDC}"/>
-              </a:ext>
-            </a:extLst>
-          </p:cNvPr>
-          <p:cNvPicPr>
-            <a:picLocks noChangeAspect="1"/>
-          </p:cNvPicPr>
-          <p:nvPr/>
-        </p:nvPicPr>
-        <p:blipFill>
-          <a:blip r:embed="rId3"/>
-          <a:stretch>
-            <a:fillRect/>
-          </a:stretch>
-        </p:blipFill>
-        <p:spPr>
-          <a:xfrm>
-            <a:off x="12192000" y="551145"/>
-            <a:ext cx="8051107" cy="4602677"/>
-          </a:xfrm>
-          <a:prstGeom prst="rect">
-            <a:avLst/>
-          </a:prstGeom>
-        </p:spPr>
-      </p:pic>
-    </p:spTree>
-    <p:extLst>
-      <p:ext uri="{BB962C8B-B14F-4D97-AF65-F5344CB8AC3E}">
-        <p14:creationId xmlns:p14="http://schemas.microsoft.com/office/powerpoint/2010/main" val="2913644097"/>
-      </p:ext>
-    </p:extLst>
-  </p:cSld>
-  <p:clrMapOvr>
-    <a:masterClrMapping/>
-  </p:clrMapOvr>
-</p:sld>
-</file>
-
-<file path=ppt/slides/slide4.xml><?xml version="1.0" encoding="utf-8"?>
-<p:sld xmlns:a="http://schemas.openxmlformats.org/drawingml/2006/main" xmlns:r="http://schemas.openxmlformats.org/officeDocument/2006/relationships" xmlns:p="http://schemas.openxmlformats.org/presentationml/2006/main">
-  <p:cSld>
-    <p:spTree>
-      <p:nvGrpSpPr>
-        <p:cNvPr id="1" name="">
-          <a:extLst>
-            <a:ext uri="{FF2B5EF4-FFF2-40B4-BE49-F238E27FC236}">
-              <a16:creationId xmlns:a16="http://schemas.microsoft.com/office/drawing/2014/main" id="{7D8BA248-EF49-F51A-CBDA-CDB536E050A4}"/>
-            </a:ext>
-          </a:extLst>
-        </p:cNvPr>
-        <p:cNvGrpSpPr/>
-        <p:nvPr/>
-      </p:nvGrpSpPr>
-      <p:grpSpPr>
-        <a:xfrm>
-          <a:off x="0" y="0"/>
-          <a:ext cx="0" cy="0"/>
-          <a:chOff x="0" y="0"/>
-          <a:chExt cx="0" cy="0"/>
-        </a:xfrm>
-      </p:grpSpPr>
-      <p:sp>
-        <p:nvSpPr>
-          <p:cNvPr id="2" name="Rechthoek 1">
-            <a:extLst>
-              <a:ext uri="{FF2B5EF4-FFF2-40B4-BE49-F238E27FC236}">
-                <a16:creationId xmlns:a16="http://schemas.microsoft.com/office/drawing/2014/main" id="{6CED7A95-861C-C15B-BDC7-8EFDB6F02F4F}"/>
-              </a:ext>
-            </a:extLst>
-          </p:cNvPr>
-          <p:cNvSpPr/>
-          <p:nvPr/>
-        </p:nvSpPr>
-        <p:spPr>
-          <a:xfrm>
-            <a:off x="1947041" y="409251"/>
-            <a:ext cx="8442435" cy="4690889"/>
-          </a:xfrm>
-          <a:prstGeom prst="rect">
-            <a:avLst/>
-          </a:prstGeom>
-          <a:solidFill>
-            <a:schemeClr val="bg1"/>
-          </a:solidFill>
-          <a:ln>
-            <a:noFill/>
-          </a:ln>
-        </p:spPr>
-        <p:style>
-          <a:lnRef idx="2">
-            <a:schemeClr val="accent1">
-              <a:shade val="15000"/>
-            </a:schemeClr>
-          </a:lnRef>
-          <a:fillRef idx="1">
-            <a:schemeClr val="accent1"/>
-          </a:fillRef>
-          <a:effectRef idx="0">
-            <a:schemeClr val="accent1"/>
-          </a:effectRef>
-          <a:fontRef idx="minor">
-            <a:schemeClr val="lt1"/>
-          </a:fontRef>
-        </p:style>
-        <p:txBody>
-          <a:bodyPr rtlCol="0" anchor="ctr"/>
-          <a:lstStyle/>
-          <a:p>
-            <a:pPr algn="ctr"/>
-            <a:endParaRPr lang="en-GB"/>
-          </a:p>
-        </p:txBody>
-      </p:sp>
-      <p:sp>
-        <p:nvSpPr>
-          <p:cNvPr id="3" name="Title 2">
-            <a:extLst>
-              <a:ext uri="{FF2B5EF4-FFF2-40B4-BE49-F238E27FC236}">
-                <a16:creationId xmlns:a16="http://schemas.microsoft.com/office/drawing/2014/main" id="{BF651015-06D4-F8F3-4AC0-6C159D0D7FDC}"/>
-              </a:ext>
-            </a:extLst>
-          </p:cNvPr>
-          <p:cNvSpPr>
-            <a:spLocks noGrp="1"/>
-          </p:cNvSpPr>
-          <p:nvPr>
-            <p:ph type="title"/>
-          </p:nvPr>
-        </p:nvSpPr>
-        <p:spPr>
-          <a:xfrm>
-            <a:off x="3652782" y="629113"/>
-            <a:ext cx="4886436" cy="360099"/>
-          </a:xfrm>
-        </p:spPr>
-        <p:txBody>
-          <a:bodyPr>
-            <a:normAutofit/>
-          </a:bodyPr>
-          <a:lstStyle/>
-          <a:p>
-            <a:pPr algn="ctr"/>
-            <a:r>
-              <a:rPr lang="en-GB" noProof="0" dirty="0">
-                <a:solidFill>
-                  <a:schemeClr val="tx1">
-                    <a:lumMod val="85000"/>
-                    <a:lumOff val="15000"/>
-                  </a:schemeClr>
-                </a:solidFill>
-              </a:rPr>
-              <a:t>AI Transformation Framework</a:t>
-            </a:r>
-          </a:p>
-        </p:txBody>
-      </p:sp>
-      <p:sp>
-        <p:nvSpPr>
-          <p:cNvPr id="17" name="Rectangle 16">
-            <a:extLst>
-              <a:ext uri="{FF2B5EF4-FFF2-40B4-BE49-F238E27FC236}">
-                <a16:creationId xmlns:a16="http://schemas.microsoft.com/office/drawing/2014/main" id="{854FBC05-8076-835B-A51A-382B2C7273FA}"/>
-              </a:ext>
-            </a:extLst>
-          </p:cNvPr>
-          <p:cNvSpPr/>
-          <p:nvPr/>
-        </p:nvSpPr>
-        <p:spPr>
-          <a:xfrm>
-            <a:off x="2265680" y="1273145"/>
-            <a:ext cx="7658112" cy="569848"/>
-          </a:xfrm>
-          <a:prstGeom prst="roundRect">
-            <a:avLst/>
-          </a:prstGeom>
-          <a:noFill/>
-          <a:ln>
-            <a:solidFill>
-              <a:schemeClr val="tx1">
-                <a:lumMod val="85000"/>
-                <a:lumOff val="15000"/>
-              </a:schemeClr>
-            </a:solidFill>
-          </a:ln>
-        </p:spPr>
-        <p:style>
-          <a:lnRef idx="2">
-            <a:schemeClr val="accent1">
-              <a:shade val="15000"/>
-            </a:schemeClr>
-          </a:lnRef>
-          <a:fillRef idx="1">
-            <a:schemeClr val="accent1"/>
-          </a:fillRef>
-          <a:effectRef idx="0">
-            <a:schemeClr val="accent1"/>
-          </a:effectRef>
-          <a:fontRef idx="minor">
-            <a:schemeClr val="lt1"/>
-          </a:fontRef>
-        </p:style>
-        <p:txBody>
-          <a:bodyPr rtlCol="0" anchor="ctr"/>
-          <a:lstStyle/>
-          <a:p>
-            <a:pPr algn="ctr"/>
-            <a:endParaRPr lang="en-GB" noProof="0" dirty="0"/>
-          </a:p>
-        </p:txBody>
-      </p:sp>
-      <p:sp>
-        <p:nvSpPr>
-          <p:cNvPr id="20" name="TextBox 19">
-            <a:extLst>
-              <a:ext uri="{FF2B5EF4-FFF2-40B4-BE49-F238E27FC236}">
-                <a16:creationId xmlns:a16="http://schemas.microsoft.com/office/drawing/2014/main" id="{79702F44-A03C-80FC-8FB0-0826BA42DE86}"/>
-              </a:ext>
-            </a:extLst>
-          </p:cNvPr>
-          <p:cNvSpPr txBox="1"/>
-          <p:nvPr/>
-        </p:nvSpPr>
-        <p:spPr>
-          <a:xfrm>
-            <a:off x="2418950" y="1343051"/>
-            <a:ext cx="3874310" cy="383054"/>
-          </a:xfrm>
-          <a:prstGeom prst="rect">
-            <a:avLst/>
-          </a:prstGeom>
-          <a:noFill/>
-        </p:spPr>
-        <p:txBody>
-          <a:bodyPr wrap="square" lIns="0" tIns="0" rIns="0" bIns="0" rtlCol="0">
-            <a:spAutoFit/>
-          </a:bodyPr>
-          <a:lstStyle/>
-          <a:p>
-            <a:pPr>
-              <a:buSzPct val="100000"/>
-            </a:pPr>
-            <a:r>
-              <a:rPr lang="en-GB" sz="1400" b="1" noProof="0" dirty="0">
-                <a:solidFill>
-                  <a:schemeClr val="tx1">
-                    <a:lumMod val="85000"/>
-                    <a:lumOff val="15000"/>
-                  </a:schemeClr>
-                </a:solidFill>
-                <a:latin typeface="DM Sans" pitchFamily="2" charset="0"/>
-              </a:rPr>
-              <a:t>VISION</a:t>
-            </a:r>
-            <a:endParaRPr lang="en-GB" sz="1200" b="1" noProof="0" dirty="0">
-              <a:solidFill>
-                <a:schemeClr val="tx1">
-                  <a:lumMod val="85000"/>
-                  <a:lumOff val="15000"/>
-                </a:schemeClr>
-              </a:solidFill>
-              <a:latin typeface="DM Sans" pitchFamily="2" charset="0"/>
-            </a:endParaRPr>
-          </a:p>
-          <a:p>
-            <a:pPr>
-              <a:lnSpc>
-                <a:spcPts val="1300"/>
-              </a:lnSpc>
-              <a:buSzPct val="100000"/>
-            </a:pPr>
-            <a:r>
-              <a:rPr lang="en-GB" sz="1200" noProof="0" dirty="0">
-                <a:solidFill>
-                  <a:schemeClr val="tx1">
-                    <a:lumMod val="85000"/>
-                    <a:lumOff val="15000"/>
-                  </a:schemeClr>
-                </a:solidFill>
-                <a:latin typeface="+mj-lt"/>
-              </a:rPr>
-              <a:t>Vision</a:t>
-            </a:r>
-            <a:r>
-              <a:rPr lang="en-GB" sz="1200" b="1" noProof="0" dirty="0">
-                <a:solidFill>
-                  <a:schemeClr val="tx1">
-                    <a:lumMod val="85000"/>
-                    <a:lumOff val="15000"/>
-                  </a:schemeClr>
-                </a:solidFill>
-                <a:latin typeface="+mj-lt"/>
-              </a:rPr>
-              <a:t>, </a:t>
-            </a:r>
-            <a:r>
-              <a:rPr lang="en-GB" sz="1200" noProof="0" dirty="0">
-                <a:solidFill>
-                  <a:schemeClr val="tx1">
-                    <a:lumMod val="85000"/>
-                    <a:lumOff val="15000"/>
-                  </a:schemeClr>
-                </a:solidFill>
-                <a:latin typeface="+mj-lt"/>
-              </a:rPr>
-              <a:t>strategy, values, objectives</a:t>
-            </a:r>
-          </a:p>
-        </p:txBody>
-      </p:sp>
-      <p:sp>
-        <p:nvSpPr>
-          <p:cNvPr id="151" name="Rectangle 150">
-            <a:extLst>
-              <a:ext uri="{FF2B5EF4-FFF2-40B4-BE49-F238E27FC236}">
-                <a16:creationId xmlns:a16="http://schemas.microsoft.com/office/drawing/2014/main" id="{41F7B64D-5435-407E-622F-30D44BB5CD32}"/>
-              </a:ext>
-            </a:extLst>
-          </p:cNvPr>
-          <p:cNvSpPr/>
-          <p:nvPr/>
-        </p:nvSpPr>
-        <p:spPr>
-          <a:xfrm>
-            <a:off x="2271959" y="3028093"/>
-            <a:ext cx="2480582" cy="908874"/>
-          </a:xfrm>
-          <a:prstGeom prst="roundRect">
-            <a:avLst/>
-          </a:prstGeom>
-          <a:noFill/>
-          <a:ln>
-            <a:solidFill>
-              <a:schemeClr val="tx1">
-                <a:lumMod val="85000"/>
-                <a:lumOff val="15000"/>
-              </a:schemeClr>
-            </a:solidFill>
-          </a:ln>
-        </p:spPr>
-        <p:style>
-          <a:lnRef idx="2">
-            <a:schemeClr val="accent1">
-              <a:shade val="15000"/>
-            </a:schemeClr>
-          </a:lnRef>
-          <a:fillRef idx="1">
-            <a:schemeClr val="accent1"/>
-          </a:fillRef>
-          <a:effectRef idx="0">
-            <a:schemeClr val="accent1"/>
-          </a:effectRef>
-          <a:fontRef idx="minor">
-            <a:schemeClr val="lt1"/>
-          </a:fontRef>
-        </p:style>
-        <p:txBody>
-          <a:bodyPr rtlCol="0" anchor="ctr"/>
-          <a:lstStyle/>
-          <a:p>
-            <a:pPr algn="ctr"/>
-            <a:endParaRPr lang="en-GB" noProof="0" dirty="0"/>
-          </a:p>
-        </p:txBody>
-      </p:sp>
-      <p:sp>
-        <p:nvSpPr>
-          <p:cNvPr id="154" name="Rectangle 153">
-            <a:extLst>
-              <a:ext uri="{FF2B5EF4-FFF2-40B4-BE49-F238E27FC236}">
-                <a16:creationId xmlns:a16="http://schemas.microsoft.com/office/drawing/2014/main" id="{D5BBACB4-7591-438A-25EA-79E642E138D4}"/>
-              </a:ext>
-            </a:extLst>
-          </p:cNvPr>
-          <p:cNvSpPr/>
-          <p:nvPr/>
-        </p:nvSpPr>
-        <p:spPr>
-          <a:xfrm>
-            <a:off x="4858848" y="3028093"/>
-            <a:ext cx="2480582" cy="908874"/>
-          </a:xfrm>
-          <a:prstGeom prst="roundRect">
-            <a:avLst/>
-          </a:prstGeom>
-          <a:noFill/>
-          <a:ln>
-            <a:solidFill>
-              <a:schemeClr val="tx1">
-                <a:lumMod val="85000"/>
-                <a:lumOff val="15000"/>
-              </a:schemeClr>
-            </a:solidFill>
-          </a:ln>
-        </p:spPr>
-        <p:style>
-          <a:lnRef idx="2">
-            <a:schemeClr val="accent1">
-              <a:shade val="15000"/>
-            </a:schemeClr>
-          </a:lnRef>
-          <a:fillRef idx="1">
-            <a:schemeClr val="accent1"/>
-          </a:fillRef>
-          <a:effectRef idx="0">
-            <a:schemeClr val="accent1"/>
-          </a:effectRef>
-          <a:fontRef idx="minor">
-            <a:schemeClr val="lt1"/>
-          </a:fontRef>
-        </p:style>
-        <p:txBody>
-          <a:bodyPr rtlCol="0" anchor="ctr"/>
-          <a:lstStyle/>
-          <a:p>
-            <a:pPr algn="ctr"/>
-            <a:endParaRPr lang="en-GB" noProof="0" dirty="0"/>
-          </a:p>
-        </p:txBody>
-      </p:sp>
-      <p:sp>
-        <p:nvSpPr>
-          <p:cNvPr id="156" name="Rectangle 155">
-            <a:extLst>
-              <a:ext uri="{FF2B5EF4-FFF2-40B4-BE49-F238E27FC236}">
-                <a16:creationId xmlns:a16="http://schemas.microsoft.com/office/drawing/2014/main" id="{41A130F9-0930-C628-981A-7758A9ACE534}"/>
-              </a:ext>
-            </a:extLst>
-          </p:cNvPr>
-          <p:cNvSpPr/>
-          <p:nvPr/>
-        </p:nvSpPr>
-        <p:spPr>
-          <a:xfrm>
-            <a:off x="7445738" y="3028093"/>
-            <a:ext cx="2480582" cy="908874"/>
-          </a:xfrm>
-          <a:prstGeom prst="roundRect">
-            <a:avLst/>
-          </a:prstGeom>
-          <a:noFill/>
-          <a:ln>
-            <a:solidFill>
-              <a:schemeClr val="tx1">
-                <a:lumMod val="85000"/>
-                <a:lumOff val="15000"/>
-              </a:schemeClr>
-            </a:solidFill>
-          </a:ln>
-        </p:spPr>
-        <p:style>
-          <a:lnRef idx="2">
-            <a:schemeClr val="accent1">
-              <a:shade val="15000"/>
-            </a:schemeClr>
-          </a:lnRef>
-          <a:fillRef idx="1">
-            <a:schemeClr val="accent1"/>
-          </a:fillRef>
-          <a:effectRef idx="0">
-            <a:schemeClr val="accent1"/>
-          </a:effectRef>
-          <a:fontRef idx="minor">
-            <a:schemeClr val="lt1"/>
-          </a:fontRef>
-        </p:style>
-        <p:txBody>
-          <a:bodyPr rtlCol="0" anchor="ctr"/>
-          <a:lstStyle/>
-          <a:p>
-            <a:pPr algn="ctr"/>
-            <a:endParaRPr lang="en-GB" noProof="0" dirty="0"/>
-          </a:p>
-        </p:txBody>
-      </p:sp>
-      <p:sp>
-        <p:nvSpPr>
-          <p:cNvPr id="152" name="TextBox 151">
-            <a:extLst>
-              <a:ext uri="{FF2B5EF4-FFF2-40B4-BE49-F238E27FC236}">
-                <a16:creationId xmlns:a16="http://schemas.microsoft.com/office/drawing/2014/main" id="{61BC1662-D73D-BAB8-E82C-9675A5C2652B}"/>
-              </a:ext>
-            </a:extLst>
-          </p:cNvPr>
-          <p:cNvSpPr txBox="1"/>
-          <p:nvPr/>
-        </p:nvSpPr>
-        <p:spPr>
-          <a:xfrm>
-            <a:off x="2418949" y="3094599"/>
-            <a:ext cx="2306191" cy="769441"/>
-          </a:xfrm>
-          <a:prstGeom prst="rect">
-            <a:avLst/>
-          </a:prstGeom>
-          <a:noFill/>
-        </p:spPr>
-        <p:txBody>
-          <a:bodyPr wrap="square" lIns="0" tIns="0" rIns="0" bIns="0" rtlCol="0">
-            <a:spAutoFit/>
-          </a:bodyPr>
-          <a:lstStyle/>
-          <a:p>
-            <a:pPr>
-              <a:buSzPct val="100000"/>
-            </a:pPr>
-            <a:r>
-              <a:rPr lang="en-GB" sz="1400" b="1" noProof="0" dirty="0">
-                <a:solidFill>
-                  <a:schemeClr val="tx1">
-                    <a:lumMod val="85000"/>
-                    <a:lumOff val="15000"/>
-                  </a:schemeClr>
-                </a:solidFill>
-                <a:latin typeface="DM Sans" pitchFamily="2" charset="0"/>
-              </a:rPr>
-              <a:t>PEOPLE</a:t>
-            </a:r>
-          </a:p>
-          <a:p>
-            <a:pPr>
-              <a:buSzPct val="100000"/>
-            </a:pPr>
-            <a:r>
-              <a:rPr lang="en-GB" sz="1200" noProof="0" dirty="0">
-                <a:solidFill>
-                  <a:schemeClr val="tx1">
-                    <a:lumMod val="85000"/>
-                    <a:lumOff val="15000"/>
-                  </a:schemeClr>
-                </a:solidFill>
-                <a:latin typeface="+mj-lt"/>
-              </a:rPr>
-              <a:t>Roles, target skills &amp; gaps, org sizing, talent journey, training, team incentives</a:t>
-            </a:r>
-          </a:p>
-        </p:txBody>
-      </p:sp>
-      <p:sp>
-        <p:nvSpPr>
-          <p:cNvPr id="155" name="TextBox 154">
-            <a:extLst>
-              <a:ext uri="{FF2B5EF4-FFF2-40B4-BE49-F238E27FC236}">
-                <a16:creationId xmlns:a16="http://schemas.microsoft.com/office/drawing/2014/main" id="{D6773BBC-2B68-F3FD-662D-3FDFA5E700A0}"/>
-              </a:ext>
-            </a:extLst>
-          </p:cNvPr>
-          <p:cNvSpPr txBox="1"/>
-          <p:nvPr/>
-        </p:nvSpPr>
-        <p:spPr>
-          <a:xfrm>
-            <a:off x="5010186" y="3094599"/>
-            <a:ext cx="2044410" cy="549766"/>
-          </a:xfrm>
-          <a:prstGeom prst="rect">
-            <a:avLst/>
-          </a:prstGeom>
-          <a:noFill/>
-        </p:spPr>
-        <p:txBody>
-          <a:bodyPr wrap="square" lIns="0" tIns="0" rIns="0" bIns="0" rtlCol="0">
-            <a:spAutoFit/>
-          </a:bodyPr>
-          <a:lstStyle/>
-          <a:p>
-            <a:pPr>
-              <a:buSzPct val="100000"/>
-            </a:pPr>
-            <a:r>
-              <a:rPr lang="en-GB" sz="1400" b="1" dirty="0">
-                <a:solidFill>
-                  <a:schemeClr val="tx1">
-                    <a:lumMod val="85000"/>
-                    <a:lumOff val="15000"/>
-                  </a:schemeClr>
-                </a:solidFill>
-                <a:latin typeface="DM Sans" pitchFamily="2" charset="0"/>
-              </a:rPr>
-              <a:t>PROCESS</a:t>
-            </a:r>
-          </a:p>
-          <a:p>
-            <a:pPr>
-              <a:lnSpc>
-                <a:spcPts val="1300"/>
-              </a:lnSpc>
-              <a:buSzPct val="100000"/>
-            </a:pPr>
-            <a:r>
-              <a:rPr lang="en-GB" sz="1200" dirty="0">
-                <a:solidFill>
-                  <a:schemeClr val="tx1">
-                    <a:lumMod val="85000"/>
-                    <a:lumOff val="15000"/>
-                  </a:schemeClr>
-                </a:solidFill>
-                <a:latin typeface="+mj-lt"/>
-              </a:rPr>
-              <a:t>Org. design, cross-functional teams, product way-of-working</a:t>
-            </a:r>
-          </a:p>
-        </p:txBody>
-      </p:sp>
-      <p:sp>
-        <p:nvSpPr>
-          <p:cNvPr id="157" name="TextBox 156">
-            <a:extLst>
-              <a:ext uri="{FF2B5EF4-FFF2-40B4-BE49-F238E27FC236}">
-                <a16:creationId xmlns:a16="http://schemas.microsoft.com/office/drawing/2014/main" id="{8666AC02-3F8E-E754-C3F1-B208CBEF0099}"/>
-              </a:ext>
-            </a:extLst>
-          </p:cNvPr>
-          <p:cNvSpPr txBox="1"/>
-          <p:nvPr/>
-        </p:nvSpPr>
-        <p:spPr>
-          <a:xfrm>
-            <a:off x="7590340" y="3094599"/>
-            <a:ext cx="2050934" cy="518988"/>
-          </a:xfrm>
-          <a:prstGeom prst="rect">
-            <a:avLst/>
-          </a:prstGeom>
-          <a:noFill/>
-        </p:spPr>
-        <p:txBody>
-          <a:bodyPr wrap="square" lIns="0" tIns="0" rIns="0" bIns="0" rtlCol="0">
-            <a:spAutoFit/>
-          </a:bodyPr>
-          <a:lstStyle/>
-          <a:p>
-            <a:pPr>
-              <a:buSzPct val="100000"/>
-            </a:pPr>
-            <a:r>
-              <a:rPr lang="en-GB" sz="1200" b="1" noProof="0" dirty="0">
-                <a:solidFill>
-                  <a:schemeClr val="tx1">
-                    <a:lumMod val="85000"/>
-                    <a:lumOff val="15000"/>
-                  </a:schemeClr>
-                </a:solidFill>
-                <a:latin typeface="DM Sans" pitchFamily="2" charset="0"/>
-              </a:rPr>
-              <a:t>ENABLEMENT</a:t>
-            </a:r>
-          </a:p>
-          <a:p>
-            <a:pPr>
-              <a:lnSpc>
-                <a:spcPts val="1300"/>
-              </a:lnSpc>
-              <a:buSzPct val="100000"/>
-            </a:pPr>
-            <a:r>
-              <a:rPr lang="en-GB" sz="1200" noProof="0" dirty="0">
-                <a:solidFill>
-                  <a:schemeClr val="tx1">
-                    <a:lumMod val="85000"/>
-                    <a:lumOff val="15000"/>
-                  </a:schemeClr>
-                </a:solidFill>
-                <a:latin typeface="+mj-lt"/>
-              </a:rPr>
-              <a:t>Culture, AI &amp; engineering toolbox, automation, agents, skills</a:t>
-            </a:r>
-          </a:p>
-        </p:txBody>
-      </p:sp>
-      <p:sp>
-        <p:nvSpPr>
-          <p:cNvPr id="162" name="Rectangle 161">
-            <a:extLst>
-              <a:ext uri="{FF2B5EF4-FFF2-40B4-BE49-F238E27FC236}">
-                <a16:creationId xmlns:a16="http://schemas.microsoft.com/office/drawing/2014/main" id="{DFE2ED97-2E3F-FA70-0C4E-672C48D375F5}"/>
-              </a:ext>
-            </a:extLst>
-          </p:cNvPr>
-          <p:cNvSpPr/>
-          <p:nvPr/>
-        </p:nvSpPr>
-        <p:spPr>
-          <a:xfrm>
-            <a:off x="2271959" y="4075080"/>
-            <a:ext cx="3771823" cy="908874"/>
-          </a:xfrm>
-          <a:prstGeom prst="roundRect">
-            <a:avLst/>
-          </a:prstGeom>
-          <a:noFill/>
-          <a:ln>
-            <a:solidFill>
-              <a:schemeClr val="tx1">
-                <a:lumMod val="85000"/>
-                <a:lumOff val="15000"/>
-              </a:schemeClr>
-            </a:solidFill>
-          </a:ln>
-        </p:spPr>
-        <p:style>
-          <a:lnRef idx="2">
-            <a:schemeClr val="accent1">
-              <a:shade val="15000"/>
-            </a:schemeClr>
-          </a:lnRef>
-          <a:fillRef idx="1">
-            <a:schemeClr val="accent1"/>
-          </a:fillRef>
-          <a:effectRef idx="0">
-            <a:schemeClr val="accent1"/>
-          </a:effectRef>
-          <a:fontRef idx="minor">
-            <a:schemeClr val="lt1"/>
-          </a:fontRef>
-        </p:style>
-        <p:txBody>
-          <a:bodyPr rtlCol="0" anchor="ctr"/>
-          <a:lstStyle/>
-          <a:p>
-            <a:pPr algn="ctr"/>
-            <a:endParaRPr lang="en-GB" noProof="0" dirty="0"/>
-          </a:p>
-        </p:txBody>
-      </p:sp>
-      <p:sp>
-        <p:nvSpPr>
-          <p:cNvPr id="165" name="Rectangle 164">
-            <a:extLst>
-              <a:ext uri="{FF2B5EF4-FFF2-40B4-BE49-F238E27FC236}">
-                <a16:creationId xmlns:a16="http://schemas.microsoft.com/office/drawing/2014/main" id="{385E0A92-67D8-D588-5217-B92EF10469E0}"/>
-              </a:ext>
-            </a:extLst>
-          </p:cNvPr>
-          <p:cNvSpPr/>
-          <p:nvPr/>
-        </p:nvSpPr>
-        <p:spPr>
-          <a:xfrm>
-            <a:off x="6151970" y="4075080"/>
-            <a:ext cx="3771823" cy="908874"/>
-          </a:xfrm>
-          <a:prstGeom prst="roundRect">
-            <a:avLst/>
-          </a:prstGeom>
-          <a:noFill/>
-          <a:ln>
-            <a:solidFill>
-              <a:schemeClr val="tx1">
-                <a:lumMod val="85000"/>
-                <a:lumOff val="15000"/>
-              </a:schemeClr>
-            </a:solidFill>
-          </a:ln>
-        </p:spPr>
-        <p:style>
-          <a:lnRef idx="2">
-            <a:schemeClr val="accent1">
-              <a:shade val="15000"/>
-            </a:schemeClr>
-          </a:lnRef>
-          <a:fillRef idx="1">
-            <a:schemeClr val="accent1"/>
-          </a:fillRef>
-          <a:effectRef idx="0">
-            <a:schemeClr val="accent1"/>
-          </a:effectRef>
-          <a:fontRef idx="minor">
-            <a:schemeClr val="lt1"/>
-          </a:fontRef>
-        </p:style>
-        <p:txBody>
-          <a:bodyPr rtlCol="0" anchor="ctr"/>
-          <a:lstStyle/>
-          <a:p>
-            <a:pPr algn="ctr"/>
-            <a:endParaRPr lang="en-GB" noProof="0" dirty="0"/>
-          </a:p>
-        </p:txBody>
-      </p:sp>
-      <p:sp>
-        <p:nvSpPr>
-          <p:cNvPr id="163" name="TextBox 162">
-            <a:extLst>
-              <a:ext uri="{FF2B5EF4-FFF2-40B4-BE49-F238E27FC236}">
-                <a16:creationId xmlns:a16="http://schemas.microsoft.com/office/drawing/2014/main" id="{80DC8BB1-3935-E17A-25BB-74A2F1D33D3A}"/>
-              </a:ext>
-            </a:extLst>
-          </p:cNvPr>
-          <p:cNvSpPr txBox="1"/>
-          <p:nvPr/>
-        </p:nvSpPr>
-        <p:spPr>
-          <a:xfrm>
-            <a:off x="2418952" y="4141586"/>
-            <a:ext cx="2792111" cy="556947"/>
-          </a:xfrm>
-          <a:prstGeom prst="rect">
-            <a:avLst/>
-          </a:prstGeom>
-          <a:noFill/>
-        </p:spPr>
-        <p:txBody>
-          <a:bodyPr wrap="square" lIns="0" tIns="0" rIns="0" bIns="0" rtlCol="0">
-            <a:spAutoFit/>
-          </a:bodyPr>
-          <a:lstStyle/>
-          <a:p>
-            <a:pPr>
-              <a:buSzPct val="100000"/>
-            </a:pPr>
-            <a:r>
-              <a:rPr lang="en-GB" sz="1400" b="1" dirty="0">
-                <a:solidFill>
-                  <a:schemeClr val="tx1">
-                    <a:lumMod val="85000"/>
-                    <a:lumOff val="15000"/>
-                  </a:schemeClr>
-                </a:solidFill>
-                <a:latin typeface="DM Sans" pitchFamily="2" charset="0"/>
-              </a:rPr>
-              <a:t>DATA</a:t>
-            </a:r>
-          </a:p>
-          <a:p>
-            <a:pPr>
-              <a:lnSpc>
-                <a:spcPts val="1300"/>
-              </a:lnSpc>
-              <a:buSzPct val="100000"/>
-            </a:pPr>
-            <a:r>
-              <a:rPr lang="en-GB" sz="1200" dirty="0">
-                <a:solidFill>
-                  <a:schemeClr val="tx1">
-                    <a:lumMod val="85000"/>
-                    <a:lumOff val="15000"/>
-                  </a:schemeClr>
-                </a:solidFill>
-                <a:latin typeface="+mj-lt"/>
-              </a:rPr>
-              <a:t>Reusable data products, analytics, architecture, monetization</a:t>
-            </a:r>
-          </a:p>
-        </p:txBody>
-      </p:sp>
-      <p:sp>
-        <p:nvSpPr>
-          <p:cNvPr id="166" name="TextBox 165">
-            <a:extLst>
-              <a:ext uri="{FF2B5EF4-FFF2-40B4-BE49-F238E27FC236}">
-                <a16:creationId xmlns:a16="http://schemas.microsoft.com/office/drawing/2014/main" id="{10166978-2E96-E3A3-95B8-30EF5CAF9525}"/>
-              </a:ext>
-            </a:extLst>
-          </p:cNvPr>
-          <p:cNvSpPr txBox="1"/>
-          <p:nvPr/>
-        </p:nvSpPr>
-        <p:spPr>
-          <a:xfrm>
-            <a:off x="6293260" y="4141586"/>
-            <a:ext cx="2548336" cy="556947"/>
-          </a:xfrm>
-          <a:prstGeom prst="rect">
-            <a:avLst/>
-          </a:prstGeom>
-          <a:noFill/>
-        </p:spPr>
-        <p:txBody>
-          <a:bodyPr wrap="square" lIns="0" tIns="0" rIns="0" bIns="0" rtlCol="0">
-            <a:spAutoFit/>
-          </a:bodyPr>
-          <a:lstStyle/>
-          <a:p>
-            <a:pPr>
-              <a:buSzPct val="100000"/>
-            </a:pPr>
-            <a:r>
-              <a:rPr lang="en-GB" sz="1400" b="1" dirty="0">
-                <a:solidFill>
-                  <a:schemeClr val="tx1">
-                    <a:lumMod val="85000"/>
-                    <a:lumOff val="15000"/>
-                  </a:schemeClr>
-                </a:solidFill>
-                <a:latin typeface="DM Sans" pitchFamily="2" charset="0"/>
-              </a:rPr>
-              <a:t>TECHNOLOGY</a:t>
-            </a:r>
-          </a:p>
-          <a:p>
-            <a:pPr>
-              <a:lnSpc>
-                <a:spcPts val="1300"/>
-              </a:lnSpc>
-              <a:buSzPct val="100000"/>
-            </a:pPr>
-            <a:r>
-              <a:rPr lang="en-GB" sz="1200" dirty="0">
-                <a:solidFill>
-                  <a:schemeClr val="tx1">
-                    <a:lumMod val="85000"/>
-                    <a:lumOff val="15000"/>
-                  </a:schemeClr>
-                </a:solidFill>
-                <a:latin typeface="+mj-lt"/>
-              </a:rPr>
-              <a:t>Target architecture, platforms &amp; solutions, integration </a:t>
-            </a:r>
-          </a:p>
-        </p:txBody>
-      </p:sp>
-      <p:sp>
-        <p:nvSpPr>
-          <p:cNvPr id="140" name="Rectangle 139">
-            <a:extLst>
-              <a:ext uri="{FF2B5EF4-FFF2-40B4-BE49-F238E27FC236}">
-                <a16:creationId xmlns:a16="http://schemas.microsoft.com/office/drawing/2014/main" id="{408780A7-24D1-5FA9-1D03-00F17CEDD27F}"/>
-              </a:ext>
-            </a:extLst>
-          </p:cNvPr>
-          <p:cNvSpPr/>
-          <p:nvPr/>
-        </p:nvSpPr>
-        <p:spPr>
-          <a:xfrm>
-            <a:off x="2271958" y="1981106"/>
-            <a:ext cx="7651834" cy="908874"/>
-          </a:xfrm>
-          <a:prstGeom prst="roundRect">
-            <a:avLst/>
-          </a:prstGeom>
-          <a:noFill/>
-          <a:ln>
-            <a:solidFill>
-              <a:schemeClr val="tx1">
-                <a:lumMod val="85000"/>
-                <a:lumOff val="15000"/>
-              </a:schemeClr>
-            </a:solidFill>
-          </a:ln>
-        </p:spPr>
-        <p:style>
-          <a:lnRef idx="2">
-            <a:schemeClr val="accent1">
-              <a:shade val="15000"/>
-            </a:schemeClr>
-          </a:lnRef>
-          <a:fillRef idx="1">
-            <a:schemeClr val="accent1"/>
-          </a:fillRef>
-          <a:effectRef idx="0">
-            <a:schemeClr val="accent1"/>
-          </a:effectRef>
-          <a:fontRef idx="minor">
-            <a:schemeClr val="lt1"/>
-          </a:fontRef>
-        </p:style>
-        <p:txBody>
-          <a:bodyPr rtlCol="0" anchor="ctr"/>
-          <a:lstStyle/>
-          <a:p>
-            <a:pPr algn="ctr"/>
-            <a:endParaRPr lang="en-GB" noProof="0" dirty="0"/>
-          </a:p>
-        </p:txBody>
-      </p:sp>
-      <p:sp>
-        <p:nvSpPr>
-          <p:cNvPr id="141" name="TextBox 140">
-            <a:extLst>
-              <a:ext uri="{FF2B5EF4-FFF2-40B4-BE49-F238E27FC236}">
-                <a16:creationId xmlns:a16="http://schemas.microsoft.com/office/drawing/2014/main" id="{0F7C620F-BBEE-7637-3EFD-6F8FCA9B7A17}"/>
-              </a:ext>
-            </a:extLst>
-          </p:cNvPr>
-          <p:cNvSpPr txBox="1"/>
-          <p:nvPr/>
-        </p:nvSpPr>
-        <p:spPr>
-          <a:xfrm>
-            <a:off x="2418950" y="2047612"/>
-            <a:ext cx="3874310" cy="549766"/>
-          </a:xfrm>
-          <a:prstGeom prst="rect">
-            <a:avLst/>
-          </a:prstGeom>
-          <a:noFill/>
-        </p:spPr>
-        <p:txBody>
-          <a:bodyPr wrap="square" lIns="0" tIns="0" rIns="0" bIns="0" rtlCol="0">
-            <a:spAutoFit/>
-          </a:bodyPr>
-          <a:lstStyle/>
-          <a:p>
-            <a:pPr>
-              <a:buSzPct val="100000"/>
-            </a:pPr>
-            <a:r>
-              <a:rPr lang="en-GB" sz="1400" b="1" noProof="0" dirty="0">
-                <a:solidFill>
-                  <a:schemeClr val="tx1">
-                    <a:lumMod val="85000"/>
-                    <a:lumOff val="15000"/>
-                  </a:schemeClr>
-                </a:solidFill>
-                <a:latin typeface="DM Sans" pitchFamily="2" charset="0"/>
-              </a:rPr>
-              <a:t>PRODUCTS</a:t>
-            </a:r>
-            <a:r>
               <a:rPr lang="en-GB" sz="1400" noProof="0" dirty="0">
-                <a:solidFill>
-                  <a:schemeClr val="tx1">
-                    <a:lumMod val="85000"/>
-                    <a:lumOff val="15000"/>
-                  </a:schemeClr>
-                </a:solidFill>
-                <a:latin typeface="DM Sans" pitchFamily="2" charset="0"/>
-              </a:rPr>
-              <a:t> -  by business unit</a:t>
-            </a:r>
-          </a:p>
-          <a:p>
-            <a:pPr>
-              <a:lnSpc>
-                <a:spcPts val="1300"/>
-              </a:lnSpc>
-              <a:buSzPct val="100000"/>
-            </a:pPr>
-            <a:r>
-              <a:rPr lang="en-GB" sz="1200" noProof="0" dirty="0">
-                <a:solidFill>
-                  <a:schemeClr val="tx1">
-                    <a:lumMod val="85000"/>
-                    <a:lumOff val="15000"/>
-                  </a:schemeClr>
-                </a:solidFill>
-                <a:latin typeface="+mj-lt"/>
-              </a:rPr>
-              <a:t>Product vision &amp; objectives, products, persona’s, customer journeys, frictions</a:t>
-            </a:r>
-          </a:p>
-        </p:txBody>
-      </p:sp>
-      <p:sp>
-        <p:nvSpPr>
-          <p:cNvPr id="43" name="Rectangle 42">
-            <a:extLst>
-              <a:ext uri="{FF2B5EF4-FFF2-40B4-BE49-F238E27FC236}">
-                <a16:creationId xmlns:a16="http://schemas.microsoft.com/office/drawing/2014/main" id="{E0F4E9CB-0A0E-4690-0FA6-9ED54FEC3B60}"/>
-              </a:ext>
-            </a:extLst>
-          </p:cNvPr>
-          <p:cNvSpPr/>
-          <p:nvPr/>
-        </p:nvSpPr>
-        <p:spPr>
-          <a:xfrm>
-            <a:off x="6857075" y="2084448"/>
-            <a:ext cx="606304" cy="697758"/>
-          </a:xfrm>
-          <a:prstGeom prst="rect">
-            <a:avLst/>
-          </a:prstGeom>
-          <a:solidFill>
-            <a:schemeClr val="tx1">
-              <a:lumMod val="65000"/>
-              <a:lumOff val="35000"/>
-              <a:alpha val="20000"/>
-            </a:schemeClr>
-          </a:solidFill>
-          <a:ln>
-            <a:noFill/>
-          </a:ln>
-        </p:spPr>
-        <p:style>
-          <a:lnRef idx="2">
-            <a:schemeClr val="accent1">
-              <a:shade val="15000"/>
-            </a:schemeClr>
-          </a:lnRef>
-          <a:fillRef idx="1">
-            <a:schemeClr val="accent1"/>
-          </a:fillRef>
-          <a:effectRef idx="0">
-            <a:schemeClr val="accent1"/>
-          </a:effectRef>
-          <a:fontRef idx="minor">
-            <a:schemeClr val="lt1"/>
-          </a:fontRef>
-        </p:style>
-        <p:txBody>
-          <a:bodyPr rtlCol="0" anchor="ctr"/>
-          <a:lstStyle/>
-          <a:p>
-            <a:pPr algn="ctr"/>
-            <a:r>
-              <a:rPr lang="en-GB" sz="1100" noProof="0" dirty="0">
-                <a:solidFill>
-                  <a:schemeClr val="tx1">
-                    <a:lumMod val="85000"/>
-                    <a:lumOff val="15000"/>
-                  </a:schemeClr>
-                </a:solidFill>
-                <a:latin typeface="DM Sans" pitchFamily="2" charset="0"/>
-              </a:rPr>
-              <a:t>BU 1</a:t>
-            </a:r>
-          </a:p>
-        </p:txBody>
-      </p:sp>
-      <p:sp>
-        <p:nvSpPr>
-          <p:cNvPr id="44" name="Rectangle 43">
-            <a:extLst>
-              <a:ext uri="{FF2B5EF4-FFF2-40B4-BE49-F238E27FC236}">
-                <a16:creationId xmlns:a16="http://schemas.microsoft.com/office/drawing/2014/main" id="{BF71C01D-C3EC-7385-38F5-111CD7EAAE7D}"/>
-              </a:ext>
-            </a:extLst>
-          </p:cNvPr>
-          <p:cNvSpPr/>
-          <p:nvPr/>
-        </p:nvSpPr>
-        <p:spPr>
-          <a:xfrm>
-            <a:off x="7543657" y="2084448"/>
-            <a:ext cx="606304" cy="697758"/>
-          </a:xfrm>
-          <a:prstGeom prst="rect">
-            <a:avLst/>
-          </a:prstGeom>
-          <a:solidFill>
-            <a:schemeClr val="tx1">
-              <a:lumMod val="65000"/>
-              <a:lumOff val="35000"/>
-              <a:alpha val="20000"/>
-            </a:schemeClr>
-          </a:solidFill>
-          <a:ln>
-            <a:noFill/>
-          </a:ln>
-        </p:spPr>
-        <p:style>
-          <a:lnRef idx="2">
-            <a:schemeClr val="accent1">
-              <a:shade val="15000"/>
-            </a:schemeClr>
-          </a:lnRef>
-          <a:fillRef idx="1">
-            <a:schemeClr val="accent1"/>
-          </a:fillRef>
-          <a:effectRef idx="0">
-            <a:schemeClr val="accent1"/>
-          </a:effectRef>
-          <a:fontRef idx="minor">
-            <a:schemeClr val="lt1"/>
-          </a:fontRef>
-        </p:style>
-        <p:txBody>
-          <a:bodyPr rtlCol="0" anchor="ctr"/>
-          <a:lstStyle/>
-          <a:p>
-            <a:pPr algn="ctr"/>
-            <a:r>
-              <a:rPr lang="en-GB" sz="1100" noProof="0" dirty="0">
-                <a:solidFill>
-                  <a:schemeClr val="tx1">
-                    <a:lumMod val="85000"/>
-                    <a:lumOff val="15000"/>
-                  </a:schemeClr>
-                </a:solidFill>
-                <a:latin typeface="DM Sans" pitchFamily="2" charset="0"/>
-              </a:rPr>
-              <a:t>BU 2</a:t>
-            </a:r>
-          </a:p>
-        </p:txBody>
-      </p:sp>
-      <p:sp>
-        <p:nvSpPr>
-          <p:cNvPr id="30" name="Rectangle 42">
-            <a:extLst>
-              <a:ext uri="{FF2B5EF4-FFF2-40B4-BE49-F238E27FC236}">
-                <a16:creationId xmlns:a16="http://schemas.microsoft.com/office/drawing/2014/main" id="{7505B10F-04F0-C6AA-EB31-F410AA01EEBA}"/>
-              </a:ext>
-            </a:extLst>
-          </p:cNvPr>
-          <p:cNvSpPr/>
-          <p:nvPr/>
-        </p:nvSpPr>
-        <p:spPr>
-          <a:xfrm>
-            <a:off x="8230239" y="2084448"/>
-            <a:ext cx="606304" cy="697758"/>
-          </a:xfrm>
-          <a:prstGeom prst="rect">
-            <a:avLst/>
-          </a:prstGeom>
-          <a:solidFill>
-            <a:schemeClr val="tx1">
-              <a:lumMod val="65000"/>
-              <a:lumOff val="35000"/>
-              <a:alpha val="20000"/>
-            </a:schemeClr>
-          </a:solidFill>
-          <a:ln>
-            <a:noFill/>
-          </a:ln>
-        </p:spPr>
-        <p:style>
-          <a:lnRef idx="2">
-            <a:schemeClr val="accent1">
-              <a:shade val="15000"/>
-            </a:schemeClr>
-          </a:lnRef>
-          <a:fillRef idx="1">
-            <a:schemeClr val="accent1"/>
-          </a:fillRef>
-          <a:effectRef idx="0">
-            <a:schemeClr val="accent1"/>
-          </a:effectRef>
-          <a:fontRef idx="minor">
-            <a:schemeClr val="lt1"/>
-          </a:fontRef>
-        </p:style>
-        <p:txBody>
-          <a:bodyPr rtlCol="0" anchor="ctr"/>
-          <a:lstStyle/>
-          <a:p>
-            <a:pPr algn="ctr"/>
-            <a:r>
-              <a:rPr lang="en-GB" sz="1100" noProof="0" dirty="0">
-                <a:solidFill>
-                  <a:schemeClr val="tx1">
-                    <a:lumMod val="85000"/>
-                    <a:lumOff val="15000"/>
-                  </a:schemeClr>
-                </a:solidFill>
-                <a:latin typeface="DM Sans" pitchFamily="2" charset="0"/>
-              </a:rPr>
-              <a:t>BU 3</a:t>
-            </a:r>
-          </a:p>
-        </p:txBody>
-      </p:sp>
-      <p:sp>
-        <p:nvSpPr>
-          <p:cNvPr id="32" name="Rectangle 43">
-            <a:extLst>
-              <a:ext uri="{FF2B5EF4-FFF2-40B4-BE49-F238E27FC236}">
-                <a16:creationId xmlns:a16="http://schemas.microsoft.com/office/drawing/2014/main" id="{4109848C-6F06-818E-FE0D-EF820C4C18F5}"/>
-              </a:ext>
-            </a:extLst>
-          </p:cNvPr>
-          <p:cNvSpPr/>
-          <p:nvPr/>
-        </p:nvSpPr>
-        <p:spPr>
-          <a:xfrm>
-            <a:off x="8916822" y="2084448"/>
-            <a:ext cx="606304" cy="697758"/>
-          </a:xfrm>
-          <a:prstGeom prst="rect">
-            <a:avLst/>
-          </a:prstGeom>
-          <a:solidFill>
-            <a:schemeClr val="tx1">
-              <a:lumMod val="65000"/>
-              <a:lumOff val="35000"/>
-              <a:alpha val="20000"/>
-            </a:schemeClr>
-          </a:solidFill>
-          <a:ln>
-            <a:noFill/>
-          </a:ln>
-        </p:spPr>
-        <p:style>
-          <a:lnRef idx="2">
-            <a:schemeClr val="accent1">
-              <a:shade val="15000"/>
-            </a:schemeClr>
-          </a:lnRef>
-          <a:fillRef idx="1">
-            <a:schemeClr val="accent1"/>
-          </a:fillRef>
-          <a:effectRef idx="0">
-            <a:schemeClr val="accent1"/>
-          </a:effectRef>
-          <a:fontRef idx="minor">
-            <a:schemeClr val="lt1"/>
-          </a:fontRef>
-        </p:style>
-        <p:txBody>
-          <a:bodyPr rtlCol="0" anchor="ctr"/>
-          <a:lstStyle/>
-          <a:p>
-            <a:pPr algn="ctr"/>
-            <a:r>
-              <a:rPr lang="en-GB" sz="1100" noProof="0" dirty="0">
                 <a:solidFill>
                   <a:schemeClr val="tx1">
                     <a:lumMod val="85000"/>
@@ -9818,7 +8333,7 @@
 </p:sld>
 </file>
 
-<file path=ppt/slides/slide5.xml><?xml version="1.0" encoding="utf-8"?>
+<file path=ppt/slides/slide4.xml><?xml version="1.0" encoding="utf-8"?>
 <p:sld xmlns:a="http://schemas.openxmlformats.org/drawingml/2006/main" xmlns:r="http://schemas.openxmlformats.org/officeDocument/2006/relationships" xmlns:p="http://schemas.openxmlformats.org/presentationml/2006/main">
   <p:cSld>
     <p:spTree>
@@ -9855,8 +8370,8 @@
         </p:nvSpPr>
         <p:spPr>
           <a:xfrm>
-            <a:off x="1947041" y="409251"/>
-            <a:ext cx="8442435" cy="4690889"/>
+            <a:off x="2245360" y="409251"/>
+            <a:ext cx="7711440" cy="4690889"/>
           </a:xfrm>
           <a:prstGeom prst="rect">
             <a:avLst/>
@@ -10022,7 +8537,7 @@
 </p:sld>
 </file>
 
-<file path=ppt/slides/slide6.xml><?xml version="1.0" encoding="utf-8"?>
+<file path=ppt/slides/slide5.xml><?xml version="1.0" encoding="utf-8"?>
 <p:sld xmlns:a="http://schemas.openxmlformats.org/drawingml/2006/main" xmlns:r="http://schemas.openxmlformats.org/officeDocument/2006/relationships" xmlns:p="http://schemas.openxmlformats.org/presentationml/2006/main">
   <p:cSld>
     <p:spTree>
@@ -10047,10 +8562,10 @@
       </p:grpSpPr>
       <p:sp>
         <p:nvSpPr>
-          <p:cNvPr id="4" name="Rechthoek 3">
-            <a:extLst>
-              <a:ext uri="{FF2B5EF4-FFF2-40B4-BE49-F238E27FC236}">
-                <a16:creationId xmlns:a16="http://schemas.microsoft.com/office/drawing/2014/main" id="{23AC4A82-0A20-9F5E-64D7-347D2ECEB82B}"/>
+          <p:cNvPr id="2" name="Rechthoek 1">
+            <a:extLst>
+              <a:ext uri="{FF2B5EF4-FFF2-40B4-BE49-F238E27FC236}">
+                <a16:creationId xmlns:a16="http://schemas.microsoft.com/office/drawing/2014/main" id="{85570DD6-ECE8-813D-71E2-A6B55B81A1B5}"/>
               </a:ext>
             </a:extLst>
           </p:cNvPr>
@@ -10059,8 +8574,8 @@
         </p:nvSpPr>
         <p:spPr>
           <a:xfrm>
-            <a:off x="1874783" y="409251"/>
-            <a:ext cx="8442435" cy="3169521"/>
+            <a:off x="2103120" y="409251"/>
+            <a:ext cx="8006080" cy="3847789"/>
           </a:xfrm>
           <a:prstGeom prst="rect">
             <a:avLst/>
@@ -10093,7 +8608,7 @@
           <a:lstStyle/>
           <a:p>
             <a:pPr algn="ctr"/>
-            <a:endParaRPr lang="en-GB"/>
+            <a:endParaRPr lang="en-GB" dirty="0"/>
           </a:p>
         </p:txBody>
       </p:sp>
@@ -10140,372 +8655,562 @@
           </a:p>
         </p:txBody>
       </p:sp>
-      <p:sp>
-        <p:nvSpPr>
-          <p:cNvPr id="9" name="Rechthoek: afgeronde hoeken 8">
-            <a:extLst>
-              <a:ext uri="{FF2B5EF4-FFF2-40B4-BE49-F238E27FC236}">
-                <a16:creationId xmlns:a16="http://schemas.microsoft.com/office/drawing/2014/main" id="{B4DE75BE-CD72-7D3D-1ADD-83A938D0CF06}"/>
-              </a:ext>
-            </a:extLst>
-          </p:cNvPr>
-          <p:cNvSpPr/>
+      <p:grpSp>
+        <p:nvGrpSpPr>
+          <p:cNvPr id="8" name="Groep 7">
+            <a:extLst>
+              <a:ext uri="{FF2B5EF4-FFF2-40B4-BE49-F238E27FC236}">
+                <a16:creationId xmlns:a16="http://schemas.microsoft.com/office/drawing/2014/main" id="{8E27219E-BAE6-EC08-ACC2-6522DFDED5CF}"/>
+              </a:ext>
+            </a:extLst>
+          </p:cNvPr>
+          <p:cNvGrpSpPr/>
           <p:nvPr/>
-        </p:nvSpPr>
-        <p:spPr>
+        </p:nvGrpSpPr>
+        <p:grpSpPr>
           <a:xfrm>
-            <a:off x="2115749" y="2111331"/>
-            <a:ext cx="2252361" cy="1068750"/>
+            <a:off x="2134835" y="1596283"/>
+            <a:ext cx="7922331" cy="2315318"/>
+            <a:chOff x="2115749" y="1596283"/>
+            <a:chExt cx="7922331" cy="2315318"/>
           </a:xfrm>
-          <a:prstGeom prst="roundRect">
-            <a:avLst/>
-          </a:prstGeom>
-          <a:solidFill>
-            <a:srgbClr val="FFFFFF"/>
-          </a:solidFill>
-          <a:ln w="12700">
-            <a:solidFill>
-              <a:schemeClr val="tx1">
-                <a:lumMod val="85000"/>
-                <a:lumOff val="15000"/>
-              </a:schemeClr>
-            </a:solidFill>
-          </a:ln>
-        </p:spPr>
-        <p:txBody>
-          <a:bodyPr wrap="square" tIns="90000" anchor="ctr" anchorCtr="1">
-            <a:noAutofit/>
-          </a:bodyPr>
-          <a:lstStyle/>
-          <a:p>
-            <a:pPr algn="ctr">
-              <a:lnSpc>
-                <a:spcPts val="1300"/>
-              </a:lnSpc>
-              <a:buNone/>
-            </a:pPr>
-            <a:r>
-              <a:rPr lang="en-GB" sz="1200" noProof="0" dirty="0">
+        </p:grpSpPr>
+        <p:grpSp>
+          <p:nvGrpSpPr>
+            <p:cNvPr id="6" name="Groep 5">
+              <a:extLst>
+                <a:ext uri="{FF2B5EF4-FFF2-40B4-BE49-F238E27FC236}">
+                  <a16:creationId xmlns:a16="http://schemas.microsoft.com/office/drawing/2014/main" id="{3920A64C-4B42-386C-70E7-EE599C6CBC57}"/>
+                </a:ext>
+              </a:extLst>
+            </p:cNvPr>
+            <p:cNvGrpSpPr/>
+            <p:nvPr/>
+          </p:nvGrpSpPr>
+          <p:grpSpPr>
+            <a:xfrm>
+              <a:off x="2115749" y="1596283"/>
+              <a:ext cx="2580639" cy="2315318"/>
+              <a:chOff x="2115749" y="1596283"/>
+              <a:chExt cx="2618811" cy="2315318"/>
+            </a:xfrm>
+          </p:grpSpPr>
+          <p:sp>
+            <p:nvSpPr>
+              <p:cNvPr id="9" name="Rechthoek: afgeronde hoeken 8">
+                <a:extLst>
+                  <a:ext uri="{FF2B5EF4-FFF2-40B4-BE49-F238E27FC236}">
+                    <a16:creationId xmlns:a16="http://schemas.microsoft.com/office/drawing/2014/main" id="{B4DE75BE-CD72-7D3D-1ADD-83A938D0CF06}"/>
+                  </a:ext>
+                </a:extLst>
+              </p:cNvPr>
+              <p:cNvSpPr/>
+              <p:nvPr/>
+            </p:nvSpPr>
+            <p:spPr>
+              <a:xfrm>
+                <a:off x="2115749" y="2121491"/>
+                <a:ext cx="2618811" cy="1790110"/>
+              </a:xfrm>
+              <a:prstGeom prst="roundRect">
+                <a:avLst/>
+              </a:prstGeom>
+              <a:solidFill>
+                <a:srgbClr val="FFFFFF"/>
+              </a:solidFill>
+              <a:ln w="12700">
                 <a:solidFill>
                   <a:schemeClr val="tx1">
                     <a:lumMod val="85000"/>
                     <a:lumOff val="15000"/>
                   </a:schemeClr>
                 </a:solidFill>
-                <a:latin typeface="+mj-lt"/>
-              </a:rPr>
-              <a:t>Where does this initiative create measurable business value? </a:t>
-            </a:r>
-            <a:r>
-              <a:rPr lang="en-GB" sz="1200" i="1" noProof="0" dirty="0">
+              </a:ln>
+            </p:spPr>
+            <p:txBody>
+              <a:bodyPr wrap="square" lIns="36000" tIns="90000" rIns="36000" anchor="ctr" anchorCtr="1">
+                <a:noAutofit/>
+              </a:bodyPr>
+              <a:lstStyle/>
+              <a:p>
+                <a:pPr algn="ctr">
+                  <a:buNone/>
+                </a:pPr>
+                <a:r>
+                  <a:rPr lang="en-GB" sz="1400" noProof="0" dirty="0">
+                    <a:solidFill>
+                      <a:schemeClr val="tx1">
+                        <a:lumMod val="85000"/>
+                        <a:lumOff val="15000"/>
+                      </a:schemeClr>
+                    </a:solidFill>
+                    <a:latin typeface="+mj-lt"/>
+                  </a:rPr>
+                  <a:t>Where does this initiative create measurable business value? </a:t>
+                </a:r>
+                <a:br>
+                  <a:rPr lang="en-GB" sz="1400" noProof="0" dirty="0">
+                    <a:solidFill>
+                      <a:schemeClr val="tx1">
+                        <a:lumMod val="85000"/>
+                        <a:lumOff val="15000"/>
+                      </a:schemeClr>
+                    </a:solidFill>
+                    <a:latin typeface="+mj-lt"/>
+                  </a:rPr>
+                </a:br>
+                <a:r>
+                  <a:rPr lang="en-GB" sz="1400" noProof="0" dirty="0">
+                    <a:solidFill>
+                      <a:schemeClr val="tx1">
+                        <a:lumMod val="85000"/>
+                        <a:lumOff val="15000"/>
+                      </a:schemeClr>
+                    </a:solidFill>
+                    <a:latin typeface="+mj-lt"/>
+                  </a:rPr>
+                  <a:t>(</a:t>
+                </a:r>
+                <a:r>
+                  <a:rPr lang="en-GB" sz="1400" i="1" dirty="0">
+                    <a:solidFill>
+                      <a:schemeClr val="tx1">
+                        <a:lumMod val="85000"/>
+                        <a:lumOff val="15000"/>
+                      </a:schemeClr>
+                    </a:solidFill>
+                    <a:latin typeface="+mj-lt"/>
+                  </a:rPr>
+                  <a:t>R</a:t>
+                </a:r>
+                <a:r>
+                  <a:rPr lang="en-GB" sz="1400" i="1" noProof="0" dirty="0" err="1">
+                    <a:solidFill>
+                      <a:schemeClr val="tx1">
+                        <a:lumMod val="85000"/>
+                        <a:lumOff val="15000"/>
+                      </a:schemeClr>
+                    </a:solidFill>
+                    <a:latin typeface="+mj-lt"/>
+                  </a:rPr>
+                  <a:t>evenue</a:t>
+                </a:r>
+                <a:r>
+                  <a:rPr lang="en-GB" sz="1400" i="1" noProof="0" dirty="0">
+                    <a:solidFill>
+                      <a:schemeClr val="tx1">
+                        <a:lumMod val="85000"/>
+                        <a:lumOff val="15000"/>
+                      </a:schemeClr>
+                    </a:solidFill>
+                    <a:latin typeface="+mj-lt"/>
+                  </a:rPr>
+                  <a:t>, efficiency, risk reduction, strategic capability)</a:t>
+                </a:r>
+              </a:p>
+            </p:txBody>
+          </p:sp>
+          <p:sp>
+            <p:nvSpPr>
+              <p:cNvPr id="11" name="Rechthoek: afgeronde hoeken 10">
+                <a:extLst>
+                  <a:ext uri="{FF2B5EF4-FFF2-40B4-BE49-F238E27FC236}">
+                    <a16:creationId xmlns:a16="http://schemas.microsoft.com/office/drawing/2014/main" id="{4920BE2D-5A12-899D-BEE5-5785EE182E48}"/>
+                  </a:ext>
+                </a:extLst>
+              </p:cNvPr>
+              <p:cNvSpPr/>
+              <p:nvPr/>
+            </p:nvSpPr>
+            <p:spPr>
+              <a:xfrm>
+                <a:off x="2384236" y="1596283"/>
+                <a:ext cx="2081837" cy="626416"/>
+              </a:xfrm>
+              <a:prstGeom prst="roundRect">
+                <a:avLst/>
+              </a:prstGeom>
+              <a:solidFill>
+                <a:schemeClr val="tx1">
+                  <a:lumMod val="85000"/>
+                  <a:lumOff val="15000"/>
+                </a:schemeClr>
+              </a:solidFill>
+              <a:ln>
+                <a:noFill/>
+              </a:ln>
+            </p:spPr>
+            <p:txBody>
+              <a:bodyPr lIns="36000" rIns="36000" anchor="ctr" anchorCtr="1">
+                <a:normAutofit/>
+              </a:bodyPr>
+              <a:lstStyle/>
+              <a:p>
+                <a:pPr algn="ctr">
+                  <a:buNone/>
+                </a:pPr>
+                <a:r>
+                  <a:rPr lang="en-GB" sz="1400" b="1" noProof="0" dirty="0">
+                    <a:solidFill>
+                      <a:srgbClr val="FFFFFF"/>
+                    </a:solidFill>
+                    <a:latin typeface="DM Sans" pitchFamily="2" charset="0"/>
+                  </a:rPr>
+                  <a:t>VALUE</a:t>
+                </a:r>
+              </a:p>
+            </p:txBody>
+          </p:sp>
+        </p:grpSp>
+        <p:grpSp>
+          <p:nvGrpSpPr>
+            <p:cNvPr id="7" name="Groep 6">
+              <a:extLst>
+                <a:ext uri="{FF2B5EF4-FFF2-40B4-BE49-F238E27FC236}">
+                  <a16:creationId xmlns:a16="http://schemas.microsoft.com/office/drawing/2014/main" id="{6211F9D1-B851-E331-EF70-DBE7D55329BD}"/>
+                </a:ext>
+              </a:extLst>
+            </p:cNvPr>
+            <p:cNvGrpSpPr/>
+            <p:nvPr/>
+          </p:nvGrpSpPr>
+          <p:grpSpPr>
+            <a:xfrm>
+              <a:off x="7457441" y="1596283"/>
+              <a:ext cx="2580639" cy="2315318"/>
+              <a:chOff x="7457441" y="1596283"/>
+              <a:chExt cx="2618811" cy="2315318"/>
+            </a:xfrm>
+          </p:grpSpPr>
+          <p:sp>
+            <p:nvSpPr>
+              <p:cNvPr id="14" name="Rechthoek: afgeronde hoeken 13">
+                <a:extLst>
+                  <a:ext uri="{FF2B5EF4-FFF2-40B4-BE49-F238E27FC236}">
+                    <a16:creationId xmlns:a16="http://schemas.microsoft.com/office/drawing/2014/main" id="{A1A90501-E13B-0DB0-9669-99A86F87A9DE}"/>
+                  </a:ext>
+                </a:extLst>
+              </p:cNvPr>
+              <p:cNvSpPr/>
+              <p:nvPr/>
+            </p:nvSpPr>
+            <p:spPr>
+              <a:xfrm>
+                <a:off x="7457441" y="2121491"/>
+                <a:ext cx="2618811" cy="1790110"/>
+              </a:xfrm>
+              <a:prstGeom prst="roundRect">
+                <a:avLst/>
+              </a:prstGeom>
+              <a:solidFill>
+                <a:srgbClr val="FFFFFF"/>
+              </a:solidFill>
+              <a:ln w="12700">
                 <a:solidFill>
                   <a:schemeClr val="tx1">
                     <a:lumMod val="85000"/>
                     <a:lumOff val="15000"/>
                   </a:schemeClr>
                 </a:solidFill>
-                <a:latin typeface="+mj-lt"/>
-              </a:rPr>
-              <a:t>(Efficiency, revenue, risk reduction, strategic capability)</a:t>
-            </a:r>
-          </a:p>
-        </p:txBody>
-      </p:sp>
-      <p:sp>
-        <p:nvSpPr>
-          <p:cNvPr id="11" name="Rechthoek: afgeronde hoeken 10">
-            <a:extLst>
-              <a:ext uri="{FF2B5EF4-FFF2-40B4-BE49-F238E27FC236}">
-                <a16:creationId xmlns:a16="http://schemas.microsoft.com/office/drawing/2014/main" id="{4920BE2D-5A12-899D-BEE5-5785EE182E48}"/>
-              </a:ext>
-            </a:extLst>
-          </p:cNvPr>
-          <p:cNvSpPr/>
-          <p:nvPr/>
-        </p:nvSpPr>
-        <p:spPr>
-          <a:xfrm>
-            <a:off x="2346667" y="1596283"/>
-            <a:ext cx="1790526" cy="626416"/>
-          </a:xfrm>
-          <a:prstGeom prst="roundRect">
-            <a:avLst/>
-          </a:prstGeom>
-          <a:solidFill>
-            <a:schemeClr val="tx1">
-              <a:lumMod val="85000"/>
-              <a:lumOff val="15000"/>
-            </a:schemeClr>
-          </a:solidFill>
-          <a:ln>
-            <a:noFill/>
-          </a:ln>
-        </p:spPr>
-        <p:txBody>
-          <a:bodyPr anchor="ctr" anchorCtr="1">
-            <a:normAutofit/>
-          </a:bodyPr>
-          <a:lstStyle/>
-          <a:p>
-            <a:pPr algn="ctr">
-              <a:buNone/>
-            </a:pPr>
-            <a:r>
-              <a:rPr lang="en-GB" sz="1400" b="1" noProof="0" dirty="0">
-                <a:solidFill>
-                  <a:srgbClr val="FFFFFF"/>
-                </a:solidFill>
-                <a:latin typeface="DM Sans" pitchFamily="2" charset="0"/>
-              </a:rPr>
-              <a:t>VALUE</a:t>
-            </a:r>
-          </a:p>
-        </p:txBody>
-      </p:sp>
-      <p:sp>
-        <p:nvSpPr>
-          <p:cNvPr id="14" name="Rechthoek: afgeronde hoeken 13">
-            <a:extLst>
-              <a:ext uri="{FF2B5EF4-FFF2-40B4-BE49-F238E27FC236}">
-                <a16:creationId xmlns:a16="http://schemas.microsoft.com/office/drawing/2014/main" id="{A1A90501-E13B-0DB0-9669-99A86F87A9DE}"/>
-              </a:ext>
-            </a:extLst>
-          </p:cNvPr>
-          <p:cNvSpPr/>
-          <p:nvPr/>
-        </p:nvSpPr>
-        <p:spPr>
-          <a:xfrm>
-            <a:off x="7823889" y="2111331"/>
-            <a:ext cx="2252361" cy="1068750"/>
-          </a:xfrm>
-          <a:prstGeom prst="roundRect">
-            <a:avLst/>
-          </a:prstGeom>
-          <a:solidFill>
-            <a:srgbClr val="FFFFFF"/>
-          </a:solidFill>
-          <a:ln w="12700">
-            <a:solidFill>
-              <a:schemeClr val="tx1">
-                <a:lumMod val="85000"/>
-                <a:lumOff val="15000"/>
-              </a:schemeClr>
-            </a:solidFill>
-          </a:ln>
-        </p:spPr>
-        <p:txBody>
-          <a:bodyPr wrap="square" tIns="90000" anchor="ctr" anchorCtr="1">
-            <a:noAutofit/>
-          </a:bodyPr>
-          <a:lstStyle/>
-          <a:p>
-            <a:pPr algn="ctr">
-              <a:lnSpc>
-                <a:spcPts val="1300"/>
-              </a:lnSpc>
-              <a:buNone/>
-            </a:pPr>
-            <a:r>
-              <a:rPr lang="en-GB" sz="1200" noProof="0" dirty="0">
+              </a:ln>
+            </p:spPr>
+            <p:txBody>
+              <a:bodyPr wrap="square" lIns="36000" tIns="90000" rIns="36000" anchor="ctr" anchorCtr="1">
+                <a:noAutofit/>
+              </a:bodyPr>
+              <a:lstStyle/>
+              <a:p>
+                <a:pPr algn="ctr">
+                  <a:buNone/>
+                </a:pPr>
+                <a:r>
+                  <a:rPr lang="en-GB" sz="1400" noProof="0" dirty="0">
+                    <a:solidFill>
+                      <a:schemeClr val="tx1">
+                        <a:lumMod val="85000"/>
+                        <a:lumOff val="15000"/>
+                      </a:schemeClr>
+                    </a:solidFill>
+                    <a:latin typeface="+mj-lt"/>
+                  </a:rPr>
+                  <a:t>How can the organisation </a:t>
+                </a:r>
+                <a:br>
+                  <a:rPr lang="en-GB" sz="1400" noProof="0" dirty="0">
+                    <a:solidFill>
+                      <a:schemeClr val="tx1">
+                        <a:lumMod val="85000"/>
+                        <a:lumOff val="15000"/>
+                      </a:schemeClr>
+                    </a:solidFill>
+                    <a:latin typeface="+mj-lt"/>
+                  </a:rPr>
+                </a:br>
+                <a:r>
+                  <a:rPr lang="en-GB" sz="1400" noProof="0" dirty="0">
+                    <a:solidFill>
+                      <a:schemeClr val="tx1">
+                        <a:lumMod val="85000"/>
+                        <a:lumOff val="15000"/>
+                      </a:schemeClr>
+                    </a:solidFill>
+                    <a:latin typeface="+mj-lt"/>
+                  </a:rPr>
+                  <a:t>govern it responsibly? </a:t>
+                </a:r>
+                <a:br>
+                  <a:rPr lang="en-GB" sz="1400" noProof="0" dirty="0">
+                    <a:solidFill>
+                      <a:schemeClr val="tx1">
+                        <a:lumMod val="85000"/>
+                        <a:lumOff val="15000"/>
+                      </a:schemeClr>
+                    </a:solidFill>
+                    <a:latin typeface="+mj-lt"/>
+                  </a:rPr>
+                </a:br>
+                <a:r>
+                  <a:rPr lang="en-GB" sz="1400" i="1" noProof="0" dirty="0">
+                    <a:solidFill>
+                      <a:schemeClr val="tx1">
+                        <a:lumMod val="85000"/>
+                        <a:lumOff val="15000"/>
+                      </a:schemeClr>
+                    </a:solidFill>
+                    <a:latin typeface="+mj-lt"/>
+                  </a:rPr>
+                  <a:t>(Compliance, user trust, employee trust)</a:t>
+                </a:r>
+              </a:p>
+            </p:txBody>
+          </p:sp>
+          <p:sp>
+            <p:nvSpPr>
+              <p:cNvPr id="16" name="Rechthoek: afgeronde hoeken 15">
+                <a:extLst>
+                  <a:ext uri="{FF2B5EF4-FFF2-40B4-BE49-F238E27FC236}">
+                    <a16:creationId xmlns:a16="http://schemas.microsoft.com/office/drawing/2014/main" id="{91168AC0-0B49-DB65-E01C-43316040FEF1}"/>
+                  </a:ext>
+                </a:extLst>
+              </p:cNvPr>
+              <p:cNvSpPr/>
+              <p:nvPr/>
+            </p:nvSpPr>
+            <p:spPr>
+              <a:xfrm>
+                <a:off x="7725928" y="1596283"/>
+                <a:ext cx="2081837" cy="626416"/>
+              </a:xfrm>
+              <a:prstGeom prst="roundRect">
+                <a:avLst/>
+              </a:prstGeom>
+              <a:solidFill>
+                <a:schemeClr val="tx1">
+                  <a:lumMod val="85000"/>
+                  <a:lumOff val="15000"/>
+                </a:schemeClr>
+              </a:solidFill>
+              <a:ln>
+                <a:noFill/>
+              </a:ln>
+            </p:spPr>
+            <p:txBody>
+              <a:bodyPr lIns="36000" rIns="36000" anchor="ctr" anchorCtr="1">
+                <a:normAutofit/>
+              </a:bodyPr>
+              <a:lstStyle/>
+              <a:p>
+                <a:pPr algn="ctr">
+                  <a:buNone/>
+                </a:pPr>
+                <a:r>
+                  <a:rPr lang="en-GB" sz="1400" b="1" noProof="0" dirty="0">
+                    <a:solidFill>
+                      <a:srgbClr val="FFFFFF"/>
+                    </a:solidFill>
+                    <a:latin typeface="DM Sans" pitchFamily="2" charset="0"/>
+                  </a:rPr>
+                  <a:t>TRUST</a:t>
+                </a:r>
+              </a:p>
+            </p:txBody>
+          </p:sp>
+        </p:grpSp>
+        <p:grpSp>
+          <p:nvGrpSpPr>
+            <p:cNvPr id="5" name="Groep 4">
+              <a:extLst>
+                <a:ext uri="{FF2B5EF4-FFF2-40B4-BE49-F238E27FC236}">
+                  <a16:creationId xmlns:a16="http://schemas.microsoft.com/office/drawing/2014/main" id="{22798BCB-43E5-8C6B-D7E0-BA2BE8E94962}"/>
+                </a:ext>
+              </a:extLst>
+            </p:cNvPr>
+            <p:cNvGrpSpPr/>
+            <p:nvPr/>
+          </p:nvGrpSpPr>
+          <p:grpSpPr>
+            <a:xfrm>
+              <a:off x="4786595" y="1596283"/>
+              <a:ext cx="2580639" cy="2315318"/>
+              <a:chOff x="4838631" y="1596283"/>
+              <a:chExt cx="2618811" cy="2315318"/>
+            </a:xfrm>
+          </p:grpSpPr>
+          <p:sp>
+            <p:nvSpPr>
+              <p:cNvPr id="18" name="Rechthoek: afgeronde hoeken 17">
+                <a:extLst>
+                  <a:ext uri="{FF2B5EF4-FFF2-40B4-BE49-F238E27FC236}">
+                    <a16:creationId xmlns:a16="http://schemas.microsoft.com/office/drawing/2014/main" id="{EB153662-B3A8-884C-9C7A-69E6E91AEA4C}"/>
+                  </a:ext>
+                </a:extLst>
+              </p:cNvPr>
+              <p:cNvSpPr/>
+              <p:nvPr/>
+            </p:nvSpPr>
+            <p:spPr>
+              <a:xfrm>
+                <a:off x="4838631" y="2121491"/>
+                <a:ext cx="2618811" cy="1790110"/>
+              </a:xfrm>
+              <a:prstGeom prst="roundRect">
+                <a:avLst/>
+              </a:prstGeom>
+              <a:solidFill>
+                <a:srgbClr val="FFFFFF"/>
+              </a:solidFill>
+              <a:ln w="12700">
                 <a:solidFill>
                   <a:schemeClr val="tx1">
                     <a:lumMod val="85000"/>
                     <a:lumOff val="15000"/>
                   </a:schemeClr>
                 </a:solidFill>
-                <a:latin typeface="+mj-lt"/>
-              </a:rPr>
-              <a:t>How can the organisation govern it responsibly? </a:t>
-            </a:r>
-            <a:r>
-              <a:rPr lang="en-GB" sz="1200" i="1" noProof="0" dirty="0">
-                <a:solidFill>
-                  <a:schemeClr val="tx1">
-                    <a:lumMod val="85000"/>
-                    <a:lumOff val="15000"/>
-                  </a:schemeClr>
-                </a:solidFill>
-                <a:latin typeface="+mj-lt"/>
-              </a:rPr>
-              <a:t>(Compliance, user trust, employee trust)</a:t>
-            </a:r>
-          </a:p>
-        </p:txBody>
-      </p:sp>
-      <p:sp>
-        <p:nvSpPr>
-          <p:cNvPr id="16" name="Rechthoek: afgeronde hoeken 15">
-            <a:extLst>
-              <a:ext uri="{FF2B5EF4-FFF2-40B4-BE49-F238E27FC236}">
-                <a16:creationId xmlns:a16="http://schemas.microsoft.com/office/drawing/2014/main" id="{91168AC0-0B49-DB65-E01C-43316040FEF1}"/>
-              </a:ext>
-            </a:extLst>
-          </p:cNvPr>
-          <p:cNvSpPr/>
-          <p:nvPr/>
-        </p:nvSpPr>
-        <p:spPr>
-          <a:xfrm>
-            <a:off x="8054807" y="1596283"/>
-            <a:ext cx="1790526" cy="626416"/>
-          </a:xfrm>
-          <a:prstGeom prst="roundRect">
-            <a:avLst/>
-          </a:prstGeom>
-          <a:solidFill>
-            <a:schemeClr val="tx1">
-              <a:lumMod val="85000"/>
-              <a:lumOff val="15000"/>
-            </a:schemeClr>
-          </a:solidFill>
-          <a:ln>
-            <a:noFill/>
-          </a:ln>
-        </p:spPr>
-        <p:txBody>
-          <a:bodyPr anchor="ctr" anchorCtr="1">
-            <a:normAutofit/>
-          </a:bodyPr>
-          <a:lstStyle/>
-          <a:p>
-            <a:pPr algn="ctr">
-              <a:buNone/>
-            </a:pPr>
-            <a:r>
-              <a:rPr lang="en-GB" sz="1400" b="1" noProof="0" dirty="0">
-                <a:solidFill>
-                  <a:srgbClr val="FFFFFF"/>
-                </a:solidFill>
-                <a:latin typeface="DM Sans" pitchFamily="2" charset="0"/>
-              </a:rPr>
-              <a:t>TRUST</a:t>
-            </a:r>
-          </a:p>
-        </p:txBody>
-      </p:sp>
-      <p:sp>
-        <p:nvSpPr>
-          <p:cNvPr id="18" name="Rechthoek: afgeronde hoeken 17">
-            <a:extLst>
-              <a:ext uri="{FF2B5EF4-FFF2-40B4-BE49-F238E27FC236}">
-                <a16:creationId xmlns:a16="http://schemas.microsoft.com/office/drawing/2014/main" id="{EB153662-B3A8-884C-9C7A-69E6E91AEA4C}"/>
-              </a:ext>
-            </a:extLst>
-          </p:cNvPr>
-          <p:cNvSpPr/>
-          <p:nvPr/>
-        </p:nvSpPr>
-        <p:spPr>
-          <a:xfrm>
-            <a:off x="4969819" y="2111331"/>
-            <a:ext cx="2252361" cy="1068750"/>
-          </a:xfrm>
-          <a:prstGeom prst="roundRect">
-            <a:avLst/>
-          </a:prstGeom>
-          <a:solidFill>
-            <a:srgbClr val="FFFFFF"/>
-          </a:solidFill>
-          <a:ln w="12700">
-            <a:solidFill>
-              <a:schemeClr val="tx1">
-                <a:lumMod val="85000"/>
-                <a:lumOff val="15000"/>
-              </a:schemeClr>
-            </a:solidFill>
-          </a:ln>
-        </p:spPr>
-        <p:txBody>
-          <a:bodyPr wrap="square" tIns="90000" anchor="ctr" anchorCtr="1">
-            <a:noAutofit/>
-          </a:bodyPr>
-          <a:lstStyle/>
-          <a:p>
-            <a:pPr algn="ctr">
-              <a:lnSpc>
-                <a:spcPts val="1300"/>
-              </a:lnSpc>
-              <a:buNone/>
-            </a:pPr>
-            <a:r>
-              <a:rPr lang="en-GB" sz="1200" noProof="0" dirty="0">
-                <a:solidFill>
-                  <a:schemeClr val="tx1">
-                    <a:lumMod val="85000"/>
-                    <a:lumOff val="15000"/>
-                  </a:schemeClr>
-                </a:solidFill>
-                <a:latin typeface="+mj-lt"/>
-              </a:rPr>
-              <a:t>What is required in the organisation to deliver this? </a:t>
-            </a:r>
-            <a:r>
-              <a:rPr lang="en-GB" sz="1200" i="1" noProof="0" dirty="0">
-                <a:solidFill>
-                  <a:schemeClr val="tx1">
-                    <a:lumMod val="85000"/>
-                    <a:lumOff val="15000"/>
-                  </a:schemeClr>
-                </a:solidFill>
-                <a:latin typeface="+mj-lt"/>
-              </a:rPr>
-              <a:t>(People, process, data, enablement) </a:t>
-            </a:r>
-          </a:p>
-        </p:txBody>
-      </p:sp>
-      <p:sp>
-        <p:nvSpPr>
-          <p:cNvPr id="20" name="Rechthoek: afgeronde hoeken 19">
-            <a:extLst>
-              <a:ext uri="{FF2B5EF4-FFF2-40B4-BE49-F238E27FC236}">
-                <a16:creationId xmlns:a16="http://schemas.microsoft.com/office/drawing/2014/main" id="{9C8CD429-2147-65D1-3EBD-C9F632DCF267}"/>
-              </a:ext>
-            </a:extLst>
-          </p:cNvPr>
-          <p:cNvSpPr/>
-          <p:nvPr/>
-        </p:nvSpPr>
-        <p:spPr>
-          <a:xfrm>
-            <a:off x="5200736" y="1596283"/>
-            <a:ext cx="1790526" cy="626416"/>
-          </a:xfrm>
-          <a:prstGeom prst="roundRect">
-            <a:avLst/>
-          </a:prstGeom>
-          <a:solidFill>
-            <a:schemeClr val="tx1">
-              <a:lumMod val="85000"/>
-              <a:lumOff val="15000"/>
-            </a:schemeClr>
-          </a:solidFill>
-          <a:ln>
-            <a:noFill/>
-          </a:ln>
-        </p:spPr>
-        <p:txBody>
-          <a:bodyPr anchor="ctr" anchorCtr="1">
-            <a:normAutofit/>
-          </a:bodyPr>
-          <a:lstStyle/>
-          <a:p>
-            <a:pPr algn="ctr">
-              <a:buNone/>
-            </a:pPr>
-            <a:r>
-              <a:rPr lang="en-GB" sz="1400" b="1" noProof="0" dirty="0">
-                <a:solidFill>
-                  <a:srgbClr val="FFFFFF"/>
-                </a:solidFill>
-                <a:latin typeface="DM Sans" pitchFamily="2" charset="0"/>
-              </a:rPr>
-              <a:t>CAPABILITIES</a:t>
-            </a:r>
-          </a:p>
-        </p:txBody>
-      </p:sp>
+              </a:ln>
+            </p:spPr>
+            <p:txBody>
+              <a:bodyPr wrap="square" lIns="36000" tIns="90000" rIns="36000" anchor="ctr" anchorCtr="1">
+                <a:noAutofit/>
+              </a:bodyPr>
+              <a:lstStyle/>
+              <a:p>
+                <a:pPr algn="ctr">
+                  <a:buNone/>
+                </a:pPr>
+                <a:r>
+                  <a:rPr lang="en-GB" sz="1400" noProof="0" dirty="0">
+                    <a:solidFill>
+                      <a:schemeClr val="tx1">
+                        <a:lumMod val="85000"/>
+                        <a:lumOff val="15000"/>
+                      </a:schemeClr>
+                    </a:solidFill>
+                    <a:latin typeface="+mj-lt"/>
+                  </a:rPr>
+                  <a:t>What is required in the organisation to deliver this? </a:t>
+                </a:r>
+                <a:br>
+                  <a:rPr lang="en-GB" sz="1400" noProof="0" dirty="0">
+                    <a:solidFill>
+                      <a:schemeClr val="tx1">
+                        <a:lumMod val="85000"/>
+                        <a:lumOff val="15000"/>
+                      </a:schemeClr>
+                    </a:solidFill>
+                    <a:latin typeface="+mj-lt"/>
+                  </a:rPr>
+                </a:br>
+                <a:r>
+                  <a:rPr lang="en-GB" sz="1400" i="1" noProof="0" dirty="0">
+                    <a:solidFill>
+                      <a:schemeClr val="tx1">
+                        <a:lumMod val="85000"/>
+                        <a:lumOff val="15000"/>
+                      </a:schemeClr>
+                    </a:solidFill>
+                    <a:latin typeface="+mj-lt"/>
+                  </a:rPr>
+                  <a:t>(People, process, </a:t>
+                </a:r>
+                <a:br>
+                  <a:rPr lang="en-GB" sz="1400" i="1" noProof="0" dirty="0">
+                    <a:solidFill>
+                      <a:schemeClr val="tx1">
+                        <a:lumMod val="85000"/>
+                        <a:lumOff val="15000"/>
+                      </a:schemeClr>
+                    </a:solidFill>
+                    <a:latin typeface="+mj-lt"/>
+                  </a:rPr>
+                </a:br>
+                <a:r>
+                  <a:rPr lang="en-GB" sz="1400" i="1" noProof="0" dirty="0">
+                    <a:solidFill>
+                      <a:schemeClr val="tx1">
+                        <a:lumMod val="85000"/>
+                        <a:lumOff val="15000"/>
+                      </a:schemeClr>
+                    </a:solidFill>
+                    <a:latin typeface="+mj-lt"/>
+                  </a:rPr>
+                  <a:t>enablement, data, tech) </a:t>
+                </a:r>
+              </a:p>
+            </p:txBody>
+          </p:sp>
+          <p:sp>
+            <p:nvSpPr>
+              <p:cNvPr id="20" name="Rechthoek: afgeronde hoeken 19">
+                <a:extLst>
+                  <a:ext uri="{FF2B5EF4-FFF2-40B4-BE49-F238E27FC236}">
+                    <a16:creationId xmlns:a16="http://schemas.microsoft.com/office/drawing/2014/main" id="{9C8CD429-2147-65D1-3EBD-C9F632DCF267}"/>
+                  </a:ext>
+                </a:extLst>
+              </p:cNvPr>
+              <p:cNvSpPr/>
+              <p:nvPr/>
+            </p:nvSpPr>
+            <p:spPr>
+              <a:xfrm>
+                <a:off x="5107118" y="1596283"/>
+                <a:ext cx="2081837" cy="626416"/>
+              </a:xfrm>
+              <a:prstGeom prst="roundRect">
+                <a:avLst/>
+              </a:prstGeom>
+              <a:solidFill>
+                <a:schemeClr val="tx1">
+                  <a:lumMod val="85000"/>
+                  <a:lumOff val="15000"/>
+                </a:schemeClr>
+              </a:solidFill>
+              <a:ln>
+                <a:noFill/>
+              </a:ln>
+            </p:spPr>
+            <p:txBody>
+              <a:bodyPr lIns="36000" rIns="36000" anchor="ctr" anchorCtr="1">
+                <a:normAutofit/>
+              </a:bodyPr>
+              <a:lstStyle/>
+              <a:p>
+                <a:pPr algn="ctr">
+                  <a:buNone/>
+                </a:pPr>
+                <a:r>
+                  <a:rPr lang="en-GB" sz="1400" b="1" noProof="0" dirty="0">
+                    <a:solidFill>
+                      <a:srgbClr val="FFFFFF"/>
+                    </a:solidFill>
+                    <a:latin typeface="DM Sans" pitchFamily="2" charset="0"/>
+                  </a:rPr>
+                  <a:t>CAPABILITIES</a:t>
+                </a:r>
+              </a:p>
+            </p:txBody>
+          </p:sp>
+        </p:grpSp>
+      </p:grpSp>
       <p:pic>
         <p:nvPicPr>
           <p:cNvPr id="35" name="Afbeelding 34" descr="Afbeelding met tekst, schermopname, Lettertype, ontwerp&#10;&#10;Door AI gegenereerde inhoud is mogelijk onjuist.">
@@ -10549,7 +9254,7 @@
 </p:sld>
 </file>
 
-<file path=ppt/slides/slide7.xml><?xml version="1.0" encoding="utf-8"?>
+<file path=ppt/slides/slide6.xml><?xml version="1.0" encoding="utf-8"?>
 <p:sld xmlns:a="http://schemas.openxmlformats.org/drawingml/2006/main" xmlns:r="http://schemas.openxmlformats.org/officeDocument/2006/relationships" xmlns:p="http://schemas.openxmlformats.org/presentationml/2006/main">
   <p:cSld>
     <p:spTree>
@@ -10574,10 +9279,10 @@
       </p:grpSpPr>
       <p:sp>
         <p:nvSpPr>
-          <p:cNvPr id="4" name="Rechthoek 3">
-            <a:extLst>
-              <a:ext uri="{FF2B5EF4-FFF2-40B4-BE49-F238E27FC236}">
-                <a16:creationId xmlns:a16="http://schemas.microsoft.com/office/drawing/2014/main" id="{9AD835D3-F13B-6DA4-DB6D-F3E451993735}"/>
+          <p:cNvPr id="2" name="Rechthoek 1">
+            <a:extLst>
+              <a:ext uri="{FF2B5EF4-FFF2-40B4-BE49-F238E27FC236}">
+                <a16:creationId xmlns:a16="http://schemas.microsoft.com/office/drawing/2014/main" id="{4F281C37-C738-14E4-D9BA-372E8CE62DC3}"/>
               </a:ext>
             </a:extLst>
           </p:cNvPr>
@@ -10586,8 +9291,8 @@
         </p:nvSpPr>
         <p:spPr>
           <a:xfrm>
-            <a:off x="1874783" y="409252"/>
-            <a:ext cx="8442435" cy="4509590"/>
+            <a:off x="2509695" y="409251"/>
+            <a:ext cx="7162450" cy="4619949"/>
           </a:xfrm>
           <a:prstGeom prst="rect">
             <a:avLst/>
@@ -10620,7 +9325,7 @@
           <a:lstStyle/>
           <a:p>
             <a:pPr algn="ctr"/>
-            <a:endParaRPr lang="en-GB"/>
+            <a:endParaRPr lang="en-GB" dirty="0"/>
           </a:p>
         </p:txBody>
       </p:sp>
@@ -10686,7 +9391,7 @@
         <p:spPr>
           <a:xfrm flipH="1" flipV="1">
             <a:off x="7157545" y="1678877"/>
-            <a:ext cx="558660" cy="1543006"/>
+            <a:ext cx="1056696" cy="1543006"/>
           </a:xfrm>
           <a:prstGeom prst="straightConnector1">
             <a:avLst/>
@@ -10736,8 +9441,8 @@
         </p:nvCxnSpPr>
         <p:spPr>
           <a:xfrm flipH="1">
-            <a:off x="4479442" y="1678877"/>
-            <a:ext cx="555013" cy="1543006"/>
+            <a:off x="3972221" y="1678877"/>
+            <a:ext cx="1062234" cy="1543006"/>
           </a:xfrm>
           <a:prstGeom prst="straightConnector1">
             <a:avLst/>
@@ -10785,8 +9490,8 @@
         </p:nvCxnSpPr>
         <p:spPr>
           <a:xfrm>
-            <a:off x="5540987" y="3535091"/>
-            <a:ext cx="1113673" cy="0"/>
+            <a:off x="5033766" y="3535091"/>
+            <a:ext cx="2118930" cy="0"/>
           </a:xfrm>
           <a:prstGeom prst="straightConnector1">
             <a:avLst/>
@@ -10830,8 +9535,8 @@
         </p:nvSpPr>
         <p:spPr>
           <a:xfrm>
-            <a:off x="5124485" y="1961959"/>
-            <a:ext cx="1943030" cy="743156"/>
+            <a:off x="5124485" y="1870519"/>
+            <a:ext cx="1943030" cy="1032378"/>
           </a:xfrm>
           <a:prstGeom prst="roundRect">
             <a:avLst/>
@@ -10849,19 +9554,16 @@
           </a:ln>
         </p:spPr>
         <p:txBody>
-          <a:bodyPr wrap="square" anchor="ctr" anchorCtr="1">
+          <a:bodyPr wrap="square" tIns="144000" anchor="ctr" anchorCtr="1">
             <a:normAutofit/>
           </a:bodyPr>
           <a:lstStyle/>
           <a:p>
             <a:pPr algn="ctr">
-              <a:lnSpc>
-                <a:spcPts val="1300"/>
-              </a:lnSpc>
               <a:buNone/>
             </a:pPr>
             <a:r>
-              <a:rPr lang="en-GB" sz="1200" noProof="0" dirty="0">
+              <a:rPr lang="en-GB" sz="1400" noProof="0" dirty="0">
                 <a:solidFill>
                   <a:schemeClr val="tx1">
                     <a:lumMod val="85000"/>
@@ -10921,7 +9623,24 @@
                 </a:solidFill>
                 <a:latin typeface="DM Sans" pitchFamily="2" charset="0"/>
               </a:rPr>
-              <a:t>Single Rulebook</a:t>
+              <a:t>SINGLE </a:t>
+            </a:r>
+            <a:br>
+              <a:rPr lang="en-GB" sz="1400" b="1" noProof="0" dirty="0">
+                <a:solidFill>
+                  <a:srgbClr val="FFFFFF"/>
+                </a:solidFill>
+                <a:latin typeface="DM Sans" pitchFamily="2" charset="0"/>
+              </a:rPr>
+            </a:br>
+            <a:r>
+              <a:rPr lang="en-GB" sz="1400" b="1" noProof="0" dirty="0">
+                <a:solidFill>
+                  <a:srgbClr val="FFFFFF"/>
+                </a:solidFill>
+                <a:latin typeface="DM Sans" pitchFamily="2" charset="0"/>
+              </a:rPr>
+              <a:t>RULEBOOK</a:t>
             </a:r>
           </a:p>
         </p:txBody>
@@ -10940,8 +9659,8 @@
         </p:nvSpPr>
         <p:spPr>
           <a:xfrm>
-            <a:off x="6744690" y="3818173"/>
-            <a:ext cx="1943030" cy="743156"/>
+            <a:off x="7242726" y="3726733"/>
+            <a:ext cx="1943030" cy="1032378"/>
           </a:xfrm>
           <a:prstGeom prst="roundRect">
             <a:avLst/>
@@ -10959,19 +9678,16 @@
           </a:ln>
         </p:spPr>
         <p:txBody>
-          <a:bodyPr wrap="square" anchor="ctr" anchorCtr="1">
+          <a:bodyPr wrap="square" tIns="144000" anchor="ctr" anchorCtr="1">
             <a:normAutofit/>
           </a:bodyPr>
           <a:lstStyle/>
           <a:p>
             <a:pPr algn="ctr">
-              <a:lnSpc>
-                <a:spcPts val="1300"/>
-              </a:lnSpc>
               <a:buNone/>
             </a:pPr>
             <a:r>
-              <a:rPr lang="en-GB" sz="1200" noProof="0" dirty="0">
+              <a:rPr lang="en-GB" sz="1400" noProof="0" dirty="0">
                 <a:solidFill>
                   <a:schemeClr val="tx1">
                     <a:lumMod val="85000"/>
@@ -10999,7 +9715,7 @@
         </p:nvSpPr>
         <p:spPr>
           <a:xfrm>
-            <a:off x="6654660" y="3221883"/>
+            <a:off x="7152696" y="3221883"/>
             <a:ext cx="2123090" cy="626416"/>
           </a:xfrm>
           <a:prstGeom prst="roundRect">
@@ -11031,7 +9747,7 @@
                 </a:solidFill>
                 <a:latin typeface="DM Sans" pitchFamily="2" charset="0"/>
               </a:rPr>
-              <a:t>Governance Dividend</a:t>
+              <a:t>GOVERNANCE DIVIDEND</a:t>
             </a:r>
           </a:p>
         </p:txBody>
@@ -11050,8 +9766,8 @@
         </p:nvSpPr>
         <p:spPr>
           <a:xfrm>
-            <a:off x="3507927" y="3818173"/>
-            <a:ext cx="1943030" cy="743156"/>
+            <a:off x="3000706" y="3726733"/>
+            <a:ext cx="1943030" cy="1032378"/>
           </a:xfrm>
           <a:prstGeom prst="roundRect">
             <a:avLst/>
@@ -11069,19 +9785,16 @@
           </a:ln>
         </p:spPr>
         <p:txBody>
-          <a:bodyPr wrap="square" anchor="ctr" anchorCtr="1">
+          <a:bodyPr wrap="square" tIns="144000" anchor="ctr" anchorCtr="1">
             <a:normAutofit/>
           </a:bodyPr>
           <a:lstStyle/>
           <a:p>
             <a:pPr algn="ctr">
-              <a:lnSpc>
-                <a:spcPts val="1300"/>
-              </a:lnSpc>
               <a:buNone/>
             </a:pPr>
             <a:r>
-              <a:rPr lang="en-GB" sz="1200" noProof="0" dirty="0">
+              <a:rPr lang="en-GB" sz="1400" noProof="0" dirty="0">
                 <a:solidFill>
                   <a:schemeClr val="tx1">
                     <a:lumMod val="85000"/>
@@ -11109,7 +9822,7 @@
         </p:nvSpPr>
         <p:spPr>
           <a:xfrm>
-            <a:off x="3417897" y="3221883"/>
+            <a:off x="2910676" y="3221883"/>
             <a:ext cx="2123090" cy="626416"/>
           </a:xfrm>
           <a:prstGeom prst="roundRect">
@@ -11141,7 +9854,24 @@
                 </a:solidFill>
                 <a:latin typeface="DM Sans" pitchFamily="2" charset="0"/>
               </a:rPr>
-              <a:t>Trust Premium</a:t>
+              <a:t>TRUST </a:t>
+            </a:r>
+            <a:br>
+              <a:rPr lang="en-GB" sz="1400" b="1" noProof="0" dirty="0">
+                <a:solidFill>
+                  <a:srgbClr val="FFFFFF"/>
+                </a:solidFill>
+                <a:latin typeface="DM Sans" pitchFamily="2" charset="0"/>
+              </a:rPr>
+            </a:br>
+            <a:r>
+              <a:rPr lang="en-GB" sz="1400" b="1" noProof="0" dirty="0">
+                <a:solidFill>
+                  <a:srgbClr val="FFFFFF"/>
+                </a:solidFill>
+                <a:latin typeface="DM Sans" pitchFamily="2" charset="0"/>
+              </a:rPr>
+              <a:t>PREMIUM</a:t>
             </a:r>
           </a:p>
         </p:txBody>
@@ -11160,8 +9890,8 @@
         </p:nvSpPr>
         <p:spPr>
           <a:xfrm>
-            <a:off x="3161948" y="2326714"/>
-            <a:ext cx="1616557" cy="259943"/>
+            <a:off x="2910675" y="1987119"/>
+            <a:ext cx="1676333" cy="433837"/>
           </a:xfrm>
           <a:prstGeom prst="rect">
             <a:avLst/>
@@ -11181,7 +9911,7 @@
               <a:buNone/>
             </a:pPr>
             <a:r>
-              <a:rPr lang="en-GB" sz="1200" i="1" noProof="0" dirty="0">
+              <a:rPr lang="en-GB" sz="1400" i="1" noProof="0" dirty="0">
                 <a:solidFill>
                   <a:schemeClr val="tx1">
                     <a:lumMod val="85000"/>
@@ -11208,8 +9938,8 @@
         </p:nvSpPr>
         <p:spPr>
           <a:xfrm>
-            <a:off x="7476437" y="2253258"/>
-            <a:ext cx="1446025" cy="426655"/>
+            <a:off x="7604991" y="1987119"/>
+            <a:ext cx="1675644" cy="433837"/>
           </a:xfrm>
           <a:prstGeom prst="rect">
             <a:avLst/>
@@ -11229,7 +9959,7 @@
               <a:buNone/>
             </a:pPr>
             <a:r>
-              <a:rPr lang="en-GB" sz="1200" i="1" noProof="0" dirty="0">
+              <a:rPr lang="en-GB" sz="1400" i="1" noProof="0" dirty="0">
                 <a:solidFill>
                   <a:schemeClr val="tx1">
                     <a:lumMod val="85000"/>
@@ -11256,8 +9986,8 @@
         </p:nvSpPr>
         <p:spPr>
           <a:xfrm>
-            <a:off x="5445931" y="3634534"/>
-            <a:ext cx="1303785" cy="426655"/>
+            <a:off x="5444108" y="3634534"/>
+            <a:ext cx="1303785" cy="433837"/>
           </a:xfrm>
           <a:prstGeom prst="rect">
             <a:avLst/>
@@ -11277,7 +10007,7 @@
               <a:buNone/>
             </a:pPr>
             <a:r>
-              <a:rPr lang="en-GB" sz="1200" i="1" noProof="0" dirty="0">
+              <a:rPr lang="en-GB" sz="1400" i="1" noProof="0" dirty="0">
                 <a:solidFill>
                   <a:schemeClr val="tx1">
                     <a:lumMod val="85000"/>
@@ -11333,7 +10063,7 @@
 </p:sld>
 </file>
 
-<file path=ppt/slides/slide8.xml><?xml version="1.0" encoding="utf-8"?>
+<file path=ppt/slides/slide7.xml><?xml version="1.0" encoding="utf-8"?>
 <p:sld xmlns:a="http://schemas.openxmlformats.org/drawingml/2006/main" xmlns:r="http://schemas.openxmlformats.org/officeDocument/2006/relationships" xmlns:p="http://schemas.openxmlformats.org/presentationml/2006/main">
   <p:cSld>
     <p:spTree>

--- a/input/AI Transformation framework for European CEO’s.pptx
+++ b/input/AI Transformation framework for European CEO’s.pptx
@@ -331,7 +331,7 @@
           <a:p>
             <a:fld id="{FAB7A3DB-122E-499C-AAFB-3D4665CBCADB}" type="datetimeFigureOut">
               <a:rPr lang="en-GB" smtClean="0"/>
-              <a:t>05/04/2026</a:t>
+              <a:t>06/04/2026</a:t>
             </a:fld>
             <a:endParaRPr lang="en-GB"/>
           </a:p>
@@ -1480,7 +1480,7 @@
           <a:p>
             <a:fld id="{7E530143-BC45-40DA-908E-84B30ACFDA34}" type="datetimeFigureOut">
               <a:rPr lang="en-GB" smtClean="0"/>
-              <a:t>05/04/2026</a:t>
+              <a:t>06/04/2026</a:t>
             </a:fld>
             <a:endParaRPr lang="en-GB"/>
           </a:p>
@@ -1680,7 +1680,7 @@
           <a:p>
             <a:fld id="{7E530143-BC45-40DA-908E-84B30ACFDA34}" type="datetimeFigureOut">
               <a:rPr lang="en-GB" smtClean="0"/>
-              <a:t>05/04/2026</a:t>
+              <a:t>06/04/2026</a:t>
             </a:fld>
             <a:endParaRPr lang="en-GB"/>
           </a:p>
@@ -1890,7 +1890,7 @@
           <a:p>
             <a:fld id="{7E530143-BC45-40DA-908E-84B30ACFDA34}" type="datetimeFigureOut">
               <a:rPr lang="en-GB" smtClean="0"/>
-              <a:t>05/04/2026</a:t>
+              <a:t>06/04/2026</a:t>
             </a:fld>
             <a:endParaRPr lang="en-GB"/>
           </a:p>
@@ -2514,7 +2514,7 @@
           <a:p>
             <a:fld id="{7E530143-BC45-40DA-908E-84B30ACFDA34}" type="datetimeFigureOut">
               <a:rPr lang="en-GB" smtClean="0"/>
-              <a:t>05/04/2026</a:t>
+              <a:t>06/04/2026</a:t>
             </a:fld>
             <a:endParaRPr lang="en-GB"/>
           </a:p>
@@ -2790,7 +2790,7 @@
           <a:p>
             <a:fld id="{7E530143-BC45-40DA-908E-84B30ACFDA34}" type="datetimeFigureOut">
               <a:rPr lang="en-GB" smtClean="0"/>
-              <a:t>05/04/2026</a:t>
+              <a:t>06/04/2026</a:t>
             </a:fld>
             <a:endParaRPr lang="en-GB"/>
           </a:p>
@@ -3058,7 +3058,7 @@
           <a:p>
             <a:fld id="{7E530143-BC45-40DA-908E-84B30ACFDA34}" type="datetimeFigureOut">
               <a:rPr lang="en-GB" smtClean="0"/>
-              <a:t>05/04/2026</a:t>
+              <a:t>06/04/2026</a:t>
             </a:fld>
             <a:endParaRPr lang="en-GB"/>
           </a:p>
@@ -3473,7 +3473,7 @@
           <a:p>
             <a:fld id="{7E530143-BC45-40DA-908E-84B30ACFDA34}" type="datetimeFigureOut">
               <a:rPr lang="en-GB" smtClean="0"/>
-              <a:t>05/04/2026</a:t>
+              <a:t>06/04/2026</a:t>
             </a:fld>
             <a:endParaRPr lang="en-GB"/>
           </a:p>
@@ -3615,7 +3615,7 @@
           <a:p>
             <a:fld id="{7E530143-BC45-40DA-908E-84B30ACFDA34}" type="datetimeFigureOut">
               <a:rPr lang="en-GB" smtClean="0"/>
-              <a:t>05/04/2026</a:t>
+              <a:t>06/04/2026</a:t>
             </a:fld>
             <a:endParaRPr lang="en-GB"/>
           </a:p>
@@ -3728,7 +3728,7 @@
           <a:p>
             <a:fld id="{7E530143-BC45-40DA-908E-84B30ACFDA34}" type="datetimeFigureOut">
               <a:rPr lang="en-GB" smtClean="0"/>
-              <a:t>05/04/2026</a:t>
+              <a:t>06/04/2026</a:t>
             </a:fld>
             <a:endParaRPr lang="en-GB"/>
           </a:p>
@@ -4041,7 +4041,7 @@
           <a:p>
             <a:fld id="{7E530143-BC45-40DA-908E-84B30ACFDA34}" type="datetimeFigureOut">
               <a:rPr lang="en-GB" smtClean="0"/>
-              <a:t>05/04/2026</a:t>
+              <a:t>06/04/2026</a:t>
             </a:fld>
             <a:endParaRPr lang="en-GB"/>
           </a:p>
@@ -4330,7 +4330,7 @@
           <a:p>
             <a:fld id="{7E530143-BC45-40DA-908E-84B30ACFDA34}" type="datetimeFigureOut">
               <a:rPr lang="en-GB" smtClean="0"/>
-              <a:t>05/04/2026</a:t>
+              <a:t>06/04/2026</a:t>
             </a:fld>
             <a:endParaRPr lang="en-GB"/>
           </a:p>
@@ -4573,7 +4573,7 @@
           <a:p>
             <a:fld id="{7E530143-BC45-40DA-908E-84B30ACFDA34}" type="datetimeFigureOut">
               <a:rPr lang="en-GB" smtClean="0"/>
-              <a:t>05/04/2026</a:t>
+              <a:t>06/04/2026</a:t>
             </a:fld>
             <a:endParaRPr lang="en-GB"/>
           </a:p>
@@ -9279,10 +9279,10 @@
       </p:grpSpPr>
       <p:sp>
         <p:nvSpPr>
-          <p:cNvPr id="2" name="Rechthoek 1">
-            <a:extLst>
-              <a:ext uri="{FF2B5EF4-FFF2-40B4-BE49-F238E27FC236}">
-                <a16:creationId xmlns:a16="http://schemas.microsoft.com/office/drawing/2014/main" id="{4F281C37-C738-14E4-D9BA-372E8CE62DC3}"/>
+          <p:cNvPr id="4" name="Rechthoek 3">
+            <a:extLst>
+              <a:ext uri="{FF2B5EF4-FFF2-40B4-BE49-F238E27FC236}">
+                <a16:creationId xmlns:a16="http://schemas.microsoft.com/office/drawing/2014/main" id="{E656BF4B-30F9-BF3D-DBA2-480FF3018B94}"/>
               </a:ext>
             </a:extLst>
           </p:cNvPr>
@@ -9291,8 +9291,8 @@
         </p:nvSpPr>
         <p:spPr>
           <a:xfrm>
-            <a:off x="2509695" y="409251"/>
-            <a:ext cx="7162450" cy="4619949"/>
+            <a:off x="2103120" y="409251"/>
+            <a:ext cx="8006080" cy="4769872"/>
           </a:xfrm>
           <a:prstGeom prst="rect">
             <a:avLst/>
